--- a/demo_session/deck_zwfs.pptx
+++ b/demo_session/deck_zwfs.pptx
@@ -14,6 +14,7 @@
     <p:sldId id="262" r:id="rId13"/>
     <p:sldId id="263" r:id="rId14"/>
     <p:sldId id="264" r:id="rId15"/>
+    <p:sldId id="265" r:id="rId16"/>
   </p:sldIdLst>
   <p:sldSz cx="12191695" cy="6858000" type="screen4x3"/>
   <p:notesSz cx="6858000" cy="9144000"/>
@@ -3231,7 +3232,7 @@
 </p:sld>
 </file>
 
-<file path=ppt/slides/slide2.xml><?xml version="1.0" encoding="utf-8"?>
+<file path=ppt/slides/slide10.xml><?xml version="1.0" encoding="utf-8"?>
 <p:sld xmlns:a="http://schemas.openxmlformats.org/drawingml/2006/main" xmlns:p="http://schemas.openxmlformats.org/presentationml/2006/main" xmlns:r="http://schemas.openxmlformats.org/officeDocument/2006/relationships">
   <p:cSld>
     <p:spTree>
@@ -3275,7 +3276,7 @@
                 </a:solidFill>
                 <a:latin typeface="Arial"/>
               </a:rPr>
-              <a:t>The idea: the beam interferes with its own core</a:t>
+              <a:t>Provenance and records</a:t>
             </a:r>
           </a:p>
           <a:p>
@@ -3291,7 +3292,7 @@
                 </a:solidFill>
                 <a:latin typeface="Arial"/>
               </a:rPr>
-              <a:t>An etched dimple at the focus phase-shifts the heart of the beam; that light spreads back over the pupil as a built-in reference</a:t>
+              <a:t>Every number re-derives from a committed script</a:t>
             </a:r>
           </a:p>
         </p:txBody>
@@ -3349,7 +3350,7 @@
         <p:spPr>
           <a:xfrm>
             <a:off x="411480" y="1298448"/>
-            <a:ext cx="5806440" cy="274320"/>
+            <a:ext cx="11368735" cy="274320"/>
           </a:xfrm>
           <a:prstGeom prst="rect">
             <a:avLst/>
@@ -3368,13 +3369,13 @@
               </a:spcAft>
             </a:pPr>
             <a:r>
-              <a:rPr sz="1200" b="0">
+              <a:rPr sz="1500" b="0">
                 <a:solidFill>
                   <a:srgbClr val="282828"/>
                 </a:solidFill>
                 <a:latin typeface="Arial"/>
               </a:rPr>
-              <a:t>•  One transparent plate, one tiny etched spot.  At the focus, the core of the beam passes through the dimple and picks up a quarter-wave phase shift; everything outside misses it.  The shifted core light spreads back across the whole pupil image and interferes with the rest — a common-path interferometer with no second arm.</a:t>
+              <a:t>•  Campaign: templates/40_benches/zwfs_dm96 — zwfs_s1.m (five gates: sampling, superposition, reference wave, response, no-dimple control), zwfs_mask.m, zwfs_s1_figs.m (the figures here), zwfs_s1_report.txt, README with the findings chain; plan and rulings in macos/BRIEF_zwfs_campaign.md.</a:t>
             </a:r>
           </a:p>
           <a:p>
@@ -3384,13 +3385,13 @@
               </a:spcAft>
             </a:pPr>
             <a:r>
-              <a:rPr sz="1200" b="0">
+              <a:rPr sz="1500" b="0">
                 <a:solidFill>
                   <a:srgbClr val="282828"/>
                 </a:solidFill>
                 <a:latin typeface="Arial"/>
               </a:rPr>
-              <a:t>•  Pupil brightness becomes a phase map.  Near a quarter wave of shift, the camera intensity is close to linear in the wavefront: one frame per measurement, no moving parts, no polarization optics.</a:t>
+              <a:t>•  Findings earned in S1, recorded so they are not re-derived: the stock detector leg is ray-traced (geometric) at the mask plane — a λ/D-scale mask needs the reference-sphere diffraction bracket (now a builder option, default off, existing decks bit-identical, suites green); the mask must sit at the optimized lens's real focus (−5.58 mm from the thin-lens seed, found by a peak scan the gate re-runs); the camera-to-DM frame must come from traced rays — a support-area estimate was 25% off and read a fine test pattern as "no response."</a:t>
             </a:r>
           </a:p>
           <a:p>
@@ -3400,101 +3401,15 @@
               </a:spcAft>
             </a:pPr>
             <a:r>
-              <a:rPr sz="1200" b="0">
+              <a:rPr sz="1500" b="0">
                 <a:solidFill>
                   <a:srgbClr val="282828"/>
                 </a:solidFill>
                 <a:latin typeface="Arial"/>
               </a:rPr>
-              <a:t>•  The two prices, both already measured or scheduled: the reference is made from the beam itself, so the slowest shapes partially cancel against themselves (defocus reads at 0.32 of its true size — measured); and the linear reading holds only for small departures — the range limit is a scheduled measurement.</a:t>
-            </a:r>
-          </a:p>
-        </p:txBody>
-      </p:sp>
-      <p:pic>
-        <p:nvPicPr>
-          <p:cNvPr id="5" name="Picture 4" descr="zwfs_mask_fig.png"/>
-          <p:cNvPicPr>
-            <a:picLocks noChangeAspect="1"/>
-          </p:cNvPicPr>
-          <p:nvPr/>
-        </p:nvPicPr>
-        <p:blipFill>
-          <a:blip r:embed="rId2"/>
-          <a:stretch>
-            <a:fillRect/>
-          </a:stretch>
-        </p:blipFill>
-        <p:spPr>
-          <a:xfrm>
-            <a:off x="6926164" y="1298448"/>
-            <a:ext cx="4344230" cy="1891792"/>
-          </a:xfrm>
-          <a:prstGeom prst="rect">
-            <a:avLst/>
-          </a:prstGeom>
-        </p:spPr>
-      </p:pic>
-      <p:sp>
-        <p:nvSpPr>
-          <p:cNvPr id="6" name="TextBox 5"/>
-          <p:cNvSpPr txBox="1"/>
-          <p:nvPr/>
-        </p:nvSpPr>
-        <p:spPr>
-          <a:xfrm>
-            <a:off x="6400800" y="3208528"/>
-            <a:ext cx="5394960" cy="394208"/>
-          </a:xfrm>
-          <a:prstGeom prst="rect">
-            <a:avLst/>
-          </a:prstGeom>
-          <a:noFill/>
-        </p:spPr>
-        <p:txBody>
-          <a:bodyPr wrap="square">
-            <a:spAutoFit/>
-          </a:bodyPr>
-          <a:lstStyle/>
-          <a:p>
-            <a:pPr algn="ctr">
-              <a:spcAft>
-                <a:spcPts val="0"/>
-              </a:spcAft>
-            </a:pPr>
-            <a:r>
-              <a:rPr sz="1000" b="0">
-                <a:solidFill>
-                  <a:srgbClr val="6E6E6E"/>
-                </a:solidFill>
-                <a:latin typeface="Arial"/>
-              </a:rPr>
-              <a:t>The focal spot with the dimple footprint on its core (left); the mask itself — a 1.57 rad phase disk, edges gray from area-weighted supersampling (right).</a:t>
-            </a:r>
-          </a:p>
-        </p:txBody>
-      </p:sp>
-      <p:sp>
-        <p:nvSpPr>
-          <p:cNvPr id="7" name="TextBox 6"/>
-          <p:cNvSpPr txBox="1"/>
-          <p:nvPr/>
-        </p:nvSpPr>
-        <p:spPr>
-          <a:xfrm>
-            <a:off x="6400800" y="3639312"/>
-            <a:ext cx="5394960" cy="274320"/>
-          </a:xfrm>
-          <a:prstGeom prst="rect">
-            <a:avLst/>
-          </a:prstGeom>
-          <a:noFill/>
-        </p:spPr>
-        <p:txBody>
-          <a:bodyPr wrap="square">
-            <a:spAutoFit/>
-          </a:bodyPr>
-          <a:lstStyle/>
+              <a:t>•  Sign convention pinned by gate: surface height = −φ·λ/4π on this deck (single reflection doubles height).</a:t>
+            </a:r>
+          </a:p>
           <a:p>
             <a:pPr>
               <a:spcAft>
@@ -3502,13 +3417,61 @@
               </a:spcAft>
             </a:pPr>
             <a:r>
-              <a:rPr sz="1050" b="0">
-                <a:solidFill>
-                  <a:srgbClr val="6E6E6E"/>
+              <a:rPr sz="1500" b="0">
+                <a:solidFill>
+                  <a:srgbClr val="282828"/>
                 </a:solidFill>
                 <a:latin typeface="Arial"/>
               </a:rPr>
-              <a:t>The dimple takes 28.0% of the light — the encircled energy a 1.06 λF/D disk should take from a focused spot.</a:t>
+              <a:t>•  Correction trail (kept so it is not re-derived): early defocus readings of 0.54 and 0.32 were PATTERN-RADIUS bias — the source cone fills 74% of the aperture, and truth patterns drawn on the aperture radius overhang the light.  Corrected on the measured illuminated radius: 0.986.  Third frame lesson of the campaign; the campaign README carries all three.</a:t>
+            </a:r>
+          </a:p>
+          <a:p>
+            <a:pPr>
+              <a:spcAft>
+                <a:spcPts val="600"/>
+              </a:spcAft>
+            </a:pPr>
+            <a:r>
+              <a:rPr sz="1500" b="0">
+                <a:solidFill>
+                  <a:srgbClr val="282828"/>
+                </a:solidFill>
+                <a:latin typeface="Arial"/>
+              </a:rPr>
+              <a:t>•  WF-estimate figures: zwfs_wf_figs.m (traced render + triptychs, model 1024 / 193-px camera / 2.0 λF/D spot; cases matched to tg96_wf_figs.m).</a:t>
+            </a:r>
+          </a:p>
+          <a:p>
+            <a:pPr>
+              <a:spcAft>
+                <a:spcPts val="600"/>
+              </a:spcAft>
+            </a:pPr>
+            <a:r>
+              <a:rPr sz="1500" b="0">
+                <a:solidFill>
+                  <a:srgbClr val="282828"/>
+                </a:solidFill>
+                <a:latin typeface="Arial"/>
+              </a:rPr>
+              <a:t>•  Hardware source: "VSG2 Zernike Wavefront Sensor Update -v2" deck, parameters carried in templates/40_benches/vsg_wip/vsg2_params.m §9.</a:t>
+            </a:r>
+          </a:p>
+          <a:p>
+            <a:pPr>
+              <a:spcAft>
+                <a:spcPts val="600"/>
+              </a:spcAft>
+            </a:pPr>
+            <a:r>
+              <a:rPr sz="1500" b="0">
+                <a:solidFill>
+                  <a:srgbClr val="282828"/>
+                </a:solidFill>
+                <a:latin typeface="Arial"/>
+              </a:rPr>
+              <a:t>•  Interferometer comparison column: templates/40_benches/tg_psi_dm96, run 10 (tg96_report.txt).</a:t>
             </a:r>
           </a:p>
         </p:txBody>
@@ -3521,7 +3484,7 @@
 </p:sld>
 </file>
 
-<file path=ppt/slides/slide3.xml><?xml version="1.0" encoding="utf-8"?>
+<file path=ppt/slides/slide2.xml><?xml version="1.0" encoding="utf-8"?>
 <p:sld xmlns:a="http://schemas.openxmlformats.org/drawingml/2006/main" xmlns:p="http://schemas.openxmlformats.org/presentationml/2006/main" xmlns:r="http://schemas.openxmlformats.org/officeDocument/2006/relationships">
   <p:cSld>
     <p:spTree>
@@ -3565,7 +3528,7 @@
                 </a:solidFill>
                 <a:latin typeface="Arial"/>
               </a:rPr>
-              <a:t>The setup: the interferometer's test arm, alone</a:t>
+              <a:t>The idea: the beam interferes with its own core</a:t>
             </a:r>
           </a:p>
           <a:p>
@@ -3581,7 +3544,7 @@
                 </a:solidFill>
                 <a:latin typeface="Arial"/>
               </a:rPr>
-              <a:t>Same source, same splitter, same 700 mm DM leg, same lenses — the reference arm and every polarization element simply removed</a:t>
+              <a:t>An etched dimple at the focus phase-shifts the heart of the beam; that light spreads back over the pupil as a built-in reference</a:t>
             </a:r>
           </a:p>
         </p:txBody>
@@ -3664,7 +3627,7 @@
                 </a:solidFill>
                 <a:latin typeface="Arial"/>
               </a:rPr>
-              <a:t>•  Reused whole: the TG96 bench solved for the 96×96, 1 mm-pitch DM — splitter at 7°, clearance-solved legs, the retuned detector optics.  The dimple sits at the internal focus of the existing detector leg, in the mask seat the bench already carried; the camera still views the DM image.</a:t>
+              <a:t>•  One transparent plate, one tiny etched spot.  At the focus, the core of the beam passes through the dimple and picks up a quarter-wave phase shift; everything outside misses it.  The shifted core light spreads back across the whole pupil image and interferes with the rest — a common-path interferometer with no second arm.</a:t>
             </a:r>
           </a:p>
           <a:p>
@@ -3680,7 +3643,7 @@
                 </a:solidFill>
                 <a:latin typeface="Arial"/>
               </a:rPr>
-              <a:t>•  Removed: the reference flat and its leg; the polarizer, four arm waveplates, output waveplate and analyzer.  Nothing else moves.</a:t>
+              <a:t>•  Pupil brightness becomes a phase map.  Near a quarter wave of shift, the camera intensity is close to linear in the wavefront: one frame per measurement, no moving parts, no polarization optics.</a:t>
             </a:r>
           </a:p>
           <a:p>
@@ -3696,14 +3659,14 @@
                 </a:solidFill>
                 <a:latin typeface="Arial"/>
               </a:rPr>
-              <a:t>•  Why that discipline matters: when the two instruments are scored against each other, the only difference is the sensing principle — not the glass, not the geometry.</a:t>
+              <a:t>•  The two prices: the sensor cannot see piston and dims toward the very lowest spatial frequencies — the reference is made from the beam itself.  Measured so far the cost sits BELOW defocus: defocus itself already reads at 0.99 (2.0 λF/D spot, full resolution).  And the linear reading holds only for small departures — the range limit is a scheduled measurement.</a:t>
             </a:r>
           </a:p>
         </p:txBody>
       </p:sp>
       <p:pic>
         <p:nvPicPr>
-          <p:cNvPr id="5" name="Picture 4" descr="zwfs_layout.png"/>
+          <p:cNvPr id="5" name="Picture 4" descr="zwfs_mask_fig.png"/>
           <p:cNvPicPr>
             <a:picLocks noChangeAspect="1"/>
           </p:cNvPicPr>
@@ -3717,8 +3680,8 @@
         </p:blipFill>
         <p:spPr>
           <a:xfrm>
-            <a:off x="6400800" y="1298448"/>
-            <a:ext cx="5394960" cy="1982197"/>
+            <a:off x="6926164" y="1298448"/>
+            <a:ext cx="4344230" cy="1891792"/>
           </a:xfrm>
           <a:prstGeom prst="rect">
             <a:avLst/>
@@ -3733,7 +3696,7 @@
         </p:nvSpPr>
         <p:spPr>
           <a:xfrm>
-            <a:off x="6400800" y="3298933"/>
+            <a:off x="6400800" y="3208528"/>
             <a:ext cx="5394960" cy="394208"/>
           </a:xfrm>
           <a:prstGeom prst="rect">
@@ -3759,7 +3722,7 @@
                 </a:solidFill>
                 <a:latin typeface="Arial"/>
               </a:rPr>
-              <a:t>The traced train: source and splitter at left, the 96 mm DM on its 700 mm leg, and the detector tail with the dimple at its internal focus.</a:t>
+              <a:t>The focal spot with the dimple footprint on its core (left); the mask itself — a 1.57 rad phase disk, edges gray from area-weighted supersampling (right).</a:t>
             </a:r>
           </a:p>
         </p:txBody>
@@ -3772,7 +3735,297 @@
         </p:nvSpPr>
         <p:spPr>
           <a:xfrm>
-            <a:off x="6400800" y="3729717"/>
+            <a:off x="6400800" y="3639312"/>
+            <a:ext cx="5394960" cy="274320"/>
+          </a:xfrm>
+          <a:prstGeom prst="rect">
+            <a:avLst/>
+          </a:prstGeom>
+          <a:noFill/>
+        </p:spPr>
+        <p:txBody>
+          <a:bodyPr wrap="square">
+            <a:spAutoFit/>
+          </a:bodyPr>
+          <a:lstStyle/>
+          <a:p>
+            <a:pPr>
+              <a:spcAft>
+                <a:spcPts val="600"/>
+              </a:spcAft>
+            </a:pPr>
+            <a:r>
+              <a:rPr sz="1050" b="0">
+                <a:solidFill>
+                  <a:srgbClr val="6E6E6E"/>
+                </a:solidFill>
+                <a:latin typeface="Arial"/>
+              </a:rPr>
+              <a:t>The dimple takes 28.0% of the light — the encircled energy a 1.06 λF/D disk should take from a focused spot.</a:t>
+            </a:r>
+          </a:p>
+        </p:txBody>
+      </p:sp>
+    </p:spTree>
+  </p:cSld>
+  <p:clrMapOvr>
+    <a:masterClrMapping/>
+  </p:clrMapOvr>
+</p:sld>
+</file>
+
+<file path=ppt/slides/slide3.xml><?xml version="1.0" encoding="utf-8"?>
+<p:sld xmlns:a="http://schemas.openxmlformats.org/drawingml/2006/main" xmlns:p="http://schemas.openxmlformats.org/presentationml/2006/main" xmlns:r="http://schemas.openxmlformats.org/officeDocument/2006/relationships">
+  <p:cSld>
+    <p:spTree>
+      <p:nvGrpSpPr>
+        <p:cNvPr id="1" name=""/>
+        <p:cNvGrpSpPr/>
+        <p:nvPr/>
+      </p:nvGrpSpPr>
+      <p:grpSpPr/>
+      <p:sp>
+        <p:nvSpPr>
+          <p:cNvPr id="2" name="TextBox 1"/>
+          <p:cNvSpPr txBox="1"/>
+          <p:nvPr/>
+        </p:nvSpPr>
+        <p:spPr>
+          <a:xfrm>
+            <a:off x="411480" y="201168"/>
+            <a:ext cx="11368735" cy="914400"/>
+          </a:xfrm>
+          <a:prstGeom prst="rect">
+            <a:avLst/>
+          </a:prstGeom>
+          <a:noFill/>
+        </p:spPr>
+        <p:txBody>
+          <a:bodyPr wrap="square">
+            <a:spAutoFit/>
+          </a:bodyPr>
+          <a:lstStyle/>
+          <a:p>
+            <a:pPr>
+              <a:spcAft>
+                <a:spcPts val="400"/>
+              </a:spcAft>
+            </a:pPr>
+            <a:r>
+              <a:rPr sz="2400" b="1">
+                <a:solidFill>
+                  <a:srgbClr val="1F4E79"/>
+                </a:solidFill>
+                <a:latin typeface="Arial"/>
+              </a:rPr>
+              <a:t>The setup: the interferometer's test arm, alone</a:t>
+            </a:r>
+          </a:p>
+          <a:p>
+            <a:pPr>
+              <a:spcAft>
+                <a:spcPts val="0"/>
+              </a:spcAft>
+            </a:pPr>
+            <a:r>
+              <a:rPr sz="1250" b="0">
+                <a:solidFill>
+                  <a:srgbClr val="6E6E6E"/>
+                </a:solidFill>
+                <a:latin typeface="Arial"/>
+              </a:rPr>
+              <a:t>Same source, same splitter, same 700 mm DM leg, same lenses — the reference arm and every polarization element simply removed</a:t>
+            </a:r>
+          </a:p>
+        </p:txBody>
+      </p:sp>
+      <p:sp>
+        <p:nvSpPr>
+          <p:cNvPr id="3" name="Rectangle 2"/>
+          <p:cNvSpPr/>
+          <p:nvPr/>
+        </p:nvSpPr>
+        <p:spPr>
+          <a:xfrm>
+            <a:off x="411480" y="1133856"/>
+            <a:ext cx="11368735" cy="20320"/>
+          </a:xfrm>
+          <a:prstGeom prst="rect">
+            <a:avLst/>
+          </a:prstGeom>
+          <a:solidFill>
+            <a:srgbClr val="B8C6D4"/>
+          </a:solidFill>
+          <a:ln>
+            <a:noFill/>
+          </a:ln>
+          <a:effectLst/>
+        </p:spPr>
+        <p:style>
+          <a:lnRef idx="1">
+            <a:schemeClr val="accent1"/>
+          </a:lnRef>
+          <a:fillRef idx="3">
+            <a:schemeClr val="accent1"/>
+          </a:fillRef>
+          <a:effectRef idx="2">
+            <a:schemeClr val="accent1"/>
+          </a:effectRef>
+          <a:fontRef idx="minor">
+            <a:schemeClr val="lt1"/>
+          </a:fontRef>
+        </p:style>
+        <p:txBody>
+          <a:bodyPr rtlCol="0" anchor="ctr"/>
+          <a:lstStyle/>
+          <a:p>
+            <a:pPr algn="ctr"/>
+          </a:p>
+        </p:txBody>
+      </p:sp>
+      <p:sp>
+        <p:nvSpPr>
+          <p:cNvPr id="4" name="TextBox 3"/>
+          <p:cNvSpPr txBox="1"/>
+          <p:nvPr/>
+        </p:nvSpPr>
+        <p:spPr>
+          <a:xfrm>
+            <a:off x="411480" y="1298448"/>
+            <a:ext cx="5806440" cy="274320"/>
+          </a:xfrm>
+          <a:prstGeom prst="rect">
+            <a:avLst/>
+          </a:prstGeom>
+          <a:noFill/>
+        </p:spPr>
+        <p:txBody>
+          <a:bodyPr wrap="square">
+            <a:spAutoFit/>
+          </a:bodyPr>
+          <a:lstStyle/>
+          <a:p>
+            <a:pPr>
+              <a:spcAft>
+                <a:spcPts val="600"/>
+              </a:spcAft>
+            </a:pPr>
+            <a:r>
+              <a:rPr sz="1200" b="0">
+                <a:solidFill>
+                  <a:srgbClr val="282828"/>
+                </a:solidFill>
+                <a:latin typeface="Arial"/>
+              </a:rPr>
+              <a:t>•  Reused whole: the TG96 bench solved for the 96×96, 1 mm-pitch DM — splitter at 7°, clearance-solved legs, the retuned detector optics.  The dimple sits at the internal focus of the existing detector leg, in the mask seat the bench already carried; the camera still views the DM image.</a:t>
+            </a:r>
+          </a:p>
+          <a:p>
+            <a:pPr>
+              <a:spcAft>
+                <a:spcPts val="600"/>
+              </a:spcAft>
+            </a:pPr>
+            <a:r>
+              <a:rPr sz="1200" b="0">
+                <a:solidFill>
+                  <a:srgbClr val="282828"/>
+                </a:solidFill>
+                <a:latin typeface="Arial"/>
+              </a:rPr>
+              <a:t>•  Removed: the reference flat and its leg; the polarizer, four arm waveplates, output waveplate and analyzer.  Nothing else moves.</a:t>
+            </a:r>
+          </a:p>
+          <a:p>
+            <a:pPr>
+              <a:spcAft>
+                <a:spcPts val="600"/>
+              </a:spcAft>
+            </a:pPr>
+            <a:r>
+              <a:rPr sz="1200" b="0">
+                <a:solidFill>
+                  <a:srgbClr val="282828"/>
+                </a:solidFill>
+                <a:latin typeface="Arial"/>
+              </a:rPr>
+              <a:t>•  Why that discipline matters: when the two instruments are scored against each other, the only difference is the sensing principle — not the glass, not the geometry.</a:t>
+            </a:r>
+          </a:p>
+        </p:txBody>
+      </p:sp>
+      <p:pic>
+        <p:nvPicPr>
+          <p:cNvPr id="5" name="Picture 4" descr="zwfs_render_rig.png"/>
+          <p:cNvPicPr>
+            <a:picLocks noChangeAspect="1"/>
+          </p:cNvPicPr>
+          <p:nvPr/>
+        </p:nvPicPr>
+        <p:blipFill>
+          <a:blip r:embed="rId2"/>
+          <a:stretch>
+            <a:fillRect/>
+          </a:stretch>
+        </p:blipFill>
+        <p:spPr>
+          <a:xfrm>
+            <a:off x="6503663" y="1298448"/>
+            <a:ext cx="5189233" cy="1708912"/>
+          </a:xfrm>
+          <a:prstGeom prst="rect">
+            <a:avLst/>
+          </a:prstGeom>
+        </p:spPr>
+      </p:pic>
+      <p:sp>
+        <p:nvSpPr>
+          <p:cNvPr id="6" name="TextBox 5"/>
+          <p:cNvSpPr txBox="1"/>
+          <p:nvPr/>
+        </p:nvSpPr>
+        <p:spPr>
+          <a:xfrm>
+            <a:off x="6400800" y="3025648"/>
+            <a:ext cx="5394960" cy="394208"/>
+          </a:xfrm>
+          <a:prstGeom prst="rect">
+            <a:avLst/>
+          </a:prstGeom>
+          <a:noFill/>
+        </p:spPr>
+        <p:txBody>
+          <a:bodyPr wrap="square">
+            <a:spAutoFit/>
+          </a:bodyPr>
+          <a:lstStyle/>
+          <a:p>
+            <a:pPr algn="ctr">
+              <a:spcAft>
+                <a:spcPts val="0"/>
+              </a:spcAft>
+            </a:pPr>
+            <a:r>
+              <a:rPr sz="1000" b="0">
+                <a:solidFill>
+                  <a:srgbClr val="6E6E6E"/>
+                </a:solidFill>
+                <a:latin typeface="Arial"/>
+              </a:rPr>
+              <a:t>The train as traced: source and splitter at left, the 96 mm DM on its 700 mm leg, the detector tail converging to the dimple's focus, and the camera at the pupil image.</a:t>
+            </a:r>
+          </a:p>
+        </p:txBody>
+      </p:sp>
+      <p:sp>
+        <p:nvSpPr>
+          <p:cNvPr id="7" name="TextBox 6"/>
+          <p:cNvSpPr txBox="1"/>
+          <p:nvPr/>
+        </p:nvSpPr>
+        <p:spPr>
+          <a:xfrm>
+            <a:off x="6400800" y="3456432"/>
             <a:ext cx="5394960" cy="274320"/>
           </a:xfrm>
           <a:prstGeom prst="rect">
@@ -4505,7 +4758,7 @@
                 </a:solidFill>
                 <a:latin typeface="Arial"/>
               </a:rPr>
-              <a:t>•  The measured instrument property: defocus reads at 0.32 — the self-reference cancellation.  The sensor's response will roll off at low spatial frequency, the mirror image of the interferometer.</a:t>
+              <a:t>•  Low orders are less trouble than presumed: defocus reads at 0.986 at full resolution.  The self-reference blindness lives at piston and tilt; the full response curve against the interferometer is the battery's job.</a:t>
             </a:r>
           </a:p>
         </p:txBody>
@@ -4664,7 +4917,7 @@
                 </a:solidFill>
                 <a:latin typeface="Arial"/>
               </a:rPr>
-              <a:t>Side by side with the Twyman–Green</a:t>
+              <a:t>Measuring the DM: a poke and a low-order figure</a:t>
             </a:r>
           </a:p>
           <a:p>
@@ -4680,7 +4933,7 @@
                 </a:solidFill>
                 <a:latin typeface="Arial"/>
               </a:rPr>
-              <a:t>Mirror-image instruments: the interferometer dims at the finest patterns, the Zernike sensor at the slowest — and it pays for its one-frame economy with range</a:t>
+              <a:t>One actuator pushed 20 nm reads at gain 0.45 through one frame at this camera; an 8 nm defocus reads at 0.99 — applied, sensed, and the estimate error, side by side</a:t>
             </a:r>
           </a:p>
         </p:txBody>
@@ -4729,6 +4982,327 @@
           </a:p>
         </p:txBody>
       </p:sp>
+      <p:pic>
+        <p:nvPicPr>
+          <p:cNvPr id="4" name="Picture 3" descr="zwfs_poke_triptych.png"/>
+          <p:cNvPicPr>
+            <a:picLocks noChangeAspect="1"/>
+          </p:cNvPicPr>
+          <p:nvPr/>
+        </p:nvPicPr>
+        <p:blipFill>
+          <a:blip r:embed="rId2"/>
+          <a:stretch>
+            <a:fillRect/>
+          </a:stretch>
+        </p:blipFill>
+        <p:spPr>
+          <a:xfrm>
+            <a:off x="3643334" y="1298448"/>
+            <a:ext cx="4905026" cy="1462532"/>
+          </a:xfrm>
+          <a:prstGeom prst="rect">
+            <a:avLst/>
+          </a:prstGeom>
+        </p:spPr>
+      </p:pic>
+      <p:sp>
+        <p:nvSpPr>
+          <p:cNvPr id="5" name="TextBox 4"/>
+          <p:cNvSpPr txBox="1"/>
+          <p:nvPr/>
+        </p:nvSpPr>
+        <p:spPr>
+          <a:xfrm>
+            <a:off x="411480" y="2779268"/>
+            <a:ext cx="11368735" cy="229107"/>
+          </a:xfrm>
+          <a:prstGeom prst="rect">
+            <a:avLst/>
+          </a:prstGeom>
+          <a:noFill/>
+        </p:spPr>
+        <p:txBody>
+          <a:bodyPr wrap="square">
+            <a:spAutoFit/>
+          </a:bodyPr>
+          <a:lstStyle/>
+          <a:p>
+            <a:pPr algn="ctr">
+              <a:spcAft>
+                <a:spcPts val="0"/>
+              </a:spcAft>
+            </a:pPr>
+            <a:r>
+              <a:rPr sz="1000" b="0">
+                <a:solidFill>
+                  <a:srgbClr val="6E6E6E"/>
+                </a:solidFill>
+                <a:latin typeface="Arial"/>
+              </a:rPr>
+              <a:t>One actuator pushed 20 nm: the sensed blob is broadened and dimmed — gain 0.445, 0.29 nm rms error.  The fine end is this sensor's real cost at this camera.</a:t>
+            </a:r>
+          </a:p>
+        </p:txBody>
+      </p:sp>
+      <p:pic>
+        <p:nvPicPr>
+          <p:cNvPr id="6" name="Picture 5" descr="zwfs_defocus_triptych.png"/>
+          <p:cNvPicPr>
+            <a:picLocks noChangeAspect="1"/>
+          </p:cNvPicPr>
+          <p:nvPr/>
+        </p:nvPicPr>
+        <p:blipFill>
+          <a:blip r:embed="rId3"/>
+          <a:stretch>
+            <a:fillRect/>
+          </a:stretch>
+        </p:blipFill>
+        <p:spPr>
+          <a:xfrm>
+            <a:off x="3635414" y="3044952"/>
+            <a:ext cx="4920865" cy="1462532"/>
+          </a:xfrm>
+          <a:prstGeom prst="rect">
+            <a:avLst/>
+          </a:prstGeom>
+        </p:spPr>
+      </p:pic>
+      <p:sp>
+        <p:nvSpPr>
+          <p:cNvPr id="7" name="TextBox 6"/>
+          <p:cNvSpPr txBox="1"/>
+          <p:nvPr/>
+        </p:nvSpPr>
+        <p:spPr>
+          <a:xfrm>
+            <a:off x="411480" y="4525771"/>
+            <a:ext cx="11368735" cy="229107"/>
+          </a:xfrm>
+          <a:prstGeom prst="rect">
+            <a:avLst/>
+          </a:prstGeom>
+          <a:noFill/>
+        </p:spPr>
+        <p:txBody>
+          <a:bodyPr wrap="square">
+            <a:spAutoFit/>
+          </a:bodyPr>
+          <a:lstStyle/>
+          <a:p>
+            <a:pPr algn="ctr">
+              <a:spcAft>
+                <a:spcPts val="0"/>
+              </a:spcAft>
+            </a:pPr>
+            <a:r>
+              <a:rPr sz="1000" b="0">
+                <a:solidFill>
+                  <a:srgbClr val="6E6E6E"/>
+                </a:solidFill>
+                <a:latin typeface="Arial"/>
+              </a:rPr>
+              <a:t>Defocus at 8 nm amplitude: sensed matches applied at gain 0.986, 0.16 nm rms — low orders above tilt are not the trouble they were presumed to be.</a:t>
+            </a:r>
+          </a:p>
+        </p:txBody>
+      </p:sp>
+      <p:sp>
+        <p:nvSpPr>
+          <p:cNvPr id="8" name="TextBox 7"/>
+          <p:cNvSpPr txBox="1"/>
+          <p:nvPr/>
+        </p:nvSpPr>
+        <p:spPr>
+          <a:xfrm>
+            <a:off x="411480" y="4791455"/>
+            <a:ext cx="11368735" cy="274320"/>
+          </a:xfrm>
+          <a:prstGeom prst="rect">
+            <a:avLst/>
+          </a:prstGeom>
+          <a:noFill/>
+        </p:spPr>
+        <p:txBody>
+          <a:bodyPr wrap="square">
+            <a:spAutoFit/>
+          </a:bodyPr>
+          <a:lstStyle/>
+          <a:p>
+            <a:pPr>
+              <a:spcAft>
+                <a:spcPts val="600"/>
+              </a:spcAft>
+            </a:pPr>
+            <a:r>
+              <a:rPr sz="1500" b="0">
+                <a:solidFill>
+                  <a:srgbClr val="282828"/>
+                </a:solidFill>
+                <a:latin typeface="Arial"/>
+              </a:rPr>
+              <a:t>•  The honest caveat on the poke number: the beam fills 74% of the aperture, so this camera resolves only 143 pixels across the lit pupil — 1.5× the actuator scale, under the 2× design rule the raw grid count appeared to satisfy.  The compliant configuration (385-pixel grid, 3.0 λF/D spot) is the battery's; and the actuator-model fit — the agreed score — recovers resolution the raw map lacks.</a:t>
+            </a:r>
+          </a:p>
+        </p:txBody>
+      </p:sp>
+      <p:sp>
+        <p:nvSpPr>
+          <p:cNvPr id="9" name="TextBox 8"/>
+          <p:cNvSpPr txBox="1"/>
+          <p:nvPr/>
+        </p:nvSpPr>
+        <p:spPr>
+          <a:xfrm>
+            <a:off x="411480" y="5958839"/>
+            <a:ext cx="11368735" cy="274320"/>
+          </a:xfrm>
+          <a:prstGeom prst="rect">
+            <a:avLst/>
+          </a:prstGeom>
+          <a:noFill/>
+        </p:spPr>
+        <p:txBody>
+          <a:bodyPr wrap="square">
+            <a:spAutoFit/>
+          </a:bodyPr>
+          <a:lstStyle/>
+          <a:p>
+            <a:pPr>
+              <a:spcAft>
+                <a:spcPts val="600"/>
+              </a:spcAft>
+            </a:pPr>
+            <a:r>
+              <a:rPr sz="1050" b="0">
+                <a:solidFill>
+                  <a:srgbClr val="6E6E6E"/>
+                </a:solidFill>
+                <a:latin typeface="Arial"/>
+              </a:rPr>
+              <a:t>Linear reconstructor throughout; alternatives are a scheduled study.  Identical cases measured on the interferometer: poke gain 0.984 / 0.049 nm, defocus 1.024 / 0.086 nm (the Fang deck carries them).</a:t>
+            </a:r>
+          </a:p>
+        </p:txBody>
+      </p:sp>
+    </p:spTree>
+  </p:cSld>
+  <p:clrMapOvr>
+    <a:masterClrMapping/>
+  </p:clrMapOvr>
+</p:sld>
+</file>
+
+<file path=ppt/slides/slide7.xml><?xml version="1.0" encoding="utf-8"?>
+<p:sld xmlns:a="http://schemas.openxmlformats.org/drawingml/2006/main" xmlns:p="http://schemas.openxmlformats.org/presentationml/2006/main" xmlns:r="http://schemas.openxmlformats.org/officeDocument/2006/relationships">
+  <p:cSld>
+    <p:spTree>
+      <p:nvGrpSpPr>
+        <p:cNvPr id="1" name=""/>
+        <p:cNvGrpSpPr/>
+        <p:nvPr/>
+      </p:nvGrpSpPr>
+      <p:grpSpPr/>
+      <p:sp>
+        <p:nvSpPr>
+          <p:cNvPr id="2" name="TextBox 1"/>
+          <p:cNvSpPr txBox="1"/>
+          <p:nvPr/>
+        </p:nvSpPr>
+        <p:spPr>
+          <a:xfrm>
+            <a:off x="411480" y="201168"/>
+            <a:ext cx="11368735" cy="914400"/>
+          </a:xfrm>
+          <a:prstGeom prst="rect">
+            <a:avLst/>
+          </a:prstGeom>
+          <a:noFill/>
+        </p:spPr>
+        <p:txBody>
+          <a:bodyPr wrap="square">
+            <a:spAutoFit/>
+          </a:bodyPr>
+          <a:lstStyle/>
+          <a:p>
+            <a:pPr>
+              <a:spcAft>
+                <a:spcPts val="400"/>
+              </a:spcAft>
+            </a:pPr>
+            <a:r>
+              <a:rPr sz="2400" b="1">
+                <a:solidFill>
+                  <a:srgbClr val="1F4E79"/>
+                </a:solidFill>
+                <a:latin typeface="Arial"/>
+              </a:rPr>
+              <a:t>Side by side with the Twyman–Green</a:t>
+            </a:r>
+          </a:p>
+          <a:p>
+            <a:pPr>
+              <a:spcAft>
+                <a:spcPts val="0"/>
+              </a:spcAft>
+            </a:pPr>
+            <a:r>
+              <a:rPr sz="1250" b="0">
+                <a:solidFill>
+                  <a:srgbClr val="6E6E6E"/>
+                </a:solidFill>
+                <a:latin typeface="Arial"/>
+              </a:rPr>
+              <a:t>The interferometer dims at the finest patterns, the Zernike sensor at the very lowest and in range — the price of its one-frame economy</a:t>
+            </a:r>
+          </a:p>
+        </p:txBody>
+      </p:sp>
+      <p:sp>
+        <p:nvSpPr>
+          <p:cNvPr id="3" name="Rectangle 2"/>
+          <p:cNvSpPr/>
+          <p:nvPr/>
+        </p:nvSpPr>
+        <p:spPr>
+          <a:xfrm>
+            <a:off x="411480" y="1133856"/>
+            <a:ext cx="11368735" cy="20320"/>
+          </a:xfrm>
+          <a:prstGeom prst="rect">
+            <a:avLst/>
+          </a:prstGeom>
+          <a:solidFill>
+            <a:srgbClr val="B8C6D4"/>
+          </a:solidFill>
+          <a:ln>
+            <a:noFill/>
+          </a:ln>
+          <a:effectLst/>
+        </p:spPr>
+        <p:style>
+          <a:lnRef idx="1">
+            <a:schemeClr val="accent1"/>
+          </a:lnRef>
+          <a:fillRef idx="3">
+            <a:schemeClr val="accent1"/>
+          </a:fillRef>
+          <a:effectRef idx="2">
+            <a:schemeClr val="accent1"/>
+          </a:effectRef>
+          <a:fontRef idx="minor">
+            <a:schemeClr val="lt1"/>
+          </a:fontRef>
+        </p:style>
+        <p:txBody>
+          <a:bodyPr rtlCol="0" anchor="ctr"/>
+          <a:lstStyle/>
+          <a:p>
+            <a:pPr algn="ctr"/>
+          </a:p>
+        </p:txBody>
+      </p:sp>
       <p:graphicFrame>
         <p:nvGraphicFramePr>
           <p:cNvPr id="4" name="Table 3"/>
@@ -4739,7 +5313,7 @@
         </p:nvGraphicFramePr>
         <p:xfrm>
           <a:off x="411480" y="1298448"/>
-          <a:ext cx="11368734" cy="2520315"/>
+          <a:ext cx="11368734" cy="2800350"/>
         </p:xfrm>
         <a:graphic>
           <a:graphicData uri="http://schemas.openxmlformats.org/drawingml/2006/table">
@@ -5207,7 +5781,7 @@
                           </a:solidFill>
                           <a:latin typeface="Arial"/>
                         </a:rPr>
-                        <a:t>slow patterns: defocus 0.32 (measured)</a:t>
+                        <a:t>the very lowest orders (piston/tilt; defocus already 0.99)</a:t>
                       </a:r>
                     </a:p>
                   </a:txBody>
@@ -5299,7 +5873,7 @@
                           </a:solidFill>
                           <a:latin typeface="Arial"/>
                         </a:rPr>
-                        <a:t>a 10 nm actuator change, differenced</a:t>
+                        <a:t>one actuator pushed 20 nm</a:t>
                       </a:r>
                     </a:p>
                   </a:txBody>
@@ -5321,7 +5895,7 @@
                           </a:solidFill>
                           <a:latin typeface="Arial"/>
                         </a:rPr>
-                        <a:t>0.021 nm</a:t>
+                        <a:t>gain 0.98, error 0.05 nm rms</a:t>
                       </a:r>
                     </a:p>
                   </a:txBody>
@@ -5343,7 +5917,7 @@
                           </a:solidFill>
                           <a:latin typeface="Arial"/>
                         </a:rPr>
-                        <a:t>the head-to-head</a:t>
+                        <a:t>gain 0.45 at a sampling-starved camera (next slide)</a:t>
                       </a:r>
                     </a:p>
                   </a:txBody>
@@ -5354,6 +5928,74 @@
                   </a:tcPr>
                 </a:tc>
               </a:tr>
+              <a:tr h="280035">
+                <a:tc>
+                  <a:txBody>
+                    <a:bodyPr wrap="square"/>
+                    <a:lstStyle/>
+                    <a:p>
+                      <a:r>
+                        <a:rPr sz="1100" b="0">
+                          <a:solidFill>
+                            <a:srgbClr val="282828"/>
+                          </a:solidFill>
+                          <a:latin typeface="Arial"/>
+                        </a:rPr>
+                        <a:t>a 10 nm actuator change, differenced</a:t>
+                      </a:r>
+                    </a:p>
+                  </a:txBody>
+                  <a:tcPr marL="54864" marR="54864" marT="18288" marB="18288">
+                    <a:solidFill>
+                      <a:srgbClr val="FFFFFF"/>
+                    </a:solidFill>
+                  </a:tcPr>
+                </a:tc>
+                <a:tc>
+                  <a:txBody>
+                    <a:bodyPr wrap="square"/>
+                    <a:lstStyle/>
+                    <a:p>
+                      <a:r>
+                        <a:rPr sz="1100" b="0">
+                          <a:solidFill>
+                            <a:srgbClr val="282828"/>
+                          </a:solidFill>
+                          <a:latin typeface="Arial"/>
+                        </a:rPr>
+                        <a:t>0.021 nm</a:t>
+                      </a:r>
+                    </a:p>
+                  </a:txBody>
+                  <a:tcPr marL="54864" marR="54864" marT="18288" marB="18288">
+                    <a:solidFill>
+                      <a:srgbClr val="FFFFFF"/>
+                    </a:solidFill>
+                  </a:tcPr>
+                </a:tc>
+                <a:tc>
+                  <a:txBody>
+                    <a:bodyPr wrap="square"/>
+                    <a:lstStyle/>
+                    <a:p>
+                      <a:r>
+                        <a:rPr sz="1100" b="0">
+                          <a:solidFill>
+                            <a:srgbClr val="282828"/>
+                          </a:solidFill>
+                          <a:latin typeface="Arial"/>
+                        </a:rPr>
+                        <a:t>the head-to-head</a:t>
+                      </a:r>
+                    </a:p>
+                  </a:txBody>
+                  <a:tcPr marL="54864" marR="54864" marT="18288" marB="18288">
+                    <a:solidFill>
+                      <a:srgbClr val="FFFFFF"/>
+                    </a:solidFill>
+                  </a:tcPr>
+                </a:tc>
+              </a:tr>
             </a:tbl>
           </a:graphicData>
         </a:graphic>
@@ -5366,7 +6008,7 @@
         </p:nvSpPr>
         <p:spPr>
           <a:xfrm>
-            <a:off x="411480" y="3965066"/>
+            <a:off x="411480" y="4245102"/>
             <a:ext cx="11368735" cy="274320"/>
           </a:xfrm>
           <a:prstGeom prst="rect">
@@ -5405,7 +6047,7 @@
         </p:nvSpPr>
         <p:spPr>
           <a:xfrm>
-            <a:off x="411480" y="4884801"/>
+            <a:off x="411480" y="5164836"/>
             <a:ext cx="11368735" cy="274320"/>
           </a:xfrm>
           <a:prstGeom prst="rect">
@@ -5444,7 +6086,7 @@
 </p:sld>
 </file>
 
-<file path=ppt/slides/slide7.xml><?xml version="1.0" encoding="utf-8"?>
+<file path=ppt/slides/slide8.xml><?xml version="1.0" encoding="utf-8"?>
 <p:sld xmlns:a="http://schemas.openxmlformats.org/drawingml/2006/main" xmlns:p="http://schemas.openxmlformats.org/presentationml/2006/main" xmlns:r="http://schemas.openxmlformats.org/officeDocument/2006/relationships">
   <p:cSld>
     <p:spTree>
@@ -5687,7 +6329,7 @@
 </p:sld>
 </file>
 
-<file path=ppt/slides/slide8.xml><?xml version="1.0" encoding="utf-8"?>
+<file path=ppt/slides/slide9.xml><?xml version="1.0" encoding="utf-8"?>
 <p:sld xmlns:a="http://schemas.openxmlformats.org/drawingml/2006/main" xmlns:p="http://schemas.openxmlformats.org/presentationml/2006/main" xmlns:r="http://schemas.openxmlformats.org/officeDocument/2006/relationships">
   <p:cSld>
     <p:spTree>
@@ -5732,226 +6374,6 @@
                 <a:latin typeface="Arial"/>
               </a:rPr>
               <a:t>Backup</a:t>
-            </a:r>
-          </a:p>
-        </p:txBody>
-      </p:sp>
-    </p:spTree>
-  </p:cSld>
-  <p:clrMapOvr>
-    <a:masterClrMapping/>
-  </p:clrMapOvr>
-</p:sld>
-</file>
-
-<file path=ppt/slides/slide9.xml><?xml version="1.0" encoding="utf-8"?>
-<p:sld xmlns:a="http://schemas.openxmlformats.org/drawingml/2006/main" xmlns:p="http://schemas.openxmlformats.org/presentationml/2006/main" xmlns:r="http://schemas.openxmlformats.org/officeDocument/2006/relationships">
-  <p:cSld>
-    <p:spTree>
-      <p:nvGrpSpPr>
-        <p:cNvPr id="1" name=""/>
-        <p:cNvGrpSpPr/>
-        <p:nvPr/>
-      </p:nvGrpSpPr>
-      <p:grpSpPr/>
-      <p:sp>
-        <p:nvSpPr>
-          <p:cNvPr id="2" name="TextBox 1"/>
-          <p:cNvSpPr txBox="1"/>
-          <p:nvPr/>
-        </p:nvSpPr>
-        <p:spPr>
-          <a:xfrm>
-            <a:off x="411480" y="201168"/>
-            <a:ext cx="11368735" cy="914400"/>
-          </a:xfrm>
-          <a:prstGeom prst="rect">
-            <a:avLst/>
-          </a:prstGeom>
-          <a:noFill/>
-        </p:spPr>
-        <p:txBody>
-          <a:bodyPr wrap="square">
-            <a:spAutoFit/>
-          </a:bodyPr>
-          <a:lstStyle/>
-          <a:p>
-            <a:pPr>
-              <a:spcAft>
-                <a:spcPts val="400"/>
-              </a:spcAft>
-            </a:pPr>
-            <a:r>
-              <a:rPr sz="2400" b="1">
-                <a:solidFill>
-                  <a:srgbClr val="1F4E79"/>
-                </a:solidFill>
-                <a:latin typeface="Arial"/>
-              </a:rPr>
-              <a:t>Provenance and records</a:t>
-            </a:r>
-          </a:p>
-          <a:p>
-            <a:pPr>
-              <a:spcAft>
-                <a:spcPts val="0"/>
-              </a:spcAft>
-            </a:pPr>
-            <a:r>
-              <a:rPr sz="1250" b="0">
-                <a:solidFill>
-                  <a:srgbClr val="6E6E6E"/>
-                </a:solidFill>
-                <a:latin typeface="Arial"/>
-              </a:rPr>
-              <a:t>Every number re-derives from a committed script</a:t>
-            </a:r>
-          </a:p>
-        </p:txBody>
-      </p:sp>
-      <p:sp>
-        <p:nvSpPr>
-          <p:cNvPr id="3" name="Rectangle 2"/>
-          <p:cNvSpPr/>
-          <p:nvPr/>
-        </p:nvSpPr>
-        <p:spPr>
-          <a:xfrm>
-            <a:off x="411480" y="1133856"/>
-            <a:ext cx="11368735" cy="20320"/>
-          </a:xfrm>
-          <a:prstGeom prst="rect">
-            <a:avLst/>
-          </a:prstGeom>
-          <a:solidFill>
-            <a:srgbClr val="B8C6D4"/>
-          </a:solidFill>
-          <a:ln>
-            <a:noFill/>
-          </a:ln>
-          <a:effectLst/>
-        </p:spPr>
-        <p:style>
-          <a:lnRef idx="1">
-            <a:schemeClr val="accent1"/>
-          </a:lnRef>
-          <a:fillRef idx="3">
-            <a:schemeClr val="accent1"/>
-          </a:fillRef>
-          <a:effectRef idx="2">
-            <a:schemeClr val="accent1"/>
-          </a:effectRef>
-          <a:fontRef idx="minor">
-            <a:schemeClr val="lt1"/>
-          </a:fontRef>
-        </p:style>
-        <p:txBody>
-          <a:bodyPr rtlCol="0" anchor="ctr"/>
-          <a:lstStyle/>
-          <a:p>
-            <a:pPr algn="ctr"/>
-          </a:p>
-        </p:txBody>
-      </p:sp>
-      <p:sp>
-        <p:nvSpPr>
-          <p:cNvPr id="4" name="TextBox 3"/>
-          <p:cNvSpPr txBox="1"/>
-          <p:nvPr/>
-        </p:nvSpPr>
-        <p:spPr>
-          <a:xfrm>
-            <a:off x="411480" y="1298448"/>
-            <a:ext cx="11368735" cy="274320"/>
-          </a:xfrm>
-          <a:prstGeom prst="rect">
-            <a:avLst/>
-          </a:prstGeom>
-          <a:noFill/>
-        </p:spPr>
-        <p:txBody>
-          <a:bodyPr wrap="square">
-            <a:spAutoFit/>
-          </a:bodyPr>
-          <a:lstStyle/>
-          <a:p>
-            <a:pPr>
-              <a:spcAft>
-                <a:spcPts val="600"/>
-              </a:spcAft>
-            </a:pPr>
-            <a:r>
-              <a:rPr sz="1500" b="0">
-                <a:solidFill>
-                  <a:srgbClr val="282828"/>
-                </a:solidFill>
-                <a:latin typeface="Arial"/>
-              </a:rPr>
-              <a:t>•  Campaign: templates/40_benches/zwfs_dm96 — zwfs_s1.m (five gates: sampling, superposition, reference wave, response, no-dimple control), zwfs_mask.m, zwfs_s1_figs.m (the figures here), zwfs_s1_report.txt, README with the findings chain; plan and rulings in macos/BRIEF_zwfs_campaign.md.</a:t>
-            </a:r>
-          </a:p>
-          <a:p>
-            <a:pPr>
-              <a:spcAft>
-                <a:spcPts val="600"/>
-              </a:spcAft>
-            </a:pPr>
-            <a:r>
-              <a:rPr sz="1500" b="0">
-                <a:solidFill>
-                  <a:srgbClr val="282828"/>
-                </a:solidFill>
-                <a:latin typeface="Arial"/>
-              </a:rPr>
-              <a:t>•  Findings earned in S1, recorded so they are not re-derived: the stock detector leg is ray-traced (geometric) at the mask plane — a λ/D-scale mask needs the reference-sphere diffraction bracket (now a builder option, default off, existing decks bit-identical, suites green); the mask must sit at the optimized lens's real focus (−5.58 mm from the thin-lens seed, found by a peak scan the gate re-runs); the camera-to-DM frame must come from traced rays — a support-area estimate was 25% off and read a fine test pattern as "no response."</a:t>
-            </a:r>
-          </a:p>
-          <a:p>
-            <a:pPr>
-              <a:spcAft>
-                <a:spcPts val="600"/>
-              </a:spcAft>
-            </a:pPr>
-            <a:r>
-              <a:rPr sz="1500" b="0">
-                <a:solidFill>
-                  <a:srgbClr val="282828"/>
-                </a:solidFill>
-                <a:latin typeface="Arial"/>
-              </a:rPr>
-              <a:t>•  Sign convention pinned by gate: surface height = −φ·λ/4π on this deck (single reflection doubles height).</a:t>
-            </a:r>
-          </a:p>
-          <a:p>
-            <a:pPr>
-              <a:spcAft>
-                <a:spcPts val="600"/>
-              </a:spcAft>
-            </a:pPr>
-            <a:r>
-              <a:rPr sz="1500" b="0">
-                <a:solidFill>
-                  <a:srgbClr val="282828"/>
-                </a:solidFill>
-                <a:latin typeface="Arial"/>
-              </a:rPr>
-              <a:t>•  Hardware source: "VSG2 Zernike Wavefront Sensor Update -v2" deck, parameters carried in templates/40_benches/vsg_wip/vsg2_params.m §9.</a:t>
-            </a:r>
-          </a:p>
-          <a:p>
-            <a:pPr>
-              <a:spcAft>
-                <a:spcPts val="600"/>
-              </a:spcAft>
-            </a:pPr>
-            <a:r>
-              <a:rPr sz="1500" b="0">
-                <a:solidFill>
-                  <a:srgbClr val="282828"/>
-                </a:solidFill>
-                <a:latin typeface="Arial"/>
-              </a:rPr>
-              <a:t>•  Interferometer comparison column: templates/90_polarization/tg_psi_dm96, run 10 (tg96_report.txt).</a:t>
             </a:r>
           </a:p>
         </p:txBody>

--- a/demo_session/deck_zwfs.pptx
+++ b/demo_session/deck_zwfs.pptx
@@ -4933,7 +4933,7 @@
                 </a:solidFill>
                 <a:latin typeface="Arial"/>
               </a:rPr>
-              <a:t>One actuator pushed 20 nm reads at gain 0.45 through one frame at this camera; an 8 nm defocus reads at 0.99 — applied, sensed, and the estimate error, side by side</a:t>
+              <a:t>One actuator pushed 20 nm reads at gain 0.45 through one frame; an 8 nm defocus at 0.99 — and a sampling sweep shows the spot size, not the camera, sets the trade</a:t>
             </a:r>
           </a:p>
         </p:txBody>
@@ -5142,7 +5142,23 @@
                 </a:solidFill>
                 <a:latin typeface="Arial"/>
               </a:rPr>
-              <a:t>•  The honest caveat on the poke number: the beam fills 74% of the aperture, so this camera resolves only 143 pixels across the lit pupil — 1.5× the actuator scale, under the 2× design rule the raw grid count appeared to satisfy.  The compliant configuration (385-pixel grid, 3.0 λF/D spot) is the battery's; and the actuator-model fit — the agreed score — recovers resolution the raw map lacks.</a:t>
+              <a:t>•  Swept, and it is not the camera: poke gain does not move from 1.7× to 5× detector margin over the actuator scale, nor from 1.3 to 3.7 rays per actuator on the DM side.  The lever is the spot: 3.0 λF/D reads the poke at 0.59 but defocus falls to 0.78; 2.0 gives 0.45 and 0.99; the 1.06 hardware spot inverts the poke's sign.  The dimple diameter selects a band — no single spot serves both.</a:t>
+            </a:r>
+          </a:p>
+          <a:p>
+            <a:pPr>
+              <a:spcAft>
+                <a:spcPts val="600"/>
+              </a:spcAft>
+            </a:pPr>
+            <a:r>
+              <a:rPr sz="1500" b="0">
+                <a:solidFill>
+                  <a:srgbClr val="282828"/>
+                </a:solidFill>
+                <a:latin typeface="Arial"/>
+              </a:rPr>
+              <a:t>•  Why that is workable: the transfer is flat in sampling and set by a known dimple — stable and calibratable.  The actuator-model fit (the agreed score) with a measured response absorbs it; that is the battery's reconstructor path toward the 1 pm ultimate target.</a:t>
             </a:r>
           </a:p>
         </p:txBody>
@@ -5155,7 +5171,7 @@
         </p:nvSpPr>
         <p:spPr>
           <a:xfrm>
-            <a:off x="411480" y="5958839"/>
+            <a:off x="411480" y="6841997"/>
             <a:ext cx="11368735" cy="274320"/>
           </a:xfrm>
           <a:prstGeom prst="rect">
@@ -5181,7 +5197,7 @@
                 </a:solidFill>
                 <a:latin typeface="Arial"/>
               </a:rPr>
-              <a:t>Linear reconstructor throughout; alternatives are a scheduled study.  Identical cases measured on the interferometer: poke gain 0.984 / 0.049 nm, defocus 1.024 / 0.086 nm (the Fang deck carries them).</a:t>
+              <a:t>Linear reconstructor throughout; alternatives are a scheduled study.  Sweep record: zwfs_sweep.m (8 configs, 1.2 min).  Identical cases on the interferometer: poke gain 0.984 / 0.049 nm, defocus 1.024 / 0.086 nm (the Fang deck carries them).</a:t>
             </a:r>
           </a:p>
         </p:txBody>
@@ -5917,7 +5933,7 @@
                           </a:solidFill>
                           <a:latin typeface="Arial"/>
                         </a:rPr>
-                        <a:t>gain 0.45 at a sampling-starved camera (next slide)</a:t>
+                        <a:t>gain 0.45–0.59, set by spot size, flat in sampling (next slide)</a:t>
                       </a:r>
                     </a:p>
                   </a:txBody>

--- a/demo_session/deck_zwfs.pptx
+++ b/demo_session/deck_zwfs.pptx
@@ -15,6 +15,7 @@
     <p:sldId id="263" r:id="rId14"/>
     <p:sldId id="264" r:id="rId15"/>
     <p:sldId id="265" r:id="rId16"/>
+    <p:sldId id="266" r:id="rId17"/>
   </p:sldIdLst>
   <p:sldSz cx="12191695" cy="6858000" type="screen4x3"/>
   <p:notesSz cx="6858000" cy="9144000"/>
@@ -3195,7 +3196,7 @@
                 </a:solidFill>
                 <a:latin typeface="Arial"/>
               </a:rPr>
-              <a:t>DRAFT — pending review.  Campaign in progress: sensor model verified; battery and head-to-head pending.</a:t>
+              <a:t>DRAFT — pending review.  Campaign status: sensor model verified; battery, head-to-head and photon pricing measured (reported in the interferometer deck); multi-color excursion folded here; vector step pending.</a:t>
             </a:r>
           </a:p>
         </p:txBody>
@@ -3233,6 +3234,63 @@
 </file>
 
 <file path=ppt/slides/slide10.xml><?xml version="1.0" encoding="utf-8"?>
+<p:sld xmlns:a="http://schemas.openxmlformats.org/drawingml/2006/main" xmlns:p="http://schemas.openxmlformats.org/presentationml/2006/main" xmlns:r="http://schemas.openxmlformats.org/officeDocument/2006/relationships">
+  <p:cSld>
+    <p:spTree>
+      <p:nvGrpSpPr>
+        <p:cNvPr id="1" name=""/>
+        <p:cNvGrpSpPr/>
+        <p:nvPr/>
+      </p:nvGrpSpPr>
+      <p:grpSpPr/>
+      <p:sp>
+        <p:nvSpPr>
+          <p:cNvPr id="2" name="TextBox 1"/>
+          <p:cNvSpPr txBox="1"/>
+          <p:nvPr/>
+        </p:nvSpPr>
+        <p:spPr>
+          <a:xfrm>
+            <a:off x="822960" y="2743200"/>
+            <a:ext cx="10545775" cy="1280160"/>
+          </a:xfrm>
+          <a:prstGeom prst="rect">
+            <a:avLst/>
+          </a:prstGeom>
+          <a:noFill/>
+        </p:spPr>
+        <p:txBody>
+          <a:bodyPr wrap="square">
+            <a:spAutoFit/>
+          </a:bodyPr>
+          <a:lstStyle/>
+          <a:p>
+            <a:pPr algn="ctr">
+              <a:spcAft>
+                <a:spcPts val="400"/>
+              </a:spcAft>
+            </a:pPr>
+            <a:r>
+              <a:rPr sz="4000" b="1">
+                <a:solidFill>
+                  <a:srgbClr val="1F4E79"/>
+                </a:solidFill>
+                <a:latin typeface="Arial"/>
+              </a:rPr>
+              <a:t>Backup</a:t>
+            </a:r>
+          </a:p>
+        </p:txBody>
+      </p:sp>
+    </p:spTree>
+  </p:cSld>
+  <p:clrMapOvr>
+    <a:masterClrMapping/>
+  </p:clrMapOvr>
+</p:sld>
+</file>
+
+<file path=ppt/slides/slide11.xml><?xml version="1.0" encoding="utf-8"?>
 <p:sld xmlns:a="http://schemas.openxmlformats.org/drawingml/2006/main" xmlns:p="http://schemas.openxmlformats.org/presentationml/2006/main" xmlns:r="http://schemas.openxmlformats.org/officeDocument/2006/relationships">
   <p:cSld>
     <p:spTree>
@@ -5211,6 +5269,312 @@
 </file>
 
 <file path=ppt/slides/slide7.xml><?xml version="1.0" encoding="utf-8"?>
+<p:sld xmlns:a="http://schemas.openxmlformats.org/drawingml/2006/main" xmlns:p="http://schemas.openxmlformats.org/presentationml/2006/main" xmlns:r="http://schemas.openxmlformats.org/officeDocument/2006/relationships">
+  <p:cSld>
+    <p:spTree>
+      <p:nvGrpSpPr>
+        <p:cNvPr id="1" name=""/>
+        <p:cNvGrpSpPr/>
+        <p:nvPr/>
+      </p:nvGrpSpPr>
+      <p:grpSpPr/>
+      <p:sp>
+        <p:nvSpPr>
+          <p:cNvPr id="2" name="TextBox 1"/>
+          <p:cNvSpPr txBox="1"/>
+          <p:nvPr/>
+        </p:nvSpPr>
+        <p:spPr>
+          <a:xfrm>
+            <a:off x="411480" y="201168"/>
+            <a:ext cx="11368735" cy="914400"/>
+          </a:xfrm>
+          <a:prstGeom prst="rect">
+            <a:avLst/>
+          </a:prstGeom>
+          <a:noFill/>
+        </p:spPr>
+        <p:txBody>
+          <a:bodyPr wrap="square">
+            <a:spAutoFit/>
+          </a:bodyPr>
+          <a:lstStyle/>
+          <a:p>
+            <a:pPr>
+              <a:spcAft>
+                <a:spcPts val="400"/>
+              </a:spcAft>
+            </a:pPr>
+            <a:r>
+              <a:rPr sz="2400" b="1">
+                <a:solidFill>
+                  <a:srgbClr val="1F4E79"/>
+                </a:solidFill>
+                <a:latin typeface="Arial"/>
+              </a:rPr>
+              <a:t>Color as a lever: the blind bands move with wavelength</a:t>
+            </a:r>
+          </a:p>
+          <a:p>
+            <a:pPr>
+              <a:spcAft>
+                <a:spcPts val="0"/>
+              </a:spcAft>
+            </a:pPr>
+            <a:r>
+              <a:rPr sz="1250" b="0">
+                <a:solidFill>
+                  <a:srgbClr val="6E6E6E"/>
+                </a:solidFill>
+                <a:latin typeface="Arial"/>
+              </a:rPr>
+              <a:t>Five colors through the one mask keep the combined transfer above 0.99; on a 30 nm working surface the single-actuator floor falls 720 → 224 pm</a:t>
+            </a:r>
+          </a:p>
+        </p:txBody>
+      </p:sp>
+      <p:sp>
+        <p:nvSpPr>
+          <p:cNvPr id="3" name="Rectangle 2"/>
+          <p:cNvSpPr/>
+          <p:nvPr/>
+        </p:nvSpPr>
+        <p:spPr>
+          <a:xfrm>
+            <a:off x="411480" y="1133856"/>
+            <a:ext cx="11368735" cy="20320"/>
+          </a:xfrm>
+          <a:prstGeom prst="rect">
+            <a:avLst/>
+          </a:prstGeom>
+          <a:solidFill>
+            <a:srgbClr val="B8C6D4"/>
+          </a:solidFill>
+          <a:ln>
+            <a:noFill/>
+          </a:ln>
+          <a:effectLst/>
+        </p:spPr>
+        <p:style>
+          <a:lnRef idx="1">
+            <a:schemeClr val="accent1"/>
+          </a:lnRef>
+          <a:fillRef idx="3">
+            <a:schemeClr val="accent1"/>
+          </a:fillRef>
+          <a:effectRef idx="2">
+            <a:schemeClr val="accent1"/>
+          </a:effectRef>
+          <a:fontRef idx="minor">
+            <a:schemeClr val="lt1"/>
+          </a:fontRef>
+        </p:style>
+        <p:txBody>
+          <a:bodyPr rtlCol="0" anchor="ctr"/>
+          <a:lstStyle/>
+          <a:p>
+            <a:pPr algn="ctr"/>
+          </a:p>
+        </p:txBody>
+      </p:sp>
+      <p:pic>
+        <p:nvPicPr>
+          <p:cNvPr id="4" name="Picture 3" descr="crop_zwfs_s6color_zwfs.png"/>
+          <p:cNvPicPr>
+            <a:picLocks noChangeAspect="1"/>
+          </p:cNvPicPr>
+          <p:nvPr/>
+        </p:nvPicPr>
+        <p:blipFill>
+          <a:blip r:embed="rId2"/>
+          <a:stretch>
+            <a:fillRect/>
+          </a:stretch>
+        </p:blipFill>
+        <p:spPr>
+          <a:xfrm>
+            <a:off x="1332921" y="1298448"/>
+            <a:ext cx="3963557" cy="3372611"/>
+          </a:xfrm>
+          <a:prstGeom prst="rect">
+            <a:avLst/>
+          </a:prstGeom>
+        </p:spPr>
+      </p:pic>
+      <p:sp>
+        <p:nvSpPr>
+          <p:cNvPr id="5" name="TextBox 4"/>
+          <p:cNvSpPr txBox="1"/>
+          <p:nvPr/>
+        </p:nvSpPr>
+        <p:spPr>
+          <a:xfrm>
+            <a:off x="411480" y="4689347"/>
+            <a:ext cx="5806440" cy="559307"/>
+          </a:xfrm>
+          <a:prstGeom prst="rect">
+            <a:avLst/>
+          </a:prstGeom>
+          <a:noFill/>
+        </p:spPr>
+        <p:txBody>
+          <a:bodyPr wrap="square">
+            <a:spAutoFit/>
+          </a:bodyPr>
+          <a:lstStyle/>
+          <a:p>
+            <a:pPr algn="ctr">
+              <a:spcAft>
+                <a:spcPts val="0"/>
+              </a:spcAft>
+            </a:pPr>
+            <a:r>
+              <a:rPr sz="1000" b="0">
+                <a:solidFill>
+                  <a:srgbClr val="6E6E6E"/>
+                </a:solidFill>
+                <a:latin typeface="Arial"/>
+              </a:rPr>
+              <a:t>The transfer of (p,0) lattice modes at five wavelengths: the null near 30 cycles/pupil at 632.8 nm sits at 40 at 480 nm and at 20 at 780 nm; the five-color combination (black) never drops below 0.991.</a:t>
+            </a:r>
+          </a:p>
+        </p:txBody>
+      </p:sp>
+      <p:sp>
+        <p:nvSpPr>
+          <p:cNvPr id="6" name="TextBox 5"/>
+          <p:cNvSpPr txBox="1"/>
+          <p:nvPr/>
+        </p:nvSpPr>
+        <p:spPr>
+          <a:xfrm>
+            <a:off x="6400800" y="1298448"/>
+            <a:ext cx="5394960" cy="274320"/>
+          </a:xfrm>
+          <a:prstGeom prst="rect">
+            <a:avLst/>
+          </a:prstGeom>
+          <a:noFill/>
+        </p:spPr>
+        <p:txBody>
+          <a:bodyPr wrap="square">
+            <a:spAutoFit/>
+          </a:bodyPr>
+          <a:lstStyle/>
+          <a:p>
+            <a:pPr>
+              <a:spcAft>
+                <a:spcPts val="600"/>
+              </a:spcAft>
+            </a:pPr>
+            <a:r>
+              <a:rPr sz="1200" b="0">
+                <a:solidFill>
+                  <a:srgbClr val="282828"/>
+                </a:solidFill>
+                <a:latin typeface="Arial"/>
+              </a:rPr>
+              <a:t>•  Why it works: the dimple is fixed glass — its phase (π/2 at 632.8 nm) and its diameter in λ/D scale with wavelength, and so does the frequency where the response crosses zero: 40, 36, ~30, 24, 20 cycles/pupil at 480, 532, 632.8, 700, 780 nm.  Each color carries its own calibration: flat references, measured kernel, modal transfer.</a:t>
+            </a:r>
+          </a:p>
+          <a:p>
+            <a:pPr>
+              <a:spcAft>
+                <a:spcPts val="600"/>
+              </a:spcAft>
+            </a:pPr>
+            <a:r>
+              <a:rPr sz="1200" b="0">
+                <a:solidFill>
+                  <a:srgbClr val="282828"/>
+                </a:solidFill>
+                <a:latin typeface="Arial"/>
+              </a:rPr>
+              <a:t>•  The combination: a multi-channel Wiener estimate on the actuator lattice weights each color by its own transfer, so a mode one color cannot see is carried by another.</a:t>
+            </a:r>
+          </a:p>
+          <a:p>
+            <a:pPr>
+              <a:spcAft>
+                <a:spcPts val="600"/>
+              </a:spcAft>
+            </a:pPr>
+            <a:r>
+              <a:rPr sz="1200" b="0">
+                <a:solidFill>
+                  <a:srgbClr val="282828"/>
+                </a:solidFill>
+                <a:latin typeface="Arial"/>
+              </a:rPr>
+              <a:t>•  What it buys (linear reading, 632.8 nm alone → five colors): single-actuator floor on the 30 nm working surface 720 → 224 pm (SNR 9 → 35); dense random 16.4 → 7.2 nm; the grid case the sensor could not detect rises from SNR 1.5 to 3.4 — better, still short of detection.</a:t>
+            </a:r>
+          </a:p>
+          <a:p>
+            <a:pPr>
+              <a:spcAft>
+                <a:spcPts val="600"/>
+              </a:spcAft>
+            </a:pPr>
+            <a:r>
+              <a:rPr sz="1200" b="0">
+                <a:solidFill>
+                  <a:srgbClr val="282828"/>
+                </a:solidFill>
+                <a:latin typeface="Arial"/>
+              </a:rPr>
+              <a:t>•  The interferometer, same test: unchanged at every color — its roll-off is geometric, not diffractive (its deck carries the slide).</a:t>
+            </a:r>
+          </a:p>
+        </p:txBody>
+      </p:sp>
+      <p:sp>
+        <p:nvSpPr>
+          <p:cNvPr id="7" name="TextBox 6"/>
+          <p:cNvSpPr txBox="1"/>
+          <p:nvPr/>
+        </p:nvSpPr>
+        <p:spPr>
+          <a:xfrm>
+            <a:off x="411480" y="5285231"/>
+            <a:ext cx="11368735" cy="274320"/>
+          </a:xfrm>
+          <a:prstGeom prst="rect">
+            <a:avLst/>
+          </a:prstGeom>
+          <a:noFill/>
+        </p:spPr>
+        <p:txBody>
+          <a:bodyPr wrap="square">
+            <a:spAutoFit/>
+          </a:bodyPr>
+          <a:lstStyle/>
+          <a:p>
+            <a:pPr>
+              <a:spcAft>
+                <a:spcPts val="600"/>
+              </a:spcAft>
+            </a:pPr>
+            <a:r>
+              <a:rPr sz="1050" b="0">
+                <a:solidFill>
+                  <a:srgbClr val="6E6E6E"/>
+                </a:solidFill>
+                <a:latin typeface="Arial"/>
+              </a:rPr>
+              <a:t>Cost: K× frames per measurement.  Under equal weights the phase-stepped reading on a flat gets slightly worse (287 → 313 pm): weight colors by their measured systematic first.  Noiseless, 96×96; records zwfs_s6color.m / zwfs_s6color_report.txt, combiner dm_gauge_lib/dmg_color_comb.m.</a:t>
+            </a:r>
+          </a:p>
+        </p:txBody>
+      </p:sp>
+    </p:spTree>
+  </p:cSld>
+  <p:clrMapOvr>
+    <a:masterClrMapping/>
+  </p:clrMapOvr>
+</p:sld>
+</file>
+
+<file path=ppt/slides/slide8.xml><?xml version="1.0" encoding="utf-8"?>
 <p:sld xmlns:a="http://schemas.openxmlformats.org/drawingml/2006/main" xmlns:p="http://schemas.openxmlformats.org/presentationml/2006/main" xmlns:r="http://schemas.openxmlformats.org/officeDocument/2006/relationships">
   <p:cSld>
     <p:spTree>
@@ -6102,7 +6466,7 @@
 </p:sld>
 </file>
 
-<file path=ppt/slides/slide8.xml><?xml version="1.0" encoding="utf-8"?>
+<file path=ppt/slides/slide9.xml><?xml version="1.0" encoding="utf-8"?>
 <p:sld xmlns:a="http://schemas.openxmlformats.org/drawingml/2006/main" xmlns:p="http://schemas.openxmlformats.org/presentationml/2006/main" xmlns:r="http://schemas.openxmlformats.org/officeDocument/2006/relationships">
   <p:cSld>
     <p:spTree>
@@ -6332,64 +6696,7 @@
                 </a:solidFill>
                 <a:latin typeface="Arial"/>
               </a:rPr>
-              <a:t>Registration pokes drop to ~20 nm for the sensor: a 150 nm poke is 3 rad of phase — outside the linear reading.</a:t>
-            </a:r>
-          </a:p>
-        </p:txBody>
-      </p:sp>
-    </p:spTree>
-  </p:cSld>
-  <p:clrMapOvr>
-    <a:masterClrMapping/>
-  </p:clrMapOvr>
-</p:sld>
-</file>
-
-<file path=ppt/slides/slide9.xml><?xml version="1.0" encoding="utf-8"?>
-<p:sld xmlns:a="http://schemas.openxmlformats.org/drawingml/2006/main" xmlns:p="http://schemas.openxmlformats.org/presentationml/2006/main" xmlns:r="http://schemas.openxmlformats.org/officeDocument/2006/relationships">
-  <p:cSld>
-    <p:spTree>
-      <p:nvGrpSpPr>
-        <p:cNvPr id="1" name=""/>
-        <p:cNvGrpSpPr/>
-        <p:nvPr/>
-      </p:nvGrpSpPr>
-      <p:grpSpPr/>
-      <p:sp>
-        <p:nvSpPr>
-          <p:cNvPr id="2" name="TextBox 1"/>
-          <p:cNvSpPr txBox="1"/>
-          <p:nvPr/>
-        </p:nvSpPr>
-        <p:spPr>
-          <a:xfrm>
-            <a:off x="822960" y="2743200"/>
-            <a:ext cx="10545775" cy="1280160"/>
-          </a:xfrm>
-          <a:prstGeom prst="rect">
-            <a:avLst/>
-          </a:prstGeom>
-          <a:noFill/>
-        </p:spPr>
-        <p:txBody>
-          <a:bodyPr wrap="square">
-            <a:spAutoFit/>
-          </a:bodyPr>
-          <a:lstStyle/>
-          <a:p>
-            <a:pPr algn="ctr">
-              <a:spcAft>
-                <a:spcPts val="400"/>
-              </a:spcAft>
-            </a:pPr>
-            <a:r>
-              <a:rPr sz="4000" b="1">
-                <a:solidFill>
-                  <a:srgbClr val="1F4E79"/>
-                </a:solidFill>
-                <a:latin typeface="Arial"/>
-              </a:rPr>
-              <a:t>Backup</a:t>
+              <a:t>Registration pokes drop to ~20 nm for the sensor: a 150 nm poke is 3 rad of phase — outside the linear reading.  Measured since (S2–S5): 46 pm for the interferometer against 744 pm (linear) / 773 pm (phase-stepped) for the sensor on the 30 nm working surface; the interferometer deck carries the head-to-head, break scale and photon pricing.</a:t>
             </a:r>
           </a:p>
         </p:txBody>

--- a/demo_session/deck_zwfs.pptx
+++ b/demo_session/deck_zwfs.pptx
@@ -16,6 +16,10 @@
     <p:sldId id="264" r:id="rId15"/>
     <p:sldId id="265" r:id="rId16"/>
     <p:sldId id="266" r:id="rId17"/>
+    <p:sldId id="267" r:id="rId18"/>
+    <p:sldId id="268" r:id="rId19"/>
+    <p:sldId id="269" r:id="rId20"/>
+    <p:sldId id="270" r:id="rId21"/>
   </p:sldIdLst>
   <p:sldSz cx="12191695" cy="6858000" type="screen4x3"/>
   <p:notesSz cx="6858000" cy="9144000"/>
@@ -3196,7 +3200,7 @@
                 </a:solidFill>
                 <a:latin typeface="Arial"/>
               </a:rPr>
-              <a:t>DRAFT — pending review.  Campaign status: sensor model verified; battery, head-to-head and photon pricing measured (reported in the interferometer deck); multi-color excursion folded here; vector step pending.</a:t>
+              <a:t>DRAFT — pending review.  Campaign status: sensor model verified; battery, head-to-head and photon pricing measured (reported in the interferometer deck); multi-color excursion and the literature scan folded here; vector step pending.</a:t>
             </a:r>
           </a:p>
         </p:txBody>
@@ -3251,63 +3255,6 @@
         </p:nvSpPr>
         <p:spPr>
           <a:xfrm>
-            <a:off x="822960" y="2743200"/>
-            <a:ext cx="10545775" cy="1280160"/>
-          </a:xfrm>
-          <a:prstGeom prst="rect">
-            <a:avLst/>
-          </a:prstGeom>
-          <a:noFill/>
-        </p:spPr>
-        <p:txBody>
-          <a:bodyPr wrap="square">
-            <a:spAutoFit/>
-          </a:bodyPr>
-          <a:lstStyle/>
-          <a:p>
-            <a:pPr algn="ctr">
-              <a:spcAft>
-                <a:spcPts val="400"/>
-              </a:spcAft>
-            </a:pPr>
-            <a:r>
-              <a:rPr sz="4000" b="1">
-                <a:solidFill>
-                  <a:srgbClr val="1F4E79"/>
-                </a:solidFill>
-                <a:latin typeface="Arial"/>
-              </a:rPr>
-              <a:t>Backup</a:t>
-            </a:r>
-          </a:p>
-        </p:txBody>
-      </p:sp>
-    </p:spTree>
-  </p:cSld>
-  <p:clrMapOvr>
-    <a:masterClrMapping/>
-  </p:clrMapOvr>
-</p:sld>
-</file>
-
-<file path=ppt/slides/slide11.xml><?xml version="1.0" encoding="utf-8"?>
-<p:sld xmlns:a="http://schemas.openxmlformats.org/drawingml/2006/main" xmlns:p="http://schemas.openxmlformats.org/presentationml/2006/main" xmlns:r="http://schemas.openxmlformats.org/officeDocument/2006/relationships">
-  <p:cSld>
-    <p:spTree>
-      <p:nvGrpSpPr>
-        <p:cNvPr id="1" name=""/>
-        <p:cNvGrpSpPr/>
-        <p:nvPr/>
-      </p:nvGrpSpPr>
-      <p:grpSpPr/>
-      <p:sp>
-        <p:nvSpPr>
-          <p:cNvPr id="2" name="TextBox 1"/>
-          <p:cNvSpPr txBox="1"/>
-          <p:nvPr/>
-        </p:nvSpPr>
-        <p:spPr>
-          <a:xfrm>
             <a:off x="411480" y="201168"/>
             <a:ext cx="11368735" cy="914400"/>
           </a:xfrm>
@@ -3334,7 +3281,7 @@
                 </a:solidFill>
                 <a:latin typeface="Arial"/>
               </a:rPr>
-              <a:t>Provenance and records</a:t>
+              <a:t>What the Zernike-sensor literature offers, in priority order</a:t>
             </a:r>
           </a:p>
           <a:p>
@@ -3350,7 +3297,7 @@
                 </a:solidFill>
                 <a:latin typeface="Arial"/>
               </a:rPr>
-              <a:t>Every number re-derives from a committed script</a:t>
+              <a:t>Twelve papers read; one import addresses this campaign's weak results directly: reconstruct with an iterated reference wave</a:t>
             </a:r>
           </a:p>
         </p:txBody>
@@ -3399,6 +3346,1324 @@
           </a:p>
         </p:txBody>
       </p:sp>
+      <p:graphicFrame>
+        <p:nvGraphicFramePr>
+          <p:cNvPr id="4" name="Table 3"/>
+          <p:cNvGraphicFramePr>
+            <a:graphicFrameLocks noGrp="1"/>
+          </p:cNvGraphicFramePr>
+          <p:nvPr/>
+        </p:nvGraphicFramePr>
+        <p:xfrm>
+          <a:off x="411480" y="1298448"/>
+          <a:ext cx="11368734" cy="3091815"/>
+        </p:xfrm>
+        <a:graphic>
+          <a:graphicData uri="http://schemas.openxmlformats.org/drawingml/2006/table">
+            <a:tbl>
+              <a:tblPr firstRow="1" bandRow="1">
+                <a:tableStyleId>{5C22544A-7EE6-4342-B048-85BDC9FD1C3A}</a:tableStyleId>
+              </a:tblPr>
+              <a:tblGrid>
+                <a:gridCol w="218948"/>
+                <a:gridCol w="2691327"/>
+                <a:gridCol w="8458459"/>
+              </a:tblGrid>
+              <a:tr h="280035">
+                <a:tc>
+                  <a:txBody>
+                    <a:bodyPr wrap="square"/>
+                    <a:lstStyle/>
+                    <a:p>
+                      <a:r>
+                        <a:rPr sz="1100" b="1">
+                          <a:solidFill>
+                            <a:srgbClr val="FFFFFF"/>
+                          </a:solidFill>
+                          <a:latin typeface="Arial"/>
+                        </a:rPr>
+                        <a:t>#</a:t>
+                      </a:r>
+                    </a:p>
+                  </a:txBody>
+                  <a:tcPr marL="54864" marR="54864" marT="18288" marB="18288">
+                    <a:solidFill>
+                      <a:srgbClr val="1F4E79"/>
+                    </a:solidFill>
+                  </a:tcPr>
+                </a:tc>
+                <a:tc>
+                  <a:txBody>
+                    <a:bodyPr wrap="square"/>
+                    <a:lstStyle/>
+                    <a:p>
+                      <a:r>
+                        <a:rPr sz="1100" b="1">
+                          <a:solidFill>
+                            <a:srgbClr val="FFFFFF"/>
+                          </a:solidFill>
+                          <a:latin typeface="Arial"/>
+                        </a:rPr>
+                        <a:t>paper</a:t>
+                      </a:r>
+                    </a:p>
+                  </a:txBody>
+                  <a:tcPr marL="54864" marR="54864" marT="18288" marB="18288">
+                    <a:solidFill>
+                      <a:srgbClr val="1F4E79"/>
+                    </a:solidFill>
+                  </a:tcPr>
+                </a:tc>
+                <a:tc>
+                  <a:txBody>
+                    <a:bodyPr wrap="square"/>
+                    <a:lstStyle/>
+                    <a:p>
+                      <a:r>
+                        <a:rPr sz="1100" b="1">
+                          <a:solidFill>
+                            <a:srgbClr val="FFFFFF"/>
+                          </a:solidFill>
+                          <a:latin typeface="Arial"/>
+                        </a:rPr>
+                        <a:t>what it gives this model</a:t>
+                      </a:r>
+                    </a:p>
+                  </a:txBody>
+                  <a:tcPr marL="54864" marR="54864" marT="18288" marB="18288">
+                    <a:solidFill>
+                      <a:srgbClr val="1F4E79"/>
+                    </a:solidFill>
+                  </a:tcPr>
+                </a:tc>
+              </a:tr>
+              <a:tr h="468630">
+                <a:tc>
+                  <a:txBody>
+                    <a:bodyPr wrap="square"/>
+                    <a:lstStyle/>
+                    <a:p>
+                      <a:r>
+                        <a:rPr sz="1100" b="0">
+                          <a:solidFill>
+                            <a:srgbClr val="282828"/>
+                          </a:solidFill>
+                          <a:latin typeface="Arial"/>
+                        </a:rPr>
+                        <a:t>1</a:t>
+                      </a:r>
+                    </a:p>
+                  </a:txBody>
+                  <a:tcPr marL="54864" marR="54864" marT="18288" marB="18288">
+                    <a:solidFill>
+                      <a:srgbClr val="FFFFFF"/>
+                    </a:solidFill>
+                  </a:tcPr>
+                </a:tc>
+                <a:tc>
+                  <a:txBody>
+                    <a:bodyPr wrap="square"/>
+                    <a:lstStyle/>
+                    <a:p>
+                      <a:r>
+                        <a:rPr sz="1100" b="0">
+                          <a:solidFill>
+                            <a:srgbClr val="282828"/>
+                          </a:solidFill>
+                          <a:latin typeface="Arial"/>
+                        </a:rPr>
+                        <a:t>Ruane, Wallace, Steeves et al. 2020, JATIS 6, 045005</a:t>
+                      </a:r>
+                    </a:p>
+                  </a:txBody>
+                  <a:tcPr marL="54864" marR="54864" marT="18288" marB="18288">
+                    <a:solidFill>
+                      <a:srgbClr val="FFFFFF"/>
+                    </a:solidFill>
+                  </a:tcPr>
+                </a:tc>
+                <a:tc>
+                  <a:txBody>
+                    <a:bodyPr wrap="square"/>
+                    <a:lstStyle/>
+                    <a:p>
+                      <a:r>
+                        <a:rPr sz="1100" b="0">
+                          <a:solidFill>
+                            <a:srgbClr val="282828"/>
+                          </a:solidFill>
+                          <a:latin typeface="Arial"/>
+                        </a:rPr>
+                        <a:t>Exact per-pixel reconstruction from the pupil amplitude, the reference wave b and the masked image; a sensitivity factor per pixel; a four-term systematic budget; 1 pm reached at 4.4×10⁵ frames; no loss to 25 % bandwidth</a:t>
+                      </a:r>
+                    </a:p>
+                  </a:txBody>
+                  <a:tcPr marL="54864" marR="54864" marT="18288" marB="18288">
+                    <a:solidFill>
+                      <a:srgbClr val="FFFFFF"/>
+                    </a:solidFill>
+                  </a:tcPr>
+                </a:tc>
+              </a:tr>
+              <a:tr h="468630">
+                <a:tc>
+                  <a:txBody>
+                    <a:bodyPr wrap="square"/>
+                    <a:lstStyle/>
+                    <a:p>
+                      <a:r>
+                        <a:rPr sz="1100" b="0">
+                          <a:solidFill>
+                            <a:srgbClr val="282828"/>
+                          </a:solidFill>
+                          <a:latin typeface="Arial"/>
+                        </a:rPr>
+                        <a:t>2</a:t>
+                      </a:r>
+                    </a:p>
+                  </a:txBody>
+                  <a:tcPr marL="54864" marR="54864" marT="18288" marB="18288">
+                    <a:solidFill>
+                      <a:srgbClr val="ECF1F6"/>
+                    </a:solidFill>
+                  </a:tcPr>
+                </a:tc>
+                <a:tc>
+                  <a:txBody>
+                    <a:bodyPr wrap="square"/>
+                    <a:lstStyle/>
+                    <a:p>
+                      <a:r>
+                        <a:rPr sz="1100" b="0">
+                          <a:solidFill>
+                            <a:srgbClr val="282828"/>
+                          </a:solidFill>
+                          <a:latin typeface="Arial"/>
+                        </a:rPr>
+                        <a:t>Doelman, Fagginger Auer, Escuti, Snik 2019, Opt. Lett. 44, 17</a:t>
+                      </a:r>
+                    </a:p>
+                  </a:txBody>
+                  <a:tcPr marL="54864" marR="54864" marT="18288" marB="18288">
+                    <a:solidFill>
+                      <a:srgbClr val="ECF1F6"/>
+                    </a:solidFill>
+                  </a:tcPr>
+                </a:tc>
+                <a:tc>
+                  <a:txBody>
+                    <a:bodyPr wrap="square"/>
+                    <a:lstStyle/>
+                    <a:p>
+                      <a:r>
+                        <a:rPr sz="1100" b="0">
+                          <a:solidFill>
+                            <a:srgbClr val="282828"/>
+                          </a:solidFill>
+                          <a:latin typeface="Arial"/>
+                        </a:rPr>
+                        <a:t>Vector Zernike: ±π/2 on opposite circular polarizations gives two pupil images, an exact phase-and-amplitude solution, an iterated b, achromatic to 100 % bandwidth; the leakage terms are written down</a:t>
+                      </a:r>
+                    </a:p>
+                  </a:txBody>
+                  <a:tcPr marL="54864" marR="54864" marT="18288" marB="18288">
+                    <a:solidFill>
+                      <a:srgbClr val="ECF1F6"/>
+                    </a:solidFill>
+                  </a:tcPr>
+                </a:tc>
+              </a:tr>
+              <a:tr h="468630">
+                <a:tc>
+                  <a:txBody>
+                    <a:bodyPr wrap="square"/>
+                    <a:lstStyle/>
+                    <a:p>
+                      <a:r>
+                        <a:rPr sz="1100" b="0">
+                          <a:solidFill>
+                            <a:srgbClr val="282828"/>
+                          </a:solidFill>
+                          <a:latin typeface="Arial"/>
+                        </a:rPr>
+                        <a:t>3</a:t>
+                      </a:r>
+                    </a:p>
+                  </a:txBody>
+                  <a:tcPr marL="54864" marR="54864" marT="18288" marB="18288">
+                    <a:solidFill>
+                      <a:srgbClr val="FFFFFF"/>
+                    </a:solidFill>
+                  </a:tcPr>
+                </a:tc>
+                <a:tc>
+                  <a:txBody>
+                    <a:bodyPr wrap="square"/>
+                    <a:lstStyle/>
+                    <a:p>
+                      <a:r>
+                        <a:rPr sz="1100" b="0">
+                          <a:solidFill>
+                            <a:srgbClr val="282828"/>
+                          </a:solidFill>
+                          <a:latin typeface="Arial"/>
+                        </a:rPr>
+                        <a:t>N'Diaye, Vigan, Dohlen et al. 2016, A&amp;A 592, A79 (ZELDA II)</a:t>
+                      </a:r>
+                    </a:p>
+                  </a:txBody>
+                  <a:tcPr marL="54864" marR="54864" marT="18288" marB="18288">
+                    <a:solidFill>
+                      <a:srgbClr val="FFFFFF"/>
+                    </a:solidFill>
+                  </a:tcPr>
+                </a:tc>
+                <a:tc>
+                  <a:txBody>
+                    <a:bodyPr wrap="square"/>
+                    <a:lstStyle/>
+                    <a:p>
+                      <a:r>
+                        <a:rPr sz="1100" b="0">
+                          <a:solidFill>
+                            <a:srgbClr val="282828"/>
+                          </a:solidFill>
+                          <a:latin typeface="Arial"/>
+                        </a:rPr>
+                        <a:t>Second-order reconstruction with b from the mask model; 1.06 λ/D at π/2; range −0.14 to +0.36 λ; the sensitivity factor drifts 10 % day to day on SPHERE</a:t>
+                      </a:r>
+                    </a:p>
+                  </a:txBody>
+                  <a:tcPr marL="54864" marR="54864" marT="18288" marB="18288">
+                    <a:solidFill>
+                      <a:srgbClr val="FFFFFF"/>
+                    </a:solidFill>
+                  </a:tcPr>
+                </a:tc>
+              </a:tr>
+              <a:tr h="468630">
+                <a:tc>
+                  <a:txBody>
+                    <a:bodyPr wrap="square"/>
+                    <a:lstStyle/>
+                    <a:p>
+                      <a:r>
+                        <a:rPr sz="1100" b="0">
+                          <a:solidFill>
+                            <a:srgbClr val="282828"/>
+                          </a:solidFill>
+                          <a:latin typeface="Arial"/>
+                        </a:rPr>
+                        <a:t>4</a:t>
+                      </a:r>
+                    </a:p>
+                  </a:txBody>
+                  <a:tcPr marL="54864" marR="54864" marT="18288" marB="18288">
+                    <a:solidFill>
+                      <a:srgbClr val="ECF1F6"/>
+                    </a:solidFill>
+                  </a:tcPr>
+                </a:tc>
+                <a:tc>
+                  <a:txBody>
+                    <a:bodyPr wrap="square"/>
+                    <a:lstStyle/>
+                    <a:p>
+                      <a:r>
+                        <a:rPr sz="1100" b="0">
+                          <a:solidFill>
+                            <a:srgbClr val="282828"/>
+                          </a:solidFill>
+                          <a:latin typeface="Arial"/>
+                        </a:rPr>
+                        <a:t>Chambouleyron, Cissé, Salama, Haffert, Wallace et al. 2024, SPIE 13097</a:t>
+                      </a:r>
+                    </a:p>
+                  </a:txBody>
+                  <a:tcPr marL="54864" marR="54864" marT="18288" marB="18288">
+                    <a:solidFill>
+                      <a:srgbClr val="ECF1F6"/>
+                    </a:solidFill>
+                  </a:tcPr>
+                </a:tc>
+                <a:tc>
+                  <a:txBody>
+                    <a:bodyPr wrap="square"/>
+                    <a:lstStyle/>
+                    <a:p>
+                      <a:r>
+                        <a:rPr sz="1100" b="0">
+                          <a:solidFill>
+                            <a:srgbClr val="282828"/>
+                          </a:solidFill>
+                          <a:latin typeface="Arial"/>
+                        </a:rPr>
+                        <a:t>A phase-shifted pair (±π/2) yields cos φ and sin φ; iterative reconstructors reach about 1 rad rms; the bench limits were polarization crosstalk and defocus between the two pupils</a:t>
+                      </a:r>
+                    </a:p>
+                  </a:txBody>
+                  <a:tcPr marL="54864" marR="54864" marT="18288" marB="18288">
+                    <a:solidFill>
+                      <a:srgbClr val="ECF1F6"/>
+                    </a:solidFill>
+                  </a:tcPr>
+                </a:tc>
+              </a:tr>
+              <a:tr h="468630">
+                <a:tc>
+                  <a:txBody>
+                    <a:bodyPr wrap="square"/>
+                    <a:lstStyle/>
+                    <a:p>
+                      <a:r>
+                        <a:rPr sz="1100" b="0">
+                          <a:solidFill>
+                            <a:srgbClr val="282828"/>
+                          </a:solidFill>
+                          <a:latin typeface="Arial"/>
+                        </a:rPr>
+                        <a:t>5</a:t>
+                      </a:r>
+                    </a:p>
+                  </a:txBody>
+                  <a:tcPr marL="54864" marR="54864" marT="18288" marB="18288">
+                    <a:solidFill>
+                      <a:srgbClr val="FFFFFF"/>
+                    </a:solidFill>
+                  </a:tcPr>
+                </a:tc>
+                <a:tc>
+                  <a:txBody>
+                    <a:bodyPr wrap="square"/>
+                    <a:lstStyle/>
+                    <a:p>
+                      <a:r>
+                        <a:rPr sz="1100" b="0">
+                          <a:solidFill>
+                            <a:srgbClr val="282828"/>
+                          </a:solidFill>
+                          <a:latin typeface="Arial"/>
+                        </a:rPr>
+                        <a:t>Haffert 2024, A&amp;A 683, A113</a:t>
+                      </a:r>
+                    </a:p>
+                  </a:txBody>
+                  <a:tcPr marL="54864" marR="54864" marT="18288" marB="18288">
+                    <a:solidFill>
+                      <a:srgbClr val="FFFFFF"/>
+                    </a:solidFill>
+                  </a:tcPr>
+                </a:tc>
+                <a:tc>
+                  <a:txBody>
+                    <a:bodyPr wrap="square"/>
+                    <a:lstStyle/>
+                    <a:p>
+                      <a:r>
+                        <a:rPr sz="1100" b="0">
+                          <a:solidFill>
+                            <a:srgbClr val="282828"/>
+                          </a:solidFill>
+                          <a:latin typeface="Arial"/>
+                        </a:rPr>
+                        <a:t>Iterative nonlinear reconstructors reach machine precision below 0.25 rad rms; phase sorting extends to 0.75 rad; adding wavelengths to 1.4 rad rms</a:t>
+                      </a:r>
+                    </a:p>
+                  </a:txBody>
+                  <a:tcPr marL="54864" marR="54864" marT="18288" marB="18288">
+                    <a:solidFill>
+                      <a:srgbClr val="FFFFFF"/>
+                    </a:solidFill>
+                  </a:tcPr>
+                </a:tc>
+              </a:tr>
+              <a:tr h="468630">
+                <a:tc>
+                  <a:txBody>
+                    <a:bodyPr wrap="square"/>
+                    <a:lstStyle/>
+                    <a:p>
+                      <a:r>
+                        <a:rPr sz="1100" b="0">
+                          <a:solidFill>
+                            <a:srgbClr val="282828"/>
+                          </a:solidFill>
+                          <a:latin typeface="Arial"/>
+                        </a:rPr>
+                        <a:t>6</a:t>
+                      </a:r>
+                    </a:p>
+                  </a:txBody>
+                  <a:tcPr marL="54864" marR="54864" marT="18288" marB="18288">
+                    <a:solidFill>
+                      <a:srgbClr val="ECF1F6"/>
+                    </a:solidFill>
+                  </a:tcPr>
+                </a:tc>
+                <a:tc>
+                  <a:txBody>
+                    <a:bodyPr wrap="square"/>
+                    <a:lstStyle/>
+                    <a:p>
+                      <a:r>
+                        <a:rPr sz="1100" b="0">
+                          <a:solidFill>
+                            <a:srgbClr val="282828"/>
+                          </a:solidFill>
+                          <a:latin typeface="Arial"/>
+                        </a:rPr>
+                        <a:t>Darcis, Haffert, Chambouleyron, Doelman et al. 2025, A&amp;A</a:t>
+                      </a:r>
+                    </a:p>
+                  </a:txBody>
+                  <a:tcPr marL="54864" marR="54864" marT="18288" marB="18288">
+                    <a:solidFill>
+                      <a:srgbClr val="ECF1F6"/>
+                    </a:solidFill>
+                  </a:tcPr>
+                </a:tc>
+                <a:tc>
+                  <a:txBody>
+                    <a:bodyPr wrap="square"/>
+                    <a:lstStyle/>
+                    <a:p>
+                      <a:r>
+                        <a:rPr sz="1100" b="0">
+                          <a:solidFill>
+                            <a:srgbClr val="282828"/>
+                          </a:solidFill>
+                          <a:latin typeface="Arial"/>
+                        </a:rPr>
+                        <a:t>Multi-wavelength gradient descent through the forward model: dynamic range for the scalar sensor, photon robustness across a wider band, two-wavelength unwrapping of petal errors</a:t>
+                      </a:r>
+                    </a:p>
+                  </a:txBody>
+                  <a:tcPr marL="54864" marR="54864" marT="18288" marB="18288">
+                    <a:solidFill>
+                      <a:srgbClr val="ECF1F6"/>
+                    </a:solidFill>
+                  </a:tcPr>
+                </a:tc>
+              </a:tr>
+            </a:tbl>
+          </a:graphicData>
+        </a:graphic>
+      </p:graphicFrame>
+      <p:sp>
+        <p:nvSpPr>
+          <p:cNvPr id="5" name="TextBox 4"/>
+          <p:cNvSpPr txBox="1"/>
+          <p:nvPr/>
+        </p:nvSpPr>
+        <p:spPr>
+          <a:xfrm>
+            <a:off x="411480" y="4536567"/>
+            <a:ext cx="11368735" cy="274320"/>
+          </a:xfrm>
+          <a:prstGeom prst="rect">
+            <a:avLst/>
+          </a:prstGeom>
+          <a:noFill/>
+        </p:spPr>
+        <p:txBody>
+          <a:bodyPr wrap="square">
+            <a:spAutoFit/>
+          </a:bodyPr>
+          <a:lstStyle/>
+          <a:p>
+            <a:pPr>
+              <a:spcAft>
+                <a:spcPts val="600"/>
+              </a:spcAft>
+            </a:pPr>
+            <a:r>
+              <a:rPr sz="1050" b="0">
+                <a:solidFill>
+                  <a:srgbClr val="6E6E6E"/>
+                </a:solidFill>
+                <a:latin typeface="Arial"/>
+              </a:rPr>
+              <a:t>Priority = payoff against this campaign's measured weak results (the base-crosstalk floors, the undetected grid-on-base case, the stepped-reading regression under equal-weight color combination).  Synopses and links: macos/REPORT_zwfs_lit_scan.md.</a:t>
+            </a:r>
+          </a:p>
+        </p:txBody>
+      </p:sp>
+    </p:spTree>
+  </p:cSld>
+  <p:clrMapOvr>
+    <a:masterClrMapping/>
+  </p:clrMapOvr>
+</p:sld>
+</file>
+
+<file path=ppt/slides/slide11.xml><?xml version="1.0" encoding="utf-8"?>
+<p:sld xmlns:a="http://schemas.openxmlformats.org/drawingml/2006/main" xmlns:p="http://schemas.openxmlformats.org/presentationml/2006/main" xmlns:r="http://schemas.openxmlformats.org/officeDocument/2006/relationships">
+  <p:cSld>
+    <p:spTree>
+      <p:nvGrpSpPr>
+        <p:cNvPr id="1" name=""/>
+        <p:cNvGrpSpPr/>
+        <p:nvPr/>
+      </p:nvGrpSpPr>
+      <p:grpSpPr/>
+      <p:sp>
+        <p:nvSpPr>
+          <p:cNvPr id="2" name="TextBox 1"/>
+          <p:cNvSpPr txBox="1"/>
+          <p:nvPr/>
+        </p:nvSpPr>
+        <p:spPr>
+          <a:xfrm>
+            <a:off x="411480" y="201168"/>
+            <a:ext cx="11368735" cy="914400"/>
+          </a:xfrm>
+          <a:prstGeom prst="rect">
+            <a:avLst/>
+          </a:prstGeom>
+          <a:noFill/>
+        </p:spPr>
+        <p:txBody>
+          <a:bodyPr wrap="square">
+            <a:spAutoFit/>
+          </a:bodyPr>
+          <a:lstStyle/>
+          <a:p>
+            <a:pPr>
+              <a:spcAft>
+                <a:spcPts val="400"/>
+              </a:spcAft>
+            </a:pPr>
+            <a:r>
+              <a:rPr sz="2400" b="1">
+                <a:solidFill>
+                  <a:srgbClr val="1F4E79"/>
+                </a:solidFill>
+                <a:latin typeface="Arial"/>
+              </a:rPr>
+              <a:t>Demonstrations, segmented mirrors, and the in-house precedent</a:t>
+            </a:r>
+          </a:p>
+          <a:p>
+            <a:pPr>
+              <a:spcAft>
+                <a:spcPts val="0"/>
+              </a:spcAft>
+            </a:pPr>
+            <a:r>
+              <a:rPr sz="1250" b="0">
+                <a:solidFill>
+                  <a:srgbClr val="6E6E6E"/>
+                </a:solidFill>
+                <a:latin typeface="Arial"/>
+              </a:rPr>
+              <a:t>Picometers by alternating DM states and averaging; segment piston by model iteration, underestimated below 50 % Strehl</a:t>
+            </a:r>
+          </a:p>
+        </p:txBody>
+      </p:sp>
+      <p:sp>
+        <p:nvSpPr>
+          <p:cNvPr id="3" name="Rectangle 2"/>
+          <p:cNvSpPr/>
+          <p:nvPr/>
+        </p:nvSpPr>
+        <p:spPr>
+          <a:xfrm>
+            <a:off x="411480" y="1133856"/>
+            <a:ext cx="11368735" cy="20320"/>
+          </a:xfrm>
+          <a:prstGeom prst="rect">
+            <a:avLst/>
+          </a:prstGeom>
+          <a:solidFill>
+            <a:srgbClr val="B8C6D4"/>
+          </a:solidFill>
+          <a:ln>
+            <a:noFill/>
+          </a:ln>
+          <a:effectLst/>
+        </p:spPr>
+        <p:style>
+          <a:lnRef idx="1">
+            <a:schemeClr val="accent1"/>
+          </a:lnRef>
+          <a:fillRef idx="3">
+            <a:schemeClr val="accent1"/>
+          </a:fillRef>
+          <a:effectRef idx="2">
+            <a:schemeClr val="accent1"/>
+          </a:effectRef>
+          <a:fontRef idx="minor">
+            <a:schemeClr val="lt1"/>
+          </a:fontRef>
+        </p:style>
+        <p:txBody>
+          <a:bodyPr rtlCol="0" anchor="ctr"/>
+          <a:lstStyle/>
+          <a:p>
+            <a:pPr algn="ctr"/>
+          </a:p>
+        </p:txBody>
+      </p:sp>
+      <p:graphicFrame>
+        <p:nvGraphicFramePr>
+          <p:cNvPr id="4" name="Table 3"/>
+          <p:cNvGraphicFramePr>
+            <a:graphicFrameLocks noGrp="1"/>
+          </p:cNvGraphicFramePr>
+          <p:nvPr/>
+        </p:nvGraphicFramePr>
+        <p:xfrm>
+          <a:off x="411480" y="1298448"/>
+          <a:ext cx="11368734" cy="3091815"/>
+        </p:xfrm>
+        <a:graphic>
+          <a:graphicData uri="http://schemas.openxmlformats.org/drawingml/2006/table">
+            <a:tbl>
+              <a:tblPr firstRow="1" bandRow="1">
+                <a:tableStyleId>{5C22544A-7EE6-4342-B048-85BDC9FD1C3A}</a:tableStyleId>
+              </a:tblPr>
+              <a:tblGrid>
+                <a:gridCol w="291592"/>
+                <a:gridCol w="3730058"/>
+                <a:gridCol w="7347084"/>
+              </a:tblGrid>
+              <a:tr h="280035">
+                <a:tc>
+                  <a:txBody>
+                    <a:bodyPr wrap="square"/>
+                    <a:lstStyle/>
+                    <a:p>
+                      <a:r>
+                        <a:rPr sz="1100" b="1">
+                          <a:solidFill>
+                            <a:srgbClr val="FFFFFF"/>
+                          </a:solidFill>
+                          <a:latin typeface="Arial"/>
+                        </a:rPr>
+                        <a:t>#</a:t>
+                      </a:r>
+                    </a:p>
+                  </a:txBody>
+                  <a:tcPr marL="54864" marR="54864" marT="18288" marB="18288">
+                    <a:solidFill>
+                      <a:srgbClr val="1F4E79"/>
+                    </a:solidFill>
+                  </a:tcPr>
+                </a:tc>
+                <a:tc>
+                  <a:txBody>
+                    <a:bodyPr wrap="square"/>
+                    <a:lstStyle/>
+                    <a:p>
+                      <a:r>
+                        <a:rPr sz="1100" b="1">
+                          <a:solidFill>
+                            <a:srgbClr val="FFFFFF"/>
+                          </a:solidFill>
+                          <a:latin typeface="Arial"/>
+                        </a:rPr>
+                        <a:t>paper</a:t>
+                      </a:r>
+                    </a:p>
+                  </a:txBody>
+                  <a:tcPr marL="54864" marR="54864" marT="18288" marB="18288">
+                    <a:solidFill>
+                      <a:srgbClr val="1F4E79"/>
+                    </a:solidFill>
+                  </a:tcPr>
+                </a:tc>
+                <a:tc>
+                  <a:txBody>
+                    <a:bodyPr wrap="square"/>
+                    <a:lstStyle/>
+                    <a:p>
+                      <a:r>
+                        <a:rPr sz="1100" b="1">
+                          <a:solidFill>
+                            <a:srgbClr val="FFFFFF"/>
+                          </a:solidFill>
+                          <a:latin typeface="Arial"/>
+                        </a:rPr>
+                        <a:t>what it gives this model</a:t>
+                      </a:r>
+                    </a:p>
+                  </a:txBody>
+                  <a:tcPr marL="54864" marR="54864" marT="18288" marB="18288">
+                    <a:solidFill>
+                      <a:srgbClr val="1F4E79"/>
+                    </a:solidFill>
+                  </a:tcPr>
+                </a:tc>
+              </a:tr>
+              <a:tr h="468630">
+                <a:tc>
+                  <a:txBody>
+                    <a:bodyPr wrap="square"/>
+                    <a:lstStyle/>
+                    <a:p>
+                      <a:r>
+                        <a:rPr sz="1100" b="0">
+                          <a:solidFill>
+                            <a:srgbClr val="282828"/>
+                          </a:solidFill>
+                          <a:latin typeface="Arial"/>
+                        </a:rPr>
+                        <a:t>7</a:t>
+                      </a:r>
+                    </a:p>
+                  </a:txBody>
+                  <a:tcPr marL="54864" marR="54864" marT="18288" marB="18288">
+                    <a:solidFill>
+                      <a:srgbClr val="FFFFFF"/>
+                    </a:solidFill>
+                  </a:tcPr>
+                </a:tc>
+                <a:tc>
+                  <a:txBody>
+                    <a:bodyPr wrap="square"/>
+                    <a:lstStyle/>
+                    <a:p>
+                      <a:r>
+                        <a:rPr sz="1100" b="0">
+                          <a:solidFill>
+                            <a:srgbClr val="282828"/>
+                          </a:solidFill>
+                          <a:latin typeface="Arial"/>
+                        </a:rPr>
+                        <a:t>Steeves, Wallace, Kettenbeil, Jewell 2020, Optica 7, 1267</a:t>
+                      </a:r>
+                    </a:p>
+                  </a:txBody>
+                  <a:tcPr marL="54864" marR="54864" marT="18288" marB="18288">
+                    <a:solidFill>
+                      <a:srgbClr val="FFFFFF"/>
+                    </a:solidFill>
+                  </a:tcPr>
+                </a:tc>
+                <a:tc>
+                  <a:txBody>
+                    <a:bodyPr wrap="square"/>
+                    <a:lstStyle/>
+                    <a:p>
+                      <a:r>
+                        <a:rPr sz="1100" b="0">
+                          <a:solidFill>
+                            <a:srgbClr val="282828"/>
+                          </a:solidFill>
+                          <a:latin typeface="Arial"/>
+                        </a:rPr>
+                        <a:t>1.6 pm repeatability in 4.3 s by alternating flat and waffle DM states and averaging the differences; a reconstruction robust at the highest spatial frequencies</a:t>
+                      </a:r>
+                    </a:p>
+                  </a:txBody>
+                  <a:tcPr marL="54864" marR="54864" marT="18288" marB="18288">
+                    <a:solidFill>
+                      <a:srgbClr val="FFFFFF"/>
+                    </a:solidFill>
+                  </a:tcPr>
+                </a:tc>
+              </a:tr>
+              <a:tr h="468630">
+                <a:tc>
+                  <a:txBody>
+                    <a:bodyPr wrap="square"/>
+                    <a:lstStyle/>
+                    <a:p>
+                      <a:r>
+                        <a:rPr sz="1100" b="0">
+                          <a:solidFill>
+                            <a:srgbClr val="282828"/>
+                          </a:solidFill>
+                          <a:latin typeface="Arial"/>
+                        </a:rPr>
+                        <a:t>8</a:t>
+                      </a:r>
+                    </a:p>
+                  </a:txBody>
+                  <a:tcPr marL="54864" marR="54864" marT="18288" marB="18288">
+                    <a:solidFill>
+                      <a:srgbClr val="ECF1F6"/>
+                    </a:solidFill>
+                  </a:tcPr>
+                </a:tc>
+                <a:tc>
+                  <a:txBody>
+                    <a:bodyPr wrap="square"/>
+                    <a:lstStyle/>
+                    <a:p>
+                      <a:r>
+                        <a:rPr sz="1100" b="0">
+                          <a:solidFill>
+                            <a:srgbClr val="282828"/>
+                          </a:solidFill>
+                          <a:latin typeface="Arial"/>
+                        </a:rPr>
+                        <a:t>Wallace, Rao, Jensen-Clem, Serabyn 2011, SPIE 8126</a:t>
+                      </a:r>
+                    </a:p>
+                  </a:txBody>
+                  <a:tcPr marL="54864" marR="54864" marT="18288" marB="18288">
+                    <a:solidFill>
+                      <a:srgbClr val="ECF1F6"/>
+                    </a:solidFill>
+                  </a:tcPr>
+                </a:tc>
+                <a:tc>
+                  <a:txBody>
+                    <a:bodyPr wrap="square"/>
+                    <a:lstStyle/>
+                    <a:p>
+                      <a:r>
+                        <a:rPr sz="1100" b="0">
+                          <a:solidFill>
+                            <a:srgbClr val="282828"/>
+                          </a:solidFill>
+                          <a:latin typeface="Arial"/>
+                        </a:rPr>
+                        <a:t>All-reflective phase-shifting Zernike interferometer: a dynamic, arbitrary core phase shift read in four steps gives phase and amplitude; low sensitivity to vibration, polarization and wavelength</a:t>
+                      </a:r>
+                    </a:p>
+                  </a:txBody>
+                  <a:tcPr marL="54864" marR="54864" marT="18288" marB="18288">
+                    <a:solidFill>
+                      <a:srgbClr val="ECF1F6"/>
+                    </a:solidFill>
+                  </a:tcPr>
+                </a:tc>
+              </a:tr>
+              <a:tr h="468630">
+                <a:tc>
+                  <a:txBody>
+                    <a:bodyPr wrap="square"/>
+                    <a:lstStyle/>
+                    <a:p>
+                      <a:r>
+                        <a:rPr sz="1100" b="0">
+                          <a:solidFill>
+                            <a:srgbClr val="282828"/>
+                          </a:solidFill>
+                          <a:latin typeface="Arial"/>
+                        </a:rPr>
+                        <a:t>9</a:t>
+                      </a:r>
+                    </a:p>
+                  </a:txBody>
+                  <a:tcPr marL="54864" marR="54864" marT="18288" marB="18288">
+                    <a:solidFill>
+                      <a:srgbClr val="FFFFFF"/>
+                    </a:solidFill>
+                  </a:tcPr>
+                </a:tc>
+                <a:tc>
+                  <a:txBody>
+                    <a:bodyPr wrap="square"/>
+                    <a:lstStyle/>
+                    <a:p>
+                      <a:r>
+                        <a:rPr sz="1100" b="0">
+                          <a:solidFill>
+                            <a:srgbClr val="282828"/>
+                          </a:solidFill>
+                          <a:latin typeface="Arial"/>
+                        </a:rPr>
+                        <a:t>Moore and Redding 2018, SPIE 10698</a:t>
+                      </a:r>
+                    </a:p>
+                  </a:txBody>
+                  <a:tcPr marL="54864" marR="54864" marT="18288" marB="18288">
+                    <a:solidFill>
+                      <a:srgbClr val="FFFFFF"/>
+                    </a:solidFill>
+                  </a:tcPr>
+                </a:tc>
+                <a:tc>
+                  <a:txBody>
+                    <a:bodyPr wrap="square"/>
+                    <a:lstStyle/>
+                    <a:p>
+                      <a:r>
+                        <a:rPr sz="1100" b="0">
+                          <a:solidFill>
+                            <a:srgbClr val="282828"/>
+                          </a:solidFill>
+                          <a:latin typeface="Arial"/>
+                        </a:rPr>
+                        <a:t>Nonlinear polychromatic physical-optics reconstruction for picometer differential metrology on LUVOIR; the in-house precedent for the reconstructor above</a:t>
+                      </a:r>
+                    </a:p>
+                  </a:txBody>
+                  <a:tcPr marL="54864" marR="54864" marT="18288" marB="18288">
+                    <a:solidFill>
+                      <a:srgbClr val="FFFFFF"/>
+                    </a:solidFill>
+                  </a:tcPr>
+                </a:tc>
+              </a:tr>
+              <a:tr h="468630">
+                <a:tc>
+                  <a:txBody>
+                    <a:bodyPr wrap="square"/>
+                    <a:lstStyle/>
+                    <a:p>
+                      <a:r>
+                        <a:rPr sz="1100" b="0">
+                          <a:solidFill>
+                            <a:srgbClr val="282828"/>
+                          </a:solidFill>
+                          <a:latin typeface="Arial"/>
+                        </a:rPr>
+                        <a:t>10</a:t>
+                      </a:r>
+                    </a:p>
+                  </a:txBody>
+                  <a:tcPr marL="54864" marR="54864" marT="18288" marB="18288">
+                    <a:solidFill>
+                      <a:srgbClr val="ECF1F6"/>
+                    </a:solidFill>
+                  </a:tcPr>
+                </a:tc>
+                <a:tc>
+                  <a:txBody>
+                    <a:bodyPr wrap="square"/>
+                    <a:lstStyle/>
+                    <a:p>
+                      <a:r>
+                        <a:rPr sz="1100" b="0">
+                          <a:solidFill>
+                            <a:srgbClr val="282828"/>
+                          </a:solidFill>
+                          <a:latin typeface="Arial"/>
+                        </a:rPr>
+                        <a:t>Keck vector-Zernike segment control 2024 (arXiv 2404.08728); Wallace et al. 2022 (arXiv 2205.02241)</a:t>
+                      </a:r>
+                    </a:p>
+                  </a:txBody>
+                  <a:tcPr marL="54864" marR="54864" marT="18288" marB="18288">
+                    <a:solidFill>
+                      <a:srgbClr val="ECF1F6"/>
+                    </a:solidFill>
+                  </a:tcPr>
+                </a:tc>
+                <a:tc>
+                  <a:txBody>
+                    <a:bodyPr wrap="square"/>
+                    <a:lstStyle/>
+                    <a:p>
+                      <a:r>
+                        <a:rPr sz="1100" b="0">
+                          <a:solidFill>
+                            <a:srgbClr val="282828"/>
+                          </a:solidFill>
+                          <a:latin typeface="Arial"/>
+                        </a:rPr>
+                        <a:t>Segment piston by model-based iteration; 11 nm rms piston uncertainty; underestimation 2 to 4× below 50 % Strehl; fabricated shifts 0.30π and 0.68π instead of ±0.5π</a:t>
+                      </a:r>
+                    </a:p>
+                  </a:txBody>
+                  <a:tcPr marL="54864" marR="54864" marT="18288" marB="18288">
+                    <a:solidFill>
+                      <a:srgbClr val="ECF1F6"/>
+                    </a:solidFill>
+                  </a:tcPr>
+                </a:tc>
+              </a:tr>
+              <a:tr h="468630">
+                <a:tc>
+                  <a:txBody>
+                    <a:bodyPr wrap="square"/>
+                    <a:lstStyle/>
+                    <a:p>
+                      <a:r>
+                        <a:rPr sz="1100" b="0">
+                          <a:solidFill>
+                            <a:srgbClr val="282828"/>
+                          </a:solidFill>
+                          <a:latin typeface="Arial"/>
+                        </a:rPr>
+                        <a:t>11</a:t>
+                      </a:r>
+                    </a:p>
+                  </a:txBody>
+                  <a:tcPr marL="54864" marR="54864" marT="18288" marB="18288">
+                    <a:solidFill>
+                      <a:srgbClr val="FFFFFF"/>
+                    </a:solidFill>
+                  </a:tcPr>
+                </a:tc>
+                <a:tc>
+                  <a:txBody>
+                    <a:bodyPr wrap="square"/>
+                    <a:lstStyle/>
+                    <a:p>
+                      <a:r>
+                        <a:rPr sz="1100" b="0">
+                          <a:solidFill>
+                            <a:srgbClr val="282828"/>
+                          </a:solidFill>
+                          <a:latin typeface="Arial"/>
+                        </a:rPr>
+                        <a:t>HiCAT mid-order Zernike sensor 2024 (arXiv 2409.03411)</a:t>
+                      </a:r>
+                    </a:p>
+                  </a:txBody>
+                  <a:tcPr marL="54864" marR="54864" marT="18288" marB="18288">
+                    <a:solidFill>
+                      <a:srgbClr val="FFFFFF"/>
+                    </a:solidFill>
+                  </a:tcPr>
+                </a:tc>
+                <a:tc>
+                  <a:txBody>
+                    <a:bodyPr wrap="square"/>
+                    <a:lstStyle/>
+                    <a:p>
+                      <a:r>
+                        <a:rPr sz="1100" b="0">
+                          <a:solidFill>
+                            <a:srgbClr val="282828"/>
+                          </a:solidFill>
+                          <a:latin typeface="Arial"/>
+                        </a:rPr>
+                        <a:t>Per-segment piston, tip and tilt by interaction matrix; a minimal step of 125 ± 31 pm at SNR 4; 14-bit DM quantization reads as steps in the response</a:t>
+                      </a:r>
+                    </a:p>
+                  </a:txBody>
+                  <a:tcPr marL="54864" marR="54864" marT="18288" marB="18288">
+                    <a:solidFill>
+                      <a:srgbClr val="FFFFFF"/>
+                    </a:solidFill>
+                  </a:tcPr>
+                </a:tc>
+              </a:tr>
+              <a:tr h="468630">
+                <a:tc>
+                  <a:txBody>
+                    <a:bodyPr wrap="square"/>
+                    <a:lstStyle/>
+                    <a:p>
+                      <a:r>
+                        <a:rPr sz="1100" b="0">
+                          <a:solidFill>
+                            <a:srgbClr val="282828"/>
+                          </a:solidFill>
+                          <a:latin typeface="Arial"/>
+                        </a:rPr>
+                        <a:t>12</a:t>
+                      </a:r>
+                    </a:p>
+                  </a:txBody>
+                  <a:tcPr marL="54864" marR="54864" marT="18288" marB="18288">
+                    <a:solidFill>
+                      <a:srgbClr val="ECF1F6"/>
+                    </a:solidFill>
+                  </a:tcPr>
+                </a:tc>
+                <a:tc>
+                  <a:txBody>
+                    <a:bodyPr wrap="square"/>
+                    <a:lstStyle/>
+                    <a:p>
+                      <a:r>
+                        <a:rPr sz="1100" b="0">
+                          <a:solidFill>
+                            <a:srgbClr val="282828"/>
+                          </a:solidFill>
+                          <a:latin typeface="Arial"/>
+                        </a:rPr>
+                        <a:t>Shi et al. 2015, SPIE 9605 (Roman low-order sensor)</a:t>
+                      </a:r>
+                    </a:p>
+                  </a:txBody>
+                  <a:tcPr marL="54864" marR="54864" marT="18288" marB="18288">
+                    <a:solidFill>
+                      <a:srgbClr val="ECF1F6"/>
+                    </a:solidFill>
+                  </a:tcPr>
+                </a:tc>
+                <a:tc>
+                  <a:txBody>
+                    <a:bodyPr wrap="square"/>
+                    <a:lstStyle/>
+                    <a:p>
+                      <a:r>
+                        <a:rPr sz="1100" b="0">
+                          <a:solidFill>
+                            <a:srgbClr val="282828"/>
+                          </a:solidFill>
+                          <a:latin typeface="Arial"/>
+                        </a:rPr>
+                        <a:t>A reflective dimple on the focal-plane mask senses Z2 to Z11 from the rejected starlight: the spatially filtered form of the same sensor</a:t>
+                      </a:r>
+                    </a:p>
+                  </a:txBody>
+                  <a:tcPr marL="54864" marR="54864" marT="18288" marB="18288">
+                    <a:solidFill>
+                      <a:srgbClr val="ECF1F6"/>
+                    </a:solidFill>
+                  </a:tcPr>
+                </a:tc>
+              </a:tr>
+            </a:tbl>
+          </a:graphicData>
+        </a:graphic>
+      </p:graphicFrame>
+      <p:sp>
+        <p:nvSpPr>
+          <p:cNvPr id="5" name="TextBox 4"/>
+          <p:cNvSpPr txBox="1"/>
+          <p:nvPr/>
+        </p:nvSpPr>
+        <p:spPr>
+          <a:xfrm>
+            <a:off x="411480" y="4536567"/>
+            <a:ext cx="11368735" cy="274320"/>
+          </a:xfrm>
+          <a:prstGeom prst="rect">
+            <a:avLst/>
+          </a:prstGeom>
+          <a:noFill/>
+        </p:spPr>
+        <p:txBody>
+          <a:bodyPr wrap="square">
+            <a:spAutoFit/>
+          </a:bodyPr>
+          <a:lstStyle/>
+          <a:p>
+            <a:pPr>
+              <a:spcAft>
+                <a:spcPts val="600"/>
+              </a:spcAft>
+            </a:pPr>
+            <a:r>
+              <a:rPr sz="1050" b="0">
+                <a:solidFill>
+                  <a:srgbClr val="6E6E6E"/>
+                </a:solidFill>
+                <a:latin typeface="Arial"/>
+              </a:rPr>
+              <a:t>Also read: PIAA-ZWFS (2026, arXiv 2606.28136), lossless pupil apodization that closes the gap to the fundamental sensitivity limit by 10× — a design lever, not a model change.</a:t>
+            </a:r>
+          </a:p>
+        </p:txBody>
+      </p:sp>
+    </p:spTree>
+  </p:cSld>
+  <p:clrMapOvr>
+    <a:masterClrMapping/>
+  </p:clrMapOvr>
+</p:sld>
+</file>
+
+<file path=ppt/slides/slide12.xml><?xml version="1.0" encoding="utf-8"?>
+<p:sld xmlns:a="http://schemas.openxmlformats.org/drawingml/2006/main" xmlns:p="http://schemas.openxmlformats.org/presentationml/2006/main" xmlns:r="http://schemas.openxmlformats.org/officeDocument/2006/relationships">
+  <p:cSld>
+    <p:spTree>
+      <p:nvGrpSpPr>
+        <p:cNvPr id="1" name=""/>
+        <p:cNvGrpSpPr/>
+        <p:nvPr/>
+      </p:nvGrpSpPr>
+      <p:grpSpPr/>
+      <p:sp>
+        <p:nvSpPr>
+          <p:cNvPr id="2" name="TextBox 1"/>
+          <p:cNvSpPr txBox="1"/>
+          <p:nvPr/>
+        </p:nvSpPr>
+        <p:spPr>
+          <a:xfrm>
+            <a:off x="411480" y="201168"/>
+            <a:ext cx="11368735" cy="914400"/>
+          </a:xfrm>
+          <a:prstGeom prst="rect">
+            <a:avLst/>
+          </a:prstGeom>
+          <a:noFill/>
+        </p:spPr>
+        <p:txBody>
+          <a:bodyPr wrap="square">
+            <a:spAutoFit/>
+          </a:bodyPr>
+          <a:lstStyle/>
+          <a:p>
+            <a:pPr>
+              <a:spcAft>
+                <a:spcPts val="400"/>
+              </a:spcAft>
+            </a:pPr>
+            <a:r>
+              <a:rPr sz="2400" b="1">
+                <a:solidFill>
+                  <a:srgbClr val="1F4E79"/>
+                </a:solidFill>
+                <a:latin typeface="Arial"/>
+              </a:rPr>
+              <a:t>Conclusions: reconstruct with an iterated reference wave first</a:t>
+            </a:r>
+          </a:p>
+          <a:p>
+            <a:pPr>
+              <a:spcAft>
+                <a:spcPts val="0"/>
+              </a:spcAft>
+            </a:pPr>
+            <a:r>
+              <a:rPr sz="1250" b="0">
+                <a:solidFill>
+                  <a:srgbClr val="6E6E6E"/>
+                </a:solidFill>
+                <a:latin typeface="Arial"/>
+              </a:rPr>
+              <a:t>The frozen-reference linear reading is the un-iterated case of what every recent paper iterates; that is where the sensor's remaining floors come from</a:t>
+            </a:r>
+          </a:p>
+        </p:txBody>
+      </p:sp>
+      <p:sp>
+        <p:nvSpPr>
+          <p:cNvPr id="3" name="Rectangle 2"/>
+          <p:cNvSpPr/>
+          <p:nvPr/>
+        </p:nvSpPr>
+        <p:spPr>
+          <a:xfrm>
+            <a:off x="411480" y="1133856"/>
+            <a:ext cx="11368735" cy="20320"/>
+          </a:xfrm>
+          <a:prstGeom prst="rect">
+            <a:avLst/>
+          </a:prstGeom>
+          <a:solidFill>
+            <a:srgbClr val="B8C6D4"/>
+          </a:solidFill>
+          <a:ln>
+            <a:noFill/>
+          </a:ln>
+          <a:effectLst/>
+        </p:spPr>
+        <p:style>
+          <a:lnRef idx="1">
+            <a:schemeClr val="accent1"/>
+          </a:lnRef>
+          <a:fillRef idx="3">
+            <a:schemeClr val="accent1"/>
+          </a:fillRef>
+          <a:effectRef idx="2">
+            <a:schemeClr val="accent1"/>
+          </a:effectRef>
+          <a:fontRef idx="minor">
+            <a:schemeClr val="lt1"/>
+          </a:fontRef>
+        </p:style>
+        <p:txBody>
+          <a:bodyPr rtlCol="0" anchor="ctr"/>
+          <a:lstStyle/>
+          <a:p>
+            <a:pPr algn="ctr"/>
+          </a:p>
+        </p:txBody>
+      </p:sp>
       <p:sp>
         <p:nvSpPr>
           <p:cNvPr id="4" name="TextBox 3"/>
@@ -3433,6 +4698,549 @@
                 </a:solidFill>
                 <a:latin typeface="Arial"/>
               </a:rPr>
+              <a:t>•  Why this comes first: the base-crosstalk floors and the undetected grid-on-base case are the frozen-b error — the reference wave is calibrated on the flat DM and never updated, so a working surface moves the reference core and the linear reading reads it as crosstalk (S2b: defocus on a working surface read 0.74 under exact retrieval).  Every recent reconstructor iterates b; this model does not yet.</a:t>
+            </a:r>
+          </a:p>
+          <a:p>
+            <a:pPr>
+              <a:spcAft>
+                <a:spcPts val="600"/>
+              </a:spcAft>
+            </a:pPr>
+            <a:r>
+              <a:rPr sz="1500" b="0">
+                <a:solidFill>
+                  <a:srgbClr val="282828"/>
+                </a:solidFill>
+                <a:latin typeface="Arial"/>
+              </a:rPr>
+              <a:t>•  The spec: solve each pixel exactly from the masked image, the pupil amplitude and b (Ruane 2020, eq. 36–37); re-propagate the estimate through the mask model to refresh b; repeat three to five times.  The engine's exact reference field gates the FFT surrogate for b to 10⁻¹⁰ before it is trusted — a check no bench can make.  Success: the grid-on-base case detected from one frame at SNR ≥ 5, and the hold-out gain within 3 % of 1 without the modal over-correction.</a:t>
+            </a:r>
+          </a:p>
+          <a:p>
+            <a:pPr>
+              <a:spcAft>
+                <a:spcPts val="600"/>
+              </a:spcAft>
+            </a:pPr>
+            <a:r>
+              <a:rPr sz="1500" b="0">
+                <a:solidFill>
+                  <a:srgbClr val="282828"/>
+                </a:solidFill>
+                <a:latin typeface="Arial"/>
+              </a:rPr>
+              <a:t>•  What this model has that the papers do not: engine-exact reference and pupil fields, the ray-affine registration doctrine, actuator-space scoring through the DM influence model, the two-observables-per-pixel depth-ladder result, and the color-resolved migration of the response nulls.</a:t>
+            </a:r>
+          </a:p>
+        </p:txBody>
+      </p:sp>
+      <p:sp>
+        <p:nvSpPr>
+          <p:cNvPr id="5" name="TextBox 4"/>
+          <p:cNvSpPr txBox="1"/>
+          <p:nvPr/>
+        </p:nvSpPr>
+        <p:spPr>
+          <a:xfrm>
+            <a:off x="411480" y="4479797"/>
+            <a:ext cx="11368735" cy="274320"/>
+          </a:xfrm>
+          <a:prstGeom prst="rect">
+            <a:avLst/>
+          </a:prstGeom>
+          <a:noFill/>
+        </p:spPr>
+        <p:txBody>
+          <a:bodyPr wrap="square">
+            <a:spAutoFit/>
+          </a:bodyPr>
+          <a:lstStyle/>
+          <a:p>
+            <a:pPr>
+              <a:spcAft>
+                <a:spcPts val="600"/>
+              </a:spcAft>
+            </a:pPr>
+            <a:r>
+              <a:rPr sz="1050" b="0">
+                <a:solidFill>
+                  <a:srgbClr val="6E6E6E"/>
+                </a:solidFill>
+                <a:latin typeface="Arial"/>
+              </a:rPr>
+              <a:t>Spec and provenance: macos/REPORT_zwfs_lit_scan.md, "Suggested first ZWFS task"; implemented as a third reading in dm_gauge_lib/dmg_zwfs_gauge beside the frozen-linear and phase-stepped readings.</a:t>
+            </a:r>
+          </a:p>
+        </p:txBody>
+      </p:sp>
+    </p:spTree>
+  </p:cSld>
+  <p:clrMapOvr>
+    <a:masterClrMapping/>
+  </p:clrMapOvr>
+</p:sld>
+</file>
+
+<file path=ppt/slides/slide13.xml><?xml version="1.0" encoding="utf-8"?>
+<p:sld xmlns:a="http://schemas.openxmlformats.org/drawingml/2006/main" xmlns:p="http://schemas.openxmlformats.org/presentationml/2006/main" xmlns:r="http://schemas.openxmlformats.org/officeDocument/2006/relationships">
+  <p:cSld>
+    <p:spTree>
+      <p:nvGrpSpPr>
+        <p:cNvPr id="1" name=""/>
+        <p:cNvGrpSpPr/>
+        <p:nvPr/>
+      </p:nvGrpSpPr>
+      <p:grpSpPr/>
+      <p:sp>
+        <p:nvSpPr>
+          <p:cNvPr id="2" name="TextBox 1"/>
+          <p:cNvSpPr txBox="1"/>
+          <p:nvPr/>
+        </p:nvSpPr>
+        <p:spPr>
+          <a:xfrm>
+            <a:off x="411480" y="201168"/>
+            <a:ext cx="11368735" cy="914400"/>
+          </a:xfrm>
+          <a:prstGeom prst="rect">
+            <a:avLst/>
+          </a:prstGeom>
+          <a:noFill/>
+        </p:spPr>
+        <p:txBody>
+          <a:bodyPr wrap="square">
+            <a:spAutoFit/>
+          </a:bodyPr>
+          <a:lstStyle/>
+          <a:p>
+            <a:pPr>
+              <a:spcAft>
+                <a:spcPts val="400"/>
+              </a:spcAft>
+            </a:pPr>
+            <a:r>
+              <a:rPr sz="2400" b="1">
+                <a:solidFill>
+                  <a:srgbClr val="1F4E79"/>
+                </a:solidFill>
+                <a:latin typeface="Arial"/>
+              </a:rPr>
+              <a:t>Conclusions: the follow-on imports, in order</a:t>
+            </a:r>
+          </a:p>
+          <a:p>
+            <a:pPr>
+              <a:spcAft>
+                <a:spcPts val="0"/>
+              </a:spcAft>
+            </a:pPr>
+            <a:r>
+              <a:rPr sz="1250" b="0">
+                <a:solidFill>
+                  <a:srgbClr val="6E6E6E"/>
+                </a:solidFill>
+                <a:latin typeface="Arial"/>
+              </a:rPr>
+              <a:t>Budget form, model-matched DM calibration, spot and color reruns on the new reconstructor, the vector sensor priced before it is built</a:t>
+            </a:r>
+          </a:p>
+        </p:txBody>
+      </p:sp>
+      <p:sp>
+        <p:nvSpPr>
+          <p:cNvPr id="3" name="Rectangle 2"/>
+          <p:cNvSpPr/>
+          <p:nvPr/>
+        </p:nvSpPr>
+        <p:spPr>
+          <a:xfrm>
+            <a:off x="411480" y="1133856"/>
+            <a:ext cx="11368735" cy="20320"/>
+          </a:xfrm>
+          <a:prstGeom prst="rect">
+            <a:avLst/>
+          </a:prstGeom>
+          <a:solidFill>
+            <a:srgbClr val="B8C6D4"/>
+          </a:solidFill>
+          <a:ln>
+            <a:noFill/>
+          </a:ln>
+          <a:effectLst/>
+        </p:spPr>
+        <p:style>
+          <a:lnRef idx="1">
+            <a:schemeClr val="accent1"/>
+          </a:lnRef>
+          <a:fillRef idx="3">
+            <a:schemeClr val="accent1"/>
+          </a:fillRef>
+          <a:effectRef idx="2">
+            <a:schemeClr val="accent1"/>
+          </a:effectRef>
+          <a:fontRef idx="minor">
+            <a:schemeClr val="lt1"/>
+          </a:fontRef>
+        </p:style>
+        <p:txBody>
+          <a:bodyPr rtlCol="0" anchor="ctr"/>
+          <a:lstStyle/>
+          <a:p>
+            <a:pPr algn="ctr"/>
+          </a:p>
+        </p:txBody>
+      </p:sp>
+      <p:sp>
+        <p:nvSpPr>
+          <p:cNvPr id="4" name="TextBox 3"/>
+          <p:cNvSpPr txBox="1"/>
+          <p:nvPr/>
+        </p:nvSpPr>
+        <p:spPr>
+          <a:xfrm>
+            <a:off x="411480" y="1298448"/>
+            <a:ext cx="11368735" cy="274320"/>
+          </a:xfrm>
+          <a:prstGeom prst="rect">
+            <a:avLst/>
+          </a:prstGeom>
+          <a:noFill/>
+        </p:spPr>
+        <p:txBody>
+          <a:bodyPr wrap="square">
+            <a:spAutoFit/>
+          </a:bodyPr>
+          <a:lstStyle/>
+          <a:p>
+            <a:pPr>
+              <a:spcAft>
+                <a:spcPts val="600"/>
+              </a:spcAft>
+            </a:pPr>
+            <a:r>
+              <a:rPr sz="1500" b="0">
+                <a:solidFill>
+                  <a:srgbClr val="282828"/>
+                </a:solidFill>
+                <a:latin typeface="Arial"/>
+              </a:rPr>
+              <a:t>•  The JPL budget form: a per-pixel sensitivity factor from the measured fields predicts the photon-noise stage analytically, and the four systematic terms (pupil calibration at ½, reference wave at 1, dimple depth, initial phase) become the rows of the error budget.</a:t>
+            </a:r>
+          </a:p>
+          <a:p>
+            <a:pPr>
+              <a:spcAft>
+                <a:spcPts val="600"/>
+              </a:spcAft>
+            </a:pPr>
+            <a:r>
+              <a:rPr sz="1500" b="0">
+                <a:solidFill>
+                  <a:srgbClr val="282828"/>
+                </a:solidFill>
+                <a:latin typeface="Arial"/>
+              </a:rPr>
+              <a:t>•  Calibrate the DM through the sensor's own image model: fit actuator positions and gains by matching sensor images of poke grids to a simulation that includes the propagation distances — the out-of-conjugate case.  The interferometer's detector sits off the DM conjugate after the null-tuned tail, so this is its lever too.</a:t>
+            </a:r>
+          </a:p>
+          <a:p>
+            <a:pPr>
+              <a:spcAft>
+                <a:spcPts val="600"/>
+              </a:spcAft>
+            </a:pPr>
+            <a:r>
+              <a:rPr sz="1500" b="0">
+                <a:solidFill>
+                  <a:srgbClr val="282828"/>
+                </a:solidFill>
+                <a:latin typeface="Arial"/>
+              </a:rPr>
+              <a:t>•  Rerun spot size and color on the new reconstructor: the "larger spot, worse b" trade disappears once b is iterated, so the 1.06 / 2.0 / 3.0 λ/D sweep is due again; the five-color combination becomes a joint per-wavelength fit, which also removes the stepped-reading regression seen under equal weights.</a:t>
+            </a:r>
+          </a:p>
+          <a:p>
+            <a:pPr>
+              <a:spcAft>
+                <a:spcPts val="600"/>
+              </a:spcAft>
+            </a:pPr>
+            <a:r>
+              <a:rPr sz="1500" b="0">
+                <a:solidFill>
+                  <a:srgbClr val="282828"/>
+                </a:solidFill>
+                <a:latin typeface="Arial"/>
+              </a:rPr>
+              <a:t>•  Model the vector sensor before the metasurface is built: the exact two-image solution and its leakage terms (retardance offsets, splitter rotation) run on the engine's polarization machinery; the bench limits at Keck and SEAL were defocus and crosstalk between the two pupil images, both priceable here.</a:t>
+            </a:r>
+          </a:p>
+          <a:p>
+            <a:pPr>
+              <a:spcAft>
+                <a:spcPts val="600"/>
+              </a:spcAft>
+            </a:pPr>
+            <a:r>
+              <a:rPr sz="1500" b="0">
+                <a:solidFill>
+                  <a:srgbClr val="282828"/>
+                </a:solidFill>
+                <a:latin typeface="Arial"/>
+              </a:rPr>
+              <a:t>•  The interferometer, for balance: a PZT phase shift buys no model gain — its floors are geometric and color-independent — but on hardware an absolute phase scale and freedom from polarization systematics; the recommended form is a hybrid: polarization snapshot for the differential measurements, a PZT on the reference flat as calibrator.</a:t>
+            </a:r>
+          </a:p>
+        </p:txBody>
+      </p:sp>
+      <p:sp>
+        <p:nvSpPr>
+          <p:cNvPr id="5" name="TextBox 4"/>
+          <p:cNvSpPr txBox="1"/>
+          <p:nvPr/>
+        </p:nvSpPr>
+        <p:spPr>
+          <a:xfrm>
+            <a:off x="411480" y="5750814"/>
+            <a:ext cx="11368735" cy="274320"/>
+          </a:xfrm>
+          <a:prstGeom prst="rect">
+            <a:avLst/>
+          </a:prstGeom>
+          <a:noFill/>
+        </p:spPr>
+        <p:txBody>
+          <a:bodyPr wrap="square">
+            <a:spAutoFit/>
+          </a:bodyPr>
+          <a:lstStyle/>
+          <a:p>
+            <a:pPr>
+              <a:spcAft>
+                <a:spcPts val="600"/>
+              </a:spcAft>
+            </a:pPr>
+            <a:r>
+              <a:rPr sz="1050" b="0">
+                <a:solidFill>
+                  <a:srgbClr val="6E6E6E"/>
+                </a:solidFill>
+                <a:latin typeface="Arial"/>
+              </a:rPr>
+              <a:t>Segmented-mirror lessons carried forward: the sensor reads segment piston but not global piston, DM quantization appears as steps in the response, and piston is underestimated below 50 % Strehl (Keck) — all three enter the e5-class segmented gauges.</a:t>
+            </a:r>
+          </a:p>
+        </p:txBody>
+      </p:sp>
+    </p:spTree>
+  </p:cSld>
+  <p:clrMapOvr>
+    <a:masterClrMapping/>
+  </p:clrMapOvr>
+</p:sld>
+</file>
+
+<file path=ppt/slides/slide14.xml><?xml version="1.0" encoding="utf-8"?>
+<p:sld xmlns:a="http://schemas.openxmlformats.org/drawingml/2006/main" xmlns:p="http://schemas.openxmlformats.org/presentationml/2006/main" xmlns:r="http://schemas.openxmlformats.org/officeDocument/2006/relationships">
+  <p:cSld>
+    <p:spTree>
+      <p:nvGrpSpPr>
+        <p:cNvPr id="1" name=""/>
+        <p:cNvGrpSpPr/>
+        <p:nvPr/>
+      </p:nvGrpSpPr>
+      <p:grpSpPr/>
+      <p:sp>
+        <p:nvSpPr>
+          <p:cNvPr id="2" name="TextBox 1"/>
+          <p:cNvSpPr txBox="1"/>
+          <p:nvPr/>
+        </p:nvSpPr>
+        <p:spPr>
+          <a:xfrm>
+            <a:off x="822960" y="2743200"/>
+            <a:ext cx="10545775" cy="1280160"/>
+          </a:xfrm>
+          <a:prstGeom prst="rect">
+            <a:avLst/>
+          </a:prstGeom>
+          <a:noFill/>
+        </p:spPr>
+        <p:txBody>
+          <a:bodyPr wrap="square">
+            <a:spAutoFit/>
+          </a:bodyPr>
+          <a:lstStyle/>
+          <a:p>
+            <a:pPr algn="ctr">
+              <a:spcAft>
+                <a:spcPts val="400"/>
+              </a:spcAft>
+            </a:pPr>
+            <a:r>
+              <a:rPr sz="4000" b="1">
+                <a:solidFill>
+                  <a:srgbClr val="1F4E79"/>
+                </a:solidFill>
+                <a:latin typeface="Arial"/>
+              </a:rPr>
+              <a:t>Backup</a:t>
+            </a:r>
+          </a:p>
+        </p:txBody>
+      </p:sp>
+    </p:spTree>
+  </p:cSld>
+  <p:clrMapOvr>
+    <a:masterClrMapping/>
+  </p:clrMapOvr>
+</p:sld>
+</file>
+
+<file path=ppt/slides/slide15.xml><?xml version="1.0" encoding="utf-8"?>
+<p:sld xmlns:a="http://schemas.openxmlformats.org/drawingml/2006/main" xmlns:p="http://schemas.openxmlformats.org/presentationml/2006/main" xmlns:r="http://schemas.openxmlformats.org/officeDocument/2006/relationships">
+  <p:cSld>
+    <p:spTree>
+      <p:nvGrpSpPr>
+        <p:cNvPr id="1" name=""/>
+        <p:cNvGrpSpPr/>
+        <p:nvPr/>
+      </p:nvGrpSpPr>
+      <p:grpSpPr/>
+      <p:sp>
+        <p:nvSpPr>
+          <p:cNvPr id="2" name="TextBox 1"/>
+          <p:cNvSpPr txBox="1"/>
+          <p:nvPr/>
+        </p:nvSpPr>
+        <p:spPr>
+          <a:xfrm>
+            <a:off x="411480" y="201168"/>
+            <a:ext cx="11368735" cy="914400"/>
+          </a:xfrm>
+          <a:prstGeom prst="rect">
+            <a:avLst/>
+          </a:prstGeom>
+          <a:noFill/>
+        </p:spPr>
+        <p:txBody>
+          <a:bodyPr wrap="square">
+            <a:spAutoFit/>
+          </a:bodyPr>
+          <a:lstStyle/>
+          <a:p>
+            <a:pPr>
+              <a:spcAft>
+                <a:spcPts val="400"/>
+              </a:spcAft>
+            </a:pPr>
+            <a:r>
+              <a:rPr sz="2400" b="1">
+                <a:solidFill>
+                  <a:srgbClr val="1F4E79"/>
+                </a:solidFill>
+                <a:latin typeface="Arial"/>
+              </a:rPr>
+              <a:t>Provenance and records</a:t>
+            </a:r>
+          </a:p>
+          <a:p>
+            <a:pPr>
+              <a:spcAft>
+                <a:spcPts val="0"/>
+              </a:spcAft>
+            </a:pPr>
+            <a:r>
+              <a:rPr sz="1250" b="0">
+                <a:solidFill>
+                  <a:srgbClr val="6E6E6E"/>
+                </a:solidFill>
+                <a:latin typeface="Arial"/>
+              </a:rPr>
+              <a:t>Every number re-derives from a committed script</a:t>
+            </a:r>
+          </a:p>
+        </p:txBody>
+      </p:sp>
+      <p:sp>
+        <p:nvSpPr>
+          <p:cNvPr id="3" name="Rectangle 2"/>
+          <p:cNvSpPr/>
+          <p:nvPr/>
+        </p:nvSpPr>
+        <p:spPr>
+          <a:xfrm>
+            <a:off x="411480" y="1133856"/>
+            <a:ext cx="11368735" cy="20320"/>
+          </a:xfrm>
+          <a:prstGeom prst="rect">
+            <a:avLst/>
+          </a:prstGeom>
+          <a:solidFill>
+            <a:srgbClr val="B8C6D4"/>
+          </a:solidFill>
+          <a:ln>
+            <a:noFill/>
+          </a:ln>
+          <a:effectLst/>
+        </p:spPr>
+        <p:style>
+          <a:lnRef idx="1">
+            <a:schemeClr val="accent1"/>
+          </a:lnRef>
+          <a:fillRef idx="3">
+            <a:schemeClr val="accent1"/>
+          </a:fillRef>
+          <a:effectRef idx="2">
+            <a:schemeClr val="accent1"/>
+          </a:effectRef>
+          <a:fontRef idx="minor">
+            <a:schemeClr val="lt1"/>
+          </a:fontRef>
+        </p:style>
+        <p:txBody>
+          <a:bodyPr rtlCol="0" anchor="ctr"/>
+          <a:lstStyle/>
+          <a:p>
+            <a:pPr algn="ctr"/>
+          </a:p>
+        </p:txBody>
+      </p:sp>
+      <p:sp>
+        <p:nvSpPr>
+          <p:cNvPr id="4" name="TextBox 3"/>
+          <p:cNvSpPr txBox="1"/>
+          <p:nvPr/>
+        </p:nvSpPr>
+        <p:spPr>
+          <a:xfrm>
+            <a:off x="411480" y="1298448"/>
+            <a:ext cx="11368735" cy="274320"/>
+          </a:xfrm>
+          <a:prstGeom prst="rect">
+            <a:avLst/>
+          </a:prstGeom>
+          <a:noFill/>
+        </p:spPr>
+        <p:txBody>
+          <a:bodyPr wrap="square">
+            <a:spAutoFit/>
+          </a:bodyPr>
+          <a:lstStyle/>
+          <a:p>
+            <a:pPr>
+              <a:spcAft>
+                <a:spcPts val="600"/>
+              </a:spcAft>
+            </a:pPr>
+            <a:r>
+              <a:rPr sz="1500" b="0">
+                <a:solidFill>
+                  <a:srgbClr val="282828"/>
+                </a:solidFill>
+                <a:latin typeface="Arial"/>
+              </a:rPr>
               <a:t>•  Campaign: templates/40_benches/zwfs_dm96 — zwfs_s1.m (five gates: sampling, superposition, reference wave, response, no-dimple control), zwfs_mask.m, zwfs_s1_figs.m (the figures here), zwfs_s1_report.txt, README with the findings chain; plan and rulings in macos/BRIEF_zwfs_campaign.md.</a:t>
             </a:r>
           </a:p>
@@ -3530,6 +5338,22 @@
                 <a:latin typeface="Arial"/>
               </a:rPr>
               <a:t>•  Interferometer comparison column: templates/40_benches/tg_psi_dm96, run 10 (tg96_report.txt).</a:t>
+            </a:r>
+          </a:p>
+          <a:p>
+            <a:pPr>
+              <a:spcAft>
+                <a:spcPts val="600"/>
+              </a:spcAft>
+            </a:pPr>
+            <a:r>
+              <a:rPr sz="1500" b="0">
+                <a:solidFill>
+                  <a:srgbClr val="282828"/>
+                </a:solidFill>
+                <a:latin typeface="Arial"/>
+              </a:rPr>
+              <a:t>•  Literature scan (2026-09-09): macos/REPORT_zwfs_lit_scan.md — twelve papers, ranked, with the PZT verdict for the interferometer and the spec for the iterated-reference-wave reconstructor.</a:t>
             </a:r>
           </a:p>
         </p:txBody>

--- a/demo_session/deck_zwfs.pptx
+++ b/demo_session/deck_zwfs.pptx
@@ -25,6 +25,7 @@
     <p:sldId id="273" r:id="rId24"/>
     <p:sldId id="274" r:id="rId25"/>
     <p:sldId id="275" r:id="rId26"/>
+    <p:sldId id="276" r:id="rId27"/>
   </p:sldIdLst>
   <p:sldSz cx="12191695" cy="6858000" type="screen4x3"/>
   <p:notesSz cx="6858000" cy="9144000"/>
@@ -3157,7 +3158,7 @@
                 </a:solidFill>
                 <a:latin typeface="Arial"/>
               </a:rPr>
-              <a:t>The same 96 mm bench with the reference arm removed: a quarter-wave dimple at focus turns one camera frame into a wavefront measurement — set against the phase-shifting interferometer on the same deformable mirror</a:t>
+              <a:t>The same 96 mm bench with the reference arm removed: a quarter-wave dimple at the focus turns one camera frame into a wavefront measurement — compared with the phase-shifting interferometer on the same deformable mirror</a:t>
             </a:r>
           </a:p>
           <a:p>
@@ -3205,7 +3206,7 @@
                 </a:solidFill>
                 <a:latin typeface="Arial"/>
               </a:rPr>
-              <a:t>DRAFT — pending review.  Campaign status: sensor model corrected (the early sensor was defocused); five readings measured on the corrected model, sampling closed at a 2048 grid, colour and photon pricing re-run; one parameterized runner reproduces every number; vector step pending.</a:t>
+              <a:t>DRAFT — pending review.  Status: the sensor model has been corrected (the early model was out of focus); five ways of reading the frames measured on the corrected model; sampling settled on a 2048 grid; colour and photon budgets re-run; one script with a parameter sheet reproduces every number; the polarizing (vector) version is still to come.</a:t>
             </a:r>
           </a:p>
         </p:txBody>
@@ -3286,7 +3287,7 @@
                 </a:solidFill>
                 <a:latin typeface="Arial"/>
               </a:rPr>
-              <a:t>Colour is no longer a lever</a:t>
+              <a:t>How large a working surface each reading can handle</a:t>
             </a:r>
           </a:p>
           <a:p>
@@ -3302,7 +3303,7 @@
                 </a:solidFill>
                 <a:latin typeface="Arial"/>
               </a:rPr>
-              <a:t>With the transfer null gone, five colours lift the combined transfer 3% instead of 3×, and the combination is neutral or worse on the rows</a:t>
+              <a:t>On 47 actuators at once the one-frame reading is within 15–19% of a 10 nm change up to 40 nm rms of surface and fails at 50; four frames hold to 50–60</a:t>
             </a:r>
           </a:p>
         </p:txBody>
@@ -3351,30 +3352,595 @@
           </a:p>
         </p:txBody>
       </p:sp>
-      <p:pic>
-        <p:nvPicPr>
-          <p:cNvPr id="4" name="Picture 3" descr="crop_zwfs_rec193full_color_L.png"/>
-          <p:cNvPicPr>
-            <a:picLocks noChangeAspect="1"/>
-          </p:cNvPicPr>
+      <p:graphicFrame>
+        <p:nvGraphicFramePr>
+          <p:cNvPr id="4" name="Table 3"/>
+          <p:cNvGraphicFramePr>
+            <a:graphicFrameLocks noGrp="1"/>
+          </p:cNvGraphicFramePr>
           <p:nvPr/>
-        </p:nvPicPr>
-        <p:blipFill>
-          <a:blip r:embed="rId2"/>
-          <a:stretch>
-            <a:fillRect/>
-          </a:stretch>
-        </p:blipFill>
-        <p:spPr>
-          <a:xfrm>
-            <a:off x="2014629" y="1298448"/>
-            <a:ext cx="2600140" cy="2549652"/>
-          </a:xfrm>
-          <a:prstGeom prst="rect">
-            <a:avLst/>
-          </a:prstGeom>
-        </p:spPr>
-      </p:pic>
+        </p:nvGraphicFramePr>
+        <p:xfrm>
+          <a:off x="411480" y="1298448"/>
+          <a:ext cx="11368735" cy="1400175"/>
+        </p:xfrm>
+        <a:graphic>
+          <a:graphicData uri="http://schemas.openxmlformats.org/drawingml/2006/table">
+            <a:tbl>
+              <a:tblPr firstRow="1" bandRow="1">
+                <a:tableStyleId>{5C22544A-7EE6-4342-B048-85BDC9FD1C3A}</a:tableStyleId>
+              </a:tblPr>
+              <a:tblGrid>
+                <a:gridCol w="4743247"/>
+                <a:gridCol w="1656372"/>
+                <a:gridCol w="1656372"/>
+                <a:gridCol w="1656372"/>
+                <a:gridCol w="1656372"/>
+              </a:tblGrid>
+              <a:tr h="280035">
+                <a:tc>
+                  <a:txBody>
+                    <a:bodyPr wrap="square"/>
+                    <a:lstStyle/>
+                    <a:p>
+                      <a:r>
+                        <a:rPr sz="1100" b="1">
+                          <a:solidFill>
+                            <a:srgbClr val="FFFFFF"/>
+                          </a:solidFill>
+                          <a:latin typeface="Arial"/>
+                        </a:rPr>
+                        <a:t>10 nm changes on 47 actuators; gain, read value of 10 nm, floor</a:t>
+                      </a:r>
+                    </a:p>
+                  </a:txBody>
+                  <a:tcPr marL="54864" marR="54864" marT="18288" marB="18288">
+                    <a:solidFill>
+                      <a:srgbClr val="1F4E79"/>
+                    </a:solidFill>
+                  </a:tcPr>
+                </a:tc>
+                <a:tc>
+                  <a:txBody>
+                    <a:bodyPr wrap="square"/>
+                    <a:lstStyle/>
+                    <a:p>
+                      <a:r>
+                        <a:rPr sz="1100" b="1">
+                          <a:solidFill>
+                            <a:srgbClr val="FFFFFF"/>
+                          </a:solidFill>
+                          <a:latin typeface="Arial"/>
+                        </a:rPr>
+                        <a:t>30 nm surface</a:t>
+                      </a:r>
+                    </a:p>
+                  </a:txBody>
+                  <a:tcPr marL="54864" marR="54864" marT="18288" marB="18288">
+                    <a:solidFill>
+                      <a:srgbClr val="1F4E79"/>
+                    </a:solidFill>
+                  </a:tcPr>
+                </a:tc>
+                <a:tc>
+                  <a:txBody>
+                    <a:bodyPr wrap="square"/>
+                    <a:lstStyle/>
+                    <a:p>
+                      <a:r>
+                        <a:rPr sz="1100" b="1">
+                          <a:solidFill>
+                            <a:srgbClr val="FFFFFF"/>
+                          </a:solidFill>
+                          <a:latin typeface="Arial"/>
+                        </a:rPr>
+                        <a:t>40 nm</a:t>
+                      </a:r>
+                    </a:p>
+                  </a:txBody>
+                  <a:tcPr marL="54864" marR="54864" marT="18288" marB="18288">
+                    <a:solidFill>
+                      <a:srgbClr val="1F4E79"/>
+                    </a:solidFill>
+                  </a:tcPr>
+                </a:tc>
+                <a:tc>
+                  <a:txBody>
+                    <a:bodyPr wrap="square"/>
+                    <a:lstStyle/>
+                    <a:p>
+                      <a:r>
+                        <a:rPr sz="1100" b="1">
+                          <a:solidFill>
+                            <a:srgbClr val="FFFFFF"/>
+                          </a:solidFill>
+                          <a:latin typeface="Arial"/>
+                        </a:rPr>
+                        <a:t>50 nm</a:t>
+                      </a:r>
+                    </a:p>
+                  </a:txBody>
+                  <a:tcPr marL="54864" marR="54864" marT="18288" marB="18288">
+                    <a:solidFill>
+                      <a:srgbClr val="1F4E79"/>
+                    </a:solidFill>
+                  </a:tcPr>
+                </a:tc>
+                <a:tc>
+                  <a:txBody>
+                    <a:bodyPr wrap="square"/>
+                    <a:lstStyle/>
+                    <a:p>
+                      <a:r>
+                        <a:rPr sz="1100" b="1">
+                          <a:solidFill>
+                            <a:srgbClr val="FFFFFF"/>
+                          </a:solidFill>
+                          <a:latin typeface="Arial"/>
+                        </a:rPr>
+                        <a:t>60 nm</a:t>
+                      </a:r>
+                    </a:p>
+                  </a:txBody>
+                  <a:tcPr marL="54864" marR="54864" marT="18288" marB="18288">
+                    <a:solidFill>
+                      <a:srgbClr val="1F4E79"/>
+                    </a:solidFill>
+                  </a:tcPr>
+                </a:tc>
+              </a:tr>
+              <a:tr h="280035">
+                <a:tc>
+                  <a:txBody>
+                    <a:bodyPr wrap="square"/>
+                    <a:lstStyle/>
+                    <a:p>
+                      <a:r>
+                        <a:rPr sz="1100" b="0">
+                          <a:solidFill>
+                            <a:srgbClr val="282828"/>
+                          </a:solidFill>
+                          <a:latin typeface="Arial"/>
+                        </a:rPr>
+                        <a:t>96×96, 1 mm pitch — I+ (one frame)</a:t>
+                      </a:r>
+                    </a:p>
+                  </a:txBody>
+                  <a:tcPr marL="54864" marR="54864" marT="18288" marB="18288">
+                    <a:solidFill>
+                      <a:srgbClr val="FFFFFF"/>
+                    </a:solidFill>
+                  </a:tcPr>
+                </a:tc>
+                <a:tc>
+                  <a:txBody>
+                    <a:bodyPr wrap="square"/>
+                    <a:lstStyle/>
+                    <a:p>
+                      <a:r>
+                        <a:rPr sz="1100" b="0">
+                          <a:solidFill>
+                            <a:srgbClr val="282828"/>
+                          </a:solidFill>
+                          <a:latin typeface="Arial"/>
+                        </a:rPr>
+                        <a:t>0.81 → 8.1 nm, 0.31 nm</a:t>
+                      </a:r>
+                    </a:p>
+                  </a:txBody>
+                  <a:tcPr marL="54864" marR="54864" marT="18288" marB="18288">
+                    <a:solidFill>
+                      <a:srgbClr val="FFFFFF"/>
+                    </a:solidFill>
+                  </a:tcPr>
+                </a:tc>
+                <a:tc>
+                  <a:txBody>
+                    <a:bodyPr wrap="square"/>
+                    <a:lstStyle/>
+                    <a:p>
+                      <a:r>
+                        <a:rPr sz="1100" b="0">
+                          <a:solidFill>
+                            <a:srgbClr val="282828"/>
+                          </a:solidFill>
+                          <a:latin typeface="Arial"/>
+                        </a:rPr>
+                        <a:t>0.85 → 8.5 nm, 0.29 nm</a:t>
+                      </a:r>
+                    </a:p>
+                  </a:txBody>
+                  <a:tcPr marL="54864" marR="54864" marT="18288" marB="18288">
+                    <a:solidFill>
+                      <a:srgbClr val="FFFFFF"/>
+                    </a:solidFill>
+                  </a:tcPr>
+                </a:tc>
+                <a:tc>
+                  <a:txBody>
+                    <a:bodyPr wrap="square"/>
+                    <a:lstStyle/>
+                    <a:p>
+                      <a:r>
+                        <a:rPr sz="1100" b="0">
+                          <a:solidFill>
+                            <a:srgbClr val="282828"/>
+                          </a:solidFill>
+                          <a:latin typeface="Arial"/>
+                        </a:rPr>
+                        <a:t>0.76 → 7.6 nm, 0.84 nm</a:t>
+                      </a:r>
+                    </a:p>
+                  </a:txBody>
+                  <a:tcPr marL="54864" marR="54864" marT="18288" marB="18288">
+                    <a:solidFill>
+                      <a:srgbClr val="FFFFFF"/>
+                    </a:solidFill>
+                  </a:tcPr>
+                </a:tc>
+                <a:tc>
+                  <a:txBody>
+                    <a:bodyPr wrap="square"/>
+                    <a:lstStyle/>
+                    <a:p>
+                      <a:r>
+                        <a:rPr sz="1100" b="0">
+                          <a:solidFill>
+                            <a:srgbClr val="282828"/>
+                          </a:solidFill>
+                          <a:latin typeface="Arial"/>
+                        </a:rPr>
+                        <a:t>0.31 → 3.1 nm, 3.3 nm</a:t>
+                      </a:r>
+                    </a:p>
+                  </a:txBody>
+                  <a:tcPr marL="54864" marR="54864" marT="18288" marB="18288">
+                    <a:solidFill>
+                      <a:srgbClr val="FFFFFF"/>
+                    </a:solidFill>
+                  </a:tcPr>
+                </a:tc>
+              </a:tr>
+              <a:tr h="280035">
+                <a:tc>
+                  <a:txBody>
+                    <a:bodyPr wrap="square"/>
+                    <a:lstStyle/>
+                    <a:p>
+                      <a:r>
+                        <a:rPr sz="1100" b="0">
+                          <a:solidFill>
+                            <a:srgbClr val="282828"/>
+                          </a:solidFill>
+                          <a:latin typeface="Arial"/>
+                        </a:rPr>
+                        <a:t>96×96 — S (four frames)</a:t>
+                      </a:r>
+                    </a:p>
+                  </a:txBody>
+                  <a:tcPr marL="54864" marR="54864" marT="18288" marB="18288">
+                    <a:solidFill>
+                      <a:srgbClr val="ECF1F6"/>
+                    </a:solidFill>
+                  </a:tcPr>
+                </a:tc>
+                <a:tc>
+                  <a:txBody>
+                    <a:bodyPr wrap="square"/>
+                    <a:lstStyle/>
+                    <a:p>
+                      <a:r>
+                        <a:rPr sz="1100" b="0">
+                          <a:solidFill>
+                            <a:srgbClr val="282828"/>
+                          </a:solidFill>
+                          <a:latin typeface="Arial"/>
+                        </a:rPr>
+                        <a:t>0.92 → 9.2 nm, 0.32 nm</a:t>
+                      </a:r>
+                    </a:p>
+                  </a:txBody>
+                  <a:tcPr marL="54864" marR="54864" marT="18288" marB="18288">
+                    <a:solidFill>
+                      <a:srgbClr val="ECF1F6"/>
+                    </a:solidFill>
+                  </a:tcPr>
+                </a:tc>
+                <a:tc>
+                  <a:txBody>
+                    <a:bodyPr wrap="square"/>
+                    <a:lstStyle/>
+                    <a:p>
+                      <a:r>
+                        <a:rPr sz="1100" b="0">
+                          <a:solidFill>
+                            <a:srgbClr val="282828"/>
+                          </a:solidFill>
+                          <a:latin typeface="Arial"/>
+                        </a:rPr>
+                        <a:t>0.84 → 8.4 nm, 0.31 nm</a:t>
+                      </a:r>
+                    </a:p>
+                  </a:txBody>
+                  <a:tcPr marL="54864" marR="54864" marT="18288" marB="18288">
+                    <a:solidFill>
+                      <a:srgbClr val="ECF1F6"/>
+                    </a:solidFill>
+                  </a:tcPr>
+                </a:tc>
+                <a:tc>
+                  <a:txBody>
+                    <a:bodyPr wrap="square"/>
+                    <a:lstStyle/>
+                    <a:p>
+                      <a:r>
+                        <a:rPr sz="1100" b="0">
+                          <a:solidFill>
+                            <a:srgbClr val="282828"/>
+                          </a:solidFill>
+                          <a:latin typeface="Arial"/>
+                        </a:rPr>
+                        <a:t>0.83 → 8.3 nm, 0.48 nm</a:t>
+                      </a:r>
+                    </a:p>
+                  </a:txBody>
+                  <a:tcPr marL="54864" marR="54864" marT="18288" marB="18288">
+                    <a:solidFill>
+                      <a:srgbClr val="ECF1F6"/>
+                    </a:solidFill>
+                  </a:tcPr>
+                </a:tc>
+                <a:tc>
+                  <a:txBody>
+                    <a:bodyPr wrap="square"/>
+                    <a:lstStyle/>
+                    <a:p>
+                      <a:r>
+                        <a:rPr sz="1100" b="0">
+                          <a:solidFill>
+                            <a:srgbClr val="282828"/>
+                          </a:solidFill>
+                          <a:latin typeface="Arial"/>
+                        </a:rPr>
+                        <a:t>0.66 → 6.6 nm, 0.65 nm</a:t>
+                      </a:r>
+                    </a:p>
+                  </a:txBody>
+                  <a:tcPr marL="54864" marR="54864" marT="18288" marB="18288">
+                    <a:solidFill>
+                      <a:srgbClr val="ECF1F6"/>
+                    </a:solidFill>
+                  </a:tcPr>
+                </a:tc>
+              </a:tr>
+              <a:tr h="280035">
+                <a:tc>
+                  <a:txBody>
+                    <a:bodyPr wrap="square"/>
+                    <a:lstStyle/>
+                    <a:p>
+                      <a:r>
+                        <a:rPr sz="1100" b="0">
+                          <a:solidFill>
+                            <a:srgbClr val="282828"/>
+                          </a:solidFill>
+                          <a:latin typeface="Arial"/>
+                        </a:rPr>
+                        <a:t>48×48, 2 mm pitch — I+</a:t>
+                      </a:r>
+                    </a:p>
+                  </a:txBody>
+                  <a:tcPr marL="54864" marR="54864" marT="18288" marB="18288">
+                    <a:solidFill>
+                      <a:srgbClr val="FFFFFF"/>
+                    </a:solidFill>
+                  </a:tcPr>
+                </a:tc>
+                <a:tc>
+                  <a:txBody>
+                    <a:bodyPr wrap="square"/>
+                    <a:lstStyle/>
+                    <a:p>
+                      <a:r>
+                        <a:rPr sz="1100" b="0">
+                          <a:solidFill>
+                            <a:srgbClr val="282828"/>
+                          </a:solidFill>
+                          <a:latin typeface="Arial"/>
+                        </a:rPr>
+                        <a:t>0.89 → 8.9 nm, 0.16 nm</a:t>
+                      </a:r>
+                    </a:p>
+                  </a:txBody>
+                  <a:tcPr marL="54864" marR="54864" marT="18288" marB="18288">
+                    <a:solidFill>
+                      <a:srgbClr val="FFFFFF"/>
+                    </a:solidFill>
+                  </a:tcPr>
+                </a:tc>
+                <a:tc>
+                  <a:txBody>
+                    <a:bodyPr wrap="square"/>
+                    <a:lstStyle/>
+                    <a:p>
+                      <a:r>
+                        <a:rPr sz="1100" b="0">
+                          <a:solidFill>
+                            <a:srgbClr val="282828"/>
+                          </a:solidFill>
+                          <a:latin typeface="Arial"/>
+                        </a:rPr>
+                        <a:t>0.80 → 8.0 nm, 0.20 nm</a:t>
+                      </a:r>
+                    </a:p>
+                  </a:txBody>
+                  <a:tcPr marL="54864" marR="54864" marT="18288" marB="18288">
+                    <a:solidFill>
+                      <a:srgbClr val="FFFFFF"/>
+                    </a:solidFill>
+                  </a:tcPr>
+                </a:tc>
+                <a:tc>
+                  <a:txBody>
+                    <a:bodyPr wrap="square"/>
+                    <a:lstStyle/>
+                    <a:p>
+                      <a:r>
+                        <a:rPr sz="1100" b="0">
+                          <a:solidFill>
+                            <a:srgbClr val="282828"/>
+                          </a:solidFill>
+                          <a:latin typeface="Arial"/>
+                        </a:rPr>
+                        <a:t>0.84 → 8.4 nm, 0.21 nm</a:t>
+                      </a:r>
+                    </a:p>
+                  </a:txBody>
+                  <a:tcPr marL="54864" marR="54864" marT="18288" marB="18288">
+                    <a:solidFill>
+                      <a:srgbClr val="FFFFFF"/>
+                    </a:solidFill>
+                  </a:tcPr>
+                </a:tc>
+                <a:tc>
+                  <a:txBody>
+                    <a:bodyPr wrap="square"/>
+                    <a:lstStyle/>
+                    <a:p>
+                      <a:r>
+                        <a:rPr sz="1100" b="0">
+                          <a:solidFill>
+                            <a:srgbClr val="282828"/>
+                          </a:solidFill>
+                          <a:latin typeface="Arial"/>
+                        </a:rPr>
+                        <a:t>0.83 → 8.3 nm, 3.0 nm</a:t>
+                      </a:r>
+                    </a:p>
+                  </a:txBody>
+                  <a:tcPr marL="54864" marR="54864" marT="18288" marB="18288">
+                    <a:solidFill>
+                      <a:srgbClr val="FFFFFF"/>
+                    </a:solidFill>
+                  </a:tcPr>
+                </a:tc>
+              </a:tr>
+              <a:tr h="280035">
+                <a:tc>
+                  <a:txBody>
+                    <a:bodyPr wrap="square"/>
+                    <a:lstStyle/>
+                    <a:p>
+                      <a:r>
+                        <a:rPr sz="1100" b="0">
+                          <a:solidFill>
+                            <a:srgbClr val="282828"/>
+                          </a:solidFill>
+                          <a:latin typeface="Arial"/>
+                        </a:rPr>
+                        <a:t>48×48 — S</a:t>
+                      </a:r>
+                    </a:p>
+                  </a:txBody>
+                  <a:tcPr marL="54864" marR="54864" marT="18288" marB="18288">
+                    <a:solidFill>
+                      <a:srgbClr val="ECF1F6"/>
+                    </a:solidFill>
+                  </a:tcPr>
+                </a:tc>
+                <a:tc>
+                  <a:txBody>
+                    <a:bodyPr wrap="square"/>
+                    <a:lstStyle/>
+                    <a:p>
+                      <a:r>
+                        <a:rPr sz="1100" b="0">
+                          <a:solidFill>
+                            <a:srgbClr val="282828"/>
+                          </a:solidFill>
+                          <a:latin typeface="Arial"/>
+                        </a:rPr>
+                        <a:t>0.89 → 8.9 nm, 0.18 nm</a:t>
+                      </a:r>
+                    </a:p>
+                  </a:txBody>
+                  <a:tcPr marL="54864" marR="54864" marT="18288" marB="18288">
+                    <a:solidFill>
+                      <a:srgbClr val="ECF1F6"/>
+                    </a:solidFill>
+                  </a:tcPr>
+                </a:tc>
+                <a:tc>
+                  <a:txBody>
+                    <a:bodyPr wrap="square"/>
+                    <a:lstStyle/>
+                    <a:p>
+                      <a:r>
+                        <a:rPr sz="1100" b="0">
+                          <a:solidFill>
+                            <a:srgbClr val="282828"/>
+                          </a:solidFill>
+                          <a:latin typeface="Arial"/>
+                        </a:rPr>
+                        <a:t>0.83 → 8.3 nm, 0.19 nm</a:t>
+                      </a:r>
+                    </a:p>
+                  </a:txBody>
+                  <a:tcPr marL="54864" marR="54864" marT="18288" marB="18288">
+                    <a:solidFill>
+                      <a:srgbClr val="ECF1F6"/>
+                    </a:solidFill>
+                  </a:tcPr>
+                </a:tc>
+                <a:tc>
+                  <a:txBody>
+                    <a:bodyPr wrap="square"/>
+                    <a:lstStyle/>
+                    <a:p>
+                      <a:r>
+                        <a:rPr sz="1100" b="0">
+                          <a:solidFill>
+                            <a:srgbClr val="282828"/>
+                          </a:solidFill>
+                          <a:latin typeface="Arial"/>
+                        </a:rPr>
+                        <a:t>0.99 → 9.9 nm, 0.61 nm</a:t>
+                      </a:r>
+                    </a:p>
+                  </a:txBody>
+                  <a:tcPr marL="54864" marR="54864" marT="18288" marB="18288">
+                    <a:solidFill>
+                      <a:srgbClr val="ECF1F6"/>
+                    </a:solidFill>
+                  </a:tcPr>
+                </a:tc>
+                <a:tc>
+                  <a:txBody>
+                    <a:bodyPr wrap="square"/>
+                    <a:lstStyle/>
+                    <a:p>
+                      <a:r>
+                        <a:rPr sz="1100" b="0">
+                          <a:solidFill>
+                            <a:srgbClr val="282828"/>
+                          </a:solidFill>
+                          <a:latin typeface="Arial"/>
+                        </a:rPr>
+                        <a:t>0.55 → 5.5 nm, 0.48 nm</a:t>
+                      </a:r>
+                    </a:p>
+                  </a:txBody>
+                  <a:tcPr marL="54864" marR="54864" marT="18288" marB="18288">
+                    <a:solidFill>
+                      <a:srgbClr val="ECF1F6"/>
+                    </a:solidFill>
+                  </a:tcPr>
+                </a:tc>
+              </a:tr>
+            </a:tbl>
+          </a:graphicData>
+        </a:graphic>
+      </p:graphicFrame>
       <p:sp>
         <p:nvSpPr>
           <p:cNvPr id="5" name="TextBox 4"/>
@@ -3383,8 +3949,8 @@
         </p:nvSpPr>
         <p:spPr>
           <a:xfrm>
-            <a:off x="411480" y="3866387"/>
-            <a:ext cx="5806440" cy="559307"/>
+            <a:off x="411480" y="2844927"/>
+            <a:ext cx="11368735" cy="274320"/>
           </a:xfrm>
           <a:prstGeom prst="rect">
             <a:avLst/>
@@ -3397,19 +3963,51 @@
           </a:bodyPr>
           <a:lstStyle/>
           <a:p>
-            <a:pPr algn="ctr">
+            <a:pPr>
               <a:spcAft>
-                <a:spcPts val="0"/>
+                <a:spcPts val="600"/>
               </a:spcAft>
             </a:pPr>
             <a:r>
-              <a:rPr sz="1000" b="0">
-                <a:solidFill>
-                  <a:srgbClr val="6E6E6E"/>
+              <a:rPr sz="1500" b="0">
+                <a:solidFill>
+                  <a:srgbClr val="282828"/>
                 </a:solidFill>
                 <a:latin typeface="Arial"/>
               </a:rPr>
-              <a:t>Modal transfer of the linear reading at five wavelengths on the corrected model: no null, only the dimple's low-order dip that moves with the spot's size in λ/D; the five-colour combination (orange) sits at 0.99–1.</a:t>
+              <a:t>•  What gain means here: these gains are after the flat-DM calibration, so 0.81 means a 10 nm change reads 8.1 nm — a 19% error the calibration did not remove, because the sensor's response on a 30 nm surface differs from its response on a flat.  The floor is a second error on top: 0.3 nm spread over the 47 sites' neighbours.</a:t>
+            </a:r>
+          </a:p>
+          <a:p>
+            <a:pPr>
+              <a:spcAft>
+                <a:spcPts val="600"/>
+              </a:spcAft>
+            </a:pPr>
+            <a:r>
+              <a:rPr sz="1500" b="0">
+                <a:solidFill>
+                  <a:srgbClr val="282828"/>
+                </a:solidFill>
+                <a:latin typeface="Arial"/>
+              </a:rPr>
+              <a:t>•  Can calibration absorb it?  Only if it is done on the working surface itself, and only as far as the gain is stable: I+ moves 0.81 → 0.85 between 30 and 40 nm rms, so a calibration made at 30 nm would be 5% off at 40.  Calibrating on the working surface is the next measurement (last slide).  The failure at 50–60 nm is not a gain to calibrate: the floor jumps to 1–3 nm because some of the 47 sites fall past the sign fold.</a:t>
+            </a:r>
+          </a:p>
+          <a:p>
+            <a:pPr>
+              <a:spcAft>
+                <a:spcPts val="600"/>
+              </a:spcAft>
+            </a:pPr>
+            <a:r>
+              <a:rPr sz="1500" b="0">
+                <a:solidFill>
+                  <a:srgbClr val="282828"/>
+                </a:solidFill>
+                <a:latin typeface="Arial"/>
+              </a:rPr>
+              <a:t>•  Why the earlier "holds to 60 nm" moved: it was one actuator at one site.  Past 120 nm rms every reading aliases.</a:t>
             </a:r>
           </a:p>
         </p:txBody>
@@ -3422,8 +4020,8 @@
         </p:nvSpPr>
         <p:spPr>
           <a:xfrm>
-            <a:off x="6400800" y="1298448"/>
-            <a:ext cx="5394960" cy="274320"/>
+            <a:off x="411480" y="5283326"/>
+            <a:ext cx="11368735" cy="274320"/>
           </a:xfrm>
           <a:prstGeom prst="rect">
             <a:avLst/>
@@ -3442,84 +4040,13 @@
               </a:spcAft>
             </a:pPr>
             <a:r>
-              <a:rPr sz="1200" b="0">
-                <a:solidFill>
-                  <a:srgbClr val="282828"/>
+              <a:rPr sz="1050" b="0">
+                <a:solidFill>
+                  <a:srgbClr val="6E6E6E"/>
                 </a:solidFill>
                 <a:latin typeface="Arial"/>
               </a:rPr>
-              <a:t>•  What moved: the "blind band near 30 cycles per aperture that migrates with wavelength" was the defocused sensor's Talbot null.  On the corrected model the five single-colour transfers bottom at 0.92–0.97 after the Wiener step and the combination at 0.991.</a:t>
-            </a:r>
-          </a:p>
-          <a:p>
-            <a:pPr>
-              <a:spcAft>
-                <a:spcPts val="600"/>
-              </a:spcAft>
-            </a:pPr>
-            <a:r>
-              <a:rPr sz="1200" b="0">
-                <a:solidFill>
-                  <a:srgbClr val="282828"/>
-                </a:solidFill>
-                <a:latin typeface="Arial"/>
-              </a:rPr>
-              <a:t>•  On the rows (30 nm working surface, single 10 nm change): I+ at 632.8 nm SNR 269, five-colour combination 183, best pair 700+780 nm 255; the 47-site case 32 → 32.  The linear reading gets worse under combination (84 → 34): at 480 nm the dimple is 2.1 rad and the small-phase reading turns negative on this surface, and an equal-weight combiner inherits it.</a:t>
-            </a:r>
-          </a:p>
-          <a:p>
-            <a:pPr>
-              <a:spcAft>
-                <a:spcPts val="600"/>
-              </a:spcAft>
-            </a:pPr>
-            <a:r>
-              <a:rPr sz="1200" b="0">
-                <a:solidFill>
-                  <a:srgbClr val="282828"/>
-                </a:solidFill>
-                <a:latin typeface="Arial"/>
-              </a:rPr>
-              <a:t>•  What stays chromatic is range: 780 nm is the best single colour on nearly every row — a smaller phase per nanometre of height and a 1.6 λ/D dimple.  The interferometer is unchanged at every colour (its deck).</a:t>
-            </a:r>
-          </a:p>
-        </p:txBody>
-      </p:sp>
-      <p:sp>
-        <p:nvSpPr>
-          <p:cNvPr id="7" name="TextBox 6"/>
-          <p:cNvSpPr txBox="1"/>
-          <p:nvPr/>
-        </p:nvSpPr>
-        <p:spPr>
-          <a:xfrm>
-            <a:off x="6400800" y="4331208"/>
-            <a:ext cx="5394960" cy="274320"/>
-          </a:xfrm>
-          <a:prstGeom prst="rect">
-            <a:avLst/>
-          </a:prstGeom>
-          <a:noFill/>
-        </p:spPr>
-        <p:txBody>
-          <a:bodyPr wrap="square">
-            <a:spAutoFit/>
-          </a:bodyPr>
-          <a:lstStyle/>
-          <a:p>
-            <a:pPr>
-              <a:spcAft>
-                <a:spcPts val="600"/>
-              </a:spcAft>
-            </a:pPr>
-            <a:r>
-              <a:rPr sz="1050" b="0">
-                <a:solidFill>
-                  <a:srgbClr val="6E6E6E"/>
-                </a:solidFill>
-                <a:latin typeface="Arial"/>
-              </a:rPr>
-              <a:t>632.8 / 480 / 532 / 700 / 780 nm through one physical mask, every calibration redone per colour; record configuration (193 rays, 1024 grid); runs/rec193full.</a:t>
+              <a:t>Floor here = spread of the unchanged actuators under 47 simultaneous 10 nm changes (their crosstalk), larger than the single-site floor on slide 8.  Fully sampled setup; record: runs/m2048.</a:t>
             </a:r>
           </a:p>
         </p:txBody>
@@ -3576,7 +4103,7 @@
                 </a:solidFill>
                 <a:latin typeface="Arial"/>
               </a:rPr>
-              <a:t>Photons: 10¹⁴ per DM state reaches 1 pm</a:t>
+              <a:t>Colour is no longer a lever</a:t>
             </a:r>
           </a:p>
           <a:p>
@@ -3592,7 +4119,7 @@
                 </a:solidFill>
                 <a:latin typeface="Arial"/>
               </a:rPr>
-              <a:t>Every reading prices within a factor of three, 25× cheaper than the defocused sensor's pricing; the branch prior's own noise costs 5%</a:t>
+              <a:t>With the sensor's null gone, five colours raise the combined response by 3% instead of 3×, and do nothing for the measurement rows</a:t>
             </a:r>
           </a:p>
         </p:txBody>
@@ -3643,7 +4170,7 @@
       </p:sp>
       <p:pic>
         <p:nvPicPr>
-          <p:cNvPr id="4" name="Picture 3" descr="zwfs_rec193full_noise.png"/>
+          <p:cNvPr id="4" name="Picture 3" descr="crop_zwfs_rec193full_color_L.png"/>
           <p:cNvPicPr>
             <a:picLocks noChangeAspect="1"/>
           </p:cNvPicPr>
@@ -3657,8 +4184,8 @@
         </p:blipFill>
         <p:spPr>
           <a:xfrm>
-            <a:off x="1600240" y="1298448"/>
-            <a:ext cx="3428919" cy="2714752"/>
+            <a:off x="2014629" y="1298448"/>
+            <a:ext cx="2600140" cy="2549652"/>
           </a:xfrm>
           <a:prstGeom prst="rect">
             <a:avLst/>
@@ -3673,8 +4200,8 @@
         </p:nvSpPr>
         <p:spPr>
           <a:xfrm>
-            <a:off x="411480" y="4031488"/>
-            <a:ext cx="5806440" cy="394208"/>
+            <a:off x="411480" y="3866387"/>
+            <a:ext cx="5806440" cy="559307"/>
           </a:xfrm>
           <a:prstGeom prst="rect">
             <a:avLst/>
@@ -3699,368 +4226,20 @@
                 </a:solidFill>
                 <a:latin typeface="Arial"/>
               </a:rPr>
-              <a:t>Noise on the single-actuator estimate against photons per DM state, per reading; the dotted line is the 1 pm target.</a:t>
-            </a:r>
-          </a:p>
-        </p:txBody>
-      </p:sp>
-      <p:graphicFrame>
-        <p:nvGraphicFramePr>
-          <p:cNvPr id="6" name="Table 5"/>
-          <p:cNvGraphicFramePr>
-            <a:graphicFrameLocks noGrp="1"/>
-          </p:cNvGraphicFramePr>
-          <p:nvPr/>
-        </p:nvGraphicFramePr>
-        <p:xfrm>
-          <a:off x="6400800" y="1298448"/>
-          <a:ext cx="5394959" cy="1840230"/>
-        </p:xfrm>
-        <a:graphic>
-          <a:graphicData uri="http://schemas.openxmlformats.org/drawingml/2006/table">
-            <a:tbl>
-              <a:tblPr firstRow="1" bandRow="1">
-                <a:tableStyleId>{5C22544A-7EE6-4342-B048-85BDC9FD1C3A}</a:tableStyleId>
-              </a:tblPr>
-              <a:tblGrid>
-                <a:gridCol w="2203575"/>
-                <a:gridCol w="3191384"/>
-              </a:tblGrid>
-              <a:tr h="262890">
-                <a:tc>
-                  <a:txBody>
-                    <a:bodyPr wrap="square"/>
-                    <a:lstStyle/>
-                    <a:p>
-                      <a:r>
-                        <a:rPr sz="1000" b="1">
-                          <a:solidFill>
-                            <a:srgbClr val="FFFFFF"/>
-                          </a:solidFill>
-                          <a:latin typeface="Arial"/>
-                        </a:rPr>
-                        <a:t>reading</a:t>
-                      </a:r>
-                    </a:p>
-                  </a:txBody>
-                  <a:tcPr marL="54864" marR="54864" marT="18288" marB="18288">
-                    <a:solidFill>
-                      <a:srgbClr val="1F4E79"/>
-                    </a:solidFill>
-                  </a:tcPr>
-                </a:tc>
-                <a:tc>
-                  <a:txBody>
-                    <a:bodyPr wrap="square"/>
-                    <a:lstStyle/>
-                    <a:p>
-                      <a:r>
-                        <a:rPr sz="1000" b="1">
-                          <a:solidFill>
-                            <a:srgbClr val="FFFFFF"/>
-                          </a:solidFill>
-                          <a:latin typeface="Arial"/>
-                        </a:rPr>
-                        <a:t>photons per state for 1 pm</a:t>
-                      </a:r>
-                    </a:p>
-                  </a:txBody>
-                  <a:tcPr marL="54864" marR="54864" marT="18288" marB="18288">
-                    <a:solidFill>
-                      <a:srgbClr val="1F4E79"/>
-                    </a:solidFill>
-                  </a:tcPr>
-                </a:tc>
-              </a:tr>
-              <a:tr h="262890">
-                <a:tc>
-                  <a:txBody>
-                    <a:bodyPr wrap="square"/>
-                    <a:lstStyle/>
-                    <a:p>
-                      <a:r>
-                        <a:rPr sz="1000" b="0">
-                          <a:solidFill>
-                            <a:srgbClr val="282828"/>
-                          </a:solidFill>
-                          <a:latin typeface="Arial"/>
-                        </a:rPr>
-                        <a:t>linear (L)</a:t>
-                      </a:r>
-                    </a:p>
-                  </a:txBody>
-                  <a:tcPr marL="54864" marR="54864" marT="18288" marB="18288">
-                    <a:solidFill>
-                      <a:srgbClr val="FFFFFF"/>
-                    </a:solidFill>
-                  </a:tcPr>
-                </a:tc>
-                <a:tc>
-                  <a:txBody>
-                    <a:bodyPr wrap="square"/>
-                    <a:lstStyle/>
-                    <a:p>
-                      <a:r>
-                        <a:rPr sz="1000" b="0">
-                          <a:solidFill>
-                            <a:srgbClr val="282828"/>
-                          </a:solidFill>
-                          <a:latin typeface="Arial"/>
-                        </a:rPr>
-                        <a:t>5.4×10¹³</a:t>
-                      </a:r>
-                    </a:p>
-                  </a:txBody>
-                  <a:tcPr marL="54864" marR="54864" marT="18288" marB="18288">
-                    <a:solidFill>
-                      <a:srgbClr val="FFFFFF"/>
-                    </a:solidFill>
-                  </a:tcPr>
-                </a:tc>
-              </a:tr>
-              <a:tr h="262890">
-                <a:tc>
-                  <a:txBody>
-                    <a:bodyPr wrap="square"/>
-                    <a:lstStyle/>
-                    <a:p>
-                      <a:r>
-                        <a:rPr sz="1000" b="0">
-                          <a:solidFill>
-                            <a:srgbClr val="282828"/>
-                          </a:solidFill>
-                          <a:latin typeface="Arial"/>
-                        </a:rPr>
-                        <a:t>exact, frozen reference (F)</a:t>
-                      </a:r>
-                    </a:p>
-                  </a:txBody>
-                  <a:tcPr marL="54864" marR="54864" marT="18288" marB="18288">
-                    <a:solidFill>
-                      <a:srgbClr val="ECF1F6"/>
-                    </a:solidFill>
-                  </a:tcPr>
-                </a:tc>
-                <a:tc>
-                  <a:txBody>
-                    <a:bodyPr wrap="square"/>
-                    <a:lstStyle/>
-                    <a:p>
-                      <a:r>
-                        <a:rPr sz="1000" b="0">
-                          <a:solidFill>
-                            <a:srgbClr val="282828"/>
-                          </a:solidFill>
-                          <a:latin typeface="Arial"/>
-                        </a:rPr>
-                        <a:t>3.7×10¹³</a:t>
-                      </a:r>
-                    </a:p>
-                  </a:txBody>
-                  <a:tcPr marL="54864" marR="54864" marT="18288" marB="18288">
-                    <a:solidFill>
-                      <a:srgbClr val="ECF1F6"/>
-                    </a:solidFill>
-                  </a:tcPr>
-                </a:tc>
-              </a:tr>
-              <a:tr h="262890">
-                <a:tc>
-                  <a:txBody>
-                    <a:bodyPr wrap="square"/>
-                    <a:lstStyle/>
-                    <a:p>
-                      <a:r>
-                        <a:rPr sz="1000" b="0">
-                          <a:solidFill>
-                            <a:srgbClr val="282828"/>
-                          </a:solidFill>
-                          <a:latin typeface="Arial"/>
-                        </a:rPr>
-                        <a:t>exact, iterated reference (I)</a:t>
-                      </a:r>
-                    </a:p>
-                  </a:txBody>
-                  <a:tcPr marL="54864" marR="54864" marT="18288" marB="18288">
-                    <a:solidFill>
-                      <a:srgbClr val="FFFFFF"/>
-                    </a:solidFill>
-                  </a:tcPr>
-                </a:tc>
-                <a:tc>
-                  <a:txBody>
-                    <a:bodyPr wrap="square"/>
-                    <a:lstStyle/>
-                    <a:p>
-                      <a:r>
-                        <a:rPr sz="1000" b="0">
-                          <a:solidFill>
-                            <a:srgbClr val="282828"/>
-                          </a:solidFill>
-                          <a:latin typeface="Arial"/>
-                        </a:rPr>
-                        <a:t>6.4×10¹³</a:t>
-                      </a:r>
-                    </a:p>
-                  </a:txBody>
-                  <a:tcPr marL="54864" marR="54864" marT="18288" marB="18288">
-                    <a:solidFill>
-                      <a:srgbClr val="FFFFFF"/>
-                    </a:solidFill>
-                  </a:tcPr>
-                </a:tc>
-              </a:tr>
-              <a:tr h="262890">
-                <a:tc>
-                  <a:txBody>
-                    <a:bodyPr wrap="square"/>
-                    <a:lstStyle/>
-                    <a:p>
-                      <a:r>
-                        <a:rPr sz="1000" b="0">
-                          <a:solidFill>
-                            <a:srgbClr val="282828"/>
-                          </a:solidFill>
-                          <a:latin typeface="Arial"/>
-                        </a:rPr>
-                        <a:t>I + refined base prior (I+)</a:t>
-                      </a:r>
-                    </a:p>
-                  </a:txBody>
-                  <a:tcPr marL="54864" marR="54864" marT="18288" marB="18288">
-                    <a:solidFill>
-                      <a:srgbClr val="ECF1F6"/>
-                    </a:solidFill>
-                  </a:tcPr>
-                </a:tc>
-                <a:tc>
-                  <a:txBody>
-                    <a:bodyPr wrap="square"/>
-                    <a:lstStyle/>
-                    <a:p>
-                      <a:r>
-                        <a:rPr sz="1000" b="0">
-                          <a:solidFill>
-                            <a:srgbClr val="282828"/>
-                          </a:solidFill>
-                          <a:latin typeface="Arial"/>
-                        </a:rPr>
-                        <a:t>8.8×10¹³ (8.4×10¹³ with a noiseless prior)</a:t>
-                      </a:r>
-                    </a:p>
-                  </a:txBody>
-                  <a:tcPr marL="54864" marR="54864" marT="18288" marB="18288">
-                    <a:solidFill>
-                      <a:srgbClr val="ECF1F6"/>
-                    </a:solidFill>
-                  </a:tcPr>
-                </a:tc>
-              </a:tr>
-              <a:tr h="262890">
-                <a:tc>
-                  <a:txBody>
-                    <a:bodyPr wrap="square"/>
-                    <a:lstStyle/>
-                    <a:p>
-                      <a:r>
-                        <a:rPr sz="1000" b="0">
-                          <a:solidFill>
-                            <a:srgbClr val="282828"/>
-                          </a:solidFill>
-                          <a:latin typeface="Arial"/>
-                        </a:rPr>
-                        <a:t>phase-stepped (S)</a:t>
-                      </a:r>
-                    </a:p>
-                  </a:txBody>
-                  <a:tcPr marL="54864" marR="54864" marT="18288" marB="18288">
-                    <a:solidFill>
-                      <a:srgbClr val="FFFFFF"/>
-                    </a:solidFill>
-                  </a:tcPr>
-                </a:tc>
-                <a:tc>
-                  <a:txBody>
-                    <a:bodyPr wrap="square"/>
-                    <a:lstStyle/>
-                    <a:p>
-                      <a:r>
-                        <a:rPr sz="1000" b="0">
-                          <a:solidFill>
-                            <a:srgbClr val="282828"/>
-                          </a:solidFill>
-                          <a:latin typeface="Arial"/>
-                        </a:rPr>
-                        <a:t>1.0×10¹⁴</a:t>
-                      </a:r>
-                    </a:p>
-                  </a:txBody>
-                  <a:tcPr marL="54864" marR="54864" marT="18288" marB="18288">
-                    <a:solidFill>
-                      <a:srgbClr val="FFFFFF"/>
-                    </a:solidFill>
-                  </a:tcPr>
-                </a:tc>
-              </a:tr>
-              <a:tr h="262890">
-                <a:tc>
-                  <a:txBody>
-                    <a:bodyPr wrap="square"/>
-                    <a:lstStyle/>
-                    <a:p>
-                      <a:r>
-                        <a:rPr sz="1000" b="0">
-                          <a:solidFill>
-                            <a:srgbClr val="282828"/>
-                          </a:solidFill>
-                          <a:latin typeface="Arial"/>
-                        </a:rPr>
-                        <a:t>interferometer, four-step</a:t>
-                      </a:r>
-                    </a:p>
-                  </a:txBody>
-                  <a:tcPr marL="54864" marR="54864" marT="18288" marB="18288">
-                    <a:solidFill>
-                      <a:srgbClr val="ECF1F6"/>
-                    </a:solidFill>
-                  </a:tcPr>
-                </a:tc>
-                <a:tc>
-                  <a:txBody>
-                    <a:bodyPr wrap="square"/>
-                    <a:lstStyle/>
-                    <a:p>
-                      <a:r>
-                        <a:rPr sz="1000" b="0">
-                          <a:solidFill>
-                            <a:srgbClr val="282828"/>
-                          </a:solidFill>
-                          <a:latin typeface="Arial"/>
-                        </a:rPr>
-                        <a:t>8×10¹⁴</a:t>
-                      </a:r>
-                    </a:p>
-                  </a:txBody>
-                  <a:tcPr marL="54864" marR="54864" marT="18288" marB="18288">
-                    <a:solidFill>
-                      <a:srgbClr val="ECF1F6"/>
-                    </a:solidFill>
-                  </a:tcPr>
-                </a:tc>
-              </a:tr>
-            </a:tbl>
-          </a:graphicData>
-        </a:graphic>
-      </p:graphicFrame>
-      <p:sp>
-        <p:nvSpPr>
-          <p:cNvPr id="7" name="TextBox 6"/>
+              <a:t>Response by spatial frequency of the linear reading at five wavelengths on the corrected model: no null, only the dimple's own low-order dip, which moves with the spot's size in λ/D; the five-colour combination (orange) sits at 0.99 to 1.</a:t>
+            </a:r>
+          </a:p>
+        </p:txBody>
+      </p:sp>
+      <p:sp>
+        <p:nvSpPr>
+          <p:cNvPr id="6" name="TextBox 5"/>
           <p:cNvSpPr txBox="1"/>
           <p:nvPr/>
         </p:nvSpPr>
         <p:spPr>
           <a:xfrm>
-            <a:off x="6400800" y="3284982"/>
+            <a:off x="6400800" y="1298448"/>
             <a:ext cx="5394960" cy="274320"/>
           </a:xfrm>
           <a:prstGeom prst="rect">
@@ -4086,7 +4265,7 @@
                 </a:solidFill>
                 <a:latin typeface="Arial"/>
               </a:rPr>
-              <a:t>•  Method: noiseless frames captured once per state, shot noise added numerically, eight realizations per point; the photon budget per state is shared by a reading's frames (one, or four).  Each reading's high-photon floor converges to its systematic floor on slide 6.</a:t>
+              <a:t>•  What moved: the "blind band near 30 cycles across the pupil that shifts with wavelength" was the out-of-focus model's Talbot null.  On the corrected model each colour's response bottoms at 0.92 to 0.97 after the frequency correction, and the combination at 0.991.</a:t>
             </a:r>
           </a:p>
           <a:p>
@@ -4102,20 +4281,36 @@
                 </a:solidFill>
                 <a:latin typeface="Arial"/>
               </a:rPr>
-              <a:t>•  Reading: 10¹⁴ photons at 633 nm is 30 µJ — the 1 pm budget is systematics and gain stability, not light.</a:t>
-            </a:r>
-          </a:p>
-        </p:txBody>
-      </p:sp>
-      <p:sp>
-        <p:nvSpPr>
-          <p:cNvPr id="8" name="TextBox 7"/>
+              <a:t>•  On the measurement rows (30 nm surface, single 10 nm change): I+ at 632.8 nm SNR 269; five colours combined 183; best pair, 700 + 780 nm, 255.  The 47-site case: 32 → 32.  The linear reading gets worse when combined (84 → 34): at 480 nm the dimple delay is 2.1 rad and the small-phase reading turns negative on this surface; an equal-weight combination inherits that.</a:t>
+            </a:r>
+          </a:p>
+          <a:p>
+            <a:pPr>
+              <a:spcAft>
+                <a:spcPts val="600"/>
+              </a:spcAft>
+            </a:pPr>
+            <a:r>
+              <a:rPr sz="1200" b="0">
+                <a:solidFill>
+                  <a:srgbClr val="282828"/>
+                </a:solidFill>
+                <a:latin typeface="Arial"/>
+              </a:rPr>
+              <a:t>•  What stays with colour is range: 780 nm is the best single colour on nearly every row — less phase per nanometre of height, and a 1.6 λ/D dimple.  The interferometer is unchanged at every colour (its deck).</a:t>
+            </a:r>
+          </a:p>
+        </p:txBody>
+      </p:sp>
+      <p:sp>
+        <p:nvSpPr>
+          <p:cNvPr id="7" name="TextBox 6"/>
           <p:cNvSpPr txBox="1"/>
           <p:nvPr/>
         </p:nvSpPr>
         <p:spPr>
           <a:xfrm>
-            <a:off x="6400800" y="4790694"/>
+            <a:off x="6400800" y="4331208"/>
             <a:ext cx="5394960" cy="274320"/>
           </a:xfrm>
           <a:prstGeom prst="rect">
@@ -4141,7 +4336,7 @@
                 </a:solidFill>
                 <a:latin typeface="Arial"/>
               </a:rPr>
-              <a:t>Scenario: the head-to-head row (single 10 nm change on the 30 nm working surface, 96×96, record configuration).  Read noise, drift and calibration noise are the next terms once a use case fixes them.  Records: runs/rec193full; interferometer tg96_s5noise_report.txt.</a:t>
+              <a:t>632.8 / 480 / 532 / 700 / 780 nm through one physical mask, every calibration redone per colour; development sampling (193 rays, 1024 grid); runs/rec193full.</a:t>
             </a:r>
           </a:p>
         </p:txBody>
@@ -4198,7 +4393,7 @@
                 </a:solidFill>
                 <a:latin typeface="Arial"/>
               </a:rPr>
-              <a:t>Run it yourself</a:t>
+              <a:t>Photons: 10¹⁴ per state reaches 1 pm</a:t>
             </a:r>
           </a:p>
           <a:p>
@@ -4214,7 +4409,7 @@
                 </a:solidFill>
                 <a:latin typeface="Arial"/>
               </a:rPr>
-              <a:t>One parameter sheet and one entry point reproduce every number here; the defaults reproduce the S7 record to the last printed digit</a:t>
+              <a:t>Every reading needs about the same light, 25× less than the out-of-focus model said; the sign map's own noise costs 5%</a:t>
             </a:r>
           </a:p>
         </p:txBody>
@@ -4263,16 +4458,40 @@
           </a:p>
         </p:txBody>
       </p:sp>
-      <p:sp>
-        <p:nvSpPr>
-          <p:cNvPr id="4" name="TextBox 3"/>
+      <p:pic>
+        <p:nvPicPr>
+          <p:cNvPr id="4" name="Picture 3" descr="zwfs_rec193full_noise.png"/>
+          <p:cNvPicPr>
+            <a:picLocks noChangeAspect="1"/>
+          </p:cNvPicPr>
+          <p:nvPr/>
+        </p:nvPicPr>
+        <p:blipFill>
+          <a:blip r:embed="rId2"/>
+          <a:stretch>
+            <a:fillRect/>
+          </a:stretch>
+        </p:blipFill>
+        <p:spPr>
+          <a:xfrm>
+            <a:off x="1600240" y="1298448"/>
+            <a:ext cx="3428919" cy="2714752"/>
+          </a:xfrm>
+          <a:prstGeom prst="rect">
+            <a:avLst/>
+          </a:prstGeom>
+        </p:spPr>
+      </p:pic>
+      <p:sp>
+        <p:nvSpPr>
+          <p:cNvPr id="5" name="TextBox 4"/>
           <p:cNvSpPr txBox="1"/>
           <p:nvPr/>
         </p:nvSpPr>
         <p:spPr>
           <a:xfrm>
-            <a:off x="411480" y="1298448"/>
-            <a:ext cx="11368735" cy="274320"/>
+            <a:off x="411480" y="4031488"/>
+            <a:ext cx="5806440" cy="394208"/>
           </a:xfrm>
           <a:prstGeom prst="rect">
             <a:avLst/>
@@ -4285,34 +4504,34 @@
           </a:bodyPr>
           <a:lstStyle/>
           <a:p>
-            <a:pPr>
+            <a:pPr algn="ctr">
               <a:spcAft>
-                <a:spcPts val="600"/>
+                <a:spcPts val="0"/>
               </a:spcAft>
             </a:pPr>
             <a:r>
-              <a:rPr sz="1500" b="0">
-                <a:solidFill>
-                  <a:srgbClr val="282828"/>
+              <a:rPr sz="1000" b="0">
+                <a:solidFill>
+                  <a:srgbClr val="6E6E6E"/>
                 </a:solidFill>
                 <a:latin typeface="Arial"/>
               </a:rPr>
-              <a:t>•  Two files: zwfs_params.m returns every knob at its value of record — engine grid and ray count, wavelength, the bench's lengths and tuned figures, the mask's etch and spot, the sampling budget, registration, the DM configurations, the battery's amplitudes and seeds, the colour and noise stages; zwfs_run.m runs the selected stages and writes the report, a .mat and the figures into a run folder named by its tag.</a:t>
+              <a:t>Noise on the single-actuator estimate against photons per state, per reading; the dotted line is the 1 pm target.</a:t>
             </a:r>
           </a:p>
         </p:txBody>
       </p:sp>
       <p:graphicFrame>
         <p:nvGraphicFramePr>
-          <p:cNvPr id="5" name="Table 4"/>
+          <p:cNvPr id="6" name="Table 5"/>
           <p:cNvGraphicFramePr>
             <a:graphicFrameLocks noGrp="1"/>
           </p:cNvGraphicFramePr>
           <p:nvPr/>
         </p:nvGraphicFramePr>
         <p:xfrm>
-          <a:off x="411480" y="2465831"/>
-          <a:ext cx="11368734" cy="1680210"/>
+          <a:off x="6400800" y="1298448"/>
+          <a:ext cx="5394959" cy="1840230"/>
         </p:xfrm>
         <a:graphic>
           <a:graphicData uri="http://schemas.openxmlformats.org/drawingml/2006/table">
@@ -4321,23 +4540,23 @@
                 <a:tableStyleId>{5C22544A-7EE6-4342-B048-85BDC9FD1C3A}</a:tableStyleId>
               </a:tblPr>
               <a:tblGrid>
-                <a:gridCol w="6936855"/>
-                <a:gridCol w="4431879"/>
+                <a:gridCol w="2131342"/>
+                <a:gridCol w="3263617"/>
               </a:tblGrid>
-              <a:tr h="280035">
-                <a:tc>
-                  <a:txBody>
-                    <a:bodyPr wrap="square"/>
-                    <a:lstStyle/>
-                    <a:p>
-                      <a:r>
-                        <a:rPr sz="1100" b="1">
+              <a:tr h="262890">
+                <a:tc>
+                  <a:txBody>
+                    <a:bodyPr wrap="square"/>
+                    <a:lstStyle/>
+                    <a:p>
+                      <a:r>
+                        <a:rPr sz="1000" b="1">
                           <a:solidFill>
                             <a:srgbClr val="FFFFFF"/>
                           </a:solidFill>
                           <a:latin typeface="Arial"/>
                         </a:rPr>
-                        <a:t>call</a:t>
+                        <a:t>reading</a:t>
                       </a:r>
                     </a:p>
                   </a:txBody>
@@ -4353,13 +4572,13 @@
                     <a:lstStyle/>
                     <a:p>
                       <a:r>
-                        <a:rPr sz="1100" b="1">
+                        <a:rPr sz="1000" b="1">
                           <a:solidFill>
                             <a:srgbClr val="FFFFFF"/>
                           </a:solidFill>
                           <a:latin typeface="Arial"/>
                         </a:rPr>
-                        <a:t>what it does</a:t>
+                        <a:t>photons per state for 1 pm</a:t>
                       </a:r>
                     </a:p>
                   </a:txBody>
@@ -4370,20 +4589,20 @@
                   </a:tcPr>
                 </a:tc>
               </a:tr>
-              <a:tr h="280035">
-                <a:tc>
-                  <a:txBody>
-                    <a:bodyPr wrap="square"/>
-                    <a:lstStyle/>
-                    <a:p>
-                      <a:r>
-                        <a:rPr sz="1100" b="0">
-                          <a:solidFill>
-                            <a:srgbClr val="282828"/>
-                          </a:solidFill>
-                          <a:latin typeface="Arial"/>
-                        </a:rPr>
-                        <a:t>zwfs_run</a:t>
+              <a:tr h="262890">
+                <a:tc>
+                  <a:txBody>
+                    <a:bodyPr wrap="square"/>
+                    <a:lstStyle/>
+                    <a:p>
+                      <a:r>
+                        <a:rPr sz="1000" b="0">
+                          <a:solidFill>
+                            <a:srgbClr val="282828"/>
+                          </a:solidFill>
+                          <a:latin typeface="Arial"/>
+                        </a:rPr>
+                        <a:t>linear (L)</a:t>
                       </a:r>
                     </a:p>
                   </a:txBody>
@@ -4399,13 +4618,13 @@
                     <a:lstStyle/>
                     <a:p>
                       <a:r>
-                        <a:rPr sz="1100" b="0">
-                          <a:solidFill>
-                            <a:srgbClr val="282828"/>
-                          </a:solidFill>
-                          <a:latin typeface="Arial"/>
-                        </a:rPr>
-                        <a:t>the record: bench checks, battery, figures</a:t>
+                        <a:rPr sz="1000" b="0">
+                          <a:solidFill>
+                            <a:srgbClr val="282828"/>
+                          </a:solidFill>
+                          <a:latin typeface="Arial"/>
+                        </a:rPr>
+                        <a:t>5.4×10¹³</a:t>
                       </a:r>
                     </a:p>
                   </a:txBody>
@@ -4416,20 +4635,20 @@
                   </a:tcPr>
                 </a:tc>
               </a:tr>
-              <a:tr h="280035">
-                <a:tc>
-                  <a:txBody>
-                    <a:bodyPr wrap="square"/>
-                    <a:lstStyle/>
-                    <a:p>
-                      <a:r>
-                        <a:rPr sz="1100" b="0">
-                          <a:solidFill>
-                            <a:srgbClr val="282828"/>
-                          </a:solidFill>
-                          <a:latin typeface="Arial"/>
-                        </a:rPr>
-                        <a:t>zwfs_run('tag','ng385', 'NGRID',385)</a:t>
+              <a:tr h="262890">
+                <a:tc>
+                  <a:txBody>
+                    <a:bodyPr wrap="square"/>
+                    <a:lstStyle/>
+                    <a:p>
+                      <a:r>
+                        <a:rPr sz="1000" b="0">
+                          <a:solidFill>
+                            <a:srgbClr val="282828"/>
+                          </a:solidFill>
+                          <a:latin typeface="Arial"/>
+                        </a:rPr>
+                        <a:t>exact, flat-DM reference (F)</a:t>
                       </a:r>
                     </a:p>
                   </a:txBody>
@@ -4445,13 +4664,13 @@
                     <a:lstStyle/>
                     <a:p>
                       <a:r>
-                        <a:rPr sz="1100" b="0">
-                          <a:solidFill>
-                            <a:srgbClr val="282828"/>
-                          </a:solidFill>
-                          <a:latin typeface="Arial"/>
-                        </a:rPr>
-                        <a:t>the 1 Mpix-class camera</a:t>
+                        <a:rPr sz="1000" b="0">
+                          <a:solidFill>
+                            <a:srgbClr val="282828"/>
+                          </a:solidFill>
+                          <a:latin typeface="Arial"/>
+                        </a:rPr>
+                        <a:t>3.7×10¹³</a:t>
                       </a:r>
                     </a:p>
                   </a:txBody>
@@ -4462,20 +4681,20 @@
                   </a:tcPr>
                 </a:tc>
               </a:tr>
-              <a:tr h="280035">
-                <a:tc>
-                  <a:txBody>
-                    <a:bodyPr wrap="square"/>
-                    <a:lstStyle/>
-                    <a:p>
-                      <a:r>
-                        <a:rPr sz="1100" b="0">
-                          <a:solidFill>
-                            <a:srgbClr val="282828"/>
-                          </a:solidFill>
-                          <a:latin typeface="Arial"/>
-                        </a:rPr>
-                        <a:t>zwfs_run('MODEL',2048, 'NGRID',385, 'param_file','macos_param_2048.txt')</a:t>
+              <a:tr h="262890">
+                <a:tc>
+                  <a:txBody>
+                    <a:bodyPr wrap="square"/>
+                    <a:lstStyle/>
+                    <a:p>
+                      <a:r>
+                        <a:rPr sz="1000" b="0">
+                          <a:solidFill>
+                            <a:srgbClr val="282828"/>
+                          </a:solidFill>
+                          <a:latin typeface="Arial"/>
+                        </a:rPr>
+                        <a:t>exact, re-computed reference (I)</a:t>
                       </a:r>
                     </a:p>
                   </a:txBody>
@@ -4491,13 +4710,13 @@
                     <a:lstStyle/>
                     <a:p>
                       <a:r>
-                        <a:rPr sz="1100" b="0">
-                          <a:solidFill>
-                            <a:srgbClr val="282828"/>
-                          </a:solidFill>
-                          <a:latin typeface="Arial"/>
-                        </a:rPr>
-                        <a:t>the compliant configuration on a 30 GB machine</a:t>
+                        <a:rPr sz="1000" b="0">
+                          <a:solidFill>
+                            <a:srgbClr val="282828"/>
+                          </a:solidFill>
+                          <a:latin typeface="Arial"/>
+                        </a:rPr>
+                        <a:t>6.4×10¹³</a:t>
                       </a:r>
                     </a:p>
                   </a:txBody>
@@ -4508,20 +4727,20 @@
                   </a:tcPr>
                 </a:tc>
               </a:tr>
-              <a:tr h="280035">
-                <a:tc>
-                  <a:txBody>
-                    <a:bodyPr wrap="square"/>
-                    <a:lstStyle/>
-                    <a:p>
-                      <a:r>
-                        <a:rPr sz="1100" b="0">
-                          <a:solidFill>
-                            <a:srgbClr val="282828"/>
-                          </a:solidFill>
-                          <a:latin typeface="Arial"/>
-                        </a:rPr>
-                        <a:t>zwfs_run('stages',{'battery','color','noise','figs'})</a:t>
+              <a:tr h="262890">
+                <a:tc>
+                  <a:txBody>
+                    <a:bodyPr wrap="square"/>
+                    <a:lstStyle/>
+                    <a:p>
+                      <a:r>
+                        <a:rPr sz="1000" b="0">
+                          <a:solidFill>
+                            <a:srgbClr val="282828"/>
+                          </a:solidFill>
+                          <a:latin typeface="Arial"/>
+                        </a:rPr>
+                        <a:t>I with the sign map (I+)</a:t>
                       </a:r>
                     </a:p>
                   </a:txBody>
@@ -4537,13 +4756,13 @@
                     <a:lstStyle/>
                     <a:p>
                       <a:r>
-                        <a:rPr sz="1100" b="0">
-                          <a:solidFill>
-                            <a:srgbClr val="282828"/>
-                          </a:solidFill>
-                          <a:latin typeface="Arial"/>
-                        </a:rPr>
-                        <a:t>everything on this deck's later slides</a:t>
+                        <a:rPr sz="1000" b="0">
+                          <a:solidFill>
+                            <a:srgbClr val="282828"/>
+                          </a:solidFill>
+                          <a:latin typeface="Arial"/>
+                        </a:rPr>
+                        <a:t>8.8×10¹³ (8.4×10¹³ if the sign map is noise-free)</a:t>
                       </a:r>
                     </a:p>
                   </a:txBody>
@@ -4554,20 +4773,20 @@
                   </a:tcPr>
                 </a:tc>
               </a:tr>
-              <a:tr h="280035">
-                <a:tc>
-                  <a:txBody>
-                    <a:bodyPr wrap="square"/>
-                    <a:lstStyle/>
-                    <a:p>
-                      <a:r>
-                        <a:rPr sz="1100" b="0">
-                          <a:solidFill>
-                            <a:srgbClr val="282828"/>
-                          </a:solidFill>
-                          <a:latin typeface="Arial"/>
-                        </a:rPr>
-                        <a:t>./zwfs_batch.sh TAG "the same arguments"</a:t>
+              <a:tr h="262890">
+                <a:tc>
+                  <a:txBody>
+                    <a:bodyPr wrap="square"/>
+                    <a:lstStyle/>
+                    <a:p>
+                      <a:r>
+                        <a:rPr sz="1000" b="0">
+                          <a:solidFill>
+                            <a:srgbClr val="282828"/>
+                          </a:solidFill>
+                          <a:latin typeface="Arial"/>
+                        </a:rPr>
+                        <a:t>phase-stepped (S)</a:t>
                       </a:r>
                     </a:p>
                   </a:txBody>
@@ -4583,19 +4802,65 @@
                     <a:lstStyle/>
                     <a:p>
                       <a:r>
-                        <a:rPr sz="1100" b="0">
-                          <a:solidFill>
-                            <a:srgbClr val="282828"/>
-                          </a:solidFill>
-                          <a:latin typeface="Arial"/>
-                        </a:rPr>
-                        <a:t>headless, memory-capped, logged</a:t>
+                        <a:rPr sz="1000" b="0">
+                          <a:solidFill>
+                            <a:srgbClr val="282828"/>
+                          </a:solidFill>
+                          <a:latin typeface="Arial"/>
+                        </a:rPr>
+                        <a:t>1.0×10¹⁴</a:t>
                       </a:r>
                     </a:p>
                   </a:txBody>
                   <a:tcPr marL="54864" marR="54864" marT="18288" marB="18288">
                     <a:solidFill>
                       <a:srgbClr val="FFFFFF"/>
+                    </a:solidFill>
+                  </a:tcPr>
+                </a:tc>
+              </a:tr>
+              <a:tr h="262890">
+                <a:tc>
+                  <a:txBody>
+                    <a:bodyPr wrap="square"/>
+                    <a:lstStyle/>
+                    <a:p>
+                      <a:r>
+                        <a:rPr sz="1000" b="0">
+                          <a:solidFill>
+                            <a:srgbClr val="282828"/>
+                          </a:solidFill>
+                          <a:latin typeface="Arial"/>
+                        </a:rPr>
+                        <a:t>interferometer, four-step</a:t>
+                      </a:r>
+                    </a:p>
+                  </a:txBody>
+                  <a:tcPr marL="54864" marR="54864" marT="18288" marB="18288">
+                    <a:solidFill>
+                      <a:srgbClr val="ECF1F6"/>
+                    </a:solidFill>
+                  </a:tcPr>
+                </a:tc>
+                <a:tc>
+                  <a:txBody>
+                    <a:bodyPr wrap="square"/>
+                    <a:lstStyle/>
+                    <a:p>
+                      <a:r>
+                        <a:rPr sz="1000" b="0">
+                          <a:solidFill>
+                            <a:srgbClr val="282828"/>
+                          </a:solidFill>
+                          <a:latin typeface="Arial"/>
+                        </a:rPr>
+                        <a:t>8×10¹⁴</a:t>
+                      </a:r>
+                    </a:p>
+                  </a:txBody>
+                  <a:tcPr marL="54864" marR="54864" marT="18288" marB="18288">
+                    <a:solidFill>
+                      <a:srgbClr val="ECF1F6"/>
                     </a:solidFill>
                   </a:tcPr>
                 </a:tc>
@@ -4606,14 +4871,14 @@
       </p:graphicFrame>
       <p:sp>
         <p:nvSpPr>
-          <p:cNvPr id="6" name="TextBox 5"/>
+          <p:cNvPr id="7" name="TextBox 6"/>
           <p:cNvSpPr txBox="1"/>
           <p:nvPr/>
         </p:nvSpPr>
         <p:spPr>
           <a:xfrm>
-            <a:off x="411480" y="4292346"/>
-            <a:ext cx="11368735" cy="274320"/>
+            <a:off x="6400800" y="3284982"/>
+            <a:ext cx="5394960" cy="274320"/>
           </a:xfrm>
           <a:prstGeom prst="rect">
             <a:avLst/>
@@ -4632,27 +4897,43 @@
               </a:spcAft>
             </a:pPr>
             <a:r>
-              <a:rPr sz="1500" b="0">
+              <a:rPr sz="1200" b="0">
                 <a:solidFill>
                   <a:srgbClr val="282828"/>
                 </a:solidFill>
                 <a:latin typeface="Arial"/>
               </a:rPr>
-              <a:t>•  Checks that run every time: the round trip through the mask bracket (must be the identity), the reference-wave surrogate against the engine's field, the pupil amplitude's independence of the DM state, the sampling budget (dimple pixels; pixels per actuator), and the parity/sign search of the camera-to-DM registration.</a:t>
-            </a:r>
-          </a:p>
-        </p:txBody>
-      </p:sp>
-      <p:sp>
-        <p:nvSpPr>
-          <p:cNvPr id="7" name="TextBox 6"/>
+              <a:t>•  Method: noise-free frames are calculated once per state; photon shot noise is added numerically, eight trials per point.  A state's photons are shared by the frames the reading needs (one, or four for S).  Each reading's high-photon floor converges to its systematic floor on slide 8.</a:t>
+            </a:r>
+          </a:p>
+          <a:p>
+            <a:pPr>
+              <a:spcAft>
+                <a:spcPts val="600"/>
+              </a:spcAft>
+            </a:pPr>
+            <a:r>
+              <a:rPr sz="1200" b="0">
+                <a:solidFill>
+                  <a:srgbClr val="282828"/>
+                </a:solidFill>
+                <a:latin typeface="Arial"/>
+              </a:rPr>
+              <a:t>•  Reading: 10¹⁴ photons at 633 nm is 30 µJ.  The 1 pm budget is about systematic errors and gain stability, not light.</a:t>
+            </a:r>
+          </a:p>
+        </p:txBody>
+      </p:sp>
+      <p:sp>
+        <p:nvSpPr>
+          <p:cNvPr id="8" name="TextBox 7"/>
           <p:cNvSpPr txBox="1"/>
           <p:nvPr/>
         </p:nvSpPr>
         <p:spPr>
           <a:xfrm>
-            <a:off x="411480" y="5212080"/>
-            <a:ext cx="11368735" cy="274320"/>
+            <a:off x="6400800" y="4988814"/>
+            <a:ext cx="5394960" cy="274320"/>
           </a:xfrm>
           <a:prstGeom prst="rect">
             <a:avLst/>
@@ -4677,7 +4958,7 @@
                 </a:solidFill>
                 <a:latin typeface="Arial"/>
               </a:rPr>
-              <a:t>Equivalence check: 64 row and ladder lines against the S7 report, 8 differ in the last printed digit (the actuator fit's solver tolerance).  README "Run it yourself" carries the parameter table.</a:t>
+              <a:t>Case: a single 10 nm change on the 30 nm surface, 96×96, development sampling.  Read noise, drift and calibration noise are the next terms once a use case fixes them.  Records: runs/rec193full; interferometer tg96_s5noise_report.txt.</a:t>
             </a:r>
           </a:p>
         </p:txBody>
@@ -4734,7 +5015,7 @@
                 </a:solidFill>
                 <a:latin typeface="Arial"/>
               </a:rPr>
-              <a:t>Side by side with the Twyman–Green</a:t>
+              <a:t>Run it yourself</a:t>
             </a:r>
           </a:p>
           <a:p>
@@ -4750,7 +5031,7 @@
                 </a:solidFill>
                 <a:latin typeface="Arial"/>
               </a:rPr>
-              <a:t>The interferometer dims at fine patterns and never folds; the sensor reads a change from one frame at the same floor and folds past 40–60 nm</a:t>
+              <a:t>One parameter sheet and one script reproduce every number here; the defaults reproduce the stage-7 record to the last printed digit</a:t>
             </a:r>
           </a:p>
         </p:txBody>
@@ -4799,17 +5080,56 @@
           </a:p>
         </p:txBody>
       </p:sp>
+      <p:sp>
+        <p:nvSpPr>
+          <p:cNvPr id="4" name="TextBox 3"/>
+          <p:cNvSpPr txBox="1"/>
+          <p:nvPr/>
+        </p:nvSpPr>
+        <p:spPr>
+          <a:xfrm>
+            <a:off x="411480" y="1298448"/>
+            <a:ext cx="11368735" cy="274320"/>
+          </a:xfrm>
+          <a:prstGeom prst="rect">
+            <a:avLst/>
+          </a:prstGeom>
+          <a:noFill/>
+        </p:spPr>
+        <p:txBody>
+          <a:bodyPr wrap="square">
+            <a:spAutoFit/>
+          </a:bodyPr>
+          <a:lstStyle/>
+          <a:p>
+            <a:pPr>
+              <a:spcAft>
+                <a:spcPts val="600"/>
+              </a:spcAft>
+            </a:pPr>
+            <a:r>
+              <a:rPr sz="1500" b="0">
+                <a:solidFill>
+                  <a:srgbClr val="282828"/>
+                </a:solidFill>
+                <a:latin typeface="Arial"/>
+              </a:rPr>
+              <a:t>•  Two files: zwfs_params.m returns every setting at its value of record — grid and ray count, wavelength, the bench's lengths and tuned figures, the mask's etch and spot, the sampling checks, registration, the DM sizes, the test amplitudes and seeds, the colour and photon stages.  zwfs_run.m runs the chosen stages and writes the report, a .mat file and the figures into a folder named by the run's tag.</a:t>
+            </a:r>
+          </a:p>
+        </p:txBody>
+      </p:sp>
       <p:graphicFrame>
         <p:nvGraphicFramePr>
-          <p:cNvPr id="4" name="Table 3"/>
+          <p:cNvPr id="5" name="Table 4"/>
           <p:cNvGraphicFramePr>
             <a:graphicFrameLocks noGrp="1"/>
           </p:cNvGraphicFramePr>
           <p:nvPr/>
         </p:nvGraphicFramePr>
         <p:xfrm>
-          <a:off x="411480" y="1298448"/>
-          <a:ext cx="11368734" cy="2800350"/>
+          <a:off x="411480" y="2465831"/>
+          <a:ext cx="11368735" cy="1680210"/>
         </p:xfrm>
         <a:graphic>
           <a:graphicData uri="http://schemas.openxmlformats.org/drawingml/2006/table">
@@ -4818,16 +5138,25 @@
                 <a:tableStyleId>{5C22544A-7EE6-4342-B048-85BDC9FD1C3A}</a:tableStyleId>
               </a:tblPr>
               <a:tblGrid>
-                <a:gridCol w="3315881"/>
-                <a:gridCol w="3552729"/>
-                <a:gridCol w="4500124"/>
+                <a:gridCol w="6601201"/>
+                <a:gridCol w="4767534"/>
               </a:tblGrid>
               <a:tr h="280035">
                 <a:tc>
                   <a:txBody>
                     <a:bodyPr wrap="square"/>
                     <a:lstStyle/>
-                    <a:p/>
+                    <a:p>
+                      <a:r>
+                        <a:rPr sz="1100" b="1">
+                          <a:solidFill>
+                            <a:srgbClr val="FFFFFF"/>
+                          </a:solidFill>
+                          <a:latin typeface="Arial"/>
+                        </a:rPr>
+                        <a:t>call</a:t>
+                      </a:r>
+                    </a:p>
                   </a:txBody>
                   <a:tcPr marL="54864" marR="54864" marT="18288" marB="18288">
                     <a:solidFill>
@@ -4847,29 +5176,7 @@
                           </a:solidFill>
                           <a:latin typeface="Arial"/>
                         </a:rPr>
-                        <a:t>Twyman–Green PSI (measured)</a:t>
-                      </a:r>
-                    </a:p>
-                  </a:txBody>
-                  <a:tcPr marL="54864" marR="54864" marT="18288" marB="18288">
-                    <a:solidFill>
-                      <a:srgbClr val="1F4E79"/>
-                    </a:solidFill>
-                  </a:tcPr>
-                </a:tc>
-                <a:tc>
-                  <a:txBody>
-                    <a:bodyPr wrap="square"/>
-                    <a:lstStyle/>
-                    <a:p>
-                      <a:r>
-                        <a:rPr sz="1100" b="1">
-                          <a:solidFill>
-                            <a:srgbClr val="FFFFFF"/>
-                          </a:solidFill>
-                          <a:latin typeface="Arial"/>
-                        </a:rPr>
-                        <a:t>Zernike sensor (measured)</a:t>
+                        <a:t>what it does</a:t>
                       </a:r>
                     </a:p>
                   </a:txBody>
@@ -4893,7 +5200,7 @@
                           </a:solidFill>
                           <a:latin typeface="Arial"/>
                         </a:rPr>
-                        <a:t>reference beam</a:t>
+                        <a:t>zwfs_run</a:t>
                       </a:r>
                     </a:p>
                   </a:txBody>
@@ -4915,29 +5222,7 @@
                           </a:solidFill>
                           <a:latin typeface="Arial"/>
                         </a:rPr>
-                        <a:t>the second arm's flat</a:t>
-                      </a:r>
-                    </a:p>
-                  </a:txBody>
-                  <a:tcPr marL="54864" marR="54864" marT="18288" marB="18288">
-                    <a:solidFill>
-                      <a:srgbClr val="FFFFFF"/>
-                    </a:solidFill>
-                  </a:tcPr>
-                </a:tc>
-                <a:tc>
-                  <a:txBody>
-                    <a:bodyPr wrap="square"/>
-                    <a:lstStyle/>
-                    <a:p>
-                      <a:r>
-                        <a:rPr sz="1100" b="0">
-                          <a:solidFill>
-                            <a:srgbClr val="282828"/>
-                          </a:solidFill>
-                          <a:latin typeface="Arial"/>
-                        </a:rPr>
-                        <a:t>made from the beam's own focal core</a:t>
+                        <a:t>the record: bench checks, the full test set, figures</a:t>
                       </a:r>
                     </a:p>
                   </a:txBody>
@@ -4961,7 +5246,7 @@
                           </a:solidFill>
                           <a:latin typeface="Arial"/>
                         </a:rPr>
-                        <a:t>one measurement costs</a:t>
+                        <a:t>zwfs_run('tag','ng385', 'NGRID',385)</a:t>
                       </a:r>
                     </a:p>
                   </a:txBody>
@@ -4983,29 +5268,7 @@
                           </a:solidFill>
                           <a:latin typeface="Arial"/>
                         </a:rPr>
-                        <a:t>6 traces (3 per arm), 4 fringe frames</a:t>
-                      </a:r>
-                    </a:p>
-                  </a:txBody>
-                  <a:tcPr marL="54864" marR="54864" marT="18288" marB="18288">
-                    <a:solidFill>
-                      <a:srgbClr val="ECF1F6"/>
-                    </a:solidFill>
-                  </a:tcPr>
-                </a:tc>
-                <a:tc>
-                  <a:txBody>
-                    <a:bodyPr wrap="square"/>
-                    <a:lstStyle/>
-                    <a:p>
-                      <a:r>
-                        <a:rPr sz="1100" b="0">
-                          <a:solidFill>
-                            <a:srgbClr val="282828"/>
-                          </a:solidFill>
-                          <a:latin typeface="Arial"/>
-                        </a:rPr>
-                        <a:t>1 camera frame (I+; base 4 frames once)</a:t>
+                        <a:t>the 1-megapixel camera</a:t>
                       </a:r>
                     </a:p>
                   </a:txBody>
@@ -5029,7 +5292,7 @@
                           </a:solidFill>
                           <a:latin typeface="Arial"/>
                         </a:rPr>
-                        <a:t>polarization hardware</a:t>
+                        <a:t>zwfs_run('MODEL',2048, 'NGRID',385, 'param_file','macos_param_2048.txt')</a:t>
                       </a:r>
                     </a:p>
                   </a:txBody>
@@ -5051,29 +5314,7 @@
                           </a:solidFill>
                           <a:latin typeface="Arial"/>
                         </a:rPr>
-                        <a:t>polarizer, 5 waveplates, analyzer</a:t>
-                      </a:r>
-                    </a:p>
-                  </a:txBody>
-                  <a:tcPr marL="54864" marR="54864" marT="18288" marB="18288">
-                    <a:solidFill>
-                      <a:srgbClr val="FFFFFF"/>
-                    </a:solidFill>
-                  </a:tcPr>
-                </a:tc>
-                <a:tc>
-                  <a:txBody>
-                    <a:bodyPr wrap="square"/>
-                    <a:lstStyle/>
-                    <a:p>
-                      <a:r>
-                        <a:rPr sz="1100" b="0">
-                          <a:solidFill>
-                            <a:srgbClr val="282828"/>
-                          </a:solidFill>
-                          <a:latin typeface="Arial"/>
-                        </a:rPr>
-                        <a:t>none</a:t>
+                        <a:t>the fully sampled setup on a 30 GB machine</a:t>
                       </a:r>
                     </a:p>
                   </a:txBody>
@@ -5097,7 +5338,7 @@
                           </a:solidFill>
                           <a:latin typeface="Arial"/>
                         </a:rPr>
-                        <a:t>moving parts</a:t>
+                        <a:t>zwfs_run('stages',{'battery','color','noise','figs'})</a:t>
                       </a:r>
                     </a:p>
                   </a:txBody>
@@ -5119,29 +5360,7 @@
                           </a:solidFill>
                           <a:latin typeface="Arial"/>
                         </a:rPr>
-                        <a:t>none (polarization-stepped)</a:t>
-                      </a:r>
-                    </a:p>
-                  </a:txBody>
-                  <a:tcPr marL="54864" marR="54864" marT="18288" marB="18288">
-                    <a:solidFill>
-                      <a:srgbClr val="ECF1F6"/>
-                    </a:solidFill>
-                  </a:tcPr>
-                </a:tc>
-                <a:tc>
-                  <a:txBody>
-                    <a:bodyPr wrap="square"/>
-                    <a:lstStyle/>
-                    <a:p>
-                      <a:r>
-                        <a:rPr sz="1100" b="0">
-                          <a:solidFill>
-                            <a:srgbClr val="282828"/>
-                          </a:solidFill>
-                          <a:latin typeface="Arial"/>
-                        </a:rPr>
-                        <a:t>none</a:t>
+                        <a:t>everything on this deck's later slides</a:t>
                       </a:r>
                     </a:p>
                   </a:txBody>
@@ -5165,7 +5384,7 @@
                           </a:solidFill>
                           <a:latin typeface="Arial"/>
                         </a:rPr>
-                        <a:t>null, nothing aligned</a:t>
+                        <a:t>./zwfs_batch.sh TAG "the same arguments"</a:t>
                       </a:r>
                     </a:p>
                   </a:txBody>
@@ -5187,301 +5406,7 @@
                           </a:solidFill>
                           <a:latin typeface="Arial"/>
                         </a:rPr>
-                        <a:t>0.134 nm</a:t>
-                      </a:r>
-                    </a:p>
-                  </a:txBody>
-                  <a:tcPr marL="54864" marR="54864" marT="18288" marB="18288">
-                    <a:solidFill>
-                      <a:srgbClr val="FFFFFF"/>
-                    </a:solidFill>
-                  </a:tcPr>
-                </a:tc>
-                <a:tc>
-                  <a:txBody>
-                    <a:bodyPr wrap="square"/>
-                    <a:lstStyle/>
-                    <a:p>
-                      <a:r>
-                        <a:rPr sz="1100" b="0">
-                          <a:solidFill>
-                            <a:srgbClr val="282828"/>
-                          </a:solidFill>
-                          <a:latin typeface="Arial"/>
-                        </a:rPr>
-                        <a:t>0 by construction (the flat is the reference)</a:t>
-                      </a:r>
-                    </a:p>
-                  </a:txBody>
-                  <a:tcPr marL="54864" marR="54864" marT="18288" marB="18288">
-                    <a:solidFill>
-                      <a:srgbClr val="FFFFFF"/>
-                    </a:solidFill>
-                  </a:tcPr>
-                </a:tc>
-              </a:tr>
-              <a:tr h="280035">
-                <a:tc>
-                  <a:txBody>
-                    <a:bodyPr wrap="square"/>
-                    <a:lstStyle/>
-                    <a:p>
-                      <a:r>
-                        <a:rPr sz="1100" b="0">
-                          <a:solidFill>
-                            <a:srgbClr val="282828"/>
-                          </a:solidFill>
-                          <a:latin typeface="Arial"/>
-                        </a:rPr>
-                        <a:t>response rolls off at</a:t>
-                      </a:r>
-                    </a:p>
-                  </a:txBody>
-                  <a:tcPr marL="54864" marR="54864" marT="18288" marB="18288">
-                    <a:solidFill>
-                      <a:srgbClr val="ECF1F6"/>
-                    </a:solidFill>
-                  </a:tcPr>
-                </a:tc>
-                <a:tc>
-                  <a:txBody>
-                    <a:bodyPr wrap="square"/>
-                    <a:lstStyle/>
-                    <a:p>
-                      <a:r>
-                        <a:rPr sz="1100" b="0">
-                          <a:solidFill>
-                            <a:srgbClr val="282828"/>
-                          </a:solidFill>
-                          <a:latin typeface="Arial"/>
-                        </a:rPr>
-                        <a:t>fine patterns: 0.50 at the 96×96 checkerboard</a:t>
-                      </a:r>
-                    </a:p>
-                  </a:txBody>
-                  <a:tcPr marL="54864" marR="54864" marT="18288" marB="18288">
-                    <a:solidFill>
-                      <a:srgbClr val="ECF1F6"/>
-                    </a:solidFill>
-                  </a:tcPr>
-                </a:tc>
-                <a:tc>
-                  <a:txBody>
-                    <a:bodyPr wrap="square"/>
-                    <a:lstStyle/>
-                    <a:p>
-                      <a:r>
-                        <a:rPr sz="1100" b="0">
-                          <a:solidFill>
-                            <a:srgbClr val="282828"/>
-                          </a:solidFill>
-                          <a:latin typeface="Arial"/>
-                        </a:rPr>
-                        <a:t>0.5–1 cycle per aperture (0.5 at 1); piston unseen</a:t>
-                      </a:r>
-                    </a:p>
-                  </a:txBody>
-                  <a:tcPr marL="54864" marR="54864" marT="18288" marB="18288">
-                    <a:solidFill>
-                      <a:srgbClr val="ECF1F6"/>
-                    </a:solidFill>
-                  </a:tcPr>
-                </a:tc>
-              </a:tr>
-              <a:tr h="280035">
-                <a:tc>
-                  <a:txBody>
-                    <a:bodyPr wrap="square"/>
-                    <a:lstStyle/>
-                    <a:p>
-                      <a:r>
-                        <a:rPr sz="1100" b="0">
-                          <a:solidFill>
-                            <a:srgbClr val="282828"/>
-                          </a:solidFill>
-                          <a:latin typeface="Arial"/>
-                        </a:rPr>
-                        <a:t>working-surface range</a:t>
-                      </a:r>
-                    </a:p>
-                  </a:txBody>
-                  <a:tcPr marL="54864" marR="54864" marT="18288" marB="18288">
-                    <a:solidFill>
-                      <a:srgbClr val="FFFFFF"/>
-                    </a:solidFill>
-                  </a:tcPr>
-                </a:tc>
-                <a:tc>
-                  <a:txBody>
-                    <a:bodyPr wrap="square"/>
-                    <a:lstStyle/>
-                    <a:p>
-                      <a:r>
-                        <a:rPr sz="1100" b="0">
-                          <a:solidFill>
-                            <a:srgbClr val="282828"/>
-                          </a:solidFill>
-                          <a:latin typeface="Arial"/>
-                        </a:rPr>
-                        <a:t>to 480 nm rms and beyond</a:t>
-                      </a:r>
-                    </a:p>
-                  </a:txBody>
-                  <a:tcPr marL="54864" marR="54864" marT="18288" marB="18288">
-                    <a:solidFill>
-                      <a:srgbClr val="FFFFFF"/>
-                    </a:solidFill>
-                  </a:tcPr>
-                </a:tc>
-                <a:tc>
-                  <a:txBody>
-                    <a:bodyPr wrap="square"/>
-                    <a:lstStyle/>
-                    <a:p>
-                      <a:r>
-                        <a:rPr sz="1100" b="0">
-                          <a:solidFill>
-                            <a:srgbClr val="282828"/>
-                          </a:solidFill>
-                          <a:latin typeface="Arial"/>
-                        </a:rPr>
-                        <a:t>40 nm rms one-frame (1 mm actuators), 50–60 nm four-frame</a:t>
-                      </a:r>
-                    </a:p>
-                  </a:txBody>
-                  <a:tcPr marL="54864" marR="54864" marT="18288" marB="18288">
-                    <a:solidFill>
-                      <a:srgbClr val="FFFFFF"/>
-                    </a:solidFill>
-                  </a:tcPr>
-                </a:tc>
-              </a:tr>
-              <a:tr h="280035">
-                <a:tc>
-                  <a:txBody>
-                    <a:bodyPr wrap="square"/>
-                    <a:lstStyle/>
-                    <a:p>
-                      <a:r>
-                        <a:rPr sz="1100" b="0">
-                          <a:solidFill>
-                            <a:srgbClr val="282828"/>
-                          </a:solidFill>
-                          <a:latin typeface="Arial"/>
-                        </a:rPr>
-                        <a:t>a 10 nm actuator change on a 30 nm surface</a:t>
-                      </a:r>
-                    </a:p>
-                  </a:txBody>
-                  <a:tcPr marL="54864" marR="54864" marT="18288" marB="18288">
-                    <a:solidFill>
-                      <a:srgbClr val="ECF1F6"/>
-                    </a:solidFill>
-                  </a:tcPr>
-                </a:tc>
-                <a:tc>
-                  <a:txBody>
-                    <a:bodyPr wrap="square"/>
-                    <a:lstStyle/>
-                    <a:p>
-                      <a:r>
-                        <a:rPr sz="1100" b="0">
-                          <a:solidFill>
-                            <a:srgbClr val="282828"/>
-                          </a:solidFill>
-                          <a:latin typeface="Arial"/>
-                        </a:rPr>
-                        <a:t>0.92, floor 46 pm</a:t>
-                      </a:r>
-                    </a:p>
-                  </a:txBody>
-                  <a:tcPr marL="54864" marR="54864" marT="18288" marB="18288">
-                    <a:solidFill>
-                      <a:srgbClr val="ECF1F6"/>
-                    </a:solidFill>
-                  </a:tcPr>
-                </a:tc>
-                <a:tc>
-                  <a:txBody>
-                    <a:bodyPr wrap="square"/>
-                    <a:lstStyle/>
-                    <a:p>
-                      <a:r>
-                        <a:rPr sz="1100" b="0">
-                          <a:solidFill>
-                            <a:srgbClr val="282828"/>
-                          </a:solidFill>
-                          <a:latin typeface="Arial"/>
-                        </a:rPr>
-                        <a:t>0.91, floor 26 pm (I+, one frame)</a:t>
-                      </a:r>
-                    </a:p>
-                  </a:txBody>
-                  <a:tcPr marL="54864" marR="54864" marT="18288" marB="18288">
-                    <a:solidFill>
-                      <a:srgbClr val="ECF1F6"/>
-                    </a:solidFill>
-                  </a:tcPr>
-                </a:tc>
-              </a:tr>
-              <a:tr h="280035">
-                <a:tc>
-                  <a:txBody>
-                    <a:bodyPr wrap="square"/>
-                    <a:lstStyle/>
-                    <a:p>
-                      <a:r>
-                        <a:rPr sz="1100" b="0">
-                          <a:solidFill>
-                            <a:srgbClr val="282828"/>
-                          </a:solidFill>
-                          <a:latin typeface="Arial"/>
-                        </a:rPr>
-                        <a:t>photons per state for 1 pm</a:t>
-                      </a:r>
-                    </a:p>
-                  </a:txBody>
-                  <a:tcPr marL="54864" marR="54864" marT="18288" marB="18288">
-                    <a:solidFill>
-                      <a:srgbClr val="FFFFFF"/>
-                    </a:solidFill>
-                  </a:tcPr>
-                </a:tc>
-                <a:tc>
-                  <a:txBody>
-                    <a:bodyPr wrap="square"/>
-                    <a:lstStyle/>
-                    <a:p>
-                      <a:r>
-                        <a:rPr sz="1100" b="0">
-                          <a:solidFill>
-                            <a:srgbClr val="282828"/>
-                          </a:solidFill>
-                          <a:latin typeface="Arial"/>
-                        </a:rPr>
-                        <a:t>8×10¹⁴</a:t>
-                      </a:r>
-                    </a:p>
-                  </a:txBody>
-                  <a:tcPr marL="54864" marR="54864" marT="18288" marB="18288">
-                    <a:solidFill>
-                      <a:srgbClr val="FFFFFF"/>
-                    </a:solidFill>
-                  </a:tcPr>
-                </a:tc>
-                <a:tc>
-                  <a:txBody>
-                    <a:bodyPr wrap="square"/>
-                    <a:lstStyle/>
-                    <a:p>
-                      <a:r>
-                        <a:rPr sz="1100" b="0">
-                          <a:solidFill>
-                            <a:srgbClr val="282828"/>
-                          </a:solidFill>
-                          <a:latin typeface="Arial"/>
-                        </a:rPr>
-                        <a:t>0.4–1×10¹⁴</a:t>
+                        <a:t>unattended, memory-capped, logged</a:t>
                       </a:r>
                     </a:p>
                   </a:txBody>
@@ -5498,13 +5423,13 @@
       </p:graphicFrame>
       <p:sp>
         <p:nvSpPr>
-          <p:cNvPr id="5" name="TextBox 4"/>
+          <p:cNvPr id="6" name="TextBox 5"/>
           <p:cNvSpPr txBox="1"/>
           <p:nvPr/>
         </p:nvSpPr>
         <p:spPr>
           <a:xfrm>
-            <a:off x="411480" y="4245102"/>
+            <a:off x="411480" y="4292346"/>
             <a:ext cx="11368735" cy="274320"/>
           </a:xfrm>
           <a:prstGeom prst="rect">
@@ -5530,20 +5455,20 @@
                 </a:solidFill>
                 <a:latin typeface="Arial"/>
               </a:rPr>
-              <a:t>•  Reading: the interferometer measures any surface and pays at high spatial frequency; the Zernike sensor measures small changes on a small working surface more cheaply — one frame, no polarization train, a floor on par or better — and pays at the lowest spatial frequencies and in range.</a:t>
-            </a:r>
-          </a:p>
-        </p:txBody>
-      </p:sp>
-      <p:sp>
-        <p:nvSpPr>
-          <p:cNvPr id="6" name="TextBox 5"/>
+              <a:t>•  Checks that run every time: the no-mask round trip through the bracket (must return the field unchanged); the reference-wave model against the engine's own field; the pupil brightness must not change with the DM shape; the sampling checks (pixels across the dimple, camera pixels per actuator); and the search for the camera-to-DM mirror/transpose and sign.</a:t>
+            </a:r>
+          </a:p>
+        </p:txBody>
+      </p:sp>
+      <p:sp>
+        <p:nvSpPr>
+          <p:cNvPr id="7" name="TextBox 6"/>
           <p:cNvSpPr txBox="1"/>
           <p:nvPr/>
         </p:nvSpPr>
         <p:spPr>
           <a:xfrm>
-            <a:off x="411480" y="5164836"/>
+            <a:off x="411480" y="5459730"/>
             <a:ext cx="11368735" cy="274320"/>
           </a:xfrm>
           <a:prstGeom prst="rect">
@@ -5569,7 +5494,7 @@
                 </a:solidFill>
                 <a:latin typeface="Arial"/>
               </a:rPr>
-              <a:t>PSI column: tg_psi_dm96 run 10 and S4/S5; sensor column: the compliant configuration (slide 7) except photons (record configuration).  Both in actuator space through the same estimator code (dm_gauge_lib).</a:t>
+              <a:t>Reproduction check: 64 lines of results against the stage-7 report, 8 differ in the last printed digit (the actuator fit's solver tolerance).  README "Run it yourself" carries the parameter table.</a:t>
             </a:r>
           </a:p>
         </p:txBody>
@@ -5626,7 +5551,7 @@
                 </a:solidFill>
                 <a:latin typeface="Arial"/>
               </a:rPr>
-              <a:t>What the Zernike-sensor literature offers, in priority order</a:t>
+              <a:t>Side by side with the Twyman–Green</a:t>
             </a:r>
           </a:p>
           <a:p>
@@ -5642,7 +5567,7 @@
                 </a:solidFill>
                 <a:latin typeface="Arial"/>
               </a:rPr>
-              <a:t>Twelve papers read; the first import — an iterated reference wave — is now built and measured (slide 6)</a:t>
+              <a:t>The interferometer loses response at fine patterns and never fails; the sensor reads a change from one frame at the same floor, up to a 40–60 nm surface</a:t>
             </a:r>
           </a:p>
         </p:txBody>
@@ -5701,7 +5626,7 @@
         </p:nvGraphicFramePr>
         <p:xfrm>
           <a:off x="411480" y="1298448"/>
-          <a:ext cx="11368734" cy="3091815"/>
+          <a:ext cx="11368734" cy="2800350"/>
         </p:xfrm>
         <a:graphic>
           <a:graphicData uri="http://schemas.openxmlformats.org/drawingml/2006/table">
@@ -5710,15 +5635,27 @@
                 <a:tableStyleId>{5C22544A-7EE6-4342-B048-85BDC9FD1C3A}</a:tableStyleId>
               </a:tblPr>
               <a:tblGrid>
-                <a:gridCol w="218948"/>
-                <a:gridCol w="2691327"/>
-                <a:gridCol w="8458459"/>
+                <a:gridCol w="3315881"/>
+                <a:gridCol w="3552729"/>
+                <a:gridCol w="4500124"/>
               </a:tblGrid>
               <a:tr h="280035">
                 <a:tc>
                   <a:txBody>
                     <a:bodyPr wrap="square"/>
                     <a:lstStyle/>
+                    <a:p/>
+                  </a:txBody>
+                  <a:tcPr marL="54864" marR="54864" marT="18288" marB="18288">
+                    <a:solidFill>
+                      <a:srgbClr val="1F4E79"/>
+                    </a:solidFill>
+                  </a:tcPr>
+                </a:tc>
+                <a:tc>
+                  <a:txBody>
+                    <a:bodyPr wrap="square"/>
+                    <a:lstStyle/>
                     <a:p>
                       <a:r>
                         <a:rPr sz="1100" b="1">
@@ -5727,7 +5664,7 @@
                           </a:solidFill>
                           <a:latin typeface="Arial"/>
                         </a:rPr>
-                        <a:t>#</a:t>
+                        <a:t>Twyman–Green PSI (measured)</a:t>
                       </a:r>
                     </a:p>
                   </a:txBody>
@@ -5749,7 +5686,7 @@
                           </a:solidFill>
                           <a:latin typeface="Arial"/>
                         </a:rPr>
-                        <a:t>paper</a:t>
+                        <a:t>Zernike sensor (measured)</a:t>
                       </a:r>
                     </a:p>
                   </a:txBody>
@@ -5759,43 +5696,21 @@
                     </a:solidFill>
                   </a:tcPr>
                 </a:tc>
-                <a:tc>
-                  <a:txBody>
-                    <a:bodyPr wrap="square"/>
-                    <a:lstStyle/>
-                    <a:p>
-                      <a:r>
-                        <a:rPr sz="1100" b="1">
-                          <a:solidFill>
-                            <a:srgbClr val="FFFFFF"/>
-                          </a:solidFill>
-                          <a:latin typeface="Arial"/>
-                        </a:rPr>
-                        <a:t>what it gives this model</a:t>
-                      </a:r>
-                    </a:p>
-                  </a:txBody>
-                  <a:tcPr marL="54864" marR="54864" marT="18288" marB="18288">
-                    <a:solidFill>
-                      <a:srgbClr val="1F4E79"/>
-                    </a:solidFill>
-                  </a:tcPr>
-                </a:tc>
               </a:tr>
-              <a:tr h="468630">
-                <a:tc>
-                  <a:txBody>
-                    <a:bodyPr wrap="square"/>
-                    <a:lstStyle/>
-                    <a:p>
-                      <a:r>
-                        <a:rPr sz="1100" b="0">
-                          <a:solidFill>
-                            <a:srgbClr val="282828"/>
-                          </a:solidFill>
-                          <a:latin typeface="Arial"/>
-                        </a:rPr>
-                        <a:t>1</a:t>
+              <a:tr h="280035">
+                <a:tc>
+                  <a:txBody>
+                    <a:bodyPr wrap="square"/>
+                    <a:lstStyle/>
+                    <a:p>
+                      <a:r>
+                        <a:rPr sz="1100" b="0">
+                          <a:solidFill>
+                            <a:srgbClr val="282828"/>
+                          </a:solidFill>
+                          <a:latin typeface="Arial"/>
+                        </a:rPr>
+                        <a:t>reference beam</a:t>
                       </a:r>
                     </a:p>
                   </a:txBody>
@@ -5817,7 +5732,7 @@
                           </a:solidFill>
                           <a:latin typeface="Arial"/>
                         </a:rPr>
-                        <a:t>Ruane, Wallace, Steeves et al. 2020, JATIS 6, 045005</a:t>
+                        <a:t>the second arm's flat</a:t>
                       </a:r>
                     </a:p>
                   </a:txBody>
@@ -5839,7 +5754,7 @@
                           </a:solidFill>
                           <a:latin typeface="Arial"/>
                         </a:rPr>
-                        <a:t>Exact per-pixel reconstruction from the pupil amplitude, the reference wave b and the masked image; a sensitivity factor per pixel; a four-term systematic budget; 1 pm reached at 4.4×10⁵ frames; no loss to 25 % bandwidth</a:t>
+                        <a:t>made from the beam's own focal core</a:t>
                       </a:r>
                     </a:p>
                   </a:txBody>
@@ -5850,20 +5765,20 @@
                   </a:tcPr>
                 </a:tc>
               </a:tr>
-              <a:tr h="468630">
-                <a:tc>
-                  <a:txBody>
-                    <a:bodyPr wrap="square"/>
-                    <a:lstStyle/>
-                    <a:p>
-                      <a:r>
-                        <a:rPr sz="1100" b="0">
-                          <a:solidFill>
-                            <a:srgbClr val="282828"/>
-                          </a:solidFill>
-                          <a:latin typeface="Arial"/>
-                        </a:rPr>
-                        <a:t>2</a:t>
+              <a:tr h="280035">
+                <a:tc>
+                  <a:txBody>
+                    <a:bodyPr wrap="square"/>
+                    <a:lstStyle/>
+                    <a:p>
+                      <a:r>
+                        <a:rPr sz="1100" b="0">
+                          <a:solidFill>
+                            <a:srgbClr val="282828"/>
+                          </a:solidFill>
+                          <a:latin typeface="Arial"/>
+                        </a:rPr>
+                        <a:t>one measurement costs</a:t>
                       </a:r>
                     </a:p>
                   </a:txBody>
@@ -5885,7 +5800,7 @@
                           </a:solidFill>
                           <a:latin typeface="Arial"/>
                         </a:rPr>
-                        <a:t>Doelman, Fagginger Auer, Escuti, Snik 2019, Opt. Lett. 44, 17</a:t>
+                        <a:t>6 traces (3 per arm), 4 fringe frames</a:t>
                       </a:r>
                     </a:p>
                   </a:txBody>
@@ -5907,7 +5822,7 @@
                           </a:solidFill>
                           <a:latin typeface="Arial"/>
                         </a:rPr>
-                        <a:t>Vector Zernike: ±π/2 on opposite circular polarizations gives two pupil images, an exact phase-and-amplitude solution, an iterated b, achromatic to 100 % bandwidth; the leakage terms are written down</a:t>
+                        <a:t>1 camera frame (I+; 4 frames once per working surface)</a:t>
                       </a:r>
                     </a:p>
                   </a:txBody>
@@ -5918,20 +5833,20 @@
                   </a:tcPr>
                 </a:tc>
               </a:tr>
-              <a:tr h="468630">
-                <a:tc>
-                  <a:txBody>
-                    <a:bodyPr wrap="square"/>
-                    <a:lstStyle/>
-                    <a:p>
-                      <a:r>
-                        <a:rPr sz="1100" b="0">
-                          <a:solidFill>
-                            <a:srgbClr val="282828"/>
-                          </a:solidFill>
-                          <a:latin typeface="Arial"/>
-                        </a:rPr>
-                        <a:t>3</a:t>
+              <a:tr h="280035">
+                <a:tc>
+                  <a:txBody>
+                    <a:bodyPr wrap="square"/>
+                    <a:lstStyle/>
+                    <a:p>
+                      <a:r>
+                        <a:rPr sz="1100" b="0">
+                          <a:solidFill>
+                            <a:srgbClr val="282828"/>
+                          </a:solidFill>
+                          <a:latin typeface="Arial"/>
+                        </a:rPr>
+                        <a:t>polarization hardware</a:t>
                       </a:r>
                     </a:p>
                   </a:txBody>
@@ -5953,7 +5868,7 @@
                           </a:solidFill>
                           <a:latin typeface="Arial"/>
                         </a:rPr>
-                        <a:t>N'Diaye, Vigan, Dohlen et al. 2016, A&amp;A 592, A79 (ZELDA II)</a:t>
+                        <a:t>polarizer, 5 waveplates, analyzer</a:t>
                       </a:r>
                     </a:p>
                   </a:txBody>
@@ -5975,7 +5890,7 @@
                           </a:solidFill>
                           <a:latin typeface="Arial"/>
                         </a:rPr>
-                        <a:t>Second-order reconstruction with b from the mask model; 1.06 λ/D at π/2; range −0.14 to +0.36 λ; the sensitivity factor drifts 10 % day to day on SPHERE</a:t>
+                        <a:t>none</a:t>
                       </a:r>
                     </a:p>
                   </a:txBody>
@@ -5986,20 +5901,20 @@
                   </a:tcPr>
                 </a:tc>
               </a:tr>
-              <a:tr h="468630">
-                <a:tc>
-                  <a:txBody>
-                    <a:bodyPr wrap="square"/>
-                    <a:lstStyle/>
-                    <a:p>
-                      <a:r>
-                        <a:rPr sz="1100" b="0">
-                          <a:solidFill>
-                            <a:srgbClr val="282828"/>
-                          </a:solidFill>
-                          <a:latin typeface="Arial"/>
-                        </a:rPr>
-                        <a:t>4</a:t>
+              <a:tr h="280035">
+                <a:tc>
+                  <a:txBody>
+                    <a:bodyPr wrap="square"/>
+                    <a:lstStyle/>
+                    <a:p>
+                      <a:r>
+                        <a:rPr sz="1100" b="0">
+                          <a:solidFill>
+                            <a:srgbClr val="282828"/>
+                          </a:solidFill>
+                          <a:latin typeface="Arial"/>
+                        </a:rPr>
+                        <a:t>moving parts</a:t>
                       </a:r>
                     </a:p>
                   </a:txBody>
@@ -6021,7 +5936,7 @@
                           </a:solidFill>
                           <a:latin typeface="Arial"/>
                         </a:rPr>
-                        <a:t>Chambouleyron, Cissé, Salama, Haffert, Wallace et al. 2024, SPIE 13097</a:t>
+                        <a:t>none (polarization-stepped)</a:t>
                       </a:r>
                     </a:p>
                   </a:txBody>
@@ -6043,7 +5958,7 @@
                           </a:solidFill>
                           <a:latin typeface="Arial"/>
                         </a:rPr>
-                        <a:t>A phase-shifted pair (±π/2) yields cos φ and sin φ; iterative reconstructors reach about 1 rad rms; the bench limits were polarization crosstalk and defocus between the two pupils</a:t>
+                        <a:t>none</a:t>
                       </a:r>
                     </a:p>
                   </a:txBody>
@@ -6054,20 +5969,20 @@
                   </a:tcPr>
                 </a:tc>
               </a:tr>
-              <a:tr h="468630">
-                <a:tc>
-                  <a:txBody>
-                    <a:bodyPr wrap="square"/>
-                    <a:lstStyle/>
-                    <a:p>
-                      <a:r>
-                        <a:rPr sz="1100" b="0">
-                          <a:solidFill>
-                            <a:srgbClr val="282828"/>
-                          </a:solidFill>
-                          <a:latin typeface="Arial"/>
-                        </a:rPr>
-                        <a:t>5</a:t>
+              <a:tr h="280035">
+                <a:tc>
+                  <a:txBody>
+                    <a:bodyPr wrap="square"/>
+                    <a:lstStyle/>
+                    <a:p>
+                      <a:r>
+                        <a:rPr sz="1100" b="0">
+                          <a:solidFill>
+                            <a:srgbClr val="282828"/>
+                          </a:solidFill>
+                          <a:latin typeface="Arial"/>
+                        </a:rPr>
+                        <a:t>null, nothing aligned</a:t>
                       </a:r>
                     </a:p>
                   </a:txBody>
@@ -6089,7 +6004,7 @@
                           </a:solidFill>
                           <a:latin typeface="Arial"/>
                         </a:rPr>
-                        <a:t>Haffert 2024, A&amp;A 683, A113</a:t>
+                        <a:t>0.134 nm</a:t>
                       </a:r>
                     </a:p>
                   </a:txBody>
@@ -6111,7 +6026,7 @@
                           </a:solidFill>
                           <a:latin typeface="Arial"/>
                         </a:rPr>
-                        <a:t>Iterative nonlinear reconstructors reach machine precision below 0.25 rad rms; phase sorting extends to 0.75 rad; adding wavelengths to 1.4 rad rms</a:t>
+                        <a:t>0 by construction (the flat is the reference)</a:t>
                       </a:r>
                     </a:p>
                   </a:txBody>
@@ -6122,20 +6037,20 @@
                   </a:tcPr>
                 </a:tc>
               </a:tr>
-              <a:tr h="468630">
-                <a:tc>
-                  <a:txBody>
-                    <a:bodyPr wrap="square"/>
-                    <a:lstStyle/>
-                    <a:p>
-                      <a:r>
-                        <a:rPr sz="1100" b="0">
-                          <a:solidFill>
-                            <a:srgbClr val="282828"/>
-                          </a:solidFill>
-                          <a:latin typeface="Arial"/>
-                        </a:rPr>
-                        <a:t>6</a:t>
+              <a:tr h="280035">
+                <a:tc>
+                  <a:txBody>
+                    <a:bodyPr wrap="square"/>
+                    <a:lstStyle/>
+                    <a:p>
+                      <a:r>
+                        <a:rPr sz="1100" b="0">
+                          <a:solidFill>
+                            <a:srgbClr val="282828"/>
+                          </a:solidFill>
+                          <a:latin typeface="Arial"/>
+                        </a:rPr>
+                        <a:t>response falls off at</a:t>
                       </a:r>
                     </a:p>
                   </a:txBody>
@@ -6157,7 +6072,7 @@
                           </a:solidFill>
                           <a:latin typeface="Arial"/>
                         </a:rPr>
-                        <a:t>Darcis, Haffert, Chambouleyron, Doelman et al. 2025, A&amp;A</a:t>
+                        <a:t>fine patterns: 0.50 at the 96×96 checkerboard</a:t>
                       </a:r>
                     </a:p>
                   </a:txBody>
@@ -6179,13 +6094,217 @@
                           </a:solidFill>
                           <a:latin typeface="Arial"/>
                         </a:rPr>
-                        <a:t>Multi-wavelength gradient descent through the forward model: dynamic range for the scalar sensor, photon robustness across a wider band, two-wavelength unwrapping of petal errors</a:t>
+                        <a:t>0.5 to 1 cycle across the pupil (0.5 at 1); piston unseen</a:t>
                       </a:r>
                     </a:p>
                   </a:txBody>
                   <a:tcPr marL="54864" marR="54864" marT="18288" marB="18288">
                     <a:solidFill>
                       <a:srgbClr val="ECF1F6"/>
+                    </a:solidFill>
+                  </a:tcPr>
+                </a:tc>
+              </a:tr>
+              <a:tr h="280035">
+                <a:tc>
+                  <a:txBody>
+                    <a:bodyPr wrap="square"/>
+                    <a:lstStyle/>
+                    <a:p>
+                      <a:r>
+                        <a:rPr sz="1100" b="0">
+                          <a:solidFill>
+                            <a:srgbClr val="282828"/>
+                          </a:solidFill>
+                          <a:latin typeface="Arial"/>
+                        </a:rPr>
+                        <a:t>working surface it can handle</a:t>
+                      </a:r>
+                    </a:p>
+                  </a:txBody>
+                  <a:tcPr marL="54864" marR="54864" marT="18288" marB="18288">
+                    <a:solidFill>
+                      <a:srgbClr val="FFFFFF"/>
+                    </a:solidFill>
+                  </a:tcPr>
+                </a:tc>
+                <a:tc>
+                  <a:txBody>
+                    <a:bodyPr wrap="square"/>
+                    <a:lstStyle/>
+                    <a:p>
+                      <a:r>
+                        <a:rPr sz="1100" b="0">
+                          <a:solidFill>
+                            <a:srgbClr val="282828"/>
+                          </a:solidFill>
+                          <a:latin typeface="Arial"/>
+                        </a:rPr>
+                        <a:t>480 nm rms and beyond</a:t>
+                      </a:r>
+                    </a:p>
+                  </a:txBody>
+                  <a:tcPr marL="54864" marR="54864" marT="18288" marB="18288">
+                    <a:solidFill>
+                      <a:srgbClr val="FFFFFF"/>
+                    </a:solidFill>
+                  </a:tcPr>
+                </a:tc>
+                <a:tc>
+                  <a:txBody>
+                    <a:bodyPr wrap="square"/>
+                    <a:lstStyle/>
+                    <a:p>
+                      <a:r>
+                        <a:rPr sz="1100" b="0">
+                          <a:solidFill>
+                            <a:srgbClr val="282828"/>
+                          </a:solidFill>
+                          <a:latin typeface="Arial"/>
+                        </a:rPr>
+                        <a:t>40 nm rms one-frame (1 mm actuators), 50–60 nm four-frame</a:t>
+                      </a:r>
+                    </a:p>
+                  </a:txBody>
+                  <a:tcPr marL="54864" marR="54864" marT="18288" marB="18288">
+                    <a:solidFill>
+                      <a:srgbClr val="FFFFFF"/>
+                    </a:solidFill>
+                  </a:tcPr>
+                </a:tc>
+              </a:tr>
+              <a:tr h="280035">
+                <a:tc>
+                  <a:txBody>
+                    <a:bodyPr wrap="square"/>
+                    <a:lstStyle/>
+                    <a:p>
+                      <a:r>
+                        <a:rPr sz="1100" b="0">
+                          <a:solidFill>
+                            <a:srgbClr val="282828"/>
+                          </a:solidFill>
+                          <a:latin typeface="Arial"/>
+                        </a:rPr>
+                        <a:t>a 10 nm actuator change on a 30 nm surface</a:t>
+                      </a:r>
+                    </a:p>
+                  </a:txBody>
+                  <a:tcPr marL="54864" marR="54864" marT="18288" marB="18288">
+                    <a:solidFill>
+                      <a:srgbClr val="ECF1F6"/>
+                    </a:solidFill>
+                  </a:tcPr>
+                </a:tc>
+                <a:tc>
+                  <a:txBody>
+                    <a:bodyPr wrap="square"/>
+                    <a:lstStyle/>
+                    <a:p>
+                      <a:r>
+                        <a:rPr sz="1100" b="0">
+                          <a:solidFill>
+                            <a:srgbClr val="282828"/>
+                          </a:solidFill>
+                          <a:latin typeface="Arial"/>
+                        </a:rPr>
+                        <a:t>gain 0.92, floor 46 pm</a:t>
+                      </a:r>
+                    </a:p>
+                  </a:txBody>
+                  <a:tcPr marL="54864" marR="54864" marT="18288" marB="18288">
+                    <a:solidFill>
+                      <a:srgbClr val="ECF1F6"/>
+                    </a:solidFill>
+                  </a:tcPr>
+                </a:tc>
+                <a:tc>
+                  <a:txBody>
+                    <a:bodyPr wrap="square"/>
+                    <a:lstStyle/>
+                    <a:p>
+                      <a:r>
+                        <a:rPr sz="1100" b="0">
+                          <a:solidFill>
+                            <a:srgbClr val="282828"/>
+                          </a:solidFill>
+                          <a:latin typeface="Arial"/>
+                        </a:rPr>
+                        <a:t>gain 0.91, floor 26 pm (I+, one frame)</a:t>
+                      </a:r>
+                    </a:p>
+                  </a:txBody>
+                  <a:tcPr marL="54864" marR="54864" marT="18288" marB="18288">
+                    <a:solidFill>
+                      <a:srgbClr val="ECF1F6"/>
+                    </a:solidFill>
+                  </a:tcPr>
+                </a:tc>
+              </a:tr>
+              <a:tr h="280035">
+                <a:tc>
+                  <a:txBody>
+                    <a:bodyPr wrap="square"/>
+                    <a:lstStyle/>
+                    <a:p>
+                      <a:r>
+                        <a:rPr sz="1100" b="0">
+                          <a:solidFill>
+                            <a:srgbClr val="282828"/>
+                          </a:solidFill>
+                          <a:latin typeface="Arial"/>
+                        </a:rPr>
+                        <a:t>photons per state for 1 pm</a:t>
+                      </a:r>
+                    </a:p>
+                  </a:txBody>
+                  <a:tcPr marL="54864" marR="54864" marT="18288" marB="18288">
+                    <a:solidFill>
+                      <a:srgbClr val="FFFFFF"/>
+                    </a:solidFill>
+                  </a:tcPr>
+                </a:tc>
+                <a:tc>
+                  <a:txBody>
+                    <a:bodyPr wrap="square"/>
+                    <a:lstStyle/>
+                    <a:p>
+                      <a:r>
+                        <a:rPr sz="1100" b="0">
+                          <a:solidFill>
+                            <a:srgbClr val="282828"/>
+                          </a:solidFill>
+                          <a:latin typeface="Arial"/>
+                        </a:rPr>
+                        <a:t>8×10¹⁴</a:t>
+                      </a:r>
+                    </a:p>
+                  </a:txBody>
+                  <a:tcPr marL="54864" marR="54864" marT="18288" marB="18288">
+                    <a:solidFill>
+                      <a:srgbClr val="FFFFFF"/>
+                    </a:solidFill>
+                  </a:tcPr>
+                </a:tc>
+                <a:tc>
+                  <a:txBody>
+                    <a:bodyPr wrap="square"/>
+                    <a:lstStyle/>
+                    <a:p>
+                      <a:r>
+                        <a:rPr sz="1100" b="0">
+                          <a:solidFill>
+                            <a:srgbClr val="282828"/>
+                          </a:solidFill>
+                          <a:latin typeface="Arial"/>
+                        </a:rPr>
+                        <a:t>0.4 to 1×10¹⁴</a:t>
+                      </a:r>
+                    </a:p>
+                  </a:txBody>
+                  <a:tcPr marL="54864" marR="54864" marT="18288" marB="18288">
+                    <a:solidFill>
+                      <a:srgbClr val="FFFFFF"/>
                     </a:solidFill>
                   </a:tcPr>
                 </a:tc>
@@ -6202,7 +6321,7 @@
         </p:nvSpPr>
         <p:spPr>
           <a:xfrm>
-            <a:off x="411480" y="4536567"/>
+            <a:off x="411480" y="4245102"/>
             <a:ext cx="11368735" cy="274320"/>
           </a:xfrm>
           <a:prstGeom prst="rect">
@@ -6222,13 +6341,52 @@
               </a:spcAft>
             </a:pPr>
             <a:r>
-              <a:rPr sz="1050" b="0">
-                <a:solidFill>
-                  <a:srgbClr val="6E6E6E"/>
+              <a:rPr sz="1500" b="0">
+                <a:solidFill>
+                  <a:srgbClr val="282828"/>
                 </a:solidFill>
                 <a:latin typeface="Arial"/>
               </a:rPr>
-              <a:t>Priority = payoff against the campaign's measured weak results.  Synopses and links: macos/REPORT_zwfs_lit_scan.md.</a:t>
+              <a:t>•  Reading: the interferometer measures any surface and pays at fine patterns; the sensor measures small changes on a small working surface more cheaply — one frame, no polarization train, an equal or better floor — and pays at the lowest spatial frequencies and in the surface it can handle.</a:t>
+            </a:r>
+          </a:p>
+        </p:txBody>
+      </p:sp>
+      <p:sp>
+        <p:nvSpPr>
+          <p:cNvPr id="6" name="TextBox 5"/>
+          <p:cNvSpPr txBox="1"/>
+          <p:nvPr/>
+        </p:nvSpPr>
+        <p:spPr>
+          <a:xfrm>
+            <a:off x="411480" y="5164836"/>
+            <a:ext cx="11368735" cy="274320"/>
+          </a:xfrm>
+          <a:prstGeom prst="rect">
+            <a:avLst/>
+          </a:prstGeom>
+          <a:noFill/>
+        </p:spPr>
+        <p:txBody>
+          <a:bodyPr wrap="square">
+            <a:spAutoFit/>
+          </a:bodyPr>
+          <a:lstStyle/>
+          <a:p>
+            <a:pPr>
+              <a:spcAft>
+                <a:spcPts val="600"/>
+              </a:spcAft>
+            </a:pPr>
+            <a:r>
+              <a:rPr sz="1050" b="0">
+                <a:solidFill>
+                  <a:srgbClr val="6E6E6E"/>
+                </a:solidFill>
+                <a:latin typeface="Arial"/>
+              </a:rPr>
+              <a:t>PSI column: tg_psi_dm96 run 10 and S4/S5; sensor column: the fully sampled setup (slide 9) except photons (development sampling).  Both in actuator units through the same code (dm_gauge_lib).</a:t>
             </a:r>
           </a:p>
         </p:txBody>
@@ -6285,7 +6443,7 @@
                 </a:solidFill>
                 <a:latin typeface="Arial"/>
               </a:rPr>
-              <a:t>Demonstrations, segmented mirrors, and the in-house precedent</a:t>
+              <a:t>What the Zernike-sensor literature offers, in priority order</a:t>
             </a:r>
           </a:p>
           <a:p>
@@ -6301,7 +6459,7 @@
                 </a:solidFill>
                 <a:latin typeface="Arial"/>
               </a:rPr>
-              <a:t>Picometers by alternating DM states and averaging; segment piston by model iteration, underestimated below 50 % Strehl</a:t>
+              <a:t>Twelve papers read; the first import — re-computing the reference wave — is now built and measured (slide 8)</a:t>
             </a:r>
           </a:p>
         </p:txBody>
@@ -6369,9 +6527,9 @@
                 <a:tableStyleId>{5C22544A-7EE6-4342-B048-85BDC9FD1C3A}</a:tableStyleId>
               </a:tblPr>
               <a:tblGrid>
-                <a:gridCol w="291592"/>
-                <a:gridCol w="3730058"/>
-                <a:gridCol w="7347084"/>
+                <a:gridCol w="218948"/>
+                <a:gridCol w="2691327"/>
+                <a:gridCol w="8458459"/>
               </a:tblGrid>
               <a:tr h="280035">
                 <a:tc>
@@ -6454,7 +6612,7 @@
                           </a:solidFill>
                           <a:latin typeface="Arial"/>
                         </a:rPr>
-                        <a:t>7</a:t>
+                        <a:t>1</a:t>
                       </a:r>
                     </a:p>
                   </a:txBody>
@@ -6476,7 +6634,7 @@
                           </a:solidFill>
                           <a:latin typeface="Arial"/>
                         </a:rPr>
-                        <a:t>Steeves, Wallace, Kettenbeil, Jewell 2020, Optica 7, 1267</a:t>
+                        <a:t>Ruane, Wallace, Steeves et al. 2020, JATIS 6, 045005</a:t>
                       </a:r>
                     </a:p>
                   </a:txBody>
@@ -6498,7 +6656,7 @@
                           </a:solidFill>
                           <a:latin typeface="Arial"/>
                         </a:rPr>
-                        <a:t>1.6 pm repeatability in 4.3 s by alternating flat and waffle DM states and averaging the differences; a reconstruction robust at the highest spatial frequencies</a:t>
+                        <a:t>Exact per-pixel reconstruction from the pupil amplitude, the reference wave b and the masked image; a sensitivity factor per pixel; a four-term systematic budget; 1 pm reached at 4.4×10⁵ frames; no loss to 25 % bandwidth</a:t>
                       </a:r>
                     </a:p>
                   </a:txBody>
@@ -6522,7 +6680,7 @@
                           </a:solidFill>
                           <a:latin typeface="Arial"/>
                         </a:rPr>
-                        <a:t>8</a:t>
+                        <a:t>2</a:t>
                       </a:r>
                     </a:p>
                   </a:txBody>
@@ -6544,7 +6702,7 @@
                           </a:solidFill>
                           <a:latin typeface="Arial"/>
                         </a:rPr>
-                        <a:t>Wallace, Rao, Jensen-Clem, Serabyn 2011, SPIE 8126</a:t>
+                        <a:t>Doelman, Fagginger Auer, Escuti, Snik 2019, Opt. Lett. 44, 17</a:t>
                       </a:r>
                     </a:p>
                   </a:txBody>
@@ -6566,7 +6724,7 @@
                           </a:solidFill>
                           <a:latin typeface="Arial"/>
                         </a:rPr>
-                        <a:t>All-reflective phase-shifting Zernike interferometer: a dynamic, arbitrary core phase shift read in four steps gives phase and amplitude; low sensitivity to vibration, polarization and wavelength</a:t>
+                        <a:t>Vector Zernike: ±π/2 on opposite circular polarizations gives two pupil images, an exact phase-and-amplitude solution, an iterated b, achromatic to 100 % bandwidth; the leakage terms are written down</a:t>
                       </a:r>
                     </a:p>
                   </a:txBody>
@@ -6590,7 +6748,7 @@
                           </a:solidFill>
                           <a:latin typeface="Arial"/>
                         </a:rPr>
-                        <a:t>9</a:t>
+                        <a:t>3</a:t>
                       </a:r>
                     </a:p>
                   </a:txBody>
@@ -6612,7 +6770,7 @@
                           </a:solidFill>
                           <a:latin typeface="Arial"/>
                         </a:rPr>
-                        <a:t>Moore and Redding 2018, SPIE 10698</a:t>
+                        <a:t>N'Diaye, Vigan, Dohlen et al. 2016, A&amp;A 592, A79 (ZELDA II)</a:t>
                       </a:r>
                     </a:p>
                   </a:txBody>
@@ -6634,7 +6792,7 @@
                           </a:solidFill>
                           <a:latin typeface="Arial"/>
                         </a:rPr>
-                        <a:t>Nonlinear polychromatic physical-optics reconstruction for picometer differential metrology on LUVOIR; the in-house precedent for the reconstructor above</a:t>
+                        <a:t>Second-order reconstruction with b from the mask model; 1.06 λ/D at π/2; range −0.14 to +0.36 λ; the sensitivity factor drifts 10 % day to day on SPHERE</a:t>
                       </a:r>
                     </a:p>
                   </a:txBody>
@@ -6658,7 +6816,7 @@
                           </a:solidFill>
                           <a:latin typeface="Arial"/>
                         </a:rPr>
-                        <a:t>10</a:t>
+                        <a:t>4</a:t>
                       </a:r>
                     </a:p>
                   </a:txBody>
@@ -6680,7 +6838,7 @@
                           </a:solidFill>
                           <a:latin typeface="Arial"/>
                         </a:rPr>
-                        <a:t>Keck vector-Zernike segment control 2024 (arXiv 2404.08728); Wallace et al. 2022 (arXiv 2205.02241)</a:t>
+                        <a:t>Chambouleyron, Cissé, Salama, Haffert, Wallace et al. 2024, SPIE 13097</a:t>
                       </a:r>
                     </a:p>
                   </a:txBody>
@@ -6702,7 +6860,7 @@
                           </a:solidFill>
                           <a:latin typeface="Arial"/>
                         </a:rPr>
-                        <a:t>Segment piston by model-based iteration; 11 nm rms piston uncertainty; underestimation 2 to 4× below 50 % Strehl; fabricated shifts 0.30π and 0.68π instead of ±0.5π</a:t>
+                        <a:t>A phase-shifted pair (±π/2) yields cos φ and sin φ; iterative reconstructors reach about 1 rad rms; the bench limits were polarization crosstalk and defocus between the two pupils</a:t>
                       </a:r>
                     </a:p>
                   </a:txBody>
@@ -6726,7 +6884,7 @@
                           </a:solidFill>
                           <a:latin typeface="Arial"/>
                         </a:rPr>
-                        <a:t>11</a:t>
+                        <a:t>5</a:t>
                       </a:r>
                     </a:p>
                   </a:txBody>
@@ -6748,7 +6906,7 @@
                           </a:solidFill>
                           <a:latin typeface="Arial"/>
                         </a:rPr>
-                        <a:t>HiCAT mid-order Zernike sensor 2024 (arXiv 2409.03411)</a:t>
+                        <a:t>Haffert 2024, A&amp;A 683, A113</a:t>
                       </a:r>
                     </a:p>
                   </a:txBody>
@@ -6770,7 +6928,7 @@
                           </a:solidFill>
                           <a:latin typeface="Arial"/>
                         </a:rPr>
-                        <a:t>Per-segment piston, tip and tilt by interaction matrix; a minimal step of 125 ± 31 pm at SNR 4; 14-bit DM quantization reads as steps in the response</a:t>
+                        <a:t>Iterative nonlinear reconstructors reach machine precision below 0.25 rad rms; phase sorting extends to 0.75 rad; adding wavelengths to 1.4 rad rms</a:t>
                       </a:r>
                     </a:p>
                   </a:txBody>
@@ -6794,7 +6952,7 @@
                           </a:solidFill>
                           <a:latin typeface="Arial"/>
                         </a:rPr>
-                        <a:t>12</a:t>
+                        <a:t>6</a:t>
                       </a:r>
                     </a:p>
                   </a:txBody>
@@ -6816,7 +6974,7 @@
                           </a:solidFill>
                           <a:latin typeface="Arial"/>
                         </a:rPr>
-                        <a:t>Shi et al. 2015, SPIE 9605 (Roman low-order sensor)</a:t>
+                        <a:t>Darcis, Haffert, Chambouleyron, Doelman et al. 2025, A&amp;A</a:t>
                       </a:r>
                     </a:p>
                   </a:txBody>
@@ -6838,7 +6996,7 @@
                           </a:solidFill>
                           <a:latin typeface="Arial"/>
                         </a:rPr>
-                        <a:t>A reflective dimple on the focal-plane mask senses Z2 to Z11 from the rejected starlight: the spatially filtered form of the same sensor</a:t>
+                        <a:t>Multi-wavelength gradient descent through the forward model: dynamic range for the scalar sensor, photon robustness across a wider band, two-wavelength unwrapping of petal errors</a:t>
                       </a:r>
                     </a:p>
                   </a:txBody>
@@ -6887,7 +7045,7 @@
                 </a:solidFill>
                 <a:latin typeface="Arial"/>
               </a:rPr>
-              <a:t>Also read: PIAA-ZWFS (2026, arXiv 2606.28136), lossless pupil apodization that closes the gap to the fundamental sensitivity limit by 10× — a design lever, not a model change.</a:t>
+              <a:t>Priority = payoff against this campaign's measured weak results.  Synopses and links: macos/REPORT_zwfs_lit_scan.md.</a:t>
             </a:r>
           </a:p>
         </p:txBody>
@@ -6944,7 +7102,7 @@
                 </a:solidFill>
                 <a:latin typeface="Arial"/>
               </a:rPr>
-              <a:t>Conclusions: what the corrected model and the exact reading settled</a:t>
+              <a:t>Demonstrations, segmented mirrors, and the in-house precedent</a:t>
             </a:r>
           </a:p>
           <a:p>
@@ -6960,7 +7118,7 @@
                 </a:solidFill>
                 <a:latin typeface="Arial"/>
               </a:rPr>
-              <a:t>The model correction was the bigger lever; the primed iterated reading is the best one-frame reading; colour and photons are not the budget</a:t>
+              <a:t>Picometres by alternating DM shapes and averaging; segment piston by model iteration, underestimated below 50 % Strehl</a:t>
             </a:r>
           </a:p>
         </p:txBody>
@@ -7009,15 +7167,518 @@
           </a:p>
         </p:txBody>
       </p:sp>
-      <p:sp>
-        <p:nvSpPr>
-          <p:cNvPr id="4" name="TextBox 3"/>
+      <p:graphicFrame>
+        <p:nvGraphicFramePr>
+          <p:cNvPr id="4" name="Table 3"/>
+          <p:cNvGraphicFramePr>
+            <a:graphicFrameLocks noGrp="1"/>
+          </p:cNvGraphicFramePr>
+          <p:nvPr/>
+        </p:nvGraphicFramePr>
+        <p:xfrm>
+          <a:off x="411480" y="1298448"/>
+          <a:ext cx="11368734" cy="3091815"/>
+        </p:xfrm>
+        <a:graphic>
+          <a:graphicData uri="http://schemas.openxmlformats.org/drawingml/2006/table">
+            <a:tbl>
+              <a:tblPr firstRow="1" bandRow="1">
+                <a:tableStyleId>{5C22544A-7EE6-4342-B048-85BDC9FD1C3A}</a:tableStyleId>
+              </a:tblPr>
+              <a:tblGrid>
+                <a:gridCol w="291592"/>
+                <a:gridCol w="3730058"/>
+                <a:gridCol w="7347084"/>
+              </a:tblGrid>
+              <a:tr h="280035">
+                <a:tc>
+                  <a:txBody>
+                    <a:bodyPr wrap="square"/>
+                    <a:lstStyle/>
+                    <a:p>
+                      <a:r>
+                        <a:rPr sz="1100" b="1">
+                          <a:solidFill>
+                            <a:srgbClr val="FFFFFF"/>
+                          </a:solidFill>
+                          <a:latin typeface="Arial"/>
+                        </a:rPr>
+                        <a:t>#</a:t>
+                      </a:r>
+                    </a:p>
+                  </a:txBody>
+                  <a:tcPr marL="54864" marR="54864" marT="18288" marB="18288">
+                    <a:solidFill>
+                      <a:srgbClr val="1F4E79"/>
+                    </a:solidFill>
+                  </a:tcPr>
+                </a:tc>
+                <a:tc>
+                  <a:txBody>
+                    <a:bodyPr wrap="square"/>
+                    <a:lstStyle/>
+                    <a:p>
+                      <a:r>
+                        <a:rPr sz="1100" b="1">
+                          <a:solidFill>
+                            <a:srgbClr val="FFFFFF"/>
+                          </a:solidFill>
+                          <a:latin typeface="Arial"/>
+                        </a:rPr>
+                        <a:t>paper</a:t>
+                      </a:r>
+                    </a:p>
+                  </a:txBody>
+                  <a:tcPr marL="54864" marR="54864" marT="18288" marB="18288">
+                    <a:solidFill>
+                      <a:srgbClr val="1F4E79"/>
+                    </a:solidFill>
+                  </a:tcPr>
+                </a:tc>
+                <a:tc>
+                  <a:txBody>
+                    <a:bodyPr wrap="square"/>
+                    <a:lstStyle/>
+                    <a:p>
+                      <a:r>
+                        <a:rPr sz="1100" b="1">
+                          <a:solidFill>
+                            <a:srgbClr val="FFFFFF"/>
+                          </a:solidFill>
+                          <a:latin typeface="Arial"/>
+                        </a:rPr>
+                        <a:t>what it gives this model</a:t>
+                      </a:r>
+                    </a:p>
+                  </a:txBody>
+                  <a:tcPr marL="54864" marR="54864" marT="18288" marB="18288">
+                    <a:solidFill>
+                      <a:srgbClr val="1F4E79"/>
+                    </a:solidFill>
+                  </a:tcPr>
+                </a:tc>
+              </a:tr>
+              <a:tr h="468630">
+                <a:tc>
+                  <a:txBody>
+                    <a:bodyPr wrap="square"/>
+                    <a:lstStyle/>
+                    <a:p>
+                      <a:r>
+                        <a:rPr sz="1100" b="0">
+                          <a:solidFill>
+                            <a:srgbClr val="282828"/>
+                          </a:solidFill>
+                          <a:latin typeface="Arial"/>
+                        </a:rPr>
+                        <a:t>7</a:t>
+                      </a:r>
+                    </a:p>
+                  </a:txBody>
+                  <a:tcPr marL="54864" marR="54864" marT="18288" marB="18288">
+                    <a:solidFill>
+                      <a:srgbClr val="FFFFFF"/>
+                    </a:solidFill>
+                  </a:tcPr>
+                </a:tc>
+                <a:tc>
+                  <a:txBody>
+                    <a:bodyPr wrap="square"/>
+                    <a:lstStyle/>
+                    <a:p>
+                      <a:r>
+                        <a:rPr sz="1100" b="0">
+                          <a:solidFill>
+                            <a:srgbClr val="282828"/>
+                          </a:solidFill>
+                          <a:latin typeface="Arial"/>
+                        </a:rPr>
+                        <a:t>Steeves, Wallace, Kettenbeil, Jewell 2020, Optica 7, 1267</a:t>
+                      </a:r>
+                    </a:p>
+                  </a:txBody>
+                  <a:tcPr marL="54864" marR="54864" marT="18288" marB="18288">
+                    <a:solidFill>
+                      <a:srgbClr val="FFFFFF"/>
+                    </a:solidFill>
+                  </a:tcPr>
+                </a:tc>
+                <a:tc>
+                  <a:txBody>
+                    <a:bodyPr wrap="square"/>
+                    <a:lstStyle/>
+                    <a:p>
+                      <a:r>
+                        <a:rPr sz="1100" b="0">
+                          <a:solidFill>
+                            <a:srgbClr val="282828"/>
+                          </a:solidFill>
+                          <a:latin typeface="Arial"/>
+                        </a:rPr>
+                        <a:t>1.6 pm repeatability in 4.3 s by alternating flat and waffle DM states and averaging the differences; a reconstruction robust at the highest spatial frequencies</a:t>
+                      </a:r>
+                    </a:p>
+                  </a:txBody>
+                  <a:tcPr marL="54864" marR="54864" marT="18288" marB="18288">
+                    <a:solidFill>
+                      <a:srgbClr val="FFFFFF"/>
+                    </a:solidFill>
+                  </a:tcPr>
+                </a:tc>
+              </a:tr>
+              <a:tr h="468630">
+                <a:tc>
+                  <a:txBody>
+                    <a:bodyPr wrap="square"/>
+                    <a:lstStyle/>
+                    <a:p>
+                      <a:r>
+                        <a:rPr sz="1100" b="0">
+                          <a:solidFill>
+                            <a:srgbClr val="282828"/>
+                          </a:solidFill>
+                          <a:latin typeface="Arial"/>
+                        </a:rPr>
+                        <a:t>8</a:t>
+                      </a:r>
+                    </a:p>
+                  </a:txBody>
+                  <a:tcPr marL="54864" marR="54864" marT="18288" marB="18288">
+                    <a:solidFill>
+                      <a:srgbClr val="ECF1F6"/>
+                    </a:solidFill>
+                  </a:tcPr>
+                </a:tc>
+                <a:tc>
+                  <a:txBody>
+                    <a:bodyPr wrap="square"/>
+                    <a:lstStyle/>
+                    <a:p>
+                      <a:r>
+                        <a:rPr sz="1100" b="0">
+                          <a:solidFill>
+                            <a:srgbClr val="282828"/>
+                          </a:solidFill>
+                          <a:latin typeface="Arial"/>
+                        </a:rPr>
+                        <a:t>Wallace, Rao, Jensen-Clem, Serabyn 2011, SPIE 8126</a:t>
+                      </a:r>
+                    </a:p>
+                  </a:txBody>
+                  <a:tcPr marL="54864" marR="54864" marT="18288" marB="18288">
+                    <a:solidFill>
+                      <a:srgbClr val="ECF1F6"/>
+                    </a:solidFill>
+                  </a:tcPr>
+                </a:tc>
+                <a:tc>
+                  <a:txBody>
+                    <a:bodyPr wrap="square"/>
+                    <a:lstStyle/>
+                    <a:p>
+                      <a:r>
+                        <a:rPr sz="1100" b="0">
+                          <a:solidFill>
+                            <a:srgbClr val="282828"/>
+                          </a:solidFill>
+                          <a:latin typeface="Arial"/>
+                        </a:rPr>
+                        <a:t>All-reflective phase-shifting Zernike interferometer: a dynamic, arbitrary core phase shift read in four steps gives phase and amplitude; low sensitivity to vibration, polarization and wavelength</a:t>
+                      </a:r>
+                    </a:p>
+                  </a:txBody>
+                  <a:tcPr marL="54864" marR="54864" marT="18288" marB="18288">
+                    <a:solidFill>
+                      <a:srgbClr val="ECF1F6"/>
+                    </a:solidFill>
+                  </a:tcPr>
+                </a:tc>
+              </a:tr>
+              <a:tr h="468630">
+                <a:tc>
+                  <a:txBody>
+                    <a:bodyPr wrap="square"/>
+                    <a:lstStyle/>
+                    <a:p>
+                      <a:r>
+                        <a:rPr sz="1100" b="0">
+                          <a:solidFill>
+                            <a:srgbClr val="282828"/>
+                          </a:solidFill>
+                          <a:latin typeface="Arial"/>
+                        </a:rPr>
+                        <a:t>9</a:t>
+                      </a:r>
+                    </a:p>
+                  </a:txBody>
+                  <a:tcPr marL="54864" marR="54864" marT="18288" marB="18288">
+                    <a:solidFill>
+                      <a:srgbClr val="FFFFFF"/>
+                    </a:solidFill>
+                  </a:tcPr>
+                </a:tc>
+                <a:tc>
+                  <a:txBody>
+                    <a:bodyPr wrap="square"/>
+                    <a:lstStyle/>
+                    <a:p>
+                      <a:r>
+                        <a:rPr sz="1100" b="0">
+                          <a:solidFill>
+                            <a:srgbClr val="282828"/>
+                          </a:solidFill>
+                          <a:latin typeface="Arial"/>
+                        </a:rPr>
+                        <a:t>Moore and Redding 2018, SPIE 10698</a:t>
+                      </a:r>
+                    </a:p>
+                  </a:txBody>
+                  <a:tcPr marL="54864" marR="54864" marT="18288" marB="18288">
+                    <a:solidFill>
+                      <a:srgbClr val="FFFFFF"/>
+                    </a:solidFill>
+                  </a:tcPr>
+                </a:tc>
+                <a:tc>
+                  <a:txBody>
+                    <a:bodyPr wrap="square"/>
+                    <a:lstStyle/>
+                    <a:p>
+                      <a:r>
+                        <a:rPr sz="1100" b="0">
+                          <a:solidFill>
+                            <a:srgbClr val="282828"/>
+                          </a:solidFill>
+                          <a:latin typeface="Arial"/>
+                        </a:rPr>
+                        <a:t>Nonlinear polychromatic physical-optics reconstruction for picometer differential metrology on LUVOIR; the in-house precedent for the reconstructor above</a:t>
+                      </a:r>
+                    </a:p>
+                  </a:txBody>
+                  <a:tcPr marL="54864" marR="54864" marT="18288" marB="18288">
+                    <a:solidFill>
+                      <a:srgbClr val="FFFFFF"/>
+                    </a:solidFill>
+                  </a:tcPr>
+                </a:tc>
+              </a:tr>
+              <a:tr h="468630">
+                <a:tc>
+                  <a:txBody>
+                    <a:bodyPr wrap="square"/>
+                    <a:lstStyle/>
+                    <a:p>
+                      <a:r>
+                        <a:rPr sz="1100" b="0">
+                          <a:solidFill>
+                            <a:srgbClr val="282828"/>
+                          </a:solidFill>
+                          <a:latin typeface="Arial"/>
+                        </a:rPr>
+                        <a:t>10</a:t>
+                      </a:r>
+                    </a:p>
+                  </a:txBody>
+                  <a:tcPr marL="54864" marR="54864" marT="18288" marB="18288">
+                    <a:solidFill>
+                      <a:srgbClr val="ECF1F6"/>
+                    </a:solidFill>
+                  </a:tcPr>
+                </a:tc>
+                <a:tc>
+                  <a:txBody>
+                    <a:bodyPr wrap="square"/>
+                    <a:lstStyle/>
+                    <a:p>
+                      <a:r>
+                        <a:rPr sz="1100" b="0">
+                          <a:solidFill>
+                            <a:srgbClr val="282828"/>
+                          </a:solidFill>
+                          <a:latin typeface="Arial"/>
+                        </a:rPr>
+                        <a:t>Keck vector-Zernike segment control 2024 (arXiv 2404.08728); Wallace et al. 2022 (arXiv 2205.02241)</a:t>
+                      </a:r>
+                    </a:p>
+                  </a:txBody>
+                  <a:tcPr marL="54864" marR="54864" marT="18288" marB="18288">
+                    <a:solidFill>
+                      <a:srgbClr val="ECF1F6"/>
+                    </a:solidFill>
+                  </a:tcPr>
+                </a:tc>
+                <a:tc>
+                  <a:txBody>
+                    <a:bodyPr wrap="square"/>
+                    <a:lstStyle/>
+                    <a:p>
+                      <a:r>
+                        <a:rPr sz="1100" b="0">
+                          <a:solidFill>
+                            <a:srgbClr val="282828"/>
+                          </a:solidFill>
+                          <a:latin typeface="Arial"/>
+                        </a:rPr>
+                        <a:t>Segment piston by model-based iteration; 11 nm rms piston uncertainty; underestimation 2 to 4× below 50 % Strehl; fabricated shifts 0.30π and 0.68π instead of ±0.5π</a:t>
+                      </a:r>
+                    </a:p>
+                  </a:txBody>
+                  <a:tcPr marL="54864" marR="54864" marT="18288" marB="18288">
+                    <a:solidFill>
+                      <a:srgbClr val="ECF1F6"/>
+                    </a:solidFill>
+                  </a:tcPr>
+                </a:tc>
+              </a:tr>
+              <a:tr h="468630">
+                <a:tc>
+                  <a:txBody>
+                    <a:bodyPr wrap="square"/>
+                    <a:lstStyle/>
+                    <a:p>
+                      <a:r>
+                        <a:rPr sz="1100" b="0">
+                          <a:solidFill>
+                            <a:srgbClr val="282828"/>
+                          </a:solidFill>
+                          <a:latin typeface="Arial"/>
+                        </a:rPr>
+                        <a:t>11</a:t>
+                      </a:r>
+                    </a:p>
+                  </a:txBody>
+                  <a:tcPr marL="54864" marR="54864" marT="18288" marB="18288">
+                    <a:solidFill>
+                      <a:srgbClr val="FFFFFF"/>
+                    </a:solidFill>
+                  </a:tcPr>
+                </a:tc>
+                <a:tc>
+                  <a:txBody>
+                    <a:bodyPr wrap="square"/>
+                    <a:lstStyle/>
+                    <a:p>
+                      <a:r>
+                        <a:rPr sz="1100" b="0">
+                          <a:solidFill>
+                            <a:srgbClr val="282828"/>
+                          </a:solidFill>
+                          <a:latin typeface="Arial"/>
+                        </a:rPr>
+                        <a:t>HiCAT mid-order Zernike sensor 2024 (arXiv 2409.03411)</a:t>
+                      </a:r>
+                    </a:p>
+                  </a:txBody>
+                  <a:tcPr marL="54864" marR="54864" marT="18288" marB="18288">
+                    <a:solidFill>
+                      <a:srgbClr val="FFFFFF"/>
+                    </a:solidFill>
+                  </a:tcPr>
+                </a:tc>
+                <a:tc>
+                  <a:txBody>
+                    <a:bodyPr wrap="square"/>
+                    <a:lstStyle/>
+                    <a:p>
+                      <a:r>
+                        <a:rPr sz="1100" b="0">
+                          <a:solidFill>
+                            <a:srgbClr val="282828"/>
+                          </a:solidFill>
+                          <a:latin typeface="Arial"/>
+                        </a:rPr>
+                        <a:t>Per-segment piston, tip and tilt by interaction matrix; a minimal step of 125 ± 31 pm at SNR 4; 14-bit DM quantization reads as steps in the response</a:t>
+                      </a:r>
+                    </a:p>
+                  </a:txBody>
+                  <a:tcPr marL="54864" marR="54864" marT="18288" marB="18288">
+                    <a:solidFill>
+                      <a:srgbClr val="FFFFFF"/>
+                    </a:solidFill>
+                  </a:tcPr>
+                </a:tc>
+              </a:tr>
+              <a:tr h="468630">
+                <a:tc>
+                  <a:txBody>
+                    <a:bodyPr wrap="square"/>
+                    <a:lstStyle/>
+                    <a:p>
+                      <a:r>
+                        <a:rPr sz="1100" b="0">
+                          <a:solidFill>
+                            <a:srgbClr val="282828"/>
+                          </a:solidFill>
+                          <a:latin typeface="Arial"/>
+                        </a:rPr>
+                        <a:t>12</a:t>
+                      </a:r>
+                    </a:p>
+                  </a:txBody>
+                  <a:tcPr marL="54864" marR="54864" marT="18288" marB="18288">
+                    <a:solidFill>
+                      <a:srgbClr val="ECF1F6"/>
+                    </a:solidFill>
+                  </a:tcPr>
+                </a:tc>
+                <a:tc>
+                  <a:txBody>
+                    <a:bodyPr wrap="square"/>
+                    <a:lstStyle/>
+                    <a:p>
+                      <a:r>
+                        <a:rPr sz="1100" b="0">
+                          <a:solidFill>
+                            <a:srgbClr val="282828"/>
+                          </a:solidFill>
+                          <a:latin typeface="Arial"/>
+                        </a:rPr>
+                        <a:t>Shi et al. 2015, SPIE 9605 (Roman low-order sensor)</a:t>
+                      </a:r>
+                    </a:p>
+                  </a:txBody>
+                  <a:tcPr marL="54864" marR="54864" marT="18288" marB="18288">
+                    <a:solidFill>
+                      <a:srgbClr val="ECF1F6"/>
+                    </a:solidFill>
+                  </a:tcPr>
+                </a:tc>
+                <a:tc>
+                  <a:txBody>
+                    <a:bodyPr wrap="square"/>
+                    <a:lstStyle/>
+                    <a:p>
+                      <a:r>
+                        <a:rPr sz="1100" b="0">
+                          <a:solidFill>
+                            <a:srgbClr val="282828"/>
+                          </a:solidFill>
+                          <a:latin typeface="Arial"/>
+                        </a:rPr>
+                        <a:t>A reflective dimple on the focal-plane mask senses Z2 to Z11 from the rejected starlight: the spatially filtered form of the same sensor</a:t>
+                      </a:r>
+                    </a:p>
+                  </a:txBody>
+                  <a:tcPr marL="54864" marR="54864" marT="18288" marB="18288">
+                    <a:solidFill>
+                      <a:srgbClr val="ECF1F6"/>
+                    </a:solidFill>
+                  </a:tcPr>
+                </a:tc>
+              </a:tr>
+            </a:tbl>
+          </a:graphicData>
+        </a:graphic>
+      </p:graphicFrame>
+      <p:sp>
+        <p:nvSpPr>
+          <p:cNvPr id="5" name="TextBox 4"/>
           <p:cNvSpPr txBox="1"/>
           <p:nvPr/>
         </p:nvSpPr>
         <p:spPr>
           <a:xfrm>
-            <a:off x="411480" y="1298448"/>
+            <a:off x="411480" y="4536567"/>
             <a:ext cx="11368735" cy="274320"/>
           </a:xfrm>
           <a:prstGeom prst="rect">
@@ -7037,100 +7698,13 @@
               </a:spcAft>
             </a:pPr>
             <a:r>
-              <a:rPr sz="1500" b="0">
-                <a:solidFill>
-                  <a:srgbClr val="282828"/>
+              <a:rPr sz="1050" b="0">
+                <a:solidFill>
+                  <a:srgbClr val="6E6E6E"/>
                 </a:solidFill>
                 <a:latin typeface="Arial"/>
               </a:rPr>
-              <a:t>•  The sensor model must keep the pupil DM-conjugate: the diffraction bracket's two spheres share one radius, and the runner checks the round trip every time.  The correction alone took the single-actuator floor from 744 to 67 pm and made the undetected grid case detectable.</a:t>
-            </a:r>
-          </a:p>
-          <a:p>
-            <a:pPr>
-              <a:spcAft>
-                <a:spcPts val="600"/>
-              </a:spcAft>
-            </a:pPr>
-            <a:r>
-              <a:rPr sz="1500" b="0">
-                <a:solidFill>
-                  <a:srgbClr val="282828"/>
-                </a:solidFill>
-                <a:latin typeface="Arial"/>
-              </a:rPr>
-              <a:t>•  The exact reading with an iterated reference wave is the import that paid (paper 1): 26 pm from one frame on a 30 nm working surface, SNR 355 — with the branch resolved once by four stepped frames of the base, refined with the iterated reference.  The plain stepped prior misses 3% of pixels and can flip a single actuator's sign.</a:t>
-            </a:r>
-          </a:p>
-          <a:p>
-            <a:pPr>
-              <a:spcAft>
-                <a:spcPts val="600"/>
-              </a:spcAft>
-            </a:pPr>
-            <a:r>
-              <a:rPr sz="1500" b="0">
-                <a:solidFill>
-                  <a:srgbClr val="282828"/>
-                </a:solidFill>
-                <a:latin typeface="Arial"/>
-              </a:rPr>
-              <a:t>•  Sampling is closed: camera pixels per actuator (the ray count) set the hold-out gain; the dimple's own sampling did not move an actuator-space number at 4 px against 8 px.  The remaining 6.5% of hold-out gain is the next thing to measure — the kernel at the held-out site.</a:t>
-            </a:r>
-          </a:p>
-          <a:p>
-            <a:pPr>
-              <a:spcAft>
-                <a:spcPts val="600"/>
-              </a:spcAft>
-            </a:pPr>
-            <a:r>
-              <a:rPr sz="1500" b="0">
-                <a:solidFill>
-                  <a:srgbClr val="282828"/>
-                </a:solidFill>
-                <a:latin typeface="Arial"/>
-              </a:rPr>
-              <a:t>•  Colour and photons are not levers: the chromatic null was the defocus; 10¹⁴ photons per state reaches 1 pm.  The budget is systematics: the 25–60 pm floors and gain stability.</a:t>
-            </a:r>
-          </a:p>
-        </p:txBody>
-      </p:sp>
-      <p:sp>
-        <p:nvSpPr>
-          <p:cNvPr id="5" name="TextBox 4"/>
-          <p:cNvSpPr txBox="1"/>
-          <p:nvPr/>
-        </p:nvSpPr>
-        <p:spPr>
-          <a:xfrm>
-            <a:off x="411480" y="4620006"/>
-            <a:ext cx="11368735" cy="274320"/>
-          </a:xfrm>
-          <a:prstGeom prst="rect">
-            <a:avLst/>
-          </a:prstGeom>
-          <a:noFill/>
-        </p:spPr>
-        <p:txBody>
-          <a:bodyPr wrap="square">
-            <a:spAutoFit/>
-          </a:bodyPr>
-          <a:lstStyle/>
-          <a:p>
-            <a:pPr>
-              <a:spcAft>
-                <a:spcPts val="600"/>
-              </a:spcAft>
-            </a:pPr>
-            <a:r>
-              <a:rPr sz="1050" b="0">
-                <a:solidFill>
-                  <a:srgbClr val="6E6E6E"/>
-                </a:solidFill>
-                <a:latin typeface="Arial"/>
-              </a:rPr>
-              <a:t>Runner and records: templates/40_benches/zwfs_dm96 (README S7/S8; runs/rec193, ng385, ng385s3, m2048, rec193full).</a:t>
+              <a:t>Also read: PIAA-ZWFS (2026, arXiv 2606.28136), lossless pupil apodization that closes the gap to the fundamental sensitivity limit by 10× — a design lever, not a model change.</a:t>
             </a:r>
           </a:p>
         </p:txBody>
@@ -7187,7 +7761,7 @@
                 </a:solidFill>
                 <a:latin typeface="Arial"/>
               </a:rPr>
-              <a:t>Conclusions: the follow-on imports, in order</a:t>
+              <a:t>Conclusions: what the corrected model and the exact reading settled</a:t>
             </a:r>
           </a:p>
           <a:p>
@@ -7203,7 +7777,7 @@
                 </a:solidFill>
                 <a:latin typeface="Arial"/>
               </a:rPr>
-              <a:t>The JPL budget form, model-matched DM calibration, the vector sensor priced before it is built — and the interferometer's own lever</a:t>
+              <a:t>Fixing the model was the bigger gain; the exact reading with the sign map is the best one-frame reading; colour and photons are not the 1 pm budget</a:t>
             </a:r>
           </a:p>
         </p:txBody>
@@ -7286,7 +7860,7 @@
                 </a:solidFill>
                 <a:latin typeface="Arial"/>
               </a:rPr>
-              <a:t>•  The JPL budget form: a per-pixel sensitivity factor from the measured fields predicts the photon-noise stage analytically, and the four systematic terms (pupil calibration at ½, reference wave at 1, dimple depth, initial phase) become the rows of the error budget.</a:t>
+              <a:t>•  The model must keep the pupil image in focus: the two spheres around the mask share one radius, and the script checks the no-mask round trip on every run.  The correction alone took the single-actuator floor from 744 to 67 pm and made the undetected grid case detectable.</a:t>
             </a:r>
           </a:p>
           <a:p>
@@ -7302,7 +7876,7 @@
                 </a:solidFill>
                 <a:latin typeface="Arial"/>
               </a:rPr>
-              <a:t>•  Calibrate the DM through the sensor's own image model: fit actuator positions and gains by matching sensor images of poke grids to a simulation that includes the propagation distances — the out-of-conjugate case, and the named suspect for the hold-out gain.  The interferometer's detector sits off the DM conjugate after the null-tuned tail, so this is its lever too.</a:t>
+              <a:t>•  The exact reading with a re-computed reference is the import that paid (paper 1): 26 pm from one frame on a 30 nm working surface, SNR 355 — with the sign fold settled once from four stepped frames and refined.  The plain stepped sign map misses 3% of pixels and can flip a single actuator's sign.</a:t>
             </a:r>
           </a:p>
           <a:p>
@@ -7318,7 +7892,7 @@
                 </a:solidFill>
                 <a:latin typeface="Arial"/>
               </a:rPr>
-              <a:t>•  Colour as a joint fit, not a combination: the equal-weight combination inherits a bad channel; a joint per-wavelength fit through the exact reading would use 700–780 nm for range and 632.8 nm for the calibration of record.</a:t>
+              <a:t>•  Sampling is settled: camera pixels per actuator (the ray count) set the gain on a test actuator; the dimple's own sampling did not move any actuator-unit result at 4 against 8 pixels.  The remaining 6.5% of gain, and the gain change with the working surface, are the next measurement: calibrate on the working surface and at the test site.</a:t>
             </a:r>
           </a:p>
           <a:p>
@@ -7334,23 +7908,7 @@
                 </a:solidFill>
                 <a:latin typeface="Arial"/>
               </a:rPr>
-              <a:t>•  Model the vector sensor before the metasurface is built: the exact two-image solution and its leakage terms (retardance offsets, splitter rotation) run on the engine's polarization machinery; the bench limits at Keck and SEAL were defocus and crosstalk between the two pupil images, both priceable here.</a:t>
-            </a:r>
-          </a:p>
-          <a:p>
-            <a:pPr>
-              <a:spcAft>
-                <a:spcPts val="600"/>
-              </a:spcAft>
-            </a:pPr>
-            <a:r>
-              <a:rPr sz="1500" b="0">
-                <a:solidFill>
-                  <a:srgbClr val="282828"/>
-                </a:solidFill>
-                <a:latin typeface="Arial"/>
-              </a:rPr>
-              <a:t>•  The interferometer, for balance: a PZT phase shift buys no model gain — its floors are geometric and colour-independent — but on hardware an absolute phase scale and freedom from polarization systematics; the recommended form is a hybrid: polarization snapshot for the differential measurements, a PZT on the reference flat as calibrator.  Its reflective (OAP) variant is in build.</a:t>
+              <a:t>•  Colour and photons are not levers: the chromatic null was the defocus; 10¹⁴ photons per state reach 1 pm.  The budget is systematic error: the 25 to 60 pm floors and the gain's stability.</a:t>
             </a:r>
           </a:p>
         </p:txBody>
@@ -7363,7 +7921,7 @@
         </p:nvSpPr>
         <p:spPr>
           <a:xfrm>
-            <a:off x="411480" y="5998464"/>
+            <a:off x="411480" y="4620006"/>
             <a:ext cx="11368735" cy="274320"/>
           </a:xfrm>
           <a:prstGeom prst="rect">
@@ -7389,7 +7947,7 @@
                 </a:solidFill>
                 <a:latin typeface="Arial"/>
               </a:rPr>
-              <a:t>Segmented-mirror lessons carried forward: the sensor reads segment piston but not global piston, DM quantization appears as steps in the response, and piston is underestimated below 50 % Strehl (Keck) — all three enter the e5-class segmented gauges.</a:t>
+              <a:t>Script and records: templates/40_benches/zwfs_dm96 (README S7/S8; runs/rec193, ng385, ng385s3, m2048, rec193full).</a:t>
             </a:r>
           </a:p>
         </p:txBody>
@@ -7420,63 +7978,6 @@
         </p:nvSpPr>
         <p:spPr>
           <a:xfrm>
-            <a:off x="822960" y="2743200"/>
-            <a:ext cx="10545775" cy="1280160"/>
-          </a:xfrm>
-          <a:prstGeom prst="rect">
-            <a:avLst/>
-          </a:prstGeom>
-          <a:noFill/>
-        </p:spPr>
-        <p:txBody>
-          <a:bodyPr wrap="square">
-            <a:spAutoFit/>
-          </a:bodyPr>
-          <a:lstStyle/>
-          <a:p>
-            <a:pPr algn="ctr">
-              <a:spcAft>
-                <a:spcPts val="400"/>
-              </a:spcAft>
-            </a:pPr>
-            <a:r>
-              <a:rPr sz="4000" b="1">
-                <a:solidFill>
-                  <a:srgbClr val="1F4E79"/>
-                </a:solidFill>
-                <a:latin typeface="Arial"/>
-              </a:rPr>
-              <a:t>Backup</a:t>
-            </a:r>
-          </a:p>
-        </p:txBody>
-      </p:sp>
-    </p:spTree>
-  </p:cSld>
-  <p:clrMapOvr>
-    <a:masterClrMapping/>
-  </p:clrMapOvr>
-</p:sld>
-</file>
-
-<file path=ppt/slides/slide19.xml><?xml version="1.0" encoding="utf-8"?>
-<p:sld xmlns:a="http://schemas.openxmlformats.org/drawingml/2006/main" xmlns:p="http://schemas.openxmlformats.org/presentationml/2006/main" xmlns:r="http://schemas.openxmlformats.org/officeDocument/2006/relationships">
-  <p:cSld>
-    <p:spTree>
-      <p:nvGrpSpPr>
-        <p:cNvPr id="1" name=""/>
-        <p:cNvGrpSpPr/>
-        <p:nvPr/>
-      </p:nvGrpSpPr>
-      <p:grpSpPr/>
-      <p:sp>
-        <p:nvSpPr>
-          <p:cNvPr id="2" name="TextBox 1"/>
-          <p:cNvSpPr txBox="1"/>
-          <p:nvPr/>
-        </p:nvSpPr>
-        <p:spPr>
-          <a:xfrm>
             <a:off x="411480" y="201168"/>
             <a:ext cx="11368735" cy="914400"/>
           </a:xfrm>
@@ -7503,7 +8004,7 @@
                 </a:solidFill>
                 <a:latin typeface="Arial"/>
               </a:rPr>
-              <a:t>Before the correction: the first poke and colour results</a:t>
+              <a:t>Conclusions: what to import next, in order</a:t>
             </a:r>
           </a:p>
           <a:p>
@@ -7519,7 +8020,7 @@
                 </a:solidFill>
                 <a:latin typeface="Arial"/>
               </a:rPr>
-              <a:t>Kept for the record; every number on this slide is from the defocused sensor</a:t>
+              <a:t>The JPL budget form, DM calibration through the sensor's own images, the vector sensor priced before it is built, and the interferometer's lever</a:t>
             </a:r>
           </a:p>
         </p:txBody>
@@ -7568,141 +8069,15 @@
           </a:p>
         </p:txBody>
       </p:sp>
-      <p:pic>
-        <p:nvPicPr>
-          <p:cNvPr id="4" name="Picture 3" descr="zwfs_poke_triptych.png"/>
-          <p:cNvPicPr>
-            <a:picLocks noChangeAspect="1"/>
-          </p:cNvPicPr>
+      <p:sp>
+        <p:nvSpPr>
+          <p:cNvPr id="4" name="TextBox 3"/>
+          <p:cNvSpPr txBox="1"/>
           <p:nvPr/>
-        </p:nvPicPr>
-        <p:blipFill>
-          <a:blip r:embed="rId2"/>
-          <a:stretch>
-            <a:fillRect/>
-          </a:stretch>
-        </p:blipFill>
+        </p:nvSpPr>
         <p:spPr>
           <a:xfrm>
-            <a:off x="3643334" y="1298448"/>
-            <a:ext cx="4905026" cy="1462532"/>
-          </a:xfrm>
-          <a:prstGeom prst="rect">
-            <a:avLst/>
-          </a:prstGeom>
-        </p:spPr>
-      </p:pic>
-      <p:sp>
-        <p:nvSpPr>
-          <p:cNvPr id="5" name="TextBox 4"/>
-          <p:cNvSpPr txBox="1"/>
-          <p:nvPr/>
-        </p:nvSpPr>
-        <p:spPr>
-          <a:xfrm>
-            <a:off x="411480" y="2779268"/>
-            <a:ext cx="11368735" cy="229107"/>
-          </a:xfrm>
-          <a:prstGeom prst="rect">
-            <a:avLst/>
-          </a:prstGeom>
-          <a:noFill/>
-        </p:spPr>
-        <p:txBody>
-          <a:bodyPr wrap="square">
-            <a:spAutoFit/>
-          </a:bodyPr>
-          <a:lstStyle/>
-          <a:p>
-            <a:pPr algn="ctr">
-              <a:spcAft>
-                <a:spcPts val="0"/>
-              </a:spcAft>
-            </a:pPr>
-            <a:r>
-              <a:rPr sz="1000" b="0">
-                <a:solidFill>
-                  <a:srgbClr val="6E6E6E"/>
-                </a:solidFill>
-                <a:latin typeface="Arial"/>
-              </a:rPr>
-              <a:t>One actuator pushed 20 nm on the defocused sensor: the sensed blob is broadened and dimmed — gain 0.445, 0.29 nm rms error; the ring is the 4.9 m Fresnel defocus.</a:t>
-            </a:r>
-          </a:p>
-        </p:txBody>
-      </p:sp>
-      <p:pic>
-        <p:nvPicPr>
-          <p:cNvPr id="6" name="Picture 5" descr="zwfs_defocus_triptych.png"/>
-          <p:cNvPicPr>
-            <a:picLocks noChangeAspect="1"/>
-          </p:cNvPicPr>
-          <p:nvPr/>
-        </p:nvPicPr>
-        <p:blipFill>
-          <a:blip r:embed="rId3"/>
-          <a:stretch>
-            <a:fillRect/>
-          </a:stretch>
-        </p:blipFill>
-        <p:spPr>
-          <a:xfrm>
-            <a:off x="3635414" y="3044952"/>
-            <a:ext cx="4920865" cy="1462532"/>
-          </a:xfrm>
-          <a:prstGeom prst="rect">
-            <a:avLst/>
-          </a:prstGeom>
-        </p:spPr>
-      </p:pic>
-      <p:sp>
-        <p:nvSpPr>
-          <p:cNvPr id="7" name="TextBox 6"/>
-          <p:cNvSpPr txBox="1"/>
-          <p:nvPr/>
-        </p:nvSpPr>
-        <p:spPr>
-          <a:xfrm>
-            <a:off x="411480" y="4525771"/>
-            <a:ext cx="11368735" cy="229107"/>
-          </a:xfrm>
-          <a:prstGeom prst="rect">
-            <a:avLst/>
-          </a:prstGeom>
-          <a:noFill/>
-        </p:spPr>
-        <p:txBody>
-          <a:bodyPr wrap="square">
-            <a:spAutoFit/>
-          </a:bodyPr>
-          <a:lstStyle/>
-          <a:p>
-            <a:pPr algn="ctr">
-              <a:spcAft>
-                <a:spcPts val="0"/>
-              </a:spcAft>
-            </a:pPr>
-            <a:r>
-              <a:rPr sz="1000" b="0">
-                <a:solidFill>
-                  <a:srgbClr val="6E6E6E"/>
-                </a:solidFill>
-                <a:latin typeface="Arial"/>
-              </a:rPr>
-              <a:t>Defocus at 8 nm amplitude on the same sensor: sensed matches applied at gain 0.986, 0.16 nm rms — low orders were never the trouble.</a:t>
-            </a:r>
-          </a:p>
-        </p:txBody>
-      </p:sp>
-      <p:sp>
-        <p:nvSpPr>
-          <p:cNvPr id="8" name="TextBox 7"/>
-          <p:cNvSpPr txBox="1"/>
-          <p:nvPr/>
-        </p:nvSpPr>
-        <p:spPr>
-          <a:xfrm>
-            <a:off x="411480" y="4791455"/>
+            <a:off x="411480" y="1298448"/>
             <a:ext cx="11368735" cy="274320"/>
           </a:xfrm>
           <a:prstGeom prst="rect">
@@ -7728,7 +8103,7 @@
                 </a:solidFill>
                 <a:latin typeface="Arial"/>
               </a:rPr>
-              <a:t>•  The sampling sweep then read the spot as a band-select lever (poke gain 0.45 / 0.59 / −0.38 at spots 2.0 / 3.0 / 1.06) and the kernel calibration recovered a 0.90 hold-out gain; both were measured on the ringed kernel.  On the corrected model the raw kernel peak is 0.75 (linear) and 0.93 (exact) and the spot only moves the low-order dip.</a:t>
+              <a:t>•  The JPL budget form: a sensitivity factor per pixel from the measured fields predicts the photon-noise stage analytically, and four systematic terms (pupil calibration at ½, reference wave at 1, dimple depth, initial phase) become the rows of the error budget.</a:t>
             </a:r>
           </a:p>
           <a:p>
@@ -7744,20 +8119,68 @@
                 </a:solidFill>
                 <a:latin typeface="Arial"/>
               </a:rPr>
-              <a:t>•  The colour claim ("five colours fill the blind band; single-actuator floor 720 → 224 pm") was the Talbot null moving as 1/λ.  On the corrected model the null is absent and colour is not a lever (main slide 9).</a:t>
-            </a:r>
-          </a:p>
-        </p:txBody>
-      </p:sp>
-      <p:sp>
-        <p:nvSpPr>
-          <p:cNvPr id="9" name="TextBox 8"/>
+              <a:t>•  Calibrate the DM through the sensor's own image model: fit actuator positions and gains by matching sensor images of poke grids to a simulation that includes the propagation distances — this is the calibration on the working surface and at the test site that slides 9 and 10 call for.  The interferometer's camera sits off the DM conjugate after the tuned tail, so it is its lever too.</a:t>
+            </a:r>
+          </a:p>
+          <a:p>
+            <a:pPr>
+              <a:spcAft>
+                <a:spcPts val="600"/>
+              </a:spcAft>
+            </a:pPr>
+            <a:r>
+              <a:rPr sz="1500" b="0">
+                <a:solidFill>
+                  <a:srgbClr val="282828"/>
+                </a:solidFill>
+                <a:latin typeface="Arial"/>
+              </a:rPr>
+              <a:t>•  Colour as a joint fit, not a combination: an equal-weight combination inherits a bad channel; a joint fit through the exact reading would use 700 to 780 nm for range and 632.8 nm for the calibration of record.</a:t>
+            </a:r>
+          </a:p>
+          <a:p>
+            <a:pPr>
+              <a:spcAft>
+                <a:spcPts val="600"/>
+              </a:spcAft>
+            </a:pPr>
+            <a:r>
+              <a:rPr sz="1500" b="0">
+                <a:solidFill>
+                  <a:srgbClr val="282828"/>
+                </a:solidFill>
+                <a:latin typeface="Arial"/>
+              </a:rPr>
+              <a:t>•  Model the vector sensor before the metasurface is built: the exact two-image solution and its leakage terms (retardance offsets, splitter rotation) run on the engine's polarization machinery; the bench limits at Keck and SEAL were defocus and crosstalk between the two pupil images, both priceable here.</a:t>
+            </a:r>
+          </a:p>
+          <a:p>
+            <a:pPr>
+              <a:spcAft>
+                <a:spcPts val="600"/>
+              </a:spcAft>
+            </a:pPr>
+            <a:r>
+              <a:rPr sz="1500" b="0">
+                <a:solidFill>
+                  <a:srgbClr val="282828"/>
+                </a:solidFill>
+                <a:latin typeface="Arial"/>
+              </a:rPr>
+              <a:t>•  The interferometer, for balance: a PZT phase shift buys no model gain — its floors are geometric and colour-independent — but on hardware an absolute phase scale and freedom from polarization systematics; the recommended form is a hybrid: polarization snapshot for the change measurements, a PZT on the reference flat as calibrator.  Its all-mirror (OAP) version is in build.</a:t>
+            </a:r>
+          </a:p>
+        </p:txBody>
+      </p:sp>
+      <p:sp>
+        <p:nvSpPr>
+          <p:cNvPr id="5" name="TextBox 4"/>
           <p:cNvSpPr txBox="1"/>
           <p:nvPr/>
         </p:nvSpPr>
         <p:spPr>
           <a:xfrm>
-            <a:off x="411480" y="6346698"/>
+            <a:off x="411480" y="5998464"/>
             <a:ext cx="11368735" cy="274320"/>
           </a:xfrm>
           <a:prstGeom prst="rect">
@@ -7783,7 +8206,64 @@
                 </a:solidFill>
                 <a:latin typeface="Arial"/>
               </a:rPr>
-              <a:t>Records: zwfs_s1 … zwfs_s6color reports and zwfs_sweep_report.txt; the legacy emission ('nf_legacy') reproduces them byte for byte.</a:t>
+              <a:t>Segmented-mirror lessons carried forward: the sensor reads segment piston but not global piston, DM quantization appears as steps in the response, and piston is underestimated below 50 % Strehl (Keck) — all three enter the e5-class segmented gauges.</a:t>
+            </a:r>
+          </a:p>
+        </p:txBody>
+      </p:sp>
+    </p:spTree>
+  </p:cSld>
+  <p:clrMapOvr>
+    <a:masterClrMapping/>
+  </p:clrMapOvr>
+</p:sld>
+</file>
+
+<file path=ppt/slides/slide19.xml><?xml version="1.0" encoding="utf-8"?>
+<p:sld xmlns:a="http://schemas.openxmlformats.org/drawingml/2006/main" xmlns:p="http://schemas.openxmlformats.org/presentationml/2006/main" xmlns:r="http://schemas.openxmlformats.org/officeDocument/2006/relationships">
+  <p:cSld>
+    <p:spTree>
+      <p:nvGrpSpPr>
+        <p:cNvPr id="1" name=""/>
+        <p:cNvGrpSpPr/>
+        <p:nvPr/>
+      </p:nvGrpSpPr>
+      <p:grpSpPr/>
+      <p:sp>
+        <p:nvSpPr>
+          <p:cNvPr id="2" name="TextBox 1"/>
+          <p:cNvSpPr txBox="1"/>
+          <p:nvPr/>
+        </p:nvSpPr>
+        <p:spPr>
+          <a:xfrm>
+            <a:off x="822960" y="2743200"/>
+            <a:ext cx="10545775" cy="1280160"/>
+          </a:xfrm>
+          <a:prstGeom prst="rect">
+            <a:avLst/>
+          </a:prstGeom>
+          <a:noFill/>
+        </p:spPr>
+        <p:txBody>
+          <a:bodyPr wrap="square">
+            <a:spAutoFit/>
+          </a:bodyPr>
+          <a:lstStyle/>
+          <a:p>
+            <a:pPr algn="ctr">
+              <a:spcAft>
+                <a:spcPts val="400"/>
+              </a:spcAft>
+            </a:pPr>
+            <a:r>
+              <a:rPr sz="4000" b="1">
+                <a:solidFill>
+                  <a:srgbClr val="1F4E79"/>
+                </a:solidFill>
+                <a:latin typeface="Arial"/>
+              </a:rPr>
+              <a:t>Backup</a:t>
             </a:r>
           </a:p>
         </p:txBody>
@@ -7856,7 +8336,7 @@
                 </a:solidFill>
                 <a:latin typeface="Arial"/>
               </a:rPr>
-              <a:t>An etched dimple at the focus phase-shifts the heart of the beam; that light spreads back over the pupil as a built-in reference</a:t>
+              <a:t>A small etched dimple at the focus delays the centre of the beam; that light spreads back over the pupil and acts as the reference</a:t>
             </a:r>
           </a:p>
         </p:txBody>
@@ -7939,7 +8419,7 @@
                 </a:solidFill>
                 <a:latin typeface="Arial"/>
               </a:rPr>
-              <a:t>•  One transparent plate, one tiny etched spot.  At the focus, the core of the beam passes through the dimple and picks up a quarter-wave phase shift; everything outside misses it.  The shifted core light spreads back across the whole pupil image and interferes with the rest — a common-path interferometer with no second arm.</a:t>
+              <a:t>•  One glass plate, one tiny etched spot.  At the focus, the centre of the beam passes through the dimple and is delayed by a quarter wave; the rest of the beam misses it.  The delayed light spreads back over the whole pupil image and interferes with the rest.  This is an interferometer with no second arm.</a:t>
             </a:r>
           </a:p>
           <a:p>
@@ -7955,7 +8435,7 @@
                 </a:solidFill>
                 <a:latin typeface="Arial"/>
               </a:rPr>
-              <a:t>•  Pupil brightness becomes a phase map.  Near a quarter wave of shift, the camera intensity is close to linear in the wavefront: one frame per measurement, no moving parts, no polarization optics.  The exact per-pixel inversion (slide 6) removes the small-phase limit.</a:t>
+              <a:t>•  Pupil brightness becomes a phase map.  Near a quarter wave of delay, the camera brightness is nearly proportional to the wavefront.  One frame per measurement, no moving parts, no polarization optics.  An exact pixel-by-pixel inversion (slide 8) removes the small-phase limit.</a:t>
             </a:r>
           </a:p>
           <a:p>
@@ -7971,7 +8451,7 @@
                 </a:solidFill>
                 <a:latin typeface="Arial"/>
               </a:rPr>
-              <a:t>•  The two prices: the sensor cannot see piston and dims toward the very lowest spatial frequencies — the reference is made from the beam itself.  On the corrected model the dip sits at 0.5–1 cycle per aperture (gain 0.5 at 1 cycle); defocus and everything finer read near 1.</a:t>
+              <a:t>•  The two prices.  The sensor cannot see piston, and it is weak at the very lowest spatial frequencies, because the reference is made from the beam itself.  On the corrected model the weak band is 0.5 to 1 cycle across the pupil (half response at 1 cycle); defocus and everything finer read near full response.</a:t>
             </a:r>
           </a:p>
         </p:txBody>
@@ -8034,7 +8514,7 @@
                 </a:solidFill>
                 <a:latin typeface="Arial"/>
               </a:rPr>
-              <a:t>The focal spot with the dimple footprint on its core (left); the mask itself — a 1.57 rad phase disk, edges gray from area-weighted supersampling (right).</a:t>
+              <a:t>The focal spot with the dimple on its core (left); the mask itself — a 1.57 rad phase disk with grey edges from area-weighted supersampling (right).</a:t>
             </a:r>
           </a:p>
         </p:txBody>
@@ -8073,7 +8553,7 @@
                 </a:solidFill>
                 <a:latin typeface="Arial"/>
               </a:rPr>
-              <a:t>The dimple takes 28.0% of the light — the encircled energy a 1.06 λF/D disk should take from a focused spot.</a:t>
+              <a:t>The dimple takes 28.0% of the light — the fraction a 1.06 λF/D disk should take from a focused spot.</a:t>
             </a:r>
           </a:p>
         </p:txBody>
@@ -8130,7 +8610,7 @@
                 </a:solidFill>
                 <a:latin typeface="Arial"/>
               </a:rPr>
-              <a:t>Provenance and records</a:t>
+              <a:t>Before the correction: the first poke and colour results</a:t>
             </a:r>
           </a:p>
           <a:p>
@@ -8146,7 +8626,7 @@
                 </a:solidFill>
                 <a:latin typeface="Arial"/>
               </a:rPr>
-              <a:t>Every number re-derives from a committed script</a:t>
+              <a:t>Kept for the record; every number on this slide is from the out-of-focus model</a:t>
             </a:r>
           </a:p>
         </p:txBody>
@@ -8195,15 +8675,141 @@
           </a:p>
         </p:txBody>
       </p:sp>
-      <p:sp>
-        <p:nvSpPr>
-          <p:cNvPr id="4" name="TextBox 3"/>
+      <p:pic>
+        <p:nvPicPr>
+          <p:cNvPr id="4" name="Picture 3" descr="zwfs_poke_triptych.png"/>
+          <p:cNvPicPr>
+            <a:picLocks noChangeAspect="1"/>
+          </p:cNvPicPr>
+          <p:nvPr/>
+        </p:nvPicPr>
+        <p:blipFill>
+          <a:blip r:embed="rId2"/>
+          <a:stretch>
+            <a:fillRect/>
+          </a:stretch>
+        </p:blipFill>
+        <p:spPr>
+          <a:xfrm>
+            <a:off x="3643334" y="1298448"/>
+            <a:ext cx="4905026" cy="1462532"/>
+          </a:xfrm>
+          <a:prstGeom prst="rect">
+            <a:avLst/>
+          </a:prstGeom>
+        </p:spPr>
+      </p:pic>
+      <p:sp>
+        <p:nvSpPr>
+          <p:cNvPr id="5" name="TextBox 4"/>
           <p:cNvSpPr txBox="1"/>
           <p:nvPr/>
         </p:nvSpPr>
         <p:spPr>
           <a:xfrm>
-            <a:off x="411480" y="1298448"/>
+            <a:off x="411480" y="2779268"/>
+            <a:ext cx="11368735" cy="229107"/>
+          </a:xfrm>
+          <a:prstGeom prst="rect">
+            <a:avLst/>
+          </a:prstGeom>
+          <a:noFill/>
+        </p:spPr>
+        <p:txBody>
+          <a:bodyPr wrap="square">
+            <a:spAutoFit/>
+          </a:bodyPr>
+          <a:lstStyle/>
+          <a:p>
+            <a:pPr algn="ctr">
+              <a:spcAft>
+                <a:spcPts val="0"/>
+              </a:spcAft>
+            </a:pPr>
+            <a:r>
+              <a:rPr sz="1000" b="0">
+                <a:solidFill>
+                  <a:srgbClr val="6E6E6E"/>
+                </a:solidFill>
+                <a:latin typeface="Arial"/>
+              </a:rPr>
+              <a:t>One actuator moved 20 nm on the out-of-focus model: the sensed blob is broadened and dimmed — gain 0.445, 0.29 nm rms error; the ring is the 4.9 m defocus.</a:t>
+            </a:r>
+          </a:p>
+        </p:txBody>
+      </p:sp>
+      <p:pic>
+        <p:nvPicPr>
+          <p:cNvPr id="6" name="Picture 5" descr="zwfs_defocus_triptych.png"/>
+          <p:cNvPicPr>
+            <a:picLocks noChangeAspect="1"/>
+          </p:cNvPicPr>
+          <p:nvPr/>
+        </p:nvPicPr>
+        <p:blipFill>
+          <a:blip r:embed="rId3"/>
+          <a:stretch>
+            <a:fillRect/>
+          </a:stretch>
+        </p:blipFill>
+        <p:spPr>
+          <a:xfrm>
+            <a:off x="3635414" y="3044952"/>
+            <a:ext cx="4920865" cy="1462532"/>
+          </a:xfrm>
+          <a:prstGeom prst="rect">
+            <a:avLst/>
+          </a:prstGeom>
+        </p:spPr>
+      </p:pic>
+      <p:sp>
+        <p:nvSpPr>
+          <p:cNvPr id="7" name="TextBox 6"/>
+          <p:cNvSpPr txBox="1"/>
+          <p:nvPr/>
+        </p:nvSpPr>
+        <p:spPr>
+          <a:xfrm>
+            <a:off x="411480" y="4525771"/>
+            <a:ext cx="11368735" cy="229107"/>
+          </a:xfrm>
+          <a:prstGeom prst="rect">
+            <a:avLst/>
+          </a:prstGeom>
+          <a:noFill/>
+        </p:spPr>
+        <p:txBody>
+          <a:bodyPr wrap="square">
+            <a:spAutoFit/>
+          </a:bodyPr>
+          <a:lstStyle/>
+          <a:p>
+            <a:pPr algn="ctr">
+              <a:spcAft>
+                <a:spcPts val="0"/>
+              </a:spcAft>
+            </a:pPr>
+            <a:r>
+              <a:rPr sz="1000" b="0">
+                <a:solidFill>
+                  <a:srgbClr val="6E6E6E"/>
+                </a:solidFill>
+                <a:latin typeface="Arial"/>
+              </a:rPr>
+              <a:t>Defocus at 8 nm on the same model: sensed matches applied at gain 0.986, 0.16 nm rms — low orders were never the trouble.</a:t>
+            </a:r>
+          </a:p>
+        </p:txBody>
+      </p:sp>
+      <p:sp>
+        <p:nvSpPr>
+          <p:cNvPr id="8" name="TextBox 7"/>
+          <p:cNvSpPr txBox="1"/>
+          <p:nvPr/>
+        </p:nvSpPr>
+        <p:spPr>
+          <a:xfrm>
+            <a:off x="411480" y="4791455"/>
             <a:ext cx="11368735" cy="274320"/>
           </a:xfrm>
           <a:prstGeom prst="rect">
@@ -8229,7 +8835,7 @@
                 </a:solidFill>
                 <a:latin typeface="Arial"/>
               </a:rPr>
-              <a:t>•  Campaign: templates/40_benches/zwfs_dm96 — the runner (zwfs_params.m, zwfs_run.m, zwfs_run_figs.m, zwfs_run_batch.m, zwfs_batch.sh, macos_param_2048.txt) and its runs (runs/rec193 = the S7 equivalence check; ng385, ng385s3, m2048 = the sampling configurations; rec193full = colour + noise); the stage scripts zwfs_s1 … zwfs_s7iter as the historical record; README with the findings chain (S1–S8); plan and rulings in macos/BRIEF_zwfs_campaign.md.</a:t>
+              <a:t>•  The sampling sweep then read the spot as a band selector (gain on one actuator 0.45 / 0.59 / −0.38 at spots 2.0 / 3.0 / 1.06) and calibration recovered a 0.90 gain on a test actuator; both were measured on the ringing response.  On the corrected model the response peak is 0.75 (linear) and 0.93 (exact) and the spot only moves the low-order dip.</a:t>
             </a:r>
           </a:p>
           <a:p>
@@ -8245,9 +8851,32 @@
                 </a:solidFill>
                 <a:latin typeface="Arial"/>
               </a:rPr>
-              <a:t>•  Findings earned in S1, recorded so they are not re-derived: the stock detector leg is ray-traced (geometric) at the mask plane — a λ/D-scale mask needs the reference-sphere diffraction bracket (a builder option, default off, existing decks bit-identical, suites green); the mask must sit at the optimized lens's real focus (−5.58 mm from the thin-lens seed); the camera-to-DM frame must come from traced rays — a support-area estimate was 25% off.</a:t>
-            </a:r>
-          </a:p>
+              <a:t>•  The colour claim ("five colours fill the blind band; single-actuator floor 720 → 224 pm") was the Talbot null moving as 1/λ.  On the corrected model there is no null and colour is not a lever (main slide 11).</a:t>
+            </a:r>
+          </a:p>
+        </p:txBody>
+      </p:sp>
+      <p:sp>
+        <p:nvSpPr>
+          <p:cNvPr id="9" name="TextBox 8"/>
+          <p:cNvSpPr txBox="1"/>
+          <p:nvPr/>
+        </p:nvSpPr>
+        <p:spPr>
+          <a:xfrm>
+            <a:off x="411480" y="6346698"/>
+            <a:ext cx="11368735" cy="274320"/>
+          </a:xfrm>
+          <a:prstGeom prst="rect">
+            <a:avLst/>
+          </a:prstGeom>
+          <a:noFill/>
+        </p:spPr>
+        <p:txBody>
+          <a:bodyPr wrap="square">
+            <a:spAutoFit/>
+          </a:bodyPr>
+          <a:lstStyle/>
           <a:p>
             <a:pPr>
               <a:spcAft>
@@ -8255,93 +8884,13 @@
               </a:spcAft>
             </a:pPr>
             <a:r>
-              <a:rPr sz="1500" b="0">
-                <a:solidFill>
-                  <a:srgbClr val="282828"/>
+              <a:rPr sz="1050" b="0">
+                <a:solidFill>
+                  <a:srgbClr val="6E6E6E"/>
                 </a:solidFill>
                 <a:latin typeface="Arial"/>
               </a:rPr>
-              <a:t>•  The S7 correction: the bracket's exit sphere now carries the entrance sphere's radius ('nf'); 'nf_legacy' reproduces the S1–S6 emission; the interferometer twin is geometric at the mask and unaffected.</a:t>
-            </a:r>
-          </a:p>
-          <a:p>
-            <a:pPr>
-              <a:spcAft>
-                <a:spcPts val="600"/>
-              </a:spcAft>
-            </a:pPr>
-            <a:r>
-              <a:rPr sz="1500" b="0">
-                <a:solidFill>
-                  <a:srgbClr val="282828"/>
-                </a:solidFill>
-                <a:latin typeface="Arial"/>
-              </a:rPr>
-              <a:t>•  Sign convention checked by a negative control: surface height = −φ·λ/4π on this deck (single reflection doubles height).</a:t>
-            </a:r>
-          </a:p>
-          <a:p>
-            <a:pPr>
-              <a:spcAft>
-                <a:spcPts val="600"/>
-              </a:spcAft>
-            </a:pPr>
-            <a:r>
-              <a:rPr sz="1500" b="0">
-                <a:solidFill>
-                  <a:srgbClr val="282828"/>
-                </a:solidFill>
-                <a:latin typeface="Arial"/>
-              </a:rPr>
-              <a:t>•  Scoring: actuator space through the DM influence model, one library for both instruments (dm_gauge_lib: registration, actuator fit, modal correction, both measurement factories).</a:t>
-            </a:r>
-          </a:p>
-          <a:p>
-            <a:pPr>
-              <a:spcAft>
-                <a:spcPts val="600"/>
-              </a:spcAft>
-            </a:pPr>
-            <a:r>
-              <a:rPr sz="1500" b="0">
-                <a:solidFill>
-                  <a:srgbClr val="282828"/>
-                </a:solidFill>
-                <a:latin typeface="Arial"/>
-              </a:rPr>
-              <a:t>•  Hardware source: "VSG2 Zernike Wavefront Sensor Update -v2" deck, parameters carried in templates/40_benches/vsg_wip/vsg2_params.m §9.</a:t>
-            </a:r>
-          </a:p>
-          <a:p>
-            <a:pPr>
-              <a:spcAft>
-                <a:spcPts val="600"/>
-              </a:spcAft>
-            </a:pPr>
-            <a:r>
-              <a:rPr sz="1500" b="0">
-                <a:solidFill>
-                  <a:srgbClr val="282828"/>
-                </a:solidFill>
-                <a:latin typeface="Arial"/>
-              </a:rPr>
-              <a:t>•  Interferometer comparison column: templates/40_benches/tg_psi_dm96, run 10, S4, S5 (tg96_report.txt, tg96_s4_report.txt, tg96_s5noise_report.txt).</a:t>
-            </a:r>
-          </a:p>
-          <a:p>
-            <a:pPr>
-              <a:spcAft>
-                <a:spcPts val="600"/>
-              </a:spcAft>
-            </a:pPr>
-            <a:r>
-              <a:rPr sz="1500" b="0">
-                <a:solidFill>
-                  <a:srgbClr val="282828"/>
-                </a:solidFill>
-                <a:latin typeface="Arial"/>
-              </a:rPr>
-              <a:t>•  Literature scan (2026-09-09): macos/REPORT_zwfs_lit_scan.md — twelve papers, ranked, with the PZT verdict for the interferometer.</a:t>
+              <a:t>Records: zwfs_s1 … zwfs_s6color reports and zwfs_sweep_report.txt; the old emission ('nf_legacy') reproduces them byte for byte.</a:t>
             </a:r>
           </a:p>
         </p:txBody>
@@ -8354,7 +8903,7 @@
 </p:sld>
 </file>
 
-<file path=ppt/slides/slide3.xml><?xml version="1.0" encoding="utf-8"?>
+<file path=ppt/slides/slide21.xml><?xml version="1.0" encoding="utf-8"?>
 <p:sld xmlns:a="http://schemas.openxmlformats.org/drawingml/2006/main" xmlns:p="http://schemas.openxmlformats.org/presentationml/2006/main" xmlns:r="http://schemas.openxmlformats.org/officeDocument/2006/relationships">
   <p:cSld>
     <p:spTree>
@@ -8398,7 +8947,7 @@
                 </a:solidFill>
                 <a:latin typeface="Arial"/>
               </a:rPr>
-              <a:t>The setup: the interferometer's test arm, alone</a:t>
+              <a:t>Provenance and records</a:t>
             </a:r>
           </a:p>
           <a:p>
@@ -8414,7 +8963,7 @@
                 </a:solidFill>
                 <a:latin typeface="Arial"/>
               </a:rPr>
-              <a:t>Same source, same splitter, same 700 mm DM leg, same lenses — the reference arm and every polarization element simply removed</a:t>
+              <a:t>Every number re-derives from a committed script</a:t>
             </a:r>
           </a:p>
         </p:txBody>
@@ -8472,7 +9021,7 @@
         <p:spPr>
           <a:xfrm>
             <a:off x="411480" y="1298448"/>
-            <a:ext cx="5806440" cy="274320"/>
+            <a:ext cx="11368735" cy="274320"/>
           </a:xfrm>
           <a:prstGeom prst="rect">
             <a:avLst/>
@@ -8491,13 +9040,13 @@
               </a:spcAft>
             </a:pPr>
             <a:r>
-              <a:rPr sz="1200" b="0">
+              <a:rPr sz="1500" b="0">
                 <a:solidFill>
                   <a:srgbClr val="282828"/>
                 </a:solidFill>
                 <a:latin typeface="Arial"/>
               </a:rPr>
-              <a:t>•  Reused whole: the TG96 bench solved for the 96×96, 1 mm-pitch DM — splitter at 7°, clearance-solved legs, the retuned detector optics.  The dimple sits at the internal focus of the existing detector leg, in the mask seat the bench already carried; the camera still views the DM image.</a:t>
+              <a:t>•  Campaign: templates/40_benches/zwfs_dm96 — the script and parameter sheet (zwfs_params.m, zwfs_run.m, zwfs_run_figs.m, zwfs_run_batch.m, zwfs_batch.sh, macos_param_2048.txt) and its runs (runs/rec193 = the stage-7 reproduction check; ng385, ng385s3, m2048 = the sampling setups; rec193full = colour + photons); the stage scripts zwfs_s1 … zwfs_s7iter as the historical record; README with the findings chain (S1–S8); plan and rulings in macos/BRIEF_zwfs_campaign.md.</a:t>
             </a:r>
           </a:p>
           <a:p>
@@ -8507,13 +9056,13 @@
               </a:spcAft>
             </a:pPr>
             <a:r>
-              <a:rPr sz="1200" b="0">
+              <a:rPr sz="1500" b="0">
                 <a:solidFill>
                   <a:srgbClr val="282828"/>
                 </a:solidFill>
                 <a:latin typeface="Arial"/>
               </a:rPr>
-              <a:t>•  Removed: the reference flat and its leg; the polarizer, four arm waveplates, output waveplate and analyzer.  Nothing else moves.</a:t>
+              <a:t>•  Findings from stage 1, recorded so they are not re-derived: the stock detector leg is ray-traced at the mask plane — a mask a few microns across needs the reference-sphere bracket (a builder option, default off, existing decks bit-identical, suites green); the mask must sit at the optimized lens's real focus (−5.58 mm from the thin-lens seed); the camera-to-DM frame must come from traced rays — an estimate from the support area was 25% off.</a:t>
             </a:r>
           </a:p>
           <a:p>
@@ -8523,101 +9072,15 @@
               </a:spcAft>
             </a:pPr>
             <a:r>
-              <a:rPr sz="1200" b="0">
+              <a:rPr sz="1500" b="0">
                 <a:solidFill>
                   <a:srgbClr val="282828"/>
                 </a:solidFill>
                 <a:latin typeface="Arial"/>
               </a:rPr>
-              <a:t>•  Why that discipline matters: when the two instruments are scored against each other, the only difference is the sensing principle — not the glass, not the geometry.</a:t>
-            </a:r>
-          </a:p>
-        </p:txBody>
-      </p:sp>
-      <p:pic>
-        <p:nvPicPr>
-          <p:cNvPr id="5" name="Picture 4" descr="zwfs_render_rig.png"/>
-          <p:cNvPicPr>
-            <a:picLocks noChangeAspect="1"/>
-          </p:cNvPicPr>
-          <p:nvPr/>
-        </p:nvPicPr>
-        <p:blipFill>
-          <a:blip r:embed="rId2"/>
-          <a:stretch>
-            <a:fillRect/>
-          </a:stretch>
-        </p:blipFill>
-        <p:spPr>
-          <a:xfrm>
-            <a:off x="6503663" y="1298448"/>
-            <a:ext cx="5189233" cy="1708912"/>
-          </a:xfrm>
-          <a:prstGeom prst="rect">
-            <a:avLst/>
-          </a:prstGeom>
-        </p:spPr>
-      </p:pic>
-      <p:sp>
-        <p:nvSpPr>
-          <p:cNvPr id="6" name="TextBox 5"/>
-          <p:cNvSpPr txBox="1"/>
-          <p:nvPr/>
-        </p:nvSpPr>
-        <p:spPr>
-          <a:xfrm>
-            <a:off x="6400800" y="3025648"/>
-            <a:ext cx="5394960" cy="394208"/>
-          </a:xfrm>
-          <a:prstGeom prst="rect">
-            <a:avLst/>
-          </a:prstGeom>
-          <a:noFill/>
-        </p:spPr>
-        <p:txBody>
-          <a:bodyPr wrap="square">
-            <a:spAutoFit/>
-          </a:bodyPr>
-          <a:lstStyle/>
-          <a:p>
-            <a:pPr algn="ctr">
-              <a:spcAft>
-                <a:spcPts val="0"/>
-              </a:spcAft>
-            </a:pPr>
-            <a:r>
-              <a:rPr sz="1000" b="0">
-                <a:solidFill>
-                  <a:srgbClr val="6E6E6E"/>
-                </a:solidFill>
-                <a:latin typeface="Arial"/>
-              </a:rPr>
-              <a:t>The train as traced: source and splitter at left, the 96 mm DM on its 700 mm leg, the detector tail converging to the dimple's focus, and the camera at the pupil image.</a:t>
-            </a:r>
-          </a:p>
-        </p:txBody>
-      </p:sp>
-      <p:sp>
-        <p:nvSpPr>
-          <p:cNvPr id="7" name="TextBox 6"/>
-          <p:cNvSpPr txBox="1"/>
-          <p:nvPr/>
-        </p:nvSpPr>
-        <p:spPr>
-          <a:xfrm>
-            <a:off x="6400800" y="3456432"/>
-            <a:ext cx="5394960" cy="274320"/>
-          </a:xfrm>
-          <a:prstGeom prst="rect">
-            <a:avLst/>
-          </a:prstGeom>
-          <a:noFill/>
-        </p:spPr>
-        <p:txBody>
-          <a:bodyPr wrap="square">
-            <a:spAutoFit/>
-          </a:bodyPr>
-          <a:lstStyle/>
+              <a:t>•  The stage-7 correction: the bracket's exit sphere now carries the entrance sphere's radius ('nf'); 'nf_legacy' reproduces the stage 1–6 emission; the interferometer twin traces the mask plane by rays and is unaffected.</a:t>
+            </a:r>
+          </a:p>
           <a:p>
             <a:pPr>
               <a:spcAft>
@@ -8625,13 +9088,77 @@
               </a:spcAft>
             </a:pPr>
             <a:r>
-              <a:rPr sz="1050" b="0">
-                <a:solidFill>
-                  <a:srgbClr val="6E6E6E"/>
+              <a:rPr sz="1500" b="0">
+                <a:solidFill>
+                  <a:srgbClr val="282828"/>
                 </a:solidFill>
                 <a:latin typeface="Arial"/>
               </a:rPr>
-              <a:t>Representing a µm-scale mask at focus needs a diffraction bracket around that plane: two reference spheres, one before and one after the mask.  The two must carry the same radius — the finding on slide 5.</a:t>
+              <a:t>•  Sign convention checked by a negative control: surface height = −φ·λ/4π on this deck (a single reflection doubles the height).</a:t>
+            </a:r>
+          </a:p>
+          <a:p>
+            <a:pPr>
+              <a:spcAft>
+                <a:spcPts val="600"/>
+              </a:spcAft>
+            </a:pPr>
+            <a:r>
+              <a:rPr sz="1500" b="0">
+                <a:solidFill>
+                  <a:srgbClr val="282828"/>
+                </a:solidFill>
+                <a:latin typeface="Arial"/>
+              </a:rPr>
+              <a:t>•  Scoring: actuator units through the DM influence model, one library for both instruments (dm_gauge_lib: registration, actuator fit, frequency correction, both measurement factories).</a:t>
+            </a:r>
+          </a:p>
+          <a:p>
+            <a:pPr>
+              <a:spcAft>
+                <a:spcPts val="600"/>
+              </a:spcAft>
+            </a:pPr>
+            <a:r>
+              <a:rPr sz="1500" b="0">
+                <a:solidFill>
+                  <a:srgbClr val="282828"/>
+                </a:solidFill>
+                <a:latin typeface="Arial"/>
+              </a:rPr>
+              <a:t>•  Hardware source: "VSG2 Zernike Wavefront Sensor Update -v2" deck, parameters carried in templates/40_benches/vsg_wip/vsg2_params.m §9.</a:t>
+            </a:r>
+          </a:p>
+          <a:p>
+            <a:pPr>
+              <a:spcAft>
+                <a:spcPts val="600"/>
+              </a:spcAft>
+            </a:pPr>
+            <a:r>
+              <a:rPr sz="1500" b="0">
+                <a:solidFill>
+                  <a:srgbClr val="282828"/>
+                </a:solidFill>
+                <a:latin typeface="Arial"/>
+              </a:rPr>
+              <a:t>•  Interferometer comparison column: templates/40_benches/tg_psi_dm96, run 10, S4, S5 (tg96_report.txt, tg96_s4_report.txt, tg96_s5noise_report.txt).</a:t>
+            </a:r>
+          </a:p>
+          <a:p>
+            <a:pPr>
+              <a:spcAft>
+                <a:spcPts val="600"/>
+              </a:spcAft>
+            </a:pPr>
+            <a:r>
+              <a:rPr sz="1500" b="0">
+                <a:solidFill>
+                  <a:srgbClr val="282828"/>
+                </a:solidFill>
+                <a:latin typeface="Arial"/>
+              </a:rPr>
+              <a:t>•  Literature scan (2026-09-09): macos/REPORT_zwfs_lit_scan.md — twelve papers, ranked, with the PZT verdict for the interferometer.</a:t>
             </a:r>
           </a:p>
         </p:txBody>
@@ -8644,7 +9171,7 @@
 </p:sld>
 </file>
 
-<file path=ppt/slides/slide4.xml><?xml version="1.0" encoding="utf-8"?>
+<file path=ppt/slides/slide3.xml><?xml version="1.0" encoding="utf-8"?>
 <p:sld xmlns:a="http://schemas.openxmlformats.org/drawingml/2006/main" xmlns:p="http://schemas.openxmlformats.org/presentationml/2006/main" xmlns:r="http://schemas.openxmlformats.org/officeDocument/2006/relationships">
   <p:cSld>
     <p:spTree>
@@ -8688,7 +9215,7 @@
                 </a:solidFill>
                 <a:latin typeface="Arial"/>
               </a:rPr>
-              <a:t>The mask is real hardware, modeled at its own numbers</a:t>
+              <a:t>The setup: the interferometer's test arm, alone</a:t>
             </a:r>
           </a:p>
           <a:p>
@@ -8704,7 +9231,7 @@
                 </a:solidFill>
                 <a:latin typeface="Arial"/>
               </a:rPr>
-              <a:t>346.2 nm of etch in fused silica = 1.571 rad at 632.8 nm; a 9-spot substrate, one spot in the beam at a time</a:t>
+              <a:t>Same source, same splitter, same 700 mm mirror leg, same lenses — the reference arm and every polarization element removed</a:t>
             </a:r>
           </a:p>
         </p:txBody>
@@ -8762,7 +9289,7 @@
         <p:spPr>
           <a:xfrm>
             <a:off x="411480" y="1298448"/>
-            <a:ext cx="11368735" cy="274320"/>
+            <a:ext cx="5806440" cy="274320"/>
           </a:xfrm>
           <a:prstGeom prst="rect">
             <a:avLst/>
@@ -8781,270 +9308,73 @@
               </a:spcAft>
             </a:pPr>
             <a:r>
-              <a:rPr sz="1500" b="0">
+              <a:rPr sz="1200" b="0">
                 <a:solidFill>
                   <a:srgbClr val="282828"/>
                 </a:solidFill>
                 <a:latin typeface="Arial"/>
               </a:rPr>
-              <a:t>•  The part: a transmissive fused-silica substrate carrying a 3×3 array of etched dimples of graded diameter — the VSG2 wavefront-sensor mask.  Etch depth 346.2 nm → phase 2π(n−1)d/λ = 1.571 rad ≈ a quarter wave at 632.8 nm.  Translating the substrate selects a spot; only one is ever in the beam.</a:t>
-            </a:r>
-          </a:p>
-        </p:txBody>
-      </p:sp>
-      <p:graphicFrame>
-        <p:nvGraphicFramePr>
-          <p:cNvPr id="5" name="Table 4"/>
-          <p:cNvGraphicFramePr>
-            <a:graphicFrameLocks noGrp="1"/>
-          </p:cNvGraphicFramePr>
+              <a:t>•  Reused whole: the TG96 bench laid out for the 96×96, 1 mm-pitch DM — splitter at 7°, legs solved for clearance, the tuned detector optics.  The dimple sits at the internal focus of the existing detector leg, in the mask seat the bench already had; the camera still views an image of the DM.</a:t>
+            </a:r>
+          </a:p>
+          <a:p>
+            <a:pPr>
+              <a:spcAft>
+                <a:spcPts val="600"/>
+              </a:spcAft>
+            </a:pPr>
+            <a:r>
+              <a:rPr sz="1200" b="0">
+                <a:solidFill>
+                  <a:srgbClr val="282828"/>
+                </a:solidFill>
+                <a:latin typeface="Arial"/>
+              </a:rPr>
+              <a:t>•  Removed: the reference flat and its leg; the polarizer, four arm waveplates, output waveplate and analyzer.  Nothing else moves.</a:t>
+            </a:r>
+          </a:p>
+          <a:p>
+            <a:pPr>
+              <a:spcAft>
+                <a:spcPts val="600"/>
+              </a:spcAft>
+            </a:pPr>
+            <a:r>
+              <a:rPr sz="1200" b="0">
+                <a:solidFill>
+                  <a:srgbClr val="282828"/>
+                </a:solidFill>
+                <a:latin typeface="Arial"/>
+              </a:rPr>
+              <a:t>•  Why this matters: when the two instruments are scored against each other, the only difference is how they sense — not the glass, not the geometry.</a:t>
+            </a:r>
+          </a:p>
+        </p:txBody>
+      </p:sp>
+      <p:pic>
+        <p:nvPicPr>
+          <p:cNvPr id="5" name="Picture 4" descr="zwfs_render_rig.png"/>
+          <p:cNvPicPr>
+            <a:picLocks noChangeAspect="1"/>
+          </p:cNvPicPr>
           <p:nvPr/>
-        </p:nvGraphicFramePr>
-        <p:xfrm>
-          <a:off x="411480" y="2218182"/>
-          <a:ext cx="11368731" cy="560070"/>
-        </p:xfrm>
-        <a:graphic>
-          <a:graphicData uri="http://schemas.openxmlformats.org/drawingml/2006/table">
-            <a:tbl>
-              <a:tblPr firstRow="1" bandRow="1">
-                <a:tableStyleId>{5C22544A-7EE6-4342-B048-85BDC9FD1C3A}</a:tableStyleId>
-              </a:tblPr>
-              <a:tblGrid>
-                <a:gridCol w="3989029"/>
-                <a:gridCol w="2792320"/>
-                <a:gridCol w="1396160"/>
-                <a:gridCol w="1994514"/>
-                <a:gridCol w="1196708"/>
-              </a:tblGrid>
-              <a:tr h="280035">
-                <a:tc>
-                  <a:txBody>
-                    <a:bodyPr wrap="square"/>
-                    <a:lstStyle/>
-                    <a:p>
-                      <a:r>
-                        <a:rPr sz="1100" b="1">
-                          <a:solidFill>
-                            <a:srgbClr val="FFFFFF"/>
-                          </a:solidFill>
-                          <a:latin typeface="Arial"/>
-                        </a:rPr>
-                        <a:t>spot diameter (λF/D)</a:t>
-                      </a:r>
-                    </a:p>
-                  </a:txBody>
-                  <a:tcPr marL="54864" marR="54864" marT="18288" marB="18288">
-                    <a:solidFill>
-                      <a:srgbClr val="1F4E79"/>
-                    </a:solidFill>
-                  </a:tcPr>
-                </a:tc>
-                <a:tc>
-                  <a:txBody>
-                    <a:bodyPr wrap="square"/>
-                    <a:lstStyle/>
-                    <a:p>
-                      <a:r>
-                        <a:rPr sz="1100" b="1">
-                          <a:solidFill>
-                            <a:srgbClr val="FFFFFF"/>
-                          </a:solidFill>
-                          <a:latin typeface="Arial"/>
-                        </a:rPr>
-                        <a:t>1.06 (default)</a:t>
-                      </a:r>
-                    </a:p>
-                  </a:txBody>
-                  <a:tcPr marL="54864" marR="54864" marT="18288" marB="18288">
-                    <a:solidFill>
-                      <a:srgbClr val="1F4E79"/>
-                    </a:solidFill>
-                  </a:tcPr>
-                </a:tc>
-                <a:tc>
-                  <a:txBody>
-                    <a:bodyPr wrap="square"/>
-                    <a:lstStyle/>
-                    <a:p>
-                      <a:r>
-                        <a:rPr sz="1100" b="1">
-                          <a:solidFill>
-                            <a:srgbClr val="FFFFFF"/>
-                          </a:solidFill>
-                          <a:latin typeface="Arial"/>
-                        </a:rPr>
-                        <a:t>1.22</a:t>
-                      </a:r>
-                    </a:p>
-                  </a:txBody>
-                  <a:tcPr marL="54864" marR="54864" marT="18288" marB="18288">
-                    <a:solidFill>
-                      <a:srgbClr val="1F4E79"/>
-                    </a:solidFill>
-                  </a:tcPr>
-                </a:tc>
-                <a:tc>
-                  <a:txBody>
-                    <a:bodyPr wrap="square"/>
-                    <a:lstStyle/>
-                    <a:p>
-                      <a:r>
-                        <a:rPr sz="1100" b="1">
-                          <a:solidFill>
-                            <a:srgbClr val="FFFFFF"/>
-                          </a:solidFill>
-                          <a:latin typeface="Arial"/>
-                        </a:rPr>
-                        <a:t>2.0 (used)</a:t>
-                      </a:r>
-                    </a:p>
-                  </a:txBody>
-                  <a:tcPr marL="54864" marR="54864" marT="18288" marB="18288">
-                    <a:solidFill>
-                      <a:srgbClr val="1F4E79"/>
-                    </a:solidFill>
-                  </a:tcPr>
-                </a:tc>
-                <a:tc>
-                  <a:txBody>
-                    <a:bodyPr wrap="square"/>
-                    <a:lstStyle/>
-                    <a:p>
-                      <a:r>
-                        <a:rPr sz="1100" b="1">
-                          <a:solidFill>
-                            <a:srgbClr val="FFFFFF"/>
-                          </a:solidFill>
-                          <a:latin typeface="Arial"/>
-                        </a:rPr>
-                        <a:t>3.0</a:t>
-                      </a:r>
-                    </a:p>
-                  </a:txBody>
-                  <a:tcPr marL="54864" marR="54864" marT="18288" marB="18288">
-                    <a:solidFill>
-                      <a:srgbClr val="1F4E79"/>
-                    </a:solidFill>
-                  </a:tcPr>
-                </a:tc>
-              </a:tr>
-              <a:tr h="280035">
-                <a:tc>
-                  <a:txBody>
-                    <a:bodyPr wrap="square"/>
-                    <a:lstStyle/>
-                    <a:p>
-                      <a:r>
-                        <a:rPr sz="1100" b="0">
-                          <a:solidFill>
-                            <a:srgbClr val="282828"/>
-                          </a:solidFill>
-                          <a:latin typeface="Arial"/>
-                        </a:rPr>
-                        <a:t>here, at F/4.2</a:t>
-                      </a:r>
-                    </a:p>
-                  </a:txBody>
-                  <a:tcPr marL="54864" marR="54864" marT="18288" marB="18288">
-                    <a:solidFill>
-                      <a:srgbClr val="FFFFFF"/>
-                    </a:solidFill>
-                  </a:tcPr>
-                </a:tc>
-                <a:tc>
-                  <a:txBody>
-                    <a:bodyPr wrap="square"/>
-                    <a:lstStyle/>
-                    <a:p>
-                      <a:r>
-                        <a:rPr sz="1100" b="0">
-                          <a:solidFill>
-                            <a:srgbClr val="282828"/>
-                          </a:solidFill>
-                          <a:latin typeface="Arial"/>
-                        </a:rPr>
-                        <a:t>2.79 µm</a:t>
-                      </a:r>
-                    </a:p>
-                  </a:txBody>
-                  <a:tcPr marL="54864" marR="54864" marT="18288" marB="18288">
-                    <a:solidFill>
-                      <a:srgbClr val="FFFFFF"/>
-                    </a:solidFill>
-                  </a:tcPr>
-                </a:tc>
-                <a:tc>
-                  <a:txBody>
-                    <a:bodyPr wrap="square"/>
-                    <a:lstStyle/>
-                    <a:p>
-                      <a:r>
-                        <a:rPr sz="1100" b="0">
-                          <a:solidFill>
-                            <a:srgbClr val="282828"/>
-                          </a:solidFill>
-                          <a:latin typeface="Arial"/>
-                        </a:rPr>
-                        <a:t>3.22 µm</a:t>
-                      </a:r>
-                    </a:p>
-                  </a:txBody>
-                  <a:tcPr marL="54864" marR="54864" marT="18288" marB="18288">
-                    <a:solidFill>
-                      <a:srgbClr val="FFFFFF"/>
-                    </a:solidFill>
-                  </a:tcPr>
-                </a:tc>
-                <a:tc>
-                  <a:txBody>
-                    <a:bodyPr wrap="square"/>
-                    <a:lstStyle/>
-                    <a:p>
-                      <a:r>
-                        <a:rPr sz="1100" b="0">
-                          <a:solidFill>
-                            <a:srgbClr val="282828"/>
-                          </a:solidFill>
-                          <a:latin typeface="Arial"/>
-                        </a:rPr>
-                        <a:t>5.3 µm</a:t>
-                      </a:r>
-                    </a:p>
-                  </a:txBody>
-                  <a:tcPr marL="54864" marR="54864" marT="18288" marB="18288">
-                    <a:solidFill>
-                      <a:srgbClr val="FFFFFF"/>
-                    </a:solidFill>
-                  </a:tcPr>
-                </a:tc>
-                <a:tc>
-                  <a:txBody>
-                    <a:bodyPr wrap="square"/>
-                    <a:lstStyle/>
-                    <a:p>
-                      <a:r>
-                        <a:rPr sz="1100" b="0">
-                          <a:solidFill>
-                            <a:srgbClr val="282828"/>
-                          </a:solidFill>
-                          <a:latin typeface="Arial"/>
-                        </a:rPr>
-                        <a:t>7.9 µm</a:t>
-                      </a:r>
-                    </a:p>
-                  </a:txBody>
-                  <a:tcPr marL="54864" marR="54864" marT="18288" marB="18288">
-                    <a:solidFill>
-                      <a:srgbClr val="FFFFFF"/>
-                    </a:solidFill>
-                  </a:tcPr>
-                </a:tc>
-              </a:tr>
-            </a:tbl>
-          </a:graphicData>
-        </a:graphic>
-      </p:graphicFrame>
+        </p:nvPicPr>
+        <p:blipFill>
+          <a:blip r:embed="rId2"/>
+          <a:stretch>
+            <a:fillRect/>
+          </a:stretch>
+        </p:blipFill>
+        <p:spPr>
+          <a:xfrm>
+            <a:off x="6503663" y="1298448"/>
+            <a:ext cx="5189233" cy="1708912"/>
+          </a:xfrm>
+          <a:prstGeom prst="rect">
+            <a:avLst/>
+          </a:prstGeom>
+        </p:spPr>
+      </p:pic>
       <p:sp>
         <p:nvSpPr>
           <p:cNvPr id="6" name="TextBox 5"/>
@@ -9053,8 +9383,8 @@
         </p:nvSpPr>
         <p:spPr>
           <a:xfrm>
-            <a:off x="411480" y="2924556"/>
-            <a:ext cx="11368735" cy="274320"/>
+            <a:off x="6400800" y="3025648"/>
+            <a:ext cx="5394960" cy="394208"/>
           </a:xfrm>
           <a:prstGeom prst="rect">
             <a:avLst/>
@@ -9067,35 +9397,19 @@
           </a:bodyPr>
           <a:lstStyle/>
           <a:p>
-            <a:pPr>
+            <a:pPr algn="ctr">
               <a:spcAft>
-                <a:spcPts val="600"/>
+                <a:spcPts val="0"/>
               </a:spcAft>
             </a:pPr>
             <a:r>
-              <a:rPr sz="1500" b="0">
-                <a:solidFill>
-                  <a:srgbClr val="282828"/>
+              <a:rPr sz="1000" b="0">
+                <a:solidFill>
+                  <a:srgbClr val="6E6E6E"/>
                 </a:solidFill>
                 <a:latin typeface="Arial"/>
               </a:rPr>
-              <a:t>•  In the model: the etched disk is a complex mask multiplied into the propagated field at the focal plane — edges area-weighted at 8× supersampling, the disk centered on the measured spot (the same alignment the real substrate gets by translation).  An exact identity checks it: the masked field equals the sum of the direct and dimple-diffracted parts to 15 digits, so the mask provably acts on the light.</a:t>
-            </a:r>
-          </a:p>
-          <a:p>
-            <a:pPr>
-              <a:spcAft>
-                <a:spcPts val="600"/>
-              </a:spcAft>
-            </a:pPr>
-            <a:r>
-              <a:rPr sz="1500" b="0">
-                <a:solidFill>
-                  <a:srgbClr val="282828"/>
-                </a:solidFill>
-                <a:latin typeface="Arial"/>
-              </a:rPr>
-              <a:t>•  Spot size selects the low band: measured on the corrected model, the 3.0 λF/D spot deepens the dimple's own dip below 2 cycles per aperture (gain 0.22 against 0.50 at 2.0 λF/D) and changes nothing above it; 2.0 λF/D is the spot of record.</a:t>
+              <a:t>The train as traced: source and splitter at left, the 96 mm DM on its 700 mm leg, the detector tail converging to the dimple's focus, and the camera at the pupil image.</a:t>
             </a:r>
           </a:p>
         </p:txBody>
@@ -9108,8 +9422,8 @@
         </p:nvSpPr>
         <p:spPr>
           <a:xfrm>
-            <a:off x="411480" y="4975098"/>
-            <a:ext cx="11368735" cy="274320"/>
+            <a:off x="6400800" y="3456432"/>
+            <a:ext cx="5394960" cy="274320"/>
           </a:xfrm>
           <a:prstGeom prst="rect">
             <a:avLst/>
@@ -9134,7 +9448,7 @@
                 </a:solidFill>
                 <a:latin typeface="Arial"/>
               </a:rPr>
-              <a:t>Hardware numbers from the VSG2 ZWFS upgrade deck, carried in vsg2_params.m; substrate class Thorlabs W4101FT1.</a:t>
+              <a:t>A mask a few microns across needs a diffraction calculation around the focus: two reference spheres, one before and one after the mask.  They must have the same radius — the finding on slide 7.</a:t>
             </a:r>
           </a:p>
         </p:txBody>
@@ -9147,7 +9461,7 @@
 </p:sld>
 </file>
 
-<file path=ppt/slides/slide5.xml><?xml version="1.0" encoding="utf-8"?>
+<file path=ppt/slides/slide4.xml><?xml version="1.0" encoding="utf-8"?>
 <p:sld xmlns:a="http://schemas.openxmlformats.org/drawingml/2006/main" xmlns:p="http://schemas.openxmlformats.org/presentationml/2006/main" xmlns:r="http://schemas.openxmlformats.org/officeDocument/2006/relationships">
   <p:cSld>
     <p:spTree>
@@ -9191,7 +9505,7 @@
                 </a:solidFill>
                 <a:latin typeface="Arial"/>
               </a:rPr>
-              <a:t>First light in the model</a:t>
+              <a:t>How the numbers are scored</a:t>
             </a:r>
           </a:p>
           <a:p>
@@ -9207,7 +9521,7 @@
                 </a:solidFill>
                 <a:latin typeface="Arial"/>
               </a:rPr>
-              <a:t>A known 8 nm ripple commanded on the DM comes back from one camera frame at gain 0.93 — and reads as nothing when the dimple is removed</a:t>
+              <a:t>Every result on the following slides is a change in the DM, measured before and after, in actuator units</a:t>
             </a:r>
           </a:p>
         </p:txBody>
@@ -9265,7 +9579,7 @@
         <p:spPr>
           <a:xfrm>
             <a:off x="411480" y="1298448"/>
-            <a:ext cx="5806440" cy="274320"/>
+            <a:ext cx="11368735" cy="274320"/>
           </a:xfrm>
           <a:prstGeom prst="rect">
             <a:avLst/>
@@ -9284,13 +9598,13 @@
               </a:spcAft>
             </a:pPr>
             <a:r>
-              <a:rPr sz="1200" b="0">
+              <a:rPr sz="1500" b="0">
                 <a:solidFill>
                   <a:srgbClr val="282828"/>
                 </a:solidFill>
                 <a:latin typeface="Arial"/>
               </a:rPr>
-              <a:t>•  The response chain, checked: dimple resolved at 6.3 px on the focal grid; masked frame = direct + diffracted parts at 3×10⁻¹⁶; core fraction 0.280.</a:t>
+              <a:t>•  The test: put the DM in some shape (the working surface), measure it; change a known set of actuators by a known amount (10 nm unless stated); measure again; subtract; fit the actuator pattern to the difference.  The score is how well the actuator changes come back.</a:t>
             </a:r>
           </a:p>
           <a:p>
@@ -9300,13 +9614,13 @@
               </a:spcAft>
             </a:pPr>
             <a:r>
-              <a:rPr sz="1200" b="0">
+              <a:rPr sz="1500" b="0">
                 <a:solidFill>
                   <a:srgbClr val="282828"/>
                 </a:solidFill>
                 <a:latin typeface="Arial"/>
               </a:rPr>
-              <a:t>•  The measurement: an 8 nm radial ripple on the DM, reconstructed from a single frame against the flat-state reference maps — gain 0.932, residual 0.45 nm, with the camera-to-DM mapping taken from traced rays (magnification 10.16, anamorphism 0.00%).</a:t>
+              <a:t>•  Gain: recovered change divided by the true change.  1.0 is perfect.  Gain is quoted after calibration: the sensor's response to one actuator and to patterns of each spatial frequency is measured on the flat DM and divided out.  A gain below 1 on a working surface is therefore an error the flat-DM calibration did not remove.</a:t>
             </a:r>
           </a:p>
           <a:p>
@@ -9316,13 +9630,13 @@
               </a:spcAft>
             </a:pPr>
             <a:r>
-              <a:rPr sz="1200" b="0">
+              <a:rPr sz="1500" b="0">
                 <a:solidFill>
                   <a:srgbClr val="282828"/>
                 </a:solidFill>
                 <a:latin typeface="Arial"/>
               </a:rPr>
-              <a:t>•  The control: the same DM state read without the dimple recovers gain −0.07 — plain pupil imaging is phase-blind; the signal is the dimple's.</a:t>
+              <a:t>•  Floor: the spread (rms) of the actuators that were not changed, in picometres.  It is what the measurement puts on actuators that should read zero.</a:t>
             </a:r>
           </a:p>
           <a:p>
@@ -9332,51 +9646,59 @@
               </a:spcAft>
             </a:pPr>
             <a:r>
-              <a:rPr sz="1200" b="0">
+              <a:rPr sz="1500" b="0">
                 <a:solidFill>
                   <a:srgbClr val="282828"/>
                 </a:solidFill>
                 <a:latin typeface="Arial"/>
               </a:rPr>
-              <a:t>•  Low orders are less trouble than presumed: defocus reads at 0.986 at full resolution.  The self-reference blindness lives at piston and tilt.</a:t>
-            </a:r>
-          </a:p>
-        </p:txBody>
-      </p:sp>
-      <p:pic>
-        <p:nvPicPr>
-          <p:cNvPr id="5" name="Picture 4" descr="zwfs_response.png"/>
-          <p:cNvPicPr>
-            <a:picLocks noChangeAspect="1"/>
-          </p:cNvPicPr>
+              <a:t>•  SNR: recovered change divided by the floor.  Above 5 counts as detected.</a:t>
+            </a:r>
+          </a:p>
+          <a:p>
+            <a:pPr>
+              <a:spcAft>
+                <a:spcPts val="600"/>
+              </a:spcAft>
+            </a:pPr>
+            <a:r>
+              <a:rPr sz="1500" b="0">
+                <a:solidFill>
+                  <a:srgbClr val="282828"/>
+                </a:solidFill>
+                <a:latin typeface="Arial"/>
+              </a:rPr>
+              <a:t>•  Working surface: a random DM shape, 30 nm rms unless stated, present during the test.  It is the same random pattern every time, scaled.</a:t>
+            </a:r>
+          </a:p>
+          <a:p>
+            <a:pPr>
+              <a:spcAft>
+                <a:spcPts val="600"/>
+              </a:spcAft>
+            </a:pPr>
+            <a:r>
+              <a:rPr sz="1500" b="0">
+                <a:solidFill>
+                  <a:srgbClr val="282828"/>
+                </a:solidFill>
+                <a:latin typeface="Arial"/>
+              </a:rPr>
+              <a:t>•  State and frame: a state is one DM shape measured once.  A measurement of a change costs two states.  A state costs one camera frame for the one-frame readings and four frames for the stepped reading; photon budgets are quoted per state.</a:t>
+            </a:r>
+          </a:p>
+        </p:txBody>
+      </p:sp>
+      <p:sp>
+        <p:nvSpPr>
+          <p:cNvPr id="5" name="TextBox 4"/>
+          <p:cNvSpPr txBox="1"/>
           <p:nvPr/>
-        </p:nvPicPr>
-        <p:blipFill>
-          <a:blip r:embed="rId2"/>
-          <a:stretch>
-            <a:fillRect/>
-          </a:stretch>
-        </p:blipFill>
+        </p:nvSpPr>
         <p:spPr>
           <a:xfrm>
-            <a:off x="6729237" y="1298448"/>
-            <a:ext cx="4738085" cy="1983232"/>
-          </a:xfrm>
-          <a:prstGeom prst="rect">
-            <a:avLst/>
-          </a:prstGeom>
-        </p:spPr>
-      </p:pic>
-      <p:sp>
-        <p:nvSpPr>
-          <p:cNvPr id="6" name="TextBox 5"/>
-          <p:cNvSpPr txBox="1"/>
-          <p:nvPr/>
-        </p:nvSpPr>
-        <p:spPr>
-          <a:xfrm>
-            <a:off x="6400800" y="3299968"/>
-            <a:ext cx="5394960" cy="394208"/>
+            <a:off x="411480" y="5643372"/>
+            <a:ext cx="11368735" cy="274320"/>
           </a:xfrm>
           <a:prstGeom prst="rect">
             <a:avLst/>
@@ -9389,45 +9711,6 @@
           </a:bodyPr>
           <a:lstStyle/>
           <a:p>
-            <a:pPr algn="ctr">
-              <a:spcAft>
-                <a:spcPts val="0"/>
-              </a:spcAft>
-            </a:pPr>
-            <a:r>
-              <a:rPr sz="1000" b="0">
-                <a:solidFill>
-                  <a:srgbClr val="6E6E6E"/>
-                </a:solidFill>
-                <a:latin typeface="Arial"/>
-              </a:rPr>
-              <a:t>Commanded figure (left) against the single-frame recovery (right): same rings, same scale.</a:t>
-            </a:r>
-          </a:p>
-        </p:txBody>
-      </p:sp>
-      <p:sp>
-        <p:nvSpPr>
-          <p:cNvPr id="7" name="TextBox 6"/>
-          <p:cNvSpPr txBox="1"/>
-          <p:nvPr/>
-        </p:nvSpPr>
-        <p:spPr>
-          <a:xfrm>
-            <a:off x="6400800" y="3730752"/>
-            <a:ext cx="5394960" cy="274320"/>
-          </a:xfrm>
-          <a:prstGeom prst="rect">
-            <a:avLst/>
-          </a:prstGeom>
-          <a:noFill/>
-        </p:spPr>
-        <p:txBody>
-          <a:bodyPr wrap="square">
-            <a:spAutoFit/>
-          </a:bodyPr>
-          <a:lstStyle/>
-          <a:p>
             <a:pPr>
               <a:spcAft>
                 <a:spcPts val="600"/>
@@ -9440,7 +9723,7 @@
                 </a:solidFill>
                 <a:latin typeface="Arial"/>
               </a:rPr>
-              <a:t>All numbers from zwfs_s1_report.txt (five checks, 20 s a run, development resolution) — taken on the sensor model later found defocused (next slide); the five checks are structural and stand.</a:t>
+              <a:t>96×96 DM at 1 mm pitch unless stated (48×48 at 2 mm alongside).  The interferometer is scored the same way with the same code (dm_gauge_lib).  Target: 1 pm.</a:t>
             </a:r>
           </a:p>
         </p:txBody>
@@ -9453,7 +9736,7 @@
 </p:sld>
 </file>
 
-<file path=ppt/slides/slide6.xml><?xml version="1.0" encoding="utf-8"?>
+<file path=ppt/slides/slide5.xml><?xml version="1.0" encoding="utf-8"?>
 <p:sld xmlns:a="http://schemas.openxmlformats.org/drawingml/2006/main" xmlns:p="http://schemas.openxmlformats.org/presentationml/2006/main" xmlns:r="http://schemas.openxmlformats.org/officeDocument/2006/relationships">
   <p:cSld>
     <p:spTree>
@@ -9497,7 +9780,7 @@
                 </a:solidFill>
                 <a:latin typeface="Arial"/>
               </a:rPr>
-              <a:t>The sensor model was defocused; corrected, the ringing goes away</a:t>
+              <a:t>The mask is real hardware, modelled with its own numbers</a:t>
             </a:r>
           </a:p>
           <a:p>
@@ -9513,7 +9796,7 @@
                 </a:solidFill>
                 <a:latin typeface="Arial"/>
               </a:rPr>
-              <a:t>The mask bracket's exit sphere carried the wrong radius — a 4.9 m Fresnel defocus of the pupil image under every S1–S6 number</a:t>
+              <a:t>346.2 nm of etch in fused silica = 1.571 rad at 632.8 nm; a substrate with nine spots, one in the beam at a time</a:t>
             </a:r>
           </a:p>
         </p:txBody>
@@ -9571,7 +9854,7 @@
         <p:spPr>
           <a:xfrm>
             <a:off x="411480" y="1298448"/>
-            <a:ext cx="5806440" cy="274320"/>
+            <a:ext cx="11368735" cy="274320"/>
           </a:xfrm>
           <a:prstGeom prst="rect">
             <a:avLst/>
@@ -9590,73 +9873,270 @@
               </a:spcAft>
             </a:pPr>
             <a:r>
-              <a:rPr sz="1200" b="0">
+              <a:rPr sz="1500" b="0">
                 <a:solidFill>
                   <a:srgbClr val="282828"/>
                 </a:solidFill>
                 <a:latin typeface="Arial"/>
               </a:rPr>
-              <a:t>•  The defect: the two reference spheres bracketing the mask must share one radius so the unmasked round trip is the identity.  The emitted exit sphere sat at 23.9 mm against the entrance sphere's 352.7 mm; the engine's sphere-to-plane step then applied a focal quadratic phase — a Fresnel defocus of the pupil image by 4.86 m.  Found building the exact reconstructor, which needs the pupil amplitude to be state-independent.</a:t>
-            </a:r>
-          </a:p>
-          <a:p>
-            <a:pPr>
-              <a:spcAft>
-                <a:spcPts val="600"/>
-              </a:spcAft>
-            </a:pPr>
-            <a:r>
-              <a:rPr sz="1200" b="0">
-                <a:solidFill>
-                  <a:srgbClr val="282828"/>
-                </a:solidFill>
-                <a:latin typeface="Arial"/>
-              </a:rPr>
-              <a:t>•  The symptoms it explains: round trip 0.159 on a flat DM (now 1.8×10⁻¹⁵); a 30 nm DM state modulated the pupil amplitude by 29% rms (now 4×10⁻¹⁶); the single-actuator kernel rang (peak 0.27, ring −0.16; now 0.75, ring-free); a transfer null near 30 cycles per aperture — a Talbot null, predicted at 34.</a:t>
-            </a:r>
-          </a:p>
-          <a:p>
-            <a:pPr>
-              <a:spcAft>
-                <a:spcPts val="600"/>
-              </a:spcAft>
-            </a:pPr>
-            <a:r>
-              <a:rPr sz="1200" b="0">
-                <a:solidFill>
-                  <a:srgbClr val="282828"/>
-                </a:solidFill>
-                <a:latin typeface="Arial"/>
-              </a:rPr>
-              <a:t>•  What the correction alone buys (linear reading, 96×96, same frames): single-actuator floor on the 30 nm working surface 744 → 67 pm (SNR 9 → 80); the grid case the sensor could not detect goes from SNR 1.5 to 14; dense random 42 → 9.6 nm.</a:t>
-            </a:r>
-          </a:p>
-        </p:txBody>
-      </p:sp>
-      <p:pic>
-        <p:nvPicPr>
-          <p:cNvPr id="5" name="Picture 4" descr="zwfs_s7iter.png"/>
-          <p:cNvPicPr>
-            <a:picLocks noChangeAspect="1"/>
-          </p:cNvPicPr>
+              <a:t>•  The part: a fused-silica plate with a 3×3 array of etched dimples of different diameters — the VSG2 wavefront-sensor mask.  Etch depth 346.2 nm gives a phase delay 2π(n−1)d/λ = 1.571 rad, a quarter wave at 632.8 nm.  Moving the plate selects a spot; only one is ever in the beam.</a:t>
+            </a:r>
+          </a:p>
+        </p:txBody>
+      </p:sp>
+      <p:graphicFrame>
+        <p:nvGraphicFramePr>
+          <p:cNvPr id="5" name="Table 4"/>
+          <p:cNvGraphicFramePr>
+            <a:graphicFrameLocks noGrp="1"/>
+          </p:cNvGraphicFramePr>
           <p:nvPr/>
-        </p:nvPicPr>
-        <p:blipFill>
-          <a:blip r:embed="rId2"/>
-          <a:stretch>
-            <a:fillRect/>
-          </a:stretch>
-        </p:blipFill>
-        <p:spPr>
-          <a:xfrm>
-            <a:off x="6609767" y="1298448"/>
-            <a:ext cx="4977024" cy="2183892"/>
-          </a:xfrm>
-          <a:prstGeom prst="rect">
-            <a:avLst/>
-          </a:prstGeom>
-        </p:spPr>
-      </p:pic>
+        </p:nvGraphicFramePr>
+        <p:xfrm>
+          <a:off x="411480" y="2218182"/>
+          <a:ext cx="11368731" cy="560070"/>
+        </p:xfrm>
+        <a:graphic>
+          <a:graphicData uri="http://schemas.openxmlformats.org/drawingml/2006/table">
+            <a:tbl>
+              <a:tblPr firstRow="1" bandRow="1">
+                <a:tableStyleId>{5C22544A-7EE6-4342-B048-85BDC9FD1C3A}</a:tableStyleId>
+              </a:tblPr>
+              <a:tblGrid>
+                <a:gridCol w="3989029"/>
+                <a:gridCol w="2792320"/>
+                <a:gridCol w="1396160"/>
+                <a:gridCol w="1994514"/>
+                <a:gridCol w="1196708"/>
+              </a:tblGrid>
+              <a:tr h="280035">
+                <a:tc>
+                  <a:txBody>
+                    <a:bodyPr wrap="square"/>
+                    <a:lstStyle/>
+                    <a:p>
+                      <a:r>
+                        <a:rPr sz="1100" b="1">
+                          <a:solidFill>
+                            <a:srgbClr val="FFFFFF"/>
+                          </a:solidFill>
+                          <a:latin typeface="Arial"/>
+                        </a:rPr>
+                        <a:t>spot diameter (λF/D)</a:t>
+                      </a:r>
+                    </a:p>
+                  </a:txBody>
+                  <a:tcPr marL="54864" marR="54864" marT="18288" marB="18288">
+                    <a:solidFill>
+                      <a:srgbClr val="1F4E79"/>
+                    </a:solidFill>
+                  </a:tcPr>
+                </a:tc>
+                <a:tc>
+                  <a:txBody>
+                    <a:bodyPr wrap="square"/>
+                    <a:lstStyle/>
+                    <a:p>
+                      <a:r>
+                        <a:rPr sz="1100" b="1">
+                          <a:solidFill>
+                            <a:srgbClr val="FFFFFF"/>
+                          </a:solidFill>
+                          <a:latin typeface="Arial"/>
+                        </a:rPr>
+                        <a:t>1.06 (default)</a:t>
+                      </a:r>
+                    </a:p>
+                  </a:txBody>
+                  <a:tcPr marL="54864" marR="54864" marT="18288" marB="18288">
+                    <a:solidFill>
+                      <a:srgbClr val="1F4E79"/>
+                    </a:solidFill>
+                  </a:tcPr>
+                </a:tc>
+                <a:tc>
+                  <a:txBody>
+                    <a:bodyPr wrap="square"/>
+                    <a:lstStyle/>
+                    <a:p>
+                      <a:r>
+                        <a:rPr sz="1100" b="1">
+                          <a:solidFill>
+                            <a:srgbClr val="FFFFFF"/>
+                          </a:solidFill>
+                          <a:latin typeface="Arial"/>
+                        </a:rPr>
+                        <a:t>1.22</a:t>
+                      </a:r>
+                    </a:p>
+                  </a:txBody>
+                  <a:tcPr marL="54864" marR="54864" marT="18288" marB="18288">
+                    <a:solidFill>
+                      <a:srgbClr val="1F4E79"/>
+                    </a:solidFill>
+                  </a:tcPr>
+                </a:tc>
+                <a:tc>
+                  <a:txBody>
+                    <a:bodyPr wrap="square"/>
+                    <a:lstStyle/>
+                    <a:p>
+                      <a:r>
+                        <a:rPr sz="1100" b="1">
+                          <a:solidFill>
+                            <a:srgbClr val="FFFFFF"/>
+                          </a:solidFill>
+                          <a:latin typeface="Arial"/>
+                        </a:rPr>
+                        <a:t>2.0 (used)</a:t>
+                      </a:r>
+                    </a:p>
+                  </a:txBody>
+                  <a:tcPr marL="54864" marR="54864" marT="18288" marB="18288">
+                    <a:solidFill>
+                      <a:srgbClr val="1F4E79"/>
+                    </a:solidFill>
+                  </a:tcPr>
+                </a:tc>
+                <a:tc>
+                  <a:txBody>
+                    <a:bodyPr wrap="square"/>
+                    <a:lstStyle/>
+                    <a:p>
+                      <a:r>
+                        <a:rPr sz="1100" b="1">
+                          <a:solidFill>
+                            <a:srgbClr val="FFFFFF"/>
+                          </a:solidFill>
+                          <a:latin typeface="Arial"/>
+                        </a:rPr>
+                        <a:t>3.0</a:t>
+                      </a:r>
+                    </a:p>
+                  </a:txBody>
+                  <a:tcPr marL="54864" marR="54864" marT="18288" marB="18288">
+                    <a:solidFill>
+                      <a:srgbClr val="1F4E79"/>
+                    </a:solidFill>
+                  </a:tcPr>
+                </a:tc>
+              </a:tr>
+              <a:tr h="280035">
+                <a:tc>
+                  <a:txBody>
+                    <a:bodyPr wrap="square"/>
+                    <a:lstStyle/>
+                    <a:p>
+                      <a:r>
+                        <a:rPr sz="1100" b="0">
+                          <a:solidFill>
+                            <a:srgbClr val="282828"/>
+                          </a:solidFill>
+                          <a:latin typeface="Arial"/>
+                        </a:rPr>
+                        <a:t>here, at F/4.2</a:t>
+                      </a:r>
+                    </a:p>
+                  </a:txBody>
+                  <a:tcPr marL="54864" marR="54864" marT="18288" marB="18288">
+                    <a:solidFill>
+                      <a:srgbClr val="FFFFFF"/>
+                    </a:solidFill>
+                  </a:tcPr>
+                </a:tc>
+                <a:tc>
+                  <a:txBody>
+                    <a:bodyPr wrap="square"/>
+                    <a:lstStyle/>
+                    <a:p>
+                      <a:r>
+                        <a:rPr sz="1100" b="0">
+                          <a:solidFill>
+                            <a:srgbClr val="282828"/>
+                          </a:solidFill>
+                          <a:latin typeface="Arial"/>
+                        </a:rPr>
+                        <a:t>2.79 µm</a:t>
+                      </a:r>
+                    </a:p>
+                  </a:txBody>
+                  <a:tcPr marL="54864" marR="54864" marT="18288" marB="18288">
+                    <a:solidFill>
+                      <a:srgbClr val="FFFFFF"/>
+                    </a:solidFill>
+                  </a:tcPr>
+                </a:tc>
+                <a:tc>
+                  <a:txBody>
+                    <a:bodyPr wrap="square"/>
+                    <a:lstStyle/>
+                    <a:p>
+                      <a:r>
+                        <a:rPr sz="1100" b="0">
+                          <a:solidFill>
+                            <a:srgbClr val="282828"/>
+                          </a:solidFill>
+                          <a:latin typeface="Arial"/>
+                        </a:rPr>
+                        <a:t>3.22 µm</a:t>
+                      </a:r>
+                    </a:p>
+                  </a:txBody>
+                  <a:tcPr marL="54864" marR="54864" marT="18288" marB="18288">
+                    <a:solidFill>
+                      <a:srgbClr val="FFFFFF"/>
+                    </a:solidFill>
+                  </a:tcPr>
+                </a:tc>
+                <a:tc>
+                  <a:txBody>
+                    <a:bodyPr wrap="square"/>
+                    <a:lstStyle/>
+                    <a:p>
+                      <a:r>
+                        <a:rPr sz="1100" b="0">
+                          <a:solidFill>
+                            <a:srgbClr val="282828"/>
+                          </a:solidFill>
+                          <a:latin typeface="Arial"/>
+                        </a:rPr>
+                        <a:t>5.3 µm</a:t>
+                      </a:r>
+                    </a:p>
+                  </a:txBody>
+                  <a:tcPr marL="54864" marR="54864" marT="18288" marB="18288">
+                    <a:solidFill>
+                      <a:srgbClr val="FFFFFF"/>
+                    </a:solidFill>
+                  </a:tcPr>
+                </a:tc>
+                <a:tc>
+                  <a:txBody>
+                    <a:bodyPr wrap="square"/>
+                    <a:lstStyle/>
+                    <a:p>
+                      <a:r>
+                        <a:rPr sz="1100" b="0">
+                          <a:solidFill>
+                            <a:srgbClr val="282828"/>
+                          </a:solidFill>
+                          <a:latin typeface="Arial"/>
+                        </a:rPr>
+                        <a:t>7.9 µm</a:t>
+                      </a:r>
+                    </a:p>
+                  </a:txBody>
+                  <a:tcPr marL="54864" marR="54864" marT="18288" marB="18288">
+                    <a:solidFill>
+                      <a:srgbClr val="FFFFFF"/>
+                    </a:solidFill>
+                  </a:tcPr>
+                </a:tc>
+              </a:tr>
+            </a:tbl>
+          </a:graphicData>
+        </a:graphic>
+      </p:graphicFrame>
       <p:sp>
         <p:nvSpPr>
           <p:cNvPr id="6" name="TextBox 5"/>
@@ -9665,8 +10145,8 @@
         </p:nvSpPr>
         <p:spPr>
           <a:xfrm>
-            <a:off x="6400800" y="3500628"/>
-            <a:ext cx="5394960" cy="559307"/>
+            <a:off x="411480" y="2924556"/>
+            <a:ext cx="11368735" cy="274320"/>
           </a:xfrm>
           <a:prstGeom prst="rect">
             <a:avLst/>
@@ -9679,19 +10159,35 @@
           </a:bodyPr>
           <a:lstStyle/>
           <a:p>
-            <a:pPr algn="ctr">
+            <a:pPr>
               <a:spcAft>
-                <a:spcPts val="0"/>
+                <a:spcPts val="600"/>
               </a:spcAft>
             </a:pPr>
             <a:r>
-              <a:rPr sz="1000" b="0">
-                <a:solidFill>
-                  <a:srgbClr val="6E6E6E"/>
+              <a:rPr sz="1500" b="0">
+                <a:solidFill>
+                  <a:srgbClr val="282828"/>
                 </a:solidFill>
                 <a:latin typeface="Arial"/>
               </a:rPr>
-              <a:t>Left: the corrected model's modal transfer for the three reading classes against the legacy linear record (dashed) with its null; right: the single-actuator differential gain as the working surface grows.</a:t>
+              <a:t>•  In the model: the etched disk is a complex mask multiplied into the calculated field at the focus — edges area-weighted at 8× supersampling, the disk centred on the measured spot (the same alignment the real plate gets by moving it).  An exact identity checks it: the masked field equals the direct part plus the dimple's part to 15 digits, so the mask provably acts on the light.</a:t>
+            </a:r>
+          </a:p>
+          <a:p>
+            <a:pPr>
+              <a:spcAft>
+                <a:spcPts val="600"/>
+              </a:spcAft>
+            </a:pPr>
+            <a:r>
+              <a:rPr sz="1500" b="0">
+                <a:solidFill>
+                  <a:srgbClr val="282828"/>
+                </a:solidFill>
+                <a:latin typeface="Arial"/>
+              </a:rPr>
+              <a:t>•  Spot size sets the weak band: on the corrected model, the 3.0 λF/D spot deepens the sensor's own dip below 2 cycles across the pupil (response 0.22 against 0.50 at 2.0 λF/D) and changes nothing above it.  2.0 λF/D is the spot used throughout.</a:t>
             </a:r>
           </a:p>
         </p:txBody>
@@ -9704,8 +10200,8 @@
         </p:nvSpPr>
         <p:spPr>
           <a:xfrm>
-            <a:off x="6400800" y="4096512"/>
-            <a:ext cx="5394960" cy="274320"/>
+            <a:off x="411480" y="4975098"/>
+            <a:ext cx="11368735" cy="274320"/>
           </a:xfrm>
           <a:prstGeom prst="rect">
             <a:avLst/>
@@ -9730,7 +10226,7 @@
                 </a:solidFill>
                 <a:latin typeface="Arial"/>
               </a:rPr>
-              <a:t>The legacy emission is kept as a builder option so the S1–S6 record reproduces byte for byte; the interferometer twin traces the same tail geometrically and was never affected.  Records: zwfs_s7iter_report.txt, README S7.</a:t>
+              <a:t>Hardware numbers from the VSG2 ZWFS upgrade deck, carried in vsg2_params.m; substrate class Thorlabs W4101FT1.</a:t>
             </a:r>
           </a:p>
         </p:txBody>
@@ -9743,7 +10239,7 @@
 </p:sld>
 </file>
 
-<file path=ppt/slides/slide7.xml><?xml version="1.0" encoding="utf-8"?>
+<file path=ppt/slides/slide6.xml><?xml version="1.0" encoding="utf-8"?>
 <p:sld xmlns:a="http://schemas.openxmlformats.org/drawingml/2006/main" xmlns:p="http://schemas.openxmlformats.org/presentationml/2006/main" xmlns:r="http://schemas.openxmlformats.org/officeDocument/2006/relationships">
   <p:cSld>
     <p:spTree>
@@ -9787,7 +10283,7 @@
                 </a:solidFill>
                 <a:latin typeface="Arial"/>
               </a:rPr>
-              <a:t>Five readings from the same camera frames</a:t>
+              <a:t>First light in the model</a:t>
             </a:r>
           </a:p>
           <a:p>
@@ -9803,7 +10299,7 @@
                 </a:solidFill>
                 <a:latin typeface="Arial"/>
               </a:rPr>
-              <a:t>The exact inversion with an iterated reference wave and a one-time branch prior reads a 10 nm change to 26 pm from one frame</a:t>
+              <a:t>A known 8 nm ripple put on the DM comes back from one camera frame at gain 0.93, and reads as nothing when the dimple is removed</a:t>
             </a:r>
           </a:p>
         </p:txBody>
@@ -9861,7 +10357,7 @@
         <p:spPr>
           <a:xfrm>
             <a:off x="411480" y="1298448"/>
-            <a:ext cx="11368735" cy="274320"/>
+            <a:ext cx="5806440" cy="274320"/>
           </a:xfrm>
           <a:prstGeom prst="rect">
             <a:avLst/>
@@ -9880,717 +10376,89 @@
               </a:spcAft>
             </a:pPr>
             <a:r>
-              <a:rPr sz="1500" b="0">
+              <a:rPr sz="1200" b="0">
                 <a:solidFill>
                   <a:srgbClr val="282828"/>
                 </a:solidFill>
                 <a:latin typeface="Arial"/>
               </a:rPr>
-              <a:t>•  The readings: linear (L, one frame, small-phase); exact with a frozen reference wave (F, one frame); exact with the reference wave re-propagated from the estimate through the mask model, five passes (I, one frame); I with the working surface's branch resolved once by a phase-stepped retrieval of the base, refined with the iterated reference (I+, one frame per measurement after four frames once); phase-stepped through three etch depths (S, four frames).  The reference-wave surrogate matches the engine's own field to 2×10⁻¹⁵.</a:t>
-            </a:r>
-          </a:p>
-        </p:txBody>
-      </p:sp>
-      <p:graphicFrame>
-        <p:nvGraphicFramePr>
-          <p:cNvPr id="5" name="Table 4"/>
-          <p:cNvGraphicFramePr>
-            <a:graphicFrameLocks noGrp="1"/>
-          </p:cNvGraphicFramePr>
+              <a:t>•  The chain, checked: dimple 6.3 pixels across on the focal grid; masked frame = direct part + dimple part to 3×10⁻¹⁶; 0.280 of the light in the core.</a:t>
+            </a:r>
+          </a:p>
+          <a:p>
+            <a:pPr>
+              <a:spcAft>
+                <a:spcPts val="600"/>
+              </a:spcAft>
+            </a:pPr>
+            <a:r>
+              <a:rPr sz="1200" b="0">
+                <a:solidFill>
+                  <a:srgbClr val="282828"/>
+                </a:solidFill>
+                <a:latin typeface="Arial"/>
+              </a:rPr>
+              <a:t>•  The measurement: an 8 nm ring pattern on the DM, rebuilt from a single frame against the flat-DM reference maps — gain 0.932, residual 0.45 nm; the camera-to-DM mapping comes from traced rays (magnification 10.16, no anamorphism).</a:t>
+            </a:r>
+          </a:p>
+          <a:p>
+            <a:pPr>
+              <a:spcAft>
+                <a:spcPts val="600"/>
+              </a:spcAft>
+            </a:pPr>
+            <a:r>
+              <a:rPr sz="1200" b="0">
+                <a:solidFill>
+                  <a:srgbClr val="282828"/>
+                </a:solidFill>
+                <a:latin typeface="Arial"/>
+              </a:rPr>
+              <a:t>•  The control: the same DM shape read without the dimple gives gain −0.07.  Plain pupil imaging is blind to phase; the signal is the dimple's.</a:t>
+            </a:r>
+          </a:p>
+          <a:p>
+            <a:pPr>
+              <a:spcAft>
+                <a:spcPts val="600"/>
+              </a:spcAft>
+            </a:pPr>
+            <a:r>
+              <a:rPr sz="1200" b="0">
+                <a:solidFill>
+                  <a:srgbClr val="282828"/>
+                </a:solidFill>
+                <a:latin typeface="Arial"/>
+              </a:rPr>
+              <a:t>•  Low orders are less trouble than expected: defocus reads at 0.986.  The blind spot is piston and tilt only.</a:t>
+            </a:r>
+          </a:p>
+        </p:txBody>
+      </p:sp>
+      <p:pic>
+        <p:nvPicPr>
+          <p:cNvPr id="5" name="Picture 4" descr="zwfs_response.png"/>
+          <p:cNvPicPr>
+            <a:picLocks noChangeAspect="1"/>
+          </p:cNvPicPr>
           <p:nvPr/>
-        </p:nvGraphicFramePr>
-        <p:xfrm>
-          <a:off x="411480" y="2713482"/>
-          <a:ext cx="11368735" cy="1400175"/>
-        </p:xfrm>
-        <a:graphic>
-          <a:graphicData uri="http://schemas.openxmlformats.org/drawingml/2006/table">
-            <a:tbl>
-              <a:tblPr firstRow="1" bandRow="1">
-                <a:tableStyleId>{5C22544A-7EE6-4342-B048-85BDC9FD1C3A}</a:tableStyleId>
-              </a:tblPr>
-              <a:tblGrid>
-                <a:gridCol w="6641795"/>
-                <a:gridCol w="945388"/>
-                <a:gridCol w="945388"/>
-                <a:gridCol w="945388"/>
-                <a:gridCol w="945388"/>
-                <a:gridCol w="945388"/>
-              </a:tblGrid>
-              <a:tr h="280035">
-                <a:tc>
-                  <a:txBody>
-                    <a:bodyPr wrap="square"/>
-                    <a:lstStyle/>
-                    <a:p>
-                      <a:r>
-                        <a:rPr sz="1100" b="1">
-                          <a:solidFill>
-                            <a:srgbClr val="FFFFFF"/>
-                          </a:solidFill>
-                          <a:latin typeface="Arial"/>
-                        </a:rPr>
-                        <a:t>10 nm change on the 30 nm working surface, 96×96</a:t>
-                      </a:r>
-                    </a:p>
-                  </a:txBody>
-                  <a:tcPr marL="54864" marR="54864" marT="18288" marB="18288">
-                    <a:solidFill>
-                      <a:srgbClr val="1F4E79"/>
-                    </a:solidFill>
-                  </a:tcPr>
-                </a:tc>
-                <a:tc>
-                  <a:txBody>
-                    <a:bodyPr wrap="square"/>
-                    <a:lstStyle/>
-                    <a:p>
-                      <a:r>
-                        <a:rPr sz="1100" b="1">
-                          <a:solidFill>
-                            <a:srgbClr val="FFFFFF"/>
-                          </a:solidFill>
-                          <a:latin typeface="Arial"/>
-                        </a:rPr>
-                        <a:t>L</a:t>
-                      </a:r>
-                    </a:p>
-                  </a:txBody>
-                  <a:tcPr marL="54864" marR="54864" marT="18288" marB="18288">
-                    <a:solidFill>
-                      <a:srgbClr val="1F4E79"/>
-                    </a:solidFill>
-                  </a:tcPr>
-                </a:tc>
-                <a:tc>
-                  <a:txBody>
-                    <a:bodyPr wrap="square"/>
-                    <a:lstStyle/>
-                    <a:p>
-                      <a:r>
-                        <a:rPr sz="1100" b="1">
-                          <a:solidFill>
-                            <a:srgbClr val="FFFFFF"/>
-                          </a:solidFill>
-                          <a:latin typeface="Arial"/>
-                        </a:rPr>
-                        <a:t>F</a:t>
-                      </a:r>
-                    </a:p>
-                  </a:txBody>
-                  <a:tcPr marL="54864" marR="54864" marT="18288" marB="18288">
-                    <a:solidFill>
-                      <a:srgbClr val="1F4E79"/>
-                    </a:solidFill>
-                  </a:tcPr>
-                </a:tc>
-                <a:tc>
-                  <a:txBody>
-                    <a:bodyPr wrap="square"/>
-                    <a:lstStyle/>
-                    <a:p>
-                      <a:r>
-                        <a:rPr sz="1100" b="1">
-                          <a:solidFill>
-                            <a:srgbClr val="FFFFFF"/>
-                          </a:solidFill>
-                          <a:latin typeface="Arial"/>
-                        </a:rPr>
-                        <a:t>I</a:t>
-                      </a:r>
-                    </a:p>
-                  </a:txBody>
-                  <a:tcPr marL="54864" marR="54864" marT="18288" marB="18288">
-                    <a:solidFill>
-                      <a:srgbClr val="1F4E79"/>
-                    </a:solidFill>
-                  </a:tcPr>
-                </a:tc>
-                <a:tc>
-                  <a:txBody>
-                    <a:bodyPr wrap="square"/>
-                    <a:lstStyle/>
-                    <a:p>
-                      <a:r>
-                        <a:rPr sz="1100" b="1">
-                          <a:solidFill>
-                            <a:srgbClr val="FFFFFF"/>
-                          </a:solidFill>
-                          <a:latin typeface="Arial"/>
-                        </a:rPr>
-                        <a:t>I+</a:t>
-                      </a:r>
-                    </a:p>
-                  </a:txBody>
-                  <a:tcPr marL="54864" marR="54864" marT="18288" marB="18288">
-                    <a:solidFill>
-                      <a:srgbClr val="1F4E79"/>
-                    </a:solidFill>
-                  </a:tcPr>
-                </a:tc>
-                <a:tc>
-                  <a:txBody>
-                    <a:bodyPr wrap="square"/>
-                    <a:lstStyle/>
-                    <a:p>
-                      <a:r>
-                        <a:rPr sz="1100" b="1">
-                          <a:solidFill>
-                            <a:srgbClr val="FFFFFF"/>
-                          </a:solidFill>
-                          <a:latin typeface="Arial"/>
-                        </a:rPr>
-                        <a:t>S</a:t>
-                      </a:r>
-                    </a:p>
-                  </a:txBody>
-                  <a:tcPr marL="54864" marR="54864" marT="18288" marB="18288">
-                    <a:solidFill>
-                      <a:srgbClr val="1F4E79"/>
-                    </a:solidFill>
-                  </a:tcPr>
-                </a:tc>
-              </a:tr>
-              <a:tr h="280035">
-                <a:tc>
-                  <a:txBody>
-                    <a:bodyPr wrap="square"/>
-                    <a:lstStyle/>
-                    <a:p>
-                      <a:r>
-                        <a:rPr sz="1100" b="0">
-                          <a:solidFill>
-                            <a:srgbClr val="282828"/>
-                          </a:solidFill>
-                          <a:latin typeface="Arial"/>
-                        </a:rPr>
-                        <a:t>gain (raw / corrected)</a:t>
-                      </a:r>
-                    </a:p>
-                  </a:txBody>
-                  <a:tcPr marL="54864" marR="54864" marT="18288" marB="18288">
-                    <a:solidFill>
-                      <a:srgbClr val="FFFFFF"/>
-                    </a:solidFill>
-                  </a:tcPr>
-                </a:tc>
-                <a:tc>
-                  <a:txBody>
-                    <a:bodyPr wrap="square"/>
-                    <a:lstStyle/>
-                    <a:p>
-                      <a:r>
-                        <a:rPr sz="1100" b="0">
-                          <a:solidFill>
-                            <a:srgbClr val="282828"/>
-                          </a:solidFill>
-                          <a:latin typeface="Arial"/>
-                        </a:rPr>
-                        <a:t>0.41 / 0.40</a:t>
-                      </a:r>
-                    </a:p>
-                  </a:txBody>
-                  <a:tcPr marL="54864" marR="54864" marT="18288" marB="18288">
-                    <a:solidFill>
-                      <a:srgbClr val="FFFFFF"/>
-                    </a:solidFill>
-                  </a:tcPr>
-                </a:tc>
-                <a:tc>
-                  <a:txBody>
-                    <a:bodyPr wrap="square"/>
-                    <a:lstStyle/>
-                    <a:p>
-                      <a:r>
-                        <a:rPr sz="1100" b="0">
-                          <a:solidFill>
-                            <a:srgbClr val="282828"/>
-                          </a:solidFill>
-                          <a:latin typeface="Arial"/>
-                        </a:rPr>
-                        <a:t>0.91 / 0.94</a:t>
-                      </a:r>
-                    </a:p>
-                  </a:txBody>
-                  <a:tcPr marL="54864" marR="54864" marT="18288" marB="18288">
-                    <a:solidFill>
-                      <a:srgbClr val="FFFFFF"/>
-                    </a:solidFill>
-                  </a:tcPr>
-                </a:tc>
-                <a:tc>
-                  <a:txBody>
-                    <a:bodyPr wrap="square"/>
-                    <a:lstStyle/>
-                    <a:p>
-                      <a:r>
-                        <a:rPr sz="1100" b="0">
-                          <a:solidFill>
-                            <a:srgbClr val="282828"/>
-                          </a:solidFill>
-                          <a:latin typeface="Arial"/>
-                        </a:rPr>
-                        <a:t>1.01 / 1.04</a:t>
-                      </a:r>
-                    </a:p>
-                  </a:txBody>
-                  <a:tcPr marL="54864" marR="54864" marT="18288" marB="18288">
-                    <a:solidFill>
-                      <a:srgbClr val="FFFFFF"/>
-                    </a:solidFill>
-                  </a:tcPr>
-                </a:tc>
-                <a:tc>
-                  <a:txBody>
-                    <a:bodyPr wrap="square"/>
-                    <a:lstStyle/>
-                    <a:p>
-                      <a:r>
-                        <a:rPr sz="1100" b="0">
-                          <a:solidFill>
-                            <a:srgbClr val="282828"/>
-                          </a:solidFill>
-                          <a:latin typeface="Arial"/>
-                        </a:rPr>
-                        <a:t>0.91 / 0.95</a:t>
-                      </a:r>
-                    </a:p>
-                  </a:txBody>
-                  <a:tcPr marL="54864" marR="54864" marT="18288" marB="18288">
-                    <a:solidFill>
-                      <a:srgbClr val="FFFFFF"/>
-                    </a:solidFill>
-                  </a:tcPr>
-                </a:tc>
-                <a:tc>
-                  <a:txBody>
-                    <a:bodyPr wrap="square"/>
-                    <a:lstStyle/>
-                    <a:p>
-                      <a:r>
-                        <a:rPr sz="1100" b="0">
-                          <a:solidFill>
-                            <a:srgbClr val="282828"/>
-                          </a:solidFill>
-                          <a:latin typeface="Arial"/>
-                        </a:rPr>
-                        <a:t>0.75 / 0.89</a:t>
-                      </a:r>
-                    </a:p>
-                  </a:txBody>
-                  <a:tcPr marL="54864" marR="54864" marT="18288" marB="18288">
-                    <a:solidFill>
-                      <a:srgbClr val="FFFFFF"/>
-                    </a:solidFill>
-                  </a:tcPr>
-                </a:tc>
-              </a:tr>
-              <a:tr h="280035">
-                <a:tc>
-                  <a:txBody>
-                    <a:bodyPr wrap="square"/>
-                    <a:lstStyle/>
-                    <a:p>
-                      <a:r>
-                        <a:rPr sz="1100" b="0">
-                          <a:solidFill>
-                            <a:srgbClr val="282828"/>
-                          </a:solidFill>
-                          <a:latin typeface="Arial"/>
-                        </a:rPr>
-                        <a:t>floor over the unpoked actuators, pm (raw / corrected)</a:t>
-                      </a:r>
-                    </a:p>
-                  </a:txBody>
-                  <a:tcPr marL="54864" marR="54864" marT="18288" marB="18288">
-                    <a:solidFill>
-                      <a:srgbClr val="ECF1F6"/>
-                    </a:solidFill>
-                  </a:tcPr>
-                </a:tc>
-                <a:tc>
-                  <a:txBody>
-                    <a:bodyPr wrap="square"/>
-                    <a:lstStyle/>
-                    <a:p>
-                      <a:r>
-                        <a:rPr sz="1100" b="0">
-                          <a:solidFill>
-                            <a:srgbClr val="282828"/>
-                          </a:solidFill>
-                          <a:latin typeface="Arial"/>
-                        </a:rPr>
-                        <a:t>60 / 57</a:t>
-                      </a:r>
-                    </a:p>
-                  </a:txBody>
-                  <a:tcPr marL="54864" marR="54864" marT="18288" marB="18288">
-                    <a:solidFill>
-                      <a:srgbClr val="ECF1F6"/>
-                    </a:solidFill>
-                  </a:tcPr>
-                </a:tc>
-                <a:tc>
-                  <a:txBody>
-                    <a:bodyPr wrap="square"/>
-                    <a:lstStyle/>
-                    <a:p>
-                      <a:r>
-                        <a:rPr sz="1100" b="0">
-                          <a:solidFill>
-                            <a:srgbClr val="282828"/>
-                          </a:solidFill>
-                          <a:latin typeface="Arial"/>
-                        </a:rPr>
-                        <a:t>46 / 52</a:t>
-                      </a:r>
-                    </a:p>
-                  </a:txBody>
-                  <a:tcPr marL="54864" marR="54864" marT="18288" marB="18288">
-                    <a:solidFill>
-                      <a:srgbClr val="ECF1F6"/>
-                    </a:solidFill>
-                  </a:tcPr>
-                </a:tc>
-                <a:tc>
-                  <a:txBody>
-                    <a:bodyPr wrap="square"/>
-                    <a:lstStyle/>
-                    <a:p>
-                      <a:r>
-                        <a:rPr sz="1100" b="0">
-                          <a:solidFill>
-                            <a:srgbClr val="282828"/>
-                          </a:solidFill>
-                          <a:latin typeface="Arial"/>
-                        </a:rPr>
-                        <a:t>34 / 46</a:t>
-                      </a:r>
-                    </a:p>
-                  </a:txBody>
-                  <a:tcPr marL="54864" marR="54864" marT="18288" marB="18288">
-                    <a:solidFill>
-                      <a:srgbClr val="ECF1F6"/>
-                    </a:solidFill>
-                  </a:tcPr>
-                </a:tc>
-                <a:tc>
-                  <a:txBody>
-                    <a:bodyPr wrap="square"/>
-                    <a:lstStyle/>
-                    <a:p>
-                      <a:r>
-                        <a:rPr sz="1100" b="0">
-                          <a:solidFill>
-                            <a:srgbClr val="282828"/>
-                          </a:solidFill>
-                          <a:latin typeface="Arial"/>
-                        </a:rPr>
-                        <a:t>26 / 40</a:t>
-                      </a:r>
-                    </a:p>
-                  </a:txBody>
-                  <a:tcPr marL="54864" marR="54864" marT="18288" marB="18288">
-                    <a:solidFill>
-                      <a:srgbClr val="ECF1F6"/>
-                    </a:solidFill>
-                  </a:tcPr>
-                </a:tc>
-                <a:tc>
-                  <a:txBody>
-                    <a:bodyPr wrap="square"/>
-                    <a:lstStyle/>
-                    <a:p>
-                      <a:r>
-                        <a:rPr sz="1100" b="0">
-                          <a:solidFill>
-                            <a:srgbClr val="282828"/>
-                          </a:solidFill>
-                          <a:latin typeface="Arial"/>
-                        </a:rPr>
-                        <a:t>23 / 42</a:t>
-                      </a:r>
-                    </a:p>
-                  </a:txBody>
-                  <a:tcPr marL="54864" marR="54864" marT="18288" marB="18288">
-                    <a:solidFill>
-                      <a:srgbClr val="ECF1F6"/>
-                    </a:solidFill>
-                  </a:tcPr>
-                </a:tc>
-              </a:tr>
-              <a:tr h="280035">
-                <a:tc>
-                  <a:txBody>
-                    <a:bodyPr wrap="square"/>
-                    <a:lstStyle/>
-                    <a:p>
-                      <a:r>
-                        <a:rPr sz="1100" b="0">
-                          <a:solidFill>
-                            <a:srgbClr val="282828"/>
-                          </a:solidFill>
-                          <a:latin typeface="Arial"/>
-                        </a:rPr>
-                        <a:t>detection SNR (raw)</a:t>
-                      </a:r>
-                    </a:p>
-                  </a:txBody>
-                  <a:tcPr marL="54864" marR="54864" marT="18288" marB="18288">
-                    <a:solidFill>
-                      <a:srgbClr val="FFFFFF"/>
-                    </a:solidFill>
-                  </a:tcPr>
-                </a:tc>
-                <a:tc>
-                  <a:txBody>
-                    <a:bodyPr wrap="square"/>
-                    <a:lstStyle/>
-                    <a:p>
-                      <a:r>
-                        <a:rPr sz="1100" b="0">
-                          <a:solidFill>
-                            <a:srgbClr val="282828"/>
-                          </a:solidFill>
-                          <a:latin typeface="Arial"/>
-                        </a:rPr>
-                        <a:t>68</a:t>
-                      </a:r>
-                    </a:p>
-                  </a:txBody>
-                  <a:tcPr marL="54864" marR="54864" marT="18288" marB="18288">
-                    <a:solidFill>
-                      <a:srgbClr val="FFFFFF"/>
-                    </a:solidFill>
-                  </a:tcPr>
-                </a:tc>
-                <a:tc>
-                  <a:txBody>
-                    <a:bodyPr wrap="square"/>
-                    <a:lstStyle/>
-                    <a:p>
-                      <a:r>
-                        <a:rPr sz="1100" b="0">
-                          <a:solidFill>
-                            <a:srgbClr val="282828"/>
-                          </a:solidFill>
-                          <a:latin typeface="Arial"/>
-                        </a:rPr>
-                        <a:t>196</a:t>
-                      </a:r>
-                    </a:p>
-                  </a:txBody>
-                  <a:tcPr marL="54864" marR="54864" marT="18288" marB="18288">
-                    <a:solidFill>
-                      <a:srgbClr val="FFFFFF"/>
-                    </a:solidFill>
-                  </a:tcPr>
-                </a:tc>
-                <a:tc>
-                  <a:txBody>
-                    <a:bodyPr wrap="square"/>
-                    <a:lstStyle/>
-                    <a:p>
-                      <a:r>
-                        <a:rPr sz="1100" b="0">
-                          <a:solidFill>
-                            <a:srgbClr val="282828"/>
-                          </a:solidFill>
-                          <a:latin typeface="Arial"/>
-                        </a:rPr>
-                        <a:t>298</a:t>
-                      </a:r>
-                    </a:p>
-                  </a:txBody>
-                  <a:tcPr marL="54864" marR="54864" marT="18288" marB="18288">
-                    <a:solidFill>
-                      <a:srgbClr val="FFFFFF"/>
-                    </a:solidFill>
-                  </a:tcPr>
-                </a:tc>
-                <a:tc>
-                  <a:txBody>
-                    <a:bodyPr wrap="square"/>
-                    <a:lstStyle/>
-                    <a:p>
-                      <a:r>
-                        <a:rPr sz="1100" b="0">
-                          <a:solidFill>
-                            <a:srgbClr val="282828"/>
-                          </a:solidFill>
-                          <a:latin typeface="Arial"/>
-                        </a:rPr>
-                        <a:t>355</a:t>
-                      </a:r>
-                    </a:p>
-                  </a:txBody>
-                  <a:tcPr marL="54864" marR="54864" marT="18288" marB="18288">
-                    <a:solidFill>
-                      <a:srgbClr val="FFFFFF"/>
-                    </a:solidFill>
-                  </a:tcPr>
-                </a:tc>
-                <a:tc>
-                  <a:txBody>
-                    <a:bodyPr wrap="square"/>
-                    <a:lstStyle/>
-                    <a:p>
-                      <a:r>
-                        <a:rPr sz="1100" b="0">
-                          <a:solidFill>
-                            <a:srgbClr val="282828"/>
-                          </a:solidFill>
-                          <a:latin typeface="Arial"/>
-                        </a:rPr>
-                        <a:t>323</a:t>
-                      </a:r>
-                    </a:p>
-                  </a:txBody>
-                  <a:tcPr marL="54864" marR="54864" marT="18288" marB="18288">
-                    <a:solidFill>
-                      <a:srgbClr val="FFFFFF"/>
-                    </a:solidFill>
-                  </a:tcPr>
-                </a:tc>
-              </a:tr>
-              <a:tr h="280035">
-                <a:tc>
-                  <a:txBody>
-                    <a:bodyPr wrap="square"/>
-                    <a:lstStyle/>
-                    <a:p>
-                      <a:r>
-                        <a:rPr sz="1100" b="0">
-                          <a:solidFill>
-                            <a:srgbClr val="282828"/>
-                          </a:solidFill>
-                          <a:latin typeface="Arial"/>
-                        </a:rPr>
-                        <a:t>47 actuators changed 1 nm on the same surface: SNR (raw)</a:t>
-                      </a:r>
-                    </a:p>
-                  </a:txBody>
-                  <a:tcPr marL="54864" marR="54864" marT="18288" marB="18288">
-                    <a:solidFill>
-                      <a:srgbClr val="ECF1F6"/>
-                    </a:solidFill>
-                  </a:tcPr>
-                </a:tc>
-                <a:tc>
-                  <a:txBody>
-                    <a:bodyPr wrap="square"/>
-                    <a:lstStyle/>
-                    <a:p>
-                      <a:r>
-                        <a:rPr sz="1100" b="0">
-                          <a:solidFill>
-                            <a:srgbClr val="282828"/>
-                          </a:solidFill>
-                          <a:latin typeface="Arial"/>
-                        </a:rPr>
-                        <a:t>13.6</a:t>
-                      </a:r>
-                    </a:p>
-                  </a:txBody>
-                  <a:tcPr marL="54864" marR="54864" marT="18288" marB="18288">
-                    <a:solidFill>
-                      <a:srgbClr val="ECF1F6"/>
-                    </a:solidFill>
-                  </a:tcPr>
-                </a:tc>
-                <a:tc>
-                  <a:txBody>
-                    <a:bodyPr wrap="square"/>
-                    <a:lstStyle/>
-                    <a:p>
-                      <a:r>
-                        <a:rPr sz="1100" b="0">
-                          <a:solidFill>
-                            <a:srgbClr val="282828"/>
-                          </a:solidFill>
-                          <a:latin typeface="Arial"/>
-                        </a:rPr>
-                        <a:t>12.4</a:t>
-                      </a:r>
-                    </a:p>
-                  </a:txBody>
-                  <a:tcPr marL="54864" marR="54864" marT="18288" marB="18288">
-                    <a:solidFill>
-                      <a:srgbClr val="ECF1F6"/>
-                    </a:solidFill>
-                  </a:tcPr>
-                </a:tc>
-                <a:tc>
-                  <a:txBody>
-                    <a:bodyPr wrap="square"/>
-                    <a:lstStyle/>
-                    <a:p>
-                      <a:r>
-                        <a:rPr sz="1100" b="0">
-                          <a:solidFill>
-                            <a:srgbClr val="282828"/>
-                          </a:solidFill>
-                          <a:latin typeface="Arial"/>
-                        </a:rPr>
-                        <a:t>12.6</a:t>
-                      </a:r>
-                    </a:p>
-                  </a:txBody>
-                  <a:tcPr marL="54864" marR="54864" marT="18288" marB="18288">
-                    <a:solidFill>
-                      <a:srgbClr val="ECF1F6"/>
-                    </a:solidFill>
-                  </a:tcPr>
-                </a:tc>
-                <a:tc>
-                  <a:txBody>
-                    <a:bodyPr wrap="square"/>
-                    <a:lstStyle/>
-                    <a:p>
-                      <a:r>
-                        <a:rPr sz="1100" b="0">
-                          <a:solidFill>
-                            <a:srgbClr val="282828"/>
-                          </a:solidFill>
-                          <a:latin typeface="Arial"/>
-                        </a:rPr>
-                        <a:t>37.3</a:t>
-                      </a:r>
-                    </a:p>
-                  </a:txBody>
-                  <a:tcPr marL="54864" marR="54864" marT="18288" marB="18288">
-                    <a:solidFill>
-                      <a:srgbClr val="ECF1F6"/>
-                    </a:solidFill>
-                  </a:tcPr>
-                </a:tc>
-                <a:tc>
-                  <a:txBody>
-                    <a:bodyPr wrap="square"/>
-                    <a:lstStyle/>
-                    <a:p>
-                      <a:r>
-                        <a:rPr sz="1100" b="0">
-                          <a:solidFill>
-                            <a:srgbClr val="282828"/>
-                          </a:solidFill>
-                          <a:latin typeface="Arial"/>
-                        </a:rPr>
-                        <a:t>38.3</a:t>
-                      </a:r>
-                    </a:p>
-                  </a:txBody>
-                  <a:tcPr marL="54864" marR="54864" marT="18288" marB="18288">
-                    <a:solidFill>
-                      <a:srgbClr val="ECF1F6"/>
-                    </a:solidFill>
-                  </a:tcPr>
-                </a:tc>
-              </a:tr>
-            </a:tbl>
-          </a:graphicData>
-        </a:graphic>
-      </p:graphicFrame>
+        </p:nvPicPr>
+        <p:blipFill>
+          <a:blip r:embed="rId2"/>
+          <a:stretch>
+            <a:fillRect/>
+          </a:stretch>
+        </p:blipFill>
+        <p:spPr>
+          <a:xfrm>
+            <a:off x="6729237" y="1298448"/>
+            <a:ext cx="4738085" cy="1983232"/>
+          </a:xfrm>
+          <a:prstGeom prst="rect">
+            <a:avLst/>
+          </a:prstGeom>
+        </p:spPr>
+      </p:pic>
       <p:sp>
         <p:nvSpPr>
           <p:cNvPr id="6" name="TextBox 5"/>
@@ -10599,8 +10467,8 @@
         </p:nvSpPr>
         <p:spPr>
           <a:xfrm>
-            <a:off x="411480" y="4259961"/>
-            <a:ext cx="11368735" cy="274320"/>
+            <a:off x="6400800" y="3299968"/>
+            <a:ext cx="5394960" cy="394208"/>
           </a:xfrm>
           <a:prstGeom prst="rect">
             <a:avLst/>
@@ -10613,19 +10481,19 @@
           </a:bodyPr>
           <a:lstStyle/>
           <a:p>
-            <a:pPr>
+            <a:pPr algn="ctr">
               <a:spcAft>
-                <a:spcPts val="600"/>
+                <a:spcPts val="0"/>
               </a:spcAft>
             </a:pPr>
             <a:r>
-              <a:rPr sz="1500" b="0">
-                <a:solidFill>
-                  <a:srgbClr val="282828"/>
+              <a:rPr sz="1000" b="0">
+                <a:solidFill>
+                  <a:srgbClr val="6E6E6E"/>
                 </a:solidFill>
                 <a:latin typeface="Arial"/>
               </a:rPr>
-              <a:t>•  The branch is the one physical limit: with the true branch and the engine's own reference wave the solve is exact to 3×10⁻¹⁴; on the 30 nm surface 7.8% of pixels sit beyond the quarter-wave sensor's fold, and the refined prior finds them on 99.99% of pixels where the plain stepped prior misses 3% — enough to flip the sign of a single actuator.</a:t>
+              <a:t>Commanded shape (left) against the single-frame recovery (right): same rings, same scale.</a:t>
             </a:r>
           </a:p>
         </p:txBody>
@@ -10638,8 +10506,8 @@
         </p:nvSpPr>
         <p:spPr>
           <a:xfrm>
-            <a:off x="411480" y="5179695"/>
-            <a:ext cx="11368735" cy="274320"/>
+            <a:off x="6400800" y="3730752"/>
+            <a:ext cx="5394960" cy="274320"/>
           </a:xfrm>
           <a:prstGeom prst="rect">
             <a:avLst/>
@@ -10664,7 +10532,7 @@
                 </a:solidFill>
                 <a:latin typeface="Arial"/>
               </a:rPr>
-              <a:t>Compliant configuration (385 rays across, 2048 grid; slide 7); actuator-space scoring through the DM's influence model; "corrected" = after the measured modal transfer; interferometer on the same row: 0.92 / 46 pm.  Records: runs/m2048/m2048_report.txt.</a:t>
+              <a:t>Numbers from zwfs_s1_report.txt (five checks, 20 s a run, development resolution), taken on the model later found out of focus (next slide).  The five checks test structure, not accuracy, and still stand.</a:t>
             </a:r>
           </a:p>
         </p:txBody>
@@ -10677,7 +10545,7 @@
 </p:sld>
 </file>
 
-<file path=ppt/slides/slide8.xml><?xml version="1.0" encoding="utf-8"?>
+<file path=ppt/slides/slide7.xml><?xml version="1.0" encoding="utf-8"?>
 <p:sld xmlns:a="http://schemas.openxmlformats.org/drawingml/2006/main" xmlns:p="http://schemas.openxmlformats.org/presentationml/2006/main" xmlns:r="http://schemas.openxmlformats.org/officeDocument/2006/relationships">
   <p:cSld>
     <p:spTree>
@@ -10721,7 +10589,7 @@
                 </a:solidFill>
                 <a:latin typeface="Arial"/>
               </a:rPr>
-              <a:t>Sampling: the two interfaces pull opposite ways</a:t>
+              <a:t>The sensor model was out of focus; corrected, the ringing goes away</a:t>
             </a:r>
           </a:p>
           <a:p>
@@ -10737,7 +10605,7 @@
                 </a:solidFill>
                 <a:latin typeface="Arial"/>
               </a:rPr>
-              <a:t>Dimple pixels at the mask go as grid/rays, camera pixels per actuator as rays — only a larger grid buys both, and a 2048 grid fits the box</a:t>
+              <a:t>The exit sphere of the mask bracket had the wrong radius — a 4.9 m defocus of the pupil image, under every result of the first six stages</a:t>
             </a:r>
           </a:p>
         </p:txBody>
@@ -10786,492 +10654,15 @@
           </a:p>
         </p:txBody>
       </p:sp>
-      <p:graphicFrame>
-        <p:nvGraphicFramePr>
-          <p:cNvPr id="4" name="Table 3"/>
-          <p:cNvGraphicFramePr>
-            <a:graphicFrameLocks noGrp="1"/>
-          </p:cNvGraphicFramePr>
-          <p:nvPr/>
-        </p:nvGraphicFramePr>
-        <p:xfrm>
-          <a:off x="411480" y="1298448"/>
-          <a:ext cx="5806438" cy="1497330"/>
-        </p:xfrm>
-        <a:graphic>
-          <a:graphicData uri="http://schemas.openxmlformats.org/drawingml/2006/table">
-            <a:tbl>
-              <a:tblPr firstRow="1" bandRow="1">
-                <a:tableStyleId>{5C22544A-7EE6-4342-B048-85BDC9FD1C3A}</a:tableStyleId>
-              </a:tblPr>
-              <a:tblGrid>
-                <a:gridCol w="1539056"/>
-                <a:gridCol w="699571"/>
-                <a:gridCol w="1049356"/>
-                <a:gridCol w="909442"/>
-                <a:gridCol w="1609013"/>
-              </a:tblGrid>
-              <a:tr h="468630">
-                <a:tc>
-                  <a:txBody>
-                    <a:bodyPr wrap="square"/>
-                    <a:lstStyle/>
-                    <a:p>
-                      <a:r>
-                        <a:rPr sz="1100" b="1">
-                          <a:solidFill>
-                            <a:srgbClr val="FFFFFF"/>
-                          </a:solidFill>
-                          <a:latin typeface="Arial"/>
-                        </a:rPr>
-                        <a:t>rays across / grid</a:t>
-                      </a:r>
-                    </a:p>
-                  </a:txBody>
-                  <a:tcPr marL="54864" marR="54864" marT="18288" marB="18288">
-                    <a:solidFill>
-                      <a:srgbClr val="1F4E79"/>
-                    </a:solidFill>
-                  </a:tcPr>
-                </a:tc>
-                <a:tc>
-                  <a:txBody>
-                    <a:bodyPr wrap="square"/>
-                    <a:lstStyle/>
-                    <a:p>
-                      <a:r>
-                        <a:rPr sz="1100" b="1">
-                          <a:solidFill>
-                            <a:srgbClr val="FFFFFF"/>
-                          </a:solidFill>
-                          <a:latin typeface="Arial"/>
-                        </a:rPr>
-                        <a:t>dimple, px</a:t>
-                      </a:r>
-                    </a:p>
-                  </a:txBody>
-                  <a:tcPr marL="54864" marR="54864" marT="18288" marB="18288">
-                    <a:solidFill>
-                      <a:srgbClr val="1F4E79"/>
-                    </a:solidFill>
-                  </a:tcPr>
-                </a:tc>
-                <a:tc>
-                  <a:txBody>
-                    <a:bodyPr wrap="square"/>
-                    <a:lstStyle/>
-                    <a:p>
-                      <a:r>
-                        <a:rPr sz="1100" b="1">
-                          <a:solidFill>
-                            <a:srgbClr val="FFFFFF"/>
-                          </a:solidFill>
-                          <a:latin typeface="Arial"/>
-                        </a:rPr>
-                        <a:t>px per actuator</a:t>
-                      </a:r>
-                    </a:p>
-                  </a:txBody>
-                  <a:tcPr marL="54864" marR="54864" marT="18288" marB="18288">
-                    <a:solidFill>
-                      <a:srgbClr val="1F4E79"/>
-                    </a:solidFill>
-                  </a:tcPr>
-                </a:tc>
-                <a:tc>
-                  <a:txBody>
-                    <a:bodyPr wrap="square"/>
-                    <a:lstStyle/>
-                    <a:p>
-                      <a:r>
-                        <a:rPr sz="1100" b="1">
-                          <a:solidFill>
-                            <a:srgbClr val="FFFFFF"/>
-                          </a:solidFill>
-                          <a:latin typeface="Arial"/>
-                        </a:rPr>
-                        <a:t>hold-out gain</a:t>
-                      </a:r>
-                    </a:p>
-                  </a:txBody>
-                  <a:tcPr marL="54864" marR="54864" marT="18288" marB="18288">
-                    <a:solidFill>
-                      <a:srgbClr val="1F4E79"/>
-                    </a:solidFill>
-                  </a:tcPr>
-                </a:tc>
-                <a:tc>
-                  <a:txBody>
-                    <a:bodyPr wrap="square"/>
-                    <a:lstStyle/>
-                    <a:p>
-                      <a:r>
-                        <a:rPr sz="1100" b="1">
-                          <a:solidFill>
-                            <a:srgbClr val="FFFFFF"/>
-                          </a:solidFill>
-                          <a:latin typeface="Arial"/>
-                        </a:rPr>
-                        <a:t>I+ on the 30 nm surface</a:t>
-                      </a:r>
-                    </a:p>
-                  </a:txBody>
-                  <a:tcPr marL="54864" marR="54864" marT="18288" marB="18288">
-                    <a:solidFill>
-                      <a:srgbClr val="1F4E79"/>
-                    </a:solidFill>
-                  </a:tcPr>
-                </a:tc>
-              </a:tr>
-              <a:tr h="280035">
-                <a:tc>
-                  <a:txBody>
-                    <a:bodyPr wrap="square"/>
-                    <a:lstStyle/>
-                    <a:p>
-                      <a:r>
-                        <a:rPr sz="1100" b="0">
-                          <a:solidFill>
-                            <a:srgbClr val="282828"/>
-                          </a:solidFill>
-                          <a:latin typeface="Arial"/>
-                        </a:rPr>
-                        <a:t>193 / 1024 (record)</a:t>
-                      </a:r>
-                    </a:p>
-                  </a:txBody>
-                  <a:tcPr marL="54864" marR="54864" marT="18288" marB="18288">
-                    <a:solidFill>
-                      <a:srgbClr val="FFFFFF"/>
-                    </a:solidFill>
-                  </a:tcPr>
-                </a:tc>
-                <a:tc>
-                  <a:txBody>
-                    <a:bodyPr wrap="square"/>
-                    <a:lstStyle/>
-                    <a:p>
-                      <a:r>
-                        <a:rPr sz="1100" b="0">
-                          <a:solidFill>
-                            <a:srgbClr val="282828"/>
-                          </a:solidFill>
-                          <a:latin typeface="Arial"/>
-                        </a:rPr>
-                        <a:t>7.92</a:t>
-                      </a:r>
-                    </a:p>
-                  </a:txBody>
-                  <a:tcPr marL="54864" marR="54864" marT="18288" marB="18288">
-                    <a:solidFill>
-                      <a:srgbClr val="FFFFFF"/>
-                    </a:solidFill>
-                  </a:tcPr>
-                </a:tc>
-                <a:tc>
-                  <a:txBody>
-                    <a:bodyPr wrap="square"/>
-                    <a:lstStyle/>
-                    <a:p>
-                      <a:r>
-                        <a:rPr sz="1100" b="0">
-                          <a:solidFill>
-                            <a:srgbClr val="282828"/>
-                          </a:solidFill>
-                          <a:latin typeface="Arial"/>
-                        </a:rPr>
-                        <a:t>2.5</a:t>
-                      </a:r>
-                    </a:p>
-                  </a:txBody>
-                  <a:tcPr marL="54864" marR="54864" marT="18288" marB="18288">
-                    <a:solidFill>
-                      <a:srgbClr val="FFFFFF"/>
-                    </a:solidFill>
-                  </a:tcPr>
-                </a:tc>
-                <a:tc>
-                  <a:txBody>
-                    <a:bodyPr wrap="square"/>
-                    <a:lstStyle/>
-                    <a:p>
-                      <a:r>
-                        <a:rPr sz="1100" b="0">
-                          <a:solidFill>
-                            <a:srgbClr val="282828"/>
-                          </a:solidFill>
-                          <a:latin typeface="Arial"/>
-                        </a:rPr>
-                        <a:t>0.900</a:t>
-                      </a:r>
-                    </a:p>
-                  </a:txBody>
-                  <a:tcPr marL="54864" marR="54864" marT="18288" marB="18288">
-                    <a:solidFill>
-                      <a:srgbClr val="FFFFFF"/>
-                    </a:solidFill>
-                  </a:tcPr>
-                </a:tc>
-                <a:tc>
-                  <a:txBody>
-                    <a:bodyPr wrap="square"/>
-                    <a:lstStyle/>
-                    <a:p>
-                      <a:r>
-                        <a:rPr sz="1100" b="0">
-                          <a:solidFill>
-                            <a:srgbClr val="282828"/>
-                          </a:solidFill>
-                          <a:latin typeface="Arial"/>
-                        </a:rPr>
-                        <a:t>0.79, 13 pm, SNR 584</a:t>
-                      </a:r>
-                    </a:p>
-                  </a:txBody>
-                  <a:tcPr marL="54864" marR="54864" marT="18288" marB="18288">
-                    <a:solidFill>
-                      <a:srgbClr val="FFFFFF"/>
-                    </a:solidFill>
-                  </a:tcPr>
-                </a:tc>
-              </a:tr>
-              <a:tr h="280035">
-                <a:tc>
-                  <a:txBody>
-                    <a:bodyPr wrap="square"/>
-                    <a:lstStyle/>
-                    <a:p>
-                      <a:r>
-                        <a:rPr sz="1100" b="0">
-                          <a:solidFill>
-                            <a:srgbClr val="282828"/>
-                          </a:solidFill>
-                          <a:latin typeface="Arial"/>
-                        </a:rPr>
-                        <a:t>385 / 1024</a:t>
-                      </a:r>
-                    </a:p>
-                  </a:txBody>
-                  <a:tcPr marL="54864" marR="54864" marT="18288" marB="18288">
-                    <a:solidFill>
-                      <a:srgbClr val="ECF1F6"/>
-                    </a:solidFill>
-                  </a:tcPr>
-                </a:tc>
-                <a:tc>
-                  <a:txBody>
-                    <a:bodyPr wrap="square"/>
-                    <a:lstStyle/>
-                    <a:p>
-                      <a:r>
-                        <a:rPr sz="1100" b="0">
-                          <a:solidFill>
-                            <a:srgbClr val="282828"/>
-                          </a:solidFill>
-                          <a:latin typeface="Arial"/>
-                        </a:rPr>
-                        <a:t>3.96</a:t>
-                      </a:r>
-                    </a:p>
-                  </a:txBody>
-                  <a:tcPr marL="54864" marR="54864" marT="18288" marB="18288">
-                    <a:solidFill>
-                      <a:srgbClr val="ECF1F6"/>
-                    </a:solidFill>
-                  </a:tcPr>
-                </a:tc>
-                <a:tc>
-                  <a:txBody>
-                    <a:bodyPr wrap="square"/>
-                    <a:lstStyle/>
-                    <a:p>
-                      <a:r>
-                        <a:rPr sz="1100" b="0">
-                          <a:solidFill>
-                            <a:srgbClr val="282828"/>
-                          </a:solidFill>
-                          <a:latin typeface="Arial"/>
-                        </a:rPr>
-                        <a:t>5.0</a:t>
-                      </a:r>
-                    </a:p>
-                  </a:txBody>
-                  <a:tcPr marL="54864" marR="54864" marT="18288" marB="18288">
-                    <a:solidFill>
-                      <a:srgbClr val="ECF1F6"/>
-                    </a:solidFill>
-                  </a:tcPr>
-                </a:tc>
-                <a:tc>
-                  <a:txBody>
-                    <a:bodyPr wrap="square"/>
-                    <a:lstStyle/>
-                    <a:p>
-                      <a:r>
-                        <a:rPr sz="1100" b="0">
-                          <a:solidFill>
-                            <a:srgbClr val="282828"/>
-                          </a:solidFill>
-                          <a:latin typeface="Arial"/>
-                        </a:rPr>
-                        <a:t>0.935</a:t>
-                      </a:r>
-                    </a:p>
-                  </a:txBody>
-                  <a:tcPr marL="54864" marR="54864" marT="18288" marB="18288">
-                    <a:solidFill>
-                      <a:srgbClr val="ECF1F6"/>
-                    </a:solidFill>
-                  </a:tcPr>
-                </a:tc>
-                <a:tc>
-                  <a:txBody>
-                    <a:bodyPr wrap="square"/>
-                    <a:lstStyle/>
-                    <a:p>
-                      <a:r>
-                        <a:rPr sz="1100" b="0">
-                          <a:solidFill>
-                            <a:srgbClr val="282828"/>
-                          </a:solidFill>
-                          <a:latin typeface="Arial"/>
-                        </a:rPr>
-                        <a:t>0.91, 25 pm, SNR 359</a:t>
-                      </a:r>
-                    </a:p>
-                  </a:txBody>
-                  <a:tcPr marL="54864" marR="54864" marT="18288" marB="18288">
-                    <a:solidFill>
-                      <a:srgbClr val="ECF1F6"/>
-                    </a:solidFill>
-                  </a:tcPr>
-                </a:tc>
-              </a:tr>
-              <a:tr h="468630">
-                <a:tc>
-                  <a:txBody>
-                    <a:bodyPr wrap="square"/>
-                    <a:lstStyle/>
-                    <a:p>
-                      <a:r>
-                        <a:rPr sz="1100" b="0">
-                          <a:solidFill>
-                            <a:srgbClr val="282828"/>
-                          </a:solidFill>
-                          <a:latin typeface="Arial"/>
-                        </a:rPr>
-                        <a:t>385 / 2048 (compliant)</a:t>
-                      </a:r>
-                    </a:p>
-                  </a:txBody>
-                  <a:tcPr marL="54864" marR="54864" marT="18288" marB="18288">
-                    <a:solidFill>
-                      <a:srgbClr val="FFFFFF"/>
-                    </a:solidFill>
-                  </a:tcPr>
-                </a:tc>
-                <a:tc>
-                  <a:txBody>
-                    <a:bodyPr wrap="square"/>
-                    <a:lstStyle/>
-                    <a:p>
-                      <a:r>
-                        <a:rPr sz="1100" b="0">
-                          <a:solidFill>
-                            <a:srgbClr val="282828"/>
-                          </a:solidFill>
-                          <a:latin typeface="Arial"/>
-                        </a:rPr>
-                        <a:t>7.92</a:t>
-                      </a:r>
-                    </a:p>
-                  </a:txBody>
-                  <a:tcPr marL="54864" marR="54864" marT="18288" marB="18288">
-                    <a:solidFill>
-                      <a:srgbClr val="FFFFFF"/>
-                    </a:solidFill>
-                  </a:tcPr>
-                </a:tc>
-                <a:tc>
-                  <a:txBody>
-                    <a:bodyPr wrap="square"/>
-                    <a:lstStyle/>
-                    <a:p>
-                      <a:r>
-                        <a:rPr sz="1100" b="0">
-                          <a:solidFill>
-                            <a:srgbClr val="282828"/>
-                          </a:solidFill>
-                          <a:latin typeface="Arial"/>
-                        </a:rPr>
-                        <a:t>5.0</a:t>
-                      </a:r>
-                    </a:p>
-                  </a:txBody>
-                  <a:tcPr marL="54864" marR="54864" marT="18288" marB="18288">
-                    <a:solidFill>
-                      <a:srgbClr val="FFFFFF"/>
-                    </a:solidFill>
-                  </a:tcPr>
-                </a:tc>
-                <a:tc>
-                  <a:txBody>
-                    <a:bodyPr wrap="square"/>
-                    <a:lstStyle/>
-                    <a:p>
-                      <a:r>
-                        <a:rPr sz="1100" b="0">
-                          <a:solidFill>
-                            <a:srgbClr val="282828"/>
-                          </a:solidFill>
-                          <a:latin typeface="Arial"/>
-                        </a:rPr>
-                        <a:t>0.935</a:t>
-                      </a:r>
-                    </a:p>
-                  </a:txBody>
-                  <a:tcPr marL="54864" marR="54864" marT="18288" marB="18288">
-                    <a:solidFill>
-                      <a:srgbClr val="FFFFFF"/>
-                    </a:solidFill>
-                  </a:tcPr>
-                </a:tc>
-                <a:tc>
-                  <a:txBody>
-                    <a:bodyPr wrap="square"/>
-                    <a:lstStyle/>
-                    <a:p>
-                      <a:r>
-                        <a:rPr sz="1100" b="0">
-                          <a:solidFill>
-                            <a:srgbClr val="282828"/>
-                          </a:solidFill>
-                          <a:latin typeface="Arial"/>
-                        </a:rPr>
-                        <a:t>0.91, 26 pm, SNR 355</a:t>
-                      </a:r>
-                    </a:p>
-                  </a:txBody>
-                  <a:tcPr marL="54864" marR="54864" marT="18288" marB="18288">
-                    <a:solidFill>
-                      <a:srgbClr val="FFFFFF"/>
-                    </a:solidFill>
-                  </a:tcPr>
-                </a:tc>
-              </a:tr>
-            </a:tbl>
-          </a:graphicData>
-        </a:graphic>
-      </p:graphicFrame>
-      <p:sp>
-        <p:nvSpPr>
-          <p:cNvPr id="5" name="TextBox 4"/>
+      <p:sp>
+        <p:nvSpPr>
+          <p:cNvPr id="4" name="TextBox 3"/>
           <p:cNvSpPr txBox="1"/>
           <p:nvPr/>
         </p:nvSpPr>
         <p:spPr>
           <a:xfrm>
-            <a:off x="411480" y="2942082"/>
+            <a:off x="411480" y="1298448"/>
             <a:ext cx="5806440" cy="274320"/>
           </a:xfrm>
           <a:prstGeom prst="rect">
@@ -11297,7 +10688,7 @@
                 </a:solidFill>
                 <a:latin typeface="Arial"/>
               </a:rPr>
-              <a:t>•  The rule: mask-plane pixels per λ/D = 0.74 × grid / rays; camera pixels per actuator ∝ rays.  Halving the ray count doubles focal resolution and halves pupil sampling.</a:t>
+              <a:t>•  The defect: the two reference spheres around the mask must share one radius so that, with no mask, the field comes back unchanged.  The exit sphere was written with a 23.9 mm radius against the entrance sphere's 352.7 mm; the engine then applied a quadratic phase at the focus, which is a defocus of the pupil image by 4.86 m.  Found while building the exact inversion, which needs the pupil brightness to be the same for every DM shape.</a:t>
             </a:r>
           </a:p>
           <a:p>
@@ -11313,7 +10704,7 @@
                 </a:solidFill>
                 <a:latin typeface="Arial"/>
               </a:rPr>
-              <a:t>•  What it settled: the hold-out gain is set by the ray count and not by the dimple's sampling — identical at the 4-px and 8-px dimple, identical at spot 3.0.  The remaining 6.5% is neither; the suspect is the kernel's variation between the centre, where it is measured, and the held-out site.</a:t>
+              <a:t>•  What it explained: with no mask the field came back changed by 0.159 on a flat DM (now 1.8×10⁻¹⁵); a 30 nm DM shape changed the pupil brightness by 29% rms (now 4×10⁻¹⁶); the response to one actuator rang (peak 0.27, ring −0.16; now 0.75, no ring); the response had a null near 30 cycles across the pupil — a Talbot effect of the defocus, predicted at 34.</a:t>
             </a:r>
           </a:p>
           <a:p>
@@ -11329,14 +10720,14 @@
                 </a:solidFill>
                 <a:latin typeface="Arial"/>
               </a:rPr>
-              <a:t>•  The 2048 grid runs on a 30 GB machine through a trimmed engine size table dropped into the run directory (grid-surface slots 200 → 4 saves 1.7 GB): 32 min, under 4 GB.</a:t>
+              <a:t>•  What the correction alone buys (one-frame linear reading, 96×96, same frames): floor under a single-actuator change on the 30 nm surface 744 → 67 pm (SNR 9 → 80); the grid case the sensor could not detect goes from SNR 1.5 to 14; a dense random change 42 → 9.6 nm error.</a:t>
             </a:r>
           </a:p>
         </p:txBody>
       </p:sp>
       <p:pic>
         <p:nvPicPr>
-          <p:cNvPr id="6" name="Picture 5" descr="zwfs_m2048_battery_n96.png"/>
+          <p:cNvPr id="5" name="Picture 4" descr="zwfs_s7iter.png"/>
           <p:cNvPicPr>
             <a:picLocks noChangeAspect="1"/>
           </p:cNvPicPr>
@@ -11350,8 +10741,8 @@
         </p:blipFill>
         <p:spPr>
           <a:xfrm>
-            <a:off x="6533907" y="1298448"/>
-            <a:ext cx="5128744" cy="2257552"/>
+            <a:off x="6609767" y="1298448"/>
+            <a:ext cx="4977024" cy="2183892"/>
           </a:xfrm>
           <a:prstGeom prst="rect">
             <a:avLst/>
@@ -11360,14 +10751,14 @@
       </p:pic>
       <p:sp>
         <p:nvSpPr>
-          <p:cNvPr id="7" name="TextBox 6"/>
+          <p:cNvPr id="6" name="TextBox 5"/>
           <p:cNvSpPr txBox="1"/>
           <p:nvPr/>
         </p:nvSpPr>
         <p:spPr>
           <a:xfrm>
-            <a:off x="6400800" y="3574288"/>
-            <a:ext cx="5394960" cy="394208"/>
+            <a:off x="6400800" y="3500628"/>
+            <a:ext cx="5394960" cy="559307"/>
           </a:xfrm>
           <a:prstGeom prst="rect">
             <a:avLst/>
@@ -11392,20 +10783,20 @@
                 </a:solidFill>
                 <a:latin typeface="Arial"/>
               </a:rPr>
-              <a:t>The compliant configuration (385 rays, 2048 grid): modal transfer per reading class (left) and the working-surface ladder per reading (right).</a:t>
-            </a:r>
-          </a:p>
-        </p:txBody>
-      </p:sp>
-      <p:sp>
-        <p:nvSpPr>
-          <p:cNvPr id="8" name="TextBox 7"/>
+              <a:t>Left: the corrected model's response by spatial frequency for the three kinds of reading, against the old model's linear response (dashed) with its null.  Right: gain on one actuator as the working surface grows.</a:t>
+            </a:r>
+          </a:p>
+        </p:txBody>
+      </p:sp>
+      <p:sp>
+        <p:nvSpPr>
+          <p:cNvPr id="7" name="TextBox 6"/>
           <p:cNvSpPr txBox="1"/>
           <p:nvPr/>
         </p:nvSpPr>
         <p:spPr>
           <a:xfrm>
-            <a:off x="6400800" y="4005072"/>
+            <a:off x="6400800" y="4096512"/>
             <a:ext cx="5394960" cy="274320"/>
           </a:xfrm>
           <a:prstGeom prst="rect">
@@ -11431,7 +10822,7 @@
                 </a:solidFill>
                 <a:latin typeface="Arial"/>
               </a:rPr>
-              <a:t>Hold-out = a single 20 nm actuator away from the calibration site, raw gain through the measured kernel.  I+ row values raw.  Records: runs/rec193, runs/ng385, runs/ng385s3, runs/m2048.</a:t>
+              <a:t>The old emission is kept as a builder option so the first six stages reproduce byte for byte.  The interferometer traces the same tail by rays and was never affected.  Records: zwfs_s7iter_report.txt, README S7.</a:t>
             </a:r>
           </a:p>
         </p:txBody>
@@ -11444,7 +10835,7 @@
 </p:sld>
 </file>
 
-<file path=ppt/slides/slide9.xml><?xml version="1.0" encoding="utf-8"?>
+<file path=ppt/slides/slide8.xml><?xml version="1.0" encoding="utf-8"?>
 <p:sld xmlns:a="http://schemas.openxmlformats.org/drawingml/2006/main" xmlns:p="http://schemas.openxmlformats.org/presentationml/2006/main" xmlns:r="http://schemas.openxmlformats.org/officeDocument/2006/relationships">
   <p:cSld>
     <p:spTree>
@@ -11488,7 +10879,7 @@
                 </a:solidFill>
                 <a:latin typeface="Arial"/>
               </a:rPr>
-              <a:t>Working-surface range, measured on 47 sites at once</a:t>
+              <a:t>Five ways to read the same camera frames</a:t>
             </a:r>
           </a:p>
           <a:p>
@@ -11504,7 +10895,7 @@
                 </a:solidFill>
                 <a:latin typeface="Arial"/>
               </a:rPr>
-              <a:t>The one-frame reading with the base prior holds to 40 nm rms on 1 mm actuators and 50 nm on 2 mm; the four-frame reading to 50–60 nm</a:t>
+              <a:t>The exact inversion, with its reference re-computed and the sign choice settled once, reads a 10 nm change to 26 pm from one frame</a:t>
             </a:r>
           </a:p>
         </p:txBody>
@@ -11553,6 +10944,940 @@
           </a:p>
         </p:txBody>
       </p:sp>
+      <p:sp>
+        <p:nvSpPr>
+          <p:cNvPr id="4" name="TextBox 3"/>
+          <p:cNvSpPr txBox="1"/>
+          <p:nvPr/>
+        </p:nvSpPr>
+        <p:spPr>
+          <a:xfrm>
+            <a:off x="411480" y="1298448"/>
+            <a:ext cx="11368735" cy="274320"/>
+          </a:xfrm>
+          <a:prstGeom prst="rect">
+            <a:avLst/>
+          </a:prstGeom>
+          <a:noFill/>
+        </p:spPr>
+        <p:txBody>
+          <a:bodyPr wrap="square">
+            <a:spAutoFit/>
+          </a:bodyPr>
+          <a:lstStyle/>
+          <a:p>
+            <a:pPr>
+              <a:spcAft>
+                <a:spcPts val="600"/>
+              </a:spcAft>
+            </a:pPr>
+            <a:r>
+              <a:rPr sz="1500" b="0">
+                <a:solidFill>
+                  <a:srgbClr val="282828"/>
+                </a:solidFill>
+                <a:latin typeface="Arial"/>
+              </a:rPr>
+              <a:t>•  The readings: L, linear, one frame, small phases only.  F, exact inversion pixel by pixel with the reference wave from the flat DM, one frame.  I, exact inversion with the reference wave re-computed from the current estimate through the mask model, five passes, one frame.  I+, the same, with the sign choice each pixel faces (which side of the quarter-wave fold it is on) settled once per working surface from four stepped frames, then refined; every later measurement is one frame.  S, phase stepping through three etch depths plus a clear frame, four frames.</a:t>
+            </a:r>
+          </a:p>
+        </p:txBody>
+      </p:sp>
+      <p:graphicFrame>
+        <p:nvGraphicFramePr>
+          <p:cNvPr id="5" name="Table 4"/>
+          <p:cNvGraphicFramePr>
+            <a:graphicFrameLocks noGrp="1"/>
+          </p:cNvGraphicFramePr>
+          <p:nvPr/>
+        </p:nvGraphicFramePr>
+        <p:xfrm>
+          <a:off x="411480" y="2713482"/>
+          <a:ext cx="11368735" cy="1400175"/>
+        </p:xfrm>
+        <a:graphic>
+          <a:graphicData uri="http://schemas.openxmlformats.org/drawingml/2006/table">
+            <a:tbl>
+              <a:tblPr firstRow="1" bandRow="1">
+                <a:tableStyleId>{5C22544A-7EE6-4342-B048-85BDC9FD1C3A}</a:tableStyleId>
+              </a:tblPr>
+              <a:tblGrid>
+                <a:gridCol w="6641795"/>
+                <a:gridCol w="945388"/>
+                <a:gridCol w="945388"/>
+                <a:gridCol w="945388"/>
+                <a:gridCol w="945388"/>
+                <a:gridCol w="945388"/>
+              </a:tblGrid>
+              <a:tr h="280035">
+                <a:tc>
+                  <a:txBody>
+                    <a:bodyPr wrap="square"/>
+                    <a:lstStyle/>
+                    <a:p>
+                      <a:r>
+                        <a:rPr sz="1100" b="1">
+                          <a:solidFill>
+                            <a:srgbClr val="FFFFFF"/>
+                          </a:solidFill>
+                          <a:latin typeface="Arial"/>
+                        </a:rPr>
+                        <a:t>10 nm change on the 30 nm working surface, 96×96</a:t>
+                      </a:r>
+                    </a:p>
+                  </a:txBody>
+                  <a:tcPr marL="54864" marR="54864" marT="18288" marB="18288">
+                    <a:solidFill>
+                      <a:srgbClr val="1F4E79"/>
+                    </a:solidFill>
+                  </a:tcPr>
+                </a:tc>
+                <a:tc>
+                  <a:txBody>
+                    <a:bodyPr wrap="square"/>
+                    <a:lstStyle/>
+                    <a:p>
+                      <a:r>
+                        <a:rPr sz="1100" b="1">
+                          <a:solidFill>
+                            <a:srgbClr val="FFFFFF"/>
+                          </a:solidFill>
+                          <a:latin typeface="Arial"/>
+                        </a:rPr>
+                        <a:t>L</a:t>
+                      </a:r>
+                    </a:p>
+                  </a:txBody>
+                  <a:tcPr marL="54864" marR="54864" marT="18288" marB="18288">
+                    <a:solidFill>
+                      <a:srgbClr val="1F4E79"/>
+                    </a:solidFill>
+                  </a:tcPr>
+                </a:tc>
+                <a:tc>
+                  <a:txBody>
+                    <a:bodyPr wrap="square"/>
+                    <a:lstStyle/>
+                    <a:p>
+                      <a:r>
+                        <a:rPr sz="1100" b="1">
+                          <a:solidFill>
+                            <a:srgbClr val="FFFFFF"/>
+                          </a:solidFill>
+                          <a:latin typeface="Arial"/>
+                        </a:rPr>
+                        <a:t>F</a:t>
+                      </a:r>
+                    </a:p>
+                  </a:txBody>
+                  <a:tcPr marL="54864" marR="54864" marT="18288" marB="18288">
+                    <a:solidFill>
+                      <a:srgbClr val="1F4E79"/>
+                    </a:solidFill>
+                  </a:tcPr>
+                </a:tc>
+                <a:tc>
+                  <a:txBody>
+                    <a:bodyPr wrap="square"/>
+                    <a:lstStyle/>
+                    <a:p>
+                      <a:r>
+                        <a:rPr sz="1100" b="1">
+                          <a:solidFill>
+                            <a:srgbClr val="FFFFFF"/>
+                          </a:solidFill>
+                          <a:latin typeface="Arial"/>
+                        </a:rPr>
+                        <a:t>I</a:t>
+                      </a:r>
+                    </a:p>
+                  </a:txBody>
+                  <a:tcPr marL="54864" marR="54864" marT="18288" marB="18288">
+                    <a:solidFill>
+                      <a:srgbClr val="1F4E79"/>
+                    </a:solidFill>
+                  </a:tcPr>
+                </a:tc>
+                <a:tc>
+                  <a:txBody>
+                    <a:bodyPr wrap="square"/>
+                    <a:lstStyle/>
+                    <a:p>
+                      <a:r>
+                        <a:rPr sz="1100" b="1">
+                          <a:solidFill>
+                            <a:srgbClr val="FFFFFF"/>
+                          </a:solidFill>
+                          <a:latin typeface="Arial"/>
+                        </a:rPr>
+                        <a:t>I+</a:t>
+                      </a:r>
+                    </a:p>
+                  </a:txBody>
+                  <a:tcPr marL="54864" marR="54864" marT="18288" marB="18288">
+                    <a:solidFill>
+                      <a:srgbClr val="1F4E79"/>
+                    </a:solidFill>
+                  </a:tcPr>
+                </a:tc>
+                <a:tc>
+                  <a:txBody>
+                    <a:bodyPr wrap="square"/>
+                    <a:lstStyle/>
+                    <a:p>
+                      <a:r>
+                        <a:rPr sz="1100" b="1">
+                          <a:solidFill>
+                            <a:srgbClr val="FFFFFF"/>
+                          </a:solidFill>
+                          <a:latin typeface="Arial"/>
+                        </a:rPr>
+                        <a:t>S</a:t>
+                      </a:r>
+                    </a:p>
+                  </a:txBody>
+                  <a:tcPr marL="54864" marR="54864" marT="18288" marB="18288">
+                    <a:solidFill>
+                      <a:srgbClr val="1F4E79"/>
+                    </a:solidFill>
+                  </a:tcPr>
+                </a:tc>
+              </a:tr>
+              <a:tr h="280035">
+                <a:tc>
+                  <a:txBody>
+                    <a:bodyPr wrap="square"/>
+                    <a:lstStyle/>
+                    <a:p>
+                      <a:r>
+                        <a:rPr sz="1100" b="0">
+                          <a:solidFill>
+                            <a:srgbClr val="282828"/>
+                          </a:solidFill>
+                          <a:latin typeface="Arial"/>
+                        </a:rPr>
+                        <a:t>gain, before / after the frequency correction</a:t>
+                      </a:r>
+                    </a:p>
+                  </a:txBody>
+                  <a:tcPr marL="54864" marR="54864" marT="18288" marB="18288">
+                    <a:solidFill>
+                      <a:srgbClr val="FFFFFF"/>
+                    </a:solidFill>
+                  </a:tcPr>
+                </a:tc>
+                <a:tc>
+                  <a:txBody>
+                    <a:bodyPr wrap="square"/>
+                    <a:lstStyle/>
+                    <a:p>
+                      <a:r>
+                        <a:rPr sz="1100" b="0">
+                          <a:solidFill>
+                            <a:srgbClr val="282828"/>
+                          </a:solidFill>
+                          <a:latin typeface="Arial"/>
+                        </a:rPr>
+                        <a:t>0.41 / 0.40</a:t>
+                      </a:r>
+                    </a:p>
+                  </a:txBody>
+                  <a:tcPr marL="54864" marR="54864" marT="18288" marB="18288">
+                    <a:solidFill>
+                      <a:srgbClr val="FFFFFF"/>
+                    </a:solidFill>
+                  </a:tcPr>
+                </a:tc>
+                <a:tc>
+                  <a:txBody>
+                    <a:bodyPr wrap="square"/>
+                    <a:lstStyle/>
+                    <a:p>
+                      <a:r>
+                        <a:rPr sz="1100" b="0">
+                          <a:solidFill>
+                            <a:srgbClr val="282828"/>
+                          </a:solidFill>
+                          <a:latin typeface="Arial"/>
+                        </a:rPr>
+                        <a:t>0.91 / 0.94</a:t>
+                      </a:r>
+                    </a:p>
+                  </a:txBody>
+                  <a:tcPr marL="54864" marR="54864" marT="18288" marB="18288">
+                    <a:solidFill>
+                      <a:srgbClr val="FFFFFF"/>
+                    </a:solidFill>
+                  </a:tcPr>
+                </a:tc>
+                <a:tc>
+                  <a:txBody>
+                    <a:bodyPr wrap="square"/>
+                    <a:lstStyle/>
+                    <a:p>
+                      <a:r>
+                        <a:rPr sz="1100" b="0">
+                          <a:solidFill>
+                            <a:srgbClr val="282828"/>
+                          </a:solidFill>
+                          <a:latin typeface="Arial"/>
+                        </a:rPr>
+                        <a:t>1.01 / 1.04</a:t>
+                      </a:r>
+                    </a:p>
+                  </a:txBody>
+                  <a:tcPr marL="54864" marR="54864" marT="18288" marB="18288">
+                    <a:solidFill>
+                      <a:srgbClr val="FFFFFF"/>
+                    </a:solidFill>
+                  </a:tcPr>
+                </a:tc>
+                <a:tc>
+                  <a:txBody>
+                    <a:bodyPr wrap="square"/>
+                    <a:lstStyle/>
+                    <a:p>
+                      <a:r>
+                        <a:rPr sz="1100" b="0">
+                          <a:solidFill>
+                            <a:srgbClr val="282828"/>
+                          </a:solidFill>
+                          <a:latin typeface="Arial"/>
+                        </a:rPr>
+                        <a:t>0.91 / 0.95</a:t>
+                      </a:r>
+                    </a:p>
+                  </a:txBody>
+                  <a:tcPr marL="54864" marR="54864" marT="18288" marB="18288">
+                    <a:solidFill>
+                      <a:srgbClr val="FFFFFF"/>
+                    </a:solidFill>
+                  </a:tcPr>
+                </a:tc>
+                <a:tc>
+                  <a:txBody>
+                    <a:bodyPr wrap="square"/>
+                    <a:lstStyle/>
+                    <a:p>
+                      <a:r>
+                        <a:rPr sz="1100" b="0">
+                          <a:solidFill>
+                            <a:srgbClr val="282828"/>
+                          </a:solidFill>
+                          <a:latin typeface="Arial"/>
+                        </a:rPr>
+                        <a:t>0.75 / 0.89</a:t>
+                      </a:r>
+                    </a:p>
+                  </a:txBody>
+                  <a:tcPr marL="54864" marR="54864" marT="18288" marB="18288">
+                    <a:solidFill>
+                      <a:srgbClr val="FFFFFF"/>
+                    </a:solidFill>
+                  </a:tcPr>
+                </a:tc>
+              </a:tr>
+              <a:tr h="280035">
+                <a:tc>
+                  <a:txBody>
+                    <a:bodyPr wrap="square"/>
+                    <a:lstStyle/>
+                    <a:p>
+                      <a:r>
+                        <a:rPr sz="1100" b="0">
+                          <a:solidFill>
+                            <a:srgbClr val="282828"/>
+                          </a:solidFill>
+                          <a:latin typeface="Arial"/>
+                        </a:rPr>
+                        <a:t>floor, pm, before / after</a:t>
+                      </a:r>
+                    </a:p>
+                  </a:txBody>
+                  <a:tcPr marL="54864" marR="54864" marT="18288" marB="18288">
+                    <a:solidFill>
+                      <a:srgbClr val="ECF1F6"/>
+                    </a:solidFill>
+                  </a:tcPr>
+                </a:tc>
+                <a:tc>
+                  <a:txBody>
+                    <a:bodyPr wrap="square"/>
+                    <a:lstStyle/>
+                    <a:p>
+                      <a:r>
+                        <a:rPr sz="1100" b="0">
+                          <a:solidFill>
+                            <a:srgbClr val="282828"/>
+                          </a:solidFill>
+                          <a:latin typeface="Arial"/>
+                        </a:rPr>
+                        <a:t>60 / 57</a:t>
+                      </a:r>
+                    </a:p>
+                  </a:txBody>
+                  <a:tcPr marL="54864" marR="54864" marT="18288" marB="18288">
+                    <a:solidFill>
+                      <a:srgbClr val="ECF1F6"/>
+                    </a:solidFill>
+                  </a:tcPr>
+                </a:tc>
+                <a:tc>
+                  <a:txBody>
+                    <a:bodyPr wrap="square"/>
+                    <a:lstStyle/>
+                    <a:p>
+                      <a:r>
+                        <a:rPr sz="1100" b="0">
+                          <a:solidFill>
+                            <a:srgbClr val="282828"/>
+                          </a:solidFill>
+                          <a:latin typeface="Arial"/>
+                        </a:rPr>
+                        <a:t>46 / 52</a:t>
+                      </a:r>
+                    </a:p>
+                  </a:txBody>
+                  <a:tcPr marL="54864" marR="54864" marT="18288" marB="18288">
+                    <a:solidFill>
+                      <a:srgbClr val="ECF1F6"/>
+                    </a:solidFill>
+                  </a:tcPr>
+                </a:tc>
+                <a:tc>
+                  <a:txBody>
+                    <a:bodyPr wrap="square"/>
+                    <a:lstStyle/>
+                    <a:p>
+                      <a:r>
+                        <a:rPr sz="1100" b="0">
+                          <a:solidFill>
+                            <a:srgbClr val="282828"/>
+                          </a:solidFill>
+                          <a:latin typeface="Arial"/>
+                        </a:rPr>
+                        <a:t>34 / 46</a:t>
+                      </a:r>
+                    </a:p>
+                  </a:txBody>
+                  <a:tcPr marL="54864" marR="54864" marT="18288" marB="18288">
+                    <a:solidFill>
+                      <a:srgbClr val="ECF1F6"/>
+                    </a:solidFill>
+                  </a:tcPr>
+                </a:tc>
+                <a:tc>
+                  <a:txBody>
+                    <a:bodyPr wrap="square"/>
+                    <a:lstStyle/>
+                    <a:p>
+                      <a:r>
+                        <a:rPr sz="1100" b="0">
+                          <a:solidFill>
+                            <a:srgbClr val="282828"/>
+                          </a:solidFill>
+                          <a:latin typeface="Arial"/>
+                        </a:rPr>
+                        <a:t>26 / 40</a:t>
+                      </a:r>
+                    </a:p>
+                  </a:txBody>
+                  <a:tcPr marL="54864" marR="54864" marT="18288" marB="18288">
+                    <a:solidFill>
+                      <a:srgbClr val="ECF1F6"/>
+                    </a:solidFill>
+                  </a:tcPr>
+                </a:tc>
+                <a:tc>
+                  <a:txBody>
+                    <a:bodyPr wrap="square"/>
+                    <a:lstStyle/>
+                    <a:p>
+                      <a:r>
+                        <a:rPr sz="1100" b="0">
+                          <a:solidFill>
+                            <a:srgbClr val="282828"/>
+                          </a:solidFill>
+                          <a:latin typeface="Arial"/>
+                        </a:rPr>
+                        <a:t>23 / 42</a:t>
+                      </a:r>
+                    </a:p>
+                  </a:txBody>
+                  <a:tcPr marL="54864" marR="54864" marT="18288" marB="18288">
+                    <a:solidFill>
+                      <a:srgbClr val="ECF1F6"/>
+                    </a:solidFill>
+                  </a:tcPr>
+                </a:tc>
+              </a:tr>
+              <a:tr h="280035">
+                <a:tc>
+                  <a:txBody>
+                    <a:bodyPr wrap="square"/>
+                    <a:lstStyle/>
+                    <a:p>
+                      <a:r>
+                        <a:rPr sz="1100" b="0">
+                          <a:solidFill>
+                            <a:srgbClr val="282828"/>
+                          </a:solidFill>
+                          <a:latin typeface="Arial"/>
+                        </a:rPr>
+                        <a:t>SNR (before)</a:t>
+                      </a:r>
+                    </a:p>
+                  </a:txBody>
+                  <a:tcPr marL="54864" marR="54864" marT="18288" marB="18288">
+                    <a:solidFill>
+                      <a:srgbClr val="FFFFFF"/>
+                    </a:solidFill>
+                  </a:tcPr>
+                </a:tc>
+                <a:tc>
+                  <a:txBody>
+                    <a:bodyPr wrap="square"/>
+                    <a:lstStyle/>
+                    <a:p>
+                      <a:r>
+                        <a:rPr sz="1100" b="0">
+                          <a:solidFill>
+                            <a:srgbClr val="282828"/>
+                          </a:solidFill>
+                          <a:latin typeface="Arial"/>
+                        </a:rPr>
+                        <a:t>68</a:t>
+                      </a:r>
+                    </a:p>
+                  </a:txBody>
+                  <a:tcPr marL="54864" marR="54864" marT="18288" marB="18288">
+                    <a:solidFill>
+                      <a:srgbClr val="FFFFFF"/>
+                    </a:solidFill>
+                  </a:tcPr>
+                </a:tc>
+                <a:tc>
+                  <a:txBody>
+                    <a:bodyPr wrap="square"/>
+                    <a:lstStyle/>
+                    <a:p>
+                      <a:r>
+                        <a:rPr sz="1100" b="0">
+                          <a:solidFill>
+                            <a:srgbClr val="282828"/>
+                          </a:solidFill>
+                          <a:latin typeface="Arial"/>
+                        </a:rPr>
+                        <a:t>196</a:t>
+                      </a:r>
+                    </a:p>
+                  </a:txBody>
+                  <a:tcPr marL="54864" marR="54864" marT="18288" marB="18288">
+                    <a:solidFill>
+                      <a:srgbClr val="FFFFFF"/>
+                    </a:solidFill>
+                  </a:tcPr>
+                </a:tc>
+                <a:tc>
+                  <a:txBody>
+                    <a:bodyPr wrap="square"/>
+                    <a:lstStyle/>
+                    <a:p>
+                      <a:r>
+                        <a:rPr sz="1100" b="0">
+                          <a:solidFill>
+                            <a:srgbClr val="282828"/>
+                          </a:solidFill>
+                          <a:latin typeface="Arial"/>
+                        </a:rPr>
+                        <a:t>298</a:t>
+                      </a:r>
+                    </a:p>
+                  </a:txBody>
+                  <a:tcPr marL="54864" marR="54864" marT="18288" marB="18288">
+                    <a:solidFill>
+                      <a:srgbClr val="FFFFFF"/>
+                    </a:solidFill>
+                  </a:tcPr>
+                </a:tc>
+                <a:tc>
+                  <a:txBody>
+                    <a:bodyPr wrap="square"/>
+                    <a:lstStyle/>
+                    <a:p>
+                      <a:r>
+                        <a:rPr sz="1100" b="0">
+                          <a:solidFill>
+                            <a:srgbClr val="282828"/>
+                          </a:solidFill>
+                          <a:latin typeface="Arial"/>
+                        </a:rPr>
+                        <a:t>355</a:t>
+                      </a:r>
+                    </a:p>
+                  </a:txBody>
+                  <a:tcPr marL="54864" marR="54864" marT="18288" marB="18288">
+                    <a:solidFill>
+                      <a:srgbClr val="FFFFFF"/>
+                    </a:solidFill>
+                  </a:tcPr>
+                </a:tc>
+                <a:tc>
+                  <a:txBody>
+                    <a:bodyPr wrap="square"/>
+                    <a:lstStyle/>
+                    <a:p>
+                      <a:r>
+                        <a:rPr sz="1100" b="0">
+                          <a:solidFill>
+                            <a:srgbClr val="282828"/>
+                          </a:solidFill>
+                          <a:latin typeface="Arial"/>
+                        </a:rPr>
+                        <a:t>323</a:t>
+                      </a:r>
+                    </a:p>
+                  </a:txBody>
+                  <a:tcPr marL="54864" marR="54864" marT="18288" marB="18288">
+                    <a:solidFill>
+                      <a:srgbClr val="FFFFFF"/>
+                    </a:solidFill>
+                  </a:tcPr>
+                </a:tc>
+              </a:tr>
+              <a:tr h="280035">
+                <a:tc>
+                  <a:txBody>
+                    <a:bodyPr wrap="square"/>
+                    <a:lstStyle/>
+                    <a:p>
+                      <a:r>
+                        <a:rPr sz="1100" b="0">
+                          <a:solidFill>
+                            <a:srgbClr val="282828"/>
+                          </a:solidFill>
+                          <a:latin typeface="Arial"/>
+                        </a:rPr>
+                        <a:t>47 actuators changed by 1 nm on the same surface: SNR</a:t>
+                      </a:r>
+                    </a:p>
+                  </a:txBody>
+                  <a:tcPr marL="54864" marR="54864" marT="18288" marB="18288">
+                    <a:solidFill>
+                      <a:srgbClr val="ECF1F6"/>
+                    </a:solidFill>
+                  </a:tcPr>
+                </a:tc>
+                <a:tc>
+                  <a:txBody>
+                    <a:bodyPr wrap="square"/>
+                    <a:lstStyle/>
+                    <a:p>
+                      <a:r>
+                        <a:rPr sz="1100" b="0">
+                          <a:solidFill>
+                            <a:srgbClr val="282828"/>
+                          </a:solidFill>
+                          <a:latin typeface="Arial"/>
+                        </a:rPr>
+                        <a:t>13.6</a:t>
+                      </a:r>
+                    </a:p>
+                  </a:txBody>
+                  <a:tcPr marL="54864" marR="54864" marT="18288" marB="18288">
+                    <a:solidFill>
+                      <a:srgbClr val="ECF1F6"/>
+                    </a:solidFill>
+                  </a:tcPr>
+                </a:tc>
+                <a:tc>
+                  <a:txBody>
+                    <a:bodyPr wrap="square"/>
+                    <a:lstStyle/>
+                    <a:p>
+                      <a:r>
+                        <a:rPr sz="1100" b="0">
+                          <a:solidFill>
+                            <a:srgbClr val="282828"/>
+                          </a:solidFill>
+                          <a:latin typeface="Arial"/>
+                        </a:rPr>
+                        <a:t>12.4</a:t>
+                      </a:r>
+                    </a:p>
+                  </a:txBody>
+                  <a:tcPr marL="54864" marR="54864" marT="18288" marB="18288">
+                    <a:solidFill>
+                      <a:srgbClr val="ECF1F6"/>
+                    </a:solidFill>
+                  </a:tcPr>
+                </a:tc>
+                <a:tc>
+                  <a:txBody>
+                    <a:bodyPr wrap="square"/>
+                    <a:lstStyle/>
+                    <a:p>
+                      <a:r>
+                        <a:rPr sz="1100" b="0">
+                          <a:solidFill>
+                            <a:srgbClr val="282828"/>
+                          </a:solidFill>
+                          <a:latin typeface="Arial"/>
+                        </a:rPr>
+                        <a:t>12.6</a:t>
+                      </a:r>
+                    </a:p>
+                  </a:txBody>
+                  <a:tcPr marL="54864" marR="54864" marT="18288" marB="18288">
+                    <a:solidFill>
+                      <a:srgbClr val="ECF1F6"/>
+                    </a:solidFill>
+                  </a:tcPr>
+                </a:tc>
+                <a:tc>
+                  <a:txBody>
+                    <a:bodyPr wrap="square"/>
+                    <a:lstStyle/>
+                    <a:p>
+                      <a:r>
+                        <a:rPr sz="1100" b="0">
+                          <a:solidFill>
+                            <a:srgbClr val="282828"/>
+                          </a:solidFill>
+                          <a:latin typeface="Arial"/>
+                        </a:rPr>
+                        <a:t>37.3</a:t>
+                      </a:r>
+                    </a:p>
+                  </a:txBody>
+                  <a:tcPr marL="54864" marR="54864" marT="18288" marB="18288">
+                    <a:solidFill>
+                      <a:srgbClr val="ECF1F6"/>
+                    </a:solidFill>
+                  </a:tcPr>
+                </a:tc>
+                <a:tc>
+                  <a:txBody>
+                    <a:bodyPr wrap="square"/>
+                    <a:lstStyle/>
+                    <a:p>
+                      <a:r>
+                        <a:rPr sz="1100" b="0">
+                          <a:solidFill>
+                            <a:srgbClr val="282828"/>
+                          </a:solidFill>
+                          <a:latin typeface="Arial"/>
+                        </a:rPr>
+                        <a:t>38.3</a:t>
+                      </a:r>
+                    </a:p>
+                  </a:txBody>
+                  <a:tcPr marL="54864" marR="54864" marT="18288" marB="18288">
+                    <a:solidFill>
+                      <a:srgbClr val="ECF1F6"/>
+                    </a:solidFill>
+                  </a:tcPr>
+                </a:tc>
+              </a:tr>
+            </a:tbl>
+          </a:graphicData>
+        </a:graphic>
+      </p:graphicFrame>
+      <p:sp>
+        <p:nvSpPr>
+          <p:cNvPr id="6" name="TextBox 5"/>
+          <p:cNvSpPr txBox="1"/>
+          <p:nvPr/>
+        </p:nvSpPr>
+        <p:spPr>
+          <a:xfrm>
+            <a:off x="411480" y="4259961"/>
+            <a:ext cx="11368735" cy="274320"/>
+          </a:xfrm>
+          <a:prstGeom prst="rect">
+            <a:avLst/>
+          </a:prstGeom>
+          <a:noFill/>
+        </p:spPr>
+        <p:txBody>
+          <a:bodyPr wrap="square">
+            <a:spAutoFit/>
+          </a:bodyPr>
+          <a:lstStyle/>
+          <a:p>
+            <a:pPr>
+              <a:spcAft>
+                <a:spcPts val="600"/>
+              </a:spcAft>
+            </a:pPr>
+            <a:r>
+              <a:rPr sz="1500" b="0">
+                <a:solidFill>
+                  <a:srgbClr val="282828"/>
+                </a:solidFill>
+                <a:latin typeface="Arial"/>
+              </a:rPr>
+              <a:t>•  The one physical limit is the sign fold: with the true sign map and the engine's own reference wave, the inversion is exact to 3×10⁻¹⁴.  On the 30 nm surface 7.8% of pixels sit past the fold.  The refined sign map gets 99.99% of pixels right; the plain stepped one misses 3%, enough to flip the sign of a single actuator.</a:t>
+            </a:r>
+          </a:p>
+        </p:txBody>
+      </p:sp>
+      <p:sp>
+        <p:nvSpPr>
+          <p:cNvPr id="7" name="TextBox 6"/>
+          <p:cNvSpPr txBox="1"/>
+          <p:nvPr/>
+        </p:nvSpPr>
+        <p:spPr>
+          <a:xfrm>
+            <a:off x="411480" y="5179695"/>
+            <a:ext cx="11368735" cy="274320"/>
+          </a:xfrm>
+          <a:prstGeom prst="rect">
+            <a:avLst/>
+          </a:prstGeom>
+          <a:noFill/>
+        </p:spPr>
+        <p:txBody>
+          <a:bodyPr wrap="square">
+            <a:spAutoFit/>
+          </a:bodyPr>
+          <a:lstStyle/>
+          <a:p>
+            <a:pPr>
+              <a:spcAft>
+                <a:spcPts val="600"/>
+              </a:spcAft>
+            </a:pPr>
+            <a:r>
+              <a:rPr sz="1050" b="0">
+                <a:solidFill>
+                  <a:srgbClr val="6E6E6E"/>
+                </a:solidFill>
+                <a:latin typeface="Arial"/>
+              </a:rPr>
+              <a:t>Fully sampled setup (385 rays across the pupil, 2048 grid; slide 9).  "Frequency correction" = dividing out the measured response by spatial frequency.  The reference-wave model matches the engine's own field to 2×10⁻¹⁵.  Interferometer on the same row: gain 0.92, floor 46 pm.  Record: runs/m2048.</a:t>
+            </a:r>
+          </a:p>
+        </p:txBody>
+      </p:sp>
+    </p:spTree>
+  </p:cSld>
+  <p:clrMapOvr>
+    <a:masterClrMapping/>
+  </p:clrMapOvr>
+</p:sld>
+</file>
+
+<file path=ppt/slides/slide9.xml><?xml version="1.0" encoding="utf-8"?>
+<p:sld xmlns:a="http://schemas.openxmlformats.org/drawingml/2006/main" xmlns:p="http://schemas.openxmlformats.org/presentationml/2006/main" xmlns:r="http://schemas.openxmlformats.org/officeDocument/2006/relationships">
+  <p:cSld>
+    <p:spTree>
+      <p:nvGrpSpPr>
+        <p:cNvPr id="1" name=""/>
+        <p:cNvGrpSpPr/>
+        <p:nvPr/>
+      </p:nvGrpSpPr>
+      <p:grpSpPr/>
+      <p:sp>
+        <p:nvSpPr>
+          <p:cNvPr id="2" name="TextBox 1"/>
+          <p:cNvSpPr txBox="1"/>
+          <p:nvPr/>
+        </p:nvSpPr>
+        <p:spPr>
+          <a:xfrm>
+            <a:off x="411480" y="201168"/>
+            <a:ext cx="11368735" cy="914400"/>
+          </a:xfrm>
+          <a:prstGeom prst="rect">
+            <a:avLst/>
+          </a:prstGeom>
+          <a:noFill/>
+        </p:spPr>
+        <p:txBody>
+          <a:bodyPr wrap="square">
+            <a:spAutoFit/>
+          </a:bodyPr>
+          <a:lstStyle/>
+          <a:p>
+            <a:pPr>
+              <a:spcAft>
+                <a:spcPts val="400"/>
+              </a:spcAft>
+            </a:pPr>
+            <a:r>
+              <a:rPr sz="2400" b="1">
+                <a:solidFill>
+                  <a:srgbClr val="1F4E79"/>
+                </a:solidFill>
+                <a:latin typeface="Arial"/>
+              </a:rPr>
+              <a:t>Sampling: two requirements that pull opposite ways</a:t>
+            </a:r>
+          </a:p>
+          <a:p>
+            <a:pPr>
+              <a:spcAft>
+                <a:spcPts val="0"/>
+              </a:spcAft>
+            </a:pPr>
+            <a:r>
+              <a:rPr sz="1250" b="0">
+                <a:solidFill>
+                  <a:srgbClr val="6E6E6E"/>
+                </a:solidFill>
+                <a:latin typeface="Arial"/>
+              </a:rPr>
+              <a:t>Dimple pixels go as grid size over ray count, camera pixels per actuator as ray count — only a larger grid serves both; a 2048 grid fits</a:t>
+            </a:r>
+          </a:p>
+        </p:txBody>
+      </p:sp>
+      <p:sp>
+        <p:nvSpPr>
+          <p:cNvPr id="3" name="Rectangle 2"/>
+          <p:cNvSpPr/>
+          <p:nvPr/>
+        </p:nvSpPr>
+        <p:spPr>
+          <a:xfrm>
+            <a:off x="411480" y="1133856"/>
+            <a:ext cx="11368735" cy="20320"/>
+          </a:xfrm>
+          <a:prstGeom prst="rect">
+            <a:avLst/>
+          </a:prstGeom>
+          <a:solidFill>
+            <a:srgbClr val="B8C6D4"/>
+          </a:solidFill>
+          <a:ln>
+            <a:noFill/>
+          </a:ln>
+          <a:effectLst/>
+        </p:spPr>
+        <p:style>
+          <a:lnRef idx="1">
+            <a:schemeClr val="accent1"/>
+          </a:lnRef>
+          <a:fillRef idx="3">
+            <a:schemeClr val="accent1"/>
+          </a:fillRef>
+          <a:effectRef idx="2">
+            <a:schemeClr val="accent1"/>
+          </a:effectRef>
+          <a:fontRef idx="minor">
+            <a:schemeClr val="lt1"/>
+          </a:fontRef>
+        </p:style>
+        <p:txBody>
+          <a:bodyPr rtlCol="0" anchor="ctr"/>
+          <a:lstStyle/>
+          <a:p>
+            <a:pPr algn="ctr"/>
+          </a:p>
+        </p:txBody>
+      </p:sp>
       <p:graphicFrame>
         <p:nvGraphicFramePr>
           <p:cNvPr id="4" name="Table 3"/>
@@ -11563,7 +11888,7 @@
         </p:nvGraphicFramePr>
         <p:xfrm>
           <a:off x="411480" y="1298448"/>
-          <a:ext cx="11368735" cy="1400175"/>
+          <a:ext cx="5806438" cy="1874520"/>
         </p:xfrm>
         <a:graphic>
           <a:graphicData uri="http://schemas.openxmlformats.org/drawingml/2006/table">
@@ -11572,13 +11897,13 @@
                 <a:tableStyleId>{5C22544A-7EE6-4342-B048-85BDC9FD1C3A}</a:tableStyleId>
               </a:tblPr>
               <a:tblGrid>
-                <a:gridCol w="8168335"/>
-                <a:gridCol w="800100"/>
-                <a:gridCol w="800100"/>
-                <a:gridCol w="800100"/>
-                <a:gridCol w="800100"/>
+                <a:gridCol w="1425289"/>
+                <a:gridCol w="872744"/>
+                <a:gridCol w="1206014"/>
+                <a:gridCol w="1041558"/>
+                <a:gridCol w="1260833"/>
               </a:tblGrid>
-              <a:tr h="280035">
+              <a:tr h="468630">
                 <a:tc>
                   <a:txBody>
                     <a:bodyPr wrap="square"/>
@@ -11591,7 +11916,7 @@
                           </a:solidFill>
                           <a:latin typeface="Arial"/>
                         </a:rPr>
-                        <a:t>10 nm changes on 47 grid sites; gain (SNR) vs working-surface rms</a:t>
+                        <a:t>rays across / grid</a:t>
                       </a:r>
                     </a:p>
                   </a:txBody>
@@ -11613,7 +11938,7 @@
                           </a:solidFill>
                           <a:latin typeface="Arial"/>
                         </a:rPr>
-                        <a:t>30 nm</a:t>
+                        <a:t>dimple, px</a:t>
                       </a:r>
                     </a:p>
                   </a:txBody>
@@ -11635,7 +11960,7 @@
                           </a:solidFill>
                           <a:latin typeface="Arial"/>
                         </a:rPr>
-                        <a:t>40 nm</a:t>
+                        <a:t>camera px per actuator</a:t>
                       </a:r>
                     </a:p>
                   </a:txBody>
@@ -11657,7 +11982,7 @@
                           </a:solidFill>
                           <a:latin typeface="Arial"/>
                         </a:rPr>
-                        <a:t>50 nm</a:t>
+                        <a:t>gain, test actuator</a:t>
                       </a:r>
                     </a:p>
                   </a:txBody>
@@ -11679,7 +12004,7 @@
                           </a:solidFill>
                           <a:latin typeface="Arial"/>
                         </a:rPr>
-                        <a:t>60 nm</a:t>
+                        <a:t>I+ on the 30 nm surface</a:t>
                       </a:r>
                     </a:p>
                   </a:txBody>
@@ -11690,20 +12015,20 @@
                   </a:tcPr>
                 </a:tc>
               </a:tr>
-              <a:tr h="280035">
-                <a:tc>
-                  <a:txBody>
-                    <a:bodyPr wrap="square"/>
-                    <a:lstStyle/>
-                    <a:p>
-                      <a:r>
-                        <a:rPr sz="1100" b="0">
-                          <a:solidFill>
-                            <a:srgbClr val="282828"/>
-                          </a:solidFill>
-                          <a:latin typeface="Arial"/>
-                        </a:rPr>
-                        <a:t>96×96, 1 mm pitch — I+ (one frame)</a:t>
+              <a:tr h="468630">
+                <a:tc>
+                  <a:txBody>
+                    <a:bodyPr wrap="square"/>
+                    <a:lstStyle/>
+                    <a:p>
+                      <a:r>
+                        <a:rPr sz="1100" b="0">
+                          <a:solidFill>
+                            <a:srgbClr val="282828"/>
+                          </a:solidFill>
+                          <a:latin typeface="Arial"/>
+                        </a:rPr>
+                        <a:t>193 / 1024 (development)</a:t>
                       </a:r>
                     </a:p>
                   </a:txBody>
@@ -11725,7 +12050,7 @@
                           </a:solidFill>
                           <a:latin typeface="Arial"/>
                         </a:rPr>
-                        <a:t>0.81 (26)</a:t>
+                        <a:t>7.92</a:t>
                       </a:r>
                     </a:p>
                   </a:txBody>
@@ -11747,7 +12072,7 @@
                           </a:solidFill>
                           <a:latin typeface="Arial"/>
                         </a:rPr>
-                        <a:t>0.85 (30)</a:t>
+                        <a:t>2.5</a:t>
                       </a:r>
                     </a:p>
                   </a:txBody>
@@ -11769,7 +12094,7 @@
                           </a:solidFill>
                           <a:latin typeface="Arial"/>
                         </a:rPr>
-                        <a:t>0.76 (9)</a:t>
+                        <a:t>0.900</a:t>
                       </a:r>
                     </a:p>
                   </a:txBody>
@@ -11791,7 +12116,7 @@
                           </a:solidFill>
                           <a:latin typeface="Arial"/>
                         </a:rPr>
-                        <a:t>0.31 (1)</a:t>
+                        <a:t>0.79, 13 pm, SNR 584</a:t>
                       </a:r>
                     </a:p>
                   </a:txBody>
@@ -11802,20 +12127,20 @@
                   </a:tcPr>
                 </a:tc>
               </a:tr>
-              <a:tr h="280035">
-                <a:tc>
-                  <a:txBody>
-                    <a:bodyPr wrap="square"/>
-                    <a:lstStyle/>
-                    <a:p>
-                      <a:r>
-                        <a:rPr sz="1100" b="0">
-                          <a:solidFill>
-                            <a:srgbClr val="282828"/>
-                          </a:solidFill>
-                          <a:latin typeface="Arial"/>
-                        </a:rPr>
-                        <a:t>96×96 — S (four frames)</a:t>
+              <a:tr h="468630">
+                <a:tc>
+                  <a:txBody>
+                    <a:bodyPr wrap="square"/>
+                    <a:lstStyle/>
+                    <a:p>
+                      <a:r>
+                        <a:rPr sz="1100" b="0">
+                          <a:solidFill>
+                            <a:srgbClr val="282828"/>
+                          </a:solidFill>
+                          <a:latin typeface="Arial"/>
+                        </a:rPr>
+                        <a:t>385 / 1024</a:t>
                       </a:r>
                     </a:p>
                   </a:txBody>
@@ -11837,7 +12162,7 @@
                           </a:solidFill>
                           <a:latin typeface="Arial"/>
                         </a:rPr>
-                        <a:t>0.92 (29)</a:t>
+                        <a:t>3.96</a:t>
                       </a:r>
                     </a:p>
                   </a:txBody>
@@ -11859,7 +12184,7 @@
                           </a:solidFill>
                           <a:latin typeface="Arial"/>
                         </a:rPr>
-                        <a:t>0.84 (27)</a:t>
+                        <a:t>5.0</a:t>
                       </a:r>
                     </a:p>
                   </a:txBody>
@@ -11881,7 +12206,7 @@
                           </a:solidFill>
                           <a:latin typeface="Arial"/>
                         </a:rPr>
-                        <a:t>0.83 (17)</a:t>
+                        <a:t>0.935</a:t>
                       </a:r>
                     </a:p>
                   </a:txBody>
@@ -11903,7 +12228,7 @@
                           </a:solidFill>
                           <a:latin typeface="Arial"/>
                         </a:rPr>
-                        <a:t>0.66 (10)</a:t>
+                        <a:t>0.91, 25 pm, SNR 359</a:t>
                       </a:r>
                     </a:p>
                   </a:txBody>
@@ -11914,20 +12239,20 @@
                   </a:tcPr>
                 </a:tc>
               </a:tr>
-              <a:tr h="280035">
-                <a:tc>
-                  <a:txBody>
-                    <a:bodyPr wrap="square"/>
-                    <a:lstStyle/>
-                    <a:p>
-                      <a:r>
-                        <a:rPr sz="1100" b="0">
-                          <a:solidFill>
-                            <a:srgbClr val="282828"/>
-                          </a:solidFill>
-                          <a:latin typeface="Arial"/>
-                        </a:rPr>
-                        <a:t>48×48, 2 mm pitch — I+</a:t>
+              <a:tr h="468630">
+                <a:tc>
+                  <a:txBody>
+                    <a:bodyPr wrap="square"/>
+                    <a:lstStyle/>
+                    <a:p>
+                      <a:r>
+                        <a:rPr sz="1100" b="0">
+                          <a:solidFill>
+                            <a:srgbClr val="282828"/>
+                          </a:solidFill>
+                          <a:latin typeface="Arial"/>
+                        </a:rPr>
+                        <a:t>385 / 2048 (fully sampled)</a:t>
                       </a:r>
                     </a:p>
                   </a:txBody>
@@ -11949,7 +12274,7 @@
                           </a:solidFill>
                           <a:latin typeface="Arial"/>
                         </a:rPr>
-                        <a:t>0.89 (56)</a:t>
+                        <a:t>7.92</a:t>
                       </a:r>
                     </a:p>
                   </a:txBody>
@@ -11971,7 +12296,7 @@
                           </a:solidFill>
                           <a:latin typeface="Arial"/>
                         </a:rPr>
-                        <a:t>0.80 (41)</a:t>
+                        <a:t>5.0</a:t>
                       </a:r>
                     </a:p>
                   </a:txBody>
@@ -11993,7 +12318,7 @@
                           </a:solidFill>
                           <a:latin typeface="Arial"/>
                         </a:rPr>
-                        <a:t>0.84 (40)</a:t>
+                        <a:t>0.935</a:t>
                       </a:r>
                     </a:p>
                   </a:txBody>
@@ -12015,125 +12340,13 @@
                           </a:solidFill>
                           <a:latin typeface="Arial"/>
                         </a:rPr>
-                        <a:t>0.83 (3)</a:t>
+                        <a:t>0.91, 26 pm, SNR 355</a:t>
                       </a:r>
                     </a:p>
                   </a:txBody>
                   <a:tcPr marL="54864" marR="54864" marT="18288" marB="18288">
                     <a:solidFill>
                       <a:srgbClr val="FFFFFF"/>
-                    </a:solidFill>
-                  </a:tcPr>
-                </a:tc>
-              </a:tr>
-              <a:tr h="280035">
-                <a:tc>
-                  <a:txBody>
-                    <a:bodyPr wrap="square"/>
-                    <a:lstStyle/>
-                    <a:p>
-                      <a:r>
-                        <a:rPr sz="1100" b="0">
-                          <a:solidFill>
-                            <a:srgbClr val="282828"/>
-                          </a:solidFill>
-                          <a:latin typeface="Arial"/>
-                        </a:rPr>
-                        <a:t>48×48 — S</a:t>
-                      </a:r>
-                    </a:p>
-                  </a:txBody>
-                  <a:tcPr marL="54864" marR="54864" marT="18288" marB="18288">
-                    <a:solidFill>
-                      <a:srgbClr val="ECF1F6"/>
-                    </a:solidFill>
-                  </a:tcPr>
-                </a:tc>
-                <a:tc>
-                  <a:txBody>
-                    <a:bodyPr wrap="square"/>
-                    <a:lstStyle/>
-                    <a:p>
-                      <a:r>
-                        <a:rPr sz="1100" b="0">
-                          <a:solidFill>
-                            <a:srgbClr val="282828"/>
-                          </a:solidFill>
-                          <a:latin typeface="Arial"/>
-                        </a:rPr>
-                        <a:t>0.89 (50)</a:t>
-                      </a:r>
-                    </a:p>
-                  </a:txBody>
-                  <a:tcPr marL="54864" marR="54864" marT="18288" marB="18288">
-                    <a:solidFill>
-                      <a:srgbClr val="ECF1F6"/>
-                    </a:solidFill>
-                  </a:tcPr>
-                </a:tc>
-                <a:tc>
-                  <a:txBody>
-                    <a:bodyPr wrap="square"/>
-                    <a:lstStyle/>
-                    <a:p>
-                      <a:r>
-                        <a:rPr sz="1100" b="0">
-                          <a:solidFill>
-                            <a:srgbClr val="282828"/>
-                          </a:solidFill>
-                          <a:latin typeface="Arial"/>
-                        </a:rPr>
-                        <a:t>0.83 (44)</a:t>
-                      </a:r>
-                    </a:p>
-                  </a:txBody>
-                  <a:tcPr marL="54864" marR="54864" marT="18288" marB="18288">
-                    <a:solidFill>
-                      <a:srgbClr val="ECF1F6"/>
-                    </a:solidFill>
-                  </a:tcPr>
-                </a:tc>
-                <a:tc>
-                  <a:txBody>
-                    <a:bodyPr wrap="square"/>
-                    <a:lstStyle/>
-                    <a:p>
-                      <a:r>
-                        <a:rPr sz="1100" b="0">
-                          <a:solidFill>
-                            <a:srgbClr val="282828"/>
-                          </a:solidFill>
-                          <a:latin typeface="Arial"/>
-                        </a:rPr>
-                        <a:t>0.99 (16)</a:t>
-                      </a:r>
-                    </a:p>
-                  </a:txBody>
-                  <a:tcPr marL="54864" marR="54864" marT="18288" marB="18288">
-                    <a:solidFill>
-                      <a:srgbClr val="ECF1F6"/>
-                    </a:solidFill>
-                  </a:tcPr>
-                </a:tc>
-                <a:tc>
-                  <a:txBody>
-                    <a:bodyPr wrap="square"/>
-                    <a:lstStyle/>
-                    <a:p>
-                      <a:r>
-                        <a:rPr sz="1100" b="0">
-                          <a:solidFill>
-                            <a:srgbClr val="282828"/>
-                          </a:solidFill>
-                          <a:latin typeface="Arial"/>
-                        </a:rPr>
-                        <a:t>0.55 (11)</a:t>
-                      </a:r>
-                    </a:p>
-                  </a:txBody>
-                  <a:tcPr marL="54864" marR="54864" marT="18288" marB="18288">
-                    <a:solidFill>
-                      <a:srgbClr val="ECF1F6"/>
                     </a:solidFill>
                   </a:tcPr>
                 </a:tc>
@@ -12150,8 +12363,8 @@
         </p:nvSpPr>
         <p:spPr>
           <a:xfrm>
-            <a:off x="411480" y="2844927"/>
-            <a:ext cx="11368735" cy="274320"/>
+            <a:off x="411480" y="3319272"/>
+            <a:ext cx="5806440" cy="274320"/>
           </a:xfrm>
           <a:prstGeom prst="rect">
             <a:avLst/>
@@ -12170,13 +12383,13 @@
               </a:spcAft>
             </a:pPr>
             <a:r>
-              <a:rPr sz="1500" b="0">
+              <a:rPr sz="1200" b="0">
                 <a:solidFill>
                   <a:srgbClr val="282828"/>
                 </a:solidFill>
                 <a:latin typeface="Arial"/>
               </a:rPr>
-              <a:t>•  Why the earlier "holds to 60 nm" moved: it was one actuator at one site.  On 47 sites the reading fails where a subset of sites falls beyond the fold, and the floor jumps from 0.3 to 3 nm — the collapse is visible as the floor, not as the gain.  Past 120 nm rms every reading aliases (the stepped retrieval itself wraps).</a:t>
+              <a:t>•  The rule: pixels per λ/D at the mask = 0.74 × grid / rays; camera pixels per actuator ∝ rays.  Halving the rays doubles the focal resolution and halves the pupil sampling.</a:t>
             </a:r>
           </a:p>
           <a:p>
@@ -12186,27 +12399,67 @@
               </a:spcAft>
             </a:pPr>
             <a:r>
-              <a:rPr sz="1500" b="0">
+              <a:rPr sz="1200" b="0">
                 <a:solidFill>
                   <a:srgbClr val="282828"/>
                 </a:solidFill>
                 <a:latin typeface="Arial"/>
               </a:rPr>
-              <a:t>•  Doctrine, updated: the one-frame reading with the refined base prior owns working surfaces to 40 nm rms (1 mm actuators) or 50 nm (2 mm); the four-frame stepped reading extends to 50–60 nm and owns dense commands; the interferometer owns everything beyond (it does not fold to 480 nm).</a:t>
-            </a:r>
-          </a:p>
-        </p:txBody>
-      </p:sp>
-      <p:sp>
-        <p:nvSpPr>
-          <p:cNvPr id="6" name="TextBox 5"/>
+              <a:t>•  What it settled: the gain on a test actuator (one calibrated on the centre actuator, tested on another) is set by the ray count, not by the dimple's sampling — the same at 4 and 8 pixels across the dimple, the same at spot 3.0.  The remaining 6.5% is neither; the likely cause is that the sensor's response differs between the centre, where it is calibrated, and the test site.</a:t>
+            </a:r>
+          </a:p>
+          <a:p>
+            <a:pPr>
+              <a:spcAft>
+                <a:spcPts val="600"/>
+              </a:spcAft>
+            </a:pPr>
+            <a:r>
+              <a:rPr sz="1200" b="0">
+                <a:solidFill>
+                  <a:srgbClr val="282828"/>
+                </a:solidFill>
+                <a:latin typeface="Arial"/>
+              </a:rPr>
+              <a:t>•  The 2048 grid runs on a 30 GB machine with a trimmed engine size table dropped in the run folder (grid-surface slots 200 → 4 saves 1.7 GB): 32 minutes, under 4 GB.</a:t>
+            </a:r>
+          </a:p>
+        </p:txBody>
+      </p:sp>
+      <p:pic>
+        <p:nvPicPr>
+          <p:cNvPr id="6" name="Picture 5" descr="zwfs_m2048_battery_n96.png"/>
+          <p:cNvPicPr>
+            <a:picLocks noChangeAspect="1"/>
+          </p:cNvPicPr>
+          <p:nvPr/>
+        </p:nvPicPr>
+        <p:blipFill>
+          <a:blip r:embed="rId2"/>
+          <a:stretch>
+            <a:fillRect/>
+          </a:stretch>
+        </p:blipFill>
+        <p:spPr>
+          <a:xfrm>
+            <a:off x="6533907" y="1298448"/>
+            <a:ext cx="5128744" cy="2257552"/>
+          </a:xfrm>
+          <a:prstGeom prst="rect">
+            <a:avLst/>
+          </a:prstGeom>
+        </p:spPr>
+      </p:pic>
+      <p:sp>
+        <p:nvSpPr>
+          <p:cNvPr id="7" name="TextBox 6"/>
           <p:cNvSpPr txBox="1"/>
           <p:nvPr/>
         </p:nvSpPr>
         <p:spPr>
           <a:xfrm>
-            <a:off x="411480" y="4647819"/>
-            <a:ext cx="11368735" cy="274320"/>
+            <a:off x="6400800" y="3574288"/>
+            <a:ext cx="5394960" cy="394208"/>
           </a:xfrm>
           <a:prstGeom prst="rect">
             <a:avLst/>
@@ -12219,6 +12472,45 @@
           </a:bodyPr>
           <a:lstStyle/>
           <a:p>
+            <a:pPr algn="ctr">
+              <a:spcAft>
+                <a:spcPts val="0"/>
+              </a:spcAft>
+            </a:pPr>
+            <a:r>
+              <a:rPr sz="1000" b="0">
+                <a:solidFill>
+                  <a:srgbClr val="6E6E6E"/>
+                </a:solidFill>
+                <a:latin typeface="Arial"/>
+              </a:rPr>
+              <a:t>The fully sampled setup (385 rays, 2048 grid): response by spatial frequency per kind of reading (left) and gain on one actuator as the working surface grows (right).</a:t>
+            </a:r>
+          </a:p>
+        </p:txBody>
+      </p:sp>
+      <p:sp>
+        <p:nvSpPr>
+          <p:cNvPr id="8" name="TextBox 7"/>
+          <p:cNvSpPr txBox="1"/>
+          <p:nvPr/>
+        </p:nvSpPr>
+        <p:spPr>
+          <a:xfrm>
+            <a:off x="6400800" y="4005072"/>
+            <a:ext cx="5394960" cy="274320"/>
+          </a:xfrm>
+          <a:prstGeom prst="rect">
+            <a:avLst/>
+          </a:prstGeom>
+          <a:noFill/>
+        </p:spPr>
+        <p:txBody>
+          <a:bodyPr wrap="square">
+            <a:spAutoFit/>
+          </a:bodyPr>
+          <a:lstStyle/>
+          <a:p>
             <a:pPr>
               <a:spcAft>
                 <a:spcPts val="600"/>
@@ -12231,7 +12523,7 @@
                 </a:solidFill>
                 <a:latin typeface="Arial"/>
               </a:rPr>
-              <a:t>Floor here = rms of the unpoked actuators under 47 simultaneous 10 nm pokes (their crosstalk), a different quantity from the single-site floor on slide 6.  Compliant configuration; record: runs/m2048.</a:t>
+              <a:t>Test actuator = a single 20 nm change away from the calibration actuator, gain before the frequency correction.  I+ values before correction.  Records: runs/rec193, ng385, ng385s3, m2048.</a:t>
             </a:r>
           </a:p>
         </p:txBody>

--- a/demo_session/deck_zwfs.pptx
+++ b/demo_session/deck_zwfs.pptx
@@ -3206,7 +3206,7 @@
                 </a:solidFill>
                 <a:latin typeface="Arial"/>
               </a:rPr>
-              <a:t>DRAFT — pending review.  Status: the sensor model has been corrected (the early model was out of focus); five ways of reading the frames measured on the corrected model; sampling settled on a 2048 grid; colour and photon budgets re-run; one script with a parameter sheet reproduces every number; the polarizing (vector) version is still to come.</a:t>
+              <a:t>DRAFT — pending review.  Status: the sensor model has been corrected (the early model was out of focus); five ways of reading the frames measured on the corrected model; sampling settled on a 2048 grid; colour and photon budgets re-run; one script with a parameter sheet reproduces every number; a sampling bias in the actuator fit found and fixed; the polarizing (vector) version is still to come.</a:t>
             </a:r>
           </a:p>
         </p:txBody>
@@ -3303,7 +3303,7 @@
                 </a:solidFill>
                 <a:latin typeface="Arial"/>
               </a:rPr>
-              <a:t>On 47 actuators at once the one-frame reading is within 15–19% of a 10 nm change up to 40 nm rms of surface and fails at 50; four frames hold to 50–60</a:t>
+              <a:t>On 47 actuators at once the one-frame reading is within 17–20% of a 10 nm change up to 40 nm rms of surface and fails at 50; four frames hold to 50–60</a:t>
             </a:r>
           </a:p>
         </p:txBody>
@@ -3524,7 +3524,7 @@
                           </a:solidFill>
                           <a:latin typeface="Arial"/>
                         </a:rPr>
-                        <a:t>0.81 → 8.1 nm, 0.31 nm</a:t>
+                        <a:t>0.80 → 8.0 nm, 0.29 nm</a:t>
                       </a:r>
                     </a:p>
                   </a:txBody>
@@ -3546,7 +3546,7 @@
                           </a:solidFill>
                           <a:latin typeface="Arial"/>
                         </a:rPr>
-                        <a:t>0.85 → 8.5 nm, 0.29 nm</a:t>
+                        <a:t>0.83 → 8.3 nm, 0.25 nm</a:t>
                       </a:r>
                     </a:p>
                   </a:txBody>
@@ -3568,7 +3568,7 @@
                           </a:solidFill>
                           <a:latin typeface="Arial"/>
                         </a:rPr>
-                        <a:t>0.76 → 7.6 nm, 0.84 nm</a:t>
+                        <a:t>0.73 → 7.3 nm, 0.80 nm</a:t>
                       </a:r>
                     </a:p>
                   </a:txBody>
@@ -3590,7 +3590,7 @@
                           </a:solidFill>
                           <a:latin typeface="Arial"/>
                         </a:rPr>
-                        <a:t>0.31 → 3.1 nm, 3.3 nm</a:t>
+                        <a:t>0.30 → 3.0 nm, 3.3 nm</a:t>
                       </a:r>
                     </a:p>
                   </a:txBody>
@@ -3636,7 +3636,7 @@
                           </a:solidFill>
                           <a:latin typeface="Arial"/>
                         </a:rPr>
-                        <a:t>0.92 → 9.2 nm, 0.32 nm</a:t>
+                        <a:t>0.90 → 9.0 nm, 0.28 nm</a:t>
                       </a:r>
                     </a:p>
                   </a:txBody>
@@ -3658,7 +3658,7 @@
                           </a:solidFill>
                           <a:latin typeface="Arial"/>
                         </a:rPr>
-                        <a:t>0.84 → 8.4 nm, 0.31 nm</a:t>
+                        <a:t>0.82 → 8.2 nm, 0.27 nm</a:t>
                       </a:r>
                     </a:p>
                   </a:txBody>
@@ -3680,7 +3680,7 @@
                           </a:solidFill>
                           <a:latin typeface="Arial"/>
                         </a:rPr>
-                        <a:t>0.83 → 8.3 nm, 0.48 nm</a:t>
+                        <a:t>0.81 → 8.1 nm, 0.44 nm</a:t>
                       </a:r>
                     </a:p>
                   </a:txBody>
@@ -3702,7 +3702,7 @@
                           </a:solidFill>
                           <a:latin typeface="Arial"/>
                         </a:rPr>
-                        <a:t>0.66 → 6.6 nm, 0.65 nm</a:t>
+                        <a:t>0.65 → 6.5 nm, 0.65 nm</a:t>
                       </a:r>
                     </a:p>
                   </a:txBody>
@@ -3748,7 +3748,7 @@
                           </a:solidFill>
                           <a:latin typeface="Arial"/>
                         </a:rPr>
-                        <a:t>0.89 → 8.9 nm, 0.16 nm</a:t>
+                        <a:t>0.88 → 8.8 nm, 0.16 nm</a:t>
                       </a:r>
                     </a:p>
                   </a:txBody>
@@ -3770,7 +3770,7 @@
                           </a:solidFill>
                           <a:latin typeface="Arial"/>
                         </a:rPr>
-                        <a:t>0.80 → 8.0 nm, 0.20 nm</a:t>
+                        <a:t>0.79 → 7.9 nm, 0.20 nm</a:t>
                       </a:r>
                     </a:p>
                   </a:txBody>
@@ -3904,7 +3904,7 @@
                           </a:solidFill>
                           <a:latin typeface="Arial"/>
                         </a:rPr>
-                        <a:t>0.99 → 9.9 nm, 0.61 nm</a:t>
+                        <a:t>0.98 → 9.8 nm, 0.61 nm</a:t>
                       </a:r>
                     </a:p>
                   </a:txBody>
@@ -3975,7 +3975,7 @@
                 </a:solidFill>
                 <a:latin typeface="Arial"/>
               </a:rPr>
-              <a:t>•  What gain means here: these gains are after the flat-DM calibration, so 0.81 means a 10 nm change reads 8.1 nm — a 19% error the calibration did not remove, because the sensor's response on a 30 nm surface differs from its response on a flat.  The floor is a second error on top: 0.3 nm spread over the 47 sites' neighbours.</a:t>
+              <a:t>•  What gain means here: these gains are after the flat-DM calibration, so 0.80 means a 10 nm change reads 8.0 nm — a 20% error the calibration did not remove.  The floor is a second error on top: 0.3 nm spread over the 47 sites' neighbours.  A single actuator changed alone on the same surface reads 0.98 (slide 8); the 47-site deficit is the crosstalk of many simultaneous changes.</a:t>
             </a:r>
           </a:p>
           <a:p>
@@ -3991,7 +3991,7 @@
                 </a:solidFill>
                 <a:latin typeface="Arial"/>
               </a:rPr>
-              <a:t>•  Can calibration absorb it?  Only if it is done on the working surface itself, and only as far as the gain is stable: I+ moves 0.81 → 0.85 between 30 and 40 nm rms, so a calibration made at 30 nm would be 5% off at 40.  Calibrating on the working surface is the next measurement (last slide).  The failure at 50–60 nm is not a gain to calibrate: the floor jumps to 1–3 nm because some of the 47 sites fall past the sign fold.</a:t>
+              <a:t>•  Can calibration absorb it?  Measured: no.  Calibrating on the working surface itself instead of the flat DM gave 0.74 against 0.79 for the one-frame reading (development sampling).  The deficit is in the readings on a working surface, not in the calibration; it is not pixels crossing the sign fold either (3 pixels move under a single change; 946 under a dense random one).  The next place to look is the actuator fit on a working surface.</a:t>
             </a:r>
           </a:p>
           <a:p>
@@ -4007,7 +4007,7 @@
                 </a:solidFill>
                 <a:latin typeface="Arial"/>
               </a:rPr>
-              <a:t>•  Why the earlier "holds to 60 nm" moved: it was one actuator at one site.  Past 120 nm rms every reading aliases.</a:t>
+              <a:t>•  The failure at 50–60 nm is not a gain to calibrate: the floor jumps to 1–3 nm because some of the 47 sites fall past the sign fold.  The earlier "holds to 60 nm" was one actuator at one site.  Past 120 nm rms every reading aliases.</a:t>
             </a:r>
           </a:p>
         </p:txBody>
@@ -4020,7 +4020,7 @@
         </p:nvSpPr>
         <p:spPr>
           <a:xfrm>
-            <a:off x="411480" y="5283326"/>
+            <a:off x="411480" y="5778627"/>
             <a:ext cx="11368735" cy="274320"/>
           </a:xfrm>
           <a:prstGeom prst="rect">
@@ -4046,7 +4046,7 @@
                 </a:solidFill>
                 <a:latin typeface="Arial"/>
               </a:rPr>
-              <a:t>Floor here = spread of the unchanged actuators under 47 simultaneous 10 nm changes (their crosstalk), larger than the single-site floor on slide 8.  Fully sampled setup; record: runs/m2048.</a:t>
+              <a:t>Floor here = spread of the unchanged actuators under 47 simultaneous 10 nm changes (their crosstalk), larger than the single-site floor on slide 8.  Fully sampled setup; records: runs/m2048_lat (rows), runs/cal_base and fold_diag (calibration on the surface, fold crossings).</a:t>
             </a:r>
           </a:p>
         </p:txBody>
@@ -6230,7 +6230,7 @@
                           </a:solidFill>
                           <a:latin typeface="Arial"/>
                         </a:rPr>
-                        <a:t>gain 0.91, floor 26 pm (I+, one frame)</a:t>
+                        <a:t>gain 0.98, floor 19 pm (I+, one frame)</a:t>
                       </a:r>
                     </a:p>
                   </a:txBody>
@@ -7892,7 +7892,7 @@
                 </a:solidFill>
                 <a:latin typeface="Arial"/>
               </a:rPr>
-              <a:t>•  Sampling is settled: camera pixels per actuator (the ray count) set the gain on a test actuator; the dimple's own sampling did not move any actuator-unit result at 4 against 8 pixels.  The remaining 6.5% of gain, and the gain change with the working surface, are the next measurement: calibrate on the working surface and at the test site.</a:t>
+              <a:t>•  Sampling is settled, and a bias in the fit is fixed: camera pixels per actuator (the ray count) set the gain on a test actuator; the dimple's own sampling did not move any actuator-unit result at 4 against 8 pixels; sampling the response pattern at the actuator centre took the test-actuator gain to 0.996 at 5 pixels per actuator.  Calibrating on the working surface was measured and does not help; the 47-site deficit on a working surface is the open item.</a:t>
             </a:r>
           </a:p>
           <a:p>
@@ -7921,7 +7921,7 @@
         </p:nvSpPr>
         <p:spPr>
           <a:xfrm>
-            <a:off x="411480" y="4620006"/>
+            <a:off x="411480" y="4867656"/>
             <a:ext cx="11368735" cy="274320"/>
           </a:xfrm>
           <a:prstGeom prst="rect">
@@ -8119,7 +8119,7 @@
                 </a:solidFill>
                 <a:latin typeface="Arial"/>
               </a:rPr>
-              <a:t>•  Calibrate the DM through the sensor's own image model: fit actuator positions and gains by matching sensor images of poke grids to a simulation that includes the propagation distances — this is the calibration on the working surface and at the test site that slides 9 and 10 call for.  The interferometer's camera sits off the DM conjugate after the tuned tail, so it is its lever too.</a:t>
+              <a:t>•  Calibrate the DM through the sensor's own image model: fit actuator positions and gains by matching sensor images of poke grids to a simulation that includes the propagation distances.  The interferometer's camera sits off the DM conjugate after the tuned tail, so it is its lever too — and its calibration code carries the same stencil bias fixed here (slide 9).</a:t>
             </a:r>
           </a:p>
           <a:p>
@@ -10895,7 +10895,7 @@
                 </a:solidFill>
                 <a:latin typeface="Arial"/>
               </a:rPr>
-              <a:t>The exact inversion, with its reference re-computed and the sign choice settled once, reads a 10 nm change to 26 pm from one frame</a:t>
+              <a:t>The exact inversion, with its reference re-computed and the sign choice settled once, reads a 10 nm change to 19 pm from one frame</a:t>
             </a:r>
           </a:p>
         </p:txBody>
@@ -11178,7 +11178,7 @@
                           </a:solidFill>
                           <a:latin typeface="Arial"/>
                         </a:rPr>
-                        <a:t>0.41 / 0.40</a:t>
+                        <a:t>0.39 / 0.35</a:t>
                       </a:r>
                     </a:p>
                   </a:txBody>
@@ -11200,7 +11200,7 @@
                           </a:solidFill>
                           <a:latin typeface="Arial"/>
                         </a:rPr>
-                        <a:t>0.91 / 0.94</a:t>
+                        <a:t>0.96 / 0.91</a:t>
                       </a:r>
                     </a:p>
                   </a:txBody>
@@ -11222,7 +11222,7 @@
                           </a:solidFill>
                           <a:latin typeface="Arial"/>
                         </a:rPr>
-                        <a:t>1.01 / 1.04</a:t>
+                        <a:t>1.08 / 1.02</a:t>
                       </a:r>
                     </a:p>
                   </a:txBody>
@@ -11244,7 +11244,7 @@
                           </a:solidFill>
                           <a:latin typeface="Arial"/>
                         </a:rPr>
-                        <a:t>0.91 / 0.95</a:t>
+                        <a:t>0.98 / 0.93</a:t>
                       </a:r>
                     </a:p>
                   </a:txBody>
@@ -11266,7 +11266,7 @@
                           </a:solidFill>
                           <a:latin typeface="Arial"/>
                         </a:rPr>
-                        <a:t>0.75 / 0.89</a:t>
+                        <a:t>0.80 / 0.87</a:t>
                       </a:r>
                     </a:p>
                   </a:txBody>
@@ -11312,7 +11312,7 @@
                           </a:solidFill>
                           <a:latin typeface="Arial"/>
                         </a:rPr>
-                        <a:t>60 / 57</a:t>
+                        <a:t>72 / 63</a:t>
                       </a:r>
                     </a:p>
                   </a:txBody>
@@ -11334,7 +11334,7 @@
                           </a:solidFill>
                           <a:latin typeface="Arial"/>
                         </a:rPr>
-                        <a:t>46 / 52</a:t>
+                        <a:t>55 / 55</a:t>
                       </a:r>
                     </a:p>
                   </a:txBody>
@@ -11356,7 +11356,7 @@
                           </a:solidFill>
                           <a:latin typeface="Arial"/>
                         </a:rPr>
-                        <a:t>34 / 46</a:t>
+                        <a:t>28 / 39</a:t>
                       </a:r>
                     </a:p>
                   </a:txBody>
@@ -11378,7 +11378,7 @@
                           </a:solidFill>
                           <a:latin typeface="Arial"/>
                         </a:rPr>
-                        <a:t>26 / 40</a:t>
+                        <a:t>19 / 34</a:t>
                       </a:r>
                     </a:p>
                   </a:txBody>
@@ -11400,7 +11400,7 @@
                           </a:solidFill>
                           <a:latin typeface="Arial"/>
                         </a:rPr>
-                        <a:t>23 / 42</a:t>
+                        <a:t>17 / 36</a:t>
                       </a:r>
                     </a:p>
                   </a:txBody>
@@ -11446,7 +11446,7 @@
                           </a:solidFill>
                           <a:latin typeface="Arial"/>
                         </a:rPr>
-                        <a:t>68</a:t>
+                        <a:t>54</a:t>
                       </a:r>
                     </a:p>
                   </a:txBody>
@@ -11468,7 +11468,7 @@
                           </a:solidFill>
                           <a:latin typeface="Arial"/>
                         </a:rPr>
-                        <a:t>196</a:t>
+                        <a:t>173</a:t>
                       </a:r>
                     </a:p>
                   </a:txBody>
@@ -11490,7 +11490,7 @@
                           </a:solidFill>
                           <a:latin typeface="Arial"/>
                         </a:rPr>
-                        <a:t>298</a:t>
+                        <a:t>386</a:t>
                       </a:r>
                     </a:p>
                   </a:txBody>
@@ -11512,7 +11512,7 @@
                           </a:solidFill>
                           <a:latin typeface="Arial"/>
                         </a:rPr>
-                        <a:t>355</a:t>
+                        <a:t>525</a:t>
                       </a:r>
                     </a:p>
                   </a:txBody>
@@ -11534,7 +11534,7 @@
                           </a:solidFill>
                           <a:latin typeface="Arial"/>
                         </a:rPr>
-                        <a:t>323</a:t>
+                        <a:t>461</a:t>
                       </a:r>
                     </a:p>
                   </a:txBody>
@@ -11580,7 +11580,7 @@
                           </a:solidFill>
                           <a:latin typeface="Arial"/>
                         </a:rPr>
-                        <a:t>13.6</a:t>
+                        <a:t>13.4</a:t>
                       </a:r>
                     </a:p>
                   </a:txBody>
@@ -11646,7 +11646,7 @@
                           </a:solidFill>
                           <a:latin typeface="Arial"/>
                         </a:rPr>
-                        <a:t>37.3</a:t>
+                        <a:t>45.5</a:t>
                       </a:r>
                     </a:p>
                   </a:txBody>
@@ -11668,7 +11668,7 @@
                           </a:solidFill>
                           <a:latin typeface="Arial"/>
                         </a:rPr>
-                        <a:t>38.3</a:t>
+                        <a:t>47.1</a:t>
                       </a:r>
                     </a:p>
                   </a:txBody>
@@ -11756,7 +11756,7 @@
                 </a:solidFill>
                 <a:latin typeface="Arial"/>
               </a:rPr>
-              <a:t>Fully sampled setup (385 rays across the pupil, 2048 grid; slide 9).  "Frequency correction" = dividing out the measured response by spatial frequency.  The reference-wave model matches the engine's own field to 2×10⁻¹⁵.  Interferometer on the same row: gain 0.92, floor 46 pm.  Record: runs/m2048.</a:t>
+              <a:t>Fully sampled setup (385 rays across the pupil, 2048 grid; slide 9).  "Frequency correction" = dividing out the measured response by spatial frequency.  The reference-wave model matches the engine's own field to 2×10⁻¹⁵.  Interferometer on the same row: gain 0.92, floor 46 pm.  Record: runs/m2048_lat (the fit's stencil sampled at the actuator centre, slide 9).</a:t>
             </a:r>
           </a:p>
         </p:txBody>
@@ -12094,7 +12094,7 @@
                           </a:solidFill>
                           <a:latin typeface="Arial"/>
                         </a:rPr>
-                        <a:t>0.900</a:t>
+                        <a:t>0.946</a:t>
                       </a:r>
                     </a:p>
                   </a:txBody>
@@ -12116,7 +12116,7 @@
                           </a:solidFill>
                           <a:latin typeface="Arial"/>
                         </a:rPr>
-                        <a:t>0.79, 13 pm, SNR 584</a:t>
+                        <a:t>0.82, 13 pm, SNR 632</a:t>
                       </a:r>
                     </a:p>
                   </a:txBody>
@@ -12206,7 +12206,7 @@
                           </a:solidFill>
                           <a:latin typeface="Arial"/>
                         </a:rPr>
-                        <a:t>0.935</a:t>
+                        <a:t>0.996</a:t>
                       </a:r>
                     </a:p>
                   </a:txBody>
@@ -12228,7 +12228,7 @@
                           </a:solidFill>
                           <a:latin typeface="Arial"/>
                         </a:rPr>
-                        <a:t>0.91, 25 pm, SNR 359</a:t>
+                        <a:t>0.97, 18 pm, SNR 529</a:t>
                       </a:r>
                     </a:p>
                   </a:txBody>
@@ -12318,7 +12318,7 @@
                           </a:solidFill>
                           <a:latin typeface="Arial"/>
                         </a:rPr>
-                        <a:t>0.935</a:t>
+                        <a:t>0.996</a:t>
                       </a:r>
                     </a:p>
                   </a:txBody>
@@ -12340,7 +12340,7 @@
                           </a:solidFill>
                           <a:latin typeface="Arial"/>
                         </a:rPr>
-                        <a:t>0.91, 26 pm, SNR 355</a:t>
+                        <a:t>0.98, 19 pm, SNR 525</a:t>
                       </a:r>
                     </a:p>
                   </a:txBody>
@@ -12405,7 +12405,23 @@
                 </a:solidFill>
                 <a:latin typeface="Arial"/>
               </a:rPr>
-              <a:t>•  What it settled: the gain on a test actuator (one calibrated on the centre actuator, tested on another) is set by the ray count, not by the dimple's sampling — the same at 4 and 8 pixels across the dimple, the same at spot 3.0.  The remaining 6.5% is neither; the likely cause is that the sensor's response differs between the centre, where it is calibrated, and the test site.</a:t>
+              <a:t>•  What it settled: the gain on a test actuator (calibrated on the centre actuator, tested on another) is set by the ray count, not by the dimple's sampling — the same at 4 and 8 pixels across the dimple, the same at spot 3.0.  At 5 pixels per actuator it is 0.996: within the 3% the plan asked for.</a:t>
+            </a:r>
+          </a:p>
+          <a:p>
+            <a:pPr>
+              <a:spcAft>
+                <a:spcPts val="600"/>
+              </a:spcAft>
+            </a:pPr>
+            <a:r>
+              <a:rPr sz="1200" b="0">
+                <a:solidFill>
+                  <a:srgbClr val="282828"/>
+                </a:solidFill>
+                <a:latin typeface="Arial"/>
+              </a:rPr>
+              <a:t>•  A bias in the fit, found and fixed: the sensor's response pattern was sampled about the poke on the 0.28 mm map grid, up to 0.14 mm off the actuator centre the fit uses.  Sampled at the centre, a kernel tested at its own site recovers 0.99 instead of 0.96, and the numbers above rose from 0.900 / 0.935 / 0.935.  The interferometer's calibration code shares the bias (flagged for its reflective build).</a:t>
             </a:r>
           </a:p>
           <a:p>

--- a/demo_session/deck_zwfs.pptx
+++ b/demo_session/deck_zwfs.pptx
@@ -26,6 +26,7 @@
     <p:sldId id="274" r:id="rId25"/>
     <p:sldId id="275" r:id="rId26"/>
     <p:sldId id="276" r:id="rId27"/>
+    <p:sldId id="277" r:id="rId28"/>
   </p:sldIdLst>
   <p:sldSz cx="12191695" cy="6858000" type="screen4x3"/>
   <p:notesSz cx="6858000" cy="9144000"/>
@@ -3206,7 +3207,7 @@
                 </a:solidFill>
                 <a:latin typeface="Arial"/>
               </a:rPr>
-              <a:t>DRAFT — pending review.  Status: the sensor model has been corrected (the early model was out of focus); five ways of reading the frames measured on the corrected model; sampling settled on a 2048 grid; colour and photon budgets re-run; one script with a parameter sheet reproduces every number; a sampling bias in the actuator fit found and fixed; the polarizing (vector) version is still to come.</a:t>
+              <a:t>DRAFT — pending review.  Status: the sensor model has been corrected (the early model was out of focus); five ways of reading the frames measured on the corrected model; sampling settled on a 2048 grid; colour and photon budgets re-run; one script with a parameter sheet reproduces every number; a sampling bias in the actuator fit found and fixed; calibration by a measured response matrix on the working surface takes the stepped reading to 5 pm; the polarizing (vector) version is still to come.</a:t>
             </a:r>
           </a:p>
         </p:txBody>
@@ -3287,7 +3288,7 @@
                 </a:solidFill>
                 <a:latin typeface="Arial"/>
               </a:rPr>
-              <a:t>How large a working surface each reading can handle</a:t>
+              <a:t>Calibrate with a measured response matrix</a:t>
             </a:r>
           </a:p>
           <a:p>
@@ -3303,7 +3304,7 @@
                 </a:solidFill>
                 <a:latin typeface="Arial"/>
               </a:rPr>
-              <a:t>On 47 actuators at once the one-frame reading is within 17–20% of a 10 nm change up to 40 nm rms of surface and fails at 50; four frames hold to 50–60</a:t>
+              <a:t>Every actuator's response measured once from 64 sparse-grid states; measured on the working surface, the stepped reading reads a 10 nm change to 5 pm</a:t>
             </a:r>
           </a:p>
         </p:txBody>
@@ -3352,17 +3353,72 @@
           </a:p>
         </p:txBody>
       </p:sp>
+      <p:sp>
+        <p:nvSpPr>
+          <p:cNvPr id="4" name="TextBox 3"/>
+          <p:cNvSpPr txBox="1"/>
+          <p:nvPr/>
+        </p:nvSpPr>
+        <p:spPr>
+          <a:xfrm>
+            <a:off x="411480" y="1298448"/>
+            <a:ext cx="11368735" cy="274320"/>
+          </a:xfrm>
+          <a:prstGeom prst="rect">
+            <a:avLst/>
+          </a:prstGeom>
+          <a:noFill/>
+        </p:spPr>
+        <p:txBody>
+          <a:bodyPr wrap="square">
+            <a:spAutoFit/>
+          </a:bodyPr>
+          <a:lstStyle/>
+          <a:p>
+            <a:pPr>
+              <a:spcAft>
+                <a:spcPts val="600"/>
+              </a:spcAft>
+            </a:pPr>
+            <a:r>
+              <a:rPr sz="1500" b="0">
+                <a:solidFill>
+                  <a:srgbClr val="282828"/>
+                </a:solidFill>
+                <a:latin typeface="Arial"/>
+              </a:rPr>
+              <a:t>•  The method: 64 multiplexed states cover all 3252 lit actuators once; each response is cut from its own window in camera pixels and forms one column of dw/da; actuator changes are a least-squares fit against that matrix.  No single-site pattern, no shift-invariance, no frequency correction; registration only places the windows; a real DM's irregularities are in the calibration by construction.</a:t>
+            </a:r>
+          </a:p>
+          <a:p>
+            <a:pPr>
+              <a:spcAft>
+                <a:spcPts val="600"/>
+              </a:spcAft>
+            </a:pPr>
+            <a:r>
+              <a:rPr sz="1500" b="0">
+                <a:solidFill>
+                  <a:srgbClr val="282828"/>
+                </a:solidFill>
+                <a:latin typeface="Arial"/>
+              </a:rPr>
+              <a:t>•  One property of this sensor had to be carried: it cannot see piston, so each frame is mean-referenced and the pokes' shared pedestal sits in every window; cut naively, the fit over-responds 2 to 4× below 12 cycles across the pupil.  With each column's pedestal spread over the pupil (a rank-one term), the exact reading's response is 0.99 to 1.08 at every frequency uncorrected, and a single actuator on the flat reads 0.994 with a 4 pm floor (0.946, 37 pm with the single-site pattern).</a:t>
+            </a:r>
+          </a:p>
+        </p:txBody>
+      </p:sp>
       <p:graphicFrame>
         <p:nvGraphicFramePr>
-          <p:cNvPr id="4" name="Table 3"/>
+          <p:cNvPr id="5" name="Table 4"/>
           <p:cNvGraphicFramePr>
             <a:graphicFrameLocks noGrp="1"/>
           </p:cNvGraphicFramePr>
           <p:nvPr/>
         </p:nvGraphicFramePr>
         <p:xfrm>
-          <a:off x="411480" y="1298448"/>
-          <a:ext cx="11368735" cy="1400175"/>
+          <a:off x="411480" y="3844290"/>
+          <a:ext cx="11368733" cy="1497330"/>
         </p:xfrm>
         <a:graphic>
           <a:graphicData uri="http://schemas.openxmlformats.org/drawingml/2006/table">
@@ -3371,13 +3427,12 @@
                 <a:tableStyleId>{5C22544A-7EE6-4342-B048-85BDC9FD1C3A}</a:tableStyleId>
               </a:tblPr>
               <a:tblGrid>
-                <a:gridCol w="4743247"/>
-                <a:gridCol w="1656372"/>
-                <a:gridCol w="1656372"/>
-                <a:gridCol w="1656372"/>
-                <a:gridCol w="1656372"/>
+                <a:gridCol w="5430924"/>
+                <a:gridCol w="1955132"/>
+                <a:gridCol w="1955132"/>
+                <a:gridCol w="2027545"/>
               </a:tblGrid>
-              <a:tr h="280035">
+              <a:tr h="468630">
                 <a:tc>
                   <a:txBody>
                     <a:bodyPr wrap="square"/>
@@ -3390,7 +3445,7 @@
                           </a:solidFill>
                           <a:latin typeface="Arial"/>
                         </a:rPr>
-                        <a:t>10 nm changes on 47 actuators; gain, read value of 10 nm, floor</a:t>
+                        <a:t>matrix measured on the flat / on the 30 nm surface; 30 nm surface, 385 rays</a:t>
                       </a:r>
                     </a:p>
                   </a:txBody>
@@ -3412,7 +3467,7 @@
                           </a:solidFill>
                           <a:latin typeface="Arial"/>
                         </a:rPr>
-                        <a:t>30 nm surface</a:t>
+                        <a:t>linear (one frame)</a:t>
                       </a:r>
                     </a:p>
                   </a:txBody>
@@ -3434,7 +3489,7 @@
                           </a:solidFill>
                           <a:latin typeface="Arial"/>
                         </a:rPr>
-                        <a:t>40 nm</a:t>
+                        <a:t>exact I+ (one frame)</a:t>
                       </a:r>
                     </a:p>
                   </a:txBody>
@@ -3456,29 +3511,7 @@
                           </a:solidFill>
                           <a:latin typeface="Arial"/>
                         </a:rPr>
-                        <a:t>50 nm</a:t>
-                      </a:r>
-                    </a:p>
-                  </a:txBody>
-                  <a:tcPr marL="54864" marR="54864" marT="18288" marB="18288">
-                    <a:solidFill>
-                      <a:srgbClr val="1F4E79"/>
-                    </a:solidFill>
-                  </a:tcPr>
-                </a:tc>
-                <a:tc>
-                  <a:txBody>
-                    <a:bodyPr wrap="square"/>
-                    <a:lstStyle/>
-                    <a:p>
-                      <a:r>
-                        <a:rPr sz="1100" b="1">
-                          <a:solidFill>
-                            <a:srgbClr val="FFFFFF"/>
-                          </a:solidFill>
-                          <a:latin typeface="Arial"/>
-                        </a:rPr>
-                        <a:t>60 nm</a:t>
+                        <a:t>stepped (four frames)</a:t>
                       </a:r>
                     </a:p>
                   </a:txBody>
@@ -3502,7 +3535,7 @@
                           </a:solidFill>
                           <a:latin typeface="Arial"/>
                         </a:rPr>
-                        <a:t>96×96, 1 mm pitch — I+ (one frame)</a:t>
+                        <a:t>single 10 nm change: gain, floor</a:t>
                       </a:r>
                     </a:p>
                   </a:txBody>
@@ -3524,7 +3557,7 @@
                           </a:solidFill>
                           <a:latin typeface="Arial"/>
                         </a:rPr>
-                        <a:t>0.80 → 8.0 nm, 0.29 nm</a:t>
+                        <a:t>0.30, 142 pm / 1.05, 23 pm</a:t>
                       </a:r>
                     </a:p>
                   </a:txBody>
@@ -3546,7 +3579,7 @@
                           </a:solidFill>
                           <a:latin typeface="Arial"/>
                         </a:rPr>
-                        <a:t>0.83 → 8.3 nm, 0.25 nm</a:t>
+                        <a:t>0.78, 27 pm / 0.78, 74 pm</a:t>
                       </a:r>
                     </a:p>
                   </a:txBody>
@@ -3568,29 +3601,7 @@
                           </a:solidFill>
                           <a:latin typeface="Arial"/>
                         </a:rPr>
-                        <a:t>0.73 → 7.3 nm, 0.80 nm</a:t>
-                      </a:r>
-                    </a:p>
-                  </a:txBody>
-                  <a:tcPr marL="54864" marR="54864" marT="18288" marB="18288">
-                    <a:solidFill>
-                      <a:srgbClr val="FFFFFF"/>
-                    </a:solidFill>
-                  </a:tcPr>
-                </a:tc>
-                <a:tc>
-                  <a:txBody>
-                    <a:bodyPr wrap="square"/>
-                    <a:lstStyle/>
-                    <a:p>
-                      <a:r>
-                        <a:rPr sz="1100" b="0">
-                          <a:solidFill>
-                            <a:srgbClr val="282828"/>
-                          </a:solidFill>
-                          <a:latin typeface="Arial"/>
-                        </a:rPr>
-                        <a:t>0.30 → 3.0 nm, 3.3 nm</a:t>
+                        <a:t>0.77, 18 pm / 0.99, 5 pm</a:t>
                       </a:r>
                     </a:p>
                   </a:txBody>
@@ -3614,7 +3625,7 @@
                           </a:solidFill>
                           <a:latin typeface="Arial"/>
                         </a:rPr>
-                        <a:t>96×96 — S (four frames)</a:t>
+                        <a:t>47 actuators changed 1 nm: gain, floor</a:t>
                       </a:r>
                     </a:p>
                   </a:txBody>
@@ -3636,7 +3647,7 @@
                           </a:solidFill>
                           <a:latin typeface="Arial"/>
                         </a:rPr>
-                        <a:t>0.90 → 9.0 nm, 0.28 nm</a:t>
+                        <a:t>1.01, 77 pm / 1.05, 22 pm</a:t>
                       </a:r>
                     </a:p>
                   </a:txBody>
@@ -3658,7 +3669,7 @@
                           </a:solidFill>
                           <a:latin typeface="Arial"/>
                         </a:rPr>
-                        <a:t>0.82 → 8.2 nm, 0.27 nm</a:t>
+                        <a:t>0.98, 12 pm / 0.90, 35 pm</a:t>
                       </a:r>
                     </a:p>
                   </a:txBody>
@@ -3680,7 +3691,7 @@
                           </a:solidFill>
                           <a:latin typeface="Arial"/>
                         </a:rPr>
-                        <a:t>0.81 → 8.1 nm, 0.44 nm</a:t>
+                        <a:t>0.83, 10 pm / 1.00, 3 pm</a:t>
                       </a:r>
                     </a:p>
                   </a:txBody>
@@ -3690,43 +3701,21 @@
                     </a:solidFill>
                   </a:tcPr>
                 </a:tc>
-                <a:tc>
-                  <a:txBody>
-                    <a:bodyPr wrap="square"/>
-                    <a:lstStyle/>
-                    <a:p>
-                      <a:r>
-                        <a:rPr sz="1100" b="0">
-                          <a:solidFill>
-                            <a:srgbClr val="282828"/>
-                          </a:solidFill>
-                          <a:latin typeface="Arial"/>
-                        </a:rPr>
-                        <a:t>0.65 → 6.5 nm, 0.65 nm</a:t>
-                      </a:r>
-                    </a:p>
-                  </a:txBody>
-                  <a:tcPr marL="54864" marR="54864" marT="18288" marB="18288">
-                    <a:solidFill>
-                      <a:srgbClr val="ECF1F6"/>
-                    </a:solidFill>
-                  </a:tcPr>
-                </a:tc>
               </a:tr>
-              <a:tr h="280035">
-                <a:tc>
-                  <a:txBody>
-                    <a:bodyPr wrap="square"/>
-                    <a:lstStyle/>
-                    <a:p>
-                      <a:r>
-                        <a:rPr sz="1100" b="0">
-                          <a:solidFill>
-                            <a:srgbClr val="282828"/>
-                          </a:solidFill>
-                          <a:latin typeface="Arial"/>
-                        </a:rPr>
-                        <a:t>48×48, 2 mm pitch — I+</a:t>
+              <a:tr h="468630">
+                <a:tc>
+                  <a:txBody>
+                    <a:bodyPr wrap="square"/>
+                    <a:lstStyle/>
+                    <a:p>
+                      <a:r>
+                        <a:rPr sz="1100" b="0">
+                          <a:solidFill>
+                            <a:srgbClr val="282828"/>
+                          </a:solidFill>
+                          <a:latin typeface="Arial"/>
+                        </a:rPr>
+                        <a:t>dense random 10 nm: gain, error</a:t>
                       </a:r>
                     </a:p>
                   </a:txBody>
@@ -3748,7 +3737,7 @@
                           </a:solidFill>
                           <a:latin typeface="Arial"/>
                         </a:rPr>
-                        <a:t>0.88 → 8.8 nm, 0.16 nm</a:t>
+                        <a:t>0.88, 9.9 nm / 1.04, 4.7 nm</a:t>
                       </a:r>
                     </a:p>
                   </a:txBody>
@@ -3770,7 +3759,7 @@
                           </a:solidFill>
                           <a:latin typeface="Arial"/>
                         </a:rPr>
-                        <a:t>0.79 → 7.9 nm, 0.20 nm</a:t>
+                        <a:t>0.90, 4.2 nm / 0.86, 5.2 nm</a:t>
                       </a:r>
                     </a:p>
                   </a:txBody>
@@ -3792,147 +3781,13 @@
                           </a:solidFill>
                           <a:latin typeface="Arial"/>
                         </a:rPr>
-                        <a:t>0.84 → 8.4 nm, 0.21 nm</a:t>
+                        <a:t>0.82, 2.1 nm / 0.98, 0.67 nm</a:t>
                       </a:r>
                     </a:p>
                   </a:txBody>
                   <a:tcPr marL="54864" marR="54864" marT="18288" marB="18288">
                     <a:solidFill>
                       <a:srgbClr val="FFFFFF"/>
-                    </a:solidFill>
-                  </a:tcPr>
-                </a:tc>
-                <a:tc>
-                  <a:txBody>
-                    <a:bodyPr wrap="square"/>
-                    <a:lstStyle/>
-                    <a:p>
-                      <a:r>
-                        <a:rPr sz="1100" b="0">
-                          <a:solidFill>
-                            <a:srgbClr val="282828"/>
-                          </a:solidFill>
-                          <a:latin typeface="Arial"/>
-                        </a:rPr>
-                        <a:t>0.83 → 8.3 nm, 3.0 nm</a:t>
-                      </a:r>
-                    </a:p>
-                  </a:txBody>
-                  <a:tcPr marL="54864" marR="54864" marT="18288" marB="18288">
-                    <a:solidFill>
-                      <a:srgbClr val="FFFFFF"/>
-                    </a:solidFill>
-                  </a:tcPr>
-                </a:tc>
-              </a:tr>
-              <a:tr h="280035">
-                <a:tc>
-                  <a:txBody>
-                    <a:bodyPr wrap="square"/>
-                    <a:lstStyle/>
-                    <a:p>
-                      <a:r>
-                        <a:rPr sz="1100" b="0">
-                          <a:solidFill>
-                            <a:srgbClr val="282828"/>
-                          </a:solidFill>
-                          <a:latin typeface="Arial"/>
-                        </a:rPr>
-                        <a:t>48×48 — S</a:t>
-                      </a:r>
-                    </a:p>
-                  </a:txBody>
-                  <a:tcPr marL="54864" marR="54864" marT="18288" marB="18288">
-                    <a:solidFill>
-                      <a:srgbClr val="ECF1F6"/>
-                    </a:solidFill>
-                  </a:tcPr>
-                </a:tc>
-                <a:tc>
-                  <a:txBody>
-                    <a:bodyPr wrap="square"/>
-                    <a:lstStyle/>
-                    <a:p>
-                      <a:r>
-                        <a:rPr sz="1100" b="0">
-                          <a:solidFill>
-                            <a:srgbClr val="282828"/>
-                          </a:solidFill>
-                          <a:latin typeface="Arial"/>
-                        </a:rPr>
-                        <a:t>0.89 → 8.9 nm, 0.18 nm</a:t>
-                      </a:r>
-                    </a:p>
-                  </a:txBody>
-                  <a:tcPr marL="54864" marR="54864" marT="18288" marB="18288">
-                    <a:solidFill>
-                      <a:srgbClr val="ECF1F6"/>
-                    </a:solidFill>
-                  </a:tcPr>
-                </a:tc>
-                <a:tc>
-                  <a:txBody>
-                    <a:bodyPr wrap="square"/>
-                    <a:lstStyle/>
-                    <a:p>
-                      <a:r>
-                        <a:rPr sz="1100" b="0">
-                          <a:solidFill>
-                            <a:srgbClr val="282828"/>
-                          </a:solidFill>
-                          <a:latin typeface="Arial"/>
-                        </a:rPr>
-                        <a:t>0.83 → 8.3 nm, 0.19 nm</a:t>
-                      </a:r>
-                    </a:p>
-                  </a:txBody>
-                  <a:tcPr marL="54864" marR="54864" marT="18288" marB="18288">
-                    <a:solidFill>
-                      <a:srgbClr val="ECF1F6"/>
-                    </a:solidFill>
-                  </a:tcPr>
-                </a:tc>
-                <a:tc>
-                  <a:txBody>
-                    <a:bodyPr wrap="square"/>
-                    <a:lstStyle/>
-                    <a:p>
-                      <a:r>
-                        <a:rPr sz="1100" b="0">
-                          <a:solidFill>
-                            <a:srgbClr val="282828"/>
-                          </a:solidFill>
-                          <a:latin typeface="Arial"/>
-                        </a:rPr>
-                        <a:t>0.98 → 9.8 nm, 0.61 nm</a:t>
-                      </a:r>
-                    </a:p>
-                  </a:txBody>
-                  <a:tcPr marL="54864" marR="54864" marT="18288" marB="18288">
-                    <a:solidFill>
-                      <a:srgbClr val="ECF1F6"/>
-                    </a:solidFill>
-                  </a:tcPr>
-                </a:tc>
-                <a:tc>
-                  <a:txBody>
-                    <a:bodyPr wrap="square"/>
-                    <a:lstStyle/>
-                    <a:p>
-                      <a:r>
-                        <a:rPr sz="1100" b="0">
-                          <a:solidFill>
-                            <a:srgbClr val="282828"/>
-                          </a:solidFill>
-                          <a:latin typeface="Arial"/>
-                        </a:rPr>
-                        <a:t>0.55 → 5.5 nm, 0.48 nm</a:t>
-                      </a:r>
-                    </a:p>
-                  </a:txBody>
-                  <a:tcPr marL="54864" marR="54864" marT="18288" marB="18288">
-                    <a:solidFill>
-                      <a:srgbClr val="ECF1F6"/>
                     </a:solidFill>
                   </a:tcPr>
                 </a:tc>
@@ -3943,13 +3798,13 @@
       </p:graphicFrame>
       <p:sp>
         <p:nvSpPr>
-          <p:cNvPr id="5" name="TextBox 4"/>
+          <p:cNvPr id="6" name="TextBox 5"/>
           <p:cNvSpPr txBox="1"/>
           <p:nvPr/>
         </p:nvSpPr>
         <p:spPr>
           <a:xfrm>
-            <a:off x="411480" y="2844927"/>
+            <a:off x="411480" y="5487924"/>
             <a:ext cx="11368735" cy="274320"/>
           </a:xfrm>
           <a:prstGeom prst="rect">
@@ -3975,52 +3830,20 @@
                 </a:solidFill>
                 <a:latin typeface="Arial"/>
               </a:rPr>
-              <a:t>•  What gain means here: these gains are after the flat-DM calibration, so 0.80 means a 10 nm change reads 8.0 nm — a 20% error the calibration did not remove.  The floor is a second error on top: 0.3 nm spread over the 47 sites' neighbours.  A single actuator changed alone on the same surface reads 0.98 (slide 8); the 47-site deficit is the crosstalk of many simultaneous changes.</a:t>
-            </a:r>
-          </a:p>
-          <a:p>
-            <a:pPr>
-              <a:spcAft>
-                <a:spcPts val="600"/>
-              </a:spcAft>
-            </a:pPr>
-            <a:r>
-              <a:rPr sz="1500" b="0">
-                <a:solidFill>
-                  <a:srgbClr val="282828"/>
-                </a:solidFill>
-                <a:latin typeface="Arial"/>
-              </a:rPr>
-              <a:t>•  Can calibration absorb it?  Measured: no.  Calibrating on the working surface itself instead of the flat DM gave 0.74 against 0.79 for the one-frame reading (development sampling).  The deficit is in the readings on a working surface, not in the calibration; it is not pixels crossing the sign fold either (3 pixels move under a single change; 946 under a dense random one).  The next place to look is the actuator fit on a working surface.</a:t>
-            </a:r>
-          </a:p>
-          <a:p>
-            <a:pPr>
-              <a:spcAft>
-                <a:spcPts val="600"/>
-              </a:spcAft>
-            </a:pPr>
-            <a:r>
-              <a:rPr sz="1500" b="0">
-                <a:solidFill>
-                  <a:srgbClr val="282828"/>
-                </a:solidFill>
-                <a:latin typeface="Arial"/>
-              </a:rPr>
-              <a:t>•  The failure at 50–60 nm is not a gain to calibrate: the floor jumps to 1–3 nm because some of the 47 sites fall past the sign fold.  The earlier "holds to 60 nm" was one actuator at one site.  Past 120 nm rms every reading aliases.</a:t>
-            </a:r>
-          </a:p>
-        </p:txBody>
-      </p:sp>
-      <p:sp>
-        <p:nvSpPr>
-          <p:cNvPr id="6" name="TextBox 5"/>
+              <a:t>•  Why the surface matters: every reading's differential map on the 30 nm surface differs 30 to 60% from the same change read on the flat — the sensor's local sensitivity depends on the local phase.  A matrix measured on the working surface carries it; the readings without a sign ambiguity (stepped, linear) then read changes almost exactly.  The exact one-frame reading does not benefit: its surface error is the sign fold, which moves with the change.</a:t>
+            </a:r>
+          </a:p>
+        </p:txBody>
+      </p:sp>
+      <p:sp>
+        <p:nvSpPr>
+          <p:cNvPr id="7" name="TextBox 6"/>
           <p:cNvSpPr txBox="1"/>
           <p:nvPr/>
         </p:nvSpPr>
         <p:spPr>
           <a:xfrm>
-            <a:off x="411480" y="5778627"/>
+            <a:off x="411480" y="6655308"/>
             <a:ext cx="11368735" cy="274320"/>
           </a:xfrm>
           <a:prstGeom prst="rect">
@@ -4046,7 +3869,7 @@
                 </a:solidFill>
                 <a:latin typeface="Arial"/>
               </a:rPr>
-              <a:t>Floor here = spread of the unchanged actuators under 47 simultaneous 10 nm changes (their crosstalk), larger than the single-site floor on slide 8.  Fully sampled setup; records: runs/m2048_lat (rows), runs/cal_base and fold_diag (calibration on the surface, fold crossings).</a:t>
+              <a:t>Alternating ± pokes: neutral to slightly worse in the model (0.987, 11 pm vs 0.994, 4 pm); kept as a bench option (drift cancels between sets).  Records: runs/mat385, matbase385, mapdiag.</a:t>
             </a:r>
           </a:p>
         </p:txBody>
@@ -4103,7 +3926,7 @@
                 </a:solidFill>
                 <a:latin typeface="Arial"/>
               </a:rPr>
-              <a:t>Colour is no longer a lever</a:t>
+              <a:t>How large a working surface each reading can handle</a:t>
             </a:r>
           </a:p>
           <a:p>
@@ -4119,7 +3942,7 @@
                 </a:solidFill>
                 <a:latin typeface="Arial"/>
               </a:rPr>
-              <a:t>With the sensor's null gone, five colours raise the combined response by 3% instead of 3×, and do nothing for the measurement rows</a:t>
+              <a:t>With the matrix measured at 30 nm, 47 changes at once read at 1.08 to 0.93 up to 50 nm rms (stepped) and 1.03 to 0.83 (linear); the calibration ages slowly</a:t>
             </a:r>
           </a:p>
         </p:txBody>
@@ -4168,30 +3991,707 @@
           </a:p>
         </p:txBody>
       </p:sp>
-      <p:pic>
-        <p:nvPicPr>
-          <p:cNvPr id="4" name="Picture 3" descr="crop_zwfs_rec193full_color_L.png"/>
-          <p:cNvPicPr>
-            <a:picLocks noChangeAspect="1"/>
-          </p:cNvPicPr>
+      <p:graphicFrame>
+        <p:nvGraphicFramePr>
+          <p:cNvPr id="4" name="Table 3"/>
+          <p:cNvGraphicFramePr>
+            <a:graphicFrameLocks noGrp="1"/>
+          </p:cNvGraphicFramePr>
           <p:nvPr/>
-        </p:nvPicPr>
-        <p:blipFill>
-          <a:blip r:embed="rId2"/>
-          <a:stretch>
-            <a:fillRect/>
-          </a:stretch>
-        </p:blipFill>
-        <p:spPr>
-          <a:xfrm>
-            <a:off x="2014629" y="1298448"/>
-            <a:ext cx="2600140" cy="2549652"/>
-          </a:xfrm>
-          <a:prstGeom prst="rect">
-            <a:avLst/>
-          </a:prstGeom>
-        </p:spPr>
-      </p:pic>
+        </p:nvGraphicFramePr>
+        <p:xfrm>
+          <a:off x="411480" y="1298448"/>
+          <a:ext cx="11368733" cy="2811780"/>
+        </p:xfrm>
+        <a:graphic>
+          <a:graphicData uri="http://schemas.openxmlformats.org/drawingml/2006/table">
+            <a:tbl>
+              <a:tblPr firstRow="1" bandRow="1">
+                <a:tableStyleId>{5C22544A-7EE6-4342-B048-85BDC9FD1C3A}</a:tableStyleId>
+              </a:tblPr>
+              <a:tblGrid>
+                <a:gridCol w="5005103"/>
+                <a:gridCol w="1644534"/>
+                <a:gridCol w="1573032"/>
+                <a:gridCol w="1573032"/>
+                <a:gridCol w="1573032"/>
+              </a:tblGrid>
+              <a:tr h="468630">
+                <a:tc>
+                  <a:txBody>
+                    <a:bodyPr wrap="square"/>
+                    <a:lstStyle/>
+                    <a:p>
+                      <a:r>
+                        <a:rPr sz="1100" b="1">
+                          <a:solidFill>
+                            <a:srgbClr val="FFFFFF"/>
+                          </a:solidFill>
+                          <a:latin typeface="Arial"/>
+                        </a:rPr>
+                        <a:t>10 nm changes on 47 actuators, 96×96; gain, read value of 10 nm, floor</a:t>
+                      </a:r>
+                    </a:p>
+                  </a:txBody>
+                  <a:tcPr marL="54864" marR="54864" marT="18288" marB="18288">
+                    <a:solidFill>
+                      <a:srgbClr val="1F4E79"/>
+                    </a:solidFill>
+                  </a:tcPr>
+                </a:tc>
+                <a:tc>
+                  <a:txBody>
+                    <a:bodyPr wrap="square"/>
+                    <a:lstStyle/>
+                    <a:p>
+                      <a:r>
+                        <a:rPr sz="1100" b="1">
+                          <a:solidFill>
+                            <a:srgbClr val="FFFFFF"/>
+                          </a:solidFill>
+                          <a:latin typeface="Arial"/>
+                        </a:rPr>
+                        <a:t>30 nm surface</a:t>
+                      </a:r>
+                    </a:p>
+                  </a:txBody>
+                  <a:tcPr marL="54864" marR="54864" marT="18288" marB="18288">
+                    <a:solidFill>
+                      <a:srgbClr val="1F4E79"/>
+                    </a:solidFill>
+                  </a:tcPr>
+                </a:tc>
+                <a:tc>
+                  <a:txBody>
+                    <a:bodyPr wrap="square"/>
+                    <a:lstStyle/>
+                    <a:p>
+                      <a:r>
+                        <a:rPr sz="1100" b="1">
+                          <a:solidFill>
+                            <a:srgbClr val="FFFFFF"/>
+                          </a:solidFill>
+                          <a:latin typeface="Arial"/>
+                        </a:rPr>
+                        <a:t>40 nm</a:t>
+                      </a:r>
+                    </a:p>
+                  </a:txBody>
+                  <a:tcPr marL="54864" marR="54864" marT="18288" marB="18288">
+                    <a:solidFill>
+                      <a:srgbClr val="1F4E79"/>
+                    </a:solidFill>
+                  </a:tcPr>
+                </a:tc>
+                <a:tc>
+                  <a:txBody>
+                    <a:bodyPr wrap="square"/>
+                    <a:lstStyle/>
+                    <a:p>
+                      <a:r>
+                        <a:rPr sz="1100" b="1">
+                          <a:solidFill>
+                            <a:srgbClr val="FFFFFF"/>
+                          </a:solidFill>
+                          <a:latin typeface="Arial"/>
+                        </a:rPr>
+                        <a:t>50 nm</a:t>
+                      </a:r>
+                    </a:p>
+                  </a:txBody>
+                  <a:tcPr marL="54864" marR="54864" marT="18288" marB="18288">
+                    <a:solidFill>
+                      <a:srgbClr val="1F4E79"/>
+                    </a:solidFill>
+                  </a:tcPr>
+                </a:tc>
+                <a:tc>
+                  <a:txBody>
+                    <a:bodyPr wrap="square"/>
+                    <a:lstStyle/>
+                    <a:p>
+                      <a:r>
+                        <a:rPr sz="1100" b="1">
+                          <a:solidFill>
+                            <a:srgbClr val="FFFFFF"/>
+                          </a:solidFill>
+                          <a:latin typeface="Arial"/>
+                        </a:rPr>
+                        <a:t>60 nm</a:t>
+                      </a:r>
+                    </a:p>
+                  </a:txBody>
+                  <a:tcPr marL="54864" marR="54864" marT="18288" marB="18288">
+                    <a:solidFill>
+                      <a:srgbClr val="1F4E79"/>
+                    </a:solidFill>
+                  </a:tcPr>
+                </a:tc>
+              </a:tr>
+              <a:tr h="468630">
+                <a:tc>
+                  <a:txBody>
+                    <a:bodyPr wrap="square"/>
+                    <a:lstStyle/>
+                    <a:p>
+                      <a:r>
+                        <a:rPr sz="1100" b="0">
+                          <a:solidFill>
+                            <a:srgbClr val="282828"/>
+                          </a:solidFill>
+                          <a:latin typeface="Arial"/>
+                        </a:rPr>
+                        <a:t>matrix on the 30 nm surface — S (four frames)</a:t>
+                      </a:r>
+                    </a:p>
+                  </a:txBody>
+                  <a:tcPr marL="54864" marR="54864" marT="18288" marB="18288">
+                    <a:solidFill>
+                      <a:srgbClr val="FFFFFF"/>
+                    </a:solidFill>
+                  </a:tcPr>
+                </a:tc>
+                <a:tc>
+                  <a:txBody>
+                    <a:bodyPr wrap="square"/>
+                    <a:lstStyle/>
+                    <a:p>
+                      <a:r>
+                        <a:rPr sz="1100" b="0">
+                          <a:solidFill>
+                            <a:srgbClr val="282828"/>
+                          </a:solidFill>
+                          <a:latin typeface="Arial"/>
+                        </a:rPr>
+                        <a:t>1.08 → 10.8 nm, 0.25 nm</a:t>
+                      </a:r>
+                    </a:p>
+                  </a:txBody>
+                  <a:tcPr marL="54864" marR="54864" marT="18288" marB="18288">
+                    <a:solidFill>
+                      <a:srgbClr val="FFFFFF"/>
+                    </a:solidFill>
+                  </a:tcPr>
+                </a:tc>
+                <a:tc>
+                  <a:txBody>
+                    <a:bodyPr wrap="square"/>
+                    <a:lstStyle/>
+                    <a:p>
+                      <a:r>
+                        <a:rPr sz="1100" b="0">
+                          <a:solidFill>
+                            <a:srgbClr val="282828"/>
+                          </a:solidFill>
+                          <a:latin typeface="Arial"/>
+                        </a:rPr>
+                        <a:t>0.98 → 9.8 nm, 0.24 nm</a:t>
+                      </a:r>
+                    </a:p>
+                  </a:txBody>
+                  <a:tcPr marL="54864" marR="54864" marT="18288" marB="18288">
+                    <a:solidFill>
+                      <a:srgbClr val="FFFFFF"/>
+                    </a:solidFill>
+                  </a:tcPr>
+                </a:tc>
+                <a:tc>
+                  <a:txBody>
+                    <a:bodyPr wrap="square"/>
+                    <a:lstStyle/>
+                    <a:p>
+                      <a:r>
+                        <a:rPr sz="1100" b="0">
+                          <a:solidFill>
+                            <a:srgbClr val="282828"/>
+                          </a:solidFill>
+                          <a:latin typeface="Arial"/>
+                        </a:rPr>
+                        <a:t>0.93 → 9.3 nm, 0.40 nm</a:t>
+                      </a:r>
+                    </a:p>
+                  </a:txBody>
+                  <a:tcPr marL="54864" marR="54864" marT="18288" marB="18288">
+                    <a:solidFill>
+                      <a:srgbClr val="FFFFFF"/>
+                    </a:solidFill>
+                  </a:tcPr>
+                </a:tc>
+                <a:tc>
+                  <a:txBody>
+                    <a:bodyPr wrap="square"/>
+                    <a:lstStyle/>
+                    <a:p>
+                      <a:r>
+                        <a:rPr sz="1100" b="0">
+                          <a:solidFill>
+                            <a:srgbClr val="282828"/>
+                          </a:solidFill>
+                          <a:latin typeface="Arial"/>
+                        </a:rPr>
+                        <a:t>0.71 → 7.1 nm, 0.59 nm</a:t>
+                      </a:r>
+                    </a:p>
+                  </a:txBody>
+                  <a:tcPr marL="54864" marR="54864" marT="18288" marB="18288">
+                    <a:solidFill>
+                      <a:srgbClr val="FFFFFF"/>
+                    </a:solidFill>
+                  </a:tcPr>
+                </a:tc>
+              </a:tr>
+              <a:tr h="468630">
+                <a:tc>
+                  <a:txBody>
+                    <a:bodyPr wrap="square"/>
+                    <a:lstStyle/>
+                    <a:p>
+                      <a:r>
+                        <a:rPr sz="1100" b="0">
+                          <a:solidFill>
+                            <a:srgbClr val="282828"/>
+                          </a:solidFill>
+                          <a:latin typeface="Arial"/>
+                        </a:rPr>
+                        <a:t>matrix on the 30 nm surface — L (one frame)</a:t>
+                      </a:r>
+                    </a:p>
+                  </a:txBody>
+                  <a:tcPr marL="54864" marR="54864" marT="18288" marB="18288">
+                    <a:solidFill>
+                      <a:srgbClr val="ECF1F6"/>
+                    </a:solidFill>
+                  </a:tcPr>
+                </a:tc>
+                <a:tc>
+                  <a:txBody>
+                    <a:bodyPr wrap="square"/>
+                    <a:lstStyle/>
+                    <a:p>
+                      <a:r>
+                        <a:rPr sz="1100" b="0">
+                          <a:solidFill>
+                            <a:srgbClr val="282828"/>
+                          </a:solidFill>
+                          <a:latin typeface="Arial"/>
+                        </a:rPr>
+                        <a:t>1.03 → 10.3 nm, 0.28 nm</a:t>
+                      </a:r>
+                    </a:p>
+                  </a:txBody>
+                  <a:tcPr marL="54864" marR="54864" marT="18288" marB="18288">
+                    <a:solidFill>
+                      <a:srgbClr val="ECF1F6"/>
+                    </a:solidFill>
+                  </a:tcPr>
+                </a:tc>
+                <a:tc>
+                  <a:txBody>
+                    <a:bodyPr wrap="square"/>
+                    <a:lstStyle/>
+                    <a:p>
+                      <a:r>
+                        <a:rPr sz="1100" b="0">
+                          <a:solidFill>
+                            <a:srgbClr val="282828"/>
+                          </a:solidFill>
+                          <a:latin typeface="Arial"/>
+                        </a:rPr>
+                        <a:t>0.95 → 9.5 nm, 0.35 nm</a:t>
+                      </a:r>
+                    </a:p>
+                  </a:txBody>
+                  <a:tcPr marL="54864" marR="54864" marT="18288" marB="18288">
+                    <a:solidFill>
+                      <a:srgbClr val="ECF1F6"/>
+                    </a:solidFill>
+                  </a:tcPr>
+                </a:tc>
+                <a:tc>
+                  <a:txBody>
+                    <a:bodyPr wrap="square"/>
+                    <a:lstStyle/>
+                    <a:p>
+                      <a:r>
+                        <a:rPr sz="1100" b="0">
+                          <a:solidFill>
+                            <a:srgbClr val="282828"/>
+                          </a:solidFill>
+                          <a:latin typeface="Arial"/>
+                        </a:rPr>
+                        <a:t>0.83 → 8.3 nm, 0.50 nm</a:t>
+                      </a:r>
+                    </a:p>
+                  </a:txBody>
+                  <a:tcPr marL="54864" marR="54864" marT="18288" marB="18288">
+                    <a:solidFill>
+                      <a:srgbClr val="ECF1F6"/>
+                    </a:solidFill>
+                  </a:tcPr>
+                </a:tc>
+                <a:tc>
+                  <a:txBody>
+                    <a:bodyPr wrap="square"/>
+                    <a:lstStyle/>
+                    <a:p>
+                      <a:r>
+                        <a:rPr sz="1100" b="0">
+                          <a:solidFill>
+                            <a:srgbClr val="282828"/>
+                          </a:solidFill>
+                          <a:latin typeface="Arial"/>
+                        </a:rPr>
+                        <a:t>0.67 → 6.7 nm, 0.61 nm</a:t>
+                      </a:r>
+                    </a:p>
+                  </a:txBody>
+                  <a:tcPr marL="54864" marR="54864" marT="18288" marB="18288">
+                    <a:solidFill>
+                      <a:srgbClr val="ECF1F6"/>
+                    </a:solidFill>
+                  </a:tcPr>
+                </a:tc>
+              </a:tr>
+              <a:tr h="468630">
+                <a:tc>
+                  <a:txBody>
+                    <a:bodyPr wrap="square"/>
+                    <a:lstStyle/>
+                    <a:p>
+                      <a:r>
+                        <a:rPr sz="1100" b="0">
+                          <a:solidFill>
+                            <a:srgbClr val="282828"/>
+                          </a:solidFill>
+                          <a:latin typeface="Arial"/>
+                        </a:rPr>
+                        <a:t>matrix on the 30 nm surface — I+ (one frame)</a:t>
+                      </a:r>
+                    </a:p>
+                  </a:txBody>
+                  <a:tcPr marL="54864" marR="54864" marT="18288" marB="18288">
+                    <a:solidFill>
+                      <a:srgbClr val="FFFFFF"/>
+                    </a:solidFill>
+                  </a:tcPr>
+                </a:tc>
+                <a:tc>
+                  <a:txBody>
+                    <a:bodyPr wrap="square"/>
+                    <a:lstStyle/>
+                    <a:p>
+                      <a:r>
+                        <a:rPr sz="1100" b="0">
+                          <a:solidFill>
+                            <a:srgbClr val="282828"/>
+                          </a:solidFill>
+                          <a:latin typeface="Arial"/>
+                        </a:rPr>
+                        <a:t>1.01 → 10.1 nm, 0.20 nm</a:t>
+                      </a:r>
+                    </a:p>
+                  </a:txBody>
+                  <a:tcPr marL="54864" marR="54864" marT="18288" marB="18288">
+                    <a:solidFill>
+                      <a:srgbClr val="FFFFFF"/>
+                    </a:solidFill>
+                  </a:tcPr>
+                </a:tc>
+                <a:tc>
+                  <a:txBody>
+                    <a:bodyPr wrap="square"/>
+                    <a:lstStyle/>
+                    <a:p>
+                      <a:r>
+                        <a:rPr sz="1100" b="0">
+                          <a:solidFill>
+                            <a:srgbClr val="282828"/>
+                          </a:solidFill>
+                          <a:latin typeface="Arial"/>
+                        </a:rPr>
+                        <a:t>0.91 → 9.1 nm, 0.35 nm</a:t>
+                      </a:r>
+                    </a:p>
+                  </a:txBody>
+                  <a:tcPr marL="54864" marR="54864" marT="18288" marB="18288">
+                    <a:solidFill>
+                      <a:srgbClr val="FFFFFF"/>
+                    </a:solidFill>
+                  </a:tcPr>
+                </a:tc>
+                <a:tc>
+                  <a:txBody>
+                    <a:bodyPr wrap="square"/>
+                    <a:lstStyle/>
+                    <a:p>
+                      <a:r>
+                        <a:rPr sz="1100" b="0">
+                          <a:solidFill>
+                            <a:srgbClr val="282828"/>
+                          </a:solidFill>
+                          <a:latin typeface="Arial"/>
+                        </a:rPr>
+                        <a:t>0.69 → 6.9 nm, 1.9 nm</a:t>
+                      </a:r>
+                    </a:p>
+                  </a:txBody>
+                  <a:tcPr marL="54864" marR="54864" marT="18288" marB="18288">
+                    <a:solidFill>
+                      <a:srgbClr val="FFFFFF"/>
+                    </a:solidFill>
+                  </a:tcPr>
+                </a:tc>
+                <a:tc>
+                  <a:txBody>
+                    <a:bodyPr wrap="square"/>
+                    <a:lstStyle/>
+                    <a:p>
+                      <a:r>
+                        <a:rPr sz="1100" b="0">
+                          <a:solidFill>
+                            <a:srgbClr val="282828"/>
+                          </a:solidFill>
+                          <a:latin typeface="Arial"/>
+                        </a:rPr>
+                        <a:t>0.57 → 5.7 nm, 1.2 nm</a:t>
+                      </a:r>
+                    </a:p>
+                  </a:txBody>
+                  <a:tcPr marL="54864" marR="54864" marT="18288" marB="18288">
+                    <a:solidFill>
+                      <a:srgbClr val="FFFFFF"/>
+                    </a:solidFill>
+                  </a:tcPr>
+                </a:tc>
+              </a:tr>
+              <a:tr h="468630">
+                <a:tc>
+                  <a:txBody>
+                    <a:bodyPr wrap="square"/>
+                    <a:lstStyle/>
+                    <a:p>
+                      <a:r>
+                        <a:rPr sz="1100" b="0">
+                          <a:solidFill>
+                            <a:srgbClr val="282828"/>
+                          </a:solidFill>
+                          <a:latin typeface="Arial"/>
+                        </a:rPr>
+                        <a:t>matrix on the flat — I+</a:t>
+                      </a:r>
+                    </a:p>
+                  </a:txBody>
+                  <a:tcPr marL="54864" marR="54864" marT="18288" marB="18288">
+                    <a:solidFill>
+                      <a:srgbClr val="ECF1F6"/>
+                    </a:solidFill>
+                  </a:tcPr>
+                </a:tc>
+                <a:tc>
+                  <a:txBody>
+                    <a:bodyPr wrap="square"/>
+                    <a:lstStyle/>
+                    <a:p>
+                      <a:r>
+                        <a:rPr sz="1100" b="0">
+                          <a:solidFill>
+                            <a:srgbClr val="282828"/>
+                          </a:solidFill>
+                          <a:latin typeface="Arial"/>
+                        </a:rPr>
+                        <a:t>0.81 → 8.1 nm, 0.21 nm</a:t>
+                      </a:r>
+                    </a:p>
+                  </a:txBody>
+                  <a:tcPr marL="54864" marR="54864" marT="18288" marB="18288">
+                    <a:solidFill>
+                      <a:srgbClr val="ECF1F6"/>
+                    </a:solidFill>
+                  </a:tcPr>
+                </a:tc>
+                <a:tc>
+                  <a:txBody>
+                    <a:bodyPr wrap="square"/>
+                    <a:lstStyle/>
+                    <a:p>
+                      <a:r>
+                        <a:rPr sz="1100" b="0">
+                          <a:solidFill>
+                            <a:srgbClr val="282828"/>
+                          </a:solidFill>
+                          <a:latin typeface="Arial"/>
+                        </a:rPr>
+                        <a:t>0.83 → 8.3 nm, 0.16 nm</a:t>
+                      </a:r>
+                    </a:p>
+                  </a:txBody>
+                  <a:tcPr marL="54864" marR="54864" marT="18288" marB="18288">
+                    <a:solidFill>
+                      <a:srgbClr val="ECF1F6"/>
+                    </a:solidFill>
+                  </a:tcPr>
+                </a:tc>
+                <a:tc>
+                  <a:txBody>
+                    <a:bodyPr wrap="square"/>
+                    <a:lstStyle/>
+                    <a:p>
+                      <a:r>
+                        <a:rPr sz="1100" b="0">
+                          <a:solidFill>
+                            <a:srgbClr val="282828"/>
+                          </a:solidFill>
+                          <a:latin typeface="Arial"/>
+                        </a:rPr>
+                        <a:t>0.65 → 6.5 nm, 1.8 nm</a:t>
+                      </a:r>
+                    </a:p>
+                  </a:txBody>
+                  <a:tcPr marL="54864" marR="54864" marT="18288" marB="18288">
+                    <a:solidFill>
+                      <a:srgbClr val="ECF1F6"/>
+                    </a:solidFill>
+                  </a:tcPr>
+                </a:tc>
+                <a:tc>
+                  <a:txBody>
+                    <a:bodyPr wrap="square"/>
+                    <a:lstStyle/>
+                    <a:p>
+                      <a:r>
+                        <a:rPr sz="1100" b="0">
+                          <a:solidFill>
+                            <a:srgbClr val="282828"/>
+                          </a:solidFill>
+                          <a:latin typeface="Arial"/>
+                        </a:rPr>
+                        <a:t>0.58 → 5.8 nm, 1.2 nm</a:t>
+                      </a:r>
+                    </a:p>
+                  </a:txBody>
+                  <a:tcPr marL="54864" marR="54864" marT="18288" marB="18288">
+                    <a:solidFill>
+                      <a:srgbClr val="ECF1F6"/>
+                    </a:solidFill>
+                  </a:tcPr>
+                </a:tc>
+              </a:tr>
+              <a:tr h="468630">
+                <a:tc>
+                  <a:txBody>
+                    <a:bodyPr wrap="square"/>
+                    <a:lstStyle/>
+                    <a:p>
+                      <a:r>
+                        <a:rPr sz="1100" b="0">
+                          <a:solidFill>
+                            <a:srgbClr val="282828"/>
+                          </a:solidFill>
+                          <a:latin typeface="Arial"/>
+                        </a:rPr>
+                        <a:t>matrix on the flat — S</a:t>
+                      </a:r>
+                    </a:p>
+                  </a:txBody>
+                  <a:tcPr marL="54864" marR="54864" marT="18288" marB="18288">
+                    <a:solidFill>
+                      <a:srgbClr val="FFFFFF"/>
+                    </a:solidFill>
+                  </a:tcPr>
+                </a:tc>
+                <a:tc>
+                  <a:txBody>
+                    <a:bodyPr wrap="square"/>
+                    <a:lstStyle/>
+                    <a:p>
+                      <a:r>
+                        <a:rPr sz="1100" b="0">
+                          <a:solidFill>
+                            <a:srgbClr val="282828"/>
+                          </a:solidFill>
+                          <a:latin typeface="Arial"/>
+                        </a:rPr>
+                        <a:t>0.91 → 9.1 nm, 0.23 nm</a:t>
+                      </a:r>
+                    </a:p>
+                  </a:txBody>
+                  <a:tcPr marL="54864" marR="54864" marT="18288" marB="18288">
+                    <a:solidFill>
+                      <a:srgbClr val="FFFFFF"/>
+                    </a:solidFill>
+                  </a:tcPr>
+                </a:tc>
+                <a:tc>
+                  <a:txBody>
+                    <a:bodyPr wrap="square"/>
+                    <a:lstStyle/>
+                    <a:p>
+                      <a:r>
+                        <a:rPr sz="1100" b="0">
+                          <a:solidFill>
+                            <a:srgbClr val="282828"/>
+                          </a:solidFill>
+                          <a:latin typeface="Arial"/>
+                        </a:rPr>
+                        <a:t>0.83 → 8.3 nm, 0.23 nm</a:t>
+                      </a:r>
+                    </a:p>
+                  </a:txBody>
+                  <a:tcPr marL="54864" marR="54864" marT="18288" marB="18288">
+                    <a:solidFill>
+                      <a:srgbClr val="FFFFFF"/>
+                    </a:solidFill>
+                  </a:tcPr>
+                </a:tc>
+                <a:tc>
+                  <a:txBody>
+                    <a:bodyPr wrap="square"/>
+                    <a:lstStyle/>
+                    <a:p>
+                      <a:r>
+                        <a:rPr sz="1100" b="0">
+                          <a:solidFill>
+                            <a:srgbClr val="282828"/>
+                          </a:solidFill>
+                          <a:latin typeface="Arial"/>
+                        </a:rPr>
+                        <a:t>0.79 → 7.9 nm, 0.37 nm</a:t>
+                      </a:r>
+                    </a:p>
+                  </a:txBody>
+                  <a:tcPr marL="54864" marR="54864" marT="18288" marB="18288">
+                    <a:solidFill>
+                      <a:srgbClr val="FFFFFF"/>
+                    </a:solidFill>
+                  </a:tcPr>
+                </a:tc>
+                <a:tc>
+                  <a:txBody>
+                    <a:bodyPr wrap="square"/>
+                    <a:lstStyle/>
+                    <a:p>
+                      <a:r>
+                        <a:rPr sz="1100" b="0">
+                          <a:solidFill>
+                            <a:srgbClr val="282828"/>
+                          </a:solidFill>
+                          <a:latin typeface="Arial"/>
+                        </a:rPr>
+                        <a:t>0.59 → 5.9 nm, 0.55 nm</a:t>
+                      </a:r>
+                    </a:p>
+                  </a:txBody>
+                  <a:tcPr marL="54864" marR="54864" marT="18288" marB="18288">
+                    <a:solidFill>
+                      <a:srgbClr val="FFFFFF"/>
+                    </a:solidFill>
+                  </a:tcPr>
+                </a:tc>
+              </a:tr>
+            </a:tbl>
+          </a:graphicData>
+        </a:graphic>
+      </p:graphicFrame>
       <p:sp>
         <p:nvSpPr>
           <p:cNvPr id="5" name="TextBox 4"/>
@@ -4200,8 +4700,8 @@
         </p:nvSpPr>
         <p:spPr>
           <a:xfrm>
-            <a:off x="411480" y="3866387"/>
-            <a:ext cx="5806440" cy="559307"/>
+            <a:off x="411480" y="4256532"/>
+            <a:ext cx="11368735" cy="274320"/>
           </a:xfrm>
           <a:prstGeom prst="rect">
             <a:avLst/>
@@ -4214,19 +4714,51 @@
           </a:bodyPr>
           <a:lstStyle/>
           <a:p>
-            <a:pPr algn="ctr">
+            <a:pPr>
               <a:spcAft>
-                <a:spcPts val="0"/>
+                <a:spcPts val="600"/>
               </a:spcAft>
             </a:pPr>
             <a:r>
-              <a:rPr sz="1000" b="0">
-                <a:solidFill>
-                  <a:srgbClr val="6E6E6E"/>
+              <a:rPr sz="1500" b="0">
+                <a:solidFill>
+                  <a:srgbClr val="282828"/>
                 </a:solidFill>
                 <a:latin typeface="Arial"/>
               </a:rPr>
-              <a:t>Response by spatial frequency of the linear reading at five wavelengths on the corrected model: no null, only the dimple's own low-order dip, which moves with the spot's size in λ/D; the five-colour combination (orange) sits at 0.99 to 1.</a:t>
+              <a:t>•  What gain means here: gain is after calibration, so 0.93 means a 10 nm change reads 9.3 nm — a 7% error the calibration did not remove.  The floor is a second error on top: the spread over the 47 sites' unchanged neighbours (their crosstalk, 0.2 to 0.6 nm here).</a:t>
+            </a:r>
+          </a:p>
+          <a:p>
+            <a:pPr>
+              <a:spcAft>
+                <a:spcPts val="600"/>
+              </a:spcAft>
+            </a:pPr>
+            <a:r>
+              <a:rPr sz="1500" b="0">
+                <a:solidFill>
+                  <a:srgbClr val="282828"/>
+                </a:solidFill>
+                <a:latin typeface="Arial"/>
+              </a:rPr>
+              <a:t>•  Calibration on the working surface absorbs most of it for the readings without a sign ambiguity: the stepped reading goes from 0.91 to 1.08 at 30 nm and from 0.79 to 0.93 at 50 nm; the linear reading from unusable to 1.03.  A matrix measured at 30 nm is still within 7% at 50 nm rms, so a calibration follows the working surface slowly.  The one-frame exact reading is not helped: its surface error is the sign fold, which moves with the change (it fails at 50 nm, floor 1.9 nm, when some of the 47 sites fall past the fold).</a:t>
+            </a:r>
+          </a:p>
+          <a:p>
+            <a:pPr>
+              <a:spcAft>
+                <a:spcPts val="600"/>
+              </a:spcAft>
+            </a:pPr>
+            <a:r>
+              <a:rPr sz="1500" b="0">
+                <a:solidFill>
+                  <a:srgbClr val="282828"/>
+                </a:solidFill>
+                <a:latin typeface="Arial"/>
+              </a:rPr>
+              <a:t>•  Past 120 nm rms every reading aliases (the stepped retrieval itself wraps).</a:t>
             </a:r>
           </a:p>
         </p:txBody>
@@ -4239,8 +4771,8 @@
         </p:nvSpPr>
         <p:spPr>
           <a:xfrm>
-            <a:off x="6400800" y="1298448"/>
-            <a:ext cx="5394960" cy="274320"/>
+            <a:off x="411480" y="6942582"/>
+            <a:ext cx="11368735" cy="274320"/>
           </a:xfrm>
           <a:prstGeom prst="rect">
             <a:avLst/>
@@ -4259,84 +4791,13 @@
               </a:spcAft>
             </a:pPr>
             <a:r>
-              <a:rPr sz="1200" b="0">
-                <a:solidFill>
-                  <a:srgbClr val="282828"/>
+              <a:rPr sz="1050" b="0">
+                <a:solidFill>
+                  <a:srgbClr val="6E6E6E"/>
                 </a:solidFill>
                 <a:latin typeface="Arial"/>
               </a:rPr>
-              <a:t>•  What moved: the "blind band near 30 cycles across the pupil that shifts with wavelength" was the out-of-focus model's Talbot null.  On the corrected model each colour's response bottoms at 0.92 to 0.97 after the frequency correction, and the combination at 0.991.</a:t>
-            </a:r>
-          </a:p>
-          <a:p>
-            <a:pPr>
-              <a:spcAft>
-                <a:spcPts val="600"/>
-              </a:spcAft>
-            </a:pPr>
-            <a:r>
-              <a:rPr sz="1200" b="0">
-                <a:solidFill>
-                  <a:srgbClr val="282828"/>
-                </a:solidFill>
-                <a:latin typeface="Arial"/>
-              </a:rPr>
-              <a:t>•  On the measurement rows (30 nm surface, single 10 nm change): I+ at 632.8 nm SNR 269; five colours combined 183; best pair, 700 + 780 nm, 255.  The 47-site case: 32 → 32.  The linear reading gets worse when combined (84 → 34): at 480 nm the dimple delay is 2.1 rad and the small-phase reading turns negative on this surface; an equal-weight combination inherits that.</a:t>
-            </a:r>
-          </a:p>
-          <a:p>
-            <a:pPr>
-              <a:spcAft>
-                <a:spcPts val="600"/>
-              </a:spcAft>
-            </a:pPr>
-            <a:r>
-              <a:rPr sz="1200" b="0">
-                <a:solidFill>
-                  <a:srgbClr val="282828"/>
-                </a:solidFill>
-                <a:latin typeface="Arial"/>
-              </a:rPr>
-              <a:t>•  What stays with colour is range: 780 nm is the best single colour on nearly every row — less phase per nanometre of height, and a 1.6 λ/D dimple.  The interferometer is unchanged at every colour (its deck).</a:t>
-            </a:r>
-          </a:p>
-        </p:txBody>
-      </p:sp>
-      <p:sp>
-        <p:nvSpPr>
-          <p:cNvPr id="7" name="TextBox 6"/>
-          <p:cNvSpPr txBox="1"/>
-          <p:nvPr/>
-        </p:nvSpPr>
-        <p:spPr>
-          <a:xfrm>
-            <a:off x="6400800" y="4331208"/>
-            <a:ext cx="5394960" cy="274320"/>
-          </a:xfrm>
-          <a:prstGeom prst="rect">
-            <a:avLst/>
-          </a:prstGeom>
-          <a:noFill/>
-        </p:spPr>
-        <p:txBody>
-          <a:bodyPr wrap="square">
-            <a:spAutoFit/>
-          </a:bodyPr>
-          <a:lstStyle/>
-          <a:p>
-            <a:pPr>
-              <a:spcAft>
-                <a:spcPts val="600"/>
-              </a:spcAft>
-            </a:pPr>
-            <a:r>
-              <a:rPr sz="1050" b="0">
-                <a:solidFill>
-                  <a:srgbClr val="6E6E6E"/>
-                </a:solidFill>
-                <a:latin typeface="Arial"/>
-              </a:rPr>
-              <a:t>632.8 / 480 / 532 / 700 / 780 nm through one physical mask, every calibration redone per colour; development sampling (193 rays, 1024 grid); runs/rec193full.</a:t>
+              <a:t>Floor here = spread of the unchanged actuators under 47 simultaneous 10 nm changes (their crosstalk), larger than the single-site floors on slide 9.  385 rays; records: runs/matbase385 (surface matrix), runs/mat385 (flat matrix).</a:t>
             </a:r>
           </a:p>
         </p:txBody>
@@ -4393,7 +4854,7 @@
                 </a:solidFill>
                 <a:latin typeface="Arial"/>
               </a:rPr>
-              <a:t>Photons: 10¹⁴ per state reaches 1 pm</a:t>
+              <a:t>Colour is no longer a lever</a:t>
             </a:r>
           </a:p>
           <a:p>
@@ -4409,7 +4870,7 @@
                 </a:solidFill>
                 <a:latin typeface="Arial"/>
               </a:rPr>
-              <a:t>Every reading needs about the same light, 25× less than the out-of-focus model said; the sign map's own noise costs 5%</a:t>
+              <a:t>With the sensor's null gone, five colours raise the combined response by 3% instead of 3×, and do nothing for the measurement rows</a:t>
             </a:r>
           </a:p>
         </p:txBody>
@@ -4460,7 +4921,7 @@
       </p:sp>
       <p:pic>
         <p:nvPicPr>
-          <p:cNvPr id="4" name="Picture 3" descr="zwfs_rec193full_noise.png"/>
+          <p:cNvPr id="4" name="Picture 3" descr="crop_zwfs_rec193full_color_L.png"/>
           <p:cNvPicPr>
             <a:picLocks noChangeAspect="1"/>
           </p:cNvPicPr>
@@ -4474,8 +4935,8 @@
         </p:blipFill>
         <p:spPr>
           <a:xfrm>
-            <a:off x="1600240" y="1298448"/>
-            <a:ext cx="3428919" cy="2714752"/>
+            <a:off x="2014629" y="1298448"/>
+            <a:ext cx="2600140" cy="2549652"/>
           </a:xfrm>
           <a:prstGeom prst="rect">
             <a:avLst/>
@@ -4490,8 +4951,8 @@
         </p:nvSpPr>
         <p:spPr>
           <a:xfrm>
-            <a:off x="411480" y="4031488"/>
-            <a:ext cx="5806440" cy="394208"/>
+            <a:off x="411480" y="3866387"/>
+            <a:ext cx="5806440" cy="559307"/>
           </a:xfrm>
           <a:prstGeom prst="rect">
             <a:avLst/>
@@ -4516,368 +4977,20 @@
                 </a:solidFill>
                 <a:latin typeface="Arial"/>
               </a:rPr>
-              <a:t>Noise on the single-actuator estimate against photons per state, per reading; the dotted line is the 1 pm target.</a:t>
-            </a:r>
-          </a:p>
-        </p:txBody>
-      </p:sp>
-      <p:graphicFrame>
-        <p:nvGraphicFramePr>
-          <p:cNvPr id="6" name="Table 5"/>
-          <p:cNvGraphicFramePr>
-            <a:graphicFrameLocks noGrp="1"/>
-          </p:cNvGraphicFramePr>
-          <p:nvPr/>
-        </p:nvGraphicFramePr>
-        <p:xfrm>
-          <a:off x="6400800" y="1298448"/>
-          <a:ext cx="5394959" cy="1840230"/>
-        </p:xfrm>
-        <a:graphic>
-          <a:graphicData uri="http://schemas.openxmlformats.org/drawingml/2006/table">
-            <a:tbl>
-              <a:tblPr firstRow="1" bandRow="1">
-                <a:tableStyleId>{5C22544A-7EE6-4342-B048-85BDC9FD1C3A}</a:tableStyleId>
-              </a:tblPr>
-              <a:tblGrid>
-                <a:gridCol w="2131342"/>
-                <a:gridCol w="3263617"/>
-              </a:tblGrid>
-              <a:tr h="262890">
-                <a:tc>
-                  <a:txBody>
-                    <a:bodyPr wrap="square"/>
-                    <a:lstStyle/>
-                    <a:p>
-                      <a:r>
-                        <a:rPr sz="1000" b="1">
-                          <a:solidFill>
-                            <a:srgbClr val="FFFFFF"/>
-                          </a:solidFill>
-                          <a:latin typeface="Arial"/>
-                        </a:rPr>
-                        <a:t>reading</a:t>
-                      </a:r>
-                    </a:p>
-                  </a:txBody>
-                  <a:tcPr marL="54864" marR="54864" marT="18288" marB="18288">
-                    <a:solidFill>
-                      <a:srgbClr val="1F4E79"/>
-                    </a:solidFill>
-                  </a:tcPr>
-                </a:tc>
-                <a:tc>
-                  <a:txBody>
-                    <a:bodyPr wrap="square"/>
-                    <a:lstStyle/>
-                    <a:p>
-                      <a:r>
-                        <a:rPr sz="1000" b="1">
-                          <a:solidFill>
-                            <a:srgbClr val="FFFFFF"/>
-                          </a:solidFill>
-                          <a:latin typeface="Arial"/>
-                        </a:rPr>
-                        <a:t>photons per state for 1 pm</a:t>
-                      </a:r>
-                    </a:p>
-                  </a:txBody>
-                  <a:tcPr marL="54864" marR="54864" marT="18288" marB="18288">
-                    <a:solidFill>
-                      <a:srgbClr val="1F4E79"/>
-                    </a:solidFill>
-                  </a:tcPr>
-                </a:tc>
-              </a:tr>
-              <a:tr h="262890">
-                <a:tc>
-                  <a:txBody>
-                    <a:bodyPr wrap="square"/>
-                    <a:lstStyle/>
-                    <a:p>
-                      <a:r>
-                        <a:rPr sz="1000" b="0">
-                          <a:solidFill>
-                            <a:srgbClr val="282828"/>
-                          </a:solidFill>
-                          <a:latin typeface="Arial"/>
-                        </a:rPr>
-                        <a:t>linear (L)</a:t>
-                      </a:r>
-                    </a:p>
-                  </a:txBody>
-                  <a:tcPr marL="54864" marR="54864" marT="18288" marB="18288">
-                    <a:solidFill>
-                      <a:srgbClr val="FFFFFF"/>
-                    </a:solidFill>
-                  </a:tcPr>
-                </a:tc>
-                <a:tc>
-                  <a:txBody>
-                    <a:bodyPr wrap="square"/>
-                    <a:lstStyle/>
-                    <a:p>
-                      <a:r>
-                        <a:rPr sz="1000" b="0">
-                          <a:solidFill>
-                            <a:srgbClr val="282828"/>
-                          </a:solidFill>
-                          <a:latin typeface="Arial"/>
-                        </a:rPr>
-                        <a:t>5.4×10¹³</a:t>
-                      </a:r>
-                    </a:p>
-                  </a:txBody>
-                  <a:tcPr marL="54864" marR="54864" marT="18288" marB="18288">
-                    <a:solidFill>
-                      <a:srgbClr val="FFFFFF"/>
-                    </a:solidFill>
-                  </a:tcPr>
-                </a:tc>
-              </a:tr>
-              <a:tr h="262890">
-                <a:tc>
-                  <a:txBody>
-                    <a:bodyPr wrap="square"/>
-                    <a:lstStyle/>
-                    <a:p>
-                      <a:r>
-                        <a:rPr sz="1000" b="0">
-                          <a:solidFill>
-                            <a:srgbClr val="282828"/>
-                          </a:solidFill>
-                          <a:latin typeface="Arial"/>
-                        </a:rPr>
-                        <a:t>exact, flat-DM reference (F)</a:t>
-                      </a:r>
-                    </a:p>
-                  </a:txBody>
-                  <a:tcPr marL="54864" marR="54864" marT="18288" marB="18288">
-                    <a:solidFill>
-                      <a:srgbClr val="ECF1F6"/>
-                    </a:solidFill>
-                  </a:tcPr>
-                </a:tc>
-                <a:tc>
-                  <a:txBody>
-                    <a:bodyPr wrap="square"/>
-                    <a:lstStyle/>
-                    <a:p>
-                      <a:r>
-                        <a:rPr sz="1000" b="0">
-                          <a:solidFill>
-                            <a:srgbClr val="282828"/>
-                          </a:solidFill>
-                          <a:latin typeface="Arial"/>
-                        </a:rPr>
-                        <a:t>3.7×10¹³</a:t>
-                      </a:r>
-                    </a:p>
-                  </a:txBody>
-                  <a:tcPr marL="54864" marR="54864" marT="18288" marB="18288">
-                    <a:solidFill>
-                      <a:srgbClr val="ECF1F6"/>
-                    </a:solidFill>
-                  </a:tcPr>
-                </a:tc>
-              </a:tr>
-              <a:tr h="262890">
-                <a:tc>
-                  <a:txBody>
-                    <a:bodyPr wrap="square"/>
-                    <a:lstStyle/>
-                    <a:p>
-                      <a:r>
-                        <a:rPr sz="1000" b="0">
-                          <a:solidFill>
-                            <a:srgbClr val="282828"/>
-                          </a:solidFill>
-                          <a:latin typeface="Arial"/>
-                        </a:rPr>
-                        <a:t>exact, re-computed reference (I)</a:t>
-                      </a:r>
-                    </a:p>
-                  </a:txBody>
-                  <a:tcPr marL="54864" marR="54864" marT="18288" marB="18288">
-                    <a:solidFill>
-                      <a:srgbClr val="FFFFFF"/>
-                    </a:solidFill>
-                  </a:tcPr>
-                </a:tc>
-                <a:tc>
-                  <a:txBody>
-                    <a:bodyPr wrap="square"/>
-                    <a:lstStyle/>
-                    <a:p>
-                      <a:r>
-                        <a:rPr sz="1000" b="0">
-                          <a:solidFill>
-                            <a:srgbClr val="282828"/>
-                          </a:solidFill>
-                          <a:latin typeface="Arial"/>
-                        </a:rPr>
-                        <a:t>6.4×10¹³</a:t>
-                      </a:r>
-                    </a:p>
-                  </a:txBody>
-                  <a:tcPr marL="54864" marR="54864" marT="18288" marB="18288">
-                    <a:solidFill>
-                      <a:srgbClr val="FFFFFF"/>
-                    </a:solidFill>
-                  </a:tcPr>
-                </a:tc>
-              </a:tr>
-              <a:tr h="262890">
-                <a:tc>
-                  <a:txBody>
-                    <a:bodyPr wrap="square"/>
-                    <a:lstStyle/>
-                    <a:p>
-                      <a:r>
-                        <a:rPr sz="1000" b="0">
-                          <a:solidFill>
-                            <a:srgbClr val="282828"/>
-                          </a:solidFill>
-                          <a:latin typeface="Arial"/>
-                        </a:rPr>
-                        <a:t>I with the sign map (I+)</a:t>
-                      </a:r>
-                    </a:p>
-                  </a:txBody>
-                  <a:tcPr marL="54864" marR="54864" marT="18288" marB="18288">
-                    <a:solidFill>
-                      <a:srgbClr val="ECF1F6"/>
-                    </a:solidFill>
-                  </a:tcPr>
-                </a:tc>
-                <a:tc>
-                  <a:txBody>
-                    <a:bodyPr wrap="square"/>
-                    <a:lstStyle/>
-                    <a:p>
-                      <a:r>
-                        <a:rPr sz="1000" b="0">
-                          <a:solidFill>
-                            <a:srgbClr val="282828"/>
-                          </a:solidFill>
-                          <a:latin typeface="Arial"/>
-                        </a:rPr>
-                        <a:t>8.8×10¹³ (8.4×10¹³ if the sign map is noise-free)</a:t>
-                      </a:r>
-                    </a:p>
-                  </a:txBody>
-                  <a:tcPr marL="54864" marR="54864" marT="18288" marB="18288">
-                    <a:solidFill>
-                      <a:srgbClr val="ECF1F6"/>
-                    </a:solidFill>
-                  </a:tcPr>
-                </a:tc>
-              </a:tr>
-              <a:tr h="262890">
-                <a:tc>
-                  <a:txBody>
-                    <a:bodyPr wrap="square"/>
-                    <a:lstStyle/>
-                    <a:p>
-                      <a:r>
-                        <a:rPr sz="1000" b="0">
-                          <a:solidFill>
-                            <a:srgbClr val="282828"/>
-                          </a:solidFill>
-                          <a:latin typeface="Arial"/>
-                        </a:rPr>
-                        <a:t>phase-stepped (S)</a:t>
-                      </a:r>
-                    </a:p>
-                  </a:txBody>
-                  <a:tcPr marL="54864" marR="54864" marT="18288" marB="18288">
-                    <a:solidFill>
-                      <a:srgbClr val="FFFFFF"/>
-                    </a:solidFill>
-                  </a:tcPr>
-                </a:tc>
-                <a:tc>
-                  <a:txBody>
-                    <a:bodyPr wrap="square"/>
-                    <a:lstStyle/>
-                    <a:p>
-                      <a:r>
-                        <a:rPr sz="1000" b="0">
-                          <a:solidFill>
-                            <a:srgbClr val="282828"/>
-                          </a:solidFill>
-                          <a:latin typeface="Arial"/>
-                        </a:rPr>
-                        <a:t>1.0×10¹⁴</a:t>
-                      </a:r>
-                    </a:p>
-                  </a:txBody>
-                  <a:tcPr marL="54864" marR="54864" marT="18288" marB="18288">
-                    <a:solidFill>
-                      <a:srgbClr val="FFFFFF"/>
-                    </a:solidFill>
-                  </a:tcPr>
-                </a:tc>
-              </a:tr>
-              <a:tr h="262890">
-                <a:tc>
-                  <a:txBody>
-                    <a:bodyPr wrap="square"/>
-                    <a:lstStyle/>
-                    <a:p>
-                      <a:r>
-                        <a:rPr sz="1000" b="0">
-                          <a:solidFill>
-                            <a:srgbClr val="282828"/>
-                          </a:solidFill>
-                          <a:latin typeface="Arial"/>
-                        </a:rPr>
-                        <a:t>interferometer, four-step</a:t>
-                      </a:r>
-                    </a:p>
-                  </a:txBody>
-                  <a:tcPr marL="54864" marR="54864" marT="18288" marB="18288">
-                    <a:solidFill>
-                      <a:srgbClr val="ECF1F6"/>
-                    </a:solidFill>
-                  </a:tcPr>
-                </a:tc>
-                <a:tc>
-                  <a:txBody>
-                    <a:bodyPr wrap="square"/>
-                    <a:lstStyle/>
-                    <a:p>
-                      <a:r>
-                        <a:rPr sz="1000" b="0">
-                          <a:solidFill>
-                            <a:srgbClr val="282828"/>
-                          </a:solidFill>
-                          <a:latin typeface="Arial"/>
-                        </a:rPr>
-                        <a:t>8×10¹⁴</a:t>
-                      </a:r>
-                    </a:p>
-                  </a:txBody>
-                  <a:tcPr marL="54864" marR="54864" marT="18288" marB="18288">
-                    <a:solidFill>
-                      <a:srgbClr val="ECF1F6"/>
-                    </a:solidFill>
-                  </a:tcPr>
-                </a:tc>
-              </a:tr>
-            </a:tbl>
-          </a:graphicData>
-        </a:graphic>
-      </p:graphicFrame>
-      <p:sp>
-        <p:nvSpPr>
-          <p:cNvPr id="7" name="TextBox 6"/>
+              <a:t>Response by spatial frequency of the linear reading at five wavelengths on the corrected model: no null, only the dimple's own low-order dip, which moves with the spot's size in λ/D; the five-colour combination (orange) sits at 0.99 to 1.</a:t>
+            </a:r>
+          </a:p>
+        </p:txBody>
+      </p:sp>
+      <p:sp>
+        <p:nvSpPr>
+          <p:cNvPr id="6" name="TextBox 5"/>
           <p:cNvSpPr txBox="1"/>
           <p:nvPr/>
         </p:nvSpPr>
         <p:spPr>
           <a:xfrm>
-            <a:off x="6400800" y="3284982"/>
+            <a:off x="6400800" y="1298448"/>
             <a:ext cx="5394960" cy="274320"/>
           </a:xfrm>
           <a:prstGeom prst="rect">
@@ -4903,7 +5016,7 @@
                 </a:solidFill>
                 <a:latin typeface="Arial"/>
               </a:rPr>
-              <a:t>•  Method: noise-free frames are calculated once per state; photon shot noise is added numerically, eight trials per point.  A state's photons are shared by the frames the reading needs (one, or four for S).  Each reading's high-photon floor converges to its systematic floor on slide 8.</a:t>
+              <a:t>•  What moved: the "blind band near 30 cycles across the pupil that shifts with wavelength" was the out-of-focus model's Talbot null.  On the corrected model each colour's response bottoms at 0.92 to 0.97 after the frequency correction, and the combination at 0.991.</a:t>
             </a:r>
           </a:p>
           <a:p>
@@ -4919,20 +5032,36 @@
                 </a:solidFill>
                 <a:latin typeface="Arial"/>
               </a:rPr>
-              <a:t>•  Reading: 10¹⁴ photons at 633 nm is 30 µJ.  The 1 pm budget is about systematic errors and gain stability, not light.</a:t>
-            </a:r>
-          </a:p>
-        </p:txBody>
-      </p:sp>
-      <p:sp>
-        <p:nvSpPr>
-          <p:cNvPr id="8" name="TextBox 7"/>
+              <a:t>•  On the measurement rows (30 nm surface, single 10 nm change): I+ at 632.8 nm SNR 269; five colours combined 183; best pair, 700 + 780 nm, 255.  The 47-site case: 32 → 32.  The linear reading gets worse when combined (84 → 34): at 480 nm the dimple delay is 2.1 rad and the small-phase reading turns negative on this surface; an equal-weight combination inherits that.</a:t>
+            </a:r>
+          </a:p>
+          <a:p>
+            <a:pPr>
+              <a:spcAft>
+                <a:spcPts val="600"/>
+              </a:spcAft>
+            </a:pPr>
+            <a:r>
+              <a:rPr sz="1200" b="0">
+                <a:solidFill>
+                  <a:srgbClr val="282828"/>
+                </a:solidFill>
+                <a:latin typeface="Arial"/>
+              </a:rPr>
+              <a:t>•  What stays with colour is range: 780 nm is the best single colour on nearly every row — less phase per nanometre of height, and a 1.6 λ/D dimple.  The interferometer is unchanged at every colour (its deck).</a:t>
+            </a:r>
+          </a:p>
+        </p:txBody>
+      </p:sp>
+      <p:sp>
+        <p:nvSpPr>
+          <p:cNvPr id="7" name="TextBox 6"/>
           <p:cNvSpPr txBox="1"/>
           <p:nvPr/>
         </p:nvSpPr>
         <p:spPr>
           <a:xfrm>
-            <a:off x="6400800" y="4988814"/>
+            <a:off x="6400800" y="4331208"/>
             <a:ext cx="5394960" cy="274320"/>
           </a:xfrm>
           <a:prstGeom prst="rect">
@@ -4958,7 +5087,7 @@
                 </a:solidFill>
                 <a:latin typeface="Arial"/>
               </a:rPr>
-              <a:t>Case: a single 10 nm change on the 30 nm surface, 96×96, development sampling.  Read noise, drift and calibration noise are the next terms once a use case fixes them.  Records: runs/rec193full; interferometer tg96_s5noise_report.txt.</a:t>
+              <a:t>632.8 / 480 / 532 / 700 / 780 nm through one physical mask, every calibration redone per colour; development sampling (193 rays, 1024 grid); runs/rec193full.</a:t>
             </a:r>
           </a:p>
         </p:txBody>
@@ -5015,7 +5144,7 @@
                 </a:solidFill>
                 <a:latin typeface="Arial"/>
               </a:rPr>
-              <a:t>Run it yourself</a:t>
+              <a:t>Photons: 10¹⁴ per state reaches 1 pm</a:t>
             </a:r>
           </a:p>
           <a:p>
@@ -5031,7 +5160,7 @@
                 </a:solidFill>
                 <a:latin typeface="Arial"/>
               </a:rPr>
-              <a:t>One parameter sheet and one script reproduce every number here; the defaults reproduce the stage-7 record to the last printed digit</a:t>
+              <a:t>Every reading needs about the same light, 25× less than the out-of-focus model said; the sign map's own noise costs 5%</a:t>
             </a:r>
           </a:p>
         </p:txBody>
@@ -5080,16 +5209,40 @@
           </a:p>
         </p:txBody>
       </p:sp>
-      <p:sp>
-        <p:nvSpPr>
-          <p:cNvPr id="4" name="TextBox 3"/>
+      <p:pic>
+        <p:nvPicPr>
+          <p:cNvPr id="4" name="Picture 3" descr="zwfs_rec193full_noise.png"/>
+          <p:cNvPicPr>
+            <a:picLocks noChangeAspect="1"/>
+          </p:cNvPicPr>
+          <p:nvPr/>
+        </p:nvPicPr>
+        <p:blipFill>
+          <a:blip r:embed="rId2"/>
+          <a:stretch>
+            <a:fillRect/>
+          </a:stretch>
+        </p:blipFill>
+        <p:spPr>
+          <a:xfrm>
+            <a:off x="1600240" y="1298448"/>
+            <a:ext cx="3428919" cy="2714752"/>
+          </a:xfrm>
+          <a:prstGeom prst="rect">
+            <a:avLst/>
+          </a:prstGeom>
+        </p:spPr>
+      </p:pic>
+      <p:sp>
+        <p:nvSpPr>
+          <p:cNvPr id="5" name="TextBox 4"/>
           <p:cNvSpPr txBox="1"/>
           <p:nvPr/>
         </p:nvSpPr>
         <p:spPr>
           <a:xfrm>
-            <a:off x="411480" y="1298448"/>
-            <a:ext cx="11368735" cy="274320"/>
+            <a:off x="411480" y="4031488"/>
+            <a:ext cx="5806440" cy="394208"/>
           </a:xfrm>
           <a:prstGeom prst="rect">
             <a:avLst/>
@@ -5102,34 +5255,34 @@
           </a:bodyPr>
           <a:lstStyle/>
           <a:p>
-            <a:pPr>
+            <a:pPr algn="ctr">
               <a:spcAft>
-                <a:spcPts val="600"/>
+                <a:spcPts val="0"/>
               </a:spcAft>
             </a:pPr>
             <a:r>
-              <a:rPr sz="1500" b="0">
-                <a:solidFill>
-                  <a:srgbClr val="282828"/>
+              <a:rPr sz="1000" b="0">
+                <a:solidFill>
+                  <a:srgbClr val="6E6E6E"/>
                 </a:solidFill>
                 <a:latin typeface="Arial"/>
               </a:rPr>
-              <a:t>•  Two files: zwfs_params.m returns every setting at its value of record — grid and ray count, wavelength, the bench's lengths and tuned figures, the mask's etch and spot, the sampling checks, registration, the DM sizes, the test amplitudes and seeds, the colour and photon stages.  zwfs_run.m runs the chosen stages and writes the report, a .mat file and the figures into a folder named by the run's tag.</a:t>
+              <a:t>Noise on the single-actuator estimate against photons per state, per reading; the dotted line is the 1 pm target.</a:t>
             </a:r>
           </a:p>
         </p:txBody>
       </p:sp>
       <p:graphicFrame>
         <p:nvGraphicFramePr>
-          <p:cNvPr id="5" name="Table 4"/>
+          <p:cNvPr id="6" name="Table 5"/>
           <p:cNvGraphicFramePr>
             <a:graphicFrameLocks noGrp="1"/>
           </p:cNvGraphicFramePr>
           <p:nvPr/>
         </p:nvGraphicFramePr>
         <p:xfrm>
-          <a:off x="411480" y="2465831"/>
-          <a:ext cx="11368735" cy="1680210"/>
+          <a:off x="6400800" y="1298448"/>
+          <a:ext cx="5394959" cy="1840230"/>
         </p:xfrm>
         <a:graphic>
           <a:graphicData uri="http://schemas.openxmlformats.org/drawingml/2006/table">
@@ -5138,23 +5291,23 @@
                 <a:tableStyleId>{5C22544A-7EE6-4342-B048-85BDC9FD1C3A}</a:tableStyleId>
               </a:tblPr>
               <a:tblGrid>
-                <a:gridCol w="6601201"/>
-                <a:gridCol w="4767534"/>
+                <a:gridCol w="2131342"/>
+                <a:gridCol w="3263617"/>
               </a:tblGrid>
-              <a:tr h="280035">
-                <a:tc>
-                  <a:txBody>
-                    <a:bodyPr wrap="square"/>
-                    <a:lstStyle/>
-                    <a:p>
-                      <a:r>
-                        <a:rPr sz="1100" b="1">
+              <a:tr h="262890">
+                <a:tc>
+                  <a:txBody>
+                    <a:bodyPr wrap="square"/>
+                    <a:lstStyle/>
+                    <a:p>
+                      <a:r>
+                        <a:rPr sz="1000" b="1">
                           <a:solidFill>
                             <a:srgbClr val="FFFFFF"/>
                           </a:solidFill>
                           <a:latin typeface="Arial"/>
                         </a:rPr>
-                        <a:t>call</a:t>
+                        <a:t>reading</a:t>
                       </a:r>
                     </a:p>
                   </a:txBody>
@@ -5170,13 +5323,13 @@
                     <a:lstStyle/>
                     <a:p>
                       <a:r>
-                        <a:rPr sz="1100" b="1">
+                        <a:rPr sz="1000" b="1">
                           <a:solidFill>
                             <a:srgbClr val="FFFFFF"/>
                           </a:solidFill>
                           <a:latin typeface="Arial"/>
                         </a:rPr>
-                        <a:t>what it does</a:t>
+                        <a:t>photons per state for 1 pm</a:t>
                       </a:r>
                     </a:p>
                   </a:txBody>
@@ -5187,20 +5340,20 @@
                   </a:tcPr>
                 </a:tc>
               </a:tr>
-              <a:tr h="280035">
-                <a:tc>
-                  <a:txBody>
-                    <a:bodyPr wrap="square"/>
-                    <a:lstStyle/>
-                    <a:p>
-                      <a:r>
-                        <a:rPr sz="1100" b="0">
-                          <a:solidFill>
-                            <a:srgbClr val="282828"/>
-                          </a:solidFill>
-                          <a:latin typeface="Arial"/>
-                        </a:rPr>
-                        <a:t>zwfs_run</a:t>
+              <a:tr h="262890">
+                <a:tc>
+                  <a:txBody>
+                    <a:bodyPr wrap="square"/>
+                    <a:lstStyle/>
+                    <a:p>
+                      <a:r>
+                        <a:rPr sz="1000" b="0">
+                          <a:solidFill>
+                            <a:srgbClr val="282828"/>
+                          </a:solidFill>
+                          <a:latin typeface="Arial"/>
+                        </a:rPr>
+                        <a:t>linear (L)</a:t>
                       </a:r>
                     </a:p>
                   </a:txBody>
@@ -5216,13 +5369,13 @@
                     <a:lstStyle/>
                     <a:p>
                       <a:r>
-                        <a:rPr sz="1100" b="0">
-                          <a:solidFill>
-                            <a:srgbClr val="282828"/>
-                          </a:solidFill>
-                          <a:latin typeface="Arial"/>
-                        </a:rPr>
-                        <a:t>the record: bench checks, the full test set, figures</a:t>
+                        <a:rPr sz="1000" b="0">
+                          <a:solidFill>
+                            <a:srgbClr val="282828"/>
+                          </a:solidFill>
+                          <a:latin typeface="Arial"/>
+                        </a:rPr>
+                        <a:t>5.4×10¹³</a:t>
                       </a:r>
                     </a:p>
                   </a:txBody>
@@ -5233,20 +5386,20 @@
                   </a:tcPr>
                 </a:tc>
               </a:tr>
-              <a:tr h="280035">
-                <a:tc>
-                  <a:txBody>
-                    <a:bodyPr wrap="square"/>
-                    <a:lstStyle/>
-                    <a:p>
-                      <a:r>
-                        <a:rPr sz="1100" b="0">
-                          <a:solidFill>
-                            <a:srgbClr val="282828"/>
-                          </a:solidFill>
-                          <a:latin typeface="Arial"/>
-                        </a:rPr>
-                        <a:t>zwfs_run('tag','ng385', 'NGRID',385)</a:t>
+              <a:tr h="262890">
+                <a:tc>
+                  <a:txBody>
+                    <a:bodyPr wrap="square"/>
+                    <a:lstStyle/>
+                    <a:p>
+                      <a:r>
+                        <a:rPr sz="1000" b="0">
+                          <a:solidFill>
+                            <a:srgbClr val="282828"/>
+                          </a:solidFill>
+                          <a:latin typeface="Arial"/>
+                        </a:rPr>
+                        <a:t>exact, flat-DM reference (F)</a:t>
                       </a:r>
                     </a:p>
                   </a:txBody>
@@ -5262,13 +5415,13 @@
                     <a:lstStyle/>
                     <a:p>
                       <a:r>
-                        <a:rPr sz="1100" b="0">
-                          <a:solidFill>
-                            <a:srgbClr val="282828"/>
-                          </a:solidFill>
-                          <a:latin typeface="Arial"/>
-                        </a:rPr>
-                        <a:t>the 1-megapixel camera</a:t>
+                        <a:rPr sz="1000" b="0">
+                          <a:solidFill>
+                            <a:srgbClr val="282828"/>
+                          </a:solidFill>
+                          <a:latin typeface="Arial"/>
+                        </a:rPr>
+                        <a:t>3.7×10¹³</a:t>
                       </a:r>
                     </a:p>
                   </a:txBody>
@@ -5279,20 +5432,20 @@
                   </a:tcPr>
                 </a:tc>
               </a:tr>
-              <a:tr h="280035">
-                <a:tc>
-                  <a:txBody>
-                    <a:bodyPr wrap="square"/>
-                    <a:lstStyle/>
-                    <a:p>
-                      <a:r>
-                        <a:rPr sz="1100" b="0">
-                          <a:solidFill>
-                            <a:srgbClr val="282828"/>
-                          </a:solidFill>
-                          <a:latin typeface="Arial"/>
-                        </a:rPr>
-                        <a:t>zwfs_run('MODEL',2048, 'NGRID',385, 'param_file','macos_param_2048.txt')</a:t>
+              <a:tr h="262890">
+                <a:tc>
+                  <a:txBody>
+                    <a:bodyPr wrap="square"/>
+                    <a:lstStyle/>
+                    <a:p>
+                      <a:r>
+                        <a:rPr sz="1000" b="0">
+                          <a:solidFill>
+                            <a:srgbClr val="282828"/>
+                          </a:solidFill>
+                          <a:latin typeface="Arial"/>
+                        </a:rPr>
+                        <a:t>exact, re-computed reference (I)</a:t>
                       </a:r>
                     </a:p>
                   </a:txBody>
@@ -5308,13 +5461,13 @@
                     <a:lstStyle/>
                     <a:p>
                       <a:r>
-                        <a:rPr sz="1100" b="0">
-                          <a:solidFill>
-                            <a:srgbClr val="282828"/>
-                          </a:solidFill>
-                          <a:latin typeface="Arial"/>
-                        </a:rPr>
-                        <a:t>the fully sampled setup on a 30 GB machine</a:t>
+                        <a:rPr sz="1000" b="0">
+                          <a:solidFill>
+                            <a:srgbClr val="282828"/>
+                          </a:solidFill>
+                          <a:latin typeface="Arial"/>
+                        </a:rPr>
+                        <a:t>6.4×10¹³</a:t>
                       </a:r>
                     </a:p>
                   </a:txBody>
@@ -5325,20 +5478,20 @@
                   </a:tcPr>
                 </a:tc>
               </a:tr>
-              <a:tr h="280035">
-                <a:tc>
-                  <a:txBody>
-                    <a:bodyPr wrap="square"/>
-                    <a:lstStyle/>
-                    <a:p>
-                      <a:r>
-                        <a:rPr sz="1100" b="0">
-                          <a:solidFill>
-                            <a:srgbClr val="282828"/>
-                          </a:solidFill>
-                          <a:latin typeface="Arial"/>
-                        </a:rPr>
-                        <a:t>zwfs_run('stages',{'battery','color','noise','figs'})</a:t>
+              <a:tr h="262890">
+                <a:tc>
+                  <a:txBody>
+                    <a:bodyPr wrap="square"/>
+                    <a:lstStyle/>
+                    <a:p>
+                      <a:r>
+                        <a:rPr sz="1000" b="0">
+                          <a:solidFill>
+                            <a:srgbClr val="282828"/>
+                          </a:solidFill>
+                          <a:latin typeface="Arial"/>
+                        </a:rPr>
+                        <a:t>I with the sign map (I+)</a:t>
                       </a:r>
                     </a:p>
                   </a:txBody>
@@ -5354,13 +5507,13 @@
                     <a:lstStyle/>
                     <a:p>
                       <a:r>
-                        <a:rPr sz="1100" b="0">
-                          <a:solidFill>
-                            <a:srgbClr val="282828"/>
-                          </a:solidFill>
-                          <a:latin typeface="Arial"/>
-                        </a:rPr>
-                        <a:t>everything on this deck's later slides</a:t>
+                        <a:rPr sz="1000" b="0">
+                          <a:solidFill>
+                            <a:srgbClr val="282828"/>
+                          </a:solidFill>
+                          <a:latin typeface="Arial"/>
+                        </a:rPr>
+                        <a:t>8.8×10¹³ (8.4×10¹³ if the sign map is noise-free)</a:t>
                       </a:r>
                     </a:p>
                   </a:txBody>
@@ -5371,20 +5524,20 @@
                   </a:tcPr>
                 </a:tc>
               </a:tr>
-              <a:tr h="280035">
-                <a:tc>
-                  <a:txBody>
-                    <a:bodyPr wrap="square"/>
-                    <a:lstStyle/>
-                    <a:p>
-                      <a:r>
-                        <a:rPr sz="1100" b="0">
-                          <a:solidFill>
-                            <a:srgbClr val="282828"/>
-                          </a:solidFill>
-                          <a:latin typeface="Arial"/>
-                        </a:rPr>
-                        <a:t>./zwfs_batch.sh TAG "the same arguments"</a:t>
+              <a:tr h="262890">
+                <a:tc>
+                  <a:txBody>
+                    <a:bodyPr wrap="square"/>
+                    <a:lstStyle/>
+                    <a:p>
+                      <a:r>
+                        <a:rPr sz="1000" b="0">
+                          <a:solidFill>
+                            <a:srgbClr val="282828"/>
+                          </a:solidFill>
+                          <a:latin typeface="Arial"/>
+                        </a:rPr>
+                        <a:t>phase-stepped (S)</a:t>
                       </a:r>
                     </a:p>
                   </a:txBody>
@@ -5400,19 +5553,65 @@
                     <a:lstStyle/>
                     <a:p>
                       <a:r>
-                        <a:rPr sz="1100" b="0">
-                          <a:solidFill>
-                            <a:srgbClr val="282828"/>
-                          </a:solidFill>
-                          <a:latin typeface="Arial"/>
-                        </a:rPr>
-                        <a:t>unattended, memory-capped, logged</a:t>
+                        <a:rPr sz="1000" b="0">
+                          <a:solidFill>
+                            <a:srgbClr val="282828"/>
+                          </a:solidFill>
+                          <a:latin typeface="Arial"/>
+                        </a:rPr>
+                        <a:t>1.0×10¹⁴</a:t>
                       </a:r>
                     </a:p>
                   </a:txBody>
                   <a:tcPr marL="54864" marR="54864" marT="18288" marB="18288">
                     <a:solidFill>
                       <a:srgbClr val="FFFFFF"/>
+                    </a:solidFill>
+                  </a:tcPr>
+                </a:tc>
+              </a:tr>
+              <a:tr h="262890">
+                <a:tc>
+                  <a:txBody>
+                    <a:bodyPr wrap="square"/>
+                    <a:lstStyle/>
+                    <a:p>
+                      <a:r>
+                        <a:rPr sz="1000" b="0">
+                          <a:solidFill>
+                            <a:srgbClr val="282828"/>
+                          </a:solidFill>
+                          <a:latin typeface="Arial"/>
+                        </a:rPr>
+                        <a:t>interferometer, four-step</a:t>
+                      </a:r>
+                    </a:p>
+                  </a:txBody>
+                  <a:tcPr marL="54864" marR="54864" marT="18288" marB="18288">
+                    <a:solidFill>
+                      <a:srgbClr val="ECF1F6"/>
+                    </a:solidFill>
+                  </a:tcPr>
+                </a:tc>
+                <a:tc>
+                  <a:txBody>
+                    <a:bodyPr wrap="square"/>
+                    <a:lstStyle/>
+                    <a:p>
+                      <a:r>
+                        <a:rPr sz="1000" b="0">
+                          <a:solidFill>
+                            <a:srgbClr val="282828"/>
+                          </a:solidFill>
+                          <a:latin typeface="Arial"/>
+                        </a:rPr>
+                        <a:t>8×10¹⁴</a:t>
+                      </a:r>
+                    </a:p>
+                  </a:txBody>
+                  <a:tcPr marL="54864" marR="54864" marT="18288" marB="18288">
+                    <a:solidFill>
+                      <a:srgbClr val="ECF1F6"/>
                     </a:solidFill>
                   </a:tcPr>
                 </a:tc>
@@ -5423,14 +5622,14 @@
       </p:graphicFrame>
       <p:sp>
         <p:nvSpPr>
-          <p:cNvPr id="6" name="TextBox 5"/>
+          <p:cNvPr id="7" name="TextBox 6"/>
           <p:cNvSpPr txBox="1"/>
           <p:nvPr/>
         </p:nvSpPr>
         <p:spPr>
           <a:xfrm>
-            <a:off x="411480" y="4292346"/>
-            <a:ext cx="11368735" cy="274320"/>
+            <a:off x="6400800" y="3284982"/>
+            <a:ext cx="5394960" cy="274320"/>
           </a:xfrm>
           <a:prstGeom prst="rect">
             <a:avLst/>
@@ -5449,27 +5648,43 @@
               </a:spcAft>
             </a:pPr>
             <a:r>
-              <a:rPr sz="1500" b="0">
+              <a:rPr sz="1200" b="0">
                 <a:solidFill>
                   <a:srgbClr val="282828"/>
                 </a:solidFill>
                 <a:latin typeface="Arial"/>
               </a:rPr>
-              <a:t>•  Checks that run every time: the no-mask round trip through the bracket (must return the field unchanged); the reference-wave model against the engine's own field; the pupil brightness must not change with the DM shape; the sampling checks (pixels across the dimple, camera pixels per actuator); and the search for the camera-to-DM mirror/transpose and sign.</a:t>
-            </a:r>
-          </a:p>
-        </p:txBody>
-      </p:sp>
-      <p:sp>
-        <p:nvSpPr>
-          <p:cNvPr id="7" name="TextBox 6"/>
+              <a:t>•  Method: noise-free frames are calculated once per state; photon shot noise is added numerically, eight trials per point.  A state's photons are shared by the frames the reading needs (one, or four for S).  Each reading's high-photon floor converges to its systematic floor on slide 8.</a:t>
+            </a:r>
+          </a:p>
+          <a:p>
+            <a:pPr>
+              <a:spcAft>
+                <a:spcPts val="600"/>
+              </a:spcAft>
+            </a:pPr>
+            <a:r>
+              <a:rPr sz="1200" b="0">
+                <a:solidFill>
+                  <a:srgbClr val="282828"/>
+                </a:solidFill>
+                <a:latin typeface="Arial"/>
+              </a:rPr>
+              <a:t>•  Reading: 10¹⁴ photons at 633 nm is 30 µJ.  The 1 pm budget is about systematic errors and gain stability, not light.</a:t>
+            </a:r>
+          </a:p>
+        </p:txBody>
+      </p:sp>
+      <p:sp>
+        <p:nvSpPr>
+          <p:cNvPr id="8" name="TextBox 7"/>
           <p:cNvSpPr txBox="1"/>
           <p:nvPr/>
         </p:nvSpPr>
         <p:spPr>
           <a:xfrm>
-            <a:off x="411480" y="5459730"/>
-            <a:ext cx="11368735" cy="274320"/>
+            <a:off x="6400800" y="4988814"/>
+            <a:ext cx="5394960" cy="274320"/>
           </a:xfrm>
           <a:prstGeom prst="rect">
             <a:avLst/>
@@ -5494,7 +5709,7 @@
                 </a:solidFill>
                 <a:latin typeface="Arial"/>
               </a:rPr>
-              <a:t>Reproduction check: 64 lines of results against the stage-7 report, 8 differ in the last printed digit (the actuator fit's solver tolerance).  README "Run it yourself" carries the parameter table.</a:t>
+              <a:t>Case: a single 10 nm change on the 30 nm surface, 96×96, development sampling.  Read noise, drift and calibration noise are the next terms once a use case fixes them.  Records: runs/rec193full; interferometer tg96_s5noise_report.txt.</a:t>
             </a:r>
           </a:p>
         </p:txBody>
@@ -5551,7 +5766,7 @@
                 </a:solidFill>
                 <a:latin typeface="Arial"/>
               </a:rPr>
-              <a:t>Side by side with the Twyman–Green</a:t>
+              <a:t>Run it yourself</a:t>
             </a:r>
           </a:p>
           <a:p>
@@ -5567,7 +5782,7 @@
                 </a:solidFill>
                 <a:latin typeface="Arial"/>
               </a:rPr>
-              <a:t>The interferometer loses response at fine patterns and never fails; the sensor reads a change from one frame at the same floor, up to a 40–60 nm surface</a:t>
+              <a:t>One parameter sheet and one script reproduce every number here; the defaults reproduce the stage-7 record to the last printed digit</a:t>
             </a:r>
           </a:p>
         </p:txBody>
@@ -5616,17 +5831,56 @@
           </a:p>
         </p:txBody>
       </p:sp>
+      <p:sp>
+        <p:nvSpPr>
+          <p:cNvPr id="4" name="TextBox 3"/>
+          <p:cNvSpPr txBox="1"/>
+          <p:nvPr/>
+        </p:nvSpPr>
+        <p:spPr>
+          <a:xfrm>
+            <a:off x="411480" y="1298448"/>
+            <a:ext cx="11368735" cy="274320"/>
+          </a:xfrm>
+          <a:prstGeom prst="rect">
+            <a:avLst/>
+          </a:prstGeom>
+          <a:noFill/>
+        </p:spPr>
+        <p:txBody>
+          <a:bodyPr wrap="square">
+            <a:spAutoFit/>
+          </a:bodyPr>
+          <a:lstStyle/>
+          <a:p>
+            <a:pPr>
+              <a:spcAft>
+                <a:spcPts val="600"/>
+              </a:spcAft>
+            </a:pPr>
+            <a:r>
+              <a:rPr sz="1500" b="0">
+                <a:solidFill>
+                  <a:srgbClr val="282828"/>
+                </a:solidFill>
+                <a:latin typeface="Arial"/>
+              </a:rPr>
+              <a:t>•  Two files: zwfs_params.m returns every setting at its value of record — grid and ray count, wavelength, the bench's lengths and tuned figures, the mask's etch and spot, the sampling checks, registration, the DM sizes, the test amplitudes and seeds, the colour and photon stages.  zwfs_run.m runs the chosen stages and writes the report, a .mat file and the figures into a folder named by the run's tag.</a:t>
+            </a:r>
+          </a:p>
+        </p:txBody>
+      </p:sp>
       <p:graphicFrame>
         <p:nvGraphicFramePr>
-          <p:cNvPr id="4" name="Table 3"/>
+          <p:cNvPr id="5" name="Table 4"/>
           <p:cNvGraphicFramePr>
             <a:graphicFrameLocks noGrp="1"/>
           </p:cNvGraphicFramePr>
           <p:nvPr/>
         </p:nvGraphicFramePr>
         <p:xfrm>
-          <a:off x="411480" y="1298448"/>
-          <a:ext cx="11368734" cy="2800350"/>
+          <a:off x="411480" y="2465831"/>
+          <a:ext cx="11368735" cy="1680210"/>
         </p:xfrm>
         <a:graphic>
           <a:graphicData uri="http://schemas.openxmlformats.org/drawingml/2006/table">
@@ -5635,16 +5889,25 @@
                 <a:tableStyleId>{5C22544A-7EE6-4342-B048-85BDC9FD1C3A}</a:tableStyleId>
               </a:tblPr>
               <a:tblGrid>
-                <a:gridCol w="3315881"/>
-                <a:gridCol w="3552729"/>
-                <a:gridCol w="4500124"/>
+                <a:gridCol w="6601201"/>
+                <a:gridCol w="4767534"/>
               </a:tblGrid>
               <a:tr h="280035">
                 <a:tc>
                   <a:txBody>
                     <a:bodyPr wrap="square"/>
                     <a:lstStyle/>
-                    <a:p/>
+                    <a:p>
+                      <a:r>
+                        <a:rPr sz="1100" b="1">
+                          <a:solidFill>
+                            <a:srgbClr val="FFFFFF"/>
+                          </a:solidFill>
+                          <a:latin typeface="Arial"/>
+                        </a:rPr>
+                        <a:t>call</a:t>
+                      </a:r>
+                    </a:p>
                   </a:txBody>
                   <a:tcPr marL="54864" marR="54864" marT="18288" marB="18288">
                     <a:solidFill>
@@ -5664,29 +5927,7 @@
                           </a:solidFill>
                           <a:latin typeface="Arial"/>
                         </a:rPr>
-                        <a:t>Twyman–Green PSI (measured)</a:t>
-                      </a:r>
-                    </a:p>
-                  </a:txBody>
-                  <a:tcPr marL="54864" marR="54864" marT="18288" marB="18288">
-                    <a:solidFill>
-                      <a:srgbClr val="1F4E79"/>
-                    </a:solidFill>
-                  </a:tcPr>
-                </a:tc>
-                <a:tc>
-                  <a:txBody>
-                    <a:bodyPr wrap="square"/>
-                    <a:lstStyle/>
-                    <a:p>
-                      <a:r>
-                        <a:rPr sz="1100" b="1">
-                          <a:solidFill>
-                            <a:srgbClr val="FFFFFF"/>
-                          </a:solidFill>
-                          <a:latin typeface="Arial"/>
-                        </a:rPr>
-                        <a:t>Zernike sensor (measured)</a:t>
+                        <a:t>what it does</a:t>
                       </a:r>
                     </a:p>
                   </a:txBody>
@@ -5710,7 +5951,7 @@
                           </a:solidFill>
                           <a:latin typeface="Arial"/>
                         </a:rPr>
-                        <a:t>reference beam</a:t>
+                        <a:t>zwfs_run</a:t>
                       </a:r>
                     </a:p>
                   </a:txBody>
@@ -5732,29 +5973,7 @@
                           </a:solidFill>
                           <a:latin typeface="Arial"/>
                         </a:rPr>
-                        <a:t>the second arm's flat</a:t>
-                      </a:r>
-                    </a:p>
-                  </a:txBody>
-                  <a:tcPr marL="54864" marR="54864" marT="18288" marB="18288">
-                    <a:solidFill>
-                      <a:srgbClr val="FFFFFF"/>
-                    </a:solidFill>
-                  </a:tcPr>
-                </a:tc>
-                <a:tc>
-                  <a:txBody>
-                    <a:bodyPr wrap="square"/>
-                    <a:lstStyle/>
-                    <a:p>
-                      <a:r>
-                        <a:rPr sz="1100" b="0">
-                          <a:solidFill>
-                            <a:srgbClr val="282828"/>
-                          </a:solidFill>
-                          <a:latin typeface="Arial"/>
-                        </a:rPr>
-                        <a:t>made from the beam's own focal core</a:t>
+                        <a:t>the record: bench checks, the full test set, figures</a:t>
                       </a:r>
                     </a:p>
                   </a:txBody>
@@ -5778,7 +5997,7 @@
                           </a:solidFill>
                           <a:latin typeface="Arial"/>
                         </a:rPr>
-                        <a:t>one measurement costs</a:t>
+                        <a:t>zwfs_run('tag','ng385', 'NGRID',385)</a:t>
                       </a:r>
                     </a:p>
                   </a:txBody>
@@ -5800,29 +6019,7 @@
                           </a:solidFill>
                           <a:latin typeface="Arial"/>
                         </a:rPr>
-                        <a:t>6 traces (3 per arm), 4 fringe frames</a:t>
-                      </a:r>
-                    </a:p>
-                  </a:txBody>
-                  <a:tcPr marL="54864" marR="54864" marT="18288" marB="18288">
-                    <a:solidFill>
-                      <a:srgbClr val="ECF1F6"/>
-                    </a:solidFill>
-                  </a:tcPr>
-                </a:tc>
-                <a:tc>
-                  <a:txBody>
-                    <a:bodyPr wrap="square"/>
-                    <a:lstStyle/>
-                    <a:p>
-                      <a:r>
-                        <a:rPr sz="1100" b="0">
-                          <a:solidFill>
-                            <a:srgbClr val="282828"/>
-                          </a:solidFill>
-                          <a:latin typeface="Arial"/>
-                        </a:rPr>
-                        <a:t>1 camera frame (I+; 4 frames once per working surface)</a:t>
+                        <a:t>the 1-megapixel camera</a:t>
                       </a:r>
                     </a:p>
                   </a:txBody>
@@ -5846,7 +6043,7 @@
                           </a:solidFill>
                           <a:latin typeface="Arial"/>
                         </a:rPr>
-                        <a:t>polarization hardware</a:t>
+                        <a:t>zwfs_run('MODEL',2048, 'NGRID',385, 'param_file','macos_param_2048.txt')</a:t>
                       </a:r>
                     </a:p>
                   </a:txBody>
@@ -5868,29 +6065,7 @@
                           </a:solidFill>
                           <a:latin typeface="Arial"/>
                         </a:rPr>
-                        <a:t>polarizer, 5 waveplates, analyzer</a:t>
-                      </a:r>
-                    </a:p>
-                  </a:txBody>
-                  <a:tcPr marL="54864" marR="54864" marT="18288" marB="18288">
-                    <a:solidFill>
-                      <a:srgbClr val="FFFFFF"/>
-                    </a:solidFill>
-                  </a:tcPr>
-                </a:tc>
-                <a:tc>
-                  <a:txBody>
-                    <a:bodyPr wrap="square"/>
-                    <a:lstStyle/>
-                    <a:p>
-                      <a:r>
-                        <a:rPr sz="1100" b="0">
-                          <a:solidFill>
-                            <a:srgbClr val="282828"/>
-                          </a:solidFill>
-                          <a:latin typeface="Arial"/>
-                        </a:rPr>
-                        <a:t>none</a:t>
+                        <a:t>the fully sampled setup on a 30 GB machine</a:t>
                       </a:r>
                     </a:p>
                   </a:txBody>
@@ -5914,7 +6089,7 @@
                           </a:solidFill>
                           <a:latin typeface="Arial"/>
                         </a:rPr>
-                        <a:t>moving parts</a:t>
+                        <a:t>zwfs_run('stages',{'battery','color','noise','figs'})</a:t>
                       </a:r>
                     </a:p>
                   </a:txBody>
@@ -5936,29 +6111,7 @@
                           </a:solidFill>
                           <a:latin typeface="Arial"/>
                         </a:rPr>
-                        <a:t>none (polarization-stepped)</a:t>
-                      </a:r>
-                    </a:p>
-                  </a:txBody>
-                  <a:tcPr marL="54864" marR="54864" marT="18288" marB="18288">
-                    <a:solidFill>
-                      <a:srgbClr val="ECF1F6"/>
-                    </a:solidFill>
-                  </a:tcPr>
-                </a:tc>
-                <a:tc>
-                  <a:txBody>
-                    <a:bodyPr wrap="square"/>
-                    <a:lstStyle/>
-                    <a:p>
-                      <a:r>
-                        <a:rPr sz="1100" b="0">
-                          <a:solidFill>
-                            <a:srgbClr val="282828"/>
-                          </a:solidFill>
-                          <a:latin typeface="Arial"/>
-                        </a:rPr>
-                        <a:t>none</a:t>
+                        <a:t>everything on this deck's later slides</a:t>
                       </a:r>
                     </a:p>
                   </a:txBody>
@@ -5982,7 +6135,7 @@
                           </a:solidFill>
                           <a:latin typeface="Arial"/>
                         </a:rPr>
-                        <a:t>null, nothing aligned</a:t>
+                        <a:t>./zwfs_batch.sh TAG "the same arguments"</a:t>
                       </a:r>
                     </a:p>
                   </a:txBody>
@@ -6004,301 +6157,7 @@
                           </a:solidFill>
                           <a:latin typeface="Arial"/>
                         </a:rPr>
-                        <a:t>0.134 nm</a:t>
-                      </a:r>
-                    </a:p>
-                  </a:txBody>
-                  <a:tcPr marL="54864" marR="54864" marT="18288" marB="18288">
-                    <a:solidFill>
-                      <a:srgbClr val="FFFFFF"/>
-                    </a:solidFill>
-                  </a:tcPr>
-                </a:tc>
-                <a:tc>
-                  <a:txBody>
-                    <a:bodyPr wrap="square"/>
-                    <a:lstStyle/>
-                    <a:p>
-                      <a:r>
-                        <a:rPr sz="1100" b="0">
-                          <a:solidFill>
-                            <a:srgbClr val="282828"/>
-                          </a:solidFill>
-                          <a:latin typeface="Arial"/>
-                        </a:rPr>
-                        <a:t>0 by construction (the flat is the reference)</a:t>
-                      </a:r>
-                    </a:p>
-                  </a:txBody>
-                  <a:tcPr marL="54864" marR="54864" marT="18288" marB="18288">
-                    <a:solidFill>
-                      <a:srgbClr val="FFFFFF"/>
-                    </a:solidFill>
-                  </a:tcPr>
-                </a:tc>
-              </a:tr>
-              <a:tr h="280035">
-                <a:tc>
-                  <a:txBody>
-                    <a:bodyPr wrap="square"/>
-                    <a:lstStyle/>
-                    <a:p>
-                      <a:r>
-                        <a:rPr sz="1100" b="0">
-                          <a:solidFill>
-                            <a:srgbClr val="282828"/>
-                          </a:solidFill>
-                          <a:latin typeface="Arial"/>
-                        </a:rPr>
-                        <a:t>response falls off at</a:t>
-                      </a:r>
-                    </a:p>
-                  </a:txBody>
-                  <a:tcPr marL="54864" marR="54864" marT="18288" marB="18288">
-                    <a:solidFill>
-                      <a:srgbClr val="ECF1F6"/>
-                    </a:solidFill>
-                  </a:tcPr>
-                </a:tc>
-                <a:tc>
-                  <a:txBody>
-                    <a:bodyPr wrap="square"/>
-                    <a:lstStyle/>
-                    <a:p>
-                      <a:r>
-                        <a:rPr sz="1100" b="0">
-                          <a:solidFill>
-                            <a:srgbClr val="282828"/>
-                          </a:solidFill>
-                          <a:latin typeface="Arial"/>
-                        </a:rPr>
-                        <a:t>fine patterns: 0.50 at the 96×96 checkerboard</a:t>
-                      </a:r>
-                    </a:p>
-                  </a:txBody>
-                  <a:tcPr marL="54864" marR="54864" marT="18288" marB="18288">
-                    <a:solidFill>
-                      <a:srgbClr val="ECF1F6"/>
-                    </a:solidFill>
-                  </a:tcPr>
-                </a:tc>
-                <a:tc>
-                  <a:txBody>
-                    <a:bodyPr wrap="square"/>
-                    <a:lstStyle/>
-                    <a:p>
-                      <a:r>
-                        <a:rPr sz="1100" b="0">
-                          <a:solidFill>
-                            <a:srgbClr val="282828"/>
-                          </a:solidFill>
-                          <a:latin typeface="Arial"/>
-                        </a:rPr>
-                        <a:t>0.5 to 1 cycle across the pupil (0.5 at 1); piston unseen</a:t>
-                      </a:r>
-                    </a:p>
-                  </a:txBody>
-                  <a:tcPr marL="54864" marR="54864" marT="18288" marB="18288">
-                    <a:solidFill>
-                      <a:srgbClr val="ECF1F6"/>
-                    </a:solidFill>
-                  </a:tcPr>
-                </a:tc>
-              </a:tr>
-              <a:tr h="280035">
-                <a:tc>
-                  <a:txBody>
-                    <a:bodyPr wrap="square"/>
-                    <a:lstStyle/>
-                    <a:p>
-                      <a:r>
-                        <a:rPr sz="1100" b="0">
-                          <a:solidFill>
-                            <a:srgbClr val="282828"/>
-                          </a:solidFill>
-                          <a:latin typeface="Arial"/>
-                        </a:rPr>
-                        <a:t>working surface it can handle</a:t>
-                      </a:r>
-                    </a:p>
-                  </a:txBody>
-                  <a:tcPr marL="54864" marR="54864" marT="18288" marB="18288">
-                    <a:solidFill>
-                      <a:srgbClr val="FFFFFF"/>
-                    </a:solidFill>
-                  </a:tcPr>
-                </a:tc>
-                <a:tc>
-                  <a:txBody>
-                    <a:bodyPr wrap="square"/>
-                    <a:lstStyle/>
-                    <a:p>
-                      <a:r>
-                        <a:rPr sz="1100" b="0">
-                          <a:solidFill>
-                            <a:srgbClr val="282828"/>
-                          </a:solidFill>
-                          <a:latin typeface="Arial"/>
-                        </a:rPr>
-                        <a:t>480 nm rms and beyond</a:t>
-                      </a:r>
-                    </a:p>
-                  </a:txBody>
-                  <a:tcPr marL="54864" marR="54864" marT="18288" marB="18288">
-                    <a:solidFill>
-                      <a:srgbClr val="FFFFFF"/>
-                    </a:solidFill>
-                  </a:tcPr>
-                </a:tc>
-                <a:tc>
-                  <a:txBody>
-                    <a:bodyPr wrap="square"/>
-                    <a:lstStyle/>
-                    <a:p>
-                      <a:r>
-                        <a:rPr sz="1100" b="0">
-                          <a:solidFill>
-                            <a:srgbClr val="282828"/>
-                          </a:solidFill>
-                          <a:latin typeface="Arial"/>
-                        </a:rPr>
-                        <a:t>40 nm rms one-frame (1 mm actuators), 50–60 nm four-frame</a:t>
-                      </a:r>
-                    </a:p>
-                  </a:txBody>
-                  <a:tcPr marL="54864" marR="54864" marT="18288" marB="18288">
-                    <a:solidFill>
-                      <a:srgbClr val="FFFFFF"/>
-                    </a:solidFill>
-                  </a:tcPr>
-                </a:tc>
-              </a:tr>
-              <a:tr h="280035">
-                <a:tc>
-                  <a:txBody>
-                    <a:bodyPr wrap="square"/>
-                    <a:lstStyle/>
-                    <a:p>
-                      <a:r>
-                        <a:rPr sz="1100" b="0">
-                          <a:solidFill>
-                            <a:srgbClr val="282828"/>
-                          </a:solidFill>
-                          <a:latin typeface="Arial"/>
-                        </a:rPr>
-                        <a:t>a 10 nm actuator change on a 30 nm surface</a:t>
-                      </a:r>
-                    </a:p>
-                  </a:txBody>
-                  <a:tcPr marL="54864" marR="54864" marT="18288" marB="18288">
-                    <a:solidFill>
-                      <a:srgbClr val="ECF1F6"/>
-                    </a:solidFill>
-                  </a:tcPr>
-                </a:tc>
-                <a:tc>
-                  <a:txBody>
-                    <a:bodyPr wrap="square"/>
-                    <a:lstStyle/>
-                    <a:p>
-                      <a:r>
-                        <a:rPr sz="1100" b="0">
-                          <a:solidFill>
-                            <a:srgbClr val="282828"/>
-                          </a:solidFill>
-                          <a:latin typeface="Arial"/>
-                        </a:rPr>
-                        <a:t>gain 0.92, floor 46 pm</a:t>
-                      </a:r>
-                    </a:p>
-                  </a:txBody>
-                  <a:tcPr marL="54864" marR="54864" marT="18288" marB="18288">
-                    <a:solidFill>
-                      <a:srgbClr val="ECF1F6"/>
-                    </a:solidFill>
-                  </a:tcPr>
-                </a:tc>
-                <a:tc>
-                  <a:txBody>
-                    <a:bodyPr wrap="square"/>
-                    <a:lstStyle/>
-                    <a:p>
-                      <a:r>
-                        <a:rPr sz="1100" b="0">
-                          <a:solidFill>
-                            <a:srgbClr val="282828"/>
-                          </a:solidFill>
-                          <a:latin typeface="Arial"/>
-                        </a:rPr>
-                        <a:t>gain 0.98, floor 19 pm (I+, one frame)</a:t>
-                      </a:r>
-                    </a:p>
-                  </a:txBody>
-                  <a:tcPr marL="54864" marR="54864" marT="18288" marB="18288">
-                    <a:solidFill>
-                      <a:srgbClr val="ECF1F6"/>
-                    </a:solidFill>
-                  </a:tcPr>
-                </a:tc>
-              </a:tr>
-              <a:tr h="280035">
-                <a:tc>
-                  <a:txBody>
-                    <a:bodyPr wrap="square"/>
-                    <a:lstStyle/>
-                    <a:p>
-                      <a:r>
-                        <a:rPr sz="1100" b="0">
-                          <a:solidFill>
-                            <a:srgbClr val="282828"/>
-                          </a:solidFill>
-                          <a:latin typeface="Arial"/>
-                        </a:rPr>
-                        <a:t>photons per state for 1 pm</a:t>
-                      </a:r>
-                    </a:p>
-                  </a:txBody>
-                  <a:tcPr marL="54864" marR="54864" marT="18288" marB="18288">
-                    <a:solidFill>
-                      <a:srgbClr val="FFFFFF"/>
-                    </a:solidFill>
-                  </a:tcPr>
-                </a:tc>
-                <a:tc>
-                  <a:txBody>
-                    <a:bodyPr wrap="square"/>
-                    <a:lstStyle/>
-                    <a:p>
-                      <a:r>
-                        <a:rPr sz="1100" b="0">
-                          <a:solidFill>
-                            <a:srgbClr val="282828"/>
-                          </a:solidFill>
-                          <a:latin typeface="Arial"/>
-                        </a:rPr>
-                        <a:t>8×10¹⁴</a:t>
-                      </a:r>
-                    </a:p>
-                  </a:txBody>
-                  <a:tcPr marL="54864" marR="54864" marT="18288" marB="18288">
-                    <a:solidFill>
-                      <a:srgbClr val="FFFFFF"/>
-                    </a:solidFill>
-                  </a:tcPr>
-                </a:tc>
-                <a:tc>
-                  <a:txBody>
-                    <a:bodyPr wrap="square"/>
-                    <a:lstStyle/>
-                    <a:p>
-                      <a:r>
-                        <a:rPr sz="1100" b="0">
-                          <a:solidFill>
-                            <a:srgbClr val="282828"/>
-                          </a:solidFill>
-                          <a:latin typeface="Arial"/>
-                        </a:rPr>
-                        <a:t>0.4 to 1×10¹⁴</a:t>
+                        <a:t>unattended, memory-capped, logged</a:t>
                       </a:r>
                     </a:p>
                   </a:txBody>
@@ -6315,13 +6174,13 @@
       </p:graphicFrame>
       <p:sp>
         <p:nvSpPr>
-          <p:cNvPr id="5" name="TextBox 4"/>
+          <p:cNvPr id="6" name="TextBox 5"/>
           <p:cNvSpPr txBox="1"/>
           <p:nvPr/>
         </p:nvSpPr>
         <p:spPr>
           <a:xfrm>
-            <a:off x="411480" y="4245102"/>
+            <a:off x="411480" y="4292346"/>
             <a:ext cx="11368735" cy="274320"/>
           </a:xfrm>
           <a:prstGeom prst="rect">
@@ -6347,20 +6206,20 @@
                 </a:solidFill>
                 <a:latin typeface="Arial"/>
               </a:rPr>
-              <a:t>•  Reading: the interferometer measures any surface and pays at fine patterns; the sensor measures small changes on a small working surface more cheaply — one frame, no polarization train, an equal or better floor — and pays at the lowest spatial frequencies and in the surface it can handle.</a:t>
-            </a:r>
-          </a:p>
-        </p:txBody>
-      </p:sp>
-      <p:sp>
-        <p:nvSpPr>
-          <p:cNvPr id="6" name="TextBox 5"/>
+              <a:t>•  Checks that run every time: the no-mask round trip through the bracket (must return the field unchanged); the reference-wave model against the engine's own field; the pupil brightness must not change with the DM shape; the sampling checks (pixels across the dimple, camera pixels per actuator); and the search for the camera-to-DM mirror/transpose and sign.</a:t>
+            </a:r>
+          </a:p>
+        </p:txBody>
+      </p:sp>
+      <p:sp>
+        <p:nvSpPr>
+          <p:cNvPr id="7" name="TextBox 6"/>
           <p:cNvSpPr txBox="1"/>
           <p:nvPr/>
         </p:nvSpPr>
         <p:spPr>
           <a:xfrm>
-            <a:off x="411480" y="5164836"/>
+            <a:off x="411480" y="5459730"/>
             <a:ext cx="11368735" cy="274320"/>
           </a:xfrm>
           <a:prstGeom prst="rect">
@@ -6386,7 +6245,7 @@
                 </a:solidFill>
                 <a:latin typeface="Arial"/>
               </a:rPr>
-              <a:t>PSI column: tg_psi_dm96 run 10 and S4/S5; sensor column: the fully sampled setup (slide 9) except photons (development sampling).  Both in actuator units through the same code (dm_gauge_lib).</a:t>
+              <a:t>Reproduction check: 64 lines of results against the stage-7 report, 8 differ in the last printed digit (the actuator fit's solver tolerance).  README "Run it yourself" carries the parameter table.</a:t>
             </a:r>
           </a:p>
         </p:txBody>
@@ -6443,7 +6302,7 @@
                 </a:solidFill>
                 <a:latin typeface="Arial"/>
               </a:rPr>
-              <a:t>What the Zernike-sensor literature offers, in priority order</a:t>
+              <a:t>Side by side with the Twyman–Green</a:t>
             </a:r>
           </a:p>
           <a:p>
@@ -6459,7 +6318,7 @@
                 </a:solidFill>
                 <a:latin typeface="Arial"/>
               </a:rPr>
-              <a:t>Twelve papers read; the first import — re-computing the reference wave — is now built and measured (slide 8)</a:t>
+              <a:t>The interferometer loses response at fine patterns and never fails; the sensor, calibrated on its working surface, reads a change to 5 pm up to 50–60 nm</a:t>
             </a:r>
           </a:p>
         </p:txBody>
@@ -6518,7 +6377,7 @@
         </p:nvGraphicFramePr>
         <p:xfrm>
           <a:off x="411480" y="1298448"/>
-          <a:ext cx="11368734" cy="3091815"/>
+          <a:ext cx="11368734" cy="3366135"/>
         </p:xfrm>
         <a:graphic>
           <a:graphicData uri="http://schemas.openxmlformats.org/drawingml/2006/table">
@@ -6527,15 +6386,27 @@
                 <a:tableStyleId>{5C22544A-7EE6-4342-B048-85BDC9FD1C3A}</a:tableStyleId>
               </a:tblPr>
               <a:tblGrid>
-                <a:gridCol w="218948"/>
-                <a:gridCol w="2691327"/>
-                <a:gridCol w="8458459"/>
+                <a:gridCol w="2399431"/>
+                <a:gridCol w="2570819"/>
+                <a:gridCol w="6398484"/>
               </a:tblGrid>
               <a:tr h="280035">
                 <a:tc>
                   <a:txBody>
                     <a:bodyPr wrap="square"/>
                     <a:lstStyle/>
+                    <a:p/>
+                  </a:txBody>
+                  <a:tcPr marL="54864" marR="54864" marT="18288" marB="18288">
+                    <a:solidFill>
+                      <a:srgbClr val="1F4E79"/>
+                    </a:solidFill>
+                  </a:tcPr>
+                </a:tc>
+                <a:tc>
+                  <a:txBody>
+                    <a:bodyPr wrap="square"/>
+                    <a:lstStyle/>
                     <a:p>
                       <a:r>
                         <a:rPr sz="1100" b="1">
@@ -6544,7 +6415,7 @@
                           </a:solidFill>
                           <a:latin typeface="Arial"/>
                         </a:rPr>
-                        <a:t>#</a:t>
+                        <a:t>Twyman–Green PSI (measured)</a:t>
                       </a:r>
                     </a:p>
                   </a:txBody>
@@ -6566,7 +6437,7 @@
                           </a:solidFill>
                           <a:latin typeface="Arial"/>
                         </a:rPr>
-                        <a:t>paper</a:t>
+                        <a:t>Zernike sensor (measured)</a:t>
                       </a:r>
                     </a:p>
                   </a:txBody>
@@ -6576,25 +6447,71 @@
                     </a:solidFill>
                   </a:tcPr>
                 </a:tc>
-                <a:tc>
-                  <a:txBody>
-                    <a:bodyPr wrap="square"/>
-                    <a:lstStyle/>
-                    <a:p>
-                      <a:r>
-                        <a:rPr sz="1100" b="1">
-                          <a:solidFill>
-                            <a:srgbClr val="FFFFFF"/>
-                          </a:solidFill>
-                          <a:latin typeface="Arial"/>
-                        </a:rPr>
-                        <a:t>what it gives this model</a:t>
-                      </a:r>
-                    </a:p>
-                  </a:txBody>
-                  <a:tcPr marL="54864" marR="54864" marT="18288" marB="18288">
-                    <a:solidFill>
-                      <a:srgbClr val="1F4E79"/>
+              </a:tr>
+              <a:tr h="280035">
+                <a:tc>
+                  <a:txBody>
+                    <a:bodyPr wrap="square"/>
+                    <a:lstStyle/>
+                    <a:p>
+                      <a:r>
+                        <a:rPr sz="1100" b="0">
+                          <a:solidFill>
+                            <a:srgbClr val="282828"/>
+                          </a:solidFill>
+                          <a:latin typeface="Arial"/>
+                        </a:rPr>
+                        <a:t>reference beam</a:t>
+                      </a:r>
+                    </a:p>
+                  </a:txBody>
+                  <a:tcPr marL="54864" marR="54864" marT="18288" marB="18288">
+                    <a:solidFill>
+                      <a:srgbClr val="FFFFFF"/>
+                    </a:solidFill>
+                  </a:tcPr>
+                </a:tc>
+                <a:tc>
+                  <a:txBody>
+                    <a:bodyPr wrap="square"/>
+                    <a:lstStyle/>
+                    <a:p>
+                      <a:r>
+                        <a:rPr sz="1100" b="0">
+                          <a:solidFill>
+                            <a:srgbClr val="282828"/>
+                          </a:solidFill>
+                          <a:latin typeface="Arial"/>
+                        </a:rPr>
+                        <a:t>the second arm's flat</a:t>
+                      </a:r>
+                    </a:p>
+                  </a:txBody>
+                  <a:tcPr marL="54864" marR="54864" marT="18288" marB="18288">
+                    <a:solidFill>
+                      <a:srgbClr val="FFFFFF"/>
+                    </a:solidFill>
+                  </a:tcPr>
+                </a:tc>
+                <a:tc>
+                  <a:txBody>
+                    <a:bodyPr wrap="square"/>
+                    <a:lstStyle/>
+                    <a:p>
+                      <a:r>
+                        <a:rPr sz="1100" b="0">
+                          <a:solidFill>
+                            <a:srgbClr val="282828"/>
+                          </a:solidFill>
+                          <a:latin typeface="Arial"/>
+                        </a:rPr>
+                        <a:t>made from the beam's own focal core</a:t>
+                      </a:r>
+                    </a:p>
+                  </a:txBody>
+                  <a:tcPr marL="54864" marR="54864" marT="18288" marB="18288">
+                    <a:solidFill>
+                      <a:srgbClr val="FFFFFF"/>
                     </a:solidFill>
                   </a:tcPr>
                 </a:tc>
@@ -6612,7 +6529,75 @@
                           </a:solidFill>
                           <a:latin typeface="Arial"/>
                         </a:rPr>
-                        <a:t>1</a:t>
+                        <a:t>one measurement costs</a:t>
+                      </a:r>
+                    </a:p>
+                  </a:txBody>
+                  <a:tcPr marL="54864" marR="54864" marT="18288" marB="18288">
+                    <a:solidFill>
+                      <a:srgbClr val="ECF1F6"/>
+                    </a:solidFill>
+                  </a:tcPr>
+                </a:tc>
+                <a:tc>
+                  <a:txBody>
+                    <a:bodyPr wrap="square"/>
+                    <a:lstStyle/>
+                    <a:p>
+                      <a:r>
+                        <a:rPr sz="1100" b="0">
+                          <a:solidFill>
+                            <a:srgbClr val="282828"/>
+                          </a:solidFill>
+                          <a:latin typeface="Arial"/>
+                        </a:rPr>
+                        <a:t>6 traces (3 per arm), 4 fringe frames</a:t>
+                      </a:r>
+                    </a:p>
+                  </a:txBody>
+                  <a:tcPr marL="54864" marR="54864" marT="18288" marB="18288">
+                    <a:solidFill>
+                      <a:srgbClr val="ECF1F6"/>
+                    </a:solidFill>
+                  </a:tcPr>
+                </a:tc>
+                <a:tc>
+                  <a:txBody>
+                    <a:bodyPr wrap="square"/>
+                    <a:lstStyle/>
+                    <a:p>
+                      <a:r>
+                        <a:rPr sz="1100" b="0">
+                          <a:solidFill>
+                            <a:srgbClr val="282828"/>
+                          </a:solidFill>
+                          <a:latin typeface="Arial"/>
+                        </a:rPr>
+                        <a:t>1 or 4 camera frames; 256 calibration frames once per working surface</a:t>
+                      </a:r>
+                    </a:p>
+                  </a:txBody>
+                  <a:tcPr marL="54864" marR="54864" marT="18288" marB="18288">
+                    <a:solidFill>
+                      <a:srgbClr val="ECF1F6"/>
+                    </a:solidFill>
+                  </a:tcPr>
+                </a:tc>
+              </a:tr>
+              <a:tr h="280035">
+                <a:tc>
+                  <a:txBody>
+                    <a:bodyPr wrap="square"/>
+                    <a:lstStyle/>
+                    <a:p>
+                      <a:r>
+                        <a:rPr sz="1100" b="0">
+                          <a:solidFill>
+                            <a:srgbClr val="282828"/>
+                          </a:solidFill>
+                          <a:latin typeface="Arial"/>
+                        </a:rPr>
+                        <a:t>polarization hardware</a:t>
                       </a:r>
                     </a:p>
                   </a:txBody>
@@ -6634,7 +6619,7 @@
                           </a:solidFill>
                           <a:latin typeface="Arial"/>
                         </a:rPr>
-                        <a:t>Ruane, Wallace, Steeves et al. 2020, JATIS 6, 045005</a:t>
+                        <a:t>polarizer, 5 waveplates, analyzer</a:t>
                       </a:r>
                     </a:p>
                   </a:txBody>
@@ -6656,7 +6641,143 @@
                           </a:solidFill>
                           <a:latin typeface="Arial"/>
                         </a:rPr>
-                        <a:t>Exact per-pixel reconstruction from the pupil amplitude, the reference wave b and the masked image; a sensitivity factor per pixel; a four-term systematic budget; 1 pm reached at 4.4×10⁵ frames; no loss to 25 % bandwidth</a:t>
+                        <a:t>none</a:t>
+                      </a:r>
+                    </a:p>
+                  </a:txBody>
+                  <a:tcPr marL="54864" marR="54864" marT="18288" marB="18288">
+                    <a:solidFill>
+                      <a:srgbClr val="FFFFFF"/>
+                    </a:solidFill>
+                  </a:tcPr>
+                </a:tc>
+              </a:tr>
+              <a:tr h="280035">
+                <a:tc>
+                  <a:txBody>
+                    <a:bodyPr wrap="square"/>
+                    <a:lstStyle/>
+                    <a:p>
+                      <a:r>
+                        <a:rPr sz="1100" b="0">
+                          <a:solidFill>
+                            <a:srgbClr val="282828"/>
+                          </a:solidFill>
+                          <a:latin typeface="Arial"/>
+                        </a:rPr>
+                        <a:t>moving parts</a:t>
+                      </a:r>
+                    </a:p>
+                  </a:txBody>
+                  <a:tcPr marL="54864" marR="54864" marT="18288" marB="18288">
+                    <a:solidFill>
+                      <a:srgbClr val="ECF1F6"/>
+                    </a:solidFill>
+                  </a:tcPr>
+                </a:tc>
+                <a:tc>
+                  <a:txBody>
+                    <a:bodyPr wrap="square"/>
+                    <a:lstStyle/>
+                    <a:p>
+                      <a:r>
+                        <a:rPr sz="1100" b="0">
+                          <a:solidFill>
+                            <a:srgbClr val="282828"/>
+                          </a:solidFill>
+                          <a:latin typeface="Arial"/>
+                        </a:rPr>
+                        <a:t>none (polarization-stepped)</a:t>
+                      </a:r>
+                    </a:p>
+                  </a:txBody>
+                  <a:tcPr marL="54864" marR="54864" marT="18288" marB="18288">
+                    <a:solidFill>
+                      <a:srgbClr val="ECF1F6"/>
+                    </a:solidFill>
+                  </a:tcPr>
+                </a:tc>
+                <a:tc>
+                  <a:txBody>
+                    <a:bodyPr wrap="square"/>
+                    <a:lstStyle/>
+                    <a:p>
+                      <a:r>
+                        <a:rPr sz="1100" b="0">
+                          <a:solidFill>
+                            <a:srgbClr val="282828"/>
+                          </a:solidFill>
+                          <a:latin typeface="Arial"/>
+                        </a:rPr>
+                        <a:t>none</a:t>
+                      </a:r>
+                    </a:p>
+                  </a:txBody>
+                  <a:tcPr marL="54864" marR="54864" marT="18288" marB="18288">
+                    <a:solidFill>
+                      <a:srgbClr val="ECF1F6"/>
+                    </a:solidFill>
+                  </a:tcPr>
+                </a:tc>
+              </a:tr>
+              <a:tr h="280035">
+                <a:tc>
+                  <a:txBody>
+                    <a:bodyPr wrap="square"/>
+                    <a:lstStyle/>
+                    <a:p>
+                      <a:r>
+                        <a:rPr sz="1100" b="0">
+                          <a:solidFill>
+                            <a:srgbClr val="282828"/>
+                          </a:solidFill>
+                          <a:latin typeface="Arial"/>
+                        </a:rPr>
+                        <a:t>null, nothing aligned</a:t>
+                      </a:r>
+                    </a:p>
+                  </a:txBody>
+                  <a:tcPr marL="54864" marR="54864" marT="18288" marB="18288">
+                    <a:solidFill>
+                      <a:srgbClr val="FFFFFF"/>
+                    </a:solidFill>
+                  </a:tcPr>
+                </a:tc>
+                <a:tc>
+                  <a:txBody>
+                    <a:bodyPr wrap="square"/>
+                    <a:lstStyle/>
+                    <a:p>
+                      <a:r>
+                        <a:rPr sz="1100" b="0">
+                          <a:solidFill>
+                            <a:srgbClr val="282828"/>
+                          </a:solidFill>
+                          <a:latin typeface="Arial"/>
+                        </a:rPr>
+                        <a:t>0.134 nm</a:t>
+                      </a:r>
+                    </a:p>
+                  </a:txBody>
+                  <a:tcPr marL="54864" marR="54864" marT="18288" marB="18288">
+                    <a:solidFill>
+                      <a:srgbClr val="FFFFFF"/>
+                    </a:solidFill>
+                  </a:tcPr>
+                </a:tc>
+                <a:tc>
+                  <a:txBody>
+                    <a:bodyPr wrap="square"/>
+                    <a:lstStyle/>
+                    <a:p>
+                      <a:r>
+                        <a:rPr sz="1100" b="0">
+                          <a:solidFill>
+                            <a:srgbClr val="282828"/>
+                          </a:solidFill>
+                          <a:latin typeface="Arial"/>
+                        </a:rPr>
+                        <a:t>0 by construction (the flat is the reference)</a:t>
                       </a:r>
                     </a:p>
                   </a:txBody>
@@ -6680,7 +6801,7 @@
                           </a:solidFill>
                           <a:latin typeface="Arial"/>
                         </a:rPr>
-                        <a:t>2</a:t>
+                        <a:t>response falls off at</a:t>
                       </a:r>
                     </a:p>
                   </a:txBody>
@@ -6702,7 +6823,7 @@
                           </a:solidFill>
                           <a:latin typeface="Arial"/>
                         </a:rPr>
-                        <a:t>Doelman, Fagginger Auer, Escuti, Snik 2019, Opt. Lett. 44, 17</a:t>
+                        <a:t>fine patterns: 0.50 at the 96×96 checkerboard</a:t>
                       </a:r>
                     </a:p>
                   </a:txBody>
@@ -6724,13 +6845,81 @@
                           </a:solidFill>
                           <a:latin typeface="Arial"/>
                         </a:rPr>
-                        <a:t>Vector Zernike: ±π/2 on opposite circular polarizations gives two pupil images, an exact phase-and-amplitude solution, an iterated b, achromatic to 100 % bandwidth; the leakage terms are written down</a:t>
+                        <a:t>0.5 to 1 cycle across the pupil (0.5 at 1); piston unseen</a:t>
                       </a:r>
                     </a:p>
                   </a:txBody>
                   <a:tcPr marL="54864" marR="54864" marT="18288" marB="18288">
                     <a:solidFill>
                       <a:srgbClr val="ECF1F6"/>
+                    </a:solidFill>
+                  </a:tcPr>
+                </a:tc>
+              </a:tr>
+              <a:tr h="280035">
+                <a:tc>
+                  <a:txBody>
+                    <a:bodyPr wrap="square"/>
+                    <a:lstStyle/>
+                    <a:p>
+                      <a:r>
+                        <a:rPr sz="1100" b="0">
+                          <a:solidFill>
+                            <a:srgbClr val="282828"/>
+                          </a:solidFill>
+                          <a:latin typeface="Arial"/>
+                        </a:rPr>
+                        <a:t>working surface it can handle</a:t>
+                      </a:r>
+                    </a:p>
+                  </a:txBody>
+                  <a:tcPr marL="54864" marR="54864" marT="18288" marB="18288">
+                    <a:solidFill>
+                      <a:srgbClr val="FFFFFF"/>
+                    </a:solidFill>
+                  </a:tcPr>
+                </a:tc>
+                <a:tc>
+                  <a:txBody>
+                    <a:bodyPr wrap="square"/>
+                    <a:lstStyle/>
+                    <a:p>
+                      <a:r>
+                        <a:rPr sz="1100" b="0">
+                          <a:solidFill>
+                            <a:srgbClr val="282828"/>
+                          </a:solidFill>
+                          <a:latin typeface="Arial"/>
+                        </a:rPr>
+                        <a:t>480 nm rms and beyond</a:t>
+                      </a:r>
+                    </a:p>
+                  </a:txBody>
+                  <a:tcPr marL="54864" marR="54864" marT="18288" marB="18288">
+                    <a:solidFill>
+                      <a:srgbClr val="FFFFFF"/>
+                    </a:solidFill>
+                  </a:tcPr>
+                </a:tc>
+                <a:tc>
+                  <a:txBody>
+                    <a:bodyPr wrap="square"/>
+                    <a:lstStyle/>
+                    <a:p>
+                      <a:r>
+                        <a:rPr sz="1100" b="0">
+                          <a:solidFill>
+                            <a:srgbClr val="282828"/>
+                          </a:solidFill>
+                          <a:latin typeface="Arial"/>
+                        </a:rPr>
+                        <a:t>40 nm rms one-frame (1 mm actuators), 50–60 nm four-frame</a:t>
+                      </a:r>
+                    </a:p>
+                  </a:txBody>
+                  <a:tcPr marL="54864" marR="54864" marT="18288" marB="18288">
+                    <a:solidFill>
+                      <a:srgbClr val="FFFFFF"/>
                     </a:solidFill>
                   </a:tcPr>
                 </a:tc>
@@ -6748,7 +6937,75 @@
                           </a:solidFill>
                           <a:latin typeface="Arial"/>
                         </a:rPr>
-                        <a:t>3</a:t>
+                        <a:t>a 10 nm actuator change on a 30 nm surface</a:t>
+                      </a:r>
+                    </a:p>
+                  </a:txBody>
+                  <a:tcPr marL="54864" marR="54864" marT="18288" marB="18288">
+                    <a:solidFill>
+                      <a:srgbClr val="ECF1F6"/>
+                    </a:solidFill>
+                  </a:tcPr>
+                </a:tc>
+                <a:tc>
+                  <a:txBody>
+                    <a:bodyPr wrap="square"/>
+                    <a:lstStyle/>
+                    <a:p>
+                      <a:r>
+                        <a:rPr sz="1100" b="0">
+                          <a:solidFill>
+                            <a:srgbClr val="282828"/>
+                          </a:solidFill>
+                          <a:latin typeface="Arial"/>
+                        </a:rPr>
+                        <a:t>gain 0.92, floor 46 pm</a:t>
+                      </a:r>
+                    </a:p>
+                  </a:txBody>
+                  <a:tcPr marL="54864" marR="54864" marT="18288" marB="18288">
+                    <a:solidFill>
+                      <a:srgbClr val="ECF1F6"/>
+                    </a:solidFill>
+                  </a:tcPr>
+                </a:tc>
+                <a:tc>
+                  <a:txBody>
+                    <a:bodyPr wrap="square"/>
+                    <a:lstStyle/>
+                    <a:p>
+                      <a:r>
+                        <a:rPr sz="1100" b="0">
+                          <a:solidFill>
+                            <a:srgbClr val="282828"/>
+                          </a:solidFill>
+                          <a:latin typeface="Arial"/>
+                        </a:rPr>
+                        <a:t>gain 0.99, floor 5 pm (stepped, four frames; matrix on the surface) — gain 1.05, floor 23 pm (linear, one frame)</a:t>
+                      </a:r>
+                    </a:p>
+                  </a:txBody>
+                  <a:tcPr marL="54864" marR="54864" marT="18288" marB="18288">
+                    <a:solidFill>
+                      <a:srgbClr val="ECF1F6"/>
+                    </a:solidFill>
+                  </a:tcPr>
+                </a:tc>
+              </a:tr>
+              <a:tr h="280035">
+                <a:tc>
+                  <a:txBody>
+                    <a:bodyPr wrap="square"/>
+                    <a:lstStyle/>
+                    <a:p>
+                      <a:r>
+                        <a:rPr sz="1100" b="0">
+                          <a:solidFill>
+                            <a:srgbClr val="282828"/>
+                          </a:solidFill>
+                          <a:latin typeface="Arial"/>
+                        </a:rPr>
+                        <a:t>photons per state for 1 pm</a:t>
                       </a:r>
                     </a:p>
                   </a:txBody>
@@ -6770,7 +7027,7 @@
                           </a:solidFill>
                           <a:latin typeface="Arial"/>
                         </a:rPr>
-                        <a:t>N'Diaye, Vigan, Dohlen et al. 2016, A&amp;A 592, A79 (ZELDA II)</a:t>
+                        <a:t>8×10¹⁴</a:t>
                       </a:r>
                     </a:p>
                   </a:txBody>
@@ -6792,217 +7049,13 @@
                           </a:solidFill>
                           <a:latin typeface="Arial"/>
                         </a:rPr>
-                        <a:t>Second-order reconstruction with b from the mask model; 1.06 λ/D at π/2; range −0.14 to +0.36 λ; the sensitivity factor drifts 10 % day to day on SPHERE</a:t>
+                        <a:t>0.4 to 1×10¹⁴</a:t>
                       </a:r>
                     </a:p>
                   </a:txBody>
                   <a:tcPr marL="54864" marR="54864" marT="18288" marB="18288">
                     <a:solidFill>
                       <a:srgbClr val="FFFFFF"/>
-                    </a:solidFill>
-                  </a:tcPr>
-                </a:tc>
-              </a:tr>
-              <a:tr h="468630">
-                <a:tc>
-                  <a:txBody>
-                    <a:bodyPr wrap="square"/>
-                    <a:lstStyle/>
-                    <a:p>
-                      <a:r>
-                        <a:rPr sz="1100" b="0">
-                          <a:solidFill>
-                            <a:srgbClr val="282828"/>
-                          </a:solidFill>
-                          <a:latin typeface="Arial"/>
-                        </a:rPr>
-                        <a:t>4</a:t>
-                      </a:r>
-                    </a:p>
-                  </a:txBody>
-                  <a:tcPr marL="54864" marR="54864" marT="18288" marB="18288">
-                    <a:solidFill>
-                      <a:srgbClr val="ECF1F6"/>
-                    </a:solidFill>
-                  </a:tcPr>
-                </a:tc>
-                <a:tc>
-                  <a:txBody>
-                    <a:bodyPr wrap="square"/>
-                    <a:lstStyle/>
-                    <a:p>
-                      <a:r>
-                        <a:rPr sz="1100" b="0">
-                          <a:solidFill>
-                            <a:srgbClr val="282828"/>
-                          </a:solidFill>
-                          <a:latin typeface="Arial"/>
-                        </a:rPr>
-                        <a:t>Chambouleyron, Cissé, Salama, Haffert, Wallace et al. 2024, SPIE 13097</a:t>
-                      </a:r>
-                    </a:p>
-                  </a:txBody>
-                  <a:tcPr marL="54864" marR="54864" marT="18288" marB="18288">
-                    <a:solidFill>
-                      <a:srgbClr val="ECF1F6"/>
-                    </a:solidFill>
-                  </a:tcPr>
-                </a:tc>
-                <a:tc>
-                  <a:txBody>
-                    <a:bodyPr wrap="square"/>
-                    <a:lstStyle/>
-                    <a:p>
-                      <a:r>
-                        <a:rPr sz="1100" b="0">
-                          <a:solidFill>
-                            <a:srgbClr val="282828"/>
-                          </a:solidFill>
-                          <a:latin typeface="Arial"/>
-                        </a:rPr>
-                        <a:t>A phase-shifted pair (±π/2) yields cos φ and sin φ; iterative reconstructors reach about 1 rad rms; the bench limits were polarization crosstalk and defocus between the two pupils</a:t>
-                      </a:r>
-                    </a:p>
-                  </a:txBody>
-                  <a:tcPr marL="54864" marR="54864" marT="18288" marB="18288">
-                    <a:solidFill>
-                      <a:srgbClr val="ECF1F6"/>
-                    </a:solidFill>
-                  </a:tcPr>
-                </a:tc>
-              </a:tr>
-              <a:tr h="468630">
-                <a:tc>
-                  <a:txBody>
-                    <a:bodyPr wrap="square"/>
-                    <a:lstStyle/>
-                    <a:p>
-                      <a:r>
-                        <a:rPr sz="1100" b="0">
-                          <a:solidFill>
-                            <a:srgbClr val="282828"/>
-                          </a:solidFill>
-                          <a:latin typeface="Arial"/>
-                        </a:rPr>
-                        <a:t>5</a:t>
-                      </a:r>
-                    </a:p>
-                  </a:txBody>
-                  <a:tcPr marL="54864" marR="54864" marT="18288" marB="18288">
-                    <a:solidFill>
-                      <a:srgbClr val="FFFFFF"/>
-                    </a:solidFill>
-                  </a:tcPr>
-                </a:tc>
-                <a:tc>
-                  <a:txBody>
-                    <a:bodyPr wrap="square"/>
-                    <a:lstStyle/>
-                    <a:p>
-                      <a:r>
-                        <a:rPr sz="1100" b="0">
-                          <a:solidFill>
-                            <a:srgbClr val="282828"/>
-                          </a:solidFill>
-                          <a:latin typeface="Arial"/>
-                        </a:rPr>
-                        <a:t>Haffert 2024, A&amp;A 683, A113</a:t>
-                      </a:r>
-                    </a:p>
-                  </a:txBody>
-                  <a:tcPr marL="54864" marR="54864" marT="18288" marB="18288">
-                    <a:solidFill>
-                      <a:srgbClr val="FFFFFF"/>
-                    </a:solidFill>
-                  </a:tcPr>
-                </a:tc>
-                <a:tc>
-                  <a:txBody>
-                    <a:bodyPr wrap="square"/>
-                    <a:lstStyle/>
-                    <a:p>
-                      <a:r>
-                        <a:rPr sz="1100" b="0">
-                          <a:solidFill>
-                            <a:srgbClr val="282828"/>
-                          </a:solidFill>
-                          <a:latin typeface="Arial"/>
-                        </a:rPr>
-                        <a:t>Iterative nonlinear reconstructors reach machine precision below 0.25 rad rms; phase sorting extends to 0.75 rad; adding wavelengths to 1.4 rad rms</a:t>
-                      </a:r>
-                    </a:p>
-                  </a:txBody>
-                  <a:tcPr marL="54864" marR="54864" marT="18288" marB="18288">
-                    <a:solidFill>
-                      <a:srgbClr val="FFFFFF"/>
-                    </a:solidFill>
-                  </a:tcPr>
-                </a:tc>
-              </a:tr>
-              <a:tr h="468630">
-                <a:tc>
-                  <a:txBody>
-                    <a:bodyPr wrap="square"/>
-                    <a:lstStyle/>
-                    <a:p>
-                      <a:r>
-                        <a:rPr sz="1100" b="0">
-                          <a:solidFill>
-                            <a:srgbClr val="282828"/>
-                          </a:solidFill>
-                          <a:latin typeface="Arial"/>
-                        </a:rPr>
-                        <a:t>6</a:t>
-                      </a:r>
-                    </a:p>
-                  </a:txBody>
-                  <a:tcPr marL="54864" marR="54864" marT="18288" marB="18288">
-                    <a:solidFill>
-                      <a:srgbClr val="ECF1F6"/>
-                    </a:solidFill>
-                  </a:tcPr>
-                </a:tc>
-                <a:tc>
-                  <a:txBody>
-                    <a:bodyPr wrap="square"/>
-                    <a:lstStyle/>
-                    <a:p>
-                      <a:r>
-                        <a:rPr sz="1100" b="0">
-                          <a:solidFill>
-                            <a:srgbClr val="282828"/>
-                          </a:solidFill>
-                          <a:latin typeface="Arial"/>
-                        </a:rPr>
-                        <a:t>Darcis, Haffert, Chambouleyron, Doelman et al. 2025, A&amp;A</a:t>
-                      </a:r>
-                    </a:p>
-                  </a:txBody>
-                  <a:tcPr marL="54864" marR="54864" marT="18288" marB="18288">
-                    <a:solidFill>
-                      <a:srgbClr val="ECF1F6"/>
-                    </a:solidFill>
-                  </a:tcPr>
-                </a:tc>
-                <a:tc>
-                  <a:txBody>
-                    <a:bodyPr wrap="square"/>
-                    <a:lstStyle/>
-                    <a:p>
-                      <a:r>
-                        <a:rPr sz="1100" b="0">
-                          <a:solidFill>
-                            <a:srgbClr val="282828"/>
-                          </a:solidFill>
-                          <a:latin typeface="Arial"/>
-                        </a:rPr>
-                        <a:t>Multi-wavelength gradient descent through the forward model: dynamic range for the scalar sensor, photon robustness across a wider band, two-wavelength unwrapping of petal errors</a:t>
-                      </a:r>
-                    </a:p>
-                  </a:txBody>
-                  <a:tcPr marL="54864" marR="54864" marT="18288" marB="18288">
-                    <a:solidFill>
-                      <a:srgbClr val="ECF1F6"/>
                     </a:solidFill>
                   </a:tcPr>
                 </a:tc>
@@ -7019,7 +7072,7 @@
         </p:nvSpPr>
         <p:spPr>
           <a:xfrm>
-            <a:off x="411480" y="4536567"/>
+            <a:off x="411480" y="4810887"/>
             <a:ext cx="11368735" cy="274320"/>
           </a:xfrm>
           <a:prstGeom prst="rect">
@@ -7039,13 +7092,52 @@
               </a:spcAft>
             </a:pPr>
             <a:r>
-              <a:rPr sz="1050" b="0">
-                <a:solidFill>
-                  <a:srgbClr val="6E6E6E"/>
+              <a:rPr sz="1500" b="0">
+                <a:solidFill>
+                  <a:srgbClr val="282828"/>
                 </a:solidFill>
                 <a:latin typeface="Arial"/>
               </a:rPr>
-              <a:t>Priority = payoff against this campaign's measured weak results.  Synopses and links: macos/REPORT_zwfs_lit_scan.md.</a:t>
+              <a:t>•  Reading: the interferometer measures any surface and pays at fine patterns; the sensor measures small changes on a small working surface more cheaply — no polarization train, a floor ten times lower once its response matrix is measured on that surface — and pays at the lowest spatial frequencies and in the surface it can handle.</a:t>
+            </a:r>
+          </a:p>
+        </p:txBody>
+      </p:sp>
+      <p:sp>
+        <p:nvSpPr>
+          <p:cNvPr id="6" name="TextBox 5"/>
+          <p:cNvSpPr txBox="1"/>
+          <p:nvPr/>
+        </p:nvSpPr>
+        <p:spPr>
+          <a:xfrm>
+            <a:off x="411480" y="5730621"/>
+            <a:ext cx="11368735" cy="274320"/>
+          </a:xfrm>
+          <a:prstGeom prst="rect">
+            <a:avLst/>
+          </a:prstGeom>
+          <a:noFill/>
+        </p:spPr>
+        <p:txBody>
+          <a:bodyPr wrap="square">
+            <a:spAutoFit/>
+          </a:bodyPr>
+          <a:lstStyle/>
+          <a:p>
+            <a:pPr>
+              <a:spcAft>
+                <a:spcPts val="600"/>
+              </a:spcAft>
+            </a:pPr>
+            <a:r>
+              <a:rPr sz="1050" b="0">
+                <a:solidFill>
+                  <a:srgbClr val="6E6E6E"/>
+                </a:solidFill>
+                <a:latin typeface="Arial"/>
+              </a:rPr>
+              <a:t>PSI column: tg_psi_dm96 run 10 and S4/S5; sensor column: 385 rays, matrix calibration on the working surface (slide 10), photons at development sampling.  Both in actuator units through the same code (dm_gauge_lib).</a:t>
             </a:r>
           </a:p>
         </p:txBody>
@@ -7102,7 +7194,7 @@
                 </a:solidFill>
                 <a:latin typeface="Arial"/>
               </a:rPr>
-              <a:t>Demonstrations, segmented mirrors, and the in-house precedent</a:t>
+              <a:t>What the Zernike-sensor literature offers, in priority order</a:t>
             </a:r>
           </a:p>
           <a:p>
@@ -7118,7 +7210,7 @@
                 </a:solidFill>
                 <a:latin typeface="Arial"/>
               </a:rPr>
-              <a:t>Picometres by alternating DM shapes and averaging; segment piston by model iteration, underestimated below 50 % Strehl</a:t>
+              <a:t>Twelve papers read; the first import — re-computing the reference wave — is now built and measured (slide 8)</a:t>
             </a:r>
           </a:p>
         </p:txBody>
@@ -7186,9 +7278,9 @@
                 <a:tableStyleId>{5C22544A-7EE6-4342-B048-85BDC9FD1C3A}</a:tableStyleId>
               </a:tblPr>
               <a:tblGrid>
-                <a:gridCol w="291592"/>
-                <a:gridCol w="3730058"/>
-                <a:gridCol w="7347084"/>
+                <a:gridCol w="218948"/>
+                <a:gridCol w="2691327"/>
+                <a:gridCol w="8458459"/>
               </a:tblGrid>
               <a:tr h="280035">
                 <a:tc>
@@ -7271,7 +7363,7 @@
                           </a:solidFill>
                           <a:latin typeface="Arial"/>
                         </a:rPr>
-                        <a:t>7</a:t>
+                        <a:t>1</a:t>
                       </a:r>
                     </a:p>
                   </a:txBody>
@@ -7293,7 +7385,7 @@
                           </a:solidFill>
                           <a:latin typeface="Arial"/>
                         </a:rPr>
-                        <a:t>Steeves, Wallace, Kettenbeil, Jewell 2020, Optica 7, 1267</a:t>
+                        <a:t>Ruane, Wallace, Steeves et al. 2020, JATIS 6, 045005</a:t>
                       </a:r>
                     </a:p>
                   </a:txBody>
@@ -7315,7 +7407,7 @@
                           </a:solidFill>
                           <a:latin typeface="Arial"/>
                         </a:rPr>
-                        <a:t>1.6 pm repeatability in 4.3 s by alternating flat and waffle DM states and averaging the differences; a reconstruction robust at the highest spatial frequencies</a:t>
+                        <a:t>Exact per-pixel reconstruction from the pupil amplitude, the reference wave b and the masked image; a sensitivity factor per pixel; a four-term systematic budget; 1 pm reached at 4.4×10⁵ frames; no loss to 25 % bandwidth</a:t>
                       </a:r>
                     </a:p>
                   </a:txBody>
@@ -7339,7 +7431,7 @@
                           </a:solidFill>
                           <a:latin typeface="Arial"/>
                         </a:rPr>
-                        <a:t>8</a:t>
+                        <a:t>2</a:t>
                       </a:r>
                     </a:p>
                   </a:txBody>
@@ -7361,7 +7453,7 @@
                           </a:solidFill>
                           <a:latin typeface="Arial"/>
                         </a:rPr>
-                        <a:t>Wallace, Rao, Jensen-Clem, Serabyn 2011, SPIE 8126</a:t>
+                        <a:t>Doelman, Fagginger Auer, Escuti, Snik 2019, Opt. Lett. 44, 17</a:t>
                       </a:r>
                     </a:p>
                   </a:txBody>
@@ -7383,7 +7475,7 @@
                           </a:solidFill>
                           <a:latin typeface="Arial"/>
                         </a:rPr>
-                        <a:t>All-reflective phase-shifting Zernike interferometer: a dynamic, arbitrary core phase shift read in four steps gives phase and amplitude; low sensitivity to vibration, polarization and wavelength</a:t>
+                        <a:t>Vector Zernike: ±π/2 on opposite circular polarizations gives two pupil images, an exact phase-and-amplitude solution, an iterated b, achromatic to 100 % bandwidth; the leakage terms are written down</a:t>
                       </a:r>
                     </a:p>
                   </a:txBody>
@@ -7407,7 +7499,7 @@
                           </a:solidFill>
                           <a:latin typeface="Arial"/>
                         </a:rPr>
-                        <a:t>9</a:t>
+                        <a:t>3</a:t>
                       </a:r>
                     </a:p>
                   </a:txBody>
@@ -7429,7 +7521,7 @@
                           </a:solidFill>
                           <a:latin typeface="Arial"/>
                         </a:rPr>
-                        <a:t>Moore and Redding 2018, SPIE 10698</a:t>
+                        <a:t>N'Diaye, Vigan, Dohlen et al. 2016, A&amp;A 592, A79 (ZELDA II)</a:t>
                       </a:r>
                     </a:p>
                   </a:txBody>
@@ -7451,7 +7543,7 @@
                           </a:solidFill>
                           <a:latin typeface="Arial"/>
                         </a:rPr>
-                        <a:t>Nonlinear polychromatic physical-optics reconstruction for picometer differential metrology on LUVOIR; the in-house precedent for the reconstructor above</a:t>
+                        <a:t>Second-order reconstruction with b from the mask model; 1.06 λ/D at π/2; range −0.14 to +0.36 λ; the sensitivity factor drifts 10 % day to day on SPHERE</a:t>
                       </a:r>
                     </a:p>
                   </a:txBody>
@@ -7475,7 +7567,7 @@
                           </a:solidFill>
                           <a:latin typeface="Arial"/>
                         </a:rPr>
-                        <a:t>10</a:t>
+                        <a:t>4</a:t>
                       </a:r>
                     </a:p>
                   </a:txBody>
@@ -7497,7 +7589,7 @@
                           </a:solidFill>
                           <a:latin typeface="Arial"/>
                         </a:rPr>
-                        <a:t>Keck vector-Zernike segment control 2024 (arXiv 2404.08728); Wallace et al. 2022 (arXiv 2205.02241)</a:t>
+                        <a:t>Chambouleyron, Cissé, Salama, Haffert, Wallace et al. 2024, SPIE 13097</a:t>
                       </a:r>
                     </a:p>
                   </a:txBody>
@@ -7519,7 +7611,7 @@
                           </a:solidFill>
                           <a:latin typeface="Arial"/>
                         </a:rPr>
-                        <a:t>Segment piston by model-based iteration; 11 nm rms piston uncertainty; underestimation 2 to 4× below 50 % Strehl; fabricated shifts 0.30π and 0.68π instead of ±0.5π</a:t>
+                        <a:t>A phase-shifted pair (±π/2) yields cos φ and sin φ; iterative reconstructors reach about 1 rad rms; the bench limits were polarization crosstalk and defocus between the two pupils</a:t>
                       </a:r>
                     </a:p>
                   </a:txBody>
@@ -7543,7 +7635,7 @@
                           </a:solidFill>
                           <a:latin typeface="Arial"/>
                         </a:rPr>
-                        <a:t>11</a:t>
+                        <a:t>5</a:t>
                       </a:r>
                     </a:p>
                   </a:txBody>
@@ -7565,7 +7657,7 @@
                           </a:solidFill>
                           <a:latin typeface="Arial"/>
                         </a:rPr>
-                        <a:t>HiCAT mid-order Zernike sensor 2024 (arXiv 2409.03411)</a:t>
+                        <a:t>Haffert 2024, A&amp;A 683, A113</a:t>
                       </a:r>
                     </a:p>
                   </a:txBody>
@@ -7587,7 +7679,7 @@
                           </a:solidFill>
                           <a:latin typeface="Arial"/>
                         </a:rPr>
-                        <a:t>Per-segment piston, tip and tilt by interaction matrix; a minimal step of 125 ± 31 pm at SNR 4; 14-bit DM quantization reads as steps in the response</a:t>
+                        <a:t>Iterative nonlinear reconstructors reach machine precision below 0.25 rad rms; phase sorting extends to 0.75 rad; adding wavelengths to 1.4 rad rms</a:t>
                       </a:r>
                     </a:p>
                   </a:txBody>
@@ -7611,7 +7703,7 @@
                           </a:solidFill>
                           <a:latin typeface="Arial"/>
                         </a:rPr>
-                        <a:t>12</a:t>
+                        <a:t>6</a:t>
                       </a:r>
                     </a:p>
                   </a:txBody>
@@ -7633,7 +7725,7 @@
                           </a:solidFill>
                           <a:latin typeface="Arial"/>
                         </a:rPr>
-                        <a:t>Shi et al. 2015, SPIE 9605 (Roman low-order sensor)</a:t>
+                        <a:t>Darcis, Haffert, Chambouleyron, Doelman et al. 2025, A&amp;A</a:t>
                       </a:r>
                     </a:p>
                   </a:txBody>
@@ -7655,7 +7747,7 @@
                           </a:solidFill>
                           <a:latin typeface="Arial"/>
                         </a:rPr>
-                        <a:t>A reflective dimple on the focal-plane mask senses Z2 to Z11 from the rejected starlight: the spatially filtered form of the same sensor</a:t>
+                        <a:t>Multi-wavelength gradient descent through the forward model: dynamic range for the scalar sensor, photon robustness across a wider band, two-wavelength unwrapping of petal errors</a:t>
                       </a:r>
                     </a:p>
                   </a:txBody>
@@ -7704,7 +7796,7 @@
                 </a:solidFill>
                 <a:latin typeface="Arial"/>
               </a:rPr>
-              <a:t>Also read: PIAA-ZWFS (2026, arXiv 2606.28136), lossless pupil apodization that closes the gap to the fundamental sensitivity limit by 10× — a design lever, not a model change.</a:t>
+              <a:t>Priority = payoff against this campaign's measured weak results.  Synopses and links: macos/REPORT_zwfs_lit_scan.md.</a:t>
             </a:r>
           </a:p>
         </p:txBody>
@@ -7761,7 +7853,7 @@
                 </a:solidFill>
                 <a:latin typeface="Arial"/>
               </a:rPr>
-              <a:t>Conclusions: what the corrected model and the exact reading settled</a:t>
+              <a:t>Demonstrations, segmented mirrors, and the in-house precedent</a:t>
             </a:r>
           </a:p>
           <a:p>
@@ -7777,7 +7869,7 @@
                 </a:solidFill>
                 <a:latin typeface="Arial"/>
               </a:rPr>
-              <a:t>Fixing the model was the bigger gain; the exact reading with the sign map is the best one-frame reading; colour and photons are not the 1 pm budget</a:t>
+              <a:t>Picometres by alternating DM shapes and averaging; segment piston by model iteration, underestimated below 50 % Strehl</a:t>
             </a:r>
           </a:p>
         </p:txBody>
@@ -7826,15 +7918,518 @@
           </a:p>
         </p:txBody>
       </p:sp>
-      <p:sp>
-        <p:nvSpPr>
-          <p:cNvPr id="4" name="TextBox 3"/>
+      <p:graphicFrame>
+        <p:nvGraphicFramePr>
+          <p:cNvPr id="4" name="Table 3"/>
+          <p:cNvGraphicFramePr>
+            <a:graphicFrameLocks noGrp="1"/>
+          </p:cNvGraphicFramePr>
+          <p:nvPr/>
+        </p:nvGraphicFramePr>
+        <p:xfrm>
+          <a:off x="411480" y="1298448"/>
+          <a:ext cx="11368734" cy="3091815"/>
+        </p:xfrm>
+        <a:graphic>
+          <a:graphicData uri="http://schemas.openxmlformats.org/drawingml/2006/table">
+            <a:tbl>
+              <a:tblPr firstRow="1" bandRow="1">
+                <a:tableStyleId>{5C22544A-7EE6-4342-B048-85BDC9FD1C3A}</a:tableStyleId>
+              </a:tblPr>
+              <a:tblGrid>
+                <a:gridCol w="291592"/>
+                <a:gridCol w="3730058"/>
+                <a:gridCol w="7347084"/>
+              </a:tblGrid>
+              <a:tr h="280035">
+                <a:tc>
+                  <a:txBody>
+                    <a:bodyPr wrap="square"/>
+                    <a:lstStyle/>
+                    <a:p>
+                      <a:r>
+                        <a:rPr sz="1100" b="1">
+                          <a:solidFill>
+                            <a:srgbClr val="FFFFFF"/>
+                          </a:solidFill>
+                          <a:latin typeface="Arial"/>
+                        </a:rPr>
+                        <a:t>#</a:t>
+                      </a:r>
+                    </a:p>
+                  </a:txBody>
+                  <a:tcPr marL="54864" marR="54864" marT="18288" marB="18288">
+                    <a:solidFill>
+                      <a:srgbClr val="1F4E79"/>
+                    </a:solidFill>
+                  </a:tcPr>
+                </a:tc>
+                <a:tc>
+                  <a:txBody>
+                    <a:bodyPr wrap="square"/>
+                    <a:lstStyle/>
+                    <a:p>
+                      <a:r>
+                        <a:rPr sz="1100" b="1">
+                          <a:solidFill>
+                            <a:srgbClr val="FFFFFF"/>
+                          </a:solidFill>
+                          <a:latin typeface="Arial"/>
+                        </a:rPr>
+                        <a:t>paper</a:t>
+                      </a:r>
+                    </a:p>
+                  </a:txBody>
+                  <a:tcPr marL="54864" marR="54864" marT="18288" marB="18288">
+                    <a:solidFill>
+                      <a:srgbClr val="1F4E79"/>
+                    </a:solidFill>
+                  </a:tcPr>
+                </a:tc>
+                <a:tc>
+                  <a:txBody>
+                    <a:bodyPr wrap="square"/>
+                    <a:lstStyle/>
+                    <a:p>
+                      <a:r>
+                        <a:rPr sz="1100" b="1">
+                          <a:solidFill>
+                            <a:srgbClr val="FFFFFF"/>
+                          </a:solidFill>
+                          <a:latin typeface="Arial"/>
+                        </a:rPr>
+                        <a:t>what it gives this model</a:t>
+                      </a:r>
+                    </a:p>
+                  </a:txBody>
+                  <a:tcPr marL="54864" marR="54864" marT="18288" marB="18288">
+                    <a:solidFill>
+                      <a:srgbClr val="1F4E79"/>
+                    </a:solidFill>
+                  </a:tcPr>
+                </a:tc>
+              </a:tr>
+              <a:tr h="468630">
+                <a:tc>
+                  <a:txBody>
+                    <a:bodyPr wrap="square"/>
+                    <a:lstStyle/>
+                    <a:p>
+                      <a:r>
+                        <a:rPr sz="1100" b="0">
+                          <a:solidFill>
+                            <a:srgbClr val="282828"/>
+                          </a:solidFill>
+                          <a:latin typeface="Arial"/>
+                        </a:rPr>
+                        <a:t>7</a:t>
+                      </a:r>
+                    </a:p>
+                  </a:txBody>
+                  <a:tcPr marL="54864" marR="54864" marT="18288" marB="18288">
+                    <a:solidFill>
+                      <a:srgbClr val="FFFFFF"/>
+                    </a:solidFill>
+                  </a:tcPr>
+                </a:tc>
+                <a:tc>
+                  <a:txBody>
+                    <a:bodyPr wrap="square"/>
+                    <a:lstStyle/>
+                    <a:p>
+                      <a:r>
+                        <a:rPr sz="1100" b="0">
+                          <a:solidFill>
+                            <a:srgbClr val="282828"/>
+                          </a:solidFill>
+                          <a:latin typeface="Arial"/>
+                        </a:rPr>
+                        <a:t>Steeves, Wallace, Kettenbeil, Jewell 2020, Optica 7, 1267</a:t>
+                      </a:r>
+                    </a:p>
+                  </a:txBody>
+                  <a:tcPr marL="54864" marR="54864" marT="18288" marB="18288">
+                    <a:solidFill>
+                      <a:srgbClr val="FFFFFF"/>
+                    </a:solidFill>
+                  </a:tcPr>
+                </a:tc>
+                <a:tc>
+                  <a:txBody>
+                    <a:bodyPr wrap="square"/>
+                    <a:lstStyle/>
+                    <a:p>
+                      <a:r>
+                        <a:rPr sz="1100" b="0">
+                          <a:solidFill>
+                            <a:srgbClr val="282828"/>
+                          </a:solidFill>
+                          <a:latin typeface="Arial"/>
+                        </a:rPr>
+                        <a:t>1.6 pm repeatability in 4.3 s by alternating flat and waffle DM states and averaging the differences; a reconstruction robust at the highest spatial frequencies</a:t>
+                      </a:r>
+                    </a:p>
+                  </a:txBody>
+                  <a:tcPr marL="54864" marR="54864" marT="18288" marB="18288">
+                    <a:solidFill>
+                      <a:srgbClr val="FFFFFF"/>
+                    </a:solidFill>
+                  </a:tcPr>
+                </a:tc>
+              </a:tr>
+              <a:tr h="468630">
+                <a:tc>
+                  <a:txBody>
+                    <a:bodyPr wrap="square"/>
+                    <a:lstStyle/>
+                    <a:p>
+                      <a:r>
+                        <a:rPr sz="1100" b="0">
+                          <a:solidFill>
+                            <a:srgbClr val="282828"/>
+                          </a:solidFill>
+                          <a:latin typeface="Arial"/>
+                        </a:rPr>
+                        <a:t>8</a:t>
+                      </a:r>
+                    </a:p>
+                  </a:txBody>
+                  <a:tcPr marL="54864" marR="54864" marT="18288" marB="18288">
+                    <a:solidFill>
+                      <a:srgbClr val="ECF1F6"/>
+                    </a:solidFill>
+                  </a:tcPr>
+                </a:tc>
+                <a:tc>
+                  <a:txBody>
+                    <a:bodyPr wrap="square"/>
+                    <a:lstStyle/>
+                    <a:p>
+                      <a:r>
+                        <a:rPr sz="1100" b="0">
+                          <a:solidFill>
+                            <a:srgbClr val="282828"/>
+                          </a:solidFill>
+                          <a:latin typeface="Arial"/>
+                        </a:rPr>
+                        <a:t>Wallace, Rao, Jensen-Clem, Serabyn 2011, SPIE 8126</a:t>
+                      </a:r>
+                    </a:p>
+                  </a:txBody>
+                  <a:tcPr marL="54864" marR="54864" marT="18288" marB="18288">
+                    <a:solidFill>
+                      <a:srgbClr val="ECF1F6"/>
+                    </a:solidFill>
+                  </a:tcPr>
+                </a:tc>
+                <a:tc>
+                  <a:txBody>
+                    <a:bodyPr wrap="square"/>
+                    <a:lstStyle/>
+                    <a:p>
+                      <a:r>
+                        <a:rPr sz="1100" b="0">
+                          <a:solidFill>
+                            <a:srgbClr val="282828"/>
+                          </a:solidFill>
+                          <a:latin typeface="Arial"/>
+                        </a:rPr>
+                        <a:t>All-reflective phase-shifting Zernike interferometer: a dynamic, arbitrary core phase shift read in four steps gives phase and amplitude; low sensitivity to vibration, polarization and wavelength</a:t>
+                      </a:r>
+                    </a:p>
+                  </a:txBody>
+                  <a:tcPr marL="54864" marR="54864" marT="18288" marB="18288">
+                    <a:solidFill>
+                      <a:srgbClr val="ECF1F6"/>
+                    </a:solidFill>
+                  </a:tcPr>
+                </a:tc>
+              </a:tr>
+              <a:tr h="468630">
+                <a:tc>
+                  <a:txBody>
+                    <a:bodyPr wrap="square"/>
+                    <a:lstStyle/>
+                    <a:p>
+                      <a:r>
+                        <a:rPr sz="1100" b="0">
+                          <a:solidFill>
+                            <a:srgbClr val="282828"/>
+                          </a:solidFill>
+                          <a:latin typeface="Arial"/>
+                        </a:rPr>
+                        <a:t>9</a:t>
+                      </a:r>
+                    </a:p>
+                  </a:txBody>
+                  <a:tcPr marL="54864" marR="54864" marT="18288" marB="18288">
+                    <a:solidFill>
+                      <a:srgbClr val="FFFFFF"/>
+                    </a:solidFill>
+                  </a:tcPr>
+                </a:tc>
+                <a:tc>
+                  <a:txBody>
+                    <a:bodyPr wrap="square"/>
+                    <a:lstStyle/>
+                    <a:p>
+                      <a:r>
+                        <a:rPr sz="1100" b="0">
+                          <a:solidFill>
+                            <a:srgbClr val="282828"/>
+                          </a:solidFill>
+                          <a:latin typeface="Arial"/>
+                        </a:rPr>
+                        <a:t>Moore and Redding 2018, SPIE 10698</a:t>
+                      </a:r>
+                    </a:p>
+                  </a:txBody>
+                  <a:tcPr marL="54864" marR="54864" marT="18288" marB="18288">
+                    <a:solidFill>
+                      <a:srgbClr val="FFFFFF"/>
+                    </a:solidFill>
+                  </a:tcPr>
+                </a:tc>
+                <a:tc>
+                  <a:txBody>
+                    <a:bodyPr wrap="square"/>
+                    <a:lstStyle/>
+                    <a:p>
+                      <a:r>
+                        <a:rPr sz="1100" b="0">
+                          <a:solidFill>
+                            <a:srgbClr val="282828"/>
+                          </a:solidFill>
+                          <a:latin typeface="Arial"/>
+                        </a:rPr>
+                        <a:t>Nonlinear polychromatic physical-optics reconstruction for picometer differential metrology on LUVOIR; the in-house precedent for the reconstructor above</a:t>
+                      </a:r>
+                    </a:p>
+                  </a:txBody>
+                  <a:tcPr marL="54864" marR="54864" marT="18288" marB="18288">
+                    <a:solidFill>
+                      <a:srgbClr val="FFFFFF"/>
+                    </a:solidFill>
+                  </a:tcPr>
+                </a:tc>
+              </a:tr>
+              <a:tr h="468630">
+                <a:tc>
+                  <a:txBody>
+                    <a:bodyPr wrap="square"/>
+                    <a:lstStyle/>
+                    <a:p>
+                      <a:r>
+                        <a:rPr sz="1100" b="0">
+                          <a:solidFill>
+                            <a:srgbClr val="282828"/>
+                          </a:solidFill>
+                          <a:latin typeface="Arial"/>
+                        </a:rPr>
+                        <a:t>10</a:t>
+                      </a:r>
+                    </a:p>
+                  </a:txBody>
+                  <a:tcPr marL="54864" marR="54864" marT="18288" marB="18288">
+                    <a:solidFill>
+                      <a:srgbClr val="ECF1F6"/>
+                    </a:solidFill>
+                  </a:tcPr>
+                </a:tc>
+                <a:tc>
+                  <a:txBody>
+                    <a:bodyPr wrap="square"/>
+                    <a:lstStyle/>
+                    <a:p>
+                      <a:r>
+                        <a:rPr sz="1100" b="0">
+                          <a:solidFill>
+                            <a:srgbClr val="282828"/>
+                          </a:solidFill>
+                          <a:latin typeface="Arial"/>
+                        </a:rPr>
+                        <a:t>Keck vector-Zernike segment control 2024 (arXiv 2404.08728); Wallace et al. 2022 (arXiv 2205.02241)</a:t>
+                      </a:r>
+                    </a:p>
+                  </a:txBody>
+                  <a:tcPr marL="54864" marR="54864" marT="18288" marB="18288">
+                    <a:solidFill>
+                      <a:srgbClr val="ECF1F6"/>
+                    </a:solidFill>
+                  </a:tcPr>
+                </a:tc>
+                <a:tc>
+                  <a:txBody>
+                    <a:bodyPr wrap="square"/>
+                    <a:lstStyle/>
+                    <a:p>
+                      <a:r>
+                        <a:rPr sz="1100" b="0">
+                          <a:solidFill>
+                            <a:srgbClr val="282828"/>
+                          </a:solidFill>
+                          <a:latin typeface="Arial"/>
+                        </a:rPr>
+                        <a:t>Segment piston by model-based iteration; 11 nm rms piston uncertainty; underestimation 2 to 4× below 50 % Strehl; fabricated shifts 0.30π and 0.68π instead of ±0.5π</a:t>
+                      </a:r>
+                    </a:p>
+                  </a:txBody>
+                  <a:tcPr marL="54864" marR="54864" marT="18288" marB="18288">
+                    <a:solidFill>
+                      <a:srgbClr val="ECF1F6"/>
+                    </a:solidFill>
+                  </a:tcPr>
+                </a:tc>
+              </a:tr>
+              <a:tr h="468630">
+                <a:tc>
+                  <a:txBody>
+                    <a:bodyPr wrap="square"/>
+                    <a:lstStyle/>
+                    <a:p>
+                      <a:r>
+                        <a:rPr sz="1100" b="0">
+                          <a:solidFill>
+                            <a:srgbClr val="282828"/>
+                          </a:solidFill>
+                          <a:latin typeface="Arial"/>
+                        </a:rPr>
+                        <a:t>11</a:t>
+                      </a:r>
+                    </a:p>
+                  </a:txBody>
+                  <a:tcPr marL="54864" marR="54864" marT="18288" marB="18288">
+                    <a:solidFill>
+                      <a:srgbClr val="FFFFFF"/>
+                    </a:solidFill>
+                  </a:tcPr>
+                </a:tc>
+                <a:tc>
+                  <a:txBody>
+                    <a:bodyPr wrap="square"/>
+                    <a:lstStyle/>
+                    <a:p>
+                      <a:r>
+                        <a:rPr sz="1100" b="0">
+                          <a:solidFill>
+                            <a:srgbClr val="282828"/>
+                          </a:solidFill>
+                          <a:latin typeface="Arial"/>
+                        </a:rPr>
+                        <a:t>HiCAT mid-order Zernike sensor 2024 (arXiv 2409.03411)</a:t>
+                      </a:r>
+                    </a:p>
+                  </a:txBody>
+                  <a:tcPr marL="54864" marR="54864" marT="18288" marB="18288">
+                    <a:solidFill>
+                      <a:srgbClr val="FFFFFF"/>
+                    </a:solidFill>
+                  </a:tcPr>
+                </a:tc>
+                <a:tc>
+                  <a:txBody>
+                    <a:bodyPr wrap="square"/>
+                    <a:lstStyle/>
+                    <a:p>
+                      <a:r>
+                        <a:rPr sz="1100" b="0">
+                          <a:solidFill>
+                            <a:srgbClr val="282828"/>
+                          </a:solidFill>
+                          <a:latin typeface="Arial"/>
+                        </a:rPr>
+                        <a:t>Per-segment piston, tip and tilt by interaction matrix; a minimal step of 125 ± 31 pm at SNR 4; 14-bit DM quantization reads as steps in the response</a:t>
+                      </a:r>
+                    </a:p>
+                  </a:txBody>
+                  <a:tcPr marL="54864" marR="54864" marT="18288" marB="18288">
+                    <a:solidFill>
+                      <a:srgbClr val="FFFFFF"/>
+                    </a:solidFill>
+                  </a:tcPr>
+                </a:tc>
+              </a:tr>
+              <a:tr h="468630">
+                <a:tc>
+                  <a:txBody>
+                    <a:bodyPr wrap="square"/>
+                    <a:lstStyle/>
+                    <a:p>
+                      <a:r>
+                        <a:rPr sz="1100" b="0">
+                          <a:solidFill>
+                            <a:srgbClr val="282828"/>
+                          </a:solidFill>
+                          <a:latin typeface="Arial"/>
+                        </a:rPr>
+                        <a:t>12</a:t>
+                      </a:r>
+                    </a:p>
+                  </a:txBody>
+                  <a:tcPr marL="54864" marR="54864" marT="18288" marB="18288">
+                    <a:solidFill>
+                      <a:srgbClr val="ECF1F6"/>
+                    </a:solidFill>
+                  </a:tcPr>
+                </a:tc>
+                <a:tc>
+                  <a:txBody>
+                    <a:bodyPr wrap="square"/>
+                    <a:lstStyle/>
+                    <a:p>
+                      <a:r>
+                        <a:rPr sz="1100" b="0">
+                          <a:solidFill>
+                            <a:srgbClr val="282828"/>
+                          </a:solidFill>
+                          <a:latin typeface="Arial"/>
+                        </a:rPr>
+                        <a:t>Shi et al. 2015, SPIE 9605 (Roman low-order sensor)</a:t>
+                      </a:r>
+                    </a:p>
+                  </a:txBody>
+                  <a:tcPr marL="54864" marR="54864" marT="18288" marB="18288">
+                    <a:solidFill>
+                      <a:srgbClr val="ECF1F6"/>
+                    </a:solidFill>
+                  </a:tcPr>
+                </a:tc>
+                <a:tc>
+                  <a:txBody>
+                    <a:bodyPr wrap="square"/>
+                    <a:lstStyle/>
+                    <a:p>
+                      <a:r>
+                        <a:rPr sz="1100" b="0">
+                          <a:solidFill>
+                            <a:srgbClr val="282828"/>
+                          </a:solidFill>
+                          <a:latin typeface="Arial"/>
+                        </a:rPr>
+                        <a:t>A reflective dimple on the focal-plane mask senses Z2 to Z11 from the rejected starlight: the spatially filtered form of the same sensor</a:t>
+                      </a:r>
+                    </a:p>
+                  </a:txBody>
+                  <a:tcPr marL="54864" marR="54864" marT="18288" marB="18288">
+                    <a:solidFill>
+                      <a:srgbClr val="ECF1F6"/>
+                    </a:solidFill>
+                  </a:tcPr>
+                </a:tc>
+              </a:tr>
+            </a:tbl>
+          </a:graphicData>
+        </a:graphic>
+      </p:graphicFrame>
+      <p:sp>
+        <p:nvSpPr>
+          <p:cNvPr id="5" name="TextBox 4"/>
           <p:cNvSpPr txBox="1"/>
           <p:nvPr/>
         </p:nvSpPr>
         <p:spPr>
           <a:xfrm>
-            <a:off x="411480" y="1298448"/>
+            <a:off x="411480" y="4536567"/>
             <a:ext cx="11368735" cy="274320"/>
           </a:xfrm>
           <a:prstGeom prst="rect">
@@ -7854,100 +8449,13 @@
               </a:spcAft>
             </a:pPr>
             <a:r>
-              <a:rPr sz="1500" b="0">
-                <a:solidFill>
-                  <a:srgbClr val="282828"/>
+              <a:rPr sz="1050" b="0">
+                <a:solidFill>
+                  <a:srgbClr val="6E6E6E"/>
                 </a:solidFill>
                 <a:latin typeface="Arial"/>
               </a:rPr>
-              <a:t>•  The model must keep the pupil image in focus: the two spheres around the mask share one radius, and the script checks the no-mask round trip on every run.  The correction alone took the single-actuator floor from 744 to 67 pm and made the undetected grid case detectable.</a:t>
-            </a:r>
-          </a:p>
-          <a:p>
-            <a:pPr>
-              <a:spcAft>
-                <a:spcPts val="600"/>
-              </a:spcAft>
-            </a:pPr>
-            <a:r>
-              <a:rPr sz="1500" b="0">
-                <a:solidFill>
-                  <a:srgbClr val="282828"/>
-                </a:solidFill>
-                <a:latin typeface="Arial"/>
-              </a:rPr>
-              <a:t>•  The exact reading with a re-computed reference is the import that paid (paper 1): 26 pm from one frame on a 30 nm working surface, SNR 355 — with the sign fold settled once from four stepped frames and refined.  The plain stepped sign map misses 3% of pixels and can flip a single actuator's sign.</a:t>
-            </a:r>
-          </a:p>
-          <a:p>
-            <a:pPr>
-              <a:spcAft>
-                <a:spcPts val="600"/>
-              </a:spcAft>
-            </a:pPr>
-            <a:r>
-              <a:rPr sz="1500" b="0">
-                <a:solidFill>
-                  <a:srgbClr val="282828"/>
-                </a:solidFill>
-                <a:latin typeface="Arial"/>
-              </a:rPr>
-              <a:t>•  Sampling is settled, and a bias in the fit is fixed: camera pixels per actuator (the ray count) set the gain on a test actuator; the dimple's own sampling did not move any actuator-unit result at 4 against 8 pixels; sampling the response pattern at the actuator centre took the test-actuator gain to 0.996 at 5 pixels per actuator.  Calibrating on the working surface was measured and does not help; the 47-site deficit on a working surface is the open item.</a:t>
-            </a:r>
-          </a:p>
-          <a:p>
-            <a:pPr>
-              <a:spcAft>
-                <a:spcPts val="600"/>
-              </a:spcAft>
-            </a:pPr>
-            <a:r>
-              <a:rPr sz="1500" b="0">
-                <a:solidFill>
-                  <a:srgbClr val="282828"/>
-                </a:solidFill>
-                <a:latin typeface="Arial"/>
-              </a:rPr>
-              <a:t>•  Colour and photons are not levers: the chromatic null was the defocus; 10¹⁴ photons per state reach 1 pm.  The budget is systematic error: the 25 to 60 pm floors and the gain's stability.</a:t>
-            </a:r>
-          </a:p>
-        </p:txBody>
-      </p:sp>
-      <p:sp>
-        <p:nvSpPr>
-          <p:cNvPr id="5" name="TextBox 4"/>
-          <p:cNvSpPr txBox="1"/>
-          <p:nvPr/>
-        </p:nvSpPr>
-        <p:spPr>
-          <a:xfrm>
-            <a:off x="411480" y="4867656"/>
-            <a:ext cx="11368735" cy="274320"/>
-          </a:xfrm>
-          <a:prstGeom prst="rect">
-            <a:avLst/>
-          </a:prstGeom>
-          <a:noFill/>
-        </p:spPr>
-        <p:txBody>
-          <a:bodyPr wrap="square">
-            <a:spAutoFit/>
-          </a:bodyPr>
-          <a:lstStyle/>
-          <a:p>
-            <a:pPr>
-              <a:spcAft>
-                <a:spcPts val="600"/>
-              </a:spcAft>
-            </a:pPr>
-            <a:r>
-              <a:rPr sz="1050" b="0">
-                <a:solidFill>
-                  <a:srgbClr val="6E6E6E"/>
-                </a:solidFill>
-                <a:latin typeface="Arial"/>
-              </a:rPr>
-              <a:t>Script and records: templates/40_benches/zwfs_dm96 (README S7/S8; runs/rec193, ng385, ng385s3, m2048, rec193full).</a:t>
+              <a:t>Also read: PIAA-ZWFS (2026, arXiv 2606.28136), lossless pupil apodization that closes the gap to the fundamental sensitivity limit by 10× — a design lever, not a model change.</a:t>
             </a:r>
           </a:p>
         </p:txBody>
@@ -8004,7 +8512,7 @@
                 </a:solidFill>
                 <a:latin typeface="Arial"/>
               </a:rPr>
-              <a:t>Conclusions: what to import next, in order</a:t>
+              <a:t>Conclusions: what the corrected model and the exact reading settled</a:t>
             </a:r>
           </a:p>
           <a:p>
@@ -8020,7 +8528,7 @@
                 </a:solidFill>
                 <a:latin typeface="Arial"/>
               </a:rPr>
-              <a:t>The JPL budget form, DM calibration through the sensor's own images, the vector sensor priced before it is built, and the interferometer's lever</a:t>
+              <a:t>Fixing the model was the bigger gain; a response matrix measured on the working surface takes the stepped reading to 5 pm; colour and photons are not the limit</a:t>
             </a:r>
           </a:p>
         </p:txBody>
@@ -8103,7 +8611,7 @@
                 </a:solidFill>
                 <a:latin typeface="Arial"/>
               </a:rPr>
-              <a:t>•  The JPL budget form: a sensitivity factor per pixel from the measured fields predicts the photon-noise stage analytically, and four systematic terms (pupil calibration at ½, reference wave at 1, dimple depth, initial phase) become the rows of the error budget.</a:t>
+              <a:t>•  The model must keep the pupil image in focus: the two spheres around the mask share one radius, and the script checks the no-mask round trip on every run.  The correction alone took the single-actuator floor from 744 to 67 pm and made the undetected grid case detectable.</a:t>
             </a:r>
           </a:p>
           <a:p>
@@ -8119,7 +8627,7 @@
                 </a:solidFill>
                 <a:latin typeface="Arial"/>
               </a:rPr>
-              <a:t>•  Calibrate the DM through the sensor's own image model: fit actuator positions and gains by matching sensor images of poke grids to a simulation that includes the propagation distances.  The interferometer's camera sits off the DM conjugate after the tuned tail, so it is its lever too — and its calibration code carries the same stencil bias fixed here (slide 9).</a:t>
+              <a:t>•  The exact reading with a re-computed reference is the import that paid (paper 1): 26 pm from one frame on a 30 nm working surface, SNR 355 — with the sign fold settled once from four stepped frames and refined.  The plain stepped sign map misses 3% of pixels and can flip a single actuator's sign.</a:t>
             </a:r>
           </a:p>
           <a:p>
@@ -8135,7 +8643,7 @@
                 </a:solidFill>
                 <a:latin typeface="Arial"/>
               </a:rPr>
-              <a:t>•  Colour as a joint fit, not a combination: an equal-weight combination inherits a bad channel; a joint fit through the exact reading would use 700 to 780 nm for range and 632.8 nm for the calibration of record.</a:t>
+              <a:t>•  Calibrate with a measured response matrix, on the working surface: the sparse-grid measurement of every actuator's response (with the sensor's piston null carried) reads a single actuator on the flat at 0.994 with a 4 pm floor; measured on the working surface it gives the stepped reading 0.99 and 5 pm there and makes the linear one-frame reading usable (1.05, 23 pm).  The floors fall ten times; what remains is gain stability as the surface drifts (7% over 20 nm rms) and the one-frame exact readings' sign fold.</a:t>
             </a:r>
           </a:p>
           <a:p>
@@ -8151,7 +8659,7 @@
                 </a:solidFill>
                 <a:latin typeface="Arial"/>
               </a:rPr>
-              <a:t>•  Model the vector sensor before the metasurface is built: the exact two-image solution and its leakage terms (retardance offsets, splitter rotation) run on the engine's polarization machinery; the bench limits at Keck and SEAL were defocus and crosstalk between the two pupil images, both priceable here.</a:t>
+              <a:t>•  Sampling is settled, and a bias in the fit is fixed: camera pixels per actuator (the ray count) set the gain on a test actuator; sampling the single-site response pattern at the actuator centre took that gain to 0.996 at 5 pixels per actuator.</a:t>
             </a:r>
           </a:p>
           <a:p>
@@ -8167,7 +8675,7 @@
                 </a:solidFill>
                 <a:latin typeface="Arial"/>
               </a:rPr>
-              <a:t>•  The interferometer, for balance: a PZT phase shift buys no model gain — its floors are geometric and colour-independent — but on hardware an absolute phase scale and freedom from polarization systematics; the recommended form is a hybrid: polarization snapshot for the change measurements, a PZT on the reference flat as calibrator.  Its all-mirror (OAP) version is in build.</a:t>
+              <a:t>•  Colour and photons are not levers: the chromatic null was the defocus; 10¹⁴ photons per state reach 1 pm.  The budget is systematic error: the 25 to 60 pm floors and the gain's stability.</a:t>
             </a:r>
           </a:p>
         </p:txBody>
@@ -8206,7 +8714,7 @@
                 </a:solidFill>
                 <a:latin typeface="Arial"/>
               </a:rPr>
-              <a:t>Segmented-mirror lessons carried forward: the sensor reads segment piston but not global piston, DM quantization appears as steps in the response, and piston is underestimated below 50 % Strehl (Keck) — all three enter the e5-class segmented gauges.</a:t>
+              <a:t>Script and records: templates/40_benches/zwfs_dm96 (README S7/S8; runs/rec193, ng385, ng385s3, m2048, rec193full).</a:t>
             </a:r>
           </a:p>
         </p:txBody>
@@ -8237,63 +8745,6 @@
         </p:nvSpPr>
         <p:spPr>
           <a:xfrm>
-            <a:off x="822960" y="2743200"/>
-            <a:ext cx="10545775" cy="1280160"/>
-          </a:xfrm>
-          <a:prstGeom prst="rect">
-            <a:avLst/>
-          </a:prstGeom>
-          <a:noFill/>
-        </p:spPr>
-        <p:txBody>
-          <a:bodyPr wrap="square">
-            <a:spAutoFit/>
-          </a:bodyPr>
-          <a:lstStyle/>
-          <a:p>
-            <a:pPr algn="ctr">
-              <a:spcAft>
-                <a:spcPts val="400"/>
-              </a:spcAft>
-            </a:pPr>
-            <a:r>
-              <a:rPr sz="4000" b="1">
-                <a:solidFill>
-                  <a:srgbClr val="1F4E79"/>
-                </a:solidFill>
-                <a:latin typeface="Arial"/>
-              </a:rPr>
-              <a:t>Backup</a:t>
-            </a:r>
-          </a:p>
-        </p:txBody>
-      </p:sp>
-    </p:spTree>
-  </p:cSld>
-  <p:clrMapOvr>
-    <a:masterClrMapping/>
-  </p:clrMapOvr>
-</p:sld>
-</file>
-
-<file path=ppt/slides/slide2.xml><?xml version="1.0" encoding="utf-8"?>
-<p:sld xmlns:a="http://schemas.openxmlformats.org/drawingml/2006/main" xmlns:p="http://schemas.openxmlformats.org/presentationml/2006/main" xmlns:r="http://schemas.openxmlformats.org/officeDocument/2006/relationships">
-  <p:cSld>
-    <p:spTree>
-      <p:nvGrpSpPr>
-        <p:cNvPr id="1" name=""/>
-        <p:cNvGrpSpPr/>
-        <p:nvPr/>
-      </p:nvGrpSpPr>
-      <p:grpSpPr/>
-      <p:sp>
-        <p:nvSpPr>
-          <p:cNvPr id="2" name="TextBox 1"/>
-          <p:cNvSpPr txBox="1"/>
-          <p:nvPr/>
-        </p:nvSpPr>
-        <p:spPr>
-          <a:xfrm>
             <a:off x="411480" y="201168"/>
             <a:ext cx="11368735" cy="914400"/>
           </a:xfrm>
@@ -8320,7 +8771,7 @@
                 </a:solidFill>
                 <a:latin typeface="Arial"/>
               </a:rPr>
-              <a:t>The idea: the beam interferes with its own core</a:t>
+              <a:t>Conclusions: what to import next, in order</a:t>
             </a:r>
           </a:p>
           <a:p>
@@ -8336,7 +8787,7 @@
                 </a:solidFill>
                 <a:latin typeface="Arial"/>
               </a:rPr>
-              <a:t>A small etched dimple at the focus delays the centre of the beam; that light spreads back over the pupil and acts as the reference</a:t>
+              <a:t>The JPL budget form, DM calibration through the sensor's own images, the vector sensor priced before it is built, and the interferometer's lever</a:t>
             </a:r>
           </a:p>
         </p:txBody>
@@ -8394,7 +8845,7 @@
         <p:spPr>
           <a:xfrm>
             <a:off x="411480" y="1298448"/>
-            <a:ext cx="5806440" cy="274320"/>
+            <a:ext cx="11368735" cy="274320"/>
           </a:xfrm>
           <a:prstGeom prst="rect">
             <a:avLst/>
@@ -8413,13 +8864,13 @@
               </a:spcAft>
             </a:pPr>
             <a:r>
-              <a:rPr sz="1200" b="0">
+              <a:rPr sz="1500" b="0">
                 <a:solidFill>
                   <a:srgbClr val="282828"/>
                 </a:solidFill>
                 <a:latin typeface="Arial"/>
               </a:rPr>
-              <a:t>•  One glass plate, one tiny etched spot.  At the focus, the centre of the beam passes through the dimple and is delayed by a quarter wave; the rest of the beam misses it.  The delayed light spreads back over the whole pupil image and interferes with the rest.  This is an interferometer with no second arm.</a:t>
+              <a:t>•  The JPL budget form: a sensitivity factor per pixel from the measured fields — the quantity the working-surface effect on slide 10 is made of — predicts the photon-noise stage analytically, and four systematic terms (pupil calibration at ½, reference wave at 1, dimple depth, initial phase) become the rows of the error budget.</a:t>
             </a:r>
           </a:p>
           <a:p>
@@ -8429,13 +8880,13 @@
               </a:spcAft>
             </a:pPr>
             <a:r>
-              <a:rPr sz="1200" b="0">
+              <a:rPr sz="1500" b="0">
                 <a:solidFill>
                   <a:srgbClr val="282828"/>
                 </a:solidFill>
                 <a:latin typeface="Arial"/>
               </a:rPr>
-              <a:t>•  Pupil brightness becomes a phase map.  Near a quarter wave of delay, the camera brightness is nearly proportional to the wavefront.  One frame per measurement, no moving parts, no polarization optics.  An exact pixel-by-pixel inversion (slide 8) removes the small-phase limit.</a:t>
+              <a:t>•  The response matrix for the interferometer too: its calibration still uses a single-site response pattern, with the stencil bias fixed here (slide 9); the sparse-grid measured matrix is the calibration its reflective build should carry.  Model-matched DM calibration (actuator positions and gains through the sensor's own images) remains the lever for a real DM's geometry.</a:t>
             </a:r>
           </a:p>
           <a:p>
@@ -8445,51 +8896,59 @@
               </a:spcAft>
             </a:pPr>
             <a:r>
-              <a:rPr sz="1200" b="0">
+              <a:rPr sz="1500" b="0">
                 <a:solidFill>
                   <a:srgbClr val="282828"/>
                 </a:solidFill>
                 <a:latin typeface="Arial"/>
               </a:rPr>
-              <a:t>•  The two prices.  The sensor cannot see piston, and it is weak at the very lowest spatial frequencies, because the reference is made from the beam itself.  On the corrected model the weak band is 0.5 to 1 cycle across the pupil (half response at 1 cycle); defocus and everything finer read near full response.</a:t>
-            </a:r>
-          </a:p>
-        </p:txBody>
-      </p:sp>
-      <p:pic>
-        <p:nvPicPr>
-          <p:cNvPr id="5" name="Picture 4" descr="zwfs_mask_fig.png"/>
-          <p:cNvPicPr>
-            <a:picLocks noChangeAspect="1"/>
-          </p:cNvPicPr>
+              <a:t>•  Colour as a joint fit, not a combination: an equal-weight combination inherits a bad channel; a joint fit through the exact reading would use 700 to 780 nm for range and 632.8 nm for the calibration of record.</a:t>
+            </a:r>
+          </a:p>
+          <a:p>
+            <a:pPr>
+              <a:spcAft>
+                <a:spcPts val="600"/>
+              </a:spcAft>
+            </a:pPr>
+            <a:r>
+              <a:rPr sz="1500" b="0">
+                <a:solidFill>
+                  <a:srgbClr val="282828"/>
+                </a:solidFill>
+                <a:latin typeface="Arial"/>
+              </a:rPr>
+              <a:t>•  Model the vector sensor before the metasurface is built: the exact two-image solution and its leakage terms (retardance offsets, splitter rotation) run on the engine's polarization machinery; the bench limits at Keck and SEAL were defocus and crosstalk between the two pupil images, both priceable here.</a:t>
+            </a:r>
+          </a:p>
+          <a:p>
+            <a:pPr>
+              <a:spcAft>
+                <a:spcPts val="600"/>
+              </a:spcAft>
+            </a:pPr>
+            <a:r>
+              <a:rPr sz="1500" b="0">
+                <a:solidFill>
+                  <a:srgbClr val="282828"/>
+                </a:solidFill>
+                <a:latin typeface="Arial"/>
+              </a:rPr>
+              <a:t>•  The interferometer, for balance: a PZT phase shift buys no model gain — its floors are geometric and colour-independent — but on hardware an absolute phase scale and freedom from polarization systematics; the recommended form is a hybrid: polarization snapshot for the change measurements, a PZT on the reference flat as calibrator.  Its all-mirror (OAP) version is in build.</a:t>
+            </a:r>
+          </a:p>
+        </p:txBody>
+      </p:sp>
+      <p:sp>
+        <p:nvSpPr>
+          <p:cNvPr id="5" name="TextBox 4"/>
+          <p:cNvSpPr txBox="1"/>
           <p:nvPr/>
-        </p:nvPicPr>
-        <p:blipFill>
-          <a:blip r:embed="rId2"/>
-          <a:stretch>
-            <a:fillRect/>
-          </a:stretch>
-        </p:blipFill>
+        </p:nvSpPr>
         <p:spPr>
           <a:xfrm>
-            <a:off x="6926164" y="1298448"/>
-            <a:ext cx="4344230" cy="1891792"/>
-          </a:xfrm>
-          <a:prstGeom prst="rect">
-            <a:avLst/>
-          </a:prstGeom>
-        </p:spPr>
-      </p:pic>
-      <p:sp>
-        <p:nvSpPr>
-          <p:cNvPr id="6" name="TextBox 5"/>
-          <p:cNvSpPr txBox="1"/>
-          <p:nvPr/>
-        </p:nvSpPr>
-        <p:spPr>
-          <a:xfrm>
-            <a:off x="6400800" y="3208528"/>
-            <a:ext cx="5394960" cy="394208"/>
+            <a:off x="411480" y="5998464"/>
+            <a:ext cx="11368735" cy="274320"/>
           </a:xfrm>
           <a:prstGeom prst="rect">
             <a:avLst/>
@@ -8502,45 +8961,6 @@
           </a:bodyPr>
           <a:lstStyle/>
           <a:p>
-            <a:pPr algn="ctr">
-              <a:spcAft>
-                <a:spcPts val="0"/>
-              </a:spcAft>
-            </a:pPr>
-            <a:r>
-              <a:rPr sz="1000" b="0">
-                <a:solidFill>
-                  <a:srgbClr val="6E6E6E"/>
-                </a:solidFill>
-                <a:latin typeface="Arial"/>
-              </a:rPr>
-              <a:t>The focal spot with the dimple on its core (left); the mask itself — a 1.57 rad phase disk with grey edges from area-weighted supersampling (right).</a:t>
-            </a:r>
-          </a:p>
-        </p:txBody>
-      </p:sp>
-      <p:sp>
-        <p:nvSpPr>
-          <p:cNvPr id="7" name="TextBox 6"/>
-          <p:cNvSpPr txBox="1"/>
-          <p:nvPr/>
-        </p:nvSpPr>
-        <p:spPr>
-          <a:xfrm>
-            <a:off x="6400800" y="3639312"/>
-            <a:ext cx="5394960" cy="274320"/>
-          </a:xfrm>
-          <a:prstGeom prst="rect">
-            <a:avLst/>
-          </a:prstGeom>
-          <a:noFill/>
-        </p:spPr>
-        <p:txBody>
-          <a:bodyPr wrap="square">
-            <a:spAutoFit/>
-          </a:bodyPr>
-          <a:lstStyle/>
-          <a:p>
             <a:pPr>
               <a:spcAft>
                 <a:spcPts val="600"/>
@@ -8553,7 +8973,7 @@
                 </a:solidFill>
                 <a:latin typeface="Arial"/>
               </a:rPr>
-              <a:t>The dimple takes 28.0% of the light — the fraction a 1.06 λF/D disk should take from a focused spot.</a:t>
+              <a:t>Segmented-mirror lessons carried forward: the sensor reads segment piston but not global piston, DM quantization appears as steps in the response, and piston is underestimated below 50 % Strehl (Keck) — all three enter the e5-class segmented gauges.</a:t>
             </a:r>
           </a:p>
         </p:txBody>
@@ -8566,7 +8986,7 @@
 </p:sld>
 </file>
 
-<file path=ppt/slides/slide20.xml><?xml version="1.0" encoding="utf-8"?>
+<file path=ppt/slides/slide2.xml><?xml version="1.0" encoding="utf-8"?>
 <p:sld xmlns:a="http://schemas.openxmlformats.org/drawingml/2006/main" xmlns:p="http://schemas.openxmlformats.org/presentationml/2006/main" xmlns:r="http://schemas.openxmlformats.org/officeDocument/2006/relationships">
   <p:cSld>
     <p:spTree>
@@ -8610,7 +9030,7 @@
                 </a:solidFill>
                 <a:latin typeface="Arial"/>
               </a:rPr>
-              <a:t>Before the correction: the first poke and colour results</a:t>
+              <a:t>The idea: the beam interferes with its own core</a:t>
             </a:r>
           </a:p>
           <a:p>
@@ -8626,7 +9046,7 @@
                 </a:solidFill>
                 <a:latin typeface="Arial"/>
               </a:rPr>
-              <a:t>Kept for the record; every number on this slide is from the out-of-focus model</a:t>
+              <a:t>A small etched dimple at the focus delays the centre of the beam; that light spreads back over the pupil and acts as the reference</a:t>
             </a:r>
           </a:p>
         </p:txBody>
@@ -8675,9 +9095,80 @@
           </a:p>
         </p:txBody>
       </p:sp>
+      <p:sp>
+        <p:nvSpPr>
+          <p:cNvPr id="4" name="TextBox 3"/>
+          <p:cNvSpPr txBox="1"/>
+          <p:nvPr/>
+        </p:nvSpPr>
+        <p:spPr>
+          <a:xfrm>
+            <a:off x="411480" y="1298448"/>
+            <a:ext cx="5806440" cy="274320"/>
+          </a:xfrm>
+          <a:prstGeom prst="rect">
+            <a:avLst/>
+          </a:prstGeom>
+          <a:noFill/>
+        </p:spPr>
+        <p:txBody>
+          <a:bodyPr wrap="square">
+            <a:spAutoFit/>
+          </a:bodyPr>
+          <a:lstStyle/>
+          <a:p>
+            <a:pPr>
+              <a:spcAft>
+                <a:spcPts val="600"/>
+              </a:spcAft>
+            </a:pPr>
+            <a:r>
+              <a:rPr sz="1200" b="0">
+                <a:solidFill>
+                  <a:srgbClr val="282828"/>
+                </a:solidFill>
+                <a:latin typeface="Arial"/>
+              </a:rPr>
+              <a:t>•  One glass plate, one tiny etched spot.  At the focus, the centre of the beam passes through the dimple and is delayed by a quarter wave; the rest of the beam misses it.  The delayed light spreads back over the whole pupil image and interferes with the rest.  This is an interferometer with no second arm.</a:t>
+            </a:r>
+          </a:p>
+          <a:p>
+            <a:pPr>
+              <a:spcAft>
+                <a:spcPts val="600"/>
+              </a:spcAft>
+            </a:pPr>
+            <a:r>
+              <a:rPr sz="1200" b="0">
+                <a:solidFill>
+                  <a:srgbClr val="282828"/>
+                </a:solidFill>
+                <a:latin typeface="Arial"/>
+              </a:rPr>
+              <a:t>•  Pupil brightness becomes a phase map.  Near a quarter wave of delay, the camera brightness is nearly proportional to the wavefront.  One frame per measurement, no moving parts, no polarization optics.  An exact pixel-by-pixel inversion (slide 8) removes the small-phase limit.</a:t>
+            </a:r>
+          </a:p>
+          <a:p>
+            <a:pPr>
+              <a:spcAft>
+                <a:spcPts val="600"/>
+              </a:spcAft>
+            </a:pPr>
+            <a:r>
+              <a:rPr sz="1200" b="0">
+                <a:solidFill>
+                  <a:srgbClr val="282828"/>
+                </a:solidFill>
+                <a:latin typeface="Arial"/>
+              </a:rPr>
+              <a:t>•  The two prices.  The sensor cannot see piston, and it is weak at the very lowest spatial frequencies, because the reference is made from the beam itself.  On the corrected model the weak band is 0.5 to 1 cycle across the pupil (half response at 1 cycle); defocus and everything finer read near full response.</a:t>
+            </a:r>
+          </a:p>
+        </p:txBody>
+      </p:sp>
       <p:pic>
         <p:nvPicPr>
-          <p:cNvPr id="4" name="Picture 3" descr="zwfs_poke_triptych.png"/>
+          <p:cNvPr id="5" name="Picture 4" descr="zwfs_mask_fig.png"/>
           <p:cNvPicPr>
             <a:picLocks noChangeAspect="1"/>
           </p:cNvPicPr>
@@ -8691,8 +9182,8 @@
         </p:blipFill>
         <p:spPr>
           <a:xfrm>
-            <a:off x="3643334" y="1298448"/>
-            <a:ext cx="4905026" cy="1462532"/>
+            <a:off x="6926164" y="1298448"/>
+            <a:ext cx="4344230" cy="1891792"/>
           </a:xfrm>
           <a:prstGeom prst="rect">
             <a:avLst/>
@@ -8701,14 +9192,14 @@
       </p:pic>
       <p:sp>
         <p:nvSpPr>
-          <p:cNvPr id="5" name="TextBox 4"/>
+          <p:cNvPr id="6" name="TextBox 5"/>
           <p:cNvSpPr txBox="1"/>
           <p:nvPr/>
         </p:nvSpPr>
         <p:spPr>
           <a:xfrm>
-            <a:off x="411480" y="2779268"/>
-            <a:ext cx="11368735" cy="229107"/>
+            <a:off x="6400800" y="3208528"/>
+            <a:ext cx="5394960" cy="394208"/>
           </a:xfrm>
           <a:prstGeom prst="rect">
             <a:avLst/>
@@ -8733,35 +9224,11 @@
                 </a:solidFill>
                 <a:latin typeface="Arial"/>
               </a:rPr>
-              <a:t>One actuator moved 20 nm on the out-of-focus model: the sensed blob is broadened and dimmed — gain 0.445, 0.29 nm rms error; the ring is the 4.9 m defocus.</a:t>
-            </a:r>
-          </a:p>
-        </p:txBody>
-      </p:sp>
-      <p:pic>
-        <p:nvPicPr>
-          <p:cNvPr id="6" name="Picture 5" descr="zwfs_defocus_triptych.png"/>
-          <p:cNvPicPr>
-            <a:picLocks noChangeAspect="1"/>
-          </p:cNvPicPr>
-          <p:nvPr/>
-        </p:nvPicPr>
-        <p:blipFill>
-          <a:blip r:embed="rId3"/>
-          <a:stretch>
-            <a:fillRect/>
-          </a:stretch>
-        </p:blipFill>
-        <p:spPr>
-          <a:xfrm>
-            <a:off x="3635414" y="3044952"/>
-            <a:ext cx="4920865" cy="1462532"/>
-          </a:xfrm>
-          <a:prstGeom prst="rect">
-            <a:avLst/>
-          </a:prstGeom>
-        </p:spPr>
-      </p:pic>
+              <a:t>The focal spot with the dimple on its core (left); the mask itself — a 1.57 rad phase disk with grey edges from area-weighted supersampling (right).</a:t>
+            </a:r>
+          </a:p>
+        </p:txBody>
+      </p:sp>
       <p:sp>
         <p:nvSpPr>
           <p:cNvPr id="7" name="TextBox 6"/>
@@ -8770,8 +9237,8 @@
         </p:nvSpPr>
         <p:spPr>
           <a:xfrm>
-            <a:off x="411480" y="4525771"/>
-            <a:ext cx="11368735" cy="229107"/>
+            <a:off x="6400800" y="3639312"/>
+            <a:ext cx="5394960" cy="274320"/>
           </a:xfrm>
           <a:prstGeom prst="rect">
             <a:avLst/>
@@ -8784,33 +9251,51 @@
           </a:bodyPr>
           <a:lstStyle/>
           <a:p>
-            <a:pPr algn="ctr">
+            <a:pPr>
               <a:spcAft>
-                <a:spcPts val="0"/>
+                <a:spcPts val="600"/>
               </a:spcAft>
             </a:pPr>
             <a:r>
-              <a:rPr sz="1000" b="0">
+              <a:rPr sz="1050" b="0">
                 <a:solidFill>
                   <a:srgbClr val="6E6E6E"/>
                 </a:solidFill>
                 <a:latin typeface="Arial"/>
               </a:rPr>
-              <a:t>Defocus at 8 nm on the same model: sensed matches applied at gain 0.986, 0.16 nm rms — low orders were never the trouble.</a:t>
-            </a:r>
-          </a:p>
-        </p:txBody>
-      </p:sp>
-      <p:sp>
-        <p:nvSpPr>
-          <p:cNvPr id="8" name="TextBox 7"/>
+              <a:t>The dimple takes 28.0% of the light — the fraction a 1.06 λF/D disk should take from a focused spot.</a:t>
+            </a:r>
+          </a:p>
+        </p:txBody>
+      </p:sp>
+    </p:spTree>
+  </p:cSld>
+  <p:clrMapOvr>
+    <a:masterClrMapping/>
+  </p:clrMapOvr>
+</p:sld>
+</file>
+
+<file path=ppt/slides/slide20.xml><?xml version="1.0" encoding="utf-8"?>
+<p:sld xmlns:a="http://schemas.openxmlformats.org/drawingml/2006/main" xmlns:p="http://schemas.openxmlformats.org/presentationml/2006/main" xmlns:r="http://schemas.openxmlformats.org/officeDocument/2006/relationships">
+  <p:cSld>
+    <p:spTree>
+      <p:nvGrpSpPr>
+        <p:cNvPr id="1" name=""/>
+        <p:cNvGrpSpPr/>
+        <p:nvPr/>
+      </p:nvGrpSpPr>
+      <p:grpSpPr/>
+      <p:sp>
+        <p:nvSpPr>
+          <p:cNvPr id="2" name="TextBox 1"/>
           <p:cNvSpPr txBox="1"/>
           <p:nvPr/>
         </p:nvSpPr>
         <p:spPr>
           <a:xfrm>
-            <a:off x="411480" y="4791455"/>
-            <a:ext cx="11368735" cy="274320"/>
+            <a:off x="822960" y="2743200"/>
+            <a:ext cx="10545775" cy="1280160"/>
           </a:xfrm>
           <a:prstGeom prst="rect">
             <a:avLst/>
@@ -8823,74 +9308,19 @@
           </a:bodyPr>
           <a:lstStyle/>
           <a:p>
-            <a:pPr>
+            <a:pPr algn="ctr">
               <a:spcAft>
-                <a:spcPts val="600"/>
+                <a:spcPts val="400"/>
               </a:spcAft>
             </a:pPr>
             <a:r>
-              <a:rPr sz="1500" b="0">
-                <a:solidFill>
-                  <a:srgbClr val="282828"/>
+              <a:rPr sz="4000" b="1">
+                <a:solidFill>
+                  <a:srgbClr val="1F4E79"/>
                 </a:solidFill>
                 <a:latin typeface="Arial"/>
               </a:rPr>
-              <a:t>•  The sampling sweep then read the spot as a band selector (gain on one actuator 0.45 / 0.59 / −0.38 at spots 2.0 / 3.0 / 1.06) and calibration recovered a 0.90 gain on a test actuator; both were measured on the ringing response.  On the corrected model the response peak is 0.75 (linear) and 0.93 (exact) and the spot only moves the low-order dip.</a:t>
-            </a:r>
-          </a:p>
-          <a:p>
-            <a:pPr>
-              <a:spcAft>
-                <a:spcPts val="600"/>
-              </a:spcAft>
-            </a:pPr>
-            <a:r>
-              <a:rPr sz="1500" b="0">
-                <a:solidFill>
-                  <a:srgbClr val="282828"/>
-                </a:solidFill>
-                <a:latin typeface="Arial"/>
-              </a:rPr>
-              <a:t>•  The colour claim ("five colours fill the blind band; single-actuator floor 720 → 224 pm") was the Talbot null moving as 1/λ.  On the corrected model there is no null and colour is not a lever (main slide 11).</a:t>
-            </a:r>
-          </a:p>
-        </p:txBody>
-      </p:sp>
-      <p:sp>
-        <p:nvSpPr>
-          <p:cNvPr id="9" name="TextBox 8"/>
-          <p:cNvSpPr txBox="1"/>
-          <p:nvPr/>
-        </p:nvSpPr>
-        <p:spPr>
-          <a:xfrm>
-            <a:off x="411480" y="6346698"/>
-            <a:ext cx="11368735" cy="274320"/>
-          </a:xfrm>
-          <a:prstGeom prst="rect">
-            <a:avLst/>
-          </a:prstGeom>
-          <a:noFill/>
-        </p:spPr>
-        <p:txBody>
-          <a:bodyPr wrap="square">
-            <a:spAutoFit/>
-          </a:bodyPr>
-          <a:lstStyle/>
-          <a:p>
-            <a:pPr>
-              <a:spcAft>
-                <a:spcPts val="600"/>
-              </a:spcAft>
-            </a:pPr>
-            <a:r>
-              <a:rPr sz="1050" b="0">
-                <a:solidFill>
-                  <a:srgbClr val="6E6E6E"/>
-                </a:solidFill>
-                <a:latin typeface="Arial"/>
-              </a:rPr>
-              <a:t>Records: zwfs_s1 … zwfs_s6color reports and zwfs_sweep_report.txt; the old emission ('nf_legacy') reproduces them byte for byte.</a:t>
+              <a:t>Backup</a:t>
             </a:r>
           </a:p>
         </p:txBody>
@@ -8947,7 +9377,7 @@
                 </a:solidFill>
                 <a:latin typeface="Arial"/>
               </a:rPr>
-              <a:t>Provenance and records</a:t>
+              <a:t>Before the correction: the first poke and colour results</a:t>
             </a:r>
           </a:p>
           <a:p>
@@ -8963,7 +9393,7 @@
                 </a:solidFill>
                 <a:latin typeface="Arial"/>
               </a:rPr>
-              <a:t>Every number re-derives from a committed script</a:t>
+              <a:t>Kept for the record; every number on this slide is from the out-of-focus model</a:t>
             </a:r>
           </a:p>
         </p:txBody>
@@ -9012,15 +9442,141 @@
           </a:p>
         </p:txBody>
       </p:sp>
-      <p:sp>
-        <p:nvSpPr>
-          <p:cNvPr id="4" name="TextBox 3"/>
+      <p:pic>
+        <p:nvPicPr>
+          <p:cNvPr id="4" name="Picture 3" descr="zwfs_poke_triptych.png"/>
+          <p:cNvPicPr>
+            <a:picLocks noChangeAspect="1"/>
+          </p:cNvPicPr>
+          <p:nvPr/>
+        </p:nvPicPr>
+        <p:blipFill>
+          <a:blip r:embed="rId2"/>
+          <a:stretch>
+            <a:fillRect/>
+          </a:stretch>
+        </p:blipFill>
+        <p:spPr>
+          <a:xfrm>
+            <a:off x="3643334" y="1298448"/>
+            <a:ext cx="4905026" cy="1462532"/>
+          </a:xfrm>
+          <a:prstGeom prst="rect">
+            <a:avLst/>
+          </a:prstGeom>
+        </p:spPr>
+      </p:pic>
+      <p:sp>
+        <p:nvSpPr>
+          <p:cNvPr id="5" name="TextBox 4"/>
           <p:cNvSpPr txBox="1"/>
           <p:nvPr/>
         </p:nvSpPr>
         <p:spPr>
           <a:xfrm>
-            <a:off x="411480" y="1298448"/>
+            <a:off x="411480" y="2779268"/>
+            <a:ext cx="11368735" cy="229107"/>
+          </a:xfrm>
+          <a:prstGeom prst="rect">
+            <a:avLst/>
+          </a:prstGeom>
+          <a:noFill/>
+        </p:spPr>
+        <p:txBody>
+          <a:bodyPr wrap="square">
+            <a:spAutoFit/>
+          </a:bodyPr>
+          <a:lstStyle/>
+          <a:p>
+            <a:pPr algn="ctr">
+              <a:spcAft>
+                <a:spcPts val="0"/>
+              </a:spcAft>
+            </a:pPr>
+            <a:r>
+              <a:rPr sz="1000" b="0">
+                <a:solidFill>
+                  <a:srgbClr val="6E6E6E"/>
+                </a:solidFill>
+                <a:latin typeface="Arial"/>
+              </a:rPr>
+              <a:t>One actuator moved 20 nm on the out-of-focus model: the sensed blob is broadened and dimmed — gain 0.445, 0.29 nm rms error; the ring is the 4.9 m defocus.</a:t>
+            </a:r>
+          </a:p>
+        </p:txBody>
+      </p:sp>
+      <p:pic>
+        <p:nvPicPr>
+          <p:cNvPr id="6" name="Picture 5" descr="zwfs_defocus_triptych.png"/>
+          <p:cNvPicPr>
+            <a:picLocks noChangeAspect="1"/>
+          </p:cNvPicPr>
+          <p:nvPr/>
+        </p:nvPicPr>
+        <p:blipFill>
+          <a:blip r:embed="rId3"/>
+          <a:stretch>
+            <a:fillRect/>
+          </a:stretch>
+        </p:blipFill>
+        <p:spPr>
+          <a:xfrm>
+            <a:off x="3635414" y="3044952"/>
+            <a:ext cx="4920865" cy="1462532"/>
+          </a:xfrm>
+          <a:prstGeom prst="rect">
+            <a:avLst/>
+          </a:prstGeom>
+        </p:spPr>
+      </p:pic>
+      <p:sp>
+        <p:nvSpPr>
+          <p:cNvPr id="7" name="TextBox 6"/>
+          <p:cNvSpPr txBox="1"/>
+          <p:nvPr/>
+        </p:nvSpPr>
+        <p:spPr>
+          <a:xfrm>
+            <a:off x="411480" y="4525771"/>
+            <a:ext cx="11368735" cy="229107"/>
+          </a:xfrm>
+          <a:prstGeom prst="rect">
+            <a:avLst/>
+          </a:prstGeom>
+          <a:noFill/>
+        </p:spPr>
+        <p:txBody>
+          <a:bodyPr wrap="square">
+            <a:spAutoFit/>
+          </a:bodyPr>
+          <a:lstStyle/>
+          <a:p>
+            <a:pPr algn="ctr">
+              <a:spcAft>
+                <a:spcPts val="0"/>
+              </a:spcAft>
+            </a:pPr>
+            <a:r>
+              <a:rPr sz="1000" b="0">
+                <a:solidFill>
+                  <a:srgbClr val="6E6E6E"/>
+                </a:solidFill>
+                <a:latin typeface="Arial"/>
+              </a:rPr>
+              <a:t>Defocus at 8 nm on the same model: sensed matches applied at gain 0.986, 0.16 nm rms — low orders were never the trouble.</a:t>
+            </a:r>
+          </a:p>
+        </p:txBody>
+      </p:sp>
+      <p:sp>
+        <p:nvSpPr>
+          <p:cNvPr id="8" name="TextBox 7"/>
+          <p:cNvSpPr txBox="1"/>
+          <p:nvPr/>
+        </p:nvSpPr>
+        <p:spPr>
+          <a:xfrm>
+            <a:off x="411480" y="4791455"/>
             <a:ext cx="11368735" cy="274320"/>
           </a:xfrm>
           <a:prstGeom prst="rect">
@@ -9046,7 +9602,7 @@
                 </a:solidFill>
                 <a:latin typeface="Arial"/>
               </a:rPr>
-              <a:t>•  Campaign: templates/40_benches/zwfs_dm96 — the script and parameter sheet (zwfs_params.m, zwfs_run.m, zwfs_run_figs.m, zwfs_run_batch.m, zwfs_batch.sh, macos_param_2048.txt) and its runs (runs/rec193 = the stage-7 reproduction check; ng385, ng385s3, m2048 = the sampling setups; rec193full = colour + photons); the stage scripts zwfs_s1 … zwfs_s7iter as the historical record; README with the findings chain (S1–S8); plan and rulings in macos/BRIEF_zwfs_campaign.md.</a:t>
+              <a:t>•  The sampling sweep then read the spot as a band selector (gain on one actuator 0.45 / 0.59 / −0.38 at spots 2.0 / 3.0 / 1.06) and calibration recovered a 0.90 gain on a test actuator; both were measured on the ringing response.  On the corrected model the response peak is 0.75 (linear) and 0.93 (exact) and the spot only moves the low-order dip.</a:t>
             </a:r>
           </a:p>
           <a:p>
@@ -9062,9 +9618,32 @@
                 </a:solidFill>
                 <a:latin typeface="Arial"/>
               </a:rPr>
-              <a:t>•  Findings from stage 1, recorded so they are not re-derived: the stock detector leg is ray-traced at the mask plane — a mask a few microns across needs the reference-sphere bracket (a builder option, default off, existing decks bit-identical, suites green); the mask must sit at the optimized lens's real focus (−5.58 mm from the thin-lens seed); the camera-to-DM frame must come from traced rays — an estimate from the support area was 25% off.</a:t>
-            </a:r>
-          </a:p>
+              <a:t>•  The colour claim ("five colours fill the blind band; single-actuator floor 720 → 224 pm") was the Talbot null moving as 1/λ.  On the corrected model there is no null and colour is not a lever (main slide 11).</a:t>
+            </a:r>
+          </a:p>
+        </p:txBody>
+      </p:sp>
+      <p:sp>
+        <p:nvSpPr>
+          <p:cNvPr id="9" name="TextBox 8"/>
+          <p:cNvSpPr txBox="1"/>
+          <p:nvPr/>
+        </p:nvSpPr>
+        <p:spPr>
+          <a:xfrm>
+            <a:off x="411480" y="6346698"/>
+            <a:ext cx="11368735" cy="274320"/>
+          </a:xfrm>
+          <a:prstGeom prst="rect">
+            <a:avLst/>
+          </a:prstGeom>
+          <a:noFill/>
+        </p:spPr>
+        <p:txBody>
+          <a:bodyPr wrap="square">
+            <a:spAutoFit/>
+          </a:bodyPr>
+          <a:lstStyle/>
           <a:p>
             <a:pPr>
               <a:spcAft>
@@ -9072,93 +9651,13 @@
               </a:spcAft>
             </a:pPr>
             <a:r>
-              <a:rPr sz="1500" b="0">
-                <a:solidFill>
-                  <a:srgbClr val="282828"/>
+              <a:rPr sz="1050" b="0">
+                <a:solidFill>
+                  <a:srgbClr val="6E6E6E"/>
                 </a:solidFill>
                 <a:latin typeface="Arial"/>
               </a:rPr>
-              <a:t>•  The stage-7 correction: the bracket's exit sphere now carries the entrance sphere's radius ('nf'); 'nf_legacy' reproduces the stage 1–6 emission; the interferometer twin traces the mask plane by rays and is unaffected.</a:t>
-            </a:r>
-          </a:p>
-          <a:p>
-            <a:pPr>
-              <a:spcAft>
-                <a:spcPts val="600"/>
-              </a:spcAft>
-            </a:pPr>
-            <a:r>
-              <a:rPr sz="1500" b="0">
-                <a:solidFill>
-                  <a:srgbClr val="282828"/>
-                </a:solidFill>
-                <a:latin typeface="Arial"/>
-              </a:rPr>
-              <a:t>•  Sign convention checked by a negative control: surface height = −φ·λ/4π on this deck (a single reflection doubles the height).</a:t>
-            </a:r>
-          </a:p>
-          <a:p>
-            <a:pPr>
-              <a:spcAft>
-                <a:spcPts val="600"/>
-              </a:spcAft>
-            </a:pPr>
-            <a:r>
-              <a:rPr sz="1500" b="0">
-                <a:solidFill>
-                  <a:srgbClr val="282828"/>
-                </a:solidFill>
-                <a:latin typeface="Arial"/>
-              </a:rPr>
-              <a:t>•  Scoring: actuator units through the DM influence model, one library for both instruments (dm_gauge_lib: registration, actuator fit, frequency correction, both measurement factories).</a:t>
-            </a:r>
-          </a:p>
-          <a:p>
-            <a:pPr>
-              <a:spcAft>
-                <a:spcPts val="600"/>
-              </a:spcAft>
-            </a:pPr>
-            <a:r>
-              <a:rPr sz="1500" b="0">
-                <a:solidFill>
-                  <a:srgbClr val="282828"/>
-                </a:solidFill>
-                <a:latin typeface="Arial"/>
-              </a:rPr>
-              <a:t>•  Hardware source: "VSG2 Zernike Wavefront Sensor Update -v2" deck, parameters carried in templates/40_benches/vsg_wip/vsg2_params.m §9.</a:t>
-            </a:r>
-          </a:p>
-          <a:p>
-            <a:pPr>
-              <a:spcAft>
-                <a:spcPts val="600"/>
-              </a:spcAft>
-            </a:pPr>
-            <a:r>
-              <a:rPr sz="1500" b="0">
-                <a:solidFill>
-                  <a:srgbClr val="282828"/>
-                </a:solidFill>
-                <a:latin typeface="Arial"/>
-              </a:rPr>
-              <a:t>•  Interferometer comparison column: templates/40_benches/tg_psi_dm96, run 10, S4, S5 (tg96_report.txt, tg96_s4_report.txt, tg96_s5noise_report.txt).</a:t>
-            </a:r>
-          </a:p>
-          <a:p>
-            <a:pPr>
-              <a:spcAft>
-                <a:spcPts val="600"/>
-              </a:spcAft>
-            </a:pPr>
-            <a:r>
-              <a:rPr sz="1500" b="0">
-                <a:solidFill>
-                  <a:srgbClr val="282828"/>
-                </a:solidFill>
-                <a:latin typeface="Arial"/>
-              </a:rPr>
-              <a:t>•  Literature scan (2026-09-09): macos/REPORT_zwfs_lit_scan.md — twelve papers, ranked, with the PZT verdict for the interferometer.</a:t>
+              <a:t>Records: zwfs_s1 … zwfs_s6color reports and zwfs_sweep_report.txt; the old emission ('nf_legacy') reproduces them byte for byte.</a:t>
             </a:r>
           </a:p>
         </p:txBody>
@@ -9171,7 +9670,7 @@
 </p:sld>
 </file>
 
-<file path=ppt/slides/slide3.xml><?xml version="1.0" encoding="utf-8"?>
+<file path=ppt/slides/slide22.xml><?xml version="1.0" encoding="utf-8"?>
 <p:sld xmlns:a="http://schemas.openxmlformats.org/drawingml/2006/main" xmlns:p="http://schemas.openxmlformats.org/presentationml/2006/main" xmlns:r="http://schemas.openxmlformats.org/officeDocument/2006/relationships">
   <p:cSld>
     <p:spTree>
@@ -9215,7 +9714,7 @@
                 </a:solidFill>
                 <a:latin typeface="Arial"/>
               </a:rPr>
-              <a:t>The setup: the interferometer's test arm, alone</a:t>
+              <a:t>Provenance and records</a:t>
             </a:r>
           </a:p>
           <a:p>
@@ -9231,7 +9730,7 @@
                 </a:solidFill>
                 <a:latin typeface="Arial"/>
               </a:rPr>
-              <a:t>Same source, same splitter, same 700 mm mirror leg, same lenses — the reference arm and every polarization element removed</a:t>
+              <a:t>Every number re-derives from a committed script</a:t>
             </a:r>
           </a:p>
         </p:txBody>
@@ -9289,7 +9788,7 @@
         <p:spPr>
           <a:xfrm>
             <a:off x="411480" y="1298448"/>
-            <a:ext cx="5806440" cy="274320"/>
+            <a:ext cx="11368735" cy="274320"/>
           </a:xfrm>
           <a:prstGeom prst="rect">
             <a:avLst/>
@@ -9308,13 +9807,13 @@
               </a:spcAft>
             </a:pPr>
             <a:r>
-              <a:rPr sz="1200" b="0">
+              <a:rPr sz="1500" b="0">
                 <a:solidFill>
                   <a:srgbClr val="282828"/>
                 </a:solidFill>
                 <a:latin typeface="Arial"/>
               </a:rPr>
-              <a:t>•  Reused whole: the TG96 bench laid out for the 96×96, 1 mm-pitch DM — splitter at 7°, legs solved for clearance, the tuned detector optics.  The dimple sits at the internal focus of the existing detector leg, in the mask seat the bench already had; the camera still views an image of the DM.</a:t>
+              <a:t>•  Campaign: templates/40_benches/zwfs_dm96 — the script and parameter sheet (zwfs_params.m, zwfs_run.m, zwfs_run_figs.m, zwfs_run_batch.m, zwfs_batch.sh, macos_param_2048.txt) and its runs (runs/rec193 = the stage-7 reproduction check; ng385, ng385s3, m2048 = the sampling setups; rec193full = colour + photons); the stage scripts zwfs_s1 … zwfs_s7iter as the historical record; README with the findings chain (S1–S8); plan and rulings in macos/BRIEF_zwfs_campaign.md.</a:t>
             </a:r>
           </a:p>
           <a:p>
@@ -9324,13 +9823,13 @@
               </a:spcAft>
             </a:pPr>
             <a:r>
-              <a:rPr sz="1200" b="0">
+              <a:rPr sz="1500" b="0">
                 <a:solidFill>
                   <a:srgbClr val="282828"/>
                 </a:solidFill>
                 <a:latin typeface="Arial"/>
               </a:rPr>
-              <a:t>•  Removed: the reference flat and its leg; the polarizer, four arm waveplates, output waveplate and analyzer.  Nothing else moves.</a:t>
+              <a:t>•  Findings from stage 1, recorded so they are not re-derived: the stock detector leg is ray-traced at the mask plane — a mask a few microns across needs the reference-sphere bracket (a builder option, default off, existing decks bit-identical, suites green); the mask must sit at the optimized lens's real focus (−5.58 mm from the thin-lens seed); the camera-to-DM frame must come from traced rays — an estimate from the support area was 25% off.</a:t>
             </a:r>
           </a:p>
           <a:p>
@@ -9340,101 +9839,15 @@
               </a:spcAft>
             </a:pPr>
             <a:r>
-              <a:rPr sz="1200" b="0">
+              <a:rPr sz="1500" b="0">
                 <a:solidFill>
                   <a:srgbClr val="282828"/>
                 </a:solidFill>
                 <a:latin typeface="Arial"/>
               </a:rPr>
-              <a:t>•  Why this matters: when the two instruments are scored against each other, the only difference is how they sense — not the glass, not the geometry.</a:t>
-            </a:r>
-          </a:p>
-        </p:txBody>
-      </p:sp>
-      <p:pic>
-        <p:nvPicPr>
-          <p:cNvPr id="5" name="Picture 4" descr="zwfs_render_rig.png"/>
-          <p:cNvPicPr>
-            <a:picLocks noChangeAspect="1"/>
-          </p:cNvPicPr>
-          <p:nvPr/>
-        </p:nvPicPr>
-        <p:blipFill>
-          <a:blip r:embed="rId2"/>
-          <a:stretch>
-            <a:fillRect/>
-          </a:stretch>
-        </p:blipFill>
-        <p:spPr>
-          <a:xfrm>
-            <a:off x="6503663" y="1298448"/>
-            <a:ext cx="5189233" cy="1708912"/>
-          </a:xfrm>
-          <a:prstGeom prst="rect">
-            <a:avLst/>
-          </a:prstGeom>
-        </p:spPr>
-      </p:pic>
-      <p:sp>
-        <p:nvSpPr>
-          <p:cNvPr id="6" name="TextBox 5"/>
-          <p:cNvSpPr txBox="1"/>
-          <p:nvPr/>
-        </p:nvSpPr>
-        <p:spPr>
-          <a:xfrm>
-            <a:off x="6400800" y="3025648"/>
-            <a:ext cx="5394960" cy="394208"/>
-          </a:xfrm>
-          <a:prstGeom prst="rect">
-            <a:avLst/>
-          </a:prstGeom>
-          <a:noFill/>
-        </p:spPr>
-        <p:txBody>
-          <a:bodyPr wrap="square">
-            <a:spAutoFit/>
-          </a:bodyPr>
-          <a:lstStyle/>
-          <a:p>
-            <a:pPr algn="ctr">
-              <a:spcAft>
-                <a:spcPts val="0"/>
-              </a:spcAft>
-            </a:pPr>
-            <a:r>
-              <a:rPr sz="1000" b="0">
-                <a:solidFill>
-                  <a:srgbClr val="6E6E6E"/>
-                </a:solidFill>
-                <a:latin typeface="Arial"/>
-              </a:rPr>
-              <a:t>The train as traced: source and splitter at left, the 96 mm DM on its 700 mm leg, the detector tail converging to the dimple's focus, and the camera at the pupil image.</a:t>
-            </a:r>
-          </a:p>
-        </p:txBody>
-      </p:sp>
-      <p:sp>
-        <p:nvSpPr>
-          <p:cNvPr id="7" name="TextBox 6"/>
-          <p:cNvSpPr txBox="1"/>
-          <p:nvPr/>
-        </p:nvSpPr>
-        <p:spPr>
-          <a:xfrm>
-            <a:off x="6400800" y="3456432"/>
-            <a:ext cx="5394960" cy="274320"/>
-          </a:xfrm>
-          <a:prstGeom prst="rect">
-            <a:avLst/>
-          </a:prstGeom>
-          <a:noFill/>
-        </p:spPr>
-        <p:txBody>
-          <a:bodyPr wrap="square">
-            <a:spAutoFit/>
-          </a:bodyPr>
-          <a:lstStyle/>
+              <a:t>•  The stage-7 correction: the bracket's exit sphere now carries the entrance sphere's radius ('nf'); 'nf_legacy' reproduces the stage 1–6 emission; the interferometer twin traces the mask plane by rays and is unaffected.</a:t>
+            </a:r>
+          </a:p>
           <a:p>
             <a:pPr>
               <a:spcAft>
@@ -9442,13 +9855,77 @@
               </a:spcAft>
             </a:pPr>
             <a:r>
-              <a:rPr sz="1050" b="0">
-                <a:solidFill>
-                  <a:srgbClr val="6E6E6E"/>
+              <a:rPr sz="1500" b="0">
+                <a:solidFill>
+                  <a:srgbClr val="282828"/>
                 </a:solidFill>
                 <a:latin typeface="Arial"/>
               </a:rPr>
-              <a:t>A mask a few microns across needs a diffraction calculation around the focus: two reference spheres, one before and one after the mask.  They must have the same radius — the finding on slide 7.</a:t>
+              <a:t>•  Sign convention checked by a negative control: surface height = −φ·λ/4π on this deck (a single reflection doubles the height).</a:t>
+            </a:r>
+          </a:p>
+          <a:p>
+            <a:pPr>
+              <a:spcAft>
+                <a:spcPts val="600"/>
+              </a:spcAft>
+            </a:pPr>
+            <a:r>
+              <a:rPr sz="1500" b="0">
+                <a:solidFill>
+                  <a:srgbClr val="282828"/>
+                </a:solidFill>
+                <a:latin typeface="Arial"/>
+              </a:rPr>
+              <a:t>•  Scoring: actuator units through the DM influence model, one library for both instruments (dm_gauge_lib: registration, actuator fit, frequency correction, both measurement factories).</a:t>
+            </a:r>
+          </a:p>
+          <a:p>
+            <a:pPr>
+              <a:spcAft>
+                <a:spcPts val="600"/>
+              </a:spcAft>
+            </a:pPr>
+            <a:r>
+              <a:rPr sz="1500" b="0">
+                <a:solidFill>
+                  <a:srgbClr val="282828"/>
+                </a:solidFill>
+                <a:latin typeface="Arial"/>
+              </a:rPr>
+              <a:t>•  Hardware source: "VSG2 Zernike Wavefront Sensor Update -v2" deck, parameters carried in templates/40_benches/vsg_wip/vsg2_params.m §9.</a:t>
+            </a:r>
+          </a:p>
+          <a:p>
+            <a:pPr>
+              <a:spcAft>
+                <a:spcPts val="600"/>
+              </a:spcAft>
+            </a:pPr>
+            <a:r>
+              <a:rPr sz="1500" b="0">
+                <a:solidFill>
+                  <a:srgbClr val="282828"/>
+                </a:solidFill>
+                <a:latin typeface="Arial"/>
+              </a:rPr>
+              <a:t>•  Interferometer comparison column: templates/40_benches/tg_psi_dm96, run 10, S4, S5 (tg96_report.txt, tg96_s4_report.txt, tg96_s5noise_report.txt).</a:t>
+            </a:r>
+          </a:p>
+          <a:p>
+            <a:pPr>
+              <a:spcAft>
+                <a:spcPts val="600"/>
+              </a:spcAft>
+            </a:pPr>
+            <a:r>
+              <a:rPr sz="1500" b="0">
+                <a:solidFill>
+                  <a:srgbClr val="282828"/>
+                </a:solidFill>
+                <a:latin typeface="Arial"/>
+              </a:rPr>
+              <a:t>•  Literature scan (2026-09-09): macos/REPORT_zwfs_lit_scan.md — twelve papers, ranked, with the PZT verdict for the interferometer.</a:t>
             </a:r>
           </a:p>
         </p:txBody>
@@ -9461,7 +9938,7 @@
 </p:sld>
 </file>
 
-<file path=ppt/slides/slide4.xml><?xml version="1.0" encoding="utf-8"?>
+<file path=ppt/slides/slide3.xml><?xml version="1.0" encoding="utf-8"?>
 <p:sld xmlns:a="http://schemas.openxmlformats.org/drawingml/2006/main" xmlns:p="http://schemas.openxmlformats.org/presentationml/2006/main" xmlns:r="http://schemas.openxmlformats.org/officeDocument/2006/relationships">
   <p:cSld>
     <p:spTree>
@@ -9505,7 +9982,7 @@
                 </a:solidFill>
                 <a:latin typeface="Arial"/>
               </a:rPr>
-              <a:t>How the numbers are scored</a:t>
+              <a:t>The setup: the interferometer's test arm, alone</a:t>
             </a:r>
           </a:p>
           <a:p>
@@ -9521,7 +9998,7 @@
                 </a:solidFill>
                 <a:latin typeface="Arial"/>
               </a:rPr>
-              <a:t>Every result on the following slides is a change in the DM, measured before and after, in actuator units</a:t>
+              <a:t>Same source, same splitter, same 700 mm mirror leg, same lenses — the reference arm and every polarization element removed</a:t>
             </a:r>
           </a:p>
         </p:txBody>
@@ -9579,7 +10056,7 @@
         <p:spPr>
           <a:xfrm>
             <a:off x="411480" y="1298448"/>
-            <a:ext cx="11368735" cy="274320"/>
+            <a:ext cx="5806440" cy="274320"/>
           </a:xfrm>
           <a:prstGeom prst="rect">
             <a:avLst/>
@@ -9598,13 +10075,13 @@
               </a:spcAft>
             </a:pPr>
             <a:r>
-              <a:rPr sz="1500" b="0">
+              <a:rPr sz="1200" b="0">
                 <a:solidFill>
                   <a:srgbClr val="282828"/>
                 </a:solidFill>
                 <a:latin typeface="Arial"/>
               </a:rPr>
-              <a:t>•  The test: put the DM in some shape (the working surface), measure it; change a known set of actuators by a known amount (10 nm unless stated); measure again; subtract; fit the actuator pattern to the difference.  The score is how well the actuator changes come back.</a:t>
+              <a:t>•  Reused whole: the TG96 bench laid out for the 96×96, 1 mm-pitch DM — splitter at 7°, legs solved for clearance, the tuned detector optics.  The dimple sits at the internal focus of the existing detector leg, in the mask seat the bench already had; the camera still views an image of the DM.</a:t>
             </a:r>
           </a:p>
           <a:p>
@@ -9614,13 +10091,13 @@
               </a:spcAft>
             </a:pPr>
             <a:r>
-              <a:rPr sz="1500" b="0">
+              <a:rPr sz="1200" b="0">
                 <a:solidFill>
                   <a:srgbClr val="282828"/>
                 </a:solidFill>
                 <a:latin typeface="Arial"/>
               </a:rPr>
-              <a:t>•  Gain: recovered change divided by the true change.  1.0 is perfect.  Gain is quoted after calibration: the sensor's response to one actuator and to patterns of each spatial frequency is measured on the flat DM and divided out.  A gain below 1 on a working surface is therefore an error the flat-DM calibration did not remove.</a:t>
+              <a:t>•  Removed: the reference flat and its leg; the polarizer, four arm waveplates, output waveplate and analyzer.  Nothing else moves.</a:t>
             </a:r>
           </a:p>
           <a:p>
@@ -9630,75 +10107,51 @@
               </a:spcAft>
             </a:pPr>
             <a:r>
-              <a:rPr sz="1500" b="0">
+              <a:rPr sz="1200" b="0">
                 <a:solidFill>
                   <a:srgbClr val="282828"/>
                 </a:solidFill>
                 <a:latin typeface="Arial"/>
               </a:rPr>
-              <a:t>•  Floor: the spread (rms) of the actuators that were not changed, in picometres.  It is what the measurement puts on actuators that should read zero.</a:t>
-            </a:r>
-          </a:p>
-          <a:p>
-            <a:pPr>
-              <a:spcAft>
-                <a:spcPts val="600"/>
-              </a:spcAft>
-            </a:pPr>
-            <a:r>
-              <a:rPr sz="1500" b="0">
-                <a:solidFill>
-                  <a:srgbClr val="282828"/>
-                </a:solidFill>
-                <a:latin typeface="Arial"/>
-              </a:rPr>
-              <a:t>•  SNR: recovered change divided by the floor.  Above 5 counts as detected.</a:t>
-            </a:r>
-          </a:p>
-          <a:p>
-            <a:pPr>
-              <a:spcAft>
-                <a:spcPts val="600"/>
-              </a:spcAft>
-            </a:pPr>
-            <a:r>
-              <a:rPr sz="1500" b="0">
-                <a:solidFill>
-                  <a:srgbClr val="282828"/>
-                </a:solidFill>
-                <a:latin typeface="Arial"/>
-              </a:rPr>
-              <a:t>•  Working surface: a random DM shape, 30 nm rms unless stated, present during the test.  It is the same random pattern every time, scaled.</a:t>
-            </a:r>
-          </a:p>
-          <a:p>
-            <a:pPr>
-              <a:spcAft>
-                <a:spcPts val="600"/>
-              </a:spcAft>
-            </a:pPr>
-            <a:r>
-              <a:rPr sz="1500" b="0">
-                <a:solidFill>
-                  <a:srgbClr val="282828"/>
-                </a:solidFill>
-                <a:latin typeface="Arial"/>
-              </a:rPr>
-              <a:t>•  State and frame: a state is one DM shape measured once.  A measurement of a change costs two states.  A state costs one camera frame for the one-frame readings and four frames for the stepped reading; photon budgets are quoted per state.</a:t>
-            </a:r>
-          </a:p>
-        </p:txBody>
-      </p:sp>
-      <p:sp>
-        <p:nvSpPr>
-          <p:cNvPr id="5" name="TextBox 4"/>
+              <a:t>•  Why this matters: when the two instruments are scored against each other, the only difference is how they sense — not the glass, not the geometry.</a:t>
+            </a:r>
+          </a:p>
+        </p:txBody>
+      </p:sp>
+      <p:pic>
+        <p:nvPicPr>
+          <p:cNvPr id="5" name="Picture 4" descr="zwfs_render_rig.png"/>
+          <p:cNvPicPr>
+            <a:picLocks noChangeAspect="1"/>
+          </p:cNvPicPr>
+          <p:nvPr/>
+        </p:nvPicPr>
+        <p:blipFill>
+          <a:blip r:embed="rId2"/>
+          <a:stretch>
+            <a:fillRect/>
+          </a:stretch>
+        </p:blipFill>
+        <p:spPr>
+          <a:xfrm>
+            <a:off x="6503663" y="1298448"/>
+            <a:ext cx="5189233" cy="1708912"/>
+          </a:xfrm>
+          <a:prstGeom prst="rect">
+            <a:avLst/>
+          </a:prstGeom>
+        </p:spPr>
+      </p:pic>
+      <p:sp>
+        <p:nvSpPr>
+          <p:cNvPr id="6" name="TextBox 5"/>
           <p:cNvSpPr txBox="1"/>
           <p:nvPr/>
         </p:nvSpPr>
         <p:spPr>
           <a:xfrm>
-            <a:off x="411480" y="5643372"/>
-            <a:ext cx="11368735" cy="274320"/>
+            <a:off x="6400800" y="3025648"/>
+            <a:ext cx="5394960" cy="394208"/>
           </a:xfrm>
           <a:prstGeom prst="rect">
             <a:avLst/>
@@ -9711,6 +10164,45 @@
           </a:bodyPr>
           <a:lstStyle/>
           <a:p>
+            <a:pPr algn="ctr">
+              <a:spcAft>
+                <a:spcPts val="0"/>
+              </a:spcAft>
+            </a:pPr>
+            <a:r>
+              <a:rPr sz="1000" b="0">
+                <a:solidFill>
+                  <a:srgbClr val="6E6E6E"/>
+                </a:solidFill>
+                <a:latin typeface="Arial"/>
+              </a:rPr>
+              <a:t>The train as traced: source and splitter at left, the 96 mm DM on its 700 mm leg, the detector tail converging to the dimple's focus, and the camera at the pupil image.</a:t>
+            </a:r>
+          </a:p>
+        </p:txBody>
+      </p:sp>
+      <p:sp>
+        <p:nvSpPr>
+          <p:cNvPr id="7" name="TextBox 6"/>
+          <p:cNvSpPr txBox="1"/>
+          <p:nvPr/>
+        </p:nvSpPr>
+        <p:spPr>
+          <a:xfrm>
+            <a:off x="6400800" y="3456432"/>
+            <a:ext cx="5394960" cy="274320"/>
+          </a:xfrm>
+          <a:prstGeom prst="rect">
+            <a:avLst/>
+          </a:prstGeom>
+          <a:noFill/>
+        </p:spPr>
+        <p:txBody>
+          <a:bodyPr wrap="square">
+            <a:spAutoFit/>
+          </a:bodyPr>
+          <a:lstStyle/>
+          <a:p>
             <a:pPr>
               <a:spcAft>
                 <a:spcPts val="600"/>
@@ -9723,7 +10215,7 @@
                 </a:solidFill>
                 <a:latin typeface="Arial"/>
               </a:rPr>
-              <a:t>96×96 DM at 1 mm pitch unless stated (48×48 at 2 mm alongside).  The interferometer is scored the same way with the same code (dm_gauge_lib).  Target: 1 pm.</a:t>
+              <a:t>A mask a few microns across needs a diffraction calculation around the focus: two reference spheres, one before and one after the mask.  They must have the same radius — the finding on slide 7.</a:t>
             </a:r>
           </a:p>
         </p:txBody>
@@ -9736,7 +10228,7 @@
 </p:sld>
 </file>
 
-<file path=ppt/slides/slide5.xml><?xml version="1.0" encoding="utf-8"?>
+<file path=ppt/slides/slide4.xml><?xml version="1.0" encoding="utf-8"?>
 <p:sld xmlns:a="http://schemas.openxmlformats.org/drawingml/2006/main" xmlns:p="http://schemas.openxmlformats.org/presentationml/2006/main" xmlns:r="http://schemas.openxmlformats.org/officeDocument/2006/relationships">
   <p:cSld>
     <p:spTree>
@@ -9780,7 +10272,7 @@
                 </a:solidFill>
                 <a:latin typeface="Arial"/>
               </a:rPr>
-              <a:t>The mask is real hardware, modelled with its own numbers</a:t>
+              <a:t>How the numbers are scored</a:t>
             </a:r>
           </a:p>
           <a:p>
@@ -9796,7 +10288,7 @@
                 </a:solidFill>
                 <a:latin typeface="Arial"/>
               </a:rPr>
-              <a:t>346.2 nm of etch in fused silica = 1.571 rad at 632.8 nm; a substrate with nine spots, one in the beam at a time</a:t>
+              <a:t>Every result on the following slides is a change in the DM, measured before and after, in actuator units</a:t>
             </a:r>
           </a:p>
         </p:txBody>
@@ -9879,273 +10371,100 @@
                 </a:solidFill>
                 <a:latin typeface="Arial"/>
               </a:rPr>
-              <a:t>•  The part: a fused-silica plate with a 3×3 array of etched dimples of different diameters — the VSG2 wavefront-sensor mask.  Etch depth 346.2 nm gives a phase delay 2π(n−1)d/λ = 1.571 rad, a quarter wave at 632.8 nm.  Moving the plate selects a spot; only one is ever in the beam.</a:t>
-            </a:r>
-          </a:p>
-        </p:txBody>
-      </p:sp>
-      <p:graphicFrame>
-        <p:nvGraphicFramePr>
-          <p:cNvPr id="5" name="Table 4"/>
-          <p:cNvGraphicFramePr>
-            <a:graphicFrameLocks noGrp="1"/>
-          </p:cNvGraphicFramePr>
-          <p:nvPr/>
-        </p:nvGraphicFramePr>
-        <p:xfrm>
-          <a:off x="411480" y="2218182"/>
-          <a:ext cx="11368731" cy="560070"/>
-        </p:xfrm>
-        <a:graphic>
-          <a:graphicData uri="http://schemas.openxmlformats.org/drawingml/2006/table">
-            <a:tbl>
-              <a:tblPr firstRow="1" bandRow="1">
-                <a:tableStyleId>{5C22544A-7EE6-4342-B048-85BDC9FD1C3A}</a:tableStyleId>
-              </a:tblPr>
-              <a:tblGrid>
-                <a:gridCol w="3989029"/>
-                <a:gridCol w="2792320"/>
-                <a:gridCol w="1396160"/>
-                <a:gridCol w="1994514"/>
-                <a:gridCol w="1196708"/>
-              </a:tblGrid>
-              <a:tr h="280035">
-                <a:tc>
-                  <a:txBody>
-                    <a:bodyPr wrap="square"/>
-                    <a:lstStyle/>
-                    <a:p>
-                      <a:r>
-                        <a:rPr sz="1100" b="1">
-                          <a:solidFill>
-                            <a:srgbClr val="FFFFFF"/>
-                          </a:solidFill>
-                          <a:latin typeface="Arial"/>
-                        </a:rPr>
-                        <a:t>spot diameter (λF/D)</a:t>
-                      </a:r>
-                    </a:p>
-                  </a:txBody>
-                  <a:tcPr marL="54864" marR="54864" marT="18288" marB="18288">
-                    <a:solidFill>
-                      <a:srgbClr val="1F4E79"/>
-                    </a:solidFill>
-                  </a:tcPr>
-                </a:tc>
-                <a:tc>
-                  <a:txBody>
-                    <a:bodyPr wrap="square"/>
-                    <a:lstStyle/>
-                    <a:p>
-                      <a:r>
-                        <a:rPr sz="1100" b="1">
-                          <a:solidFill>
-                            <a:srgbClr val="FFFFFF"/>
-                          </a:solidFill>
-                          <a:latin typeface="Arial"/>
-                        </a:rPr>
-                        <a:t>1.06 (default)</a:t>
-                      </a:r>
-                    </a:p>
-                  </a:txBody>
-                  <a:tcPr marL="54864" marR="54864" marT="18288" marB="18288">
-                    <a:solidFill>
-                      <a:srgbClr val="1F4E79"/>
-                    </a:solidFill>
-                  </a:tcPr>
-                </a:tc>
-                <a:tc>
-                  <a:txBody>
-                    <a:bodyPr wrap="square"/>
-                    <a:lstStyle/>
-                    <a:p>
-                      <a:r>
-                        <a:rPr sz="1100" b="1">
-                          <a:solidFill>
-                            <a:srgbClr val="FFFFFF"/>
-                          </a:solidFill>
-                          <a:latin typeface="Arial"/>
-                        </a:rPr>
-                        <a:t>1.22</a:t>
-                      </a:r>
-                    </a:p>
-                  </a:txBody>
-                  <a:tcPr marL="54864" marR="54864" marT="18288" marB="18288">
-                    <a:solidFill>
-                      <a:srgbClr val="1F4E79"/>
-                    </a:solidFill>
-                  </a:tcPr>
-                </a:tc>
-                <a:tc>
-                  <a:txBody>
-                    <a:bodyPr wrap="square"/>
-                    <a:lstStyle/>
-                    <a:p>
-                      <a:r>
-                        <a:rPr sz="1100" b="1">
-                          <a:solidFill>
-                            <a:srgbClr val="FFFFFF"/>
-                          </a:solidFill>
-                          <a:latin typeface="Arial"/>
-                        </a:rPr>
-                        <a:t>2.0 (used)</a:t>
-                      </a:r>
-                    </a:p>
-                  </a:txBody>
-                  <a:tcPr marL="54864" marR="54864" marT="18288" marB="18288">
-                    <a:solidFill>
-                      <a:srgbClr val="1F4E79"/>
-                    </a:solidFill>
-                  </a:tcPr>
-                </a:tc>
-                <a:tc>
-                  <a:txBody>
-                    <a:bodyPr wrap="square"/>
-                    <a:lstStyle/>
-                    <a:p>
-                      <a:r>
-                        <a:rPr sz="1100" b="1">
-                          <a:solidFill>
-                            <a:srgbClr val="FFFFFF"/>
-                          </a:solidFill>
-                          <a:latin typeface="Arial"/>
-                        </a:rPr>
-                        <a:t>3.0</a:t>
-                      </a:r>
-                    </a:p>
-                  </a:txBody>
-                  <a:tcPr marL="54864" marR="54864" marT="18288" marB="18288">
-                    <a:solidFill>
-                      <a:srgbClr val="1F4E79"/>
-                    </a:solidFill>
-                  </a:tcPr>
-                </a:tc>
-              </a:tr>
-              <a:tr h="280035">
-                <a:tc>
-                  <a:txBody>
-                    <a:bodyPr wrap="square"/>
-                    <a:lstStyle/>
-                    <a:p>
-                      <a:r>
-                        <a:rPr sz="1100" b="0">
-                          <a:solidFill>
-                            <a:srgbClr val="282828"/>
-                          </a:solidFill>
-                          <a:latin typeface="Arial"/>
-                        </a:rPr>
-                        <a:t>here, at F/4.2</a:t>
-                      </a:r>
-                    </a:p>
-                  </a:txBody>
-                  <a:tcPr marL="54864" marR="54864" marT="18288" marB="18288">
-                    <a:solidFill>
-                      <a:srgbClr val="FFFFFF"/>
-                    </a:solidFill>
-                  </a:tcPr>
-                </a:tc>
-                <a:tc>
-                  <a:txBody>
-                    <a:bodyPr wrap="square"/>
-                    <a:lstStyle/>
-                    <a:p>
-                      <a:r>
-                        <a:rPr sz="1100" b="0">
-                          <a:solidFill>
-                            <a:srgbClr val="282828"/>
-                          </a:solidFill>
-                          <a:latin typeface="Arial"/>
-                        </a:rPr>
-                        <a:t>2.79 µm</a:t>
-                      </a:r>
-                    </a:p>
-                  </a:txBody>
-                  <a:tcPr marL="54864" marR="54864" marT="18288" marB="18288">
-                    <a:solidFill>
-                      <a:srgbClr val="FFFFFF"/>
-                    </a:solidFill>
-                  </a:tcPr>
-                </a:tc>
-                <a:tc>
-                  <a:txBody>
-                    <a:bodyPr wrap="square"/>
-                    <a:lstStyle/>
-                    <a:p>
-                      <a:r>
-                        <a:rPr sz="1100" b="0">
-                          <a:solidFill>
-                            <a:srgbClr val="282828"/>
-                          </a:solidFill>
-                          <a:latin typeface="Arial"/>
-                        </a:rPr>
-                        <a:t>3.22 µm</a:t>
-                      </a:r>
-                    </a:p>
-                  </a:txBody>
-                  <a:tcPr marL="54864" marR="54864" marT="18288" marB="18288">
-                    <a:solidFill>
-                      <a:srgbClr val="FFFFFF"/>
-                    </a:solidFill>
-                  </a:tcPr>
-                </a:tc>
-                <a:tc>
-                  <a:txBody>
-                    <a:bodyPr wrap="square"/>
-                    <a:lstStyle/>
-                    <a:p>
-                      <a:r>
-                        <a:rPr sz="1100" b="0">
-                          <a:solidFill>
-                            <a:srgbClr val="282828"/>
-                          </a:solidFill>
-                          <a:latin typeface="Arial"/>
-                        </a:rPr>
-                        <a:t>5.3 µm</a:t>
-                      </a:r>
-                    </a:p>
-                  </a:txBody>
-                  <a:tcPr marL="54864" marR="54864" marT="18288" marB="18288">
-                    <a:solidFill>
-                      <a:srgbClr val="FFFFFF"/>
-                    </a:solidFill>
-                  </a:tcPr>
-                </a:tc>
-                <a:tc>
-                  <a:txBody>
-                    <a:bodyPr wrap="square"/>
-                    <a:lstStyle/>
-                    <a:p>
-                      <a:r>
-                        <a:rPr sz="1100" b="0">
-                          <a:solidFill>
-                            <a:srgbClr val="282828"/>
-                          </a:solidFill>
-                          <a:latin typeface="Arial"/>
-                        </a:rPr>
-                        <a:t>7.9 µm</a:t>
-                      </a:r>
-                    </a:p>
-                  </a:txBody>
-                  <a:tcPr marL="54864" marR="54864" marT="18288" marB="18288">
-                    <a:solidFill>
-                      <a:srgbClr val="FFFFFF"/>
-                    </a:solidFill>
-                  </a:tcPr>
-                </a:tc>
-              </a:tr>
-            </a:tbl>
-          </a:graphicData>
-        </a:graphic>
-      </p:graphicFrame>
-      <p:sp>
-        <p:nvSpPr>
-          <p:cNvPr id="6" name="TextBox 5"/>
+              <a:t>•  The test: put the DM in some shape (the working surface), measure it; change a known set of actuators by a known amount (10 nm unless stated); measure again; subtract; fit the actuator pattern to the difference.  The score is how well the actuator changes come back.</a:t>
+            </a:r>
+          </a:p>
+          <a:p>
+            <a:pPr>
+              <a:spcAft>
+                <a:spcPts val="600"/>
+              </a:spcAft>
+            </a:pPr>
+            <a:r>
+              <a:rPr sz="1500" b="0">
+                <a:solidFill>
+                  <a:srgbClr val="282828"/>
+                </a:solidFill>
+                <a:latin typeface="Arial"/>
+              </a:rPr>
+              <a:t>•  Gain: recovered change divided by the true change.  1.0 is perfect.  Gain is quoted after calibration: the sensor's response to one actuator and to patterns of each spatial frequency is measured on the flat DM and divided out.  A gain below 1 on a working surface is therefore an error the flat-DM calibration did not remove.</a:t>
+            </a:r>
+          </a:p>
+          <a:p>
+            <a:pPr>
+              <a:spcAft>
+                <a:spcPts val="600"/>
+              </a:spcAft>
+            </a:pPr>
+            <a:r>
+              <a:rPr sz="1500" b="0">
+                <a:solidFill>
+                  <a:srgbClr val="282828"/>
+                </a:solidFill>
+                <a:latin typeface="Arial"/>
+              </a:rPr>
+              <a:t>•  Floor: the spread (rms) of the actuators that were not changed, in picometres.  It is what the measurement puts on actuators that should read zero.</a:t>
+            </a:r>
+          </a:p>
+          <a:p>
+            <a:pPr>
+              <a:spcAft>
+                <a:spcPts val="600"/>
+              </a:spcAft>
+            </a:pPr>
+            <a:r>
+              <a:rPr sz="1500" b="0">
+                <a:solidFill>
+                  <a:srgbClr val="282828"/>
+                </a:solidFill>
+                <a:latin typeface="Arial"/>
+              </a:rPr>
+              <a:t>•  SNR: recovered change divided by the floor.  Above 5 counts as detected.</a:t>
+            </a:r>
+          </a:p>
+          <a:p>
+            <a:pPr>
+              <a:spcAft>
+                <a:spcPts val="600"/>
+              </a:spcAft>
+            </a:pPr>
+            <a:r>
+              <a:rPr sz="1500" b="0">
+                <a:solidFill>
+                  <a:srgbClr val="282828"/>
+                </a:solidFill>
+                <a:latin typeface="Arial"/>
+              </a:rPr>
+              <a:t>•  Working surface: a random DM shape, 30 nm rms unless stated, present during the test.  It is the same random pattern every time, scaled.</a:t>
+            </a:r>
+          </a:p>
+          <a:p>
+            <a:pPr>
+              <a:spcAft>
+                <a:spcPts val="600"/>
+              </a:spcAft>
+            </a:pPr>
+            <a:r>
+              <a:rPr sz="1500" b="0">
+                <a:solidFill>
+                  <a:srgbClr val="282828"/>
+                </a:solidFill>
+                <a:latin typeface="Arial"/>
+              </a:rPr>
+              <a:t>•  State and frame: a state is one DM shape measured once.  A measurement of a change costs two states.  A state costs one camera frame for the one-frame readings and four frames for the stepped reading; photon budgets are quoted per state.</a:t>
+            </a:r>
+          </a:p>
+        </p:txBody>
+      </p:sp>
+      <p:sp>
+        <p:nvSpPr>
+          <p:cNvPr id="5" name="TextBox 4"/>
           <p:cNvSpPr txBox="1"/>
           <p:nvPr/>
         </p:nvSpPr>
         <p:spPr>
           <a:xfrm>
-            <a:off x="411480" y="2924556"/>
+            <a:off x="411480" y="5643372"/>
             <a:ext cx="11368735" cy="274320"/>
           </a:xfrm>
           <a:prstGeom prst="rect">
@@ -10165,68 +10484,13 @@
               </a:spcAft>
             </a:pPr>
             <a:r>
-              <a:rPr sz="1500" b="0">
-                <a:solidFill>
-                  <a:srgbClr val="282828"/>
+              <a:rPr sz="1050" b="0">
+                <a:solidFill>
+                  <a:srgbClr val="6E6E6E"/>
                 </a:solidFill>
                 <a:latin typeface="Arial"/>
               </a:rPr>
-              <a:t>•  In the model: the etched disk is a complex mask multiplied into the calculated field at the focus — edges area-weighted at 8× supersampling, the disk centred on the measured spot (the same alignment the real plate gets by moving it).  An exact identity checks it: the masked field equals the direct part plus the dimple's part to 15 digits, so the mask provably acts on the light.</a:t>
-            </a:r>
-          </a:p>
-          <a:p>
-            <a:pPr>
-              <a:spcAft>
-                <a:spcPts val="600"/>
-              </a:spcAft>
-            </a:pPr>
-            <a:r>
-              <a:rPr sz="1500" b="0">
-                <a:solidFill>
-                  <a:srgbClr val="282828"/>
-                </a:solidFill>
-                <a:latin typeface="Arial"/>
-              </a:rPr>
-              <a:t>•  Spot size sets the weak band: on the corrected model, the 3.0 λF/D spot deepens the sensor's own dip below 2 cycles across the pupil (response 0.22 against 0.50 at 2.0 λF/D) and changes nothing above it.  2.0 λF/D is the spot used throughout.</a:t>
-            </a:r>
-          </a:p>
-        </p:txBody>
-      </p:sp>
-      <p:sp>
-        <p:nvSpPr>
-          <p:cNvPr id="7" name="TextBox 6"/>
-          <p:cNvSpPr txBox="1"/>
-          <p:nvPr/>
-        </p:nvSpPr>
-        <p:spPr>
-          <a:xfrm>
-            <a:off x="411480" y="4975098"/>
-            <a:ext cx="11368735" cy="274320"/>
-          </a:xfrm>
-          <a:prstGeom prst="rect">
-            <a:avLst/>
-          </a:prstGeom>
-          <a:noFill/>
-        </p:spPr>
-        <p:txBody>
-          <a:bodyPr wrap="square">
-            <a:spAutoFit/>
-          </a:bodyPr>
-          <a:lstStyle/>
-          <a:p>
-            <a:pPr>
-              <a:spcAft>
-                <a:spcPts val="600"/>
-              </a:spcAft>
-            </a:pPr>
-            <a:r>
-              <a:rPr sz="1050" b="0">
-                <a:solidFill>
-                  <a:srgbClr val="6E6E6E"/>
-                </a:solidFill>
-                <a:latin typeface="Arial"/>
-              </a:rPr>
-              <a:t>Hardware numbers from the VSG2 ZWFS upgrade deck, carried in vsg2_params.m; substrate class Thorlabs W4101FT1.</a:t>
+              <a:t>96×96 DM at 1 mm pitch unless stated (48×48 at 2 mm alongside).  The interferometer is scored the same way with the same code (dm_gauge_lib).  Target: 1 pm.</a:t>
             </a:r>
           </a:p>
         </p:txBody>
@@ -10239,7 +10503,7 @@
 </p:sld>
 </file>
 
-<file path=ppt/slides/slide6.xml><?xml version="1.0" encoding="utf-8"?>
+<file path=ppt/slides/slide5.xml><?xml version="1.0" encoding="utf-8"?>
 <p:sld xmlns:a="http://schemas.openxmlformats.org/drawingml/2006/main" xmlns:p="http://schemas.openxmlformats.org/presentationml/2006/main" xmlns:r="http://schemas.openxmlformats.org/officeDocument/2006/relationships">
   <p:cSld>
     <p:spTree>
@@ -10283,7 +10547,7 @@
                 </a:solidFill>
                 <a:latin typeface="Arial"/>
               </a:rPr>
-              <a:t>First light in the model</a:t>
+              <a:t>The mask is real hardware, modelled with its own numbers</a:t>
             </a:r>
           </a:p>
           <a:p>
@@ -10299,7 +10563,7 @@
                 </a:solidFill>
                 <a:latin typeface="Arial"/>
               </a:rPr>
-              <a:t>A known 8 nm ripple put on the DM comes back from one camera frame at gain 0.93, and reads as nothing when the dimple is removed</a:t>
+              <a:t>346.2 nm of etch in fused silica = 1.571 rad at 632.8 nm; a substrate with nine spots, one in the beam at a time</a:t>
             </a:r>
           </a:p>
         </p:txBody>
@@ -10357,7 +10621,7 @@
         <p:spPr>
           <a:xfrm>
             <a:off x="411480" y="1298448"/>
-            <a:ext cx="5806440" cy="274320"/>
+            <a:ext cx="11368735" cy="274320"/>
           </a:xfrm>
           <a:prstGeom prst="rect">
             <a:avLst/>
@@ -10376,89 +10640,270 @@
               </a:spcAft>
             </a:pPr>
             <a:r>
-              <a:rPr sz="1200" b="0">
+              <a:rPr sz="1500" b="0">
                 <a:solidFill>
                   <a:srgbClr val="282828"/>
                 </a:solidFill>
                 <a:latin typeface="Arial"/>
               </a:rPr>
-              <a:t>•  The chain, checked: dimple 6.3 pixels across on the focal grid; masked frame = direct part + dimple part to 3×10⁻¹⁶; 0.280 of the light in the core.</a:t>
-            </a:r>
-          </a:p>
-          <a:p>
-            <a:pPr>
-              <a:spcAft>
-                <a:spcPts val="600"/>
-              </a:spcAft>
-            </a:pPr>
-            <a:r>
-              <a:rPr sz="1200" b="0">
-                <a:solidFill>
-                  <a:srgbClr val="282828"/>
-                </a:solidFill>
-                <a:latin typeface="Arial"/>
-              </a:rPr>
-              <a:t>•  The measurement: an 8 nm ring pattern on the DM, rebuilt from a single frame against the flat-DM reference maps — gain 0.932, residual 0.45 nm; the camera-to-DM mapping comes from traced rays (magnification 10.16, no anamorphism).</a:t>
-            </a:r>
-          </a:p>
-          <a:p>
-            <a:pPr>
-              <a:spcAft>
-                <a:spcPts val="600"/>
-              </a:spcAft>
-            </a:pPr>
-            <a:r>
-              <a:rPr sz="1200" b="0">
-                <a:solidFill>
-                  <a:srgbClr val="282828"/>
-                </a:solidFill>
-                <a:latin typeface="Arial"/>
-              </a:rPr>
-              <a:t>•  The control: the same DM shape read without the dimple gives gain −0.07.  Plain pupil imaging is blind to phase; the signal is the dimple's.</a:t>
-            </a:r>
-          </a:p>
-          <a:p>
-            <a:pPr>
-              <a:spcAft>
-                <a:spcPts val="600"/>
-              </a:spcAft>
-            </a:pPr>
-            <a:r>
-              <a:rPr sz="1200" b="0">
-                <a:solidFill>
-                  <a:srgbClr val="282828"/>
-                </a:solidFill>
-                <a:latin typeface="Arial"/>
-              </a:rPr>
-              <a:t>•  Low orders are less trouble than expected: defocus reads at 0.986.  The blind spot is piston and tilt only.</a:t>
-            </a:r>
-          </a:p>
-        </p:txBody>
-      </p:sp>
-      <p:pic>
-        <p:nvPicPr>
-          <p:cNvPr id="5" name="Picture 4" descr="zwfs_response.png"/>
-          <p:cNvPicPr>
-            <a:picLocks noChangeAspect="1"/>
-          </p:cNvPicPr>
+              <a:t>•  The part: a fused-silica plate with a 3×3 array of etched dimples of different diameters — the VSG2 wavefront-sensor mask.  Etch depth 346.2 nm gives a phase delay 2π(n−1)d/λ = 1.571 rad, a quarter wave at 632.8 nm.  Moving the plate selects a spot; only one is ever in the beam.</a:t>
+            </a:r>
+          </a:p>
+        </p:txBody>
+      </p:sp>
+      <p:graphicFrame>
+        <p:nvGraphicFramePr>
+          <p:cNvPr id="5" name="Table 4"/>
+          <p:cNvGraphicFramePr>
+            <a:graphicFrameLocks noGrp="1"/>
+          </p:cNvGraphicFramePr>
           <p:nvPr/>
-        </p:nvPicPr>
-        <p:blipFill>
-          <a:blip r:embed="rId2"/>
-          <a:stretch>
-            <a:fillRect/>
-          </a:stretch>
-        </p:blipFill>
-        <p:spPr>
-          <a:xfrm>
-            <a:off x="6729237" y="1298448"/>
-            <a:ext cx="4738085" cy="1983232"/>
-          </a:xfrm>
-          <a:prstGeom prst="rect">
-            <a:avLst/>
-          </a:prstGeom>
-        </p:spPr>
-      </p:pic>
+        </p:nvGraphicFramePr>
+        <p:xfrm>
+          <a:off x="411480" y="2218182"/>
+          <a:ext cx="11368731" cy="560070"/>
+        </p:xfrm>
+        <a:graphic>
+          <a:graphicData uri="http://schemas.openxmlformats.org/drawingml/2006/table">
+            <a:tbl>
+              <a:tblPr firstRow="1" bandRow="1">
+                <a:tableStyleId>{5C22544A-7EE6-4342-B048-85BDC9FD1C3A}</a:tableStyleId>
+              </a:tblPr>
+              <a:tblGrid>
+                <a:gridCol w="3989029"/>
+                <a:gridCol w="2792320"/>
+                <a:gridCol w="1396160"/>
+                <a:gridCol w="1994514"/>
+                <a:gridCol w="1196708"/>
+              </a:tblGrid>
+              <a:tr h="280035">
+                <a:tc>
+                  <a:txBody>
+                    <a:bodyPr wrap="square"/>
+                    <a:lstStyle/>
+                    <a:p>
+                      <a:r>
+                        <a:rPr sz="1100" b="1">
+                          <a:solidFill>
+                            <a:srgbClr val="FFFFFF"/>
+                          </a:solidFill>
+                          <a:latin typeface="Arial"/>
+                        </a:rPr>
+                        <a:t>spot diameter (λF/D)</a:t>
+                      </a:r>
+                    </a:p>
+                  </a:txBody>
+                  <a:tcPr marL="54864" marR="54864" marT="18288" marB="18288">
+                    <a:solidFill>
+                      <a:srgbClr val="1F4E79"/>
+                    </a:solidFill>
+                  </a:tcPr>
+                </a:tc>
+                <a:tc>
+                  <a:txBody>
+                    <a:bodyPr wrap="square"/>
+                    <a:lstStyle/>
+                    <a:p>
+                      <a:r>
+                        <a:rPr sz="1100" b="1">
+                          <a:solidFill>
+                            <a:srgbClr val="FFFFFF"/>
+                          </a:solidFill>
+                          <a:latin typeface="Arial"/>
+                        </a:rPr>
+                        <a:t>1.06 (default)</a:t>
+                      </a:r>
+                    </a:p>
+                  </a:txBody>
+                  <a:tcPr marL="54864" marR="54864" marT="18288" marB="18288">
+                    <a:solidFill>
+                      <a:srgbClr val="1F4E79"/>
+                    </a:solidFill>
+                  </a:tcPr>
+                </a:tc>
+                <a:tc>
+                  <a:txBody>
+                    <a:bodyPr wrap="square"/>
+                    <a:lstStyle/>
+                    <a:p>
+                      <a:r>
+                        <a:rPr sz="1100" b="1">
+                          <a:solidFill>
+                            <a:srgbClr val="FFFFFF"/>
+                          </a:solidFill>
+                          <a:latin typeface="Arial"/>
+                        </a:rPr>
+                        <a:t>1.22</a:t>
+                      </a:r>
+                    </a:p>
+                  </a:txBody>
+                  <a:tcPr marL="54864" marR="54864" marT="18288" marB="18288">
+                    <a:solidFill>
+                      <a:srgbClr val="1F4E79"/>
+                    </a:solidFill>
+                  </a:tcPr>
+                </a:tc>
+                <a:tc>
+                  <a:txBody>
+                    <a:bodyPr wrap="square"/>
+                    <a:lstStyle/>
+                    <a:p>
+                      <a:r>
+                        <a:rPr sz="1100" b="1">
+                          <a:solidFill>
+                            <a:srgbClr val="FFFFFF"/>
+                          </a:solidFill>
+                          <a:latin typeface="Arial"/>
+                        </a:rPr>
+                        <a:t>2.0 (used)</a:t>
+                      </a:r>
+                    </a:p>
+                  </a:txBody>
+                  <a:tcPr marL="54864" marR="54864" marT="18288" marB="18288">
+                    <a:solidFill>
+                      <a:srgbClr val="1F4E79"/>
+                    </a:solidFill>
+                  </a:tcPr>
+                </a:tc>
+                <a:tc>
+                  <a:txBody>
+                    <a:bodyPr wrap="square"/>
+                    <a:lstStyle/>
+                    <a:p>
+                      <a:r>
+                        <a:rPr sz="1100" b="1">
+                          <a:solidFill>
+                            <a:srgbClr val="FFFFFF"/>
+                          </a:solidFill>
+                          <a:latin typeface="Arial"/>
+                        </a:rPr>
+                        <a:t>3.0</a:t>
+                      </a:r>
+                    </a:p>
+                  </a:txBody>
+                  <a:tcPr marL="54864" marR="54864" marT="18288" marB="18288">
+                    <a:solidFill>
+                      <a:srgbClr val="1F4E79"/>
+                    </a:solidFill>
+                  </a:tcPr>
+                </a:tc>
+              </a:tr>
+              <a:tr h="280035">
+                <a:tc>
+                  <a:txBody>
+                    <a:bodyPr wrap="square"/>
+                    <a:lstStyle/>
+                    <a:p>
+                      <a:r>
+                        <a:rPr sz="1100" b="0">
+                          <a:solidFill>
+                            <a:srgbClr val="282828"/>
+                          </a:solidFill>
+                          <a:latin typeface="Arial"/>
+                        </a:rPr>
+                        <a:t>here, at F/4.2</a:t>
+                      </a:r>
+                    </a:p>
+                  </a:txBody>
+                  <a:tcPr marL="54864" marR="54864" marT="18288" marB="18288">
+                    <a:solidFill>
+                      <a:srgbClr val="FFFFFF"/>
+                    </a:solidFill>
+                  </a:tcPr>
+                </a:tc>
+                <a:tc>
+                  <a:txBody>
+                    <a:bodyPr wrap="square"/>
+                    <a:lstStyle/>
+                    <a:p>
+                      <a:r>
+                        <a:rPr sz="1100" b="0">
+                          <a:solidFill>
+                            <a:srgbClr val="282828"/>
+                          </a:solidFill>
+                          <a:latin typeface="Arial"/>
+                        </a:rPr>
+                        <a:t>2.79 µm</a:t>
+                      </a:r>
+                    </a:p>
+                  </a:txBody>
+                  <a:tcPr marL="54864" marR="54864" marT="18288" marB="18288">
+                    <a:solidFill>
+                      <a:srgbClr val="FFFFFF"/>
+                    </a:solidFill>
+                  </a:tcPr>
+                </a:tc>
+                <a:tc>
+                  <a:txBody>
+                    <a:bodyPr wrap="square"/>
+                    <a:lstStyle/>
+                    <a:p>
+                      <a:r>
+                        <a:rPr sz="1100" b="0">
+                          <a:solidFill>
+                            <a:srgbClr val="282828"/>
+                          </a:solidFill>
+                          <a:latin typeface="Arial"/>
+                        </a:rPr>
+                        <a:t>3.22 µm</a:t>
+                      </a:r>
+                    </a:p>
+                  </a:txBody>
+                  <a:tcPr marL="54864" marR="54864" marT="18288" marB="18288">
+                    <a:solidFill>
+                      <a:srgbClr val="FFFFFF"/>
+                    </a:solidFill>
+                  </a:tcPr>
+                </a:tc>
+                <a:tc>
+                  <a:txBody>
+                    <a:bodyPr wrap="square"/>
+                    <a:lstStyle/>
+                    <a:p>
+                      <a:r>
+                        <a:rPr sz="1100" b="0">
+                          <a:solidFill>
+                            <a:srgbClr val="282828"/>
+                          </a:solidFill>
+                          <a:latin typeface="Arial"/>
+                        </a:rPr>
+                        <a:t>5.3 µm</a:t>
+                      </a:r>
+                    </a:p>
+                  </a:txBody>
+                  <a:tcPr marL="54864" marR="54864" marT="18288" marB="18288">
+                    <a:solidFill>
+                      <a:srgbClr val="FFFFFF"/>
+                    </a:solidFill>
+                  </a:tcPr>
+                </a:tc>
+                <a:tc>
+                  <a:txBody>
+                    <a:bodyPr wrap="square"/>
+                    <a:lstStyle/>
+                    <a:p>
+                      <a:r>
+                        <a:rPr sz="1100" b="0">
+                          <a:solidFill>
+                            <a:srgbClr val="282828"/>
+                          </a:solidFill>
+                          <a:latin typeface="Arial"/>
+                        </a:rPr>
+                        <a:t>7.9 µm</a:t>
+                      </a:r>
+                    </a:p>
+                  </a:txBody>
+                  <a:tcPr marL="54864" marR="54864" marT="18288" marB="18288">
+                    <a:solidFill>
+                      <a:srgbClr val="FFFFFF"/>
+                    </a:solidFill>
+                  </a:tcPr>
+                </a:tc>
+              </a:tr>
+            </a:tbl>
+          </a:graphicData>
+        </a:graphic>
+      </p:graphicFrame>
       <p:sp>
         <p:nvSpPr>
           <p:cNvPr id="6" name="TextBox 5"/>
@@ -10467,8 +10912,8 @@
         </p:nvSpPr>
         <p:spPr>
           <a:xfrm>
-            <a:off x="6400800" y="3299968"/>
-            <a:ext cx="5394960" cy="394208"/>
+            <a:off x="411480" y="2924556"/>
+            <a:ext cx="11368735" cy="274320"/>
           </a:xfrm>
           <a:prstGeom prst="rect">
             <a:avLst/>
@@ -10481,19 +10926,35 @@
           </a:bodyPr>
           <a:lstStyle/>
           <a:p>
-            <a:pPr algn="ctr">
+            <a:pPr>
               <a:spcAft>
-                <a:spcPts val="0"/>
+                <a:spcPts val="600"/>
               </a:spcAft>
             </a:pPr>
             <a:r>
-              <a:rPr sz="1000" b="0">
-                <a:solidFill>
-                  <a:srgbClr val="6E6E6E"/>
+              <a:rPr sz="1500" b="0">
+                <a:solidFill>
+                  <a:srgbClr val="282828"/>
                 </a:solidFill>
                 <a:latin typeface="Arial"/>
               </a:rPr>
-              <a:t>Commanded shape (left) against the single-frame recovery (right): same rings, same scale.</a:t>
+              <a:t>•  In the model: the etched disk is a complex mask multiplied into the calculated field at the focus — edges area-weighted at 8× supersampling, the disk centred on the measured spot (the same alignment the real plate gets by moving it).  An exact identity checks it: the masked field equals the direct part plus the dimple's part to 15 digits, so the mask provably acts on the light.</a:t>
+            </a:r>
+          </a:p>
+          <a:p>
+            <a:pPr>
+              <a:spcAft>
+                <a:spcPts val="600"/>
+              </a:spcAft>
+            </a:pPr>
+            <a:r>
+              <a:rPr sz="1500" b="0">
+                <a:solidFill>
+                  <a:srgbClr val="282828"/>
+                </a:solidFill>
+                <a:latin typeface="Arial"/>
+              </a:rPr>
+              <a:t>•  Spot size sets the weak band: on the corrected model, the 3.0 λF/D spot deepens the sensor's own dip below 2 cycles across the pupil (response 0.22 against 0.50 at 2.0 λF/D) and changes nothing above it.  2.0 λF/D is the spot used throughout.</a:t>
             </a:r>
           </a:p>
         </p:txBody>
@@ -10506,8 +10967,8 @@
         </p:nvSpPr>
         <p:spPr>
           <a:xfrm>
-            <a:off x="6400800" y="3730752"/>
-            <a:ext cx="5394960" cy="274320"/>
+            <a:off x="411480" y="4975098"/>
+            <a:ext cx="11368735" cy="274320"/>
           </a:xfrm>
           <a:prstGeom prst="rect">
             <a:avLst/>
@@ -10532,7 +10993,7 @@
                 </a:solidFill>
                 <a:latin typeface="Arial"/>
               </a:rPr>
-              <a:t>Numbers from zwfs_s1_report.txt (five checks, 20 s a run, development resolution), taken on the model later found out of focus (next slide).  The five checks test structure, not accuracy, and still stand.</a:t>
+              <a:t>Hardware numbers from the VSG2 ZWFS upgrade deck, carried in vsg2_params.m; substrate class Thorlabs W4101FT1.</a:t>
             </a:r>
           </a:p>
         </p:txBody>
@@ -10545,7 +11006,7 @@
 </p:sld>
 </file>
 
-<file path=ppt/slides/slide7.xml><?xml version="1.0" encoding="utf-8"?>
+<file path=ppt/slides/slide6.xml><?xml version="1.0" encoding="utf-8"?>
 <p:sld xmlns:a="http://schemas.openxmlformats.org/drawingml/2006/main" xmlns:p="http://schemas.openxmlformats.org/presentationml/2006/main" xmlns:r="http://schemas.openxmlformats.org/officeDocument/2006/relationships">
   <p:cSld>
     <p:spTree>
@@ -10589,7 +11050,7 @@
                 </a:solidFill>
                 <a:latin typeface="Arial"/>
               </a:rPr>
-              <a:t>The sensor model was out of focus; corrected, the ringing goes away</a:t>
+              <a:t>First light in the model</a:t>
             </a:r>
           </a:p>
           <a:p>
@@ -10605,7 +11066,7 @@
                 </a:solidFill>
                 <a:latin typeface="Arial"/>
               </a:rPr>
-              <a:t>The exit sphere of the mask bracket had the wrong radius — a 4.9 m defocus of the pupil image, under every result of the first six stages</a:t>
+              <a:t>A known 8 nm ripple put on the DM comes back from one camera frame at gain 0.93, and reads as nothing when the dimple is removed</a:t>
             </a:r>
           </a:p>
         </p:txBody>
@@ -10688,7 +11149,7 @@
                 </a:solidFill>
                 <a:latin typeface="Arial"/>
               </a:rPr>
-              <a:t>•  The defect: the two reference spheres around the mask must share one radius so that, with no mask, the field comes back unchanged.  The exit sphere was written with a 23.9 mm radius against the entrance sphere's 352.7 mm; the engine then applied a quadratic phase at the focus, which is a defocus of the pupil image by 4.86 m.  Found while building the exact inversion, which needs the pupil brightness to be the same for every DM shape.</a:t>
+              <a:t>•  The chain, checked: dimple 6.3 pixels across on the focal grid; masked frame = direct part + dimple part to 3×10⁻¹⁶; 0.280 of the light in the core.</a:t>
             </a:r>
           </a:p>
           <a:p>
@@ -10704,7 +11165,7 @@
                 </a:solidFill>
                 <a:latin typeface="Arial"/>
               </a:rPr>
-              <a:t>•  What it explained: with no mask the field came back changed by 0.159 on a flat DM (now 1.8×10⁻¹⁵); a 30 nm DM shape changed the pupil brightness by 29% rms (now 4×10⁻¹⁶); the response to one actuator rang (peak 0.27, ring −0.16; now 0.75, no ring); the response had a null near 30 cycles across the pupil — a Talbot effect of the defocus, predicted at 34.</a:t>
+              <a:t>•  The measurement: an 8 nm ring pattern on the DM, rebuilt from a single frame against the flat-DM reference maps — gain 0.932, residual 0.45 nm; the camera-to-DM mapping comes from traced rays (magnification 10.16, no anamorphism).</a:t>
             </a:r>
           </a:p>
           <a:p>
@@ -10720,14 +11181,30 @@
                 </a:solidFill>
                 <a:latin typeface="Arial"/>
               </a:rPr>
-              <a:t>•  What the correction alone buys (one-frame linear reading, 96×96, same frames): floor under a single-actuator change on the 30 nm surface 744 → 67 pm (SNR 9 → 80); the grid case the sensor could not detect goes from SNR 1.5 to 14; a dense random change 42 → 9.6 nm error.</a:t>
+              <a:t>•  The control: the same DM shape read without the dimple gives gain −0.07.  Plain pupil imaging is blind to phase; the signal is the dimple's.</a:t>
+            </a:r>
+          </a:p>
+          <a:p>
+            <a:pPr>
+              <a:spcAft>
+                <a:spcPts val="600"/>
+              </a:spcAft>
+            </a:pPr>
+            <a:r>
+              <a:rPr sz="1200" b="0">
+                <a:solidFill>
+                  <a:srgbClr val="282828"/>
+                </a:solidFill>
+                <a:latin typeface="Arial"/>
+              </a:rPr>
+              <a:t>•  Low orders are less trouble than expected: defocus reads at 0.986.  The blind spot is piston and tilt only.</a:t>
             </a:r>
           </a:p>
         </p:txBody>
       </p:sp>
       <p:pic>
         <p:nvPicPr>
-          <p:cNvPr id="5" name="Picture 4" descr="zwfs_s7iter.png"/>
+          <p:cNvPr id="5" name="Picture 4" descr="zwfs_response.png"/>
           <p:cNvPicPr>
             <a:picLocks noChangeAspect="1"/>
           </p:cNvPicPr>
@@ -10741,8 +11218,8 @@
         </p:blipFill>
         <p:spPr>
           <a:xfrm>
-            <a:off x="6609767" y="1298448"/>
-            <a:ext cx="4977024" cy="2183892"/>
+            <a:off x="6729237" y="1298448"/>
+            <a:ext cx="4738085" cy="1983232"/>
           </a:xfrm>
           <a:prstGeom prst="rect">
             <a:avLst/>
@@ -10757,8 +11234,8 @@
         </p:nvSpPr>
         <p:spPr>
           <a:xfrm>
-            <a:off x="6400800" y="3500628"/>
-            <a:ext cx="5394960" cy="559307"/>
+            <a:off x="6400800" y="3299968"/>
+            <a:ext cx="5394960" cy="394208"/>
           </a:xfrm>
           <a:prstGeom prst="rect">
             <a:avLst/>
@@ -10783,7 +11260,7 @@
                 </a:solidFill>
                 <a:latin typeface="Arial"/>
               </a:rPr>
-              <a:t>Left: the corrected model's response by spatial frequency for the three kinds of reading, against the old model's linear response (dashed) with its null.  Right: gain on one actuator as the working surface grows.</a:t>
+              <a:t>Commanded shape (left) against the single-frame recovery (right): same rings, same scale.</a:t>
             </a:r>
           </a:p>
         </p:txBody>
@@ -10796,7 +11273,7 @@
         </p:nvSpPr>
         <p:spPr>
           <a:xfrm>
-            <a:off x="6400800" y="4096512"/>
+            <a:off x="6400800" y="3730752"/>
             <a:ext cx="5394960" cy="274320"/>
           </a:xfrm>
           <a:prstGeom prst="rect">
@@ -10822,7 +11299,7 @@
                 </a:solidFill>
                 <a:latin typeface="Arial"/>
               </a:rPr>
-              <a:t>The old emission is kept as a builder option so the first six stages reproduce byte for byte.  The interferometer traces the same tail by rays and was never affected.  Records: zwfs_s7iter_report.txt, README S7.</a:t>
+              <a:t>Numbers from zwfs_s1_report.txt (five checks, 20 s a run, development resolution), taken on the model later found out of focus (next slide).  The five checks test structure, not accuracy, and still stand.</a:t>
             </a:r>
           </a:p>
         </p:txBody>
@@ -10835,7 +11312,7 @@
 </p:sld>
 </file>
 
-<file path=ppt/slides/slide8.xml><?xml version="1.0" encoding="utf-8"?>
+<file path=ppt/slides/slide7.xml><?xml version="1.0" encoding="utf-8"?>
 <p:sld xmlns:a="http://schemas.openxmlformats.org/drawingml/2006/main" xmlns:p="http://schemas.openxmlformats.org/presentationml/2006/main" xmlns:r="http://schemas.openxmlformats.org/officeDocument/2006/relationships">
   <p:cSld>
     <p:spTree>
@@ -10879,7 +11356,7 @@
                 </a:solidFill>
                 <a:latin typeface="Arial"/>
               </a:rPr>
-              <a:t>Five ways to read the same camera frames</a:t>
+              <a:t>The sensor model was out of focus; corrected, the ringing goes away</a:t>
             </a:r>
           </a:p>
           <a:p>
@@ -10895,7 +11372,7 @@
                 </a:solidFill>
                 <a:latin typeface="Arial"/>
               </a:rPr>
-              <a:t>The exact inversion, with its reference re-computed and the sign choice settled once, reads a 10 nm change to 19 pm from one frame</a:t>
+              <a:t>The exit sphere of the mask bracket had the wrong radius — a 4.9 m defocus of the pupil image, under every result of the first six stages</a:t>
             </a:r>
           </a:p>
         </p:txBody>
@@ -10953,6 +11430,296 @@
         <p:spPr>
           <a:xfrm>
             <a:off x="411480" y="1298448"/>
+            <a:ext cx="5806440" cy="274320"/>
+          </a:xfrm>
+          <a:prstGeom prst="rect">
+            <a:avLst/>
+          </a:prstGeom>
+          <a:noFill/>
+        </p:spPr>
+        <p:txBody>
+          <a:bodyPr wrap="square">
+            <a:spAutoFit/>
+          </a:bodyPr>
+          <a:lstStyle/>
+          <a:p>
+            <a:pPr>
+              <a:spcAft>
+                <a:spcPts val="600"/>
+              </a:spcAft>
+            </a:pPr>
+            <a:r>
+              <a:rPr sz="1200" b="0">
+                <a:solidFill>
+                  <a:srgbClr val="282828"/>
+                </a:solidFill>
+                <a:latin typeface="Arial"/>
+              </a:rPr>
+              <a:t>•  The defect: the two reference spheres around the mask must share one radius so that, with no mask, the field comes back unchanged.  The exit sphere was written with a 23.9 mm radius against the entrance sphere's 352.7 mm; the engine then applied a quadratic phase at the focus, which is a defocus of the pupil image by 4.86 m.  Found while building the exact inversion, which needs the pupil brightness to be the same for every DM shape.</a:t>
+            </a:r>
+          </a:p>
+          <a:p>
+            <a:pPr>
+              <a:spcAft>
+                <a:spcPts val="600"/>
+              </a:spcAft>
+            </a:pPr>
+            <a:r>
+              <a:rPr sz="1200" b="0">
+                <a:solidFill>
+                  <a:srgbClr val="282828"/>
+                </a:solidFill>
+                <a:latin typeface="Arial"/>
+              </a:rPr>
+              <a:t>•  What it explained: with no mask the field came back changed by 0.159 on a flat DM (now 1.8×10⁻¹⁵); a 30 nm DM shape changed the pupil brightness by 29% rms (now 4×10⁻¹⁶); the response to one actuator rang (peak 0.27, ring −0.16; now 0.75, no ring); the response had a null near 30 cycles across the pupil — a Talbot effect of the defocus, predicted at 34.</a:t>
+            </a:r>
+          </a:p>
+          <a:p>
+            <a:pPr>
+              <a:spcAft>
+                <a:spcPts val="600"/>
+              </a:spcAft>
+            </a:pPr>
+            <a:r>
+              <a:rPr sz="1200" b="0">
+                <a:solidFill>
+                  <a:srgbClr val="282828"/>
+                </a:solidFill>
+                <a:latin typeface="Arial"/>
+              </a:rPr>
+              <a:t>•  What the correction alone buys (one-frame linear reading, 96×96, same frames): floor under a single-actuator change on the 30 nm surface 744 → 67 pm (SNR 9 → 80); the grid case the sensor could not detect goes from SNR 1.5 to 14; a dense random change 42 → 9.6 nm error.</a:t>
+            </a:r>
+          </a:p>
+        </p:txBody>
+      </p:sp>
+      <p:pic>
+        <p:nvPicPr>
+          <p:cNvPr id="5" name="Picture 4" descr="zwfs_s7iter.png"/>
+          <p:cNvPicPr>
+            <a:picLocks noChangeAspect="1"/>
+          </p:cNvPicPr>
+          <p:nvPr/>
+        </p:nvPicPr>
+        <p:blipFill>
+          <a:blip r:embed="rId2"/>
+          <a:stretch>
+            <a:fillRect/>
+          </a:stretch>
+        </p:blipFill>
+        <p:spPr>
+          <a:xfrm>
+            <a:off x="6609767" y="1298448"/>
+            <a:ext cx="4977024" cy="2183892"/>
+          </a:xfrm>
+          <a:prstGeom prst="rect">
+            <a:avLst/>
+          </a:prstGeom>
+        </p:spPr>
+      </p:pic>
+      <p:sp>
+        <p:nvSpPr>
+          <p:cNvPr id="6" name="TextBox 5"/>
+          <p:cNvSpPr txBox="1"/>
+          <p:nvPr/>
+        </p:nvSpPr>
+        <p:spPr>
+          <a:xfrm>
+            <a:off x="6400800" y="3500628"/>
+            <a:ext cx="5394960" cy="559307"/>
+          </a:xfrm>
+          <a:prstGeom prst="rect">
+            <a:avLst/>
+          </a:prstGeom>
+          <a:noFill/>
+        </p:spPr>
+        <p:txBody>
+          <a:bodyPr wrap="square">
+            <a:spAutoFit/>
+          </a:bodyPr>
+          <a:lstStyle/>
+          <a:p>
+            <a:pPr algn="ctr">
+              <a:spcAft>
+                <a:spcPts val="0"/>
+              </a:spcAft>
+            </a:pPr>
+            <a:r>
+              <a:rPr sz="1000" b="0">
+                <a:solidFill>
+                  <a:srgbClr val="6E6E6E"/>
+                </a:solidFill>
+                <a:latin typeface="Arial"/>
+              </a:rPr>
+              <a:t>Left: the corrected model's response by spatial frequency for the three kinds of reading, against the old model's linear response (dashed) with its null.  Right: gain on one actuator as the working surface grows.</a:t>
+            </a:r>
+          </a:p>
+        </p:txBody>
+      </p:sp>
+      <p:sp>
+        <p:nvSpPr>
+          <p:cNvPr id="7" name="TextBox 6"/>
+          <p:cNvSpPr txBox="1"/>
+          <p:nvPr/>
+        </p:nvSpPr>
+        <p:spPr>
+          <a:xfrm>
+            <a:off x="6400800" y="4096512"/>
+            <a:ext cx="5394960" cy="274320"/>
+          </a:xfrm>
+          <a:prstGeom prst="rect">
+            <a:avLst/>
+          </a:prstGeom>
+          <a:noFill/>
+        </p:spPr>
+        <p:txBody>
+          <a:bodyPr wrap="square">
+            <a:spAutoFit/>
+          </a:bodyPr>
+          <a:lstStyle/>
+          <a:p>
+            <a:pPr>
+              <a:spcAft>
+                <a:spcPts val="600"/>
+              </a:spcAft>
+            </a:pPr>
+            <a:r>
+              <a:rPr sz="1050" b="0">
+                <a:solidFill>
+                  <a:srgbClr val="6E6E6E"/>
+                </a:solidFill>
+                <a:latin typeface="Arial"/>
+              </a:rPr>
+              <a:t>The old emission is kept as a builder option so the first six stages reproduce byte for byte.  The interferometer traces the same tail by rays and was never affected.  Records: zwfs_s7iter_report.txt, README S7.</a:t>
+            </a:r>
+          </a:p>
+        </p:txBody>
+      </p:sp>
+    </p:spTree>
+  </p:cSld>
+  <p:clrMapOvr>
+    <a:masterClrMapping/>
+  </p:clrMapOvr>
+</p:sld>
+</file>
+
+<file path=ppt/slides/slide8.xml><?xml version="1.0" encoding="utf-8"?>
+<p:sld xmlns:a="http://schemas.openxmlformats.org/drawingml/2006/main" xmlns:p="http://schemas.openxmlformats.org/presentationml/2006/main" xmlns:r="http://schemas.openxmlformats.org/officeDocument/2006/relationships">
+  <p:cSld>
+    <p:spTree>
+      <p:nvGrpSpPr>
+        <p:cNvPr id="1" name=""/>
+        <p:cNvGrpSpPr/>
+        <p:nvPr/>
+      </p:nvGrpSpPr>
+      <p:grpSpPr/>
+      <p:sp>
+        <p:nvSpPr>
+          <p:cNvPr id="2" name="TextBox 1"/>
+          <p:cNvSpPr txBox="1"/>
+          <p:nvPr/>
+        </p:nvSpPr>
+        <p:spPr>
+          <a:xfrm>
+            <a:off x="411480" y="201168"/>
+            <a:ext cx="11368735" cy="914400"/>
+          </a:xfrm>
+          <a:prstGeom prst="rect">
+            <a:avLst/>
+          </a:prstGeom>
+          <a:noFill/>
+        </p:spPr>
+        <p:txBody>
+          <a:bodyPr wrap="square">
+            <a:spAutoFit/>
+          </a:bodyPr>
+          <a:lstStyle/>
+          <a:p>
+            <a:pPr>
+              <a:spcAft>
+                <a:spcPts val="400"/>
+              </a:spcAft>
+            </a:pPr>
+            <a:r>
+              <a:rPr sz="2400" b="1">
+                <a:solidFill>
+                  <a:srgbClr val="1F4E79"/>
+                </a:solidFill>
+                <a:latin typeface="Arial"/>
+              </a:rPr>
+              <a:t>Five ways to read the same camera frames</a:t>
+            </a:r>
+          </a:p>
+          <a:p>
+            <a:pPr>
+              <a:spcAft>
+                <a:spcPts val="0"/>
+              </a:spcAft>
+            </a:pPr>
+            <a:r>
+              <a:rPr sz="1250" b="0">
+                <a:solidFill>
+                  <a:srgbClr val="6E6E6E"/>
+                </a:solidFill>
+                <a:latin typeface="Arial"/>
+              </a:rPr>
+              <a:t>The exact inversion, with its reference re-computed and the sign choice settled once, reads a 10 nm change to 19 pm from one frame</a:t>
+            </a:r>
+          </a:p>
+        </p:txBody>
+      </p:sp>
+      <p:sp>
+        <p:nvSpPr>
+          <p:cNvPr id="3" name="Rectangle 2"/>
+          <p:cNvSpPr/>
+          <p:nvPr/>
+        </p:nvSpPr>
+        <p:spPr>
+          <a:xfrm>
+            <a:off x="411480" y="1133856"/>
+            <a:ext cx="11368735" cy="20320"/>
+          </a:xfrm>
+          <a:prstGeom prst="rect">
+            <a:avLst/>
+          </a:prstGeom>
+          <a:solidFill>
+            <a:srgbClr val="B8C6D4"/>
+          </a:solidFill>
+          <a:ln>
+            <a:noFill/>
+          </a:ln>
+          <a:effectLst/>
+        </p:spPr>
+        <p:style>
+          <a:lnRef idx="1">
+            <a:schemeClr val="accent1"/>
+          </a:lnRef>
+          <a:fillRef idx="3">
+            <a:schemeClr val="accent1"/>
+          </a:fillRef>
+          <a:effectRef idx="2">
+            <a:schemeClr val="accent1"/>
+          </a:effectRef>
+          <a:fontRef idx="minor">
+            <a:schemeClr val="lt1"/>
+          </a:fontRef>
+        </p:style>
+        <p:txBody>
+          <a:bodyPr rtlCol="0" anchor="ctr"/>
+          <a:lstStyle/>
+          <a:p>
+            <a:pPr algn="ctr"/>
+          </a:p>
+        </p:txBody>
+      </p:sp>
+      <p:sp>
+        <p:nvSpPr>
+          <p:cNvPr id="4" name="TextBox 3"/>
+          <p:cNvSpPr txBox="1"/>
+          <p:nvPr/>
+        </p:nvSpPr>
+        <p:spPr>
+          <a:xfrm>
+            <a:off x="411480" y="1298448"/>
             <a:ext cx="11368735" cy="274320"/>
           </a:xfrm>
           <a:prstGeom prst="rect">
@@ -11756,7 +12523,7 @@
                 </a:solidFill>
                 <a:latin typeface="Arial"/>
               </a:rPr>
-              <a:t>Fully sampled setup (385 rays across the pupil, 2048 grid; slide 9).  "Frequency correction" = dividing out the measured response by spatial frequency.  The reference-wave model matches the engine's own field to 2×10⁻¹⁵.  Interferometer on the same row: gain 0.92, floor 46 pm.  Record: runs/m2048_lat (the fit's stencil sampled at the actuator centre, slide 9).</a:t>
+              <a:t>Fully sampled setup (385 rays across the pupil, 2048 grid; slide 9).  "Frequency correction" = dividing out the measured response by spatial frequency.  The reference-wave model matches the engine's own field to 2×10⁻¹⁵.  Interferometer on the same row: gain 0.92, floor 46 pm.  Calibrated on the flat DM with a single-site response pattern (the record's method); the measured-matrix calibration on slide 10 supersedes it.  Record: runs/m2048_lat.</a:t>
             </a:r>
           </a:p>
         </p:txBody>

--- a/demo_session/deck_zwfs.pptx
+++ b/demo_session/deck_zwfs.pptx
@@ -27,6 +27,7 @@
     <p:sldId id="275" r:id="rId26"/>
     <p:sldId id="276" r:id="rId27"/>
     <p:sldId id="277" r:id="rId28"/>
+    <p:sldId id="278" r:id="rId29"/>
   </p:sldIdLst>
   <p:sldSz cx="12191695" cy="6858000" type="screen4x3"/>
   <p:notesSz cx="6858000" cy="9144000"/>
@@ -5766,7 +5767,7 @@
                 </a:solidFill>
                 <a:latin typeface="Arial"/>
               </a:rPr>
-              <a:t>Run it yourself</a:t>
+              <a:t>Holding the surface in closed loop: the on-orbit metric</a:t>
             </a:r>
           </a:p>
           <a:p>
@@ -5782,7 +5783,7 @@
                 </a:solidFill>
                 <a:latin typeface="Arial"/>
               </a:rPr>
-              <a:t>One parameter sheet and one script reproduce every number here; the defaults reproduce the stage-7 record to the last printed digit</a:t>
+              <a:t>Servoed through the sensor, the readings cost the same light; what differs is each reading's fixed error: none, some, or a runaway</a:t>
             </a:r>
           </a:p>
         </p:txBody>
@@ -5831,16 +5832,40 @@
           </a:p>
         </p:txBody>
       </p:sp>
-      <p:sp>
-        <p:nvSpPr>
-          <p:cNvPr id="4" name="TextBox 3"/>
+      <p:pic>
+        <p:nvPicPr>
+          <p:cNvPr id="4" name="Picture 3" descr="crop_zwfs_loop193_left.png"/>
+          <p:cNvPicPr>
+            <a:picLocks noChangeAspect="1"/>
+          </p:cNvPicPr>
+          <p:nvPr/>
+        </p:nvPicPr>
+        <p:blipFill>
+          <a:blip r:embed="rId2"/>
+          <a:stretch>
+            <a:fillRect/>
+          </a:stretch>
+        </p:blipFill>
+        <p:spPr>
+          <a:xfrm>
+            <a:off x="1654521" y="1298448"/>
+            <a:ext cx="3320357" cy="2823972"/>
+          </a:xfrm>
+          <a:prstGeom prst="rect">
+            <a:avLst/>
+          </a:prstGeom>
+        </p:spPr>
+      </p:pic>
+      <p:sp>
+        <p:nvSpPr>
+          <p:cNvPr id="5" name="TextBox 4"/>
           <p:cNvSpPr txBox="1"/>
           <p:nvPr/>
         </p:nvSpPr>
         <p:spPr>
           <a:xfrm>
-            <a:off x="411480" y="1298448"/>
-            <a:ext cx="11368735" cy="274320"/>
+            <a:off x="411480" y="4140708"/>
+            <a:ext cx="5806440" cy="559307"/>
           </a:xfrm>
           <a:prstGeom prst="rect">
             <a:avLst/>
@@ -5853,34 +5878,34 @@
           </a:bodyPr>
           <a:lstStyle/>
           <a:p>
-            <a:pPr>
+            <a:pPr algn="ctr">
               <a:spcAft>
-                <a:spcPts val="600"/>
+                <a:spcPts val="0"/>
               </a:spcAft>
             </a:pPr>
             <a:r>
-              <a:rPr sz="1500" b="0">
-                <a:solidFill>
-                  <a:srgbClr val="282828"/>
+              <a:rPr sz="1000" b="0">
+                <a:solidFill>
+                  <a:srgbClr val="6E6E6E"/>
                 </a:solidFill>
                 <a:latin typeface="Arial"/>
               </a:rPr>
-              <a:t>•  Two files: zwfs_params.m returns every setting at its value of record — grid and ray count, wavelength, the bench's lengths and tuned figures, the mask's etch and spot, the sampling checks, registration, the DM sizes, the test amplitudes and seeds, the colour and photon stages.  zwfs_run.m runs the chosen stages and writes the report, a .mat file and the figures into a folder named by the run's tag.</a:t>
+              <a:t>The stepped reading's residual per cycle under a 2 pm-per-cycle random walk at four light levels (10¹² to 10¹⁵ photons per cycle, light to dark), and a noise-free 1 nm step (dashed) returning to zero.  Left panel of the runner's figure.</a:t>
             </a:r>
           </a:p>
         </p:txBody>
       </p:sp>
       <p:graphicFrame>
         <p:nvGraphicFramePr>
-          <p:cNvPr id="5" name="Table 4"/>
+          <p:cNvPr id="6" name="Table 5"/>
           <p:cNvGraphicFramePr>
             <a:graphicFrameLocks noGrp="1"/>
           </p:cNvGraphicFramePr>
           <p:nvPr/>
         </p:nvGraphicFramePr>
         <p:xfrm>
-          <a:off x="411480" y="2465831"/>
-          <a:ext cx="11368735" cy="1680210"/>
+          <a:off x="6400800" y="1298448"/>
+          <a:ext cx="5394959" cy="2000250"/>
         </p:xfrm>
         <a:graphic>
           <a:graphicData uri="http://schemas.openxmlformats.org/drawingml/2006/table">
@@ -5889,23 +5914,25 @@
                 <a:tableStyleId>{5C22544A-7EE6-4342-B048-85BDC9FD1C3A}</a:tableStyleId>
               </a:tblPr>
               <a:tblGrid>
-                <a:gridCol w="6601201"/>
-                <a:gridCol w="4767534"/>
+                <a:gridCol w="1622874"/>
+                <a:gridCol w="1052675"/>
+                <a:gridCol w="921090"/>
+                <a:gridCol w="1798320"/>
               </a:tblGrid>
-              <a:tr h="280035">
-                <a:tc>
-                  <a:txBody>
-                    <a:bodyPr wrap="square"/>
-                    <a:lstStyle/>
-                    <a:p>
-                      <a:r>
-                        <a:rPr sz="1100" b="1">
+              <a:tr h="434340">
+                <a:tc>
+                  <a:txBody>
+                    <a:bodyPr wrap="square"/>
+                    <a:lstStyle/>
+                    <a:p>
+                      <a:r>
+                        <a:rPr sz="1000" b="1">
                           <a:solidFill>
                             <a:srgbClr val="FFFFFF"/>
                           </a:solidFill>
                           <a:latin typeface="Arial"/>
                         </a:rPr>
-                        <a:t>call</a:t>
+                        <a:t>held to 3 pm rms: photons per cycle</a:t>
                       </a:r>
                     </a:p>
                   </a:txBody>
@@ -5921,13 +5948,13 @@
                     <a:lstStyle/>
                     <a:p>
                       <a:r>
-                        <a:rPr sz="1100" b="1">
+                        <a:rPr sz="1000" b="1">
                           <a:solidFill>
                             <a:srgbClr val="FFFFFF"/>
                           </a:solidFill>
                           <a:latin typeface="Arial"/>
                         </a:rPr>
-                        <a:t>what it does</a:t>
+                        <a:t>linear (L)</a:t>
                       </a:r>
                     </a:p>
                   </a:txBody>
@@ -5937,21 +5964,65 @@
                     </a:solidFill>
                   </a:tcPr>
                 </a:tc>
+                <a:tc>
+                  <a:txBody>
+                    <a:bodyPr wrap="square"/>
+                    <a:lstStyle/>
+                    <a:p>
+                      <a:r>
+                        <a:rPr sz="1000" b="1">
+                          <a:solidFill>
+                            <a:srgbClr val="FFFFFF"/>
+                          </a:solidFill>
+                          <a:latin typeface="Arial"/>
+                        </a:rPr>
+                        <a:t>exact, one frame (I+)</a:t>
+                      </a:r>
+                    </a:p>
+                  </a:txBody>
+                  <a:tcPr marL="54864" marR="54864" marT="18288" marB="18288">
+                    <a:solidFill>
+                      <a:srgbClr val="1F4E79"/>
+                    </a:solidFill>
+                  </a:tcPr>
+                </a:tc>
+                <a:tc>
+                  <a:txBody>
+                    <a:bodyPr wrap="square"/>
+                    <a:lstStyle/>
+                    <a:p>
+                      <a:r>
+                        <a:rPr sz="1000" b="1">
+                          <a:solidFill>
+                            <a:srgbClr val="FFFFFF"/>
+                          </a:solidFill>
+                          <a:latin typeface="Arial"/>
+                        </a:rPr>
+                        <a:t>stepped (S)</a:t>
+                      </a:r>
+                    </a:p>
+                  </a:txBody>
+                  <a:tcPr marL="54864" marR="54864" marT="18288" marB="18288">
+                    <a:solidFill>
+                      <a:srgbClr val="1F4E79"/>
+                    </a:solidFill>
+                  </a:tcPr>
+                </a:tc>
               </a:tr>
-              <a:tr h="280035">
-                <a:tc>
-                  <a:txBody>
-                    <a:bodyPr wrap="square"/>
-                    <a:lstStyle/>
-                    <a:p>
-                      <a:r>
-                        <a:rPr sz="1100" b="0">
-                          <a:solidFill>
-                            <a:srgbClr val="282828"/>
-                          </a:solidFill>
-                          <a:latin typeface="Arial"/>
-                        </a:rPr>
-                        <a:t>zwfs_run</a:t>
+              <a:tr h="262890">
+                <a:tc>
+                  <a:txBody>
+                    <a:bodyPr wrap="square"/>
+                    <a:lstStyle/>
+                    <a:p>
+                      <a:r>
+                        <a:rPr sz="1000" b="0">
+                          <a:solidFill>
+                            <a:srgbClr val="282828"/>
+                          </a:solidFill>
+                          <a:latin typeface="Arial"/>
+                        </a:rPr>
+                        <a:t>noise only</a:t>
                       </a:r>
                     </a:p>
                   </a:txBody>
@@ -5967,13 +6038,13 @@
                     <a:lstStyle/>
                     <a:p>
                       <a:r>
-                        <a:rPr sz="1100" b="0">
-                          <a:solidFill>
-                            <a:srgbClr val="282828"/>
-                          </a:solidFill>
-                          <a:latin typeface="Arial"/>
-                        </a:rPr>
-                        <a:t>the record: bench checks, the full test set, figures</a:t>
+                        <a:rPr sz="1000" b="0">
+                          <a:solidFill>
+                            <a:srgbClr val="282828"/>
+                          </a:solidFill>
+                          <a:latin typeface="Arial"/>
+                        </a:rPr>
+                        <a:t>2.1×10¹²</a:t>
                       </a:r>
                     </a:p>
                   </a:txBody>
@@ -5983,21 +6054,65 @@
                     </a:solidFill>
                   </a:tcPr>
                 </a:tc>
+                <a:tc>
+                  <a:txBody>
+                    <a:bodyPr wrap="square"/>
+                    <a:lstStyle/>
+                    <a:p>
+                      <a:r>
+                        <a:rPr sz="1000" b="0">
+                          <a:solidFill>
+                            <a:srgbClr val="282828"/>
+                          </a:solidFill>
+                          <a:latin typeface="Arial"/>
+                        </a:rPr>
+                        <a:t>runs away</a:t>
+                      </a:r>
+                    </a:p>
+                  </a:txBody>
+                  <a:tcPr marL="54864" marR="54864" marT="18288" marB="18288">
+                    <a:solidFill>
+                      <a:srgbClr val="FFFFFF"/>
+                    </a:solidFill>
+                  </a:tcPr>
+                </a:tc>
+                <a:tc>
+                  <a:txBody>
+                    <a:bodyPr wrap="square"/>
+                    <a:lstStyle/>
+                    <a:p>
+                      <a:r>
+                        <a:rPr sz="1000" b="0">
+                          <a:solidFill>
+                            <a:srgbClr val="282828"/>
+                          </a:solidFill>
+                          <a:latin typeface="Arial"/>
+                        </a:rPr>
+                        <a:t>2.6×10¹²</a:t>
+                      </a:r>
+                    </a:p>
+                  </a:txBody>
+                  <a:tcPr marL="54864" marR="54864" marT="18288" marB="18288">
+                    <a:solidFill>
+                      <a:srgbClr val="FFFFFF"/>
+                    </a:solidFill>
+                  </a:tcPr>
+                </a:tc>
               </a:tr>
-              <a:tr h="280035">
-                <a:tc>
-                  <a:txBody>
-                    <a:bodyPr wrap="square"/>
-                    <a:lstStyle/>
-                    <a:p>
-                      <a:r>
-                        <a:rPr sz="1100" b="0">
-                          <a:solidFill>
-                            <a:srgbClr val="282828"/>
-                          </a:solidFill>
-                          <a:latin typeface="Arial"/>
-                        </a:rPr>
-                        <a:t>zwfs_run('tag','ng385', 'NGRID',385)</a:t>
+              <a:tr h="434340">
+                <a:tc>
+                  <a:txBody>
+                    <a:bodyPr wrap="square"/>
+                    <a:lstStyle/>
+                    <a:p>
+                      <a:r>
+                        <a:rPr sz="1000" b="0">
+                          <a:solidFill>
+                            <a:srgbClr val="282828"/>
+                          </a:solidFill>
+                          <a:latin typeface="Arial"/>
+                        </a:rPr>
+                        <a:t>random walk, 2 pm per cycle</a:t>
                       </a:r>
                     </a:p>
                   </a:txBody>
@@ -6013,13 +6128,13 @@
                     <a:lstStyle/>
                     <a:p>
                       <a:r>
-                        <a:rPr sz="1100" b="0">
-                          <a:solidFill>
-                            <a:srgbClr val="282828"/>
-                          </a:solidFill>
-                          <a:latin typeface="Arial"/>
-                        </a:rPr>
-                        <a:t>the 1-megapixel camera</a:t>
+                        <a:rPr sz="1000" b="0">
+                          <a:solidFill>
+                            <a:srgbClr val="282828"/>
+                          </a:solidFill>
+                          <a:latin typeface="Arial"/>
+                        </a:rPr>
+                        <a:t>7.3×10¹²</a:t>
                       </a:r>
                     </a:p>
                   </a:txBody>
@@ -6029,21 +6144,65 @@
                     </a:solidFill>
                   </a:tcPr>
                 </a:tc>
+                <a:tc>
+                  <a:txBody>
+                    <a:bodyPr wrap="square"/>
+                    <a:lstStyle/>
+                    <a:p>
+                      <a:r>
+                        <a:rPr sz="1000" b="0">
+                          <a:solidFill>
+                            <a:srgbClr val="282828"/>
+                          </a:solidFill>
+                          <a:latin typeface="Arial"/>
+                        </a:rPr>
+                        <a:t>runs away</a:t>
+                      </a:r>
+                    </a:p>
+                  </a:txBody>
+                  <a:tcPr marL="54864" marR="54864" marT="18288" marB="18288">
+                    <a:solidFill>
+                      <a:srgbClr val="ECF1F6"/>
+                    </a:solidFill>
+                  </a:tcPr>
+                </a:tc>
+                <a:tc>
+                  <a:txBody>
+                    <a:bodyPr wrap="square"/>
+                    <a:lstStyle/>
+                    <a:p>
+                      <a:r>
+                        <a:rPr sz="1000" b="0">
+                          <a:solidFill>
+                            <a:srgbClr val="282828"/>
+                          </a:solidFill>
+                          <a:latin typeface="Arial"/>
+                        </a:rPr>
+                        <a:t>7.5×10¹²</a:t>
+                      </a:r>
+                    </a:p>
+                  </a:txBody>
+                  <a:tcPr marL="54864" marR="54864" marT="18288" marB="18288">
+                    <a:solidFill>
+                      <a:srgbClr val="ECF1F6"/>
+                    </a:solidFill>
+                  </a:tcPr>
+                </a:tc>
               </a:tr>
-              <a:tr h="280035">
-                <a:tc>
-                  <a:txBody>
-                    <a:bodyPr wrap="square"/>
-                    <a:lstStyle/>
-                    <a:p>
-                      <a:r>
-                        <a:rPr sz="1100" b="0">
-                          <a:solidFill>
-                            <a:srgbClr val="282828"/>
-                          </a:solidFill>
-                          <a:latin typeface="Arial"/>
-                        </a:rPr>
-                        <a:t>zwfs_run('MODEL',2048, 'NGRID',385, 'param_file','macos_param_2048.txt')</a:t>
+              <a:tr h="434340">
+                <a:tc>
+                  <a:txBody>
+                    <a:bodyPr wrap="square"/>
+                    <a:lstStyle/>
+                    <a:p>
+                      <a:r>
+                        <a:rPr sz="1000" b="0">
+                          <a:solidFill>
+                            <a:srgbClr val="282828"/>
+                          </a:solidFill>
+                          <a:latin typeface="Arial"/>
+                        </a:rPr>
+                        <a:t>thermal ramp, 5 pm per cycle</a:t>
                       </a:r>
                     </a:p>
                   </a:txBody>
@@ -6059,13 +6218,13 @@
                     <a:lstStyle/>
                     <a:p>
                       <a:r>
-                        <a:rPr sz="1100" b="0">
-                          <a:solidFill>
-                            <a:srgbClr val="282828"/>
-                          </a:solidFill>
-                          <a:latin typeface="Arial"/>
-                        </a:rPr>
-                        <a:t>the fully sampled setup on a 30 GB machine</a:t>
+                        <a:rPr sz="1000" b="0">
+                          <a:solidFill>
+                            <a:srgbClr val="282828"/>
+                          </a:solidFill>
+                          <a:latin typeface="Arial"/>
+                        </a:rPr>
+                        <a:t>27.6 pm at any light</a:t>
                       </a:r>
                     </a:p>
                   </a:txBody>
@@ -6075,21 +6234,65 @@
                     </a:solidFill>
                   </a:tcPr>
                 </a:tc>
+                <a:tc>
+                  <a:txBody>
+                    <a:bodyPr wrap="square"/>
+                    <a:lstStyle/>
+                    <a:p>
+                      <a:r>
+                        <a:rPr sz="1000" b="0">
+                          <a:solidFill>
+                            <a:srgbClr val="282828"/>
+                          </a:solidFill>
+                          <a:latin typeface="Arial"/>
+                        </a:rPr>
+                        <a:t>runs away</a:t>
+                      </a:r>
+                    </a:p>
+                  </a:txBody>
+                  <a:tcPr marL="54864" marR="54864" marT="18288" marB="18288">
+                    <a:solidFill>
+                      <a:srgbClr val="FFFFFF"/>
+                    </a:solidFill>
+                  </a:tcPr>
+                </a:tc>
+                <a:tc>
+                  <a:txBody>
+                    <a:bodyPr wrap="square"/>
+                    <a:lstStyle/>
+                    <a:p>
+                      <a:r>
+                        <a:rPr sz="1000" b="0">
+                          <a:solidFill>
+                            <a:srgbClr val="282828"/>
+                          </a:solidFill>
+                          <a:latin typeface="Arial"/>
+                        </a:rPr>
+                        <a:t>10.0 pm at any light (the loop's own lag)</a:t>
+                      </a:r>
+                    </a:p>
+                  </a:txBody>
+                  <a:tcPr marL="54864" marR="54864" marT="18288" marB="18288">
+                    <a:solidFill>
+                      <a:srgbClr val="FFFFFF"/>
+                    </a:solidFill>
+                  </a:tcPr>
+                </a:tc>
               </a:tr>
-              <a:tr h="280035">
-                <a:tc>
-                  <a:txBody>
-                    <a:bodyPr wrap="square"/>
-                    <a:lstStyle/>
-                    <a:p>
-                      <a:r>
-                        <a:rPr sz="1100" b="0">
-                          <a:solidFill>
-                            <a:srgbClr val="282828"/>
-                          </a:solidFill>
-                          <a:latin typeface="Arial"/>
-                        </a:rPr>
-                        <a:t>zwfs_run('stages',{'battery','color','noise','figs'})</a:t>
+              <a:tr h="434340">
+                <a:tc>
+                  <a:txBody>
+                    <a:bodyPr wrap="square"/>
+                    <a:lstStyle/>
+                    <a:p>
+                      <a:r>
+                        <a:rPr sz="1000" b="0">
+                          <a:solidFill>
+                            <a:srgbClr val="282828"/>
+                          </a:solidFill>
+                          <a:latin typeface="Arial"/>
+                        </a:rPr>
+                        <a:t>noise-free 1 nm step, after 60 cycles</a:t>
                       </a:r>
                     </a:p>
                   </a:txBody>
@@ -6105,13 +6308,13 @@
                     <a:lstStyle/>
                     <a:p>
                       <a:r>
-                        <a:rPr sz="1100" b="0">
-                          <a:solidFill>
-                            <a:srgbClr val="282828"/>
-                          </a:solidFill>
-                          <a:latin typeface="Arial"/>
-                        </a:rPr>
-                        <a:t>everything on this deck's later slides</a:t>
+                        <a:rPr sz="1000" b="0">
+                          <a:solidFill>
+                            <a:srgbClr val="282828"/>
+                          </a:solidFill>
+                          <a:latin typeface="Arial"/>
+                        </a:rPr>
+                        <a:t>1.2 pm and still falling</a:t>
                       </a:r>
                     </a:p>
                   </a:txBody>
@@ -6121,49 +6324,47 @@
                     </a:solidFill>
                   </a:tcPr>
                 </a:tc>
-              </a:tr>
-              <a:tr h="280035">
-                <a:tc>
-                  <a:txBody>
-                    <a:bodyPr wrap="square"/>
-                    <a:lstStyle/>
-                    <a:p>
-                      <a:r>
-                        <a:rPr sz="1100" b="0">
-                          <a:solidFill>
-                            <a:srgbClr val="282828"/>
-                          </a:solidFill>
-                          <a:latin typeface="Arial"/>
-                        </a:rPr>
-                        <a:t>./zwfs_batch.sh TAG "the same arguments"</a:t>
-                      </a:r>
-                    </a:p>
-                  </a:txBody>
-                  <a:tcPr marL="54864" marR="54864" marT="18288" marB="18288">
-                    <a:solidFill>
-                      <a:srgbClr val="FFFFFF"/>
-                    </a:solidFill>
-                  </a:tcPr>
-                </a:tc>
-                <a:tc>
-                  <a:txBody>
-                    <a:bodyPr wrap="square"/>
-                    <a:lstStyle/>
-                    <a:p>
-                      <a:r>
-                        <a:rPr sz="1100" b="0">
-                          <a:solidFill>
-                            <a:srgbClr val="282828"/>
-                          </a:solidFill>
-                          <a:latin typeface="Arial"/>
-                        </a:rPr>
-                        <a:t>unattended, memory-capped, logged</a:t>
-                      </a:r>
-                    </a:p>
-                  </a:txBody>
-                  <a:tcPr marL="54864" marR="54864" marT="18288" marB="18288">
-                    <a:solidFill>
-                      <a:srgbClr val="FFFFFF"/>
+                <a:tc>
+                  <a:txBody>
+                    <a:bodyPr wrap="square"/>
+                    <a:lstStyle/>
+                    <a:p>
+                      <a:r>
+                        <a:rPr sz="1000" b="0">
+                          <a:solidFill>
+                            <a:srgbClr val="282828"/>
+                          </a:solidFill>
+                          <a:latin typeface="Arial"/>
+                        </a:rPr>
+                        <a:t>99 nm</a:t>
+                      </a:r>
+                    </a:p>
+                  </a:txBody>
+                  <a:tcPr marL="54864" marR="54864" marT="18288" marB="18288">
+                    <a:solidFill>
+                      <a:srgbClr val="ECF1F6"/>
+                    </a:solidFill>
+                  </a:tcPr>
+                </a:tc>
+                <a:tc>
+                  <a:txBody>
+                    <a:bodyPr wrap="square"/>
+                    <a:lstStyle/>
+                    <a:p>
+                      <a:r>
+                        <a:rPr sz="1000" b="0">
+                          <a:solidFill>
+                            <a:srgbClr val="282828"/>
+                          </a:solidFill>
+                          <a:latin typeface="Arial"/>
+                        </a:rPr>
+                        <a:t>0.000 pm</a:t>
+                      </a:r>
+                    </a:p>
+                  </a:txBody>
+                  <a:tcPr marL="54864" marR="54864" marT="18288" marB="18288">
+                    <a:solidFill>
+                      <a:srgbClr val="ECF1F6"/>
                     </a:solidFill>
                   </a:tcPr>
                 </a:tc>
@@ -6174,14 +6375,14 @@
       </p:graphicFrame>
       <p:sp>
         <p:nvSpPr>
-          <p:cNvPr id="6" name="TextBox 5"/>
+          <p:cNvPr id="7" name="TextBox 6"/>
           <p:cNvSpPr txBox="1"/>
           <p:nvPr/>
         </p:nvSpPr>
         <p:spPr>
           <a:xfrm>
-            <a:off x="411480" y="4292346"/>
-            <a:ext cx="11368735" cy="274320"/>
+            <a:off x="6400800" y="3445002"/>
+            <a:ext cx="5394960" cy="274320"/>
           </a:xfrm>
           <a:prstGeom prst="rect">
             <a:avLst/>
@@ -6200,27 +6401,43 @@
               </a:spcAft>
             </a:pPr>
             <a:r>
-              <a:rPr sz="1500" b="0">
+              <a:rPr sz="1200" b="0">
                 <a:solidFill>
                   <a:srgbClr val="282828"/>
                 </a:solidFill>
                 <a:latin typeface="Arial"/>
               </a:rPr>
-              <a:t>•  Checks that run every time: the no-mask round trip through the bracket (must return the field unchanged); the reference-wave model against the engine's own field; the pupil brightness must not change with the DM shape; the sampling checks (pixels across the dimple, camera pixels per actuator); and the search for the camera-to-DM mirror/transpose and sign.</a:t>
-            </a:r>
-          </a:p>
-        </p:txBody>
-      </p:sp>
-      <p:sp>
-        <p:nvSpPr>
-          <p:cNvPr id="7" name="TextBox 6"/>
+              <a:t>•  The loop: the DM is held at the 30 nm working surface by a proportional servo (gain 0.5) closed through one reading; each cycle the state is measured with N photons, compared with the set point's frames, and half the estimated change removed.  The same loop code will run the interferometer.</a:t>
+            </a:r>
+          </a:p>
+          <a:p>
+            <a:pPr>
+              <a:spcAft>
+                <a:spcPts val="600"/>
+              </a:spcAft>
+            </a:pPr>
+            <a:r>
+              <a:rPr sz="1200" b="0">
+                <a:solidFill>
+                  <a:srgbClr val="282828"/>
+                </a:solidFill>
+                <a:latin typeface="Arial"/>
+              </a:rPr>
+              <a:t>•  What it shows: noise and a random walk propagate exactly as theory says, and L and S cost the same light.  What differs is the fixed error: S has none; L imprints a fine-scale error on the DM when a slow ramp leaves a persistent low-order residual; I+ has sites that read with the wrong sign, and no gain fixes a wrong sign.</a:t>
+            </a:r>
+          </a:p>
+        </p:txBody>
+      </p:sp>
+      <p:sp>
+        <p:nvSpPr>
+          <p:cNvPr id="8" name="TextBox 7"/>
           <p:cNvSpPr txBox="1"/>
           <p:nvPr/>
         </p:nvSpPr>
         <p:spPr>
           <a:xfrm>
-            <a:off x="411480" y="5459730"/>
-            <a:ext cx="11368735" cy="274320"/>
+            <a:off x="6400800" y="5743194"/>
+            <a:ext cx="5394960" cy="274320"/>
           </a:xfrm>
           <a:prstGeom prst="rect">
             <a:avLst/>
@@ -6245,7 +6462,7 @@
                 </a:solidFill>
                 <a:latin typeface="Arial"/>
               </a:rPr>
-              <a:t>Reproduction check: 64 lines of results against the stage-7 report, 8 differ in the last printed digit (the actuator fit's solver tolerance).  README "Run it yourself" carries the parameter table.</a:t>
+              <a:t>Gain 0.5, 60 cycles, matrix measured on the working surface, 193 rays (385-ray check: runs/loop385).  A ramp under a proportional loop always lags by rate/gain; an integral term is the fix.  Code dm_gauge_lib/dmg_loop, gated by tDmgLoop.</a:t>
             </a:r>
           </a:p>
         </p:txBody>
@@ -6302,7 +6519,7 @@
                 </a:solidFill>
                 <a:latin typeface="Arial"/>
               </a:rPr>
-              <a:t>Side by side with the Twyman–Green</a:t>
+              <a:t>Run it yourself</a:t>
             </a:r>
           </a:p>
           <a:p>
@@ -6318,7 +6535,7 @@
                 </a:solidFill>
                 <a:latin typeface="Arial"/>
               </a:rPr>
-              <a:t>The interferometer loses response at fine patterns and never fails; the sensor, calibrated on its working surface, reads a change to 5 pm up to 50–60 nm</a:t>
+              <a:t>One parameter sheet and one script reproduce every number here; the defaults reproduce the stage-7 record to the last printed digit</a:t>
             </a:r>
           </a:p>
         </p:txBody>
@@ -6367,17 +6584,56 @@
           </a:p>
         </p:txBody>
       </p:sp>
+      <p:sp>
+        <p:nvSpPr>
+          <p:cNvPr id="4" name="TextBox 3"/>
+          <p:cNvSpPr txBox="1"/>
+          <p:nvPr/>
+        </p:nvSpPr>
+        <p:spPr>
+          <a:xfrm>
+            <a:off x="411480" y="1298448"/>
+            <a:ext cx="11368735" cy="274320"/>
+          </a:xfrm>
+          <a:prstGeom prst="rect">
+            <a:avLst/>
+          </a:prstGeom>
+          <a:noFill/>
+        </p:spPr>
+        <p:txBody>
+          <a:bodyPr wrap="square">
+            <a:spAutoFit/>
+          </a:bodyPr>
+          <a:lstStyle/>
+          <a:p>
+            <a:pPr>
+              <a:spcAft>
+                <a:spcPts val="600"/>
+              </a:spcAft>
+            </a:pPr>
+            <a:r>
+              <a:rPr sz="1500" b="0">
+                <a:solidFill>
+                  <a:srgbClr val="282828"/>
+                </a:solidFill>
+                <a:latin typeface="Arial"/>
+              </a:rPr>
+              <a:t>•  Two files: zwfs_params.m returns every setting at its value of record — grid and ray count, wavelength, the bench's lengths and tuned figures, the mask's etch and spot, the sampling checks, registration, the DM sizes, the test amplitudes and seeds, the colour and photon stages.  zwfs_run.m runs the chosen stages and writes the report, a .mat file and the figures into a folder named by the run's tag.</a:t>
+            </a:r>
+          </a:p>
+        </p:txBody>
+      </p:sp>
       <p:graphicFrame>
         <p:nvGraphicFramePr>
-          <p:cNvPr id="4" name="Table 3"/>
+          <p:cNvPr id="5" name="Table 4"/>
           <p:cNvGraphicFramePr>
             <a:graphicFrameLocks noGrp="1"/>
           </p:cNvGraphicFramePr>
           <p:nvPr/>
         </p:nvGraphicFramePr>
         <p:xfrm>
-          <a:off x="411480" y="1298448"/>
-          <a:ext cx="11368734" cy="3366135"/>
+          <a:off x="411480" y="2465831"/>
+          <a:ext cx="11368735" cy="1680210"/>
         </p:xfrm>
         <a:graphic>
           <a:graphicData uri="http://schemas.openxmlformats.org/drawingml/2006/table">
@@ -6386,16 +6642,25 @@
                 <a:tableStyleId>{5C22544A-7EE6-4342-B048-85BDC9FD1C3A}</a:tableStyleId>
               </a:tblPr>
               <a:tblGrid>
-                <a:gridCol w="2399431"/>
-                <a:gridCol w="2570819"/>
-                <a:gridCol w="6398484"/>
+                <a:gridCol w="6601201"/>
+                <a:gridCol w="4767534"/>
               </a:tblGrid>
               <a:tr h="280035">
                 <a:tc>
                   <a:txBody>
                     <a:bodyPr wrap="square"/>
                     <a:lstStyle/>
-                    <a:p/>
+                    <a:p>
+                      <a:r>
+                        <a:rPr sz="1100" b="1">
+                          <a:solidFill>
+                            <a:srgbClr val="FFFFFF"/>
+                          </a:solidFill>
+                          <a:latin typeface="Arial"/>
+                        </a:rPr>
+                        <a:t>call</a:t>
+                      </a:r>
+                    </a:p>
                   </a:txBody>
                   <a:tcPr marL="54864" marR="54864" marT="18288" marB="18288">
                     <a:solidFill>
@@ -6415,29 +6680,7 @@
                           </a:solidFill>
                           <a:latin typeface="Arial"/>
                         </a:rPr>
-                        <a:t>Twyman–Green PSI (measured)</a:t>
-                      </a:r>
-                    </a:p>
-                  </a:txBody>
-                  <a:tcPr marL="54864" marR="54864" marT="18288" marB="18288">
-                    <a:solidFill>
-                      <a:srgbClr val="1F4E79"/>
-                    </a:solidFill>
-                  </a:tcPr>
-                </a:tc>
-                <a:tc>
-                  <a:txBody>
-                    <a:bodyPr wrap="square"/>
-                    <a:lstStyle/>
-                    <a:p>
-                      <a:r>
-                        <a:rPr sz="1100" b="1">
-                          <a:solidFill>
-                            <a:srgbClr val="FFFFFF"/>
-                          </a:solidFill>
-                          <a:latin typeface="Arial"/>
-                        </a:rPr>
-                        <a:t>Zernike sensor (measured)</a:t>
+                        <a:t>what it does</a:t>
                       </a:r>
                     </a:p>
                   </a:txBody>
@@ -6461,7 +6704,7 @@
                           </a:solidFill>
                           <a:latin typeface="Arial"/>
                         </a:rPr>
-                        <a:t>reference beam</a:t>
+                        <a:t>zwfs_run</a:t>
                       </a:r>
                     </a:p>
                   </a:txBody>
@@ -6483,103 +6726,13 @@
                           </a:solidFill>
                           <a:latin typeface="Arial"/>
                         </a:rPr>
-                        <a:t>the second arm's flat</a:t>
+                        <a:t>the record: bench checks, the full test set, figures</a:t>
                       </a:r>
                     </a:p>
                   </a:txBody>
                   <a:tcPr marL="54864" marR="54864" marT="18288" marB="18288">
                     <a:solidFill>
                       <a:srgbClr val="FFFFFF"/>
-                    </a:solidFill>
-                  </a:tcPr>
-                </a:tc>
-                <a:tc>
-                  <a:txBody>
-                    <a:bodyPr wrap="square"/>
-                    <a:lstStyle/>
-                    <a:p>
-                      <a:r>
-                        <a:rPr sz="1100" b="0">
-                          <a:solidFill>
-                            <a:srgbClr val="282828"/>
-                          </a:solidFill>
-                          <a:latin typeface="Arial"/>
-                        </a:rPr>
-                        <a:t>made from the beam's own focal core</a:t>
-                      </a:r>
-                    </a:p>
-                  </a:txBody>
-                  <a:tcPr marL="54864" marR="54864" marT="18288" marB="18288">
-                    <a:solidFill>
-                      <a:srgbClr val="FFFFFF"/>
-                    </a:solidFill>
-                  </a:tcPr>
-                </a:tc>
-              </a:tr>
-              <a:tr h="468630">
-                <a:tc>
-                  <a:txBody>
-                    <a:bodyPr wrap="square"/>
-                    <a:lstStyle/>
-                    <a:p>
-                      <a:r>
-                        <a:rPr sz="1100" b="0">
-                          <a:solidFill>
-                            <a:srgbClr val="282828"/>
-                          </a:solidFill>
-                          <a:latin typeface="Arial"/>
-                        </a:rPr>
-                        <a:t>one measurement costs</a:t>
-                      </a:r>
-                    </a:p>
-                  </a:txBody>
-                  <a:tcPr marL="54864" marR="54864" marT="18288" marB="18288">
-                    <a:solidFill>
-                      <a:srgbClr val="ECF1F6"/>
-                    </a:solidFill>
-                  </a:tcPr>
-                </a:tc>
-                <a:tc>
-                  <a:txBody>
-                    <a:bodyPr wrap="square"/>
-                    <a:lstStyle/>
-                    <a:p>
-                      <a:r>
-                        <a:rPr sz="1100" b="0">
-                          <a:solidFill>
-                            <a:srgbClr val="282828"/>
-                          </a:solidFill>
-                          <a:latin typeface="Arial"/>
-                        </a:rPr>
-                        <a:t>6 traces (3 per arm), 4 fringe frames</a:t>
-                      </a:r>
-                    </a:p>
-                  </a:txBody>
-                  <a:tcPr marL="54864" marR="54864" marT="18288" marB="18288">
-                    <a:solidFill>
-                      <a:srgbClr val="ECF1F6"/>
-                    </a:solidFill>
-                  </a:tcPr>
-                </a:tc>
-                <a:tc>
-                  <a:txBody>
-                    <a:bodyPr wrap="square"/>
-                    <a:lstStyle/>
-                    <a:p>
-                      <a:r>
-                        <a:rPr sz="1100" b="0">
-                          <a:solidFill>
-                            <a:srgbClr val="282828"/>
-                          </a:solidFill>
-                          <a:latin typeface="Arial"/>
-                        </a:rPr>
-                        <a:t>1 or 4 camera frames; 256 calibration frames once per working surface</a:t>
-                      </a:r>
-                    </a:p>
-                  </a:txBody>
-                  <a:tcPr marL="54864" marR="54864" marT="18288" marB="18288">
-                    <a:solidFill>
-                      <a:srgbClr val="ECF1F6"/>
                     </a:solidFill>
                   </a:tcPr>
                 </a:tc>
@@ -6597,57 +6750,35 @@
                           </a:solidFill>
                           <a:latin typeface="Arial"/>
                         </a:rPr>
-                        <a:t>polarization hardware</a:t>
-                      </a:r>
-                    </a:p>
-                  </a:txBody>
-                  <a:tcPr marL="54864" marR="54864" marT="18288" marB="18288">
-                    <a:solidFill>
-                      <a:srgbClr val="FFFFFF"/>
-                    </a:solidFill>
-                  </a:tcPr>
-                </a:tc>
-                <a:tc>
-                  <a:txBody>
-                    <a:bodyPr wrap="square"/>
-                    <a:lstStyle/>
-                    <a:p>
-                      <a:r>
-                        <a:rPr sz="1100" b="0">
-                          <a:solidFill>
-                            <a:srgbClr val="282828"/>
-                          </a:solidFill>
-                          <a:latin typeface="Arial"/>
-                        </a:rPr>
-                        <a:t>polarizer, 5 waveplates, analyzer</a:t>
-                      </a:r>
-                    </a:p>
-                  </a:txBody>
-                  <a:tcPr marL="54864" marR="54864" marT="18288" marB="18288">
-                    <a:solidFill>
-                      <a:srgbClr val="FFFFFF"/>
-                    </a:solidFill>
-                  </a:tcPr>
-                </a:tc>
-                <a:tc>
-                  <a:txBody>
-                    <a:bodyPr wrap="square"/>
-                    <a:lstStyle/>
-                    <a:p>
-                      <a:r>
-                        <a:rPr sz="1100" b="0">
-                          <a:solidFill>
-                            <a:srgbClr val="282828"/>
-                          </a:solidFill>
-                          <a:latin typeface="Arial"/>
-                        </a:rPr>
-                        <a:t>none</a:t>
-                      </a:r>
-                    </a:p>
-                  </a:txBody>
-                  <a:tcPr marL="54864" marR="54864" marT="18288" marB="18288">
-                    <a:solidFill>
-                      <a:srgbClr val="FFFFFF"/>
+                        <a:t>zwfs_run('tag','ng385', 'NGRID',385)</a:t>
+                      </a:r>
+                    </a:p>
+                  </a:txBody>
+                  <a:tcPr marL="54864" marR="54864" marT="18288" marB="18288">
+                    <a:solidFill>
+                      <a:srgbClr val="ECF1F6"/>
+                    </a:solidFill>
+                  </a:tcPr>
+                </a:tc>
+                <a:tc>
+                  <a:txBody>
+                    <a:bodyPr wrap="square"/>
+                    <a:lstStyle/>
+                    <a:p>
+                      <a:r>
+                        <a:rPr sz="1100" b="0">
+                          <a:solidFill>
+                            <a:srgbClr val="282828"/>
+                          </a:solidFill>
+                          <a:latin typeface="Arial"/>
+                        </a:rPr>
+                        <a:t>the 1-megapixel camera</a:t>
+                      </a:r>
+                    </a:p>
+                  </a:txBody>
+                  <a:tcPr marL="54864" marR="54864" marT="18288" marB="18288">
+                    <a:solidFill>
+                      <a:srgbClr val="ECF1F6"/>
                     </a:solidFill>
                   </a:tcPr>
                 </a:tc>
@@ -6665,57 +6796,35 @@
                           </a:solidFill>
                           <a:latin typeface="Arial"/>
                         </a:rPr>
-                        <a:t>moving parts</a:t>
-                      </a:r>
-                    </a:p>
-                  </a:txBody>
-                  <a:tcPr marL="54864" marR="54864" marT="18288" marB="18288">
-                    <a:solidFill>
-                      <a:srgbClr val="ECF1F6"/>
-                    </a:solidFill>
-                  </a:tcPr>
-                </a:tc>
-                <a:tc>
-                  <a:txBody>
-                    <a:bodyPr wrap="square"/>
-                    <a:lstStyle/>
-                    <a:p>
-                      <a:r>
-                        <a:rPr sz="1100" b="0">
-                          <a:solidFill>
-                            <a:srgbClr val="282828"/>
-                          </a:solidFill>
-                          <a:latin typeface="Arial"/>
-                        </a:rPr>
-                        <a:t>none (polarization-stepped)</a:t>
-                      </a:r>
-                    </a:p>
-                  </a:txBody>
-                  <a:tcPr marL="54864" marR="54864" marT="18288" marB="18288">
-                    <a:solidFill>
-                      <a:srgbClr val="ECF1F6"/>
-                    </a:solidFill>
-                  </a:tcPr>
-                </a:tc>
-                <a:tc>
-                  <a:txBody>
-                    <a:bodyPr wrap="square"/>
-                    <a:lstStyle/>
-                    <a:p>
-                      <a:r>
-                        <a:rPr sz="1100" b="0">
-                          <a:solidFill>
-                            <a:srgbClr val="282828"/>
-                          </a:solidFill>
-                          <a:latin typeface="Arial"/>
-                        </a:rPr>
-                        <a:t>none</a:t>
-                      </a:r>
-                    </a:p>
-                  </a:txBody>
-                  <a:tcPr marL="54864" marR="54864" marT="18288" marB="18288">
-                    <a:solidFill>
-                      <a:srgbClr val="ECF1F6"/>
+                        <a:t>zwfs_run('MODEL',2048, 'NGRID',385, 'param_file','macos_param_2048.txt')</a:t>
+                      </a:r>
+                    </a:p>
+                  </a:txBody>
+                  <a:tcPr marL="54864" marR="54864" marT="18288" marB="18288">
+                    <a:solidFill>
+                      <a:srgbClr val="FFFFFF"/>
+                    </a:solidFill>
+                  </a:tcPr>
+                </a:tc>
+                <a:tc>
+                  <a:txBody>
+                    <a:bodyPr wrap="square"/>
+                    <a:lstStyle/>
+                    <a:p>
+                      <a:r>
+                        <a:rPr sz="1100" b="0">
+                          <a:solidFill>
+                            <a:srgbClr val="282828"/>
+                          </a:solidFill>
+                          <a:latin typeface="Arial"/>
+                        </a:rPr>
+                        <a:t>the fully sampled setup on a 30 GB machine</a:t>
+                      </a:r>
+                    </a:p>
+                  </a:txBody>
+                  <a:tcPr marL="54864" marR="54864" marT="18288" marB="18288">
+                    <a:solidFill>
+                      <a:srgbClr val="FFFFFF"/>
                     </a:solidFill>
                   </a:tcPr>
                 </a:tc>
@@ -6733,75 +6842,7 @@
                           </a:solidFill>
                           <a:latin typeface="Arial"/>
                         </a:rPr>
-                        <a:t>null, nothing aligned</a:t>
-                      </a:r>
-                    </a:p>
-                  </a:txBody>
-                  <a:tcPr marL="54864" marR="54864" marT="18288" marB="18288">
-                    <a:solidFill>
-                      <a:srgbClr val="FFFFFF"/>
-                    </a:solidFill>
-                  </a:tcPr>
-                </a:tc>
-                <a:tc>
-                  <a:txBody>
-                    <a:bodyPr wrap="square"/>
-                    <a:lstStyle/>
-                    <a:p>
-                      <a:r>
-                        <a:rPr sz="1100" b="0">
-                          <a:solidFill>
-                            <a:srgbClr val="282828"/>
-                          </a:solidFill>
-                          <a:latin typeface="Arial"/>
-                        </a:rPr>
-                        <a:t>0.134 nm</a:t>
-                      </a:r>
-                    </a:p>
-                  </a:txBody>
-                  <a:tcPr marL="54864" marR="54864" marT="18288" marB="18288">
-                    <a:solidFill>
-                      <a:srgbClr val="FFFFFF"/>
-                    </a:solidFill>
-                  </a:tcPr>
-                </a:tc>
-                <a:tc>
-                  <a:txBody>
-                    <a:bodyPr wrap="square"/>
-                    <a:lstStyle/>
-                    <a:p>
-                      <a:r>
-                        <a:rPr sz="1100" b="0">
-                          <a:solidFill>
-                            <a:srgbClr val="282828"/>
-                          </a:solidFill>
-                          <a:latin typeface="Arial"/>
-                        </a:rPr>
-                        <a:t>0 by construction (the flat is the reference)</a:t>
-                      </a:r>
-                    </a:p>
-                  </a:txBody>
-                  <a:tcPr marL="54864" marR="54864" marT="18288" marB="18288">
-                    <a:solidFill>
-                      <a:srgbClr val="FFFFFF"/>
-                    </a:solidFill>
-                  </a:tcPr>
-                </a:tc>
-              </a:tr>
-              <a:tr h="468630">
-                <a:tc>
-                  <a:txBody>
-                    <a:bodyPr wrap="square"/>
-                    <a:lstStyle/>
-                    <a:p>
-                      <a:r>
-                        <a:rPr sz="1100" b="0">
-                          <a:solidFill>
-                            <a:srgbClr val="282828"/>
-                          </a:solidFill>
-                          <a:latin typeface="Arial"/>
-                        </a:rPr>
-                        <a:t>response falls off at</a:t>
+                        <a:t>zwfs_run('stages',{'battery','color','noise','figs'})</a:t>
                       </a:r>
                     </a:p>
                   </a:txBody>
@@ -6823,29 +6864,7 @@
                           </a:solidFill>
                           <a:latin typeface="Arial"/>
                         </a:rPr>
-                        <a:t>fine patterns: 0.50 at the 96×96 checkerboard</a:t>
-                      </a:r>
-                    </a:p>
-                  </a:txBody>
-                  <a:tcPr marL="54864" marR="54864" marT="18288" marB="18288">
-                    <a:solidFill>
-                      <a:srgbClr val="ECF1F6"/>
-                    </a:solidFill>
-                  </a:tcPr>
-                </a:tc>
-                <a:tc>
-                  <a:txBody>
-                    <a:bodyPr wrap="square"/>
-                    <a:lstStyle/>
-                    <a:p>
-                      <a:r>
-                        <a:rPr sz="1100" b="0">
-                          <a:solidFill>
-                            <a:srgbClr val="282828"/>
-                          </a:solidFill>
-                          <a:latin typeface="Arial"/>
-                        </a:rPr>
-                        <a:t>0.5 to 1 cycle across the pupil (0.5 at 1); piston unseen</a:t>
+                        <a:t>everything on this deck's later slides</a:t>
                       </a:r>
                     </a:p>
                   </a:txBody>
@@ -6869,7 +6888,7 @@
                           </a:solidFill>
                           <a:latin typeface="Arial"/>
                         </a:rPr>
-                        <a:t>working surface it can handle</a:t>
+                        <a:t>./zwfs_batch.sh TAG "the same arguments"</a:t>
                       </a:r>
                     </a:p>
                   </a:txBody>
@@ -6891,165 +6910,7 @@
                           </a:solidFill>
                           <a:latin typeface="Arial"/>
                         </a:rPr>
-                        <a:t>480 nm rms and beyond</a:t>
-                      </a:r>
-                    </a:p>
-                  </a:txBody>
-                  <a:tcPr marL="54864" marR="54864" marT="18288" marB="18288">
-                    <a:solidFill>
-                      <a:srgbClr val="FFFFFF"/>
-                    </a:solidFill>
-                  </a:tcPr>
-                </a:tc>
-                <a:tc>
-                  <a:txBody>
-                    <a:bodyPr wrap="square"/>
-                    <a:lstStyle/>
-                    <a:p>
-                      <a:r>
-                        <a:rPr sz="1100" b="0">
-                          <a:solidFill>
-                            <a:srgbClr val="282828"/>
-                          </a:solidFill>
-                          <a:latin typeface="Arial"/>
-                        </a:rPr>
-                        <a:t>40 nm rms one-frame (1 mm actuators), 50–60 nm four-frame</a:t>
-                      </a:r>
-                    </a:p>
-                  </a:txBody>
-                  <a:tcPr marL="54864" marR="54864" marT="18288" marB="18288">
-                    <a:solidFill>
-                      <a:srgbClr val="FFFFFF"/>
-                    </a:solidFill>
-                  </a:tcPr>
-                </a:tc>
-              </a:tr>
-              <a:tr h="468630">
-                <a:tc>
-                  <a:txBody>
-                    <a:bodyPr wrap="square"/>
-                    <a:lstStyle/>
-                    <a:p>
-                      <a:r>
-                        <a:rPr sz="1100" b="0">
-                          <a:solidFill>
-                            <a:srgbClr val="282828"/>
-                          </a:solidFill>
-                          <a:latin typeface="Arial"/>
-                        </a:rPr>
-                        <a:t>a 10 nm actuator change on a 30 nm surface</a:t>
-                      </a:r>
-                    </a:p>
-                  </a:txBody>
-                  <a:tcPr marL="54864" marR="54864" marT="18288" marB="18288">
-                    <a:solidFill>
-                      <a:srgbClr val="ECF1F6"/>
-                    </a:solidFill>
-                  </a:tcPr>
-                </a:tc>
-                <a:tc>
-                  <a:txBody>
-                    <a:bodyPr wrap="square"/>
-                    <a:lstStyle/>
-                    <a:p>
-                      <a:r>
-                        <a:rPr sz="1100" b="0">
-                          <a:solidFill>
-                            <a:srgbClr val="282828"/>
-                          </a:solidFill>
-                          <a:latin typeface="Arial"/>
-                        </a:rPr>
-                        <a:t>gain 0.92, floor 46 pm</a:t>
-                      </a:r>
-                    </a:p>
-                  </a:txBody>
-                  <a:tcPr marL="54864" marR="54864" marT="18288" marB="18288">
-                    <a:solidFill>
-                      <a:srgbClr val="ECF1F6"/>
-                    </a:solidFill>
-                  </a:tcPr>
-                </a:tc>
-                <a:tc>
-                  <a:txBody>
-                    <a:bodyPr wrap="square"/>
-                    <a:lstStyle/>
-                    <a:p>
-                      <a:r>
-                        <a:rPr sz="1100" b="0">
-                          <a:solidFill>
-                            <a:srgbClr val="282828"/>
-                          </a:solidFill>
-                          <a:latin typeface="Arial"/>
-                        </a:rPr>
-                        <a:t>gain 0.99, floor 5 pm (stepped, four frames; matrix on the surface) — gain 1.05, floor 23 pm (linear, one frame)</a:t>
-                      </a:r>
-                    </a:p>
-                  </a:txBody>
-                  <a:tcPr marL="54864" marR="54864" marT="18288" marB="18288">
-                    <a:solidFill>
-                      <a:srgbClr val="ECF1F6"/>
-                    </a:solidFill>
-                  </a:tcPr>
-                </a:tc>
-              </a:tr>
-              <a:tr h="280035">
-                <a:tc>
-                  <a:txBody>
-                    <a:bodyPr wrap="square"/>
-                    <a:lstStyle/>
-                    <a:p>
-                      <a:r>
-                        <a:rPr sz="1100" b="0">
-                          <a:solidFill>
-                            <a:srgbClr val="282828"/>
-                          </a:solidFill>
-                          <a:latin typeface="Arial"/>
-                        </a:rPr>
-                        <a:t>photons per state for 1 pm</a:t>
-                      </a:r>
-                    </a:p>
-                  </a:txBody>
-                  <a:tcPr marL="54864" marR="54864" marT="18288" marB="18288">
-                    <a:solidFill>
-                      <a:srgbClr val="FFFFFF"/>
-                    </a:solidFill>
-                  </a:tcPr>
-                </a:tc>
-                <a:tc>
-                  <a:txBody>
-                    <a:bodyPr wrap="square"/>
-                    <a:lstStyle/>
-                    <a:p>
-                      <a:r>
-                        <a:rPr sz="1100" b="0">
-                          <a:solidFill>
-                            <a:srgbClr val="282828"/>
-                          </a:solidFill>
-                          <a:latin typeface="Arial"/>
-                        </a:rPr>
-                        <a:t>8×10¹⁴</a:t>
-                      </a:r>
-                    </a:p>
-                  </a:txBody>
-                  <a:tcPr marL="54864" marR="54864" marT="18288" marB="18288">
-                    <a:solidFill>
-                      <a:srgbClr val="FFFFFF"/>
-                    </a:solidFill>
-                  </a:tcPr>
-                </a:tc>
-                <a:tc>
-                  <a:txBody>
-                    <a:bodyPr wrap="square"/>
-                    <a:lstStyle/>
-                    <a:p>
-                      <a:r>
-                        <a:rPr sz="1100" b="0">
-                          <a:solidFill>
-                            <a:srgbClr val="282828"/>
-                          </a:solidFill>
-                          <a:latin typeface="Arial"/>
-                        </a:rPr>
-                        <a:t>0.4 to 1×10¹⁴</a:t>
+                        <a:t>unattended, memory-capped, logged</a:t>
                       </a:r>
                     </a:p>
                   </a:txBody>
@@ -7066,13 +6927,13 @@
       </p:graphicFrame>
       <p:sp>
         <p:nvSpPr>
-          <p:cNvPr id="5" name="TextBox 4"/>
+          <p:cNvPr id="6" name="TextBox 5"/>
           <p:cNvSpPr txBox="1"/>
           <p:nvPr/>
         </p:nvSpPr>
         <p:spPr>
           <a:xfrm>
-            <a:off x="411480" y="4810887"/>
+            <a:off x="411480" y="4292346"/>
             <a:ext cx="11368735" cy="274320"/>
           </a:xfrm>
           <a:prstGeom prst="rect">
@@ -7098,20 +6959,20 @@
                 </a:solidFill>
                 <a:latin typeface="Arial"/>
               </a:rPr>
-              <a:t>•  Reading: the interferometer measures any surface and pays at fine patterns; the sensor measures small changes on a small working surface more cheaply — no polarization train, a floor ten times lower once its response matrix is measured on that surface — and pays at the lowest spatial frequencies and in the surface it can handle.</a:t>
-            </a:r>
-          </a:p>
-        </p:txBody>
-      </p:sp>
-      <p:sp>
-        <p:nvSpPr>
-          <p:cNvPr id="6" name="TextBox 5"/>
+              <a:t>•  Checks that run every time: the no-mask round trip through the bracket (must return the field unchanged); the reference-wave model against the engine's own field; the pupil brightness must not change with the DM shape; the sampling checks (pixels across the dimple, camera pixels per actuator); and the search for the camera-to-DM mirror/transpose and sign.</a:t>
+            </a:r>
+          </a:p>
+        </p:txBody>
+      </p:sp>
+      <p:sp>
+        <p:nvSpPr>
+          <p:cNvPr id="7" name="TextBox 6"/>
           <p:cNvSpPr txBox="1"/>
           <p:nvPr/>
         </p:nvSpPr>
         <p:spPr>
           <a:xfrm>
-            <a:off x="411480" y="5730621"/>
+            <a:off x="411480" y="5459730"/>
             <a:ext cx="11368735" cy="274320"/>
           </a:xfrm>
           <a:prstGeom prst="rect">
@@ -7137,7 +6998,7 @@
                 </a:solidFill>
                 <a:latin typeface="Arial"/>
               </a:rPr>
-              <a:t>PSI column: tg_psi_dm96 run 10 and S4/S5; sensor column: 385 rays, matrix calibration on the working surface (slide 10), photons at development sampling.  Both in actuator units through the same code (dm_gauge_lib).</a:t>
+              <a:t>Reproduction check: 64 lines of results against the stage-7 report, 8 differ in the last printed digit (the actuator fit's solver tolerance).  README "Run it yourself" carries the parameter table.</a:t>
             </a:r>
           </a:p>
         </p:txBody>
@@ -7194,7 +7055,7 @@
                 </a:solidFill>
                 <a:latin typeface="Arial"/>
               </a:rPr>
-              <a:t>What the Zernike-sensor literature offers, in priority order</a:t>
+              <a:t>Side by side with the Twyman–Green</a:t>
             </a:r>
           </a:p>
           <a:p>
@@ -7210,7 +7071,7 @@
                 </a:solidFill>
                 <a:latin typeface="Arial"/>
               </a:rPr>
-              <a:t>Twelve papers read; the first import — re-computing the reference wave — is now built and measured (slide 8)</a:t>
+              <a:t>The interferometer loses response at fine patterns and never fails; the sensor, calibrated on its working surface, reads a change to 5 pm up to 50–60 nm</a:t>
             </a:r>
           </a:p>
         </p:txBody>
@@ -7269,7 +7130,7 @@
         </p:nvGraphicFramePr>
         <p:xfrm>
           <a:off x="411480" y="1298448"/>
-          <a:ext cx="11368734" cy="3091815"/>
+          <a:ext cx="11368733" cy="4023360"/>
         </p:xfrm>
         <a:graphic>
           <a:graphicData uri="http://schemas.openxmlformats.org/drawingml/2006/table">
@@ -7278,15 +7139,27 @@
                 <a:tableStyleId>{5C22544A-7EE6-4342-B048-85BDC9FD1C3A}</a:tableStyleId>
               </a:tblPr>
               <a:tblGrid>
-                <a:gridCol w="218948"/>
-                <a:gridCol w="2691327"/>
-                <a:gridCol w="8458459"/>
+                <a:gridCol w="3608337"/>
+                <a:gridCol w="2224317"/>
+                <a:gridCol w="5536079"/>
               </a:tblGrid>
               <a:tr h="280035">
                 <a:tc>
                   <a:txBody>
                     <a:bodyPr wrap="square"/>
                     <a:lstStyle/>
+                    <a:p/>
+                  </a:txBody>
+                  <a:tcPr marL="54864" marR="54864" marT="18288" marB="18288">
+                    <a:solidFill>
+                      <a:srgbClr val="1F4E79"/>
+                    </a:solidFill>
+                  </a:tcPr>
+                </a:tc>
+                <a:tc>
+                  <a:txBody>
+                    <a:bodyPr wrap="square"/>
+                    <a:lstStyle/>
                     <a:p>
                       <a:r>
                         <a:rPr sz="1100" b="1">
@@ -7295,7 +7168,7 @@
                           </a:solidFill>
                           <a:latin typeface="Arial"/>
                         </a:rPr>
-                        <a:t>#</a:t>
+                        <a:t>Twyman–Green PSI (measured)</a:t>
                       </a:r>
                     </a:p>
                   </a:txBody>
@@ -7317,7 +7190,7 @@
                           </a:solidFill>
                           <a:latin typeface="Arial"/>
                         </a:rPr>
-                        <a:t>paper</a:t>
+                        <a:t>Zernike sensor (measured)</a:t>
                       </a:r>
                     </a:p>
                   </a:txBody>
@@ -7327,25 +7200,71 @@
                     </a:solidFill>
                   </a:tcPr>
                 </a:tc>
-                <a:tc>
-                  <a:txBody>
-                    <a:bodyPr wrap="square"/>
-                    <a:lstStyle/>
-                    <a:p>
-                      <a:r>
-                        <a:rPr sz="1100" b="1">
-                          <a:solidFill>
-                            <a:srgbClr val="FFFFFF"/>
-                          </a:solidFill>
-                          <a:latin typeface="Arial"/>
-                        </a:rPr>
-                        <a:t>what it gives this model</a:t>
-                      </a:r>
-                    </a:p>
-                  </a:txBody>
-                  <a:tcPr marL="54864" marR="54864" marT="18288" marB="18288">
-                    <a:solidFill>
-                      <a:srgbClr val="1F4E79"/>
+              </a:tr>
+              <a:tr h="280035">
+                <a:tc>
+                  <a:txBody>
+                    <a:bodyPr wrap="square"/>
+                    <a:lstStyle/>
+                    <a:p>
+                      <a:r>
+                        <a:rPr sz="1100" b="0">
+                          <a:solidFill>
+                            <a:srgbClr val="282828"/>
+                          </a:solidFill>
+                          <a:latin typeface="Arial"/>
+                        </a:rPr>
+                        <a:t>reference beam</a:t>
+                      </a:r>
+                    </a:p>
+                  </a:txBody>
+                  <a:tcPr marL="54864" marR="54864" marT="18288" marB="18288">
+                    <a:solidFill>
+                      <a:srgbClr val="FFFFFF"/>
+                    </a:solidFill>
+                  </a:tcPr>
+                </a:tc>
+                <a:tc>
+                  <a:txBody>
+                    <a:bodyPr wrap="square"/>
+                    <a:lstStyle/>
+                    <a:p>
+                      <a:r>
+                        <a:rPr sz="1100" b="0">
+                          <a:solidFill>
+                            <a:srgbClr val="282828"/>
+                          </a:solidFill>
+                          <a:latin typeface="Arial"/>
+                        </a:rPr>
+                        <a:t>the second arm's flat</a:t>
+                      </a:r>
+                    </a:p>
+                  </a:txBody>
+                  <a:tcPr marL="54864" marR="54864" marT="18288" marB="18288">
+                    <a:solidFill>
+                      <a:srgbClr val="FFFFFF"/>
+                    </a:solidFill>
+                  </a:tcPr>
+                </a:tc>
+                <a:tc>
+                  <a:txBody>
+                    <a:bodyPr wrap="square"/>
+                    <a:lstStyle/>
+                    <a:p>
+                      <a:r>
+                        <a:rPr sz="1100" b="0">
+                          <a:solidFill>
+                            <a:srgbClr val="282828"/>
+                          </a:solidFill>
+                          <a:latin typeface="Arial"/>
+                        </a:rPr>
+                        <a:t>made from the beam's own focal core</a:t>
+                      </a:r>
+                    </a:p>
+                  </a:txBody>
+                  <a:tcPr marL="54864" marR="54864" marT="18288" marB="18288">
+                    <a:solidFill>
+                      <a:srgbClr val="FFFFFF"/>
                     </a:solidFill>
                   </a:tcPr>
                 </a:tc>
@@ -7363,57 +7282,57 @@
                           </a:solidFill>
                           <a:latin typeface="Arial"/>
                         </a:rPr>
-                        <a:t>1</a:t>
-                      </a:r>
-                    </a:p>
-                  </a:txBody>
-                  <a:tcPr marL="54864" marR="54864" marT="18288" marB="18288">
-                    <a:solidFill>
-                      <a:srgbClr val="FFFFFF"/>
-                    </a:solidFill>
-                  </a:tcPr>
-                </a:tc>
-                <a:tc>
-                  <a:txBody>
-                    <a:bodyPr wrap="square"/>
-                    <a:lstStyle/>
-                    <a:p>
-                      <a:r>
-                        <a:rPr sz="1100" b="0">
-                          <a:solidFill>
-                            <a:srgbClr val="282828"/>
-                          </a:solidFill>
-                          <a:latin typeface="Arial"/>
-                        </a:rPr>
-                        <a:t>Ruane, Wallace, Steeves et al. 2020, JATIS 6, 045005</a:t>
-                      </a:r>
-                    </a:p>
-                  </a:txBody>
-                  <a:tcPr marL="54864" marR="54864" marT="18288" marB="18288">
-                    <a:solidFill>
-                      <a:srgbClr val="FFFFFF"/>
-                    </a:solidFill>
-                  </a:tcPr>
-                </a:tc>
-                <a:tc>
-                  <a:txBody>
-                    <a:bodyPr wrap="square"/>
-                    <a:lstStyle/>
-                    <a:p>
-                      <a:r>
-                        <a:rPr sz="1100" b="0">
-                          <a:solidFill>
-                            <a:srgbClr val="282828"/>
-                          </a:solidFill>
-                          <a:latin typeface="Arial"/>
-                        </a:rPr>
-                        <a:t>Exact per-pixel reconstruction from the pupil amplitude, the reference wave b and the masked image; a sensitivity factor per pixel; a four-term systematic budget; 1 pm reached at 4.4×10⁵ frames; no loss to 25 % bandwidth</a:t>
-                      </a:r>
-                    </a:p>
-                  </a:txBody>
-                  <a:tcPr marL="54864" marR="54864" marT="18288" marB="18288">
-                    <a:solidFill>
-                      <a:srgbClr val="FFFFFF"/>
+                        <a:t>one measurement costs</a:t>
+                      </a:r>
+                    </a:p>
+                  </a:txBody>
+                  <a:tcPr marL="54864" marR="54864" marT="18288" marB="18288">
+                    <a:solidFill>
+                      <a:srgbClr val="ECF1F6"/>
+                    </a:solidFill>
+                  </a:tcPr>
+                </a:tc>
+                <a:tc>
+                  <a:txBody>
+                    <a:bodyPr wrap="square"/>
+                    <a:lstStyle/>
+                    <a:p>
+                      <a:r>
+                        <a:rPr sz="1100" b="0">
+                          <a:solidFill>
+                            <a:srgbClr val="282828"/>
+                          </a:solidFill>
+                          <a:latin typeface="Arial"/>
+                        </a:rPr>
+                        <a:t>6 traces (3 per arm), 4 fringe frames</a:t>
+                      </a:r>
+                    </a:p>
+                  </a:txBody>
+                  <a:tcPr marL="54864" marR="54864" marT="18288" marB="18288">
+                    <a:solidFill>
+                      <a:srgbClr val="ECF1F6"/>
+                    </a:solidFill>
+                  </a:tcPr>
+                </a:tc>
+                <a:tc>
+                  <a:txBody>
+                    <a:bodyPr wrap="square"/>
+                    <a:lstStyle/>
+                    <a:p>
+                      <a:r>
+                        <a:rPr sz="1100" b="0">
+                          <a:solidFill>
+                            <a:srgbClr val="282828"/>
+                          </a:solidFill>
+                          <a:latin typeface="Arial"/>
+                        </a:rPr>
+                        <a:t>1 or 4 camera frames; 256 calibration frames once per working surface</a:t>
+                      </a:r>
+                    </a:p>
+                  </a:txBody>
+                  <a:tcPr marL="54864" marR="54864" marT="18288" marB="18288">
+                    <a:solidFill>
+                      <a:srgbClr val="ECF1F6"/>
                     </a:solidFill>
                   </a:tcPr>
                 </a:tc>
@@ -7431,7 +7350,75 @@
                           </a:solidFill>
                           <a:latin typeface="Arial"/>
                         </a:rPr>
-                        <a:t>2</a:t>
+                        <a:t>polarization hardware</a:t>
+                      </a:r>
+                    </a:p>
+                  </a:txBody>
+                  <a:tcPr marL="54864" marR="54864" marT="18288" marB="18288">
+                    <a:solidFill>
+                      <a:srgbClr val="FFFFFF"/>
+                    </a:solidFill>
+                  </a:tcPr>
+                </a:tc>
+                <a:tc>
+                  <a:txBody>
+                    <a:bodyPr wrap="square"/>
+                    <a:lstStyle/>
+                    <a:p>
+                      <a:r>
+                        <a:rPr sz="1100" b="0">
+                          <a:solidFill>
+                            <a:srgbClr val="282828"/>
+                          </a:solidFill>
+                          <a:latin typeface="Arial"/>
+                        </a:rPr>
+                        <a:t>polarizer, 5 waveplates, analyzer</a:t>
+                      </a:r>
+                    </a:p>
+                  </a:txBody>
+                  <a:tcPr marL="54864" marR="54864" marT="18288" marB="18288">
+                    <a:solidFill>
+                      <a:srgbClr val="FFFFFF"/>
+                    </a:solidFill>
+                  </a:tcPr>
+                </a:tc>
+                <a:tc>
+                  <a:txBody>
+                    <a:bodyPr wrap="square"/>
+                    <a:lstStyle/>
+                    <a:p>
+                      <a:r>
+                        <a:rPr sz="1100" b="0">
+                          <a:solidFill>
+                            <a:srgbClr val="282828"/>
+                          </a:solidFill>
+                          <a:latin typeface="Arial"/>
+                        </a:rPr>
+                        <a:t>none</a:t>
+                      </a:r>
+                    </a:p>
+                  </a:txBody>
+                  <a:tcPr marL="54864" marR="54864" marT="18288" marB="18288">
+                    <a:solidFill>
+                      <a:srgbClr val="FFFFFF"/>
+                    </a:solidFill>
+                  </a:tcPr>
+                </a:tc>
+              </a:tr>
+              <a:tr h="280035">
+                <a:tc>
+                  <a:txBody>
+                    <a:bodyPr wrap="square"/>
+                    <a:lstStyle/>
+                    <a:p>
+                      <a:r>
+                        <a:rPr sz="1100" b="0">
+                          <a:solidFill>
+                            <a:srgbClr val="282828"/>
+                          </a:solidFill>
+                          <a:latin typeface="Arial"/>
+                        </a:rPr>
+                        <a:t>moving parts</a:t>
                       </a:r>
                     </a:p>
                   </a:txBody>
@@ -7453,7 +7440,7 @@
                           </a:solidFill>
                           <a:latin typeface="Arial"/>
                         </a:rPr>
-                        <a:t>Doelman, Fagginger Auer, Escuti, Snik 2019, Opt. Lett. 44, 17</a:t>
+                        <a:t>none (polarization-stepped)</a:t>
                       </a:r>
                     </a:p>
                   </a:txBody>
@@ -7475,13 +7462,81 @@
                           </a:solidFill>
                           <a:latin typeface="Arial"/>
                         </a:rPr>
-                        <a:t>Vector Zernike: ±π/2 on opposite circular polarizations gives two pupil images, an exact phase-and-amplitude solution, an iterated b, achromatic to 100 % bandwidth; the leakage terms are written down</a:t>
+                        <a:t>none</a:t>
                       </a:r>
                     </a:p>
                   </a:txBody>
                   <a:tcPr marL="54864" marR="54864" marT="18288" marB="18288">
                     <a:solidFill>
                       <a:srgbClr val="ECF1F6"/>
+                    </a:solidFill>
+                  </a:tcPr>
+                </a:tc>
+              </a:tr>
+              <a:tr h="280035">
+                <a:tc>
+                  <a:txBody>
+                    <a:bodyPr wrap="square"/>
+                    <a:lstStyle/>
+                    <a:p>
+                      <a:r>
+                        <a:rPr sz="1100" b="0">
+                          <a:solidFill>
+                            <a:srgbClr val="282828"/>
+                          </a:solidFill>
+                          <a:latin typeface="Arial"/>
+                        </a:rPr>
+                        <a:t>null, nothing aligned</a:t>
+                      </a:r>
+                    </a:p>
+                  </a:txBody>
+                  <a:tcPr marL="54864" marR="54864" marT="18288" marB="18288">
+                    <a:solidFill>
+                      <a:srgbClr val="FFFFFF"/>
+                    </a:solidFill>
+                  </a:tcPr>
+                </a:tc>
+                <a:tc>
+                  <a:txBody>
+                    <a:bodyPr wrap="square"/>
+                    <a:lstStyle/>
+                    <a:p>
+                      <a:r>
+                        <a:rPr sz="1100" b="0">
+                          <a:solidFill>
+                            <a:srgbClr val="282828"/>
+                          </a:solidFill>
+                          <a:latin typeface="Arial"/>
+                        </a:rPr>
+                        <a:t>0.134 nm</a:t>
+                      </a:r>
+                    </a:p>
+                  </a:txBody>
+                  <a:tcPr marL="54864" marR="54864" marT="18288" marB="18288">
+                    <a:solidFill>
+                      <a:srgbClr val="FFFFFF"/>
+                    </a:solidFill>
+                  </a:tcPr>
+                </a:tc>
+                <a:tc>
+                  <a:txBody>
+                    <a:bodyPr wrap="square"/>
+                    <a:lstStyle/>
+                    <a:p>
+                      <a:r>
+                        <a:rPr sz="1100" b="0">
+                          <a:solidFill>
+                            <a:srgbClr val="282828"/>
+                          </a:solidFill>
+                          <a:latin typeface="Arial"/>
+                        </a:rPr>
+                        <a:t>0 by construction (the flat is the reference)</a:t>
+                      </a:r>
+                    </a:p>
+                  </a:txBody>
+                  <a:tcPr marL="54864" marR="54864" marT="18288" marB="18288">
+                    <a:solidFill>
+                      <a:srgbClr val="FFFFFF"/>
                     </a:solidFill>
                   </a:tcPr>
                 </a:tc>
@@ -7499,7 +7554,75 @@
                           </a:solidFill>
                           <a:latin typeface="Arial"/>
                         </a:rPr>
-                        <a:t>3</a:t>
+                        <a:t>response falls off at</a:t>
+                      </a:r>
+                    </a:p>
+                  </a:txBody>
+                  <a:tcPr marL="54864" marR="54864" marT="18288" marB="18288">
+                    <a:solidFill>
+                      <a:srgbClr val="ECF1F6"/>
+                    </a:solidFill>
+                  </a:tcPr>
+                </a:tc>
+                <a:tc>
+                  <a:txBody>
+                    <a:bodyPr wrap="square"/>
+                    <a:lstStyle/>
+                    <a:p>
+                      <a:r>
+                        <a:rPr sz="1100" b="0">
+                          <a:solidFill>
+                            <a:srgbClr val="282828"/>
+                          </a:solidFill>
+                          <a:latin typeface="Arial"/>
+                        </a:rPr>
+                        <a:t>fine patterns: 0.50 at the 96×96 checkerboard</a:t>
+                      </a:r>
+                    </a:p>
+                  </a:txBody>
+                  <a:tcPr marL="54864" marR="54864" marT="18288" marB="18288">
+                    <a:solidFill>
+                      <a:srgbClr val="ECF1F6"/>
+                    </a:solidFill>
+                  </a:tcPr>
+                </a:tc>
+                <a:tc>
+                  <a:txBody>
+                    <a:bodyPr wrap="square"/>
+                    <a:lstStyle/>
+                    <a:p>
+                      <a:r>
+                        <a:rPr sz="1100" b="0">
+                          <a:solidFill>
+                            <a:srgbClr val="282828"/>
+                          </a:solidFill>
+                          <a:latin typeface="Arial"/>
+                        </a:rPr>
+                        <a:t>0.5 to 1 cycle across the pupil (0.5 at 1); piston unseen</a:t>
+                      </a:r>
+                    </a:p>
+                  </a:txBody>
+                  <a:tcPr marL="54864" marR="54864" marT="18288" marB="18288">
+                    <a:solidFill>
+                      <a:srgbClr val="ECF1F6"/>
+                    </a:solidFill>
+                  </a:tcPr>
+                </a:tc>
+              </a:tr>
+              <a:tr h="280035">
+                <a:tc>
+                  <a:txBody>
+                    <a:bodyPr wrap="square"/>
+                    <a:lstStyle/>
+                    <a:p>
+                      <a:r>
+                        <a:rPr sz="1100" b="0">
+                          <a:solidFill>
+                            <a:srgbClr val="282828"/>
+                          </a:solidFill>
+                          <a:latin typeface="Arial"/>
+                        </a:rPr>
+                        <a:t>working surface it can handle</a:t>
                       </a:r>
                     </a:p>
                   </a:txBody>
@@ -7521,7 +7644,7 @@
                           </a:solidFill>
                           <a:latin typeface="Arial"/>
                         </a:rPr>
-                        <a:t>N'Diaye, Vigan, Dohlen et al. 2016, A&amp;A 592, A79 (ZELDA II)</a:t>
+                        <a:t>480 nm rms and beyond</a:t>
                       </a:r>
                     </a:p>
                   </a:txBody>
@@ -7543,7 +7666,7 @@
                           </a:solidFill>
                           <a:latin typeface="Arial"/>
                         </a:rPr>
-                        <a:t>Second-order reconstruction with b from the mask model; 1.06 λ/D at π/2; range −0.14 to +0.36 λ; the sensitivity factor drifts 10 % day to day on SPHERE</a:t>
+                        <a:t>40 nm rms one-frame (1 mm actuators), 50–60 nm four-frame</a:t>
                       </a:r>
                     </a:p>
                   </a:txBody>
@@ -7567,7 +7690,7 @@
                           </a:solidFill>
                           <a:latin typeface="Arial"/>
                         </a:rPr>
-                        <a:t>4</a:t>
+                        <a:t>a 10 nm actuator change on a 30 nm surface</a:t>
                       </a:r>
                     </a:p>
                   </a:txBody>
@@ -7589,7 +7712,7 @@
                           </a:solidFill>
                           <a:latin typeface="Arial"/>
                         </a:rPr>
-                        <a:t>Chambouleyron, Cissé, Salama, Haffert, Wallace et al. 2024, SPIE 13097</a:t>
+                        <a:t>gain 0.92, floor 46 pm</a:t>
                       </a:r>
                     </a:p>
                   </a:txBody>
@@ -7611,13 +7734,81 @@
                           </a:solidFill>
                           <a:latin typeface="Arial"/>
                         </a:rPr>
-                        <a:t>A phase-shifted pair (±π/2) yields cos φ and sin φ; iterative reconstructors reach about 1 rad rms; the bench limits were polarization crosstalk and defocus between the two pupils</a:t>
+                        <a:t>gain 0.99, floor 5 pm (stepped, four frames; matrix on the surface) — gain 1.05, floor 23 pm (linear, one frame)</a:t>
                       </a:r>
                     </a:p>
                   </a:txBody>
                   <a:tcPr marL="54864" marR="54864" marT="18288" marB="18288">
                     <a:solidFill>
                       <a:srgbClr val="ECF1F6"/>
+                    </a:solidFill>
+                  </a:tcPr>
+                </a:tc>
+              </a:tr>
+              <a:tr h="280035">
+                <a:tc>
+                  <a:txBody>
+                    <a:bodyPr wrap="square"/>
+                    <a:lstStyle/>
+                    <a:p>
+                      <a:r>
+                        <a:rPr sz="1100" b="0">
+                          <a:solidFill>
+                            <a:srgbClr val="282828"/>
+                          </a:solidFill>
+                          <a:latin typeface="Arial"/>
+                        </a:rPr>
+                        <a:t>photons per state for 1 pm</a:t>
+                      </a:r>
+                    </a:p>
+                  </a:txBody>
+                  <a:tcPr marL="54864" marR="54864" marT="18288" marB="18288">
+                    <a:solidFill>
+                      <a:srgbClr val="FFFFFF"/>
+                    </a:solidFill>
+                  </a:tcPr>
+                </a:tc>
+                <a:tc>
+                  <a:txBody>
+                    <a:bodyPr wrap="square"/>
+                    <a:lstStyle/>
+                    <a:p>
+                      <a:r>
+                        <a:rPr sz="1100" b="0">
+                          <a:solidFill>
+                            <a:srgbClr val="282828"/>
+                          </a:solidFill>
+                          <a:latin typeface="Arial"/>
+                        </a:rPr>
+                        <a:t>8×10¹⁴</a:t>
+                      </a:r>
+                    </a:p>
+                  </a:txBody>
+                  <a:tcPr marL="54864" marR="54864" marT="18288" marB="18288">
+                    <a:solidFill>
+                      <a:srgbClr val="FFFFFF"/>
+                    </a:solidFill>
+                  </a:tcPr>
+                </a:tc>
+                <a:tc>
+                  <a:txBody>
+                    <a:bodyPr wrap="square"/>
+                    <a:lstStyle/>
+                    <a:p>
+                      <a:r>
+                        <a:rPr sz="1100" b="0">
+                          <a:solidFill>
+                            <a:srgbClr val="282828"/>
+                          </a:solidFill>
+                          <a:latin typeface="Arial"/>
+                        </a:rPr>
+                        <a:t>0.4 to 1×10¹⁴</a:t>
+                      </a:r>
+                    </a:p>
+                  </a:txBody>
+                  <a:tcPr marL="54864" marR="54864" marT="18288" marB="18288">
+                    <a:solidFill>
+                      <a:srgbClr val="FFFFFF"/>
                     </a:solidFill>
                   </a:tcPr>
                 </a:tc>
@@ -7635,75 +7826,7 @@
                           </a:solidFill>
                           <a:latin typeface="Arial"/>
                         </a:rPr>
-                        <a:t>5</a:t>
-                      </a:r>
-                    </a:p>
-                  </a:txBody>
-                  <a:tcPr marL="54864" marR="54864" marT="18288" marB="18288">
-                    <a:solidFill>
-                      <a:srgbClr val="FFFFFF"/>
-                    </a:solidFill>
-                  </a:tcPr>
-                </a:tc>
-                <a:tc>
-                  <a:txBody>
-                    <a:bodyPr wrap="square"/>
-                    <a:lstStyle/>
-                    <a:p>
-                      <a:r>
-                        <a:rPr sz="1100" b="0">
-                          <a:solidFill>
-                            <a:srgbClr val="282828"/>
-                          </a:solidFill>
-                          <a:latin typeface="Arial"/>
-                        </a:rPr>
-                        <a:t>Haffert 2024, A&amp;A 683, A113</a:t>
-                      </a:r>
-                    </a:p>
-                  </a:txBody>
-                  <a:tcPr marL="54864" marR="54864" marT="18288" marB="18288">
-                    <a:solidFill>
-                      <a:srgbClr val="FFFFFF"/>
-                    </a:solidFill>
-                  </a:tcPr>
-                </a:tc>
-                <a:tc>
-                  <a:txBody>
-                    <a:bodyPr wrap="square"/>
-                    <a:lstStyle/>
-                    <a:p>
-                      <a:r>
-                        <a:rPr sz="1100" b="0">
-                          <a:solidFill>
-                            <a:srgbClr val="282828"/>
-                          </a:solidFill>
-                          <a:latin typeface="Arial"/>
-                        </a:rPr>
-                        <a:t>Iterative nonlinear reconstructors reach machine precision below 0.25 rad rms; phase sorting extends to 0.75 rad; adding wavelengths to 1.4 rad rms</a:t>
-                      </a:r>
-                    </a:p>
-                  </a:txBody>
-                  <a:tcPr marL="54864" marR="54864" marT="18288" marB="18288">
-                    <a:solidFill>
-                      <a:srgbClr val="FFFFFF"/>
-                    </a:solidFill>
-                  </a:tcPr>
-                </a:tc>
-              </a:tr>
-              <a:tr h="468630">
-                <a:tc>
-                  <a:txBody>
-                    <a:bodyPr wrap="square"/>
-                    <a:lstStyle/>
-                    <a:p>
-                      <a:r>
-                        <a:rPr sz="1100" b="0">
-                          <a:solidFill>
-                            <a:srgbClr val="282828"/>
-                          </a:solidFill>
-                          <a:latin typeface="Arial"/>
-                        </a:rPr>
-                        <a:t>6</a:t>
+                        <a:t>held in closed loop to 3 pm against a 2 pm random walk: photons per cycle</a:t>
                       </a:r>
                     </a:p>
                   </a:txBody>
@@ -7725,7 +7848,7 @@
                           </a:solidFill>
                           <a:latin typeface="Arial"/>
                         </a:rPr>
-                        <a:t>Darcis, Haffert, Chambouleyron, Doelman et al. 2025, A&amp;A</a:t>
+                        <a:t>pending (same loop code, CCMac)</a:t>
                       </a:r>
                     </a:p>
                   </a:txBody>
@@ -7747,7 +7870,7 @@
                           </a:solidFill>
                           <a:latin typeface="Arial"/>
                         </a:rPr>
-                        <a:t>Multi-wavelength gradient descent through the forward model: dynamic range for the scalar sensor, photon robustness across a wider band, two-wavelength unwrapping of petal errors</a:t>
+                        <a:t>7.5×10¹² (stepped), 7.3×10¹² (linear)</a:t>
                       </a:r>
                     </a:p>
                   </a:txBody>
@@ -7770,7 +7893,7 @@
         </p:nvSpPr>
         <p:spPr>
           <a:xfrm>
-            <a:off x="411480" y="4536567"/>
+            <a:off x="411480" y="5468112"/>
             <a:ext cx="11368735" cy="274320"/>
           </a:xfrm>
           <a:prstGeom prst="rect">
@@ -7790,13 +7913,52 @@
               </a:spcAft>
             </a:pPr>
             <a:r>
-              <a:rPr sz="1050" b="0">
-                <a:solidFill>
-                  <a:srgbClr val="6E6E6E"/>
+              <a:rPr sz="1500" b="0">
+                <a:solidFill>
+                  <a:srgbClr val="282828"/>
                 </a:solidFill>
                 <a:latin typeface="Arial"/>
               </a:rPr>
-              <a:t>Priority = payoff against this campaign's measured weak results.  Synopses and links: macos/REPORT_zwfs_lit_scan.md.</a:t>
+              <a:t>•  Reading: the interferometer measures any surface and pays at fine patterns; the sensor measures small changes on a small working surface more cheaply — no polarization train, a floor ten times lower once its response matrix is measured on that surface — and pays at the lowest spatial frequencies and in the surface it can handle.</a:t>
+            </a:r>
+          </a:p>
+        </p:txBody>
+      </p:sp>
+      <p:sp>
+        <p:nvSpPr>
+          <p:cNvPr id="6" name="TextBox 5"/>
+          <p:cNvSpPr txBox="1"/>
+          <p:nvPr/>
+        </p:nvSpPr>
+        <p:spPr>
+          <a:xfrm>
+            <a:off x="411480" y="6387846"/>
+            <a:ext cx="11368735" cy="274320"/>
+          </a:xfrm>
+          <a:prstGeom prst="rect">
+            <a:avLst/>
+          </a:prstGeom>
+          <a:noFill/>
+        </p:spPr>
+        <p:txBody>
+          <a:bodyPr wrap="square">
+            <a:spAutoFit/>
+          </a:bodyPr>
+          <a:lstStyle/>
+          <a:p>
+            <a:pPr>
+              <a:spcAft>
+                <a:spcPts val="600"/>
+              </a:spcAft>
+            </a:pPr>
+            <a:r>
+              <a:rPr sz="1050" b="0">
+                <a:solidFill>
+                  <a:srgbClr val="6E6E6E"/>
+                </a:solidFill>
+                <a:latin typeface="Arial"/>
+              </a:rPr>
+              <a:t>PSI column: tg_psi_dm96 run 10 and S4/S5; sensor column: 385 rays, matrix calibration on the working surface (slide 10), photons at development sampling.  Both in actuator units through the same code (dm_gauge_lib).</a:t>
             </a:r>
           </a:p>
         </p:txBody>
@@ -7853,7 +8015,7 @@
                 </a:solidFill>
                 <a:latin typeface="Arial"/>
               </a:rPr>
-              <a:t>Demonstrations, segmented mirrors, and the in-house precedent</a:t>
+              <a:t>What the Zernike-sensor literature offers, in priority order</a:t>
             </a:r>
           </a:p>
           <a:p>
@@ -7869,7 +8031,7 @@
                 </a:solidFill>
                 <a:latin typeface="Arial"/>
               </a:rPr>
-              <a:t>Picometres by alternating DM shapes and averaging; segment piston by model iteration, underestimated below 50 % Strehl</a:t>
+              <a:t>Twelve papers read; the first import — re-computing the reference wave — is now built and measured (slide 8)</a:t>
             </a:r>
           </a:p>
         </p:txBody>
@@ -7937,9 +8099,9 @@
                 <a:tableStyleId>{5C22544A-7EE6-4342-B048-85BDC9FD1C3A}</a:tableStyleId>
               </a:tblPr>
               <a:tblGrid>
-                <a:gridCol w="291592"/>
-                <a:gridCol w="3730058"/>
-                <a:gridCol w="7347084"/>
+                <a:gridCol w="218948"/>
+                <a:gridCol w="2691327"/>
+                <a:gridCol w="8458459"/>
               </a:tblGrid>
               <a:tr h="280035">
                 <a:tc>
@@ -8022,7 +8184,7 @@
                           </a:solidFill>
                           <a:latin typeface="Arial"/>
                         </a:rPr>
-                        <a:t>7</a:t>
+                        <a:t>1</a:t>
                       </a:r>
                     </a:p>
                   </a:txBody>
@@ -8044,7 +8206,7 @@
                           </a:solidFill>
                           <a:latin typeface="Arial"/>
                         </a:rPr>
-                        <a:t>Steeves, Wallace, Kettenbeil, Jewell 2020, Optica 7, 1267</a:t>
+                        <a:t>Ruane, Wallace, Steeves et al. 2020, JATIS 6, 045005</a:t>
                       </a:r>
                     </a:p>
                   </a:txBody>
@@ -8066,7 +8228,7 @@
                           </a:solidFill>
                           <a:latin typeface="Arial"/>
                         </a:rPr>
-                        <a:t>1.6 pm repeatability in 4.3 s by alternating flat and waffle DM states and averaging the differences; a reconstruction robust at the highest spatial frequencies</a:t>
+                        <a:t>Exact per-pixel reconstruction from the pupil amplitude, the reference wave b and the masked image; a sensitivity factor per pixel; a four-term systematic budget; 1 pm reached at 4.4×10⁵ frames; no loss to 25 % bandwidth</a:t>
                       </a:r>
                     </a:p>
                   </a:txBody>
@@ -8090,7 +8252,7 @@
                           </a:solidFill>
                           <a:latin typeface="Arial"/>
                         </a:rPr>
-                        <a:t>8</a:t>
+                        <a:t>2</a:t>
                       </a:r>
                     </a:p>
                   </a:txBody>
@@ -8112,7 +8274,7 @@
                           </a:solidFill>
                           <a:latin typeface="Arial"/>
                         </a:rPr>
-                        <a:t>Wallace, Rao, Jensen-Clem, Serabyn 2011, SPIE 8126</a:t>
+                        <a:t>Doelman, Fagginger Auer, Escuti, Snik 2019, Opt. Lett. 44, 17</a:t>
                       </a:r>
                     </a:p>
                   </a:txBody>
@@ -8134,7 +8296,7 @@
                           </a:solidFill>
                           <a:latin typeface="Arial"/>
                         </a:rPr>
-                        <a:t>All-reflective phase-shifting Zernike interferometer: a dynamic, arbitrary core phase shift read in four steps gives phase and amplitude; low sensitivity to vibration, polarization and wavelength</a:t>
+                        <a:t>Vector Zernike: ±π/2 on opposite circular polarizations gives two pupil images, an exact phase-and-amplitude solution, an iterated b, achromatic to 100 % bandwidth; the leakage terms are written down</a:t>
                       </a:r>
                     </a:p>
                   </a:txBody>
@@ -8158,7 +8320,7 @@
                           </a:solidFill>
                           <a:latin typeface="Arial"/>
                         </a:rPr>
-                        <a:t>9</a:t>
+                        <a:t>3</a:t>
                       </a:r>
                     </a:p>
                   </a:txBody>
@@ -8180,7 +8342,7 @@
                           </a:solidFill>
                           <a:latin typeface="Arial"/>
                         </a:rPr>
-                        <a:t>Moore and Redding 2018, SPIE 10698</a:t>
+                        <a:t>N'Diaye, Vigan, Dohlen et al. 2016, A&amp;A 592, A79 (ZELDA II)</a:t>
                       </a:r>
                     </a:p>
                   </a:txBody>
@@ -8202,7 +8364,7 @@
                           </a:solidFill>
                           <a:latin typeface="Arial"/>
                         </a:rPr>
-                        <a:t>Nonlinear polychromatic physical-optics reconstruction for picometer differential metrology on LUVOIR; the in-house precedent for the reconstructor above</a:t>
+                        <a:t>Second-order reconstruction with b from the mask model; 1.06 λ/D at π/2; range −0.14 to +0.36 λ; the sensitivity factor drifts 10 % day to day on SPHERE</a:t>
                       </a:r>
                     </a:p>
                   </a:txBody>
@@ -8226,7 +8388,7 @@
                           </a:solidFill>
                           <a:latin typeface="Arial"/>
                         </a:rPr>
-                        <a:t>10</a:t>
+                        <a:t>4</a:t>
                       </a:r>
                     </a:p>
                   </a:txBody>
@@ -8248,7 +8410,7 @@
                           </a:solidFill>
                           <a:latin typeface="Arial"/>
                         </a:rPr>
-                        <a:t>Keck vector-Zernike segment control 2024 (arXiv 2404.08728); Wallace et al. 2022 (arXiv 2205.02241)</a:t>
+                        <a:t>Chambouleyron, Cissé, Salama, Haffert, Wallace et al. 2024, SPIE 13097</a:t>
                       </a:r>
                     </a:p>
                   </a:txBody>
@@ -8270,7 +8432,7 @@
                           </a:solidFill>
                           <a:latin typeface="Arial"/>
                         </a:rPr>
-                        <a:t>Segment piston by model-based iteration; 11 nm rms piston uncertainty; underestimation 2 to 4× below 50 % Strehl; fabricated shifts 0.30π and 0.68π instead of ±0.5π</a:t>
+                        <a:t>A phase-shifted pair (±π/2) yields cos φ and sin φ; iterative reconstructors reach about 1 rad rms; the bench limits were polarization crosstalk and defocus between the two pupils</a:t>
                       </a:r>
                     </a:p>
                   </a:txBody>
@@ -8294,7 +8456,7 @@
                           </a:solidFill>
                           <a:latin typeface="Arial"/>
                         </a:rPr>
-                        <a:t>11</a:t>
+                        <a:t>5</a:t>
                       </a:r>
                     </a:p>
                   </a:txBody>
@@ -8316,7 +8478,7 @@
                           </a:solidFill>
                           <a:latin typeface="Arial"/>
                         </a:rPr>
-                        <a:t>HiCAT mid-order Zernike sensor 2024 (arXiv 2409.03411)</a:t>
+                        <a:t>Haffert 2024, A&amp;A 683, A113</a:t>
                       </a:r>
                     </a:p>
                   </a:txBody>
@@ -8338,7 +8500,7 @@
                           </a:solidFill>
                           <a:latin typeface="Arial"/>
                         </a:rPr>
-                        <a:t>Per-segment piston, tip and tilt by interaction matrix; a minimal step of 125 ± 31 pm at SNR 4; 14-bit DM quantization reads as steps in the response</a:t>
+                        <a:t>Iterative nonlinear reconstructors reach machine precision below 0.25 rad rms; phase sorting extends to 0.75 rad; adding wavelengths to 1.4 rad rms</a:t>
                       </a:r>
                     </a:p>
                   </a:txBody>
@@ -8362,7 +8524,7 @@
                           </a:solidFill>
                           <a:latin typeface="Arial"/>
                         </a:rPr>
-                        <a:t>12</a:t>
+                        <a:t>6</a:t>
                       </a:r>
                     </a:p>
                   </a:txBody>
@@ -8384,7 +8546,7 @@
                           </a:solidFill>
                           <a:latin typeface="Arial"/>
                         </a:rPr>
-                        <a:t>Shi et al. 2015, SPIE 9605 (Roman low-order sensor)</a:t>
+                        <a:t>Darcis, Haffert, Chambouleyron, Doelman et al. 2025, A&amp;A</a:t>
                       </a:r>
                     </a:p>
                   </a:txBody>
@@ -8406,7 +8568,7 @@
                           </a:solidFill>
                           <a:latin typeface="Arial"/>
                         </a:rPr>
-                        <a:t>A reflective dimple on the focal-plane mask senses Z2 to Z11 from the rejected starlight: the spatially filtered form of the same sensor</a:t>
+                        <a:t>Multi-wavelength gradient descent through the forward model: dynamic range for the scalar sensor, photon robustness across a wider band, two-wavelength unwrapping of petal errors</a:t>
                       </a:r>
                     </a:p>
                   </a:txBody>
@@ -8455,7 +8617,7 @@
                 </a:solidFill>
                 <a:latin typeface="Arial"/>
               </a:rPr>
-              <a:t>Also read: PIAA-ZWFS (2026, arXiv 2606.28136), lossless pupil apodization that closes the gap to the fundamental sensitivity limit by 10× — a design lever, not a model change.</a:t>
+              <a:t>Priority = payoff against this campaign's measured weak results.  Synopses and links: macos/REPORT_zwfs_lit_scan.md.</a:t>
             </a:r>
           </a:p>
         </p:txBody>
@@ -8512,7 +8674,7 @@
                 </a:solidFill>
                 <a:latin typeface="Arial"/>
               </a:rPr>
-              <a:t>Conclusions: what the corrected model and the exact reading settled</a:t>
+              <a:t>Demonstrations, segmented mirrors, and the in-house precedent</a:t>
             </a:r>
           </a:p>
           <a:p>
@@ -8528,7 +8690,7 @@
                 </a:solidFill>
                 <a:latin typeface="Arial"/>
               </a:rPr>
-              <a:t>Fixing the model was the bigger gain; a response matrix measured on the working surface takes the stepped reading to 5 pm; colour and photons are not the limit</a:t>
+              <a:t>Picometres by alternating DM shapes and averaging; segment piston by model iteration, underestimated below 50 % Strehl</a:t>
             </a:r>
           </a:p>
         </p:txBody>
@@ -8577,15 +8739,518 @@
           </a:p>
         </p:txBody>
       </p:sp>
-      <p:sp>
-        <p:nvSpPr>
-          <p:cNvPr id="4" name="TextBox 3"/>
+      <p:graphicFrame>
+        <p:nvGraphicFramePr>
+          <p:cNvPr id="4" name="Table 3"/>
+          <p:cNvGraphicFramePr>
+            <a:graphicFrameLocks noGrp="1"/>
+          </p:cNvGraphicFramePr>
+          <p:nvPr/>
+        </p:nvGraphicFramePr>
+        <p:xfrm>
+          <a:off x="411480" y="1298448"/>
+          <a:ext cx="11368734" cy="3091815"/>
+        </p:xfrm>
+        <a:graphic>
+          <a:graphicData uri="http://schemas.openxmlformats.org/drawingml/2006/table">
+            <a:tbl>
+              <a:tblPr firstRow="1" bandRow="1">
+                <a:tableStyleId>{5C22544A-7EE6-4342-B048-85BDC9FD1C3A}</a:tableStyleId>
+              </a:tblPr>
+              <a:tblGrid>
+                <a:gridCol w="291592"/>
+                <a:gridCol w="3730058"/>
+                <a:gridCol w="7347084"/>
+              </a:tblGrid>
+              <a:tr h="280035">
+                <a:tc>
+                  <a:txBody>
+                    <a:bodyPr wrap="square"/>
+                    <a:lstStyle/>
+                    <a:p>
+                      <a:r>
+                        <a:rPr sz="1100" b="1">
+                          <a:solidFill>
+                            <a:srgbClr val="FFFFFF"/>
+                          </a:solidFill>
+                          <a:latin typeface="Arial"/>
+                        </a:rPr>
+                        <a:t>#</a:t>
+                      </a:r>
+                    </a:p>
+                  </a:txBody>
+                  <a:tcPr marL="54864" marR="54864" marT="18288" marB="18288">
+                    <a:solidFill>
+                      <a:srgbClr val="1F4E79"/>
+                    </a:solidFill>
+                  </a:tcPr>
+                </a:tc>
+                <a:tc>
+                  <a:txBody>
+                    <a:bodyPr wrap="square"/>
+                    <a:lstStyle/>
+                    <a:p>
+                      <a:r>
+                        <a:rPr sz="1100" b="1">
+                          <a:solidFill>
+                            <a:srgbClr val="FFFFFF"/>
+                          </a:solidFill>
+                          <a:latin typeface="Arial"/>
+                        </a:rPr>
+                        <a:t>paper</a:t>
+                      </a:r>
+                    </a:p>
+                  </a:txBody>
+                  <a:tcPr marL="54864" marR="54864" marT="18288" marB="18288">
+                    <a:solidFill>
+                      <a:srgbClr val="1F4E79"/>
+                    </a:solidFill>
+                  </a:tcPr>
+                </a:tc>
+                <a:tc>
+                  <a:txBody>
+                    <a:bodyPr wrap="square"/>
+                    <a:lstStyle/>
+                    <a:p>
+                      <a:r>
+                        <a:rPr sz="1100" b="1">
+                          <a:solidFill>
+                            <a:srgbClr val="FFFFFF"/>
+                          </a:solidFill>
+                          <a:latin typeface="Arial"/>
+                        </a:rPr>
+                        <a:t>what it gives this model</a:t>
+                      </a:r>
+                    </a:p>
+                  </a:txBody>
+                  <a:tcPr marL="54864" marR="54864" marT="18288" marB="18288">
+                    <a:solidFill>
+                      <a:srgbClr val="1F4E79"/>
+                    </a:solidFill>
+                  </a:tcPr>
+                </a:tc>
+              </a:tr>
+              <a:tr h="468630">
+                <a:tc>
+                  <a:txBody>
+                    <a:bodyPr wrap="square"/>
+                    <a:lstStyle/>
+                    <a:p>
+                      <a:r>
+                        <a:rPr sz="1100" b="0">
+                          <a:solidFill>
+                            <a:srgbClr val="282828"/>
+                          </a:solidFill>
+                          <a:latin typeface="Arial"/>
+                        </a:rPr>
+                        <a:t>7</a:t>
+                      </a:r>
+                    </a:p>
+                  </a:txBody>
+                  <a:tcPr marL="54864" marR="54864" marT="18288" marB="18288">
+                    <a:solidFill>
+                      <a:srgbClr val="FFFFFF"/>
+                    </a:solidFill>
+                  </a:tcPr>
+                </a:tc>
+                <a:tc>
+                  <a:txBody>
+                    <a:bodyPr wrap="square"/>
+                    <a:lstStyle/>
+                    <a:p>
+                      <a:r>
+                        <a:rPr sz="1100" b="0">
+                          <a:solidFill>
+                            <a:srgbClr val="282828"/>
+                          </a:solidFill>
+                          <a:latin typeface="Arial"/>
+                        </a:rPr>
+                        <a:t>Steeves, Wallace, Kettenbeil, Jewell 2020, Optica 7, 1267</a:t>
+                      </a:r>
+                    </a:p>
+                  </a:txBody>
+                  <a:tcPr marL="54864" marR="54864" marT="18288" marB="18288">
+                    <a:solidFill>
+                      <a:srgbClr val="FFFFFF"/>
+                    </a:solidFill>
+                  </a:tcPr>
+                </a:tc>
+                <a:tc>
+                  <a:txBody>
+                    <a:bodyPr wrap="square"/>
+                    <a:lstStyle/>
+                    <a:p>
+                      <a:r>
+                        <a:rPr sz="1100" b="0">
+                          <a:solidFill>
+                            <a:srgbClr val="282828"/>
+                          </a:solidFill>
+                          <a:latin typeface="Arial"/>
+                        </a:rPr>
+                        <a:t>1.6 pm repeatability in 4.3 s by alternating flat and waffle DM states and averaging the differences; a reconstruction robust at the highest spatial frequencies</a:t>
+                      </a:r>
+                    </a:p>
+                  </a:txBody>
+                  <a:tcPr marL="54864" marR="54864" marT="18288" marB="18288">
+                    <a:solidFill>
+                      <a:srgbClr val="FFFFFF"/>
+                    </a:solidFill>
+                  </a:tcPr>
+                </a:tc>
+              </a:tr>
+              <a:tr h="468630">
+                <a:tc>
+                  <a:txBody>
+                    <a:bodyPr wrap="square"/>
+                    <a:lstStyle/>
+                    <a:p>
+                      <a:r>
+                        <a:rPr sz="1100" b="0">
+                          <a:solidFill>
+                            <a:srgbClr val="282828"/>
+                          </a:solidFill>
+                          <a:latin typeface="Arial"/>
+                        </a:rPr>
+                        <a:t>8</a:t>
+                      </a:r>
+                    </a:p>
+                  </a:txBody>
+                  <a:tcPr marL="54864" marR="54864" marT="18288" marB="18288">
+                    <a:solidFill>
+                      <a:srgbClr val="ECF1F6"/>
+                    </a:solidFill>
+                  </a:tcPr>
+                </a:tc>
+                <a:tc>
+                  <a:txBody>
+                    <a:bodyPr wrap="square"/>
+                    <a:lstStyle/>
+                    <a:p>
+                      <a:r>
+                        <a:rPr sz="1100" b="0">
+                          <a:solidFill>
+                            <a:srgbClr val="282828"/>
+                          </a:solidFill>
+                          <a:latin typeface="Arial"/>
+                        </a:rPr>
+                        <a:t>Wallace, Rao, Jensen-Clem, Serabyn 2011, SPIE 8126</a:t>
+                      </a:r>
+                    </a:p>
+                  </a:txBody>
+                  <a:tcPr marL="54864" marR="54864" marT="18288" marB="18288">
+                    <a:solidFill>
+                      <a:srgbClr val="ECF1F6"/>
+                    </a:solidFill>
+                  </a:tcPr>
+                </a:tc>
+                <a:tc>
+                  <a:txBody>
+                    <a:bodyPr wrap="square"/>
+                    <a:lstStyle/>
+                    <a:p>
+                      <a:r>
+                        <a:rPr sz="1100" b="0">
+                          <a:solidFill>
+                            <a:srgbClr val="282828"/>
+                          </a:solidFill>
+                          <a:latin typeface="Arial"/>
+                        </a:rPr>
+                        <a:t>All-reflective phase-shifting Zernike interferometer: a dynamic, arbitrary core phase shift read in four steps gives phase and amplitude; low sensitivity to vibration, polarization and wavelength</a:t>
+                      </a:r>
+                    </a:p>
+                  </a:txBody>
+                  <a:tcPr marL="54864" marR="54864" marT="18288" marB="18288">
+                    <a:solidFill>
+                      <a:srgbClr val="ECF1F6"/>
+                    </a:solidFill>
+                  </a:tcPr>
+                </a:tc>
+              </a:tr>
+              <a:tr h="468630">
+                <a:tc>
+                  <a:txBody>
+                    <a:bodyPr wrap="square"/>
+                    <a:lstStyle/>
+                    <a:p>
+                      <a:r>
+                        <a:rPr sz="1100" b="0">
+                          <a:solidFill>
+                            <a:srgbClr val="282828"/>
+                          </a:solidFill>
+                          <a:latin typeface="Arial"/>
+                        </a:rPr>
+                        <a:t>9</a:t>
+                      </a:r>
+                    </a:p>
+                  </a:txBody>
+                  <a:tcPr marL="54864" marR="54864" marT="18288" marB="18288">
+                    <a:solidFill>
+                      <a:srgbClr val="FFFFFF"/>
+                    </a:solidFill>
+                  </a:tcPr>
+                </a:tc>
+                <a:tc>
+                  <a:txBody>
+                    <a:bodyPr wrap="square"/>
+                    <a:lstStyle/>
+                    <a:p>
+                      <a:r>
+                        <a:rPr sz="1100" b="0">
+                          <a:solidFill>
+                            <a:srgbClr val="282828"/>
+                          </a:solidFill>
+                          <a:latin typeface="Arial"/>
+                        </a:rPr>
+                        <a:t>Moore and Redding 2018, SPIE 10698</a:t>
+                      </a:r>
+                    </a:p>
+                  </a:txBody>
+                  <a:tcPr marL="54864" marR="54864" marT="18288" marB="18288">
+                    <a:solidFill>
+                      <a:srgbClr val="FFFFFF"/>
+                    </a:solidFill>
+                  </a:tcPr>
+                </a:tc>
+                <a:tc>
+                  <a:txBody>
+                    <a:bodyPr wrap="square"/>
+                    <a:lstStyle/>
+                    <a:p>
+                      <a:r>
+                        <a:rPr sz="1100" b="0">
+                          <a:solidFill>
+                            <a:srgbClr val="282828"/>
+                          </a:solidFill>
+                          <a:latin typeface="Arial"/>
+                        </a:rPr>
+                        <a:t>Nonlinear polychromatic physical-optics reconstruction for picometer differential metrology on LUVOIR; the in-house precedent for the reconstructor above</a:t>
+                      </a:r>
+                    </a:p>
+                  </a:txBody>
+                  <a:tcPr marL="54864" marR="54864" marT="18288" marB="18288">
+                    <a:solidFill>
+                      <a:srgbClr val="FFFFFF"/>
+                    </a:solidFill>
+                  </a:tcPr>
+                </a:tc>
+              </a:tr>
+              <a:tr h="468630">
+                <a:tc>
+                  <a:txBody>
+                    <a:bodyPr wrap="square"/>
+                    <a:lstStyle/>
+                    <a:p>
+                      <a:r>
+                        <a:rPr sz="1100" b="0">
+                          <a:solidFill>
+                            <a:srgbClr val="282828"/>
+                          </a:solidFill>
+                          <a:latin typeface="Arial"/>
+                        </a:rPr>
+                        <a:t>10</a:t>
+                      </a:r>
+                    </a:p>
+                  </a:txBody>
+                  <a:tcPr marL="54864" marR="54864" marT="18288" marB="18288">
+                    <a:solidFill>
+                      <a:srgbClr val="ECF1F6"/>
+                    </a:solidFill>
+                  </a:tcPr>
+                </a:tc>
+                <a:tc>
+                  <a:txBody>
+                    <a:bodyPr wrap="square"/>
+                    <a:lstStyle/>
+                    <a:p>
+                      <a:r>
+                        <a:rPr sz="1100" b="0">
+                          <a:solidFill>
+                            <a:srgbClr val="282828"/>
+                          </a:solidFill>
+                          <a:latin typeface="Arial"/>
+                        </a:rPr>
+                        <a:t>Keck vector-Zernike segment control 2024 (arXiv 2404.08728); Wallace et al. 2022 (arXiv 2205.02241)</a:t>
+                      </a:r>
+                    </a:p>
+                  </a:txBody>
+                  <a:tcPr marL="54864" marR="54864" marT="18288" marB="18288">
+                    <a:solidFill>
+                      <a:srgbClr val="ECF1F6"/>
+                    </a:solidFill>
+                  </a:tcPr>
+                </a:tc>
+                <a:tc>
+                  <a:txBody>
+                    <a:bodyPr wrap="square"/>
+                    <a:lstStyle/>
+                    <a:p>
+                      <a:r>
+                        <a:rPr sz="1100" b="0">
+                          <a:solidFill>
+                            <a:srgbClr val="282828"/>
+                          </a:solidFill>
+                          <a:latin typeface="Arial"/>
+                        </a:rPr>
+                        <a:t>Segment piston by model-based iteration; 11 nm rms piston uncertainty; underestimation 2 to 4× below 50 % Strehl; fabricated shifts 0.30π and 0.68π instead of ±0.5π</a:t>
+                      </a:r>
+                    </a:p>
+                  </a:txBody>
+                  <a:tcPr marL="54864" marR="54864" marT="18288" marB="18288">
+                    <a:solidFill>
+                      <a:srgbClr val="ECF1F6"/>
+                    </a:solidFill>
+                  </a:tcPr>
+                </a:tc>
+              </a:tr>
+              <a:tr h="468630">
+                <a:tc>
+                  <a:txBody>
+                    <a:bodyPr wrap="square"/>
+                    <a:lstStyle/>
+                    <a:p>
+                      <a:r>
+                        <a:rPr sz="1100" b="0">
+                          <a:solidFill>
+                            <a:srgbClr val="282828"/>
+                          </a:solidFill>
+                          <a:latin typeface="Arial"/>
+                        </a:rPr>
+                        <a:t>11</a:t>
+                      </a:r>
+                    </a:p>
+                  </a:txBody>
+                  <a:tcPr marL="54864" marR="54864" marT="18288" marB="18288">
+                    <a:solidFill>
+                      <a:srgbClr val="FFFFFF"/>
+                    </a:solidFill>
+                  </a:tcPr>
+                </a:tc>
+                <a:tc>
+                  <a:txBody>
+                    <a:bodyPr wrap="square"/>
+                    <a:lstStyle/>
+                    <a:p>
+                      <a:r>
+                        <a:rPr sz="1100" b="0">
+                          <a:solidFill>
+                            <a:srgbClr val="282828"/>
+                          </a:solidFill>
+                          <a:latin typeface="Arial"/>
+                        </a:rPr>
+                        <a:t>HiCAT mid-order Zernike sensor 2024 (arXiv 2409.03411)</a:t>
+                      </a:r>
+                    </a:p>
+                  </a:txBody>
+                  <a:tcPr marL="54864" marR="54864" marT="18288" marB="18288">
+                    <a:solidFill>
+                      <a:srgbClr val="FFFFFF"/>
+                    </a:solidFill>
+                  </a:tcPr>
+                </a:tc>
+                <a:tc>
+                  <a:txBody>
+                    <a:bodyPr wrap="square"/>
+                    <a:lstStyle/>
+                    <a:p>
+                      <a:r>
+                        <a:rPr sz="1100" b="0">
+                          <a:solidFill>
+                            <a:srgbClr val="282828"/>
+                          </a:solidFill>
+                          <a:latin typeface="Arial"/>
+                        </a:rPr>
+                        <a:t>Per-segment piston, tip and tilt by interaction matrix; a minimal step of 125 ± 31 pm at SNR 4; 14-bit DM quantization reads as steps in the response</a:t>
+                      </a:r>
+                    </a:p>
+                  </a:txBody>
+                  <a:tcPr marL="54864" marR="54864" marT="18288" marB="18288">
+                    <a:solidFill>
+                      <a:srgbClr val="FFFFFF"/>
+                    </a:solidFill>
+                  </a:tcPr>
+                </a:tc>
+              </a:tr>
+              <a:tr h="468630">
+                <a:tc>
+                  <a:txBody>
+                    <a:bodyPr wrap="square"/>
+                    <a:lstStyle/>
+                    <a:p>
+                      <a:r>
+                        <a:rPr sz="1100" b="0">
+                          <a:solidFill>
+                            <a:srgbClr val="282828"/>
+                          </a:solidFill>
+                          <a:latin typeface="Arial"/>
+                        </a:rPr>
+                        <a:t>12</a:t>
+                      </a:r>
+                    </a:p>
+                  </a:txBody>
+                  <a:tcPr marL="54864" marR="54864" marT="18288" marB="18288">
+                    <a:solidFill>
+                      <a:srgbClr val="ECF1F6"/>
+                    </a:solidFill>
+                  </a:tcPr>
+                </a:tc>
+                <a:tc>
+                  <a:txBody>
+                    <a:bodyPr wrap="square"/>
+                    <a:lstStyle/>
+                    <a:p>
+                      <a:r>
+                        <a:rPr sz="1100" b="0">
+                          <a:solidFill>
+                            <a:srgbClr val="282828"/>
+                          </a:solidFill>
+                          <a:latin typeface="Arial"/>
+                        </a:rPr>
+                        <a:t>Shi et al. 2015, SPIE 9605 (Roman low-order sensor)</a:t>
+                      </a:r>
+                    </a:p>
+                  </a:txBody>
+                  <a:tcPr marL="54864" marR="54864" marT="18288" marB="18288">
+                    <a:solidFill>
+                      <a:srgbClr val="ECF1F6"/>
+                    </a:solidFill>
+                  </a:tcPr>
+                </a:tc>
+                <a:tc>
+                  <a:txBody>
+                    <a:bodyPr wrap="square"/>
+                    <a:lstStyle/>
+                    <a:p>
+                      <a:r>
+                        <a:rPr sz="1100" b="0">
+                          <a:solidFill>
+                            <a:srgbClr val="282828"/>
+                          </a:solidFill>
+                          <a:latin typeface="Arial"/>
+                        </a:rPr>
+                        <a:t>A reflective dimple on the focal-plane mask senses Z2 to Z11 from the rejected starlight: the spatially filtered form of the same sensor</a:t>
+                      </a:r>
+                    </a:p>
+                  </a:txBody>
+                  <a:tcPr marL="54864" marR="54864" marT="18288" marB="18288">
+                    <a:solidFill>
+                      <a:srgbClr val="ECF1F6"/>
+                    </a:solidFill>
+                  </a:tcPr>
+                </a:tc>
+              </a:tr>
+            </a:tbl>
+          </a:graphicData>
+        </a:graphic>
+      </p:graphicFrame>
+      <p:sp>
+        <p:nvSpPr>
+          <p:cNvPr id="5" name="TextBox 4"/>
           <p:cNvSpPr txBox="1"/>
           <p:nvPr/>
         </p:nvSpPr>
         <p:spPr>
           <a:xfrm>
-            <a:off x="411480" y="1298448"/>
+            <a:off x="411480" y="4536567"/>
             <a:ext cx="11368735" cy="274320"/>
           </a:xfrm>
           <a:prstGeom prst="rect">
@@ -8605,116 +9270,13 @@
               </a:spcAft>
             </a:pPr>
             <a:r>
-              <a:rPr sz="1500" b="0">
-                <a:solidFill>
-                  <a:srgbClr val="282828"/>
+              <a:rPr sz="1050" b="0">
+                <a:solidFill>
+                  <a:srgbClr val="6E6E6E"/>
                 </a:solidFill>
                 <a:latin typeface="Arial"/>
               </a:rPr>
-              <a:t>•  The model must keep the pupil image in focus: the two spheres around the mask share one radius, and the script checks the no-mask round trip on every run.  The correction alone took the single-actuator floor from 744 to 67 pm and made the undetected grid case detectable.</a:t>
-            </a:r>
-          </a:p>
-          <a:p>
-            <a:pPr>
-              <a:spcAft>
-                <a:spcPts val="600"/>
-              </a:spcAft>
-            </a:pPr>
-            <a:r>
-              <a:rPr sz="1500" b="0">
-                <a:solidFill>
-                  <a:srgbClr val="282828"/>
-                </a:solidFill>
-                <a:latin typeface="Arial"/>
-              </a:rPr>
-              <a:t>•  The exact reading with a re-computed reference is the import that paid (paper 1): 26 pm from one frame on a 30 nm working surface, SNR 355 — with the sign fold settled once from four stepped frames and refined.  The plain stepped sign map misses 3% of pixels and can flip a single actuator's sign.</a:t>
-            </a:r>
-          </a:p>
-          <a:p>
-            <a:pPr>
-              <a:spcAft>
-                <a:spcPts val="600"/>
-              </a:spcAft>
-            </a:pPr>
-            <a:r>
-              <a:rPr sz="1500" b="0">
-                <a:solidFill>
-                  <a:srgbClr val="282828"/>
-                </a:solidFill>
-                <a:latin typeface="Arial"/>
-              </a:rPr>
-              <a:t>•  Calibrate with a measured response matrix, on the working surface: the sparse-grid measurement of every actuator's response (with the sensor's piston null carried) reads a single actuator on the flat at 0.994 with a 4 pm floor; measured on the working surface it gives the stepped reading 0.99 and 5 pm there and makes the linear one-frame reading usable (1.05, 23 pm).  The floors fall ten times; what remains is gain stability as the surface drifts (7% over 20 nm rms) and the one-frame exact readings' sign fold.</a:t>
-            </a:r>
-          </a:p>
-          <a:p>
-            <a:pPr>
-              <a:spcAft>
-                <a:spcPts val="600"/>
-              </a:spcAft>
-            </a:pPr>
-            <a:r>
-              <a:rPr sz="1500" b="0">
-                <a:solidFill>
-                  <a:srgbClr val="282828"/>
-                </a:solidFill>
-                <a:latin typeface="Arial"/>
-              </a:rPr>
-              <a:t>•  Sampling is settled, and a bias in the fit is fixed: camera pixels per actuator (the ray count) set the gain on a test actuator; sampling the single-site response pattern at the actuator centre took that gain to 0.996 at 5 pixels per actuator.</a:t>
-            </a:r>
-          </a:p>
-          <a:p>
-            <a:pPr>
-              <a:spcAft>
-                <a:spcPts val="600"/>
-              </a:spcAft>
-            </a:pPr>
-            <a:r>
-              <a:rPr sz="1500" b="0">
-                <a:solidFill>
-                  <a:srgbClr val="282828"/>
-                </a:solidFill>
-                <a:latin typeface="Arial"/>
-              </a:rPr>
-              <a:t>•  Colour and photons are not levers: the chromatic null was the defocus; 10¹⁴ photons per state reach 1 pm.  The budget is systematic error: the 25 to 60 pm floors and the gain's stability.</a:t>
-            </a:r>
-          </a:p>
-        </p:txBody>
-      </p:sp>
-      <p:sp>
-        <p:nvSpPr>
-          <p:cNvPr id="5" name="TextBox 4"/>
-          <p:cNvSpPr txBox="1"/>
-          <p:nvPr/>
-        </p:nvSpPr>
-        <p:spPr>
-          <a:xfrm>
-            <a:off x="411480" y="5998464"/>
-            <a:ext cx="11368735" cy="274320"/>
-          </a:xfrm>
-          <a:prstGeom prst="rect">
-            <a:avLst/>
-          </a:prstGeom>
-          <a:noFill/>
-        </p:spPr>
-        <p:txBody>
-          <a:bodyPr wrap="square">
-            <a:spAutoFit/>
-          </a:bodyPr>
-          <a:lstStyle/>
-          <a:p>
-            <a:pPr>
-              <a:spcAft>
-                <a:spcPts val="600"/>
-              </a:spcAft>
-            </a:pPr>
-            <a:r>
-              <a:rPr sz="1050" b="0">
-                <a:solidFill>
-                  <a:srgbClr val="6E6E6E"/>
-                </a:solidFill>
-                <a:latin typeface="Arial"/>
-              </a:rPr>
-              <a:t>Script and records: templates/40_benches/zwfs_dm96 (README S7/S8; runs/rec193, ng385, ng385s3, m2048, rec193full).</a:t>
+              <a:t>Also read: PIAA-ZWFS (2026, arXiv 2606.28136), lossless pupil apodization that closes the gap to the fundamental sensitivity limit by 10× — a design lever, not a model change.</a:t>
             </a:r>
           </a:p>
         </p:txBody>
@@ -8771,7 +9333,7 @@
                 </a:solidFill>
                 <a:latin typeface="Arial"/>
               </a:rPr>
-              <a:t>Conclusions: what to import next, in order</a:t>
+              <a:t>Conclusions: what the corrected model and the exact reading settled</a:t>
             </a:r>
           </a:p>
           <a:p>
@@ -8787,7 +9349,7 @@
                 </a:solidFill>
                 <a:latin typeface="Arial"/>
               </a:rPr>
-              <a:t>The JPL budget form, DM calibration through the sensor's own images, the vector sensor priced before it is built, and the interferometer's lever</a:t>
+              <a:t>Fixing the model was the bigger gain; a response matrix measured on the working surface takes the stepped reading to 5 pm; colour and photons are not the limit</a:t>
             </a:r>
           </a:p>
         </p:txBody>
@@ -8870,7 +9432,7 @@
                 </a:solidFill>
                 <a:latin typeface="Arial"/>
               </a:rPr>
-              <a:t>•  The JPL budget form: a sensitivity factor per pixel from the measured fields — the quantity the working-surface effect on slide 10 is made of — predicts the photon-noise stage analytically, and four systematic terms (pupil calibration at ½, reference wave at 1, dimple depth, initial phase) become the rows of the error budget.</a:t>
+              <a:t>•  The model must keep the pupil image in focus: the two spheres around the mask share one radius, and the script checks the no-mask round trip on every run.  The correction alone took the single-actuator floor from 744 to 67 pm and made the undetected grid case detectable.</a:t>
             </a:r>
           </a:p>
           <a:p>
@@ -8886,7 +9448,7 @@
                 </a:solidFill>
                 <a:latin typeface="Arial"/>
               </a:rPr>
-              <a:t>•  The response matrix for the interferometer too: its calibration still uses a single-site response pattern, with the stencil bias fixed here (slide 9); the sparse-grid measured matrix is the calibration its reflective build should carry.  Model-matched DM calibration (actuator positions and gains through the sensor's own images) remains the lever for a real DM's geometry.</a:t>
+              <a:t>•  The exact reading with a re-computed reference is the import that paid (paper 1): 26 pm from one frame on a 30 nm working surface, SNR 355 — with the sign fold settled once from four stepped frames and refined.  The plain stepped sign map misses 3% of pixels and can flip a single actuator's sign.</a:t>
             </a:r>
           </a:p>
           <a:p>
@@ -8902,7 +9464,7 @@
                 </a:solidFill>
                 <a:latin typeface="Arial"/>
               </a:rPr>
-              <a:t>•  Colour as a joint fit, not a combination: an equal-weight combination inherits a bad channel; a joint fit through the exact reading would use 700 to 780 nm for range and 632.8 nm for the calibration of record.</a:t>
+              <a:t>•  Calibrate with a measured response matrix, on the working surface: the sparse-grid measurement of every actuator's response (with the sensor's piston null carried) reads a single actuator on the flat at 0.994 with a 4 pm floor; measured on the working surface it gives the stepped reading 0.99 and 5 pm there and makes the linear one-frame reading usable (1.05, 23 pm).  The floors fall ten times; what remains is gain stability as the surface drifts (7% over 20 nm rms) and the one-frame exact readings' sign fold.</a:t>
             </a:r>
           </a:p>
           <a:p>
@@ -8918,7 +9480,7 @@
                 </a:solidFill>
                 <a:latin typeface="Arial"/>
               </a:rPr>
-              <a:t>•  Model the vector sensor before the metasurface is built: the exact two-image solution and its leakage terms (retardance offsets, splitter rotation) run on the engine's polarization machinery; the bench limits at Keck and SEAL were defocus and crosstalk between the two pupil images, both priceable here.</a:t>
+              <a:t>•  Sampling is settled, and a bias in the fit is fixed: camera pixels per actuator (the ray count) set the gain on a test actuator; sampling the single-site response pattern at the actuator centre took that gain to 0.996 at 5 pixels per actuator.</a:t>
             </a:r>
           </a:p>
           <a:p>
@@ -8934,7 +9496,23 @@
                 </a:solidFill>
                 <a:latin typeface="Arial"/>
               </a:rPr>
-              <a:t>•  The interferometer, for balance: a PZT phase shift buys no model gain — its floors are geometric and colour-independent — but on hardware an absolute phase scale and freedom from polarization systematics; the recommended form is a hybrid: polarization snapshot for the change measurements, a PZT on the reference flat as calibrator.  Its all-mirror (OAP) version is in build.</a:t>
+              <a:t>•  Colour and photons are not levers: the chromatic null was the defocus; 10¹⁴ photons per state reach 1 pm.  The budget is systematic error: the 25 to 60 pm floors and the gain's stability.</a:t>
+            </a:r>
+          </a:p>
+          <a:p>
+            <a:pPr>
+              <a:spcAft>
+                <a:spcPts val="600"/>
+              </a:spcAft>
+            </a:pPr>
+            <a:r>
+              <a:rPr sz="1500" b="0">
+                <a:solidFill>
+                  <a:srgbClr val="282828"/>
+                </a:solidFill>
+                <a:latin typeface="Arial"/>
+              </a:rPr>
+              <a:t>•  In closed loop the stepped reading has no fixed error: it holds a 2 pm-per-cycle walk to 3 pm from 7.5×10¹² photons per cycle and returns to zero after a step; the linear reading costs the same light but leaves a fine-scale error under a slow ramp; the one-frame exact reading runs away.</a:t>
             </a:r>
           </a:p>
         </p:txBody>
@@ -8947,7 +9525,7 @@
         </p:nvSpPr>
         <p:spPr>
           <a:xfrm>
-            <a:off x="411480" y="5998464"/>
+            <a:off x="411480" y="6881622"/>
             <a:ext cx="11368735" cy="274320"/>
           </a:xfrm>
           <a:prstGeom prst="rect">
@@ -8973,7 +9551,7 @@
                 </a:solidFill>
                 <a:latin typeface="Arial"/>
               </a:rPr>
-              <a:t>Segmented-mirror lessons carried forward: the sensor reads segment piston but not global piston, DM quantization appears as steps in the response, and piston is underestimated below 50 % Strehl (Keck) — all three enter the e5-class segmented gauges.</a:t>
+              <a:t>Script and records: templates/40_benches/zwfs_dm96 (README S7/S8; runs/rec193, ng385, ng385s3, m2048, rec193full).</a:t>
             </a:r>
           </a:p>
         </p:txBody>
@@ -9294,63 +9872,6 @@
         </p:nvSpPr>
         <p:spPr>
           <a:xfrm>
-            <a:off x="822960" y="2743200"/>
-            <a:ext cx="10545775" cy="1280160"/>
-          </a:xfrm>
-          <a:prstGeom prst="rect">
-            <a:avLst/>
-          </a:prstGeom>
-          <a:noFill/>
-        </p:spPr>
-        <p:txBody>
-          <a:bodyPr wrap="square">
-            <a:spAutoFit/>
-          </a:bodyPr>
-          <a:lstStyle/>
-          <a:p>
-            <a:pPr algn="ctr">
-              <a:spcAft>
-                <a:spcPts val="400"/>
-              </a:spcAft>
-            </a:pPr>
-            <a:r>
-              <a:rPr sz="4000" b="1">
-                <a:solidFill>
-                  <a:srgbClr val="1F4E79"/>
-                </a:solidFill>
-                <a:latin typeface="Arial"/>
-              </a:rPr>
-              <a:t>Backup</a:t>
-            </a:r>
-          </a:p>
-        </p:txBody>
-      </p:sp>
-    </p:spTree>
-  </p:cSld>
-  <p:clrMapOvr>
-    <a:masterClrMapping/>
-  </p:clrMapOvr>
-</p:sld>
-</file>
-
-<file path=ppt/slides/slide21.xml><?xml version="1.0" encoding="utf-8"?>
-<p:sld xmlns:a="http://schemas.openxmlformats.org/drawingml/2006/main" xmlns:p="http://schemas.openxmlformats.org/presentationml/2006/main" xmlns:r="http://schemas.openxmlformats.org/officeDocument/2006/relationships">
-  <p:cSld>
-    <p:spTree>
-      <p:nvGrpSpPr>
-        <p:cNvPr id="1" name=""/>
-        <p:cNvGrpSpPr/>
-        <p:nvPr/>
-      </p:nvGrpSpPr>
-      <p:grpSpPr/>
-      <p:sp>
-        <p:nvSpPr>
-          <p:cNvPr id="2" name="TextBox 1"/>
-          <p:cNvSpPr txBox="1"/>
-          <p:nvPr/>
-        </p:nvSpPr>
-        <p:spPr>
-          <a:xfrm>
             <a:off x="411480" y="201168"/>
             <a:ext cx="11368735" cy="914400"/>
           </a:xfrm>
@@ -9377,7 +9898,7 @@
                 </a:solidFill>
                 <a:latin typeface="Arial"/>
               </a:rPr>
-              <a:t>Before the correction: the first poke and colour results</a:t>
+              <a:t>Conclusions: what to import next, in order</a:t>
             </a:r>
           </a:p>
           <a:p>
@@ -9393,7 +9914,7 @@
                 </a:solidFill>
                 <a:latin typeface="Arial"/>
               </a:rPr>
-              <a:t>Kept for the record; every number on this slide is from the out-of-focus model</a:t>
+              <a:t>The JPL budget form, DM calibration through the sensor's own images, the vector sensor priced before it is built, and the interferometer's lever</a:t>
             </a:r>
           </a:p>
         </p:txBody>
@@ -9442,6 +9963,322 @@
           </a:p>
         </p:txBody>
       </p:sp>
+      <p:sp>
+        <p:nvSpPr>
+          <p:cNvPr id="4" name="TextBox 3"/>
+          <p:cNvSpPr txBox="1"/>
+          <p:nvPr/>
+        </p:nvSpPr>
+        <p:spPr>
+          <a:xfrm>
+            <a:off x="411480" y="1298448"/>
+            <a:ext cx="11368735" cy="274320"/>
+          </a:xfrm>
+          <a:prstGeom prst="rect">
+            <a:avLst/>
+          </a:prstGeom>
+          <a:noFill/>
+        </p:spPr>
+        <p:txBody>
+          <a:bodyPr wrap="square">
+            <a:spAutoFit/>
+          </a:bodyPr>
+          <a:lstStyle/>
+          <a:p>
+            <a:pPr>
+              <a:spcAft>
+                <a:spcPts val="600"/>
+              </a:spcAft>
+            </a:pPr>
+            <a:r>
+              <a:rPr sz="1500" b="0">
+                <a:solidFill>
+                  <a:srgbClr val="282828"/>
+                </a:solidFill>
+                <a:latin typeface="Arial"/>
+              </a:rPr>
+              <a:t>•  The JPL budget form: a sensitivity factor per pixel from the measured fields — the quantity the working-surface effect on slide 10 is made of — predicts the photon-noise stage analytically, and four systematic terms (pupil calibration at ½, reference wave at 1, dimple depth, initial phase) become the rows of the error budget.</a:t>
+            </a:r>
+          </a:p>
+          <a:p>
+            <a:pPr>
+              <a:spcAft>
+                <a:spcPts val="600"/>
+              </a:spcAft>
+            </a:pPr>
+            <a:r>
+              <a:rPr sz="1500" b="0">
+                <a:solidFill>
+                  <a:srgbClr val="282828"/>
+                </a:solidFill>
+                <a:latin typeface="Arial"/>
+              </a:rPr>
+              <a:t>•  The response matrix for the interferometer too: its calibration still uses a single-site response pattern, with the stencil bias fixed here (slide 9); the sparse-grid measured matrix is the calibration its reflective build should carry.  Model-matched DM calibration (actuator positions and gains through the sensor's own images) remains the lever for a real DM's geometry.</a:t>
+            </a:r>
+          </a:p>
+          <a:p>
+            <a:pPr>
+              <a:spcAft>
+                <a:spcPts val="600"/>
+              </a:spcAft>
+            </a:pPr>
+            <a:r>
+              <a:rPr sz="1500" b="0">
+                <a:solidFill>
+                  <a:srgbClr val="282828"/>
+                </a:solidFill>
+                <a:latin typeface="Arial"/>
+              </a:rPr>
+              <a:t>•  Colour as a joint fit, not a combination: an equal-weight combination inherits a bad channel; a joint fit through the exact reading would use 700 to 780 nm for range and 632.8 nm for the calibration of record.</a:t>
+            </a:r>
+          </a:p>
+          <a:p>
+            <a:pPr>
+              <a:spcAft>
+                <a:spcPts val="600"/>
+              </a:spcAft>
+            </a:pPr>
+            <a:r>
+              <a:rPr sz="1500" b="0">
+                <a:solidFill>
+                  <a:srgbClr val="282828"/>
+                </a:solidFill>
+                <a:latin typeface="Arial"/>
+              </a:rPr>
+              <a:t>•  Model the vector sensor before the metasurface is built: the exact two-image solution and its leakage terms (retardance offsets, splitter rotation) run on the engine's polarization machinery; the bench limits at Keck and SEAL were defocus and crosstalk between the two pupil images, both priceable here.</a:t>
+            </a:r>
+          </a:p>
+          <a:p>
+            <a:pPr>
+              <a:spcAft>
+                <a:spcPts val="600"/>
+              </a:spcAft>
+            </a:pPr>
+            <a:r>
+              <a:rPr sz="1500" b="0">
+                <a:solidFill>
+                  <a:srgbClr val="282828"/>
+                </a:solidFill>
+                <a:latin typeface="Arial"/>
+              </a:rPr>
+              <a:t>•  The interferometer, for balance: a PZT phase shift buys no model gain — its floors are geometric and colour-independent — but on hardware an absolute phase scale and freedom from polarization systematics; the recommended form is a hybrid: polarization snapshot for the change measurements, a PZT on the reference flat as calibrator.  Its all-mirror (OAP) version is in build.</a:t>
+            </a:r>
+          </a:p>
+        </p:txBody>
+      </p:sp>
+      <p:sp>
+        <p:nvSpPr>
+          <p:cNvPr id="5" name="TextBox 4"/>
+          <p:cNvSpPr txBox="1"/>
+          <p:nvPr/>
+        </p:nvSpPr>
+        <p:spPr>
+          <a:xfrm>
+            <a:off x="411480" y="5998464"/>
+            <a:ext cx="11368735" cy="274320"/>
+          </a:xfrm>
+          <a:prstGeom prst="rect">
+            <a:avLst/>
+          </a:prstGeom>
+          <a:noFill/>
+        </p:spPr>
+        <p:txBody>
+          <a:bodyPr wrap="square">
+            <a:spAutoFit/>
+          </a:bodyPr>
+          <a:lstStyle/>
+          <a:p>
+            <a:pPr>
+              <a:spcAft>
+                <a:spcPts val="600"/>
+              </a:spcAft>
+            </a:pPr>
+            <a:r>
+              <a:rPr sz="1050" b="0">
+                <a:solidFill>
+                  <a:srgbClr val="6E6E6E"/>
+                </a:solidFill>
+                <a:latin typeface="Arial"/>
+              </a:rPr>
+              <a:t>Segmented-mirror lessons carried forward: the sensor reads segment piston but not global piston, DM quantization appears as steps in the response, and piston is underestimated below 50 % Strehl (Keck) — all three enter the e5-class segmented gauges.</a:t>
+            </a:r>
+          </a:p>
+        </p:txBody>
+      </p:sp>
+    </p:spTree>
+  </p:cSld>
+  <p:clrMapOvr>
+    <a:masterClrMapping/>
+  </p:clrMapOvr>
+</p:sld>
+</file>
+
+<file path=ppt/slides/slide21.xml><?xml version="1.0" encoding="utf-8"?>
+<p:sld xmlns:a="http://schemas.openxmlformats.org/drawingml/2006/main" xmlns:p="http://schemas.openxmlformats.org/presentationml/2006/main" xmlns:r="http://schemas.openxmlformats.org/officeDocument/2006/relationships">
+  <p:cSld>
+    <p:spTree>
+      <p:nvGrpSpPr>
+        <p:cNvPr id="1" name=""/>
+        <p:cNvGrpSpPr/>
+        <p:nvPr/>
+      </p:nvGrpSpPr>
+      <p:grpSpPr/>
+      <p:sp>
+        <p:nvSpPr>
+          <p:cNvPr id="2" name="TextBox 1"/>
+          <p:cNvSpPr txBox="1"/>
+          <p:nvPr/>
+        </p:nvSpPr>
+        <p:spPr>
+          <a:xfrm>
+            <a:off x="822960" y="2743200"/>
+            <a:ext cx="10545775" cy="1280160"/>
+          </a:xfrm>
+          <a:prstGeom prst="rect">
+            <a:avLst/>
+          </a:prstGeom>
+          <a:noFill/>
+        </p:spPr>
+        <p:txBody>
+          <a:bodyPr wrap="square">
+            <a:spAutoFit/>
+          </a:bodyPr>
+          <a:lstStyle/>
+          <a:p>
+            <a:pPr algn="ctr">
+              <a:spcAft>
+                <a:spcPts val="400"/>
+              </a:spcAft>
+            </a:pPr>
+            <a:r>
+              <a:rPr sz="4000" b="1">
+                <a:solidFill>
+                  <a:srgbClr val="1F4E79"/>
+                </a:solidFill>
+                <a:latin typeface="Arial"/>
+              </a:rPr>
+              <a:t>Backup</a:t>
+            </a:r>
+          </a:p>
+        </p:txBody>
+      </p:sp>
+    </p:spTree>
+  </p:cSld>
+  <p:clrMapOvr>
+    <a:masterClrMapping/>
+  </p:clrMapOvr>
+</p:sld>
+</file>
+
+<file path=ppt/slides/slide22.xml><?xml version="1.0" encoding="utf-8"?>
+<p:sld xmlns:a="http://schemas.openxmlformats.org/drawingml/2006/main" xmlns:p="http://schemas.openxmlformats.org/presentationml/2006/main" xmlns:r="http://schemas.openxmlformats.org/officeDocument/2006/relationships">
+  <p:cSld>
+    <p:spTree>
+      <p:nvGrpSpPr>
+        <p:cNvPr id="1" name=""/>
+        <p:cNvGrpSpPr/>
+        <p:nvPr/>
+      </p:nvGrpSpPr>
+      <p:grpSpPr/>
+      <p:sp>
+        <p:nvSpPr>
+          <p:cNvPr id="2" name="TextBox 1"/>
+          <p:cNvSpPr txBox="1"/>
+          <p:nvPr/>
+        </p:nvSpPr>
+        <p:spPr>
+          <a:xfrm>
+            <a:off x="411480" y="201168"/>
+            <a:ext cx="11368735" cy="914400"/>
+          </a:xfrm>
+          <a:prstGeom prst="rect">
+            <a:avLst/>
+          </a:prstGeom>
+          <a:noFill/>
+        </p:spPr>
+        <p:txBody>
+          <a:bodyPr wrap="square">
+            <a:spAutoFit/>
+          </a:bodyPr>
+          <a:lstStyle/>
+          <a:p>
+            <a:pPr>
+              <a:spcAft>
+                <a:spcPts val="400"/>
+              </a:spcAft>
+            </a:pPr>
+            <a:r>
+              <a:rPr sz="2400" b="1">
+                <a:solidFill>
+                  <a:srgbClr val="1F4E79"/>
+                </a:solidFill>
+                <a:latin typeface="Arial"/>
+              </a:rPr>
+              <a:t>Before the correction: the first poke and colour results</a:t>
+            </a:r>
+          </a:p>
+          <a:p>
+            <a:pPr>
+              <a:spcAft>
+                <a:spcPts val="0"/>
+              </a:spcAft>
+            </a:pPr>
+            <a:r>
+              <a:rPr sz="1250" b="0">
+                <a:solidFill>
+                  <a:srgbClr val="6E6E6E"/>
+                </a:solidFill>
+                <a:latin typeface="Arial"/>
+              </a:rPr>
+              <a:t>Kept for the record; every number on this slide is from the out-of-focus model</a:t>
+            </a:r>
+          </a:p>
+        </p:txBody>
+      </p:sp>
+      <p:sp>
+        <p:nvSpPr>
+          <p:cNvPr id="3" name="Rectangle 2"/>
+          <p:cNvSpPr/>
+          <p:nvPr/>
+        </p:nvSpPr>
+        <p:spPr>
+          <a:xfrm>
+            <a:off x="411480" y="1133856"/>
+            <a:ext cx="11368735" cy="20320"/>
+          </a:xfrm>
+          <a:prstGeom prst="rect">
+            <a:avLst/>
+          </a:prstGeom>
+          <a:solidFill>
+            <a:srgbClr val="B8C6D4"/>
+          </a:solidFill>
+          <a:ln>
+            <a:noFill/>
+          </a:ln>
+          <a:effectLst/>
+        </p:spPr>
+        <p:style>
+          <a:lnRef idx="1">
+            <a:schemeClr val="accent1"/>
+          </a:lnRef>
+          <a:fillRef idx="3">
+            <a:schemeClr val="accent1"/>
+          </a:fillRef>
+          <a:effectRef idx="2">
+            <a:schemeClr val="accent1"/>
+          </a:effectRef>
+          <a:fontRef idx="minor">
+            <a:schemeClr val="lt1"/>
+          </a:fontRef>
+        </p:style>
+        <p:txBody>
+          <a:bodyPr rtlCol="0" anchor="ctr"/>
+          <a:lstStyle/>
+          <a:p>
+            <a:pPr algn="ctr"/>
+          </a:p>
+        </p:txBody>
+      </p:sp>
       <p:pic>
         <p:nvPicPr>
           <p:cNvPr id="4" name="Picture 3" descr="zwfs_poke_triptych.png"/>
@@ -9670,7 +10507,7 @@
 </p:sld>
 </file>
 
-<file path=ppt/slides/slide22.xml><?xml version="1.0" encoding="utf-8"?>
+<file path=ppt/slides/slide23.xml><?xml version="1.0" encoding="utf-8"?>
 <p:sld xmlns:a="http://schemas.openxmlformats.org/drawingml/2006/main" xmlns:p="http://schemas.openxmlformats.org/presentationml/2006/main" xmlns:r="http://schemas.openxmlformats.org/officeDocument/2006/relationships">
   <p:cSld>
     <p:spTree>

--- a/demo_session/deck_zwfs.pptx
+++ b/demo_session/deck_zwfs.pptx
@@ -6462,7 +6462,7 @@
                 </a:solidFill>
                 <a:latin typeface="Arial"/>
               </a:rPr>
-              <a:t>Gain 0.5, 60 cycles, matrix measured on the working surface, 193 rays (385-ray check: runs/loop385).  A ramp under a proportional loop always lags by rate/gain; an integral term is the fix.  Code dm_gauge_lib/dmg_loop, gated by tDmgLoop.</a:t>
+              <a:t>Gain 0.5, 60 cycles, matrix measured on the working surface, 193 rays; the 385-ray check gives the same numbers (runs/loop385).  A ramp under a proportional loop always lags by rate/gain; an integral term is the fix.  Code dm_gauge_lib/dmg_loop, gated by tDmgLoop.</a:t>
             </a:r>
           </a:p>
         </p:txBody>

--- a/demo_session/deck_zwfs.pptx
+++ b/demo_session/deck_zwfs.pptx
@@ -3208,7 +3208,7 @@
                 </a:solidFill>
                 <a:latin typeface="Arial"/>
               </a:rPr>
-              <a:t>DRAFT — pending review.  Status: the sensor model has been corrected (the early model was out of focus); five ways of reading the frames measured on the corrected model; sampling settled on a 2048 grid; colour and photon budgets re-run; one script with a parameter sheet reproduces every number; a sampling bias in the actuator fit found and fixed; calibration by a measured response matrix on the working surface takes the stepped reading to 5 pm; the polarizing (vector) version is still to come.</a:t>
+              <a:t>DRAFT — pending review.  Status: the sensor model has been corrected (the early model was out of focus); five ways of reading the frames measured on the corrected model; sampling settled on a 2048 grid; color and photon budgets re-run; one script with a parameter sheet reproduces every number; a sampling bias in the actuator fit found and fixed; calibration by a measured response matrix on the working surface takes the stepped reading to 5 pm; the polarizing (vector) version is still to come.</a:t>
             </a:r>
           </a:p>
         </p:txBody>
@@ -4727,7 +4727,7 @@
                 </a:solidFill>
                 <a:latin typeface="Arial"/>
               </a:rPr>
-              <a:t>•  What gain means here: gain is after calibration, so 0.93 means a 10 nm change reads 9.3 nm — a 7% error the calibration did not remove.  The floor is a second error on top: the spread over the 47 sites' unchanged neighbours (their crosstalk, 0.2 to 0.6 nm here).</a:t>
+              <a:t>•  What gain means here: gain is after calibration, so 0.93 means a 10 nm change reads 9.3 nm — a 7% error the calibration did not remove.  The floor is a second error on top: the spread over the 47 sites' unchanged neighbors (their crosstalk, 0.2 to 0.6 nm here).</a:t>
             </a:r>
           </a:p>
           <a:p>
@@ -4855,7 +4855,7 @@
                 </a:solidFill>
                 <a:latin typeface="Arial"/>
               </a:rPr>
-              <a:t>Colour is no longer a lever</a:t>
+              <a:t>Color is no longer a lever</a:t>
             </a:r>
           </a:p>
           <a:p>
@@ -4871,7 +4871,7 @@
                 </a:solidFill>
                 <a:latin typeface="Arial"/>
               </a:rPr>
-              <a:t>With the sensor's null gone, five colours raise the combined response by 3% instead of 3×, and do nothing for the measurement rows</a:t>
+              <a:t>With the sensor's null gone, five colors raise the combined response by 3% instead of 3×, and do nothing for the measurement rows</a:t>
             </a:r>
           </a:p>
         </p:txBody>
@@ -4978,7 +4978,7 @@
                 </a:solidFill>
                 <a:latin typeface="Arial"/>
               </a:rPr>
-              <a:t>Response by spatial frequency of the linear reading at five wavelengths on the corrected model: no null, only the dimple's own low-order dip, which moves with the spot's size in λ/D; the five-colour combination (orange) sits at 0.99 to 1.</a:t>
+              <a:t>Response by spatial frequency of the linear reading at five wavelengths on the corrected model: no null, only the dimple's own low-order dip, which moves with the spot's size in λ/D; the five-color combination (orange) sits at 0.99 to 1.</a:t>
             </a:r>
           </a:p>
         </p:txBody>
@@ -5017,7 +5017,7 @@
                 </a:solidFill>
                 <a:latin typeface="Arial"/>
               </a:rPr>
-              <a:t>•  What moved: the "blind band near 30 cycles across the pupil that shifts with wavelength" was the out-of-focus model's Talbot null.  On the corrected model each colour's response bottoms at 0.92 to 0.97 after the frequency correction, and the combination at 0.991.</a:t>
+              <a:t>•  What moved: the "blind band near 30 cycles across the pupil that shifts with wavelength" was the out-of-focus model's Talbot null.  On the corrected model each color's response bottoms at 0.92 to 0.97 after the frequency correction, and the combination at 0.991.</a:t>
             </a:r>
           </a:p>
           <a:p>
@@ -5033,7 +5033,7 @@
                 </a:solidFill>
                 <a:latin typeface="Arial"/>
               </a:rPr>
-              <a:t>•  On the measurement rows (30 nm surface, single 10 nm change): I+ at 632.8 nm SNR 269; five colours combined 183; best pair, 700 + 780 nm, 255.  The 47-site case: 32 → 32.  The linear reading gets worse when combined (84 → 34): at 480 nm the dimple delay is 2.1 rad and the small-phase reading turns negative on this surface; an equal-weight combination inherits that.</a:t>
+              <a:t>•  On the measurement rows (30 nm surface, single 10 nm change): I+ at 632.8 nm SNR 269; five colors combined 183; best pair, 700 + 780 nm, 255.  The 47-site case: 32 → 32.  The linear reading gets worse when combined (84 → 34): at 480 nm the dimple delay is 2.1 rad and the small-phase reading turns negative on this surface; an equal-weight combination inherits that.</a:t>
             </a:r>
           </a:p>
           <a:p>
@@ -5049,7 +5049,7 @@
                 </a:solidFill>
                 <a:latin typeface="Arial"/>
               </a:rPr>
-              <a:t>•  What stays with colour is range: 780 nm is the best single colour on nearly every row — less phase per nanometre of height, and a 1.6 λ/D dimple.  The interferometer is unchanged at every colour (its deck).</a:t>
+              <a:t>•  What stays with color is range: 780 nm is the best single color on nearly every row — less phase per nanometer of height, and a 1.6 λ/D dimple.  The interferometer is unchanged at every color (its deck).</a:t>
             </a:r>
           </a:p>
         </p:txBody>
@@ -5088,7 +5088,7 @@
                 </a:solidFill>
                 <a:latin typeface="Arial"/>
               </a:rPr>
-              <a:t>632.8 / 480 / 532 / 700 / 780 nm through one physical mask, every calibration redone per colour; development sampling (193 rays, 1024 grid); runs/rec193full.</a:t>
+              <a:t>632.8 / 480 / 532 / 700 / 780 nm through one physical mask, every calibration redone per color; development sampling (193 rays, 1024 grid); runs/rec193full.</a:t>
             </a:r>
           </a:p>
         </p:txBody>
@@ -5655,7 +5655,7 @@
                 </a:solidFill>
                 <a:latin typeface="Arial"/>
               </a:rPr>
-              <a:t>•  Method: noise-free frames are calculated once per state; photon shot noise is added numerically, eight trials per point.  A state's photons are shared by the frames the reading needs (one, or four for S).  Each reading's high-photon floor converges to its systematic floor on slide 8.</a:t>
+              <a:t>•  What "photons per state" counts: every photon the camera detects over the whole pupil image while one DM shape is measured once, summed over the frames that measurement needs: one frame for the one-frame readings, four for the stepped reading (a quarter each).  Not per mode or per actuator: 10¹⁴ per state is 3×10¹⁰ per lit actuator.  Measuring a change takes two states, so twice the number.</a:t>
             </a:r>
           </a:p>
           <a:p>
@@ -5671,7 +5671,23 @@
                 </a:solidFill>
                 <a:latin typeface="Arial"/>
               </a:rPr>
-              <a:t>•  Reading: 10¹⁴ photons at 633 nm is 30 µJ.  The 1 pm budget is about systematic errors and gain stability, not light.</a:t>
+              <a:t>•  In laser terms: at 633 nm, 10¹⁴ photons is 31 µJ.  The test arm passes a 50/50 splitter twice, so a quarter of the laser power reaches the camera (other losses not counted): a 1 mW laser needs 0.13 s per state, a 5 mW laser 25 ms; the interferometer's 8×10¹⁴ is 1 s at 1 mW.</a:t>
+            </a:r>
+          </a:p>
+          <a:p>
+            <a:pPr>
+              <a:spcAft>
+                <a:spcPts val="600"/>
+              </a:spcAft>
+            </a:pPr>
+            <a:r>
+              <a:rPr sz="1200" b="0">
+                <a:solidFill>
+                  <a:srgbClr val="282828"/>
+                </a:solidFill>
+                <a:latin typeface="Arial"/>
+              </a:rPr>
+              <a:t>•  Method: noise-free frames once per state, photon shot noise added numerically, eight trials per point.  The 1 pm budget is about systematic errors and gain stability, not light.</a:t>
             </a:r>
           </a:p>
         </p:txBody>
@@ -5684,7 +5700,7 @@
         </p:nvSpPr>
         <p:spPr>
           <a:xfrm>
-            <a:off x="6400800" y="4988814"/>
+            <a:off x="6400800" y="6317742"/>
             <a:ext cx="5394960" cy="274320"/>
           </a:xfrm>
           <a:prstGeom prst="rect">
@@ -5710,7 +5726,7 @@
                 </a:solidFill>
                 <a:latin typeface="Arial"/>
               </a:rPr>
-              <a:t>Case: a single 10 nm change on the 30 nm surface, 96×96, development sampling.  Read noise, drift and calibration noise are the next terms once a use case fixes them.  Records: runs/rec193full; interferometer tg96_s5noise_report.txt.</a:t>
+              <a:t>Case: a single 10 nm change on the 30 nm surface, 96×96, development sampling; read noise, drift and calibration noise are the next terms.  Records: runs/rec193full; tg96_s5noise_report.txt.</a:t>
             </a:r>
           </a:p>
         </p:txBody>
@@ -6407,7 +6423,7 @@
                 </a:solidFill>
                 <a:latin typeface="Arial"/>
               </a:rPr>
-              <a:t>•  The loop: the DM is held at the 30 nm working surface by a proportional servo (gain 0.5) closed through one reading; each cycle the state is measured with N photons, compared with the set point's frames, and half the estimated change removed.  The same loop code will run the interferometer.</a:t>
+              <a:t>•  The loop: the DM is held at the 30 nm working surface by a proportional servo (gain 0.5) closed through one reading; each cycle the DM shape is measured once with N photons (photons per state, slide 13), compared with the set point's frames, and half the estimated change removed.  The same loop code will run the interferometer.</a:t>
             </a:r>
           </a:p>
           <a:p>
@@ -6462,7 +6478,7 @@
                 </a:solidFill>
                 <a:latin typeface="Arial"/>
               </a:rPr>
-              <a:t>Gain 0.5, 60 cycles, matrix measured on the working surface, 193 rays; the 385-ray check gives the same numbers (runs/loop385).  A ramp under a proportional loop always lags by rate/gain; an integral term is the fix.  Code dm_gauge_lib/dmg_loop, gated by tDmgLoop.</a:t>
+              <a:t>7.5×10¹² photons per cycle is 2.4 µJ: 9 ms of a 1 mW laser at the test arm's 25% throughput.  Gain 0.5, 60 cycles, matrix measured on the working surface, 193 rays; the 385-ray check gives the same numbers (runs/loop385).  A ramp under a proportional loop always lags by rate/gain; an integral term is the fix.  Code dm_gauge_lib/dmg_loop, gated by tDmgLoop.</a:t>
             </a:r>
           </a:p>
         </p:txBody>
@@ -6618,7 +6634,7 @@
                 </a:solidFill>
                 <a:latin typeface="Arial"/>
               </a:rPr>
-              <a:t>•  Two files: zwfs_params.m returns every setting at its value of record — grid and ray count, wavelength, the bench's lengths and tuned figures, the mask's etch and spot, the sampling checks, registration, the DM sizes, the test amplitudes and seeds, the colour and photon stages.  zwfs_run.m runs the chosen stages and writes the report, a .mat file and the figures into a folder named by the run's tag.</a:t>
+              <a:t>•  Two files: zwfs_params.m returns every setting at its value of record — grid and ray count, wavelength, the bench's lengths and tuned figures, the mask's etch and spot, the sampling checks, registration, the DM sizes, the test amplitudes and seeds, the color and photon stages.  zwfs_run.m runs the chosen stages and writes the report, a .mat file and the figures into a folder named by the run's tag.</a:t>
             </a:r>
           </a:p>
         </p:txBody>
@@ -8690,7 +8706,7 @@
                 </a:solidFill>
                 <a:latin typeface="Arial"/>
               </a:rPr>
-              <a:t>Picometres by alternating DM shapes and averaging; segment piston by model iteration, underestimated below 50 % Strehl</a:t>
+              <a:t>Picometers by alternating DM shapes and averaging; segment piston by model iteration, underestimated below 50 % Strehl</a:t>
             </a:r>
           </a:p>
         </p:txBody>
@@ -9349,7 +9365,7 @@
                 </a:solidFill>
                 <a:latin typeface="Arial"/>
               </a:rPr>
-              <a:t>Fixing the model was the bigger gain; a response matrix measured on the working surface takes the stepped reading to 5 pm; colour and photons are not the limit</a:t>
+              <a:t>Fixing the model was the bigger gain; a response matrix measured on the working surface takes the stepped reading to 5 pm; color and photons are not the limit</a:t>
             </a:r>
           </a:p>
         </p:txBody>
@@ -9480,7 +9496,7 @@
                 </a:solidFill>
                 <a:latin typeface="Arial"/>
               </a:rPr>
-              <a:t>•  Sampling is settled, and a bias in the fit is fixed: camera pixels per actuator (the ray count) set the gain on a test actuator; sampling the single-site response pattern at the actuator centre took that gain to 0.996 at 5 pixels per actuator.</a:t>
+              <a:t>•  Sampling is settled, and a bias in the fit is fixed: camera pixels per actuator (the ray count) set the gain on a test actuator; sampling the single-site response pattern at the actuator center took that gain to 0.996 at 5 pixels per actuator.</a:t>
             </a:r>
           </a:p>
           <a:p>
@@ -9496,7 +9512,7 @@
                 </a:solidFill>
                 <a:latin typeface="Arial"/>
               </a:rPr>
-              <a:t>•  Colour and photons are not levers: the chromatic null was the defocus; 10¹⁴ photons per state reach 1 pm.  The budget is systematic error: the 25 to 60 pm floors and the gain's stability.</a:t>
+              <a:t>•  Color and photons are not levers: the chromatic null was the defocus; 10¹⁴ photons per state reach 1 pm.  The budget is systematic error: the 25 to 60 pm floors and the gain's stability.</a:t>
             </a:r>
           </a:p>
           <a:p>
@@ -9624,7 +9640,7 @@
                 </a:solidFill>
                 <a:latin typeface="Arial"/>
               </a:rPr>
-              <a:t>A small etched dimple at the focus delays the centre of the beam; that light spreads back over the pupil and acts as the reference</a:t>
+              <a:t>A small etched dimple at the focus delays the center of the beam; that light spreads back over the pupil and acts as the reference</a:t>
             </a:r>
           </a:p>
         </p:txBody>
@@ -9707,7 +9723,7 @@
                 </a:solidFill>
                 <a:latin typeface="Arial"/>
               </a:rPr>
-              <a:t>•  One glass plate, one tiny etched spot.  At the focus, the centre of the beam passes through the dimple and is delayed by a quarter wave; the rest of the beam misses it.  The delayed light spreads back over the whole pupil image and interferes with the rest.  This is an interferometer with no second arm.</a:t>
+              <a:t>•  One glass plate, one tiny etched spot.  At the focus, the center of the beam passes through the dimple and is delayed by a quarter wave; the rest of the beam misses it.  The delayed light spreads back over the whole pupil image and interferes with the rest.  This is an interferometer with no second arm.</a:t>
             </a:r>
           </a:p>
           <a:p>
@@ -9802,7 +9818,7 @@
                 </a:solidFill>
                 <a:latin typeface="Arial"/>
               </a:rPr>
-              <a:t>The focal spot with the dimple on its core (left); the mask itself — a 1.57 rad phase disk with grey edges from area-weighted supersampling (right).</a:t>
+              <a:t>The focal spot with the dimple on its core (left); the mask itself — a 1.57 rad phase disk with gray edges from area-weighted supersampling (right).</a:t>
             </a:r>
           </a:p>
         </p:txBody>
@@ -10029,7 +10045,7 @@
                 </a:solidFill>
                 <a:latin typeface="Arial"/>
               </a:rPr>
-              <a:t>•  Colour as a joint fit, not a combination: an equal-weight combination inherits a bad channel; a joint fit through the exact reading would use 700 to 780 nm for range and 632.8 nm for the calibration of record.</a:t>
+              <a:t>•  Color as a joint fit, not a combination: an equal-weight combination inherits a bad channel; a joint fit through the exact reading would use 700 to 780 nm for range and 632.8 nm for the calibration of record.</a:t>
             </a:r>
           </a:p>
           <a:p>
@@ -10061,7 +10077,7 @@
                 </a:solidFill>
                 <a:latin typeface="Arial"/>
               </a:rPr>
-              <a:t>•  The interferometer, for balance: a PZT phase shift buys no model gain — its floors are geometric and colour-independent — but on hardware an absolute phase scale and freedom from polarization systematics; the recommended form is a hybrid: polarization snapshot for the change measurements, a PZT on the reference flat as calibrator.  Its all-mirror (OAP) version is in build.</a:t>
+              <a:t>•  The interferometer, for balance: a PZT phase shift buys no model gain — its floors are geometric and color-independent — but on hardware an absolute phase scale and freedom from polarization systematics; the recommended form is a hybrid: polarization snapshot for the change measurements, a PZT on the reference flat as calibrator.  Its all-mirror (OAP) version is in build.</a:t>
             </a:r>
           </a:p>
         </p:txBody>
@@ -10214,7 +10230,7 @@
                 </a:solidFill>
                 <a:latin typeface="Arial"/>
               </a:rPr>
-              <a:t>Before the correction: the first poke and colour results</a:t>
+              <a:t>Before the correction: the first poke and color results</a:t>
             </a:r>
           </a:p>
           <a:p>
@@ -10455,7 +10471,7 @@
                 </a:solidFill>
                 <a:latin typeface="Arial"/>
               </a:rPr>
-              <a:t>•  The colour claim ("five colours fill the blind band; single-actuator floor 720 → 224 pm") was the Talbot null moving as 1/λ.  On the corrected model there is no null and colour is not a lever (main slide 11).</a:t>
+              <a:t>•  The color claim ("five colors fill the blind band; single-actuator floor 720 → 224 pm") was the Talbot null moving as 1/λ.  On the corrected model there is no null and color is not a lever (main slide 11).</a:t>
             </a:r>
           </a:p>
         </p:txBody>
@@ -10650,7 +10666,7 @@
                 </a:solidFill>
                 <a:latin typeface="Arial"/>
               </a:rPr>
-              <a:t>•  Campaign: templates/40_benches/zwfs_dm96 — the script and parameter sheet (zwfs_params.m, zwfs_run.m, zwfs_run_figs.m, zwfs_run_batch.m, zwfs_batch.sh, macos_param_2048.txt) and its runs (runs/rec193 = the stage-7 reproduction check; ng385, ng385s3, m2048 = the sampling setups; rec193full = colour + photons); the stage scripts zwfs_s1 … zwfs_s7iter as the historical record; README with the findings chain (S1–S8); plan and rulings in macos/BRIEF_zwfs_campaign.md.</a:t>
+              <a:t>•  Campaign: templates/40_benches/zwfs_dm96 — the script and parameter sheet (zwfs_params.m, zwfs_run.m, zwfs_run_figs.m, zwfs_run_batch.m, zwfs_batch.sh, macos_param_2048.txt) and its runs (runs/rec193 = the stage-7 reproduction check; ng385, ng385s3, m2048 = the sampling setups; rec193full = color + photons); the stage scripts zwfs_s1 … zwfs_s7iter as the historical record; README with the findings chain (S1–S8); plan and rulings in macos/BRIEF_zwfs_campaign.md.</a:t>
             </a:r>
           </a:p>
           <a:p>
@@ -11240,7 +11256,7 @@
                 </a:solidFill>
                 <a:latin typeface="Arial"/>
               </a:rPr>
-              <a:t>•  Floor: the spread (rms) of the actuators that were not changed, in picometres.  It is what the measurement puts on actuators that should read zero.</a:t>
+              <a:t>•  Floor: the spread (rms) of the actuators that were not changed, in picometers.  It is what the measurement puts on actuators that should read zero.</a:t>
             </a:r>
           </a:p>
           <a:p>
@@ -11384,7 +11400,7 @@
                 </a:solidFill>
                 <a:latin typeface="Arial"/>
               </a:rPr>
-              <a:t>The mask is real hardware, modelled with its own numbers</a:t>
+              <a:t>The mask is real hardware, modeled with its own numbers</a:t>
             </a:r>
           </a:p>
           <a:p>
@@ -11775,7 +11791,7 @@
                 </a:solidFill>
                 <a:latin typeface="Arial"/>
               </a:rPr>
-              <a:t>•  In the model: the etched disk is a complex mask multiplied into the calculated field at the focus — edges area-weighted at 8× supersampling, the disk centred on the measured spot (the same alignment the real plate gets by moving it).  An exact identity checks it: the masked field equals the direct part plus the dimple's part to 15 digits, so the mask provably acts on the light.</a:t>
+              <a:t>•  In the model: the etched disk is a complex mask multiplied into the calculated field at the focus — edges area-weighted at 8× supersampling, the disk centered on the measured spot (the same alignment the real plate gets by moving it).  An exact identity checks it: the masked field equals the direct part plus the dimple's part to 15 digits, so the mask provably acts on the light.</a:t>
             </a:r>
           </a:p>
           <a:p>
@@ -14009,7 +14025,7 @@
                 </a:solidFill>
                 <a:latin typeface="Arial"/>
               </a:rPr>
-              <a:t>•  What it settled: the gain on a test actuator (calibrated on the centre actuator, tested on another) is set by the ray count, not by the dimple's sampling — the same at 4 and 8 pixels across the dimple, the same at spot 3.0.  At 5 pixels per actuator it is 0.996: within the 3% the plan asked for.</a:t>
+              <a:t>•  What it settled: the gain on a test actuator (calibrated on the center actuator, tested on another) is set by the ray count, not by the dimple's sampling — the same at 4 and 8 pixels across the dimple, the same at spot 3.0.  At 5 pixels per actuator it is 0.996: within the 3% the plan asked for.</a:t>
             </a:r>
           </a:p>
           <a:p>
@@ -14025,7 +14041,7 @@
                 </a:solidFill>
                 <a:latin typeface="Arial"/>
               </a:rPr>
-              <a:t>•  A bias in the fit, found and fixed: the sensor's response pattern was sampled about the poke on the 0.28 mm map grid, up to 0.14 mm off the actuator centre the fit uses.  Sampled at the centre, a kernel tested at its own site recovers 0.99 instead of 0.96, and the numbers above rose from 0.900 / 0.935 / 0.935.  The interferometer's calibration code shares the bias (flagged for its reflective build).</a:t>
+              <a:t>•  A bias in the fit, found and fixed: the sensor's response pattern was sampled about the poke on the 0.28 mm map grid, up to 0.14 mm off the actuator center the fit uses.  Sampled at the center, a kernel tested at its own site recovers 0.99 instead of 0.96, and the numbers above rose from 0.900 / 0.935 / 0.935.  The interferometer's calibration code shares the bias (flagged for its reflective build).</a:t>
             </a:r>
           </a:p>
           <a:p>

--- a/demo_session/deck_zwfs.pptx
+++ b/demo_session/deck_zwfs.pptx
@@ -5145,7 +5145,7 @@
                 </a:solidFill>
                 <a:latin typeface="Arial"/>
               </a:rPr>
-              <a:t>Photons: 10¹⁴ per state reaches 1 pm</a:t>
+              <a:t>Photons: 10¹⁴ per measurement reaches 1 pm</a:t>
             </a:r>
           </a:p>
           <a:p>
@@ -5268,7 +5268,7 @@
                 </a:solidFill>
                 <a:latin typeface="Arial"/>
               </a:rPr>
-              <a:t>Noise on the single-actuator estimate against photons per state, per reading; the dotted line is the 1 pm target.</a:t>
+              <a:t>Noise on the single-actuator estimate against photons per measurement, per reading; the dotted line is the 1 pm target.</a:t>
             </a:r>
           </a:p>
         </p:txBody>
@@ -5330,7 +5330,7 @@
                           </a:solidFill>
                           <a:latin typeface="Arial"/>
                         </a:rPr>
-                        <a:t>photons per state for 1 pm</a:t>
+                        <a:t>photons per measurement for 1 pm</a:t>
                       </a:r>
                     </a:p>
                   </a:txBody>
@@ -5560,7 +5560,7 @@
                           </a:solidFill>
                           <a:latin typeface="Arial"/>
                         </a:rPr>
-                        <a:t>1.0×10¹⁴</a:t>
+                        <a:t>1.0×10¹⁴ (four frames of 2.5×10¹³)</a:t>
                       </a:r>
                     </a:p>
                   </a:txBody>
@@ -5606,7 +5606,7 @@
                           </a:solidFill>
                           <a:latin typeface="Arial"/>
                         </a:rPr>
-                        <a:t>8×10¹⁴</a:t>
+                        <a:t>8×10¹⁴ (four frames of 2×10¹⁴)</a:t>
                       </a:r>
                     </a:p>
                   </a:txBody>
@@ -5655,7 +5655,7 @@
                 </a:solidFill>
                 <a:latin typeface="Arial"/>
               </a:rPr>
-              <a:t>•  What "photons per state" counts: every photon the camera detects over the whole pupil image while one DM shape is measured once, summed over the frames that measurement needs: one frame for the one-frame readings, four for the stepped reading (a quarter each).  Not per mode or per actuator: 10¹⁴ per state is 3×10¹⁰ per lit actuator.  Measuring a change takes two states, so twice the number.</a:t>
+              <a:t>•  What "photons per measurement" counts: every photon the camera detects over the whole pupil image while one DM shape is measured once, summed over the frames that reading needs: one frame for the one-frame readings, four for the stepped reading (a quarter each).  Not per mode or per actuator: 10¹⁴ per measurement is 3×10¹⁰ per lit actuator.  Measuring a change takes two measurements, so twice the number.</a:t>
             </a:r>
           </a:p>
           <a:p>
@@ -5671,7 +5671,7 @@
                 </a:solidFill>
                 <a:latin typeface="Arial"/>
               </a:rPr>
-              <a:t>•  In laser terms: at 633 nm, 10¹⁴ photons is 31 µJ.  The test arm passes a 50/50 splitter twice, so a quarter of the laser power reaches the camera (other losses not counted): a 1 mW laser needs 0.13 s per state, a 5 mW laser 25 ms; the interferometer's 8×10¹⁴ is 1 s at 1 mW.</a:t>
+              <a:t>•  In laser terms: at 633 nm, 10¹⁴ photons is 31 µJ.  The test arm passes a 50/50 splitter twice, so a quarter of the laser power reaches the camera (other losses not counted): a 1 mW laser needs 0.13 s per measurement, a 5 mW laser 25 ms; the interferometer's 8×10¹⁴ is 1 s at 1 mW.</a:t>
             </a:r>
           </a:p>
           <a:p>
@@ -5687,7 +5687,7 @@
                 </a:solidFill>
                 <a:latin typeface="Arial"/>
               </a:rPr>
-              <a:t>•  Method: noise-free frames once per state, photon shot noise added numerically, eight trials per point.  The 1 pm budget is about systematic errors and gain stability, not light.</a:t>
+              <a:t>•  Method: noise-free frames once per measurement, photon shot noise added numerically, eight trials per point.  The 1 pm budget is about systematic errors and gain stability, not light.</a:t>
             </a:r>
           </a:p>
         </p:txBody>
@@ -6423,7 +6423,7 @@
                 </a:solidFill>
                 <a:latin typeface="Arial"/>
               </a:rPr>
-              <a:t>•  The loop: the DM is held at the 30 nm working surface by a proportional servo (gain 0.5) closed through one reading; each cycle the DM shape is measured once with N photons (photons per state, slide 13), compared with the set point's frames, and half the estimated change removed.  The same loop code will run the interferometer.</a:t>
+              <a:t>•  The loop: the DM is held at the 30 nm working surface by a proportional servo (gain 0.5) closed through one reading; each cycle the DM shape is measured once with N photons (photons per measurement, slide 13), compared with the set point's frames, and half the estimated change removed.  The same loop code will run the interferometer.</a:t>
             </a:r>
           </a:p>
           <a:p>
@@ -7774,7 +7774,7 @@
                           </a:solidFill>
                           <a:latin typeface="Arial"/>
                         </a:rPr>
-                        <a:t>photons per state for 1 pm</a:t>
+                        <a:t>photons per measurement for 1 pm</a:t>
                       </a:r>
                     </a:p>
                   </a:txBody>
@@ -8903,7 +8903,7 @@
                           </a:solidFill>
                           <a:latin typeface="Arial"/>
                         </a:rPr>
-                        <a:t>1.6 pm repeatability in 4.3 s by alternating flat and waffle DM states and averaging the differences; a reconstruction robust at the highest spatial frequencies</a:t>
+                        <a:t>1.6 pm repeatability in 4.3 s by alternating flat and waffle DM shapes and averaging the differences; a reconstruction robust at the highest spatial frequencies</a:t>
                       </a:r>
                     </a:p>
                   </a:txBody>
@@ -9512,7 +9512,7 @@
                 </a:solidFill>
                 <a:latin typeface="Arial"/>
               </a:rPr>
-              <a:t>•  Color and photons are not levers: the chromatic null was the defocus; 10¹⁴ photons per state reach 1 pm.  The budget is systematic error: the 25 to 60 pm floors and the gain's stability.</a:t>
+              <a:t>•  Color and photons are not levers: the chromatic null was the defocus; 10¹⁴ photons per measurement reach 1 pm.  The budget is systematic error: the 25 to 60 pm floors and the gain's stability.</a:t>
             </a:r>
           </a:p>
           <a:p>
@@ -11304,7 +11304,7 @@
                 </a:solidFill>
                 <a:latin typeface="Arial"/>
               </a:rPr>
-              <a:t>•  State and frame: a state is one DM shape measured once.  A measurement of a change costs two states.  A state costs one camera frame for the one-frame readings and four frames for the stepped reading; photon budgets are quoted per state.</a:t>
+              <a:t>•  Measurement and frame: a measurement is one DM shape measured once; it takes one camera frame for the one-frame readings and four for the stepped reading.  Measuring a change costs two measurements (before and after).  Photon budgets are quoted per measurement, all its frames summed.</a:t>
             </a:r>
           </a:p>
         </p:txBody>

--- a/demo_session/deck_zwfs.pptx
+++ b/demo_session/deck_zwfs.pptx
@@ -28,6 +28,7 @@
     <p:sldId id="276" r:id="rId27"/>
     <p:sldId id="277" r:id="rId28"/>
     <p:sldId id="278" r:id="rId29"/>
+    <p:sldId id="279" r:id="rId30"/>
   </p:sldIdLst>
   <p:sldSz cx="12191695" cy="6858000" type="screen4x3"/>
   <p:notesSz cx="6858000" cy="9144000"/>
@@ -5921,7 +5922,7 @@
         </p:nvGraphicFramePr>
         <p:xfrm>
           <a:off x="6400800" y="1298448"/>
-          <a:ext cx="5394959" cy="2000250"/>
+          <a:ext cx="5394958" cy="2000250"/>
         </p:xfrm>
         <a:graphic>
           <a:graphicData uri="http://schemas.openxmlformats.org/drawingml/2006/table">
@@ -5930,10 +5931,11 @@
                 <a:tableStyleId>{5C22544A-7EE6-4342-B048-85BDC9FD1C3A}</a:tableStyleId>
               </a:tblPr>
               <a:tblGrid>
-                <a:gridCol w="1622874"/>
-                <a:gridCol w="1052675"/>
-                <a:gridCol w="921090"/>
-                <a:gridCol w="1798320"/>
+                <a:gridCol w="1304663"/>
+                <a:gridCol w="846268"/>
+                <a:gridCol w="740484"/>
+                <a:gridCol w="1445708"/>
+                <a:gridCol w="1057835"/>
               </a:tblGrid>
               <a:tr h="434340">
                 <a:tc>
@@ -6024,6 +6026,28 @@
                     </a:solidFill>
                   </a:tcPr>
                 </a:tc>
+                <a:tc>
+                  <a:txBody>
+                    <a:bodyPr wrap="square"/>
+                    <a:lstStyle/>
+                    <a:p>
+                      <a:r>
+                        <a:rPr sz="1000" b="1">
+                          <a:solidFill>
+                            <a:srgbClr val="FFFFFF"/>
+                          </a:solidFill>
+                          <a:latin typeface="Arial"/>
+                        </a:rPr>
+                        <a:t>polarized pair (V, next slide)</a:t>
+                      </a:r>
+                    </a:p>
+                  </a:txBody>
+                  <a:tcPr marL="54864" marR="54864" marT="18288" marB="18288">
+                    <a:solidFill>
+                      <a:srgbClr val="1F4E79"/>
+                    </a:solidFill>
+                  </a:tcPr>
+                </a:tc>
               </a:tr>
               <a:tr h="262890">
                 <a:tc>
@@ -6114,6 +6138,28 @@
                     </a:solidFill>
                   </a:tcPr>
                 </a:tc>
+                <a:tc>
+                  <a:txBody>
+                    <a:bodyPr wrap="square"/>
+                    <a:lstStyle/>
+                    <a:p>
+                      <a:r>
+                        <a:rPr sz="1000" b="0">
+                          <a:solidFill>
+                            <a:srgbClr val="282828"/>
+                          </a:solidFill>
+                          <a:latin typeface="Arial"/>
+                        </a:rPr>
+                        <a:t>1.5×10¹²</a:t>
+                      </a:r>
+                    </a:p>
+                  </a:txBody>
+                  <a:tcPr marL="54864" marR="54864" marT="18288" marB="18288">
+                    <a:solidFill>
+                      <a:srgbClr val="FFFFFF"/>
+                    </a:solidFill>
+                  </a:tcPr>
+                </a:tc>
               </a:tr>
               <a:tr h="434340">
                 <a:tc>
@@ -6204,6 +6250,28 @@
                     </a:solidFill>
                   </a:tcPr>
                 </a:tc>
+                <a:tc>
+                  <a:txBody>
+                    <a:bodyPr wrap="square"/>
+                    <a:lstStyle/>
+                    <a:p>
+                      <a:r>
+                        <a:rPr sz="1000" b="0">
+                          <a:solidFill>
+                            <a:srgbClr val="282828"/>
+                          </a:solidFill>
+                          <a:latin typeface="Arial"/>
+                        </a:rPr>
+                        <a:t>5.3×10¹²</a:t>
+                      </a:r>
+                    </a:p>
+                  </a:txBody>
+                  <a:tcPr marL="54864" marR="54864" marT="18288" marB="18288">
+                    <a:solidFill>
+                      <a:srgbClr val="ECF1F6"/>
+                    </a:solidFill>
+                  </a:tcPr>
+                </a:tc>
               </a:tr>
               <a:tr h="434340">
                 <a:tc>
@@ -6294,6 +6362,28 @@
                     </a:solidFill>
                   </a:tcPr>
                 </a:tc>
+                <a:tc>
+                  <a:txBody>
+                    <a:bodyPr wrap="square"/>
+                    <a:lstStyle/>
+                    <a:p>
+                      <a:r>
+                        <a:rPr sz="1000" b="0">
+                          <a:solidFill>
+                            <a:srgbClr val="282828"/>
+                          </a:solidFill>
+                          <a:latin typeface="Arial"/>
+                        </a:rPr>
+                        <a:t>9.9 pm</a:t>
+                      </a:r>
+                    </a:p>
+                  </a:txBody>
+                  <a:tcPr marL="54864" marR="54864" marT="18288" marB="18288">
+                    <a:solidFill>
+                      <a:srgbClr val="FFFFFF"/>
+                    </a:solidFill>
+                  </a:tcPr>
+                </a:tc>
               </a:tr>
               <a:tr h="434340">
                 <a:tc>
@@ -6353,6 +6443,28 @@
                           <a:latin typeface="Arial"/>
                         </a:rPr>
                         <a:t>99 nm</a:t>
+                      </a:r>
+                    </a:p>
+                  </a:txBody>
+                  <a:tcPr marL="54864" marR="54864" marT="18288" marB="18288">
+                    <a:solidFill>
+                      <a:srgbClr val="ECF1F6"/>
+                    </a:solidFill>
+                  </a:tcPr>
+                </a:tc>
+                <a:tc>
+                  <a:txBody>
+                    <a:bodyPr wrap="square"/>
+                    <a:lstStyle/>
+                    <a:p>
+                      <a:r>
+                        <a:rPr sz="1000" b="0">
+                          <a:solidFill>
+                            <a:srgbClr val="282828"/>
+                          </a:solidFill>
+                          <a:latin typeface="Arial"/>
+                        </a:rPr>
+                        <a:t>0.000 pm</a:t>
                       </a:r>
                     </a:p>
                   </a:txBody>
@@ -6535,7 +6647,7 @@
                 </a:solidFill>
                 <a:latin typeface="Arial"/>
               </a:rPr>
-              <a:t>Run it yourself</a:t>
+              <a:t>The polarized dimple: two images at once, no fold</a:t>
             </a:r>
           </a:p>
           <a:p>
@@ -6551,7 +6663,7 @@
                 </a:solidFill>
                 <a:latin typeface="Arial"/>
               </a:rPr>
-              <a:t>One parameter sheet and one script reproduce every number here; the defaults reproduce the stage-7 record to the last printed digit</a:t>
+              <a:t>A dimple that shifts the two circular polarizations by opposite phases gives an exact reading from two simultaneous frames; it is the best reading on every line</a:t>
             </a:r>
           </a:p>
         </p:txBody>
@@ -6600,16 +6712,40 @@
           </a:p>
         </p:txBody>
       </p:sp>
-      <p:sp>
-        <p:nvSpPr>
-          <p:cNvPr id="4" name="TextBox 3"/>
+      <p:pic>
+        <p:nvPicPr>
+          <p:cNvPr id="4" name="Picture 3" descr="crop_zwfs_vloop193_right.png"/>
+          <p:cNvPicPr>
+            <a:picLocks noChangeAspect="1"/>
+          </p:cNvPicPr>
+          <p:nvPr/>
+        </p:nvPicPr>
+        <p:blipFill>
+          <a:blip r:embed="rId2"/>
+          <a:stretch>
+            <a:fillRect/>
+          </a:stretch>
+        </p:blipFill>
+        <p:spPr>
+          <a:xfrm>
+            <a:off x="1639392" y="1298448"/>
+            <a:ext cx="3350615" cy="2823972"/>
+          </a:xfrm>
+          <a:prstGeom prst="rect">
+            <a:avLst/>
+          </a:prstGeom>
+        </p:spPr>
+      </p:pic>
+      <p:sp>
+        <p:nvSpPr>
+          <p:cNvPr id="5" name="TextBox 4"/>
           <p:cNvSpPr txBox="1"/>
           <p:nvPr/>
         </p:nvSpPr>
         <p:spPr>
           <a:xfrm>
-            <a:off x="411480" y="1298448"/>
-            <a:ext cx="11368735" cy="274320"/>
+            <a:off x="411480" y="4140708"/>
+            <a:ext cx="5806440" cy="559307"/>
           </a:xfrm>
           <a:prstGeom prst="rect">
             <a:avLst/>
@@ -6622,34 +6758,34 @@
           </a:bodyPr>
           <a:lstStyle/>
           <a:p>
-            <a:pPr>
+            <a:pPr algn="ctr">
               <a:spcAft>
-                <a:spcPts val="600"/>
+                <a:spcPts val="0"/>
               </a:spcAft>
             </a:pPr>
             <a:r>
-              <a:rPr sz="1500" b="0">
-                <a:solidFill>
-                  <a:srgbClr val="282828"/>
+              <a:rPr sz="1000" b="0">
+                <a:solidFill>
+                  <a:srgbClr val="6E6E6E"/>
                 </a:solidFill>
                 <a:latin typeface="Arial"/>
               </a:rPr>
-              <a:t>•  Two files: zwfs_params.m returns every setting at its value of record — grid and ray count, wavelength, the bench's lengths and tuned figures, the mask's etch and spot, the sampling checks, registration, the DM sizes, the test amplitudes and seeds, the color and photon stages.  zwfs_run.m runs the chosen stages and writes the report, a .mat file and the figures into a folder named by the run's tag.</a:t>
+              <a:t>Steady-state hold error against photons per cycle for the stepped reading (green) and the polarized-dimple pair (purple), under no drift (dotted), a 2 pm random walk (solid) and a 5 pm thermal ramp (dashed).  Right panel of the runner's figure.</a:t>
             </a:r>
           </a:p>
         </p:txBody>
       </p:sp>
       <p:graphicFrame>
         <p:nvGraphicFramePr>
-          <p:cNvPr id="5" name="Table 4"/>
+          <p:cNvPr id="6" name="Table 5"/>
           <p:cNvGraphicFramePr>
             <a:graphicFrameLocks noGrp="1"/>
           </p:cNvGraphicFramePr>
           <p:nvPr/>
         </p:nvGraphicFramePr>
         <p:xfrm>
-          <a:off x="411480" y="2465831"/>
-          <a:ext cx="11368735" cy="1680210"/>
+          <a:off x="6400800" y="1298448"/>
+          <a:ext cx="5394960" cy="2354580"/>
         </p:xfrm>
         <a:graphic>
           <a:graphicData uri="http://schemas.openxmlformats.org/drawingml/2006/table">
@@ -6658,23 +6794,24 @@
                 <a:tableStyleId>{5C22544A-7EE6-4342-B048-85BDC9FD1C3A}</a:tableStyleId>
               </a:tblPr>
               <a:tblGrid>
-                <a:gridCol w="6601201"/>
-                <a:gridCol w="4767534"/>
+                <a:gridCol w="2697480"/>
+                <a:gridCol w="1198880"/>
+                <a:gridCol w="1498600"/>
               </a:tblGrid>
-              <a:tr h="280035">
-                <a:tc>
-                  <a:txBody>
-                    <a:bodyPr wrap="square"/>
-                    <a:lstStyle/>
-                    <a:p>
-                      <a:r>
-                        <a:rPr sz="1100" b="1">
+              <a:tr h="434340">
+                <a:tc>
+                  <a:txBody>
+                    <a:bodyPr wrap="square"/>
+                    <a:lstStyle/>
+                    <a:p>
+                      <a:r>
+                        <a:rPr sz="1000" b="1">
                           <a:solidFill>
                             <a:srgbClr val="FFFFFF"/>
                           </a:solidFill>
                           <a:latin typeface="Arial"/>
                         </a:rPr>
-                        <a:t>call</a:t>
+                        <a:t>matrix measured on the 30 nm surface; 193 rays</a:t>
                       </a:r>
                     </a:p>
                   </a:txBody>
@@ -6690,13 +6827,13 @@
                     <a:lstStyle/>
                     <a:p>
                       <a:r>
-                        <a:rPr sz="1100" b="1">
+                        <a:rPr sz="1000" b="1">
                           <a:solidFill>
                             <a:srgbClr val="FFFFFF"/>
                           </a:solidFill>
                           <a:latin typeface="Arial"/>
                         </a:rPr>
-                        <a:t>what it does</a:t>
+                        <a:t>stepped (S), four frames</a:t>
                       </a:r>
                     </a:p>
                   </a:txBody>
@@ -6706,21 +6843,43 @@
                     </a:solidFill>
                   </a:tcPr>
                 </a:tc>
+                <a:tc>
+                  <a:txBody>
+                    <a:bodyPr wrap="square"/>
+                    <a:lstStyle/>
+                    <a:p>
+                      <a:r>
+                        <a:rPr sz="1000" b="1">
+                          <a:solidFill>
+                            <a:srgbClr val="FFFFFF"/>
+                          </a:solidFill>
+                          <a:latin typeface="Arial"/>
+                        </a:rPr>
+                        <a:t>polarized pair (V), two frames</a:t>
+                      </a:r>
+                    </a:p>
+                  </a:txBody>
+                  <a:tcPr marL="54864" marR="54864" marT="18288" marB="18288">
+                    <a:solidFill>
+                      <a:srgbClr val="1F4E79"/>
+                    </a:solidFill>
+                  </a:tcPr>
+                </a:tc>
               </a:tr>
-              <a:tr h="280035">
-                <a:tc>
-                  <a:txBody>
-                    <a:bodyPr wrap="square"/>
-                    <a:lstStyle/>
-                    <a:p>
-                      <a:r>
-                        <a:rPr sz="1100" b="0">
-                          <a:solidFill>
-                            <a:srgbClr val="282828"/>
-                          </a:solidFill>
-                          <a:latin typeface="Arial"/>
-                        </a:rPr>
-                        <a:t>zwfs_run</a:t>
+              <a:tr h="262890">
+                <a:tc>
+                  <a:txBody>
+                    <a:bodyPr wrap="square"/>
+                    <a:lstStyle/>
+                    <a:p>
+                      <a:r>
+                        <a:rPr sz="1000" b="0">
+                          <a:solidFill>
+                            <a:srgbClr val="282828"/>
+                          </a:solidFill>
+                          <a:latin typeface="Arial"/>
+                        </a:rPr>
+                        <a:t>single 10 nm change: gain, floor</a:t>
                       </a:r>
                     </a:p>
                   </a:txBody>
@@ -6736,13 +6895,13 @@
                     <a:lstStyle/>
                     <a:p>
                       <a:r>
-                        <a:rPr sz="1100" b="0">
-                          <a:solidFill>
-                            <a:srgbClr val="282828"/>
-                          </a:solidFill>
-                          <a:latin typeface="Arial"/>
-                        </a:rPr>
-                        <a:t>the record: bench checks, the full test set, figures</a:t>
+                        <a:rPr sz="1000" b="0">
+                          <a:solidFill>
+                            <a:srgbClr val="282828"/>
+                          </a:solidFill>
+                          <a:latin typeface="Arial"/>
+                        </a:rPr>
+                        <a:t>0.989, 5 pm</a:t>
                       </a:r>
                     </a:p>
                   </a:txBody>
@@ -6752,21 +6911,43 @@
                     </a:solidFill>
                   </a:tcPr>
                 </a:tc>
+                <a:tc>
+                  <a:txBody>
+                    <a:bodyPr wrap="square"/>
+                    <a:lstStyle/>
+                    <a:p>
+                      <a:r>
+                        <a:rPr sz="1000" b="0">
+                          <a:solidFill>
+                            <a:srgbClr val="282828"/>
+                          </a:solidFill>
+                          <a:latin typeface="Arial"/>
+                        </a:rPr>
+                        <a:t>0.994, 4 pm</a:t>
+                      </a:r>
+                    </a:p>
+                  </a:txBody>
+                  <a:tcPr marL="54864" marR="54864" marT="18288" marB="18288">
+                    <a:solidFill>
+                      <a:srgbClr val="FFFFFF"/>
+                    </a:solidFill>
+                  </a:tcPr>
+                </a:tc>
               </a:tr>
-              <a:tr h="280035">
-                <a:tc>
-                  <a:txBody>
-                    <a:bodyPr wrap="square"/>
-                    <a:lstStyle/>
-                    <a:p>
-                      <a:r>
-                        <a:rPr sz="1100" b="0">
-                          <a:solidFill>
-                            <a:srgbClr val="282828"/>
-                          </a:solidFill>
-                          <a:latin typeface="Arial"/>
-                        </a:rPr>
-                        <a:t>zwfs_run('tag','ng385', 'NGRID',385)</a:t>
+              <a:tr h="262890">
+                <a:tc>
+                  <a:txBody>
+                    <a:bodyPr wrap="square"/>
+                    <a:lstStyle/>
+                    <a:p>
+                      <a:r>
+                        <a:rPr sz="1000" b="0">
+                          <a:solidFill>
+                            <a:srgbClr val="282828"/>
+                          </a:solidFill>
+                          <a:latin typeface="Arial"/>
+                        </a:rPr>
+                        <a:t>47 actuators changed 1 nm</a:t>
                       </a:r>
                     </a:p>
                   </a:txBody>
@@ -6782,13 +6963,13 @@
                     <a:lstStyle/>
                     <a:p>
                       <a:r>
-                        <a:rPr sz="1100" b="0">
-                          <a:solidFill>
-                            <a:srgbClr val="282828"/>
-                          </a:solidFill>
-                          <a:latin typeface="Arial"/>
-                        </a:rPr>
-                        <a:t>the 1-megapixel camera</a:t>
+                        <a:rPr sz="1000" b="0">
+                          <a:solidFill>
+                            <a:srgbClr val="282828"/>
+                          </a:solidFill>
+                          <a:latin typeface="Arial"/>
+                        </a:rPr>
+                        <a:t>0.999, 4 pm</a:t>
                       </a:r>
                     </a:p>
                   </a:txBody>
@@ -6798,21 +6979,43 @@
                     </a:solidFill>
                   </a:tcPr>
                 </a:tc>
+                <a:tc>
+                  <a:txBody>
+                    <a:bodyPr wrap="square"/>
+                    <a:lstStyle/>
+                    <a:p>
+                      <a:r>
+                        <a:rPr sz="1000" b="0">
+                          <a:solidFill>
+                            <a:srgbClr val="282828"/>
+                          </a:solidFill>
+                          <a:latin typeface="Arial"/>
+                        </a:rPr>
+                        <a:t>0.999, 3 pm</a:t>
+                      </a:r>
+                    </a:p>
+                  </a:txBody>
+                  <a:tcPr marL="54864" marR="54864" marT="18288" marB="18288">
+                    <a:solidFill>
+                      <a:srgbClr val="ECF1F6"/>
+                    </a:solidFill>
+                  </a:tcPr>
+                </a:tc>
               </a:tr>
-              <a:tr h="280035">
-                <a:tc>
-                  <a:txBody>
-                    <a:bodyPr wrap="square"/>
-                    <a:lstStyle/>
-                    <a:p>
-                      <a:r>
-                        <a:rPr sz="1100" b="0">
-                          <a:solidFill>
-                            <a:srgbClr val="282828"/>
-                          </a:solidFill>
-                          <a:latin typeface="Arial"/>
-                        </a:rPr>
-                        <a:t>zwfs_run('MODEL',2048, 'NGRID',385, 'param_file','macos_param_2048.txt')</a:t>
+              <a:tr h="262890">
+                <a:tc>
+                  <a:txBody>
+                    <a:bodyPr wrap="square"/>
+                    <a:lstStyle/>
+                    <a:p>
+                      <a:r>
+                        <a:rPr sz="1000" b="0">
+                          <a:solidFill>
+                            <a:srgbClr val="282828"/>
+                          </a:solidFill>
+                          <a:latin typeface="Arial"/>
+                        </a:rPr>
+                        <a:t>dense random 10 nm: gain, error</a:t>
                       </a:r>
                     </a:p>
                   </a:txBody>
@@ -6828,13 +7031,13 @@
                     <a:lstStyle/>
                     <a:p>
                       <a:r>
-                        <a:rPr sz="1100" b="0">
-                          <a:solidFill>
-                            <a:srgbClr val="282828"/>
-                          </a:solidFill>
-                          <a:latin typeface="Arial"/>
-                        </a:rPr>
-                        <a:t>the fully sampled setup on a 30 GB machine</a:t>
+                        <a:rPr sz="1000" b="0">
+                          <a:solidFill>
+                            <a:srgbClr val="282828"/>
+                          </a:solidFill>
+                          <a:latin typeface="Arial"/>
+                        </a:rPr>
+                        <a:t>0.98, 0.68 nm</a:t>
                       </a:r>
                     </a:p>
                   </a:txBody>
@@ -6844,21 +7047,43 @@
                     </a:solidFill>
                   </a:tcPr>
                 </a:tc>
+                <a:tc>
+                  <a:txBody>
+                    <a:bodyPr wrap="square"/>
+                    <a:lstStyle/>
+                    <a:p>
+                      <a:r>
+                        <a:rPr sz="1000" b="0">
+                          <a:solidFill>
+                            <a:srgbClr val="282828"/>
+                          </a:solidFill>
+                          <a:latin typeface="Arial"/>
+                        </a:rPr>
+                        <a:t>1.000, 0.33 nm</a:t>
+                      </a:r>
+                    </a:p>
+                  </a:txBody>
+                  <a:tcPr marL="54864" marR="54864" marT="18288" marB="18288">
+                    <a:solidFill>
+                      <a:srgbClr val="FFFFFF"/>
+                    </a:solidFill>
+                  </a:tcPr>
+                </a:tc>
               </a:tr>
-              <a:tr h="280035">
-                <a:tc>
-                  <a:txBody>
-                    <a:bodyPr wrap="square"/>
-                    <a:lstStyle/>
-                    <a:p>
-                      <a:r>
-                        <a:rPr sz="1100" b="0">
-                          <a:solidFill>
-                            <a:srgbClr val="282828"/>
-                          </a:solidFill>
-                          <a:latin typeface="Arial"/>
-                        </a:rPr>
-                        <a:t>zwfs_run('stages',{'battery','color','noise','figs'})</a:t>
+              <a:tr h="434340">
+                <a:tc>
+                  <a:txBody>
+                    <a:bodyPr wrap="square"/>
+                    <a:lstStyle/>
+                    <a:p>
+                      <a:r>
+                        <a:rPr sz="1000" b="0">
+                          <a:solidFill>
+                            <a:srgbClr val="282828"/>
+                          </a:solidFill>
+                          <a:latin typeface="Arial"/>
+                        </a:rPr>
+                        <a:t>gain at 40 / 50 / 60 nm rms with the 30 nm calibration</a:t>
                       </a:r>
                     </a:p>
                   </a:txBody>
@@ -6874,13 +7099,13 @@
                     <a:lstStyle/>
                     <a:p>
                       <a:r>
-                        <a:rPr sz="1100" b="0">
-                          <a:solidFill>
-                            <a:srgbClr val="282828"/>
-                          </a:solidFill>
-                          <a:latin typeface="Arial"/>
-                        </a:rPr>
-                        <a:t>everything on this deck's later slides</a:t>
+                        <a:rPr sz="1000" b="0">
+                          <a:solidFill>
+                            <a:srgbClr val="282828"/>
+                          </a:solidFill>
+                          <a:latin typeface="Arial"/>
+                        </a:rPr>
+                        <a:t>0.91 / 0.86 / 0.66</a:t>
                       </a:r>
                     </a:p>
                   </a:txBody>
@@ -6890,21 +7115,43 @@
                     </a:solidFill>
                   </a:tcPr>
                 </a:tc>
+                <a:tc>
+                  <a:txBody>
+                    <a:bodyPr wrap="square"/>
+                    <a:lstStyle/>
+                    <a:p>
+                      <a:r>
+                        <a:rPr sz="1000" b="0">
+                          <a:solidFill>
+                            <a:srgbClr val="282828"/>
+                          </a:solidFill>
+                          <a:latin typeface="Arial"/>
+                        </a:rPr>
+                        <a:t>0.996 / 0.991 / 0.981</a:t>
+                      </a:r>
+                    </a:p>
+                  </a:txBody>
+                  <a:tcPr marL="54864" marR="54864" marT="18288" marB="18288">
+                    <a:solidFill>
+                      <a:srgbClr val="ECF1F6"/>
+                    </a:solidFill>
+                  </a:tcPr>
+                </a:tc>
               </a:tr>
-              <a:tr h="280035">
-                <a:tc>
-                  <a:txBody>
-                    <a:bodyPr wrap="square"/>
-                    <a:lstStyle/>
-                    <a:p>
-                      <a:r>
-                        <a:rPr sz="1100" b="0">
-                          <a:solidFill>
-                            <a:srgbClr val="282828"/>
-                          </a:solidFill>
-                          <a:latin typeface="Arial"/>
-                        </a:rPr>
-                        <a:t>./zwfs_batch.sh TAG "the same arguments"</a:t>
+              <a:tr h="262890">
+                <a:tc>
+                  <a:txBody>
+                    <a:bodyPr wrap="square"/>
+                    <a:lstStyle/>
+                    <a:p>
+                      <a:r>
+                        <a:rPr sz="1000" b="0">
+                          <a:solidFill>
+                            <a:srgbClr val="282828"/>
+                          </a:solidFill>
+                          <a:latin typeface="Arial"/>
+                        </a:rPr>
+                        <a:t>photons per measurement for 1 pm</a:t>
                       </a:r>
                     </a:p>
                   </a:txBody>
@@ -6920,19 +7167,109 @@
                     <a:lstStyle/>
                     <a:p>
                       <a:r>
-                        <a:rPr sz="1100" b="0">
-                          <a:solidFill>
-                            <a:srgbClr val="282828"/>
-                          </a:solidFill>
-                          <a:latin typeface="Arial"/>
-                        </a:rPr>
-                        <a:t>unattended, memory-capped, logged</a:t>
+                        <a:rPr sz="1000" b="0">
+                          <a:solidFill>
+                            <a:srgbClr val="282828"/>
+                          </a:solidFill>
+                          <a:latin typeface="Arial"/>
+                        </a:rPr>
+                        <a:t>5.6×10¹³</a:t>
                       </a:r>
                     </a:p>
                   </a:txBody>
                   <a:tcPr marL="54864" marR="54864" marT="18288" marB="18288">
                     <a:solidFill>
                       <a:srgbClr val="FFFFFF"/>
+                    </a:solidFill>
+                  </a:tcPr>
+                </a:tc>
+                <a:tc>
+                  <a:txBody>
+                    <a:bodyPr wrap="square"/>
+                    <a:lstStyle/>
+                    <a:p>
+                      <a:r>
+                        <a:rPr sz="1000" b="0">
+                          <a:solidFill>
+                            <a:srgbClr val="282828"/>
+                          </a:solidFill>
+                          <a:latin typeface="Arial"/>
+                        </a:rPr>
+                        <a:t>4.7×10¹³</a:t>
+                      </a:r>
+                    </a:p>
+                  </a:txBody>
+                  <a:tcPr marL="54864" marR="54864" marT="18288" marB="18288">
+                    <a:solidFill>
+                      <a:srgbClr val="FFFFFF"/>
+                    </a:solidFill>
+                  </a:tcPr>
+                </a:tc>
+              </a:tr>
+              <a:tr h="434340">
+                <a:tc>
+                  <a:txBody>
+                    <a:bodyPr wrap="square"/>
+                    <a:lstStyle/>
+                    <a:p>
+                      <a:r>
+                        <a:rPr sz="1000" b="0">
+                          <a:solidFill>
+                            <a:srgbClr val="282828"/>
+                          </a:solidFill>
+                          <a:latin typeface="Arial"/>
+                        </a:rPr>
+                        <a:t>held to 3 pm in closed loop: noise only / 2 pm walk</a:t>
+                      </a:r>
+                    </a:p>
+                  </a:txBody>
+                  <a:tcPr marL="54864" marR="54864" marT="18288" marB="18288">
+                    <a:solidFill>
+                      <a:srgbClr val="ECF1F6"/>
+                    </a:solidFill>
+                  </a:tcPr>
+                </a:tc>
+                <a:tc>
+                  <a:txBody>
+                    <a:bodyPr wrap="square"/>
+                    <a:lstStyle/>
+                    <a:p>
+                      <a:r>
+                        <a:rPr sz="1000" b="0">
+                          <a:solidFill>
+                            <a:srgbClr val="282828"/>
+                          </a:solidFill>
+                          <a:latin typeface="Arial"/>
+                        </a:rPr>
+                        <a:t>2.6×10¹² / 7.5×10¹²</a:t>
+                      </a:r>
+                    </a:p>
+                  </a:txBody>
+                  <a:tcPr marL="54864" marR="54864" marT="18288" marB="18288">
+                    <a:solidFill>
+                      <a:srgbClr val="ECF1F6"/>
+                    </a:solidFill>
+                  </a:tcPr>
+                </a:tc>
+                <a:tc>
+                  <a:txBody>
+                    <a:bodyPr wrap="square"/>
+                    <a:lstStyle/>
+                    <a:p>
+                      <a:r>
+                        <a:rPr sz="1000" b="0">
+                          <a:solidFill>
+                            <a:srgbClr val="282828"/>
+                          </a:solidFill>
+                          <a:latin typeface="Arial"/>
+                        </a:rPr>
+                        <a:t>1.5×10¹² / 5.3×10¹²</a:t>
+                      </a:r>
+                    </a:p>
+                  </a:txBody>
+                  <a:tcPr marL="54864" marR="54864" marT="18288" marB="18288">
+                    <a:solidFill>
+                      <a:srgbClr val="ECF1F6"/>
                     </a:solidFill>
                   </a:tcPr>
                 </a:tc>
@@ -6943,14 +7280,14 @@
       </p:graphicFrame>
       <p:sp>
         <p:nvSpPr>
-          <p:cNvPr id="6" name="TextBox 5"/>
+          <p:cNvPr id="7" name="TextBox 6"/>
           <p:cNvSpPr txBox="1"/>
           <p:nvPr/>
         </p:nvSpPr>
         <p:spPr>
           <a:xfrm>
-            <a:off x="411480" y="4292346"/>
-            <a:ext cx="11368735" cy="274320"/>
+            <a:off x="6400800" y="3799331"/>
+            <a:ext cx="5394960" cy="274320"/>
           </a:xfrm>
           <a:prstGeom prst="rect">
             <a:avLst/>
@@ -6969,27 +7306,43 @@
               </a:spcAft>
             </a:pPr>
             <a:r>
-              <a:rPr sz="1500" b="0">
+              <a:rPr sz="1200" b="0">
                 <a:solidFill>
                   <a:srgbClr val="282828"/>
                 </a:solidFill>
                 <a:latin typeface="Arial"/>
               </a:rPr>
-              <a:t>•  Checks that run every time: the no-mask round trip through the bracket (must return the field unchanged); the reference-wave model against the engine's own field; the pupil brightness must not change with the DM shape; the sampling checks (pixels across the dimple, camera pixels per actuator); and the search for the camera-to-DM mirror/transpose and sign.</a:t>
-            </a:r>
-          </a:p>
-        </p:txBody>
-      </p:sp>
-      <p:sp>
-        <p:nvSpPr>
-          <p:cNvPr id="7" name="TextBox 6"/>
+              <a:t>•  How it works: a geometric-phase (metasurface) dimple applies +90° to one circular polarization and −90° to the other; a polarization splitter behind the pupil relay gives both pupil images in one exposure.  Per pixel the difference of the pair gives the sine of the phase and the sum the cosine, so the phase is solved exactly with no sign fold, and the reference wave is refined as for the exact reading.</a:t>
+            </a:r>
+          </a:p>
+          <a:p>
+            <a:pPr>
+              <a:spcAft>
+                <a:spcPts val="600"/>
+              </a:spcAft>
+            </a:pPr>
+            <a:r>
+              <a:rPr sz="1200" b="0">
+                <a:solidFill>
+                  <a:srgbClr val="282828"/>
+                </a:solidFill>
+                <a:latin typeface="Arial"/>
+              </a:rPr>
+              <a:t>•  What it buys: the one-frame exact reading's fold is gone (a 100 nm poke reads to 0.05 pm where the single frame errs by 9 nm), the calibration ages five times slower, and nothing moves between the two frames.  What it does not change: the sensor's range is still set by the focal core (all readings fail past 120 nm rms) and by half a wavelength.</a:t>
+            </a:r>
+          </a:p>
+        </p:txBody>
+      </p:sp>
+      <p:sp>
+        <p:nvSpPr>
+          <p:cNvPr id="8" name="TextBox 7"/>
           <p:cNvSpPr txBox="1"/>
           <p:nvPr/>
         </p:nvSpPr>
         <p:spPr>
           <a:xfrm>
-            <a:off x="411480" y="5459730"/>
-            <a:ext cx="11368735" cy="274320"/>
+            <a:off x="6400800" y="6295643"/>
+            <a:ext cx="5394960" cy="274320"/>
           </a:xfrm>
           <a:prstGeom prst="rect">
             <a:avLst/>
@@ -7014,7 +7367,7 @@
                 </a:solidFill>
                 <a:latin typeface="Arial"/>
               </a:rPr>
-              <a:t>Reproduction check: 64 lines of results against the stage-7 report, 8 differ in the last printed digit (the actuator fit's solver tolerance).  README "Run it yourself" carries the parameter table.</a:t>
+              <a:t>Ideal metasurface: each image is the scalar sensor with its own dimple sign.  Next: metasurface retardance error, the arm's polarization aberrations, the stepped reading's between-frame drift.  Records: runs/v193base, v193noise, vloop193.</a:t>
             </a:r>
           </a:p>
         </p:txBody>
@@ -7071,7 +7424,7 @@
                 </a:solidFill>
                 <a:latin typeface="Arial"/>
               </a:rPr>
-              <a:t>Side by side with the Twyman–Green</a:t>
+              <a:t>Run it yourself</a:t>
             </a:r>
           </a:p>
           <a:p>
@@ -7087,7 +7440,7 @@
                 </a:solidFill>
                 <a:latin typeface="Arial"/>
               </a:rPr>
-              <a:t>The interferometer loses response at fine patterns and never fails; the sensor, calibrated on its working surface, reads a change to 5 pm up to 50–60 nm</a:t>
+              <a:t>One parameter sheet and one script reproduce every number here; the defaults reproduce the stage-7 record to the last printed digit</a:t>
             </a:r>
           </a:p>
         </p:txBody>
@@ -7136,17 +7489,56 @@
           </a:p>
         </p:txBody>
       </p:sp>
+      <p:sp>
+        <p:nvSpPr>
+          <p:cNvPr id="4" name="TextBox 3"/>
+          <p:cNvSpPr txBox="1"/>
+          <p:nvPr/>
+        </p:nvSpPr>
+        <p:spPr>
+          <a:xfrm>
+            <a:off x="411480" y="1298448"/>
+            <a:ext cx="11368735" cy="274320"/>
+          </a:xfrm>
+          <a:prstGeom prst="rect">
+            <a:avLst/>
+          </a:prstGeom>
+          <a:noFill/>
+        </p:spPr>
+        <p:txBody>
+          <a:bodyPr wrap="square">
+            <a:spAutoFit/>
+          </a:bodyPr>
+          <a:lstStyle/>
+          <a:p>
+            <a:pPr>
+              <a:spcAft>
+                <a:spcPts val="600"/>
+              </a:spcAft>
+            </a:pPr>
+            <a:r>
+              <a:rPr sz="1500" b="0">
+                <a:solidFill>
+                  <a:srgbClr val="282828"/>
+                </a:solidFill>
+                <a:latin typeface="Arial"/>
+              </a:rPr>
+              <a:t>•  Two files: zwfs_params.m returns every setting at its value of record — grid and ray count, wavelength, the bench's lengths and tuned figures, the mask's etch and spot, the sampling checks, registration, the DM sizes, the test amplitudes and seeds, the color and photon stages.  zwfs_run.m runs the chosen stages and writes the report, a .mat file and the figures into a folder named by the run's tag.</a:t>
+            </a:r>
+          </a:p>
+        </p:txBody>
+      </p:sp>
       <p:graphicFrame>
         <p:nvGraphicFramePr>
-          <p:cNvPr id="4" name="Table 3"/>
+          <p:cNvPr id="5" name="Table 4"/>
           <p:cNvGraphicFramePr>
             <a:graphicFrameLocks noGrp="1"/>
           </p:cNvGraphicFramePr>
           <p:nvPr/>
         </p:nvGraphicFramePr>
         <p:xfrm>
-          <a:off x="411480" y="1298448"/>
-          <a:ext cx="11368733" cy="4023360"/>
+          <a:off x="411480" y="2465831"/>
+          <a:ext cx="11368735" cy="1680210"/>
         </p:xfrm>
         <a:graphic>
           <a:graphicData uri="http://schemas.openxmlformats.org/drawingml/2006/table">
@@ -7155,16 +7547,25 @@
                 <a:tableStyleId>{5C22544A-7EE6-4342-B048-85BDC9FD1C3A}</a:tableStyleId>
               </a:tblPr>
               <a:tblGrid>
-                <a:gridCol w="3608337"/>
-                <a:gridCol w="2224317"/>
-                <a:gridCol w="5536079"/>
+                <a:gridCol w="6601201"/>
+                <a:gridCol w="4767534"/>
               </a:tblGrid>
               <a:tr h="280035">
                 <a:tc>
                   <a:txBody>
                     <a:bodyPr wrap="square"/>
                     <a:lstStyle/>
-                    <a:p/>
+                    <a:p>
+                      <a:r>
+                        <a:rPr sz="1100" b="1">
+                          <a:solidFill>
+                            <a:srgbClr val="FFFFFF"/>
+                          </a:solidFill>
+                          <a:latin typeface="Arial"/>
+                        </a:rPr>
+                        <a:t>call</a:t>
+                      </a:r>
+                    </a:p>
                   </a:txBody>
                   <a:tcPr marL="54864" marR="54864" marT="18288" marB="18288">
                     <a:solidFill>
@@ -7184,29 +7585,7 @@
                           </a:solidFill>
                           <a:latin typeface="Arial"/>
                         </a:rPr>
-                        <a:t>Twyman–Green PSI (measured)</a:t>
-                      </a:r>
-                    </a:p>
-                  </a:txBody>
-                  <a:tcPr marL="54864" marR="54864" marT="18288" marB="18288">
-                    <a:solidFill>
-                      <a:srgbClr val="1F4E79"/>
-                    </a:solidFill>
-                  </a:tcPr>
-                </a:tc>
-                <a:tc>
-                  <a:txBody>
-                    <a:bodyPr wrap="square"/>
-                    <a:lstStyle/>
-                    <a:p>
-                      <a:r>
-                        <a:rPr sz="1100" b="1">
-                          <a:solidFill>
-                            <a:srgbClr val="FFFFFF"/>
-                          </a:solidFill>
-                          <a:latin typeface="Arial"/>
-                        </a:rPr>
-                        <a:t>Zernike sensor (measured)</a:t>
+                        <a:t>what it does</a:t>
                       </a:r>
                     </a:p>
                   </a:txBody>
@@ -7230,7 +7609,7 @@
                           </a:solidFill>
                           <a:latin typeface="Arial"/>
                         </a:rPr>
-                        <a:t>reference beam</a:t>
+                        <a:t>zwfs_run</a:t>
                       </a:r>
                     </a:p>
                   </a:txBody>
@@ -7252,165 +7631,7 @@
                           </a:solidFill>
                           <a:latin typeface="Arial"/>
                         </a:rPr>
-                        <a:t>the second arm's flat</a:t>
-                      </a:r>
-                    </a:p>
-                  </a:txBody>
-                  <a:tcPr marL="54864" marR="54864" marT="18288" marB="18288">
-                    <a:solidFill>
-                      <a:srgbClr val="FFFFFF"/>
-                    </a:solidFill>
-                  </a:tcPr>
-                </a:tc>
-                <a:tc>
-                  <a:txBody>
-                    <a:bodyPr wrap="square"/>
-                    <a:lstStyle/>
-                    <a:p>
-                      <a:r>
-                        <a:rPr sz="1100" b="0">
-                          <a:solidFill>
-                            <a:srgbClr val="282828"/>
-                          </a:solidFill>
-                          <a:latin typeface="Arial"/>
-                        </a:rPr>
-                        <a:t>made from the beam's own focal core</a:t>
-                      </a:r>
-                    </a:p>
-                  </a:txBody>
-                  <a:tcPr marL="54864" marR="54864" marT="18288" marB="18288">
-                    <a:solidFill>
-                      <a:srgbClr val="FFFFFF"/>
-                    </a:solidFill>
-                  </a:tcPr>
-                </a:tc>
-              </a:tr>
-              <a:tr h="468630">
-                <a:tc>
-                  <a:txBody>
-                    <a:bodyPr wrap="square"/>
-                    <a:lstStyle/>
-                    <a:p>
-                      <a:r>
-                        <a:rPr sz="1100" b="0">
-                          <a:solidFill>
-                            <a:srgbClr val="282828"/>
-                          </a:solidFill>
-                          <a:latin typeface="Arial"/>
-                        </a:rPr>
-                        <a:t>one measurement costs</a:t>
-                      </a:r>
-                    </a:p>
-                  </a:txBody>
-                  <a:tcPr marL="54864" marR="54864" marT="18288" marB="18288">
-                    <a:solidFill>
-                      <a:srgbClr val="ECF1F6"/>
-                    </a:solidFill>
-                  </a:tcPr>
-                </a:tc>
-                <a:tc>
-                  <a:txBody>
-                    <a:bodyPr wrap="square"/>
-                    <a:lstStyle/>
-                    <a:p>
-                      <a:r>
-                        <a:rPr sz="1100" b="0">
-                          <a:solidFill>
-                            <a:srgbClr val="282828"/>
-                          </a:solidFill>
-                          <a:latin typeface="Arial"/>
-                        </a:rPr>
-                        <a:t>6 traces (3 per arm), 4 fringe frames</a:t>
-                      </a:r>
-                    </a:p>
-                  </a:txBody>
-                  <a:tcPr marL="54864" marR="54864" marT="18288" marB="18288">
-                    <a:solidFill>
-                      <a:srgbClr val="ECF1F6"/>
-                    </a:solidFill>
-                  </a:tcPr>
-                </a:tc>
-                <a:tc>
-                  <a:txBody>
-                    <a:bodyPr wrap="square"/>
-                    <a:lstStyle/>
-                    <a:p>
-                      <a:r>
-                        <a:rPr sz="1100" b="0">
-                          <a:solidFill>
-                            <a:srgbClr val="282828"/>
-                          </a:solidFill>
-                          <a:latin typeface="Arial"/>
-                        </a:rPr>
-                        <a:t>1 or 4 camera frames; 256 calibration frames once per working surface</a:t>
-                      </a:r>
-                    </a:p>
-                  </a:txBody>
-                  <a:tcPr marL="54864" marR="54864" marT="18288" marB="18288">
-                    <a:solidFill>
-                      <a:srgbClr val="ECF1F6"/>
-                    </a:solidFill>
-                  </a:tcPr>
-                </a:tc>
-              </a:tr>
-              <a:tr h="468630">
-                <a:tc>
-                  <a:txBody>
-                    <a:bodyPr wrap="square"/>
-                    <a:lstStyle/>
-                    <a:p>
-                      <a:r>
-                        <a:rPr sz="1100" b="0">
-                          <a:solidFill>
-                            <a:srgbClr val="282828"/>
-                          </a:solidFill>
-                          <a:latin typeface="Arial"/>
-                        </a:rPr>
-                        <a:t>polarization hardware</a:t>
-                      </a:r>
-                    </a:p>
-                  </a:txBody>
-                  <a:tcPr marL="54864" marR="54864" marT="18288" marB="18288">
-                    <a:solidFill>
-                      <a:srgbClr val="FFFFFF"/>
-                    </a:solidFill>
-                  </a:tcPr>
-                </a:tc>
-                <a:tc>
-                  <a:txBody>
-                    <a:bodyPr wrap="square"/>
-                    <a:lstStyle/>
-                    <a:p>
-                      <a:r>
-                        <a:rPr sz="1100" b="0">
-                          <a:solidFill>
-                            <a:srgbClr val="282828"/>
-                          </a:solidFill>
-                          <a:latin typeface="Arial"/>
-                        </a:rPr>
-                        <a:t>polarizer, 5 waveplates, analyzer</a:t>
-                      </a:r>
-                    </a:p>
-                  </a:txBody>
-                  <a:tcPr marL="54864" marR="54864" marT="18288" marB="18288">
-                    <a:solidFill>
-                      <a:srgbClr val="FFFFFF"/>
-                    </a:solidFill>
-                  </a:tcPr>
-                </a:tc>
-                <a:tc>
-                  <a:txBody>
-                    <a:bodyPr wrap="square"/>
-                    <a:lstStyle/>
-                    <a:p>
-                      <a:r>
-                        <a:rPr sz="1100" b="0">
-                          <a:solidFill>
-                            <a:srgbClr val="282828"/>
-                          </a:solidFill>
-                          <a:latin typeface="Arial"/>
-                        </a:rPr>
-                        <a:t>none</a:t>
+                        <a:t>the record: bench checks, the full test set, figures</a:t>
                       </a:r>
                     </a:p>
                   </a:txBody>
@@ -7434,7 +7655,7 @@
                           </a:solidFill>
                           <a:latin typeface="Arial"/>
                         </a:rPr>
-                        <a:t>moving parts</a:t>
+                        <a:t>zwfs_run('tag','ng385', 'NGRID',385)</a:t>
                       </a:r>
                     </a:p>
                   </a:txBody>
@@ -7456,29 +7677,7 @@
                           </a:solidFill>
                           <a:latin typeface="Arial"/>
                         </a:rPr>
-                        <a:t>none (polarization-stepped)</a:t>
-                      </a:r>
-                    </a:p>
-                  </a:txBody>
-                  <a:tcPr marL="54864" marR="54864" marT="18288" marB="18288">
-                    <a:solidFill>
-                      <a:srgbClr val="ECF1F6"/>
-                    </a:solidFill>
-                  </a:tcPr>
-                </a:tc>
-                <a:tc>
-                  <a:txBody>
-                    <a:bodyPr wrap="square"/>
-                    <a:lstStyle/>
-                    <a:p>
-                      <a:r>
-                        <a:rPr sz="1100" b="0">
-                          <a:solidFill>
-                            <a:srgbClr val="282828"/>
-                          </a:solidFill>
-                          <a:latin typeface="Arial"/>
-                        </a:rPr>
-                        <a:t>none</a:t>
+                        <a:t>the 1-megapixel camera</a:t>
                       </a:r>
                     </a:p>
                   </a:txBody>
@@ -7502,7 +7701,7 @@
                           </a:solidFill>
                           <a:latin typeface="Arial"/>
                         </a:rPr>
-                        <a:t>null, nothing aligned</a:t>
+                        <a:t>zwfs_run('MODEL',2048, 'NGRID',385, 'param_file','macos_param_2048.txt')</a:t>
                       </a:r>
                     </a:p>
                   </a:txBody>
@@ -7524,103 +7723,13 @@
                           </a:solidFill>
                           <a:latin typeface="Arial"/>
                         </a:rPr>
-                        <a:t>0.134 nm</a:t>
+                        <a:t>the fully sampled setup on a 30 GB machine</a:t>
                       </a:r>
                     </a:p>
                   </a:txBody>
                   <a:tcPr marL="54864" marR="54864" marT="18288" marB="18288">
                     <a:solidFill>
                       <a:srgbClr val="FFFFFF"/>
-                    </a:solidFill>
-                  </a:tcPr>
-                </a:tc>
-                <a:tc>
-                  <a:txBody>
-                    <a:bodyPr wrap="square"/>
-                    <a:lstStyle/>
-                    <a:p>
-                      <a:r>
-                        <a:rPr sz="1100" b="0">
-                          <a:solidFill>
-                            <a:srgbClr val="282828"/>
-                          </a:solidFill>
-                          <a:latin typeface="Arial"/>
-                        </a:rPr>
-                        <a:t>0 by construction (the flat is the reference)</a:t>
-                      </a:r>
-                    </a:p>
-                  </a:txBody>
-                  <a:tcPr marL="54864" marR="54864" marT="18288" marB="18288">
-                    <a:solidFill>
-                      <a:srgbClr val="FFFFFF"/>
-                    </a:solidFill>
-                  </a:tcPr>
-                </a:tc>
-              </a:tr>
-              <a:tr h="468630">
-                <a:tc>
-                  <a:txBody>
-                    <a:bodyPr wrap="square"/>
-                    <a:lstStyle/>
-                    <a:p>
-                      <a:r>
-                        <a:rPr sz="1100" b="0">
-                          <a:solidFill>
-                            <a:srgbClr val="282828"/>
-                          </a:solidFill>
-                          <a:latin typeface="Arial"/>
-                        </a:rPr>
-                        <a:t>response falls off at</a:t>
-                      </a:r>
-                    </a:p>
-                  </a:txBody>
-                  <a:tcPr marL="54864" marR="54864" marT="18288" marB="18288">
-                    <a:solidFill>
-                      <a:srgbClr val="ECF1F6"/>
-                    </a:solidFill>
-                  </a:tcPr>
-                </a:tc>
-                <a:tc>
-                  <a:txBody>
-                    <a:bodyPr wrap="square"/>
-                    <a:lstStyle/>
-                    <a:p>
-                      <a:r>
-                        <a:rPr sz="1100" b="0">
-                          <a:solidFill>
-                            <a:srgbClr val="282828"/>
-                          </a:solidFill>
-                          <a:latin typeface="Arial"/>
-                        </a:rPr>
-                        <a:t>fine patterns: 0.50 at the 96×96 checkerboard</a:t>
-                      </a:r>
-                    </a:p>
-                  </a:txBody>
-                  <a:tcPr marL="54864" marR="54864" marT="18288" marB="18288">
-                    <a:solidFill>
-                      <a:srgbClr val="ECF1F6"/>
-                    </a:solidFill>
-                  </a:tcPr>
-                </a:tc>
-                <a:tc>
-                  <a:txBody>
-                    <a:bodyPr wrap="square"/>
-                    <a:lstStyle/>
-                    <a:p>
-                      <a:r>
-                        <a:rPr sz="1100" b="0">
-                          <a:solidFill>
-                            <a:srgbClr val="282828"/>
-                          </a:solidFill>
-                          <a:latin typeface="Arial"/>
-                        </a:rPr>
-                        <a:t>0.5 to 1 cycle across the pupil (0.5 at 1); piston unseen</a:t>
-                      </a:r>
-                    </a:p>
-                  </a:txBody>
-                  <a:tcPr marL="54864" marR="54864" marT="18288" marB="18288">
-                    <a:solidFill>
-                      <a:srgbClr val="ECF1F6"/>
                     </a:solidFill>
                   </a:tcPr>
                 </a:tc>
@@ -7638,75 +7747,7 @@
                           </a:solidFill>
                           <a:latin typeface="Arial"/>
                         </a:rPr>
-                        <a:t>working surface it can handle</a:t>
-                      </a:r>
-                    </a:p>
-                  </a:txBody>
-                  <a:tcPr marL="54864" marR="54864" marT="18288" marB="18288">
-                    <a:solidFill>
-                      <a:srgbClr val="FFFFFF"/>
-                    </a:solidFill>
-                  </a:tcPr>
-                </a:tc>
-                <a:tc>
-                  <a:txBody>
-                    <a:bodyPr wrap="square"/>
-                    <a:lstStyle/>
-                    <a:p>
-                      <a:r>
-                        <a:rPr sz="1100" b="0">
-                          <a:solidFill>
-                            <a:srgbClr val="282828"/>
-                          </a:solidFill>
-                          <a:latin typeface="Arial"/>
-                        </a:rPr>
-                        <a:t>480 nm rms and beyond</a:t>
-                      </a:r>
-                    </a:p>
-                  </a:txBody>
-                  <a:tcPr marL="54864" marR="54864" marT="18288" marB="18288">
-                    <a:solidFill>
-                      <a:srgbClr val="FFFFFF"/>
-                    </a:solidFill>
-                  </a:tcPr>
-                </a:tc>
-                <a:tc>
-                  <a:txBody>
-                    <a:bodyPr wrap="square"/>
-                    <a:lstStyle/>
-                    <a:p>
-                      <a:r>
-                        <a:rPr sz="1100" b="0">
-                          <a:solidFill>
-                            <a:srgbClr val="282828"/>
-                          </a:solidFill>
-                          <a:latin typeface="Arial"/>
-                        </a:rPr>
-                        <a:t>40 nm rms one-frame (1 mm actuators), 50–60 nm four-frame</a:t>
-                      </a:r>
-                    </a:p>
-                  </a:txBody>
-                  <a:tcPr marL="54864" marR="54864" marT="18288" marB="18288">
-                    <a:solidFill>
-                      <a:srgbClr val="FFFFFF"/>
-                    </a:solidFill>
-                  </a:tcPr>
-                </a:tc>
-              </a:tr>
-              <a:tr h="468630">
-                <a:tc>
-                  <a:txBody>
-                    <a:bodyPr wrap="square"/>
-                    <a:lstStyle/>
-                    <a:p>
-                      <a:r>
-                        <a:rPr sz="1100" b="0">
-                          <a:solidFill>
-                            <a:srgbClr val="282828"/>
-                          </a:solidFill>
-                          <a:latin typeface="Arial"/>
-                        </a:rPr>
-                        <a:t>a 10 nm actuator change on a 30 nm surface</a:t>
+                        <a:t>zwfs_run('stages',{'battery','color','noise','figs'})</a:t>
                       </a:r>
                     </a:p>
                   </a:txBody>
@@ -7728,29 +7769,7 @@
                           </a:solidFill>
                           <a:latin typeface="Arial"/>
                         </a:rPr>
-                        <a:t>gain 0.92, floor 46 pm</a:t>
-                      </a:r>
-                    </a:p>
-                  </a:txBody>
-                  <a:tcPr marL="54864" marR="54864" marT="18288" marB="18288">
-                    <a:solidFill>
-                      <a:srgbClr val="ECF1F6"/>
-                    </a:solidFill>
-                  </a:tcPr>
-                </a:tc>
-                <a:tc>
-                  <a:txBody>
-                    <a:bodyPr wrap="square"/>
-                    <a:lstStyle/>
-                    <a:p>
-                      <a:r>
-                        <a:rPr sz="1100" b="0">
-                          <a:solidFill>
-                            <a:srgbClr val="282828"/>
-                          </a:solidFill>
-                          <a:latin typeface="Arial"/>
-                        </a:rPr>
-                        <a:t>gain 0.99, floor 5 pm (stepped, four frames; matrix on the surface) — gain 1.05, floor 23 pm (linear, one frame)</a:t>
+                        <a:t>everything on this deck's later slides</a:t>
                       </a:r>
                     </a:p>
                   </a:txBody>
@@ -7774,7 +7793,7 @@
                           </a:solidFill>
                           <a:latin typeface="Arial"/>
                         </a:rPr>
-                        <a:t>photons per measurement for 1 pm</a:t>
+                        <a:t>./zwfs_batch.sh TAG "the same arguments"</a:t>
                       </a:r>
                     </a:p>
                   </a:txBody>
@@ -7796,103 +7815,13 @@
                           </a:solidFill>
                           <a:latin typeface="Arial"/>
                         </a:rPr>
-                        <a:t>8×10¹⁴</a:t>
+                        <a:t>unattended, memory-capped, logged</a:t>
                       </a:r>
                     </a:p>
                   </a:txBody>
                   <a:tcPr marL="54864" marR="54864" marT="18288" marB="18288">
                     <a:solidFill>
                       <a:srgbClr val="FFFFFF"/>
-                    </a:solidFill>
-                  </a:tcPr>
-                </a:tc>
-                <a:tc>
-                  <a:txBody>
-                    <a:bodyPr wrap="square"/>
-                    <a:lstStyle/>
-                    <a:p>
-                      <a:r>
-                        <a:rPr sz="1100" b="0">
-                          <a:solidFill>
-                            <a:srgbClr val="282828"/>
-                          </a:solidFill>
-                          <a:latin typeface="Arial"/>
-                        </a:rPr>
-                        <a:t>0.4 to 1×10¹⁴</a:t>
-                      </a:r>
-                    </a:p>
-                  </a:txBody>
-                  <a:tcPr marL="54864" marR="54864" marT="18288" marB="18288">
-                    <a:solidFill>
-                      <a:srgbClr val="FFFFFF"/>
-                    </a:solidFill>
-                  </a:tcPr>
-                </a:tc>
-              </a:tr>
-              <a:tr h="468630">
-                <a:tc>
-                  <a:txBody>
-                    <a:bodyPr wrap="square"/>
-                    <a:lstStyle/>
-                    <a:p>
-                      <a:r>
-                        <a:rPr sz="1100" b="0">
-                          <a:solidFill>
-                            <a:srgbClr val="282828"/>
-                          </a:solidFill>
-                          <a:latin typeface="Arial"/>
-                        </a:rPr>
-                        <a:t>held in closed loop to 3 pm against a 2 pm random walk: photons per cycle</a:t>
-                      </a:r>
-                    </a:p>
-                  </a:txBody>
-                  <a:tcPr marL="54864" marR="54864" marT="18288" marB="18288">
-                    <a:solidFill>
-                      <a:srgbClr val="ECF1F6"/>
-                    </a:solidFill>
-                  </a:tcPr>
-                </a:tc>
-                <a:tc>
-                  <a:txBody>
-                    <a:bodyPr wrap="square"/>
-                    <a:lstStyle/>
-                    <a:p>
-                      <a:r>
-                        <a:rPr sz="1100" b="0">
-                          <a:solidFill>
-                            <a:srgbClr val="282828"/>
-                          </a:solidFill>
-                          <a:latin typeface="Arial"/>
-                        </a:rPr>
-                        <a:t>pending (same loop code, CCMac)</a:t>
-                      </a:r>
-                    </a:p>
-                  </a:txBody>
-                  <a:tcPr marL="54864" marR="54864" marT="18288" marB="18288">
-                    <a:solidFill>
-                      <a:srgbClr val="ECF1F6"/>
-                    </a:solidFill>
-                  </a:tcPr>
-                </a:tc>
-                <a:tc>
-                  <a:txBody>
-                    <a:bodyPr wrap="square"/>
-                    <a:lstStyle/>
-                    <a:p>
-                      <a:r>
-                        <a:rPr sz="1100" b="0">
-                          <a:solidFill>
-                            <a:srgbClr val="282828"/>
-                          </a:solidFill>
-                          <a:latin typeface="Arial"/>
-                        </a:rPr>
-                        <a:t>7.5×10¹² (stepped), 7.3×10¹² (linear)</a:t>
-                      </a:r>
-                    </a:p>
-                  </a:txBody>
-                  <a:tcPr marL="54864" marR="54864" marT="18288" marB="18288">
-                    <a:solidFill>
-                      <a:srgbClr val="ECF1F6"/>
                     </a:solidFill>
                   </a:tcPr>
                 </a:tc>
@@ -7903,13 +7832,13 @@
       </p:graphicFrame>
       <p:sp>
         <p:nvSpPr>
-          <p:cNvPr id="5" name="TextBox 4"/>
+          <p:cNvPr id="6" name="TextBox 5"/>
           <p:cNvSpPr txBox="1"/>
           <p:nvPr/>
         </p:nvSpPr>
         <p:spPr>
           <a:xfrm>
-            <a:off x="411480" y="5468112"/>
+            <a:off x="411480" y="4292346"/>
             <a:ext cx="11368735" cy="274320"/>
           </a:xfrm>
           <a:prstGeom prst="rect">
@@ -7935,20 +7864,20 @@
                 </a:solidFill>
                 <a:latin typeface="Arial"/>
               </a:rPr>
-              <a:t>•  Reading: the interferometer measures any surface and pays at fine patterns; the sensor measures small changes on a small working surface more cheaply — no polarization train, a floor ten times lower once its response matrix is measured on that surface — and pays at the lowest spatial frequencies and in the surface it can handle.</a:t>
-            </a:r>
-          </a:p>
-        </p:txBody>
-      </p:sp>
-      <p:sp>
-        <p:nvSpPr>
-          <p:cNvPr id="6" name="TextBox 5"/>
+              <a:t>•  Checks that run every time: the no-mask round trip through the bracket (must return the field unchanged); the reference-wave model against the engine's own field; the pupil brightness must not change with the DM shape; the sampling checks (pixels across the dimple, camera pixels per actuator); and the search for the camera-to-DM mirror/transpose and sign.</a:t>
+            </a:r>
+          </a:p>
+        </p:txBody>
+      </p:sp>
+      <p:sp>
+        <p:nvSpPr>
+          <p:cNvPr id="7" name="TextBox 6"/>
           <p:cNvSpPr txBox="1"/>
           <p:nvPr/>
         </p:nvSpPr>
         <p:spPr>
           <a:xfrm>
-            <a:off x="411480" y="6387846"/>
+            <a:off x="411480" y="5459730"/>
             <a:ext cx="11368735" cy="274320"/>
           </a:xfrm>
           <a:prstGeom prst="rect">
@@ -7974,7 +7903,7 @@
                 </a:solidFill>
                 <a:latin typeface="Arial"/>
               </a:rPr>
-              <a:t>PSI column: tg_psi_dm96 run 10 and S4/S5; sensor column: 385 rays, matrix calibration on the working surface (slide 10), photons at development sampling.  Both in actuator units through the same code (dm_gauge_lib).</a:t>
+              <a:t>Reproduction check: 64 lines of results against the stage-7 report, 8 differ in the last printed digit (the actuator fit's solver tolerance).  README "Run it yourself" carries the parameter table.</a:t>
             </a:r>
           </a:p>
         </p:txBody>
@@ -8031,7 +7960,7 @@
                 </a:solidFill>
                 <a:latin typeface="Arial"/>
               </a:rPr>
-              <a:t>What the Zernike-sensor literature offers, in priority order</a:t>
+              <a:t>Side by side with the Twyman–Green</a:t>
             </a:r>
           </a:p>
           <a:p>
@@ -8047,7 +7976,7 @@
                 </a:solidFill>
                 <a:latin typeface="Arial"/>
               </a:rPr>
-              <a:t>Twelve papers read; the first import — re-computing the reference wave — is now built and measured (slide 8)</a:t>
+              <a:t>The interferometer loses response at fine patterns and never fails; the sensor, calibrated on its working surface, reads a change to 5 pm up to 50–60 nm</a:t>
             </a:r>
           </a:p>
         </p:txBody>
@@ -8106,7 +8035,7 @@
         </p:nvGraphicFramePr>
         <p:xfrm>
           <a:off x="411480" y="1298448"/>
-          <a:ext cx="11368734" cy="3091815"/>
+          <a:ext cx="11368733" cy="4023360"/>
         </p:xfrm>
         <a:graphic>
           <a:graphicData uri="http://schemas.openxmlformats.org/drawingml/2006/table">
@@ -8115,15 +8044,27 @@
                 <a:tableStyleId>{5C22544A-7EE6-4342-B048-85BDC9FD1C3A}</a:tableStyleId>
               </a:tblPr>
               <a:tblGrid>
-                <a:gridCol w="218948"/>
-                <a:gridCol w="2691327"/>
-                <a:gridCol w="8458459"/>
+                <a:gridCol w="3608337"/>
+                <a:gridCol w="2224317"/>
+                <a:gridCol w="5536079"/>
               </a:tblGrid>
               <a:tr h="280035">
                 <a:tc>
                   <a:txBody>
                     <a:bodyPr wrap="square"/>
                     <a:lstStyle/>
+                    <a:p/>
+                  </a:txBody>
+                  <a:tcPr marL="54864" marR="54864" marT="18288" marB="18288">
+                    <a:solidFill>
+                      <a:srgbClr val="1F4E79"/>
+                    </a:solidFill>
+                  </a:tcPr>
+                </a:tc>
+                <a:tc>
+                  <a:txBody>
+                    <a:bodyPr wrap="square"/>
+                    <a:lstStyle/>
                     <a:p>
                       <a:r>
                         <a:rPr sz="1100" b="1">
@@ -8132,7 +8073,7 @@
                           </a:solidFill>
                           <a:latin typeface="Arial"/>
                         </a:rPr>
-                        <a:t>#</a:t>
+                        <a:t>Twyman–Green PSI (measured)</a:t>
                       </a:r>
                     </a:p>
                   </a:txBody>
@@ -8154,7 +8095,7 @@
                           </a:solidFill>
                           <a:latin typeface="Arial"/>
                         </a:rPr>
-                        <a:t>paper</a:t>
+                        <a:t>Zernike sensor (measured)</a:t>
                       </a:r>
                     </a:p>
                   </a:txBody>
@@ -8164,25 +8105,71 @@
                     </a:solidFill>
                   </a:tcPr>
                 </a:tc>
-                <a:tc>
-                  <a:txBody>
-                    <a:bodyPr wrap="square"/>
-                    <a:lstStyle/>
-                    <a:p>
-                      <a:r>
-                        <a:rPr sz="1100" b="1">
-                          <a:solidFill>
-                            <a:srgbClr val="FFFFFF"/>
-                          </a:solidFill>
-                          <a:latin typeface="Arial"/>
-                        </a:rPr>
-                        <a:t>what it gives this model</a:t>
-                      </a:r>
-                    </a:p>
-                  </a:txBody>
-                  <a:tcPr marL="54864" marR="54864" marT="18288" marB="18288">
-                    <a:solidFill>
-                      <a:srgbClr val="1F4E79"/>
+              </a:tr>
+              <a:tr h="280035">
+                <a:tc>
+                  <a:txBody>
+                    <a:bodyPr wrap="square"/>
+                    <a:lstStyle/>
+                    <a:p>
+                      <a:r>
+                        <a:rPr sz="1100" b="0">
+                          <a:solidFill>
+                            <a:srgbClr val="282828"/>
+                          </a:solidFill>
+                          <a:latin typeface="Arial"/>
+                        </a:rPr>
+                        <a:t>reference beam</a:t>
+                      </a:r>
+                    </a:p>
+                  </a:txBody>
+                  <a:tcPr marL="54864" marR="54864" marT="18288" marB="18288">
+                    <a:solidFill>
+                      <a:srgbClr val="FFFFFF"/>
+                    </a:solidFill>
+                  </a:tcPr>
+                </a:tc>
+                <a:tc>
+                  <a:txBody>
+                    <a:bodyPr wrap="square"/>
+                    <a:lstStyle/>
+                    <a:p>
+                      <a:r>
+                        <a:rPr sz="1100" b="0">
+                          <a:solidFill>
+                            <a:srgbClr val="282828"/>
+                          </a:solidFill>
+                          <a:latin typeface="Arial"/>
+                        </a:rPr>
+                        <a:t>the second arm's flat</a:t>
+                      </a:r>
+                    </a:p>
+                  </a:txBody>
+                  <a:tcPr marL="54864" marR="54864" marT="18288" marB="18288">
+                    <a:solidFill>
+                      <a:srgbClr val="FFFFFF"/>
+                    </a:solidFill>
+                  </a:tcPr>
+                </a:tc>
+                <a:tc>
+                  <a:txBody>
+                    <a:bodyPr wrap="square"/>
+                    <a:lstStyle/>
+                    <a:p>
+                      <a:r>
+                        <a:rPr sz="1100" b="0">
+                          <a:solidFill>
+                            <a:srgbClr val="282828"/>
+                          </a:solidFill>
+                          <a:latin typeface="Arial"/>
+                        </a:rPr>
+                        <a:t>made from the beam's own focal core</a:t>
+                      </a:r>
+                    </a:p>
+                  </a:txBody>
+                  <a:tcPr marL="54864" marR="54864" marT="18288" marB="18288">
+                    <a:solidFill>
+                      <a:srgbClr val="FFFFFF"/>
                     </a:solidFill>
                   </a:tcPr>
                 </a:tc>
@@ -8200,57 +8187,57 @@
                           </a:solidFill>
                           <a:latin typeface="Arial"/>
                         </a:rPr>
-                        <a:t>1</a:t>
-                      </a:r>
-                    </a:p>
-                  </a:txBody>
-                  <a:tcPr marL="54864" marR="54864" marT="18288" marB="18288">
-                    <a:solidFill>
-                      <a:srgbClr val="FFFFFF"/>
-                    </a:solidFill>
-                  </a:tcPr>
-                </a:tc>
-                <a:tc>
-                  <a:txBody>
-                    <a:bodyPr wrap="square"/>
-                    <a:lstStyle/>
-                    <a:p>
-                      <a:r>
-                        <a:rPr sz="1100" b="0">
-                          <a:solidFill>
-                            <a:srgbClr val="282828"/>
-                          </a:solidFill>
-                          <a:latin typeface="Arial"/>
-                        </a:rPr>
-                        <a:t>Ruane, Wallace, Steeves et al. 2020, JATIS 6, 045005</a:t>
-                      </a:r>
-                    </a:p>
-                  </a:txBody>
-                  <a:tcPr marL="54864" marR="54864" marT="18288" marB="18288">
-                    <a:solidFill>
-                      <a:srgbClr val="FFFFFF"/>
-                    </a:solidFill>
-                  </a:tcPr>
-                </a:tc>
-                <a:tc>
-                  <a:txBody>
-                    <a:bodyPr wrap="square"/>
-                    <a:lstStyle/>
-                    <a:p>
-                      <a:r>
-                        <a:rPr sz="1100" b="0">
-                          <a:solidFill>
-                            <a:srgbClr val="282828"/>
-                          </a:solidFill>
-                          <a:latin typeface="Arial"/>
-                        </a:rPr>
-                        <a:t>Exact per-pixel reconstruction from the pupil amplitude, the reference wave b and the masked image; a sensitivity factor per pixel; a four-term systematic budget; 1 pm reached at 4.4×10⁵ frames; no loss to 25 % bandwidth</a:t>
-                      </a:r>
-                    </a:p>
-                  </a:txBody>
-                  <a:tcPr marL="54864" marR="54864" marT="18288" marB="18288">
-                    <a:solidFill>
-                      <a:srgbClr val="FFFFFF"/>
+                        <a:t>one measurement costs</a:t>
+                      </a:r>
+                    </a:p>
+                  </a:txBody>
+                  <a:tcPr marL="54864" marR="54864" marT="18288" marB="18288">
+                    <a:solidFill>
+                      <a:srgbClr val="ECF1F6"/>
+                    </a:solidFill>
+                  </a:tcPr>
+                </a:tc>
+                <a:tc>
+                  <a:txBody>
+                    <a:bodyPr wrap="square"/>
+                    <a:lstStyle/>
+                    <a:p>
+                      <a:r>
+                        <a:rPr sz="1100" b="0">
+                          <a:solidFill>
+                            <a:srgbClr val="282828"/>
+                          </a:solidFill>
+                          <a:latin typeface="Arial"/>
+                        </a:rPr>
+                        <a:t>6 traces (3 per arm), 4 fringe frames</a:t>
+                      </a:r>
+                    </a:p>
+                  </a:txBody>
+                  <a:tcPr marL="54864" marR="54864" marT="18288" marB="18288">
+                    <a:solidFill>
+                      <a:srgbClr val="ECF1F6"/>
+                    </a:solidFill>
+                  </a:tcPr>
+                </a:tc>
+                <a:tc>
+                  <a:txBody>
+                    <a:bodyPr wrap="square"/>
+                    <a:lstStyle/>
+                    <a:p>
+                      <a:r>
+                        <a:rPr sz="1100" b="0">
+                          <a:solidFill>
+                            <a:srgbClr val="282828"/>
+                          </a:solidFill>
+                          <a:latin typeface="Arial"/>
+                        </a:rPr>
+                        <a:t>1 or 4 camera frames; 256 calibration frames once per working surface</a:t>
+                      </a:r>
+                    </a:p>
+                  </a:txBody>
+                  <a:tcPr marL="54864" marR="54864" marT="18288" marB="18288">
+                    <a:solidFill>
+                      <a:srgbClr val="ECF1F6"/>
                     </a:solidFill>
                   </a:tcPr>
                 </a:tc>
@@ -8268,7 +8255,75 @@
                           </a:solidFill>
                           <a:latin typeface="Arial"/>
                         </a:rPr>
-                        <a:t>2</a:t>
+                        <a:t>polarization hardware</a:t>
+                      </a:r>
+                    </a:p>
+                  </a:txBody>
+                  <a:tcPr marL="54864" marR="54864" marT="18288" marB="18288">
+                    <a:solidFill>
+                      <a:srgbClr val="FFFFFF"/>
+                    </a:solidFill>
+                  </a:tcPr>
+                </a:tc>
+                <a:tc>
+                  <a:txBody>
+                    <a:bodyPr wrap="square"/>
+                    <a:lstStyle/>
+                    <a:p>
+                      <a:r>
+                        <a:rPr sz="1100" b="0">
+                          <a:solidFill>
+                            <a:srgbClr val="282828"/>
+                          </a:solidFill>
+                          <a:latin typeface="Arial"/>
+                        </a:rPr>
+                        <a:t>polarizer, 5 waveplates, analyzer</a:t>
+                      </a:r>
+                    </a:p>
+                  </a:txBody>
+                  <a:tcPr marL="54864" marR="54864" marT="18288" marB="18288">
+                    <a:solidFill>
+                      <a:srgbClr val="FFFFFF"/>
+                    </a:solidFill>
+                  </a:tcPr>
+                </a:tc>
+                <a:tc>
+                  <a:txBody>
+                    <a:bodyPr wrap="square"/>
+                    <a:lstStyle/>
+                    <a:p>
+                      <a:r>
+                        <a:rPr sz="1100" b="0">
+                          <a:solidFill>
+                            <a:srgbClr val="282828"/>
+                          </a:solidFill>
+                          <a:latin typeface="Arial"/>
+                        </a:rPr>
+                        <a:t>none</a:t>
+                      </a:r>
+                    </a:p>
+                  </a:txBody>
+                  <a:tcPr marL="54864" marR="54864" marT="18288" marB="18288">
+                    <a:solidFill>
+                      <a:srgbClr val="FFFFFF"/>
+                    </a:solidFill>
+                  </a:tcPr>
+                </a:tc>
+              </a:tr>
+              <a:tr h="280035">
+                <a:tc>
+                  <a:txBody>
+                    <a:bodyPr wrap="square"/>
+                    <a:lstStyle/>
+                    <a:p>
+                      <a:r>
+                        <a:rPr sz="1100" b="0">
+                          <a:solidFill>
+                            <a:srgbClr val="282828"/>
+                          </a:solidFill>
+                          <a:latin typeface="Arial"/>
+                        </a:rPr>
+                        <a:t>moving parts</a:t>
                       </a:r>
                     </a:p>
                   </a:txBody>
@@ -8290,7 +8345,7 @@
                           </a:solidFill>
                           <a:latin typeface="Arial"/>
                         </a:rPr>
-                        <a:t>Doelman, Fagginger Auer, Escuti, Snik 2019, Opt. Lett. 44, 17</a:t>
+                        <a:t>none (polarization-stepped)</a:t>
                       </a:r>
                     </a:p>
                   </a:txBody>
@@ -8312,13 +8367,81 @@
                           </a:solidFill>
                           <a:latin typeface="Arial"/>
                         </a:rPr>
-                        <a:t>Vector Zernike: ±π/2 on opposite circular polarizations gives two pupil images, an exact phase-and-amplitude solution, an iterated b, achromatic to 100 % bandwidth; the leakage terms are written down</a:t>
+                        <a:t>none</a:t>
                       </a:r>
                     </a:p>
                   </a:txBody>
                   <a:tcPr marL="54864" marR="54864" marT="18288" marB="18288">
                     <a:solidFill>
                       <a:srgbClr val="ECF1F6"/>
+                    </a:solidFill>
+                  </a:tcPr>
+                </a:tc>
+              </a:tr>
+              <a:tr h="280035">
+                <a:tc>
+                  <a:txBody>
+                    <a:bodyPr wrap="square"/>
+                    <a:lstStyle/>
+                    <a:p>
+                      <a:r>
+                        <a:rPr sz="1100" b="0">
+                          <a:solidFill>
+                            <a:srgbClr val="282828"/>
+                          </a:solidFill>
+                          <a:latin typeface="Arial"/>
+                        </a:rPr>
+                        <a:t>null, nothing aligned</a:t>
+                      </a:r>
+                    </a:p>
+                  </a:txBody>
+                  <a:tcPr marL="54864" marR="54864" marT="18288" marB="18288">
+                    <a:solidFill>
+                      <a:srgbClr val="FFFFFF"/>
+                    </a:solidFill>
+                  </a:tcPr>
+                </a:tc>
+                <a:tc>
+                  <a:txBody>
+                    <a:bodyPr wrap="square"/>
+                    <a:lstStyle/>
+                    <a:p>
+                      <a:r>
+                        <a:rPr sz="1100" b="0">
+                          <a:solidFill>
+                            <a:srgbClr val="282828"/>
+                          </a:solidFill>
+                          <a:latin typeface="Arial"/>
+                        </a:rPr>
+                        <a:t>0.134 nm</a:t>
+                      </a:r>
+                    </a:p>
+                  </a:txBody>
+                  <a:tcPr marL="54864" marR="54864" marT="18288" marB="18288">
+                    <a:solidFill>
+                      <a:srgbClr val="FFFFFF"/>
+                    </a:solidFill>
+                  </a:tcPr>
+                </a:tc>
+                <a:tc>
+                  <a:txBody>
+                    <a:bodyPr wrap="square"/>
+                    <a:lstStyle/>
+                    <a:p>
+                      <a:r>
+                        <a:rPr sz="1100" b="0">
+                          <a:solidFill>
+                            <a:srgbClr val="282828"/>
+                          </a:solidFill>
+                          <a:latin typeface="Arial"/>
+                        </a:rPr>
+                        <a:t>0 by construction (the flat is the reference)</a:t>
+                      </a:r>
+                    </a:p>
+                  </a:txBody>
+                  <a:tcPr marL="54864" marR="54864" marT="18288" marB="18288">
+                    <a:solidFill>
+                      <a:srgbClr val="FFFFFF"/>
                     </a:solidFill>
                   </a:tcPr>
                 </a:tc>
@@ -8336,7 +8459,75 @@
                           </a:solidFill>
                           <a:latin typeface="Arial"/>
                         </a:rPr>
-                        <a:t>3</a:t>
+                        <a:t>response falls off at</a:t>
+                      </a:r>
+                    </a:p>
+                  </a:txBody>
+                  <a:tcPr marL="54864" marR="54864" marT="18288" marB="18288">
+                    <a:solidFill>
+                      <a:srgbClr val="ECF1F6"/>
+                    </a:solidFill>
+                  </a:tcPr>
+                </a:tc>
+                <a:tc>
+                  <a:txBody>
+                    <a:bodyPr wrap="square"/>
+                    <a:lstStyle/>
+                    <a:p>
+                      <a:r>
+                        <a:rPr sz="1100" b="0">
+                          <a:solidFill>
+                            <a:srgbClr val="282828"/>
+                          </a:solidFill>
+                          <a:latin typeface="Arial"/>
+                        </a:rPr>
+                        <a:t>fine patterns: 0.50 at the 96×96 checkerboard</a:t>
+                      </a:r>
+                    </a:p>
+                  </a:txBody>
+                  <a:tcPr marL="54864" marR="54864" marT="18288" marB="18288">
+                    <a:solidFill>
+                      <a:srgbClr val="ECF1F6"/>
+                    </a:solidFill>
+                  </a:tcPr>
+                </a:tc>
+                <a:tc>
+                  <a:txBody>
+                    <a:bodyPr wrap="square"/>
+                    <a:lstStyle/>
+                    <a:p>
+                      <a:r>
+                        <a:rPr sz="1100" b="0">
+                          <a:solidFill>
+                            <a:srgbClr val="282828"/>
+                          </a:solidFill>
+                          <a:latin typeface="Arial"/>
+                        </a:rPr>
+                        <a:t>0.5 to 1 cycle across the pupil (0.5 at 1); piston unseen</a:t>
+                      </a:r>
+                    </a:p>
+                  </a:txBody>
+                  <a:tcPr marL="54864" marR="54864" marT="18288" marB="18288">
+                    <a:solidFill>
+                      <a:srgbClr val="ECF1F6"/>
+                    </a:solidFill>
+                  </a:tcPr>
+                </a:tc>
+              </a:tr>
+              <a:tr h="280035">
+                <a:tc>
+                  <a:txBody>
+                    <a:bodyPr wrap="square"/>
+                    <a:lstStyle/>
+                    <a:p>
+                      <a:r>
+                        <a:rPr sz="1100" b="0">
+                          <a:solidFill>
+                            <a:srgbClr val="282828"/>
+                          </a:solidFill>
+                          <a:latin typeface="Arial"/>
+                        </a:rPr>
+                        <a:t>working surface it can handle</a:t>
                       </a:r>
                     </a:p>
                   </a:txBody>
@@ -8358,7 +8549,7 @@
                           </a:solidFill>
                           <a:latin typeface="Arial"/>
                         </a:rPr>
-                        <a:t>N'Diaye, Vigan, Dohlen et al. 2016, A&amp;A 592, A79 (ZELDA II)</a:t>
+                        <a:t>480 nm rms and beyond</a:t>
                       </a:r>
                     </a:p>
                   </a:txBody>
@@ -8380,7 +8571,7 @@
                           </a:solidFill>
                           <a:latin typeface="Arial"/>
                         </a:rPr>
-                        <a:t>Second-order reconstruction with b from the mask model; 1.06 λ/D at π/2; range −0.14 to +0.36 λ; the sensitivity factor drifts 10 % day to day on SPHERE</a:t>
+                        <a:t>40 nm rms one-frame (1 mm actuators), 50–60 nm four-frame</a:t>
                       </a:r>
                     </a:p>
                   </a:txBody>
@@ -8404,7 +8595,7 @@
                           </a:solidFill>
                           <a:latin typeface="Arial"/>
                         </a:rPr>
-                        <a:t>4</a:t>
+                        <a:t>a 10 nm actuator change on a 30 nm surface</a:t>
                       </a:r>
                     </a:p>
                   </a:txBody>
@@ -8426,7 +8617,7 @@
                           </a:solidFill>
                           <a:latin typeface="Arial"/>
                         </a:rPr>
-                        <a:t>Chambouleyron, Cissé, Salama, Haffert, Wallace et al. 2024, SPIE 13097</a:t>
+                        <a:t>gain 0.92, floor 46 pm</a:t>
                       </a:r>
                     </a:p>
                   </a:txBody>
@@ -8448,13 +8639,81 @@
                           </a:solidFill>
                           <a:latin typeface="Arial"/>
                         </a:rPr>
-                        <a:t>A phase-shifted pair (±π/2) yields cos φ and sin φ; iterative reconstructors reach about 1 rad rms; the bench limits were polarization crosstalk and defocus between the two pupils</a:t>
+                        <a:t>gain 0.99, floor 5 pm (stepped, four frames; matrix on the surface) — gain 1.05, floor 23 pm (linear, one frame)</a:t>
                       </a:r>
                     </a:p>
                   </a:txBody>
                   <a:tcPr marL="54864" marR="54864" marT="18288" marB="18288">
                     <a:solidFill>
                       <a:srgbClr val="ECF1F6"/>
+                    </a:solidFill>
+                  </a:tcPr>
+                </a:tc>
+              </a:tr>
+              <a:tr h="280035">
+                <a:tc>
+                  <a:txBody>
+                    <a:bodyPr wrap="square"/>
+                    <a:lstStyle/>
+                    <a:p>
+                      <a:r>
+                        <a:rPr sz="1100" b="0">
+                          <a:solidFill>
+                            <a:srgbClr val="282828"/>
+                          </a:solidFill>
+                          <a:latin typeface="Arial"/>
+                        </a:rPr>
+                        <a:t>photons per measurement for 1 pm</a:t>
+                      </a:r>
+                    </a:p>
+                  </a:txBody>
+                  <a:tcPr marL="54864" marR="54864" marT="18288" marB="18288">
+                    <a:solidFill>
+                      <a:srgbClr val="FFFFFF"/>
+                    </a:solidFill>
+                  </a:tcPr>
+                </a:tc>
+                <a:tc>
+                  <a:txBody>
+                    <a:bodyPr wrap="square"/>
+                    <a:lstStyle/>
+                    <a:p>
+                      <a:r>
+                        <a:rPr sz="1100" b="0">
+                          <a:solidFill>
+                            <a:srgbClr val="282828"/>
+                          </a:solidFill>
+                          <a:latin typeface="Arial"/>
+                        </a:rPr>
+                        <a:t>8×10¹⁴</a:t>
+                      </a:r>
+                    </a:p>
+                  </a:txBody>
+                  <a:tcPr marL="54864" marR="54864" marT="18288" marB="18288">
+                    <a:solidFill>
+                      <a:srgbClr val="FFFFFF"/>
+                    </a:solidFill>
+                  </a:tcPr>
+                </a:tc>
+                <a:tc>
+                  <a:txBody>
+                    <a:bodyPr wrap="square"/>
+                    <a:lstStyle/>
+                    <a:p>
+                      <a:r>
+                        <a:rPr sz="1100" b="0">
+                          <a:solidFill>
+                            <a:srgbClr val="282828"/>
+                          </a:solidFill>
+                          <a:latin typeface="Arial"/>
+                        </a:rPr>
+                        <a:t>0.4 to 1×10¹⁴</a:t>
+                      </a:r>
+                    </a:p>
+                  </a:txBody>
+                  <a:tcPr marL="54864" marR="54864" marT="18288" marB="18288">
+                    <a:solidFill>
+                      <a:srgbClr val="FFFFFF"/>
                     </a:solidFill>
                   </a:tcPr>
                 </a:tc>
@@ -8472,75 +8731,7 @@
                           </a:solidFill>
                           <a:latin typeface="Arial"/>
                         </a:rPr>
-                        <a:t>5</a:t>
-                      </a:r>
-                    </a:p>
-                  </a:txBody>
-                  <a:tcPr marL="54864" marR="54864" marT="18288" marB="18288">
-                    <a:solidFill>
-                      <a:srgbClr val="FFFFFF"/>
-                    </a:solidFill>
-                  </a:tcPr>
-                </a:tc>
-                <a:tc>
-                  <a:txBody>
-                    <a:bodyPr wrap="square"/>
-                    <a:lstStyle/>
-                    <a:p>
-                      <a:r>
-                        <a:rPr sz="1100" b="0">
-                          <a:solidFill>
-                            <a:srgbClr val="282828"/>
-                          </a:solidFill>
-                          <a:latin typeface="Arial"/>
-                        </a:rPr>
-                        <a:t>Haffert 2024, A&amp;A 683, A113</a:t>
-                      </a:r>
-                    </a:p>
-                  </a:txBody>
-                  <a:tcPr marL="54864" marR="54864" marT="18288" marB="18288">
-                    <a:solidFill>
-                      <a:srgbClr val="FFFFFF"/>
-                    </a:solidFill>
-                  </a:tcPr>
-                </a:tc>
-                <a:tc>
-                  <a:txBody>
-                    <a:bodyPr wrap="square"/>
-                    <a:lstStyle/>
-                    <a:p>
-                      <a:r>
-                        <a:rPr sz="1100" b="0">
-                          <a:solidFill>
-                            <a:srgbClr val="282828"/>
-                          </a:solidFill>
-                          <a:latin typeface="Arial"/>
-                        </a:rPr>
-                        <a:t>Iterative nonlinear reconstructors reach machine precision below 0.25 rad rms; phase sorting extends to 0.75 rad; adding wavelengths to 1.4 rad rms</a:t>
-                      </a:r>
-                    </a:p>
-                  </a:txBody>
-                  <a:tcPr marL="54864" marR="54864" marT="18288" marB="18288">
-                    <a:solidFill>
-                      <a:srgbClr val="FFFFFF"/>
-                    </a:solidFill>
-                  </a:tcPr>
-                </a:tc>
-              </a:tr>
-              <a:tr h="468630">
-                <a:tc>
-                  <a:txBody>
-                    <a:bodyPr wrap="square"/>
-                    <a:lstStyle/>
-                    <a:p>
-                      <a:r>
-                        <a:rPr sz="1100" b="0">
-                          <a:solidFill>
-                            <a:srgbClr val="282828"/>
-                          </a:solidFill>
-                          <a:latin typeface="Arial"/>
-                        </a:rPr>
-                        <a:t>6</a:t>
+                        <a:t>held in closed loop to 3 pm against a 2 pm random walk: photons per cycle</a:t>
                       </a:r>
                     </a:p>
                   </a:txBody>
@@ -8562,7 +8753,7 @@
                           </a:solidFill>
                           <a:latin typeface="Arial"/>
                         </a:rPr>
-                        <a:t>Darcis, Haffert, Chambouleyron, Doelman et al. 2025, A&amp;A</a:t>
+                        <a:t>pending (same loop code, CCMac)</a:t>
                       </a:r>
                     </a:p>
                   </a:txBody>
@@ -8584,7 +8775,7 @@
                           </a:solidFill>
                           <a:latin typeface="Arial"/>
                         </a:rPr>
-                        <a:t>Multi-wavelength gradient descent through the forward model: dynamic range for the scalar sensor, photon robustness across a wider band, two-wavelength unwrapping of petal errors</a:t>
+                        <a:t>7.5×10¹² (stepped), 7.3×10¹² (linear), 5.3×10¹² (polarized pair)</a:t>
                       </a:r>
                     </a:p>
                   </a:txBody>
@@ -8607,7 +8798,7 @@
         </p:nvSpPr>
         <p:spPr>
           <a:xfrm>
-            <a:off x="411480" y="4536567"/>
+            <a:off x="411480" y="5468112"/>
             <a:ext cx="11368735" cy="274320"/>
           </a:xfrm>
           <a:prstGeom prst="rect">
@@ -8627,13 +8818,52 @@
               </a:spcAft>
             </a:pPr>
             <a:r>
-              <a:rPr sz="1050" b="0">
-                <a:solidFill>
-                  <a:srgbClr val="6E6E6E"/>
+              <a:rPr sz="1500" b="0">
+                <a:solidFill>
+                  <a:srgbClr val="282828"/>
                 </a:solidFill>
                 <a:latin typeface="Arial"/>
               </a:rPr>
-              <a:t>Priority = payoff against this campaign's measured weak results.  Synopses and links: macos/REPORT_zwfs_lit_scan.md.</a:t>
+              <a:t>•  Reading: the interferometer measures any surface and pays at fine patterns; the sensor measures small changes on a small working surface more cheaply — no polarization train, a floor ten times lower once its response matrix is measured on that surface — and pays at the lowest spatial frequencies and in the surface it can handle.</a:t>
+            </a:r>
+          </a:p>
+        </p:txBody>
+      </p:sp>
+      <p:sp>
+        <p:nvSpPr>
+          <p:cNvPr id="6" name="TextBox 5"/>
+          <p:cNvSpPr txBox="1"/>
+          <p:nvPr/>
+        </p:nvSpPr>
+        <p:spPr>
+          <a:xfrm>
+            <a:off x="411480" y="6387846"/>
+            <a:ext cx="11368735" cy="274320"/>
+          </a:xfrm>
+          <a:prstGeom prst="rect">
+            <a:avLst/>
+          </a:prstGeom>
+          <a:noFill/>
+        </p:spPr>
+        <p:txBody>
+          <a:bodyPr wrap="square">
+            <a:spAutoFit/>
+          </a:bodyPr>
+          <a:lstStyle/>
+          <a:p>
+            <a:pPr>
+              <a:spcAft>
+                <a:spcPts val="600"/>
+              </a:spcAft>
+            </a:pPr>
+            <a:r>
+              <a:rPr sz="1050" b="0">
+                <a:solidFill>
+                  <a:srgbClr val="6E6E6E"/>
+                </a:solidFill>
+                <a:latin typeface="Arial"/>
+              </a:rPr>
+              <a:t>PSI column: tg_psi_dm96 run 10 and S4/S5; sensor column: 385 rays, matrix calibration on the working surface (slide 10), photons at development sampling.  Both in actuator units through the same code (dm_gauge_lib).</a:t>
             </a:r>
           </a:p>
         </p:txBody>
@@ -8690,7 +8920,7 @@
                 </a:solidFill>
                 <a:latin typeface="Arial"/>
               </a:rPr>
-              <a:t>Demonstrations, segmented mirrors, and the in-house precedent</a:t>
+              <a:t>What the Zernike-sensor literature offers, in priority order</a:t>
             </a:r>
           </a:p>
           <a:p>
@@ -8706,7 +8936,7 @@
                 </a:solidFill>
                 <a:latin typeface="Arial"/>
               </a:rPr>
-              <a:t>Picometers by alternating DM shapes and averaging; segment piston by model iteration, underestimated below 50 % Strehl</a:t>
+              <a:t>Twelve papers read; the first import — re-computing the reference wave — is now built and measured (slide 8)</a:t>
             </a:r>
           </a:p>
         </p:txBody>
@@ -8774,9 +9004,9 @@
                 <a:tableStyleId>{5C22544A-7EE6-4342-B048-85BDC9FD1C3A}</a:tableStyleId>
               </a:tblPr>
               <a:tblGrid>
-                <a:gridCol w="291592"/>
-                <a:gridCol w="3730058"/>
-                <a:gridCol w="7347084"/>
+                <a:gridCol w="218948"/>
+                <a:gridCol w="2691327"/>
+                <a:gridCol w="8458459"/>
               </a:tblGrid>
               <a:tr h="280035">
                 <a:tc>
@@ -8859,7 +9089,7 @@
                           </a:solidFill>
                           <a:latin typeface="Arial"/>
                         </a:rPr>
-                        <a:t>7</a:t>
+                        <a:t>1</a:t>
                       </a:r>
                     </a:p>
                   </a:txBody>
@@ -8881,7 +9111,7 @@
                           </a:solidFill>
                           <a:latin typeface="Arial"/>
                         </a:rPr>
-                        <a:t>Steeves, Wallace, Kettenbeil, Jewell 2020, Optica 7, 1267</a:t>
+                        <a:t>Ruane, Wallace, Steeves et al. 2020, JATIS 6, 045005</a:t>
                       </a:r>
                     </a:p>
                   </a:txBody>
@@ -8903,7 +9133,7 @@
                           </a:solidFill>
                           <a:latin typeface="Arial"/>
                         </a:rPr>
-                        <a:t>1.6 pm repeatability in 4.3 s by alternating flat and waffle DM shapes and averaging the differences; a reconstruction robust at the highest spatial frequencies</a:t>
+                        <a:t>Exact per-pixel reconstruction from the pupil amplitude, the reference wave b and the masked image; a sensitivity factor per pixel; a four-term systematic budget; 1 pm reached at 4.4×10⁵ frames; no loss to 25 % bandwidth</a:t>
                       </a:r>
                     </a:p>
                   </a:txBody>
@@ -8927,7 +9157,7 @@
                           </a:solidFill>
                           <a:latin typeface="Arial"/>
                         </a:rPr>
-                        <a:t>8</a:t>
+                        <a:t>2</a:t>
                       </a:r>
                     </a:p>
                   </a:txBody>
@@ -8949,7 +9179,7 @@
                           </a:solidFill>
                           <a:latin typeface="Arial"/>
                         </a:rPr>
-                        <a:t>Wallace, Rao, Jensen-Clem, Serabyn 2011, SPIE 8126</a:t>
+                        <a:t>Doelman, Fagginger Auer, Escuti, Snik 2019, Opt. Lett. 44, 17</a:t>
                       </a:r>
                     </a:p>
                   </a:txBody>
@@ -8971,7 +9201,7 @@
                           </a:solidFill>
                           <a:latin typeface="Arial"/>
                         </a:rPr>
-                        <a:t>All-reflective phase-shifting Zernike interferometer: a dynamic, arbitrary core phase shift read in four steps gives phase and amplitude; low sensitivity to vibration, polarization and wavelength</a:t>
+                        <a:t>Vector Zernike: ±π/2 on opposite circular polarizations gives two pupil images, an exact phase-and-amplitude solution, an iterated b, achromatic to 100 % bandwidth; the leakage terms are written down</a:t>
                       </a:r>
                     </a:p>
                   </a:txBody>
@@ -8995,7 +9225,7 @@
                           </a:solidFill>
                           <a:latin typeface="Arial"/>
                         </a:rPr>
-                        <a:t>9</a:t>
+                        <a:t>3</a:t>
                       </a:r>
                     </a:p>
                   </a:txBody>
@@ -9017,7 +9247,7 @@
                           </a:solidFill>
                           <a:latin typeface="Arial"/>
                         </a:rPr>
-                        <a:t>Moore and Redding 2018, SPIE 10698</a:t>
+                        <a:t>N'Diaye, Vigan, Dohlen et al. 2016, A&amp;A 592, A79 (ZELDA II)</a:t>
                       </a:r>
                     </a:p>
                   </a:txBody>
@@ -9039,7 +9269,7 @@
                           </a:solidFill>
                           <a:latin typeface="Arial"/>
                         </a:rPr>
-                        <a:t>Nonlinear polychromatic physical-optics reconstruction for picometer differential metrology on LUVOIR; the in-house precedent for the reconstructor above</a:t>
+                        <a:t>Second-order reconstruction with b from the mask model; 1.06 λ/D at π/2; range −0.14 to +0.36 λ; the sensitivity factor drifts 10 % day to day on SPHERE</a:t>
                       </a:r>
                     </a:p>
                   </a:txBody>
@@ -9063,7 +9293,7 @@
                           </a:solidFill>
                           <a:latin typeface="Arial"/>
                         </a:rPr>
-                        <a:t>10</a:t>
+                        <a:t>4</a:t>
                       </a:r>
                     </a:p>
                   </a:txBody>
@@ -9085,7 +9315,7 @@
                           </a:solidFill>
                           <a:latin typeface="Arial"/>
                         </a:rPr>
-                        <a:t>Keck vector-Zernike segment control 2024 (arXiv 2404.08728); Wallace et al. 2022 (arXiv 2205.02241)</a:t>
+                        <a:t>Chambouleyron, Cissé, Salama, Haffert, Wallace et al. 2024, SPIE 13097</a:t>
                       </a:r>
                     </a:p>
                   </a:txBody>
@@ -9107,7 +9337,7 @@
                           </a:solidFill>
                           <a:latin typeface="Arial"/>
                         </a:rPr>
-                        <a:t>Segment piston by model-based iteration; 11 nm rms piston uncertainty; underestimation 2 to 4× below 50 % Strehl; fabricated shifts 0.30π and 0.68π instead of ±0.5π</a:t>
+                        <a:t>A phase-shifted pair (±π/2) yields cos φ and sin φ; iterative reconstructors reach about 1 rad rms; the bench limits were polarization crosstalk and defocus between the two pupils</a:t>
                       </a:r>
                     </a:p>
                   </a:txBody>
@@ -9131,7 +9361,7 @@
                           </a:solidFill>
                           <a:latin typeface="Arial"/>
                         </a:rPr>
-                        <a:t>11</a:t>
+                        <a:t>5</a:t>
                       </a:r>
                     </a:p>
                   </a:txBody>
@@ -9153,7 +9383,7 @@
                           </a:solidFill>
                           <a:latin typeface="Arial"/>
                         </a:rPr>
-                        <a:t>HiCAT mid-order Zernike sensor 2024 (arXiv 2409.03411)</a:t>
+                        <a:t>Haffert 2024, A&amp;A 683, A113</a:t>
                       </a:r>
                     </a:p>
                   </a:txBody>
@@ -9175,7 +9405,7 @@
                           </a:solidFill>
                           <a:latin typeface="Arial"/>
                         </a:rPr>
-                        <a:t>Per-segment piston, tip and tilt by interaction matrix; a minimal step of 125 ± 31 pm at SNR 4; 14-bit DM quantization reads as steps in the response</a:t>
+                        <a:t>Iterative nonlinear reconstructors reach machine precision below 0.25 rad rms; phase sorting extends to 0.75 rad; adding wavelengths to 1.4 rad rms</a:t>
                       </a:r>
                     </a:p>
                   </a:txBody>
@@ -9199,7 +9429,7 @@
                           </a:solidFill>
                           <a:latin typeface="Arial"/>
                         </a:rPr>
-                        <a:t>12</a:t>
+                        <a:t>6</a:t>
                       </a:r>
                     </a:p>
                   </a:txBody>
@@ -9221,7 +9451,7 @@
                           </a:solidFill>
                           <a:latin typeface="Arial"/>
                         </a:rPr>
-                        <a:t>Shi et al. 2015, SPIE 9605 (Roman low-order sensor)</a:t>
+                        <a:t>Darcis, Haffert, Chambouleyron, Doelman et al. 2025, A&amp;A</a:t>
                       </a:r>
                     </a:p>
                   </a:txBody>
@@ -9243,7 +9473,7 @@
                           </a:solidFill>
                           <a:latin typeface="Arial"/>
                         </a:rPr>
-                        <a:t>A reflective dimple on the focal-plane mask senses Z2 to Z11 from the rejected starlight: the spatially filtered form of the same sensor</a:t>
+                        <a:t>Multi-wavelength gradient descent through the forward model: dynamic range for the scalar sensor, photon robustness across a wider band, two-wavelength unwrapping of petal errors</a:t>
                       </a:r>
                     </a:p>
                   </a:txBody>
@@ -9292,7 +9522,7 @@
                 </a:solidFill>
                 <a:latin typeface="Arial"/>
               </a:rPr>
-              <a:t>Also read: PIAA-ZWFS (2026, arXiv 2606.28136), lossless pupil apodization that closes the gap to the fundamental sensitivity limit by 10× — a design lever, not a model change.</a:t>
+              <a:t>Priority = payoff against this campaign's measured weak results.  Synopses and links: macos/REPORT_zwfs_lit_scan.md.</a:t>
             </a:r>
           </a:p>
         </p:txBody>
@@ -9349,7 +9579,7 @@
                 </a:solidFill>
                 <a:latin typeface="Arial"/>
               </a:rPr>
-              <a:t>Conclusions: what the corrected model and the exact reading settled</a:t>
+              <a:t>Demonstrations, segmented mirrors, and the in-house precedent</a:t>
             </a:r>
           </a:p>
           <a:p>
@@ -9365,7 +9595,7 @@
                 </a:solidFill>
                 <a:latin typeface="Arial"/>
               </a:rPr>
-              <a:t>Fixing the model was the bigger gain; a response matrix measured on the working surface takes the stepped reading to 5 pm; color and photons are not the limit</a:t>
+              <a:t>Picometers by alternating DM shapes and averaging; segment piston by model iteration, underestimated below 50 % Strehl</a:t>
             </a:r>
           </a:p>
         </p:txBody>
@@ -9414,15 +9644,518 @@
           </a:p>
         </p:txBody>
       </p:sp>
-      <p:sp>
-        <p:nvSpPr>
-          <p:cNvPr id="4" name="TextBox 3"/>
+      <p:graphicFrame>
+        <p:nvGraphicFramePr>
+          <p:cNvPr id="4" name="Table 3"/>
+          <p:cNvGraphicFramePr>
+            <a:graphicFrameLocks noGrp="1"/>
+          </p:cNvGraphicFramePr>
+          <p:nvPr/>
+        </p:nvGraphicFramePr>
+        <p:xfrm>
+          <a:off x="411480" y="1298448"/>
+          <a:ext cx="11368734" cy="3091815"/>
+        </p:xfrm>
+        <a:graphic>
+          <a:graphicData uri="http://schemas.openxmlformats.org/drawingml/2006/table">
+            <a:tbl>
+              <a:tblPr firstRow="1" bandRow="1">
+                <a:tableStyleId>{5C22544A-7EE6-4342-B048-85BDC9FD1C3A}</a:tableStyleId>
+              </a:tblPr>
+              <a:tblGrid>
+                <a:gridCol w="291592"/>
+                <a:gridCol w="3730058"/>
+                <a:gridCol w="7347084"/>
+              </a:tblGrid>
+              <a:tr h="280035">
+                <a:tc>
+                  <a:txBody>
+                    <a:bodyPr wrap="square"/>
+                    <a:lstStyle/>
+                    <a:p>
+                      <a:r>
+                        <a:rPr sz="1100" b="1">
+                          <a:solidFill>
+                            <a:srgbClr val="FFFFFF"/>
+                          </a:solidFill>
+                          <a:latin typeface="Arial"/>
+                        </a:rPr>
+                        <a:t>#</a:t>
+                      </a:r>
+                    </a:p>
+                  </a:txBody>
+                  <a:tcPr marL="54864" marR="54864" marT="18288" marB="18288">
+                    <a:solidFill>
+                      <a:srgbClr val="1F4E79"/>
+                    </a:solidFill>
+                  </a:tcPr>
+                </a:tc>
+                <a:tc>
+                  <a:txBody>
+                    <a:bodyPr wrap="square"/>
+                    <a:lstStyle/>
+                    <a:p>
+                      <a:r>
+                        <a:rPr sz="1100" b="1">
+                          <a:solidFill>
+                            <a:srgbClr val="FFFFFF"/>
+                          </a:solidFill>
+                          <a:latin typeface="Arial"/>
+                        </a:rPr>
+                        <a:t>paper</a:t>
+                      </a:r>
+                    </a:p>
+                  </a:txBody>
+                  <a:tcPr marL="54864" marR="54864" marT="18288" marB="18288">
+                    <a:solidFill>
+                      <a:srgbClr val="1F4E79"/>
+                    </a:solidFill>
+                  </a:tcPr>
+                </a:tc>
+                <a:tc>
+                  <a:txBody>
+                    <a:bodyPr wrap="square"/>
+                    <a:lstStyle/>
+                    <a:p>
+                      <a:r>
+                        <a:rPr sz="1100" b="1">
+                          <a:solidFill>
+                            <a:srgbClr val="FFFFFF"/>
+                          </a:solidFill>
+                          <a:latin typeface="Arial"/>
+                        </a:rPr>
+                        <a:t>what it gives this model</a:t>
+                      </a:r>
+                    </a:p>
+                  </a:txBody>
+                  <a:tcPr marL="54864" marR="54864" marT="18288" marB="18288">
+                    <a:solidFill>
+                      <a:srgbClr val="1F4E79"/>
+                    </a:solidFill>
+                  </a:tcPr>
+                </a:tc>
+              </a:tr>
+              <a:tr h="468630">
+                <a:tc>
+                  <a:txBody>
+                    <a:bodyPr wrap="square"/>
+                    <a:lstStyle/>
+                    <a:p>
+                      <a:r>
+                        <a:rPr sz="1100" b="0">
+                          <a:solidFill>
+                            <a:srgbClr val="282828"/>
+                          </a:solidFill>
+                          <a:latin typeface="Arial"/>
+                        </a:rPr>
+                        <a:t>7</a:t>
+                      </a:r>
+                    </a:p>
+                  </a:txBody>
+                  <a:tcPr marL="54864" marR="54864" marT="18288" marB="18288">
+                    <a:solidFill>
+                      <a:srgbClr val="FFFFFF"/>
+                    </a:solidFill>
+                  </a:tcPr>
+                </a:tc>
+                <a:tc>
+                  <a:txBody>
+                    <a:bodyPr wrap="square"/>
+                    <a:lstStyle/>
+                    <a:p>
+                      <a:r>
+                        <a:rPr sz="1100" b="0">
+                          <a:solidFill>
+                            <a:srgbClr val="282828"/>
+                          </a:solidFill>
+                          <a:latin typeface="Arial"/>
+                        </a:rPr>
+                        <a:t>Steeves, Wallace, Kettenbeil, Jewell 2020, Optica 7, 1267</a:t>
+                      </a:r>
+                    </a:p>
+                  </a:txBody>
+                  <a:tcPr marL="54864" marR="54864" marT="18288" marB="18288">
+                    <a:solidFill>
+                      <a:srgbClr val="FFFFFF"/>
+                    </a:solidFill>
+                  </a:tcPr>
+                </a:tc>
+                <a:tc>
+                  <a:txBody>
+                    <a:bodyPr wrap="square"/>
+                    <a:lstStyle/>
+                    <a:p>
+                      <a:r>
+                        <a:rPr sz="1100" b="0">
+                          <a:solidFill>
+                            <a:srgbClr val="282828"/>
+                          </a:solidFill>
+                          <a:latin typeface="Arial"/>
+                        </a:rPr>
+                        <a:t>1.6 pm repeatability in 4.3 s by alternating flat and waffle DM shapes and averaging the differences; a reconstruction robust at the highest spatial frequencies</a:t>
+                      </a:r>
+                    </a:p>
+                  </a:txBody>
+                  <a:tcPr marL="54864" marR="54864" marT="18288" marB="18288">
+                    <a:solidFill>
+                      <a:srgbClr val="FFFFFF"/>
+                    </a:solidFill>
+                  </a:tcPr>
+                </a:tc>
+              </a:tr>
+              <a:tr h="468630">
+                <a:tc>
+                  <a:txBody>
+                    <a:bodyPr wrap="square"/>
+                    <a:lstStyle/>
+                    <a:p>
+                      <a:r>
+                        <a:rPr sz="1100" b="0">
+                          <a:solidFill>
+                            <a:srgbClr val="282828"/>
+                          </a:solidFill>
+                          <a:latin typeface="Arial"/>
+                        </a:rPr>
+                        <a:t>8</a:t>
+                      </a:r>
+                    </a:p>
+                  </a:txBody>
+                  <a:tcPr marL="54864" marR="54864" marT="18288" marB="18288">
+                    <a:solidFill>
+                      <a:srgbClr val="ECF1F6"/>
+                    </a:solidFill>
+                  </a:tcPr>
+                </a:tc>
+                <a:tc>
+                  <a:txBody>
+                    <a:bodyPr wrap="square"/>
+                    <a:lstStyle/>
+                    <a:p>
+                      <a:r>
+                        <a:rPr sz="1100" b="0">
+                          <a:solidFill>
+                            <a:srgbClr val="282828"/>
+                          </a:solidFill>
+                          <a:latin typeface="Arial"/>
+                        </a:rPr>
+                        <a:t>Wallace, Rao, Jensen-Clem, Serabyn 2011, SPIE 8126</a:t>
+                      </a:r>
+                    </a:p>
+                  </a:txBody>
+                  <a:tcPr marL="54864" marR="54864" marT="18288" marB="18288">
+                    <a:solidFill>
+                      <a:srgbClr val="ECF1F6"/>
+                    </a:solidFill>
+                  </a:tcPr>
+                </a:tc>
+                <a:tc>
+                  <a:txBody>
+                    <a:bodyPr wrap="square"/>
+                    <a:lstStyle/>
+                    <a:p>
+                      <a:r>
+                        <a:rPr sz="1100" b="0">
+                          <a:solidFill>
+                            <a:srgbClr val="282828"/>
+                          </a:solidFill>
+                          <a:latin typeface="Arial"/>
+                        </a:rPr>
+                        <a:t>All-reflective phase-shifting Zernike interferometer: a dynamic, arbitrary core phase shift read in four steps gives phase and amplitude; low sensitivity to vibration, polarization and wavelength</a:t>
+                      </a:r>
+                    </a:p>
+                  </a:txBody>
+                  <a:tcPr marL="54864" marR="54864" marT="18288" marB="18288">
+                    <a:solidFill>
+                      <a:srgbClr val="ECF1F6"/>
+                    </a:solidFill>
+                  </a:tcPr>
+                </a:tc>
+              </a:tr>
+              <a:tr h="468630">
+                <a:tc>
+                  <a:txBody>
+                    <a:bodyPr wrap="square"/>
+                    <a:lstStyle/>
+                    <a:p>
+                      <a:r>
+                        <a:rPr sz="1100" b="0">
+                          <a:solidFill>
+                            <a:srgbClr val="282828"/>
+                          </a:solidFill>
+                          <a:latin typeface="Arial"/>
+                        </a:rPr>
+                        <a:t>9</a:t>
+                      </a:r>
+                    </a:p>
+                  </a:txBody>
+                  <a:tcPr marL="54864" marR="54864" marT="18288" marB="18288">
+                    <a:solidFill>
+                      <a:srgbClr val="FFFFFF"/>
+                    </a:solidFill>
+                  </a:tcPr>
+                </a:tc>
+                <a:tc>
+                  <a:txBody>
+                    <a:bodyPr wrap="square"/>
+                    <a:lstStyle/>
+                    <a:p>
+                      <a:r>
+                        <a:rPr sz="1100" b="0">
+                          <a:solidFill>
+                            <a:srgbClr val="282828"/>
+                          </a:solidFill>
+                          <a:latin typeface="Arial"/>
+                        </a:rPr>
+                        <a:t>Moore and Redding 2018, SPIE 10698</a:t>
+                      </a:r>
+                    </a:p>
+                  </a:txBody>
+                  <a:tcPr marL="54864" marR="54864" marT="18288" marB="18288">
+                    <a:solidFill>
+                      <a:srgbClr val="FFFFFF"/>
+                    </a:solidFill>
+                  </a:tcPr>
+                </a:tc>
+                <a:tc>
+                  <a:txBody>
+                    <a:bodyPr wrap="square"/>
+                    <a:lstStyle/>
+                    <a:p>
+                      <a:r>
+                        <a:rPr sz="1100" b="0">
+                          <a:solidFill>
+                            <a:srgbClr val="282828"/>
+                          </a:solidFill>
+                          <a:latin typeface="Arial"/>
+                        </a:rPr>
+                        <a:t>Nonlinear polychromatic physical-optics reconstruction for picometer differential metrology on LUVOIR; the in-house precedent for the reconstructor above</a:t>
+                      </a:r>
+                    </a:p>
+                  </a:txBody>
+                  <a:tcPr marL="54864" marR="54864" marT="18288" marB="18288">
+                    <a:solidFill>
+                      <a:srgbClr val="FFFFFF"/>
+                    </a:solidFill>
+                  </a:tcPr>
+                </a:tc>
+              </a:tr>
+              <a:tr h="468630">
+                <a:tc>
+                  <a:txBody>
+                    <a:bodyPr wrap="square"/>
+                    <a:lstStyle/>
+                    <a:p>
+                      <a:r>
+                        <a:rPr sz="1100" b="0">
+                          <a:solidFill>
+                            <a:srgbClr val="282828"/>
+                          </a:solidFill>
+                          <a:latin typeface="Arial"/>
+                        </a:rPr>
+                        <a:t>10</a:t>
+                      </a:r>
+                    </a:p>
+                  </a:txBody>
+                  <a:tcPr marL="54864" marR="54864" marT="18288" marB="18288">
+                    <a:solidFill>
+                      <a:srgbClr val="ECF1F6"/>
+                    </a:solidFill>
+                  </a:tcPr>
+                </a:tc>
+                <a:tc>
+                  <a:txBody>
+                    <a:bodyPr wrap="square"/>
+                    <a:lstStyle/>
+                    <a:p>
+                      <a:r>
+                        <a:rPr sz="1100" b="0">
+                          <a:solidFill>
+                            <a:srgbClr val="282828"/>
+                          </a:solidFill>
+                          <a:latin typeface="Arial"/>
+                        </a:rPr>
+                        <a:t>Keck vector-Zernike segment control 2024 (arXiv 2404.08728); Wallace et al. 2022 (arXiv 2205.02241)</a:t>
+                      </a:r>
+                    </a:p>
+                  </a:txBody>
+                  <a:tcPr marL="54864" marR="54864" marT="18288" marB="18288">
+                    <a:solidFill>
+                      <a:srgbClr val="ECF1F6"/>
+                    </a:solidFill>
+                  </a:tcPr>
+                </a:tc>
+                <a:tc>
+                  <a:txBody>
+                    <a:bodyPr wrap="square"/>
+                    <a:lstStyle/>
+                    <a:p>
+                      <a:r>
+                        <a:rPr sz="1100" b="0">
+                          <a:solidFill>
+                            <a:srgbClr val="282828"/>
+                          </a:solidFill>
+                          <a:latin typeface="Arial"/>
+                        </a:rPr>
+                        <a:t>Segment piston by model-based iteration; 11 nm rms piston uncertainty; underestimation 2 to 4× below 50 % Strehl; fabricated shifts 0.30π and 0.68π instead of ±0.5π</a:t>
+                      </a:r>
+                    </a:p>
+                  </a:txBody>
+                  <a:tcPr marL="54864" marR="54864" marT="18288" marB="18288">
+                    <a:solidFill>
+                      <a:srgbClr val="ECF1F6"/>
+                    </a:solidFill>
+                  </a:tcPr>
+                </a:tc>
+              </a:tr>
+              <a:tr h="468630">
+                <a:tc>
+                  <a:txBody>
+                    <a:bodyPr wrap="square"/>
+                    <a:lstStyle/>
+                    <a:p>
+                      <a:r>
+                        <a:rPr sz="1100" b="0">
+                          <a:solidFill>
+                            <a:srgbClr val="282828"/>
+                          </a:solidFill>
+                          <a:latin typeface="Arial"/>
+                        </a:rPr>
+                        <a:t>11</a:t>
+                      </a:r>
+                    </a:p>
+                  </a:txBody>
+                  <a:tcPr marL="54864" marR="54864" marT="18288" marB="18288">
+                    <a:solidFill>
+                      <a:srgbClr val="FFFFFF"/>
+                    </a:solidFill>
+                  </a:tcPr>
+                </a:tc>
+                <a:tc>
+                  <a:txBody>
+                    <a:bodyPr wrap="square"/>
+                    <a:lstStyle/>
+                    <a:p>
+                      <a:r>
+                        <a:rPr sz="1100" b="0">
+                          <a:solidFill>
+                            <a:srgbClr val="282828"/>
+                          </a:solidFill>
+                          <a:latin typeface="Arial"/>
+                        </a:rPr>
+                        <a:t>HiCAT mid-order Zernike sensor 2024 (arXiv 2409.03411)</a:t>
+                      </a:r>
+                    </a:p>
+                  </a:txBody>
+                  <a:tcPr marL="54864" marR="54864" marT="18288" marB="18288">
+                    <a:solidFill>
+                      <a:srgbClr val="FFFFFF"/>
+                    </a:solidFill>
+                  </a:tcPr>
+                </a:tc>
+                <a:tc>
+                  <a:txBody>
+                    <a:bodyPr wrap="square"/>
+                    <a:lstStyle/>
+                    <a:p>
+                      <a:r>
+                        <a:rPr sz="1100" b="0">
+                          <a:solidFill>
+                            <a:srgbClr val="282828"/>
+                          </a:solidFill>
+                          <a:latin typeface="Arial"/>
+                        </a:rPr>
+                        <a:t>Per-segment piston, tip and tilt by interaction matrix; a minimal step of 125 ± 31 pm at SNR 4; 14-bit DM quantization reads as steps in the response</a:t>
+                      </a:r>
+                    </a:p>
+                  </a:txBody>
+                  <a:tcPr marL="54864" marR="54864" marT="18288" marB="18288">
+                    <a:solidFill>
+                      <a:srgbClr val="FFFFFF"/>
+                    </a:solidFill>
+                  </a:tcPr>
+                </a:tc>
+              </a:tr>
+              <a:tr h="468630">
+                <a:tc>
+                  <a:txBody>
+                    <a:bodyPr wrap="square"/>
+                    <a:lstStyle/>
+                    <a:p>
+                      <a:r>
+                        <a:rPr sz="1100" b="0">
+                          <a:solidFill>
+                            <a:srgbClr val="282828"/>
+                          </a:solidFill>
+                          <a:latin typeface="Arial"/>
+                        </a:rPr>
+                        <a:t>12</a:t>
+                      </a:r>
+                    </a:p>
+                  </a:txBody>
+                  <a:tcPr marL="54864" marR="54864" marT="18288" marB="18288">
+                    <a:solidFill>
+                      <a:srgbClr val="ECF1F6"/>
+                    </a:solidFill>
+                  </a:tcPr>
+                </a:tc>
+                <a:tc>
+                  <a:txBody>
+                    <a:bodyPr wrap="square"/>
+                    <a:lstStyle/>
+                    <a:p>
+                      <a:r>
+                        <a:rPr sz="1100" b="0">
+                          <a:solidFill>
+                            <a:srgbClr val="282828"/>
+                          </a:solidFill>
+                          <a:latin typeface="Arial"/>
+                        </a:rPr>
+                        <a:t>Shi et al. 2015, SPIE 9605 (Roman low-order sensor)</a:t>
+                      </a:r>
+                    </a:p>
+                  </a:txBody>
+                  <a:tcPr marL="54864" marR="54864" marT="18288" marB="18288">
+                    <a:solidFill>
+                      <a:srgbClr val="ECF1F6"/>
+                    </a:solidFill>
+                  </a:tcPr>
+                </a:tc>
+                <a:tc>
+                  <a:txBody>
+                    <a:bodyPr wrap="square"/>
+                    <a:lstStyle/>
+                    <a:p>
+                      <a:r>
+                        <a:rPr sz="1100" b="0">
+                          <a:solidFill>
+                            <a:srgbClr val="282828"/>
+                          </a:solidFill>
+                          <a:latin typeface="Arial"/>
+                        </a:rPr>
+                        <a:t>A reflective dimple on the focal-plane mask senses Z2 to Z11 from the rejected starlight: the spatially filtered form of the same sensor</a:t>
+                      </a:r>
+                    </a:p>
+                  </a:txBody>
+                  <a:tcPr marL="54864" marR="54864" marT="18288" marB="18288">
+                    <a:solidFill>
+                      <a:srgbClr val="ECF1F6"/>
+                    </a:solidFill>
+                  </a:tcPr>
+                </a:tc>
+              </a:tr>
+            </a:tbl>
+          </a:graphicData>
+        </a:graphic>
+      </p:graphicFrame>
+      <p:sp>
+        <p:nvSpPr>
+          <p:cNvPr id="5" name="TextBox 4"/>
           <p:cNvSpPr txBox="1"/>
           <p:nvPr/>
         </p:nvSpPr>
         <p:spPr>
           <a:xfrm>
-            <a:off x="411480" y="1298448"/>
+            <a:off x="411480" y="4536567"/>
             <a:ext cx="11368735" cy="274320"/>
           </a:xfrm>
           <a:prstGeom prst="rect">
@@ -9442,132 +10175,13 @@
               </a:spcAft>
             </a:pPr>
             <a:r>
-              <a:rPr sz="1500" b="0">
-                <a:solidFill>
-                  <a:srgbClr val="282828"/>
+              <a:rPr sz="1050" b="0">
+                <a:solidFill>
+                  <a:srgbClr val="6E6E6E"/>
                 </a:solidFill>
                 <a:latin typeface="Arial"/>
               </a:rPr>
-              <a:t>•  The model must keep the pupil image in focus: the two spheres around the mask share one radius, and the script checks the no-mask round trip on every run.  The correction alone took the single-actuator floor from 744 to 67 pm and made the undetected grid case detectable.</a:t>
-            </a:r>
-          </a:p>
-          <a:p>
-            <a:pPr>
-              <a:spcAft>
-                <a:spcPts val="600"/>
-              </a:spcAft>
-            </a:pPr>
-            <a:r>
-              <a:rPr sz="1500" b="0">
-                <a:solidFill>
-                  <a:srgbClr val="282828"/>
-                </a:solidFill>
-                <a:latin typeface="Arial"/>
-              </a:rPr>
-              <a:t>•  The exact reading with a re-computed reference is the import that paid (paper 1): 26 pm from one frame on a 30 nm working surface, SNR 355 — with the sign fold settled once from four stepped frames and refined.  The plain stepped sign map misses 3% of pixels and can flip a single actuator's sign.</a:t>
-            </a:r>
-          </a:p>
-          <a:p>
-            <a:pPr>
-              <a:spcAft>
-                <a:spcPts val="600"/>
-              </a:spcAft>
-            </a:pPr>
-            <a:r>
-              <a:rPr sz="1500" b="0">
-                <a:solidFill>
-                  <a:srgbClr val="282828"/>
-                </a:solidFill>
-                <a:latin typeface="Arial"/>
-              </a:rPr>
-              <a:t>•  Calibrate with a measured response matrix, on the working surface: the sparse-grid measurement of every actuator's response (with the sensor's piston null carried) reads a single actuator on the flat at 0.994 with a 4 pm floor; measured on the working surface it gives the stepped reading 0.99 and 5 pm there and makes the linear one-frame reading usable (1.05, 23 pm).  The floors fall ten times; what remains is gain stability as the surface drifts (7% over 20 nm rms) and the one-frame exact readings' sign fold.</a:t>
-            </a:r>
-          </a:p>
-          <a:p>
-            <a:pPr>
-              <a:spcAft>
-                <a:spcPts val="600"/>
-              </a:spcAft>
-            </a:pPr>
-            <a:r>
-              <a:rPr sz="1500" b="0">
-                <a:solidFill>
-                  <a:srgbClr val="282828"/>
-                </a:solidFill>
-                <a:latin typeface="Arial"/>
-              </a:rPr>
-              <a:t>•  Sampling is settled, and a bias in the fit is fixed: camera pixels per actuator (the ray count) set the gain on a test actuator; sampling the single-site response pattern at the actuator center took that gain to 0.996 at 5 pixels per actuator.</a:t>
-            </a:r>
-          </a:p>
-          <a:p>
-            <a:pPr>
-              <a:spcAft>
-                <a:spcPts val="600"/>
-              </a:spcAft>
-            </a:pPr>
-            <a:r>
-              <a:rPr sz="1500" b="0">
-                <a:solidFill>
-                  <a:srgbClr val="282828"/>
-                </a:solidFill>
-                <a:latin typeface="Arial"/>
-              </a:rPr>
-              <a:t>•  Color and photons are not levers: the chromatic null was the defocus; 10¹⁴ photons per measurement reach 1 pm.  The budget is systematic error: the 25 to 60 pm floors and the gain's stability.</a:t>
-            </a:r>
-          </a:p>
-          <a:p>
-            <a:pPr>
-              <a:spcAft>
-                <a:spcPts val="600"/>
-              </a:spcAft>
-            </a:pPr>
-            <a:r>
-              <a:rPr sz="1500" b="0">
-                <a:solidFill>
-                  <a:srgbClr val="282828"/>
-                </a:solidFill>
-                <a:latin typeface="Arial"/>
-              </a:rPr>
-              <a:t>•  In closed loop the stepped reading has no fixed error: it holds a 2 pm-per-cycle walk to 3 pm from 7.5×10¹² photons per cycle and returns to zero after a step; the linear reading costs the same light but leaves a fine-scale error under a slow ramp; the one-frame exact reading runs away.</a:t>
-            </a:r>
-          </a:p>
-        </p:txBody>
-      </p:sp>
-      <p:sp>
-        <p:nvSpPr>
-          <p:cNvPr id="5" name="TextBox 4"/>
-          <p:cNvSpPr txBox="1"/>
-          <p:nvPr/>
-        </p:nvSpPr>
-        <p:spPr>
-          <a:xfrm>
-            <a:off x="411480" y="6881622"/>
-            <a:ext cx="11368735" cy="274320"/>
-          </a:xfrm>
-          <a:prstGeom prst="rect">
-            <a:avLst/>
-          </a:prstGeom>
-          <a:noFill/>
-        </p:spPr>
-        <p:txBody>
-          <a:bodyPr wrap="square">
-            <a:spAutoFit/>
-          </a:bodyPr>
-          <a:lstStyle/>
-          <a:p>
-            <a:pPr>
-              <a:spcAft>
-                <a:spcPts val="600"/>
-              </a:spcAft>
-            </a:pPr>
-            <a:r>
-              <a:rPr sz="1050" b="0">
-                <a:solidFill>
-                  <a:srgbClr val="6E6E6E"/>
-                </a:solidFill>
-                <a:latin typeface="Arial"/>
-              </a:rPr>
-              <a:t>Script and records: templates/40_benches/zwfs_dm96 (README S7/S8; runs/rec193, ng385, ng385s3, m2048, rec193full).</a:t>
+              <a:t>Also read: PIAA-ZWFS (2026, arXiv 2606.28136), lossless pupil apodization that closes the gap to the fundamental sensitivity limit by 10× — a design lever, not a model change.</a:t>
             </a:r>
           </a:p>
         </p:txBody>
@@ -9914,7 +10528,7 @@
                 </a:solidFill>
                 <a:latin typeface="Arial"/>
               </a:rPr>
-              <a:t>Conclusions: what to import next, in order</a:t>
+              <a:t>Conclusions: what the corrected model and the exact reading settled</a:t>
             </a:r>
           </a:p>
           <a:p>
@@ -9930,7 +10544,7 @@
                 </a:solidFill>
                 <a:latin typeface="Arial"/>
               </a:rPr>
-              <a:t>The JPL budget form, DM calibration through the sensor's own images, the vector sensor priced before it is built, and the interferometer's lever</a:t>
+              <a:t>Fixing the model was the bigger gain; a response matrix measured on the working surface takes the stepped reading to 5 pm; color and photons are not the limit</a:t>
             </a:r>
           </a:p>
         </p:txBody>
@@ -10013,7 +10627,7 @@
                 </a:solidFill>
                 <a:latin typeface="Arial"/>
               </a:rPr>
-              <a:t>•  The JPL budget form: a sensitivity factor per pixel from the measured fields — the quantity the working-surface effect on slide 10 is made of — predicts the photon-noise stage analytically, and four systematic terms (pupil calibration at ½, reference wave at 1, dimple depth, initial phase) become the rows of the error budget.</a:t>
+              <a:t>•  The model must keep the pupil image in focus: the two spheres around the mask share one radius, and the script checks the no-mask round trip on every run.  The correction alone took the single-actuator floor from 744 to 67 pm and made the undetected grid case detectable.</a:t>
             </a:r>
           </a:p>
           <a:p>
@@ -10029,7 +10643,7 @@
                 </a:solidFill>
                 <a:latin typeface="Arial"/>
               </a:rPr>
-              <a:t>•  The response matrix for the interferometer too: its calibration still uses a single-site response pattern, with the stencil bias fixed here (slide 9); the sparse-grid measured matrix is the calibration its reflective build should carry.  Model-matched DM calibration (actuator positions and gains through the sensor's own images) remains the lever for a real DM's geometry.</a:t>
+              <a:t>•  The exact reading with a re-computed reference is the import that paid (paper 1): 26 pm from one frame on a 30 nm working surface, SNR 355 — with the sign fold settled once from four stepped frames and refined.  The plain stepped sign map misses 3% of pixels and can flip a single actuator's sign.</a:t>
             </a:r>
           </a:p>
           <a:p>
@@ -10045,7 +10659,7 @@
                 </a:solidFill>
                 <a:latin typeface="Arial"/>
               </a:rPr>
-              <a:t>•  Color as a joint fit, not a combination: an equal-weight combination inherits a bad channel; a joint fit through the exact reading would use 700 to 780 nm for range and 632.8 nm for the calibration of record.</a:t>
+              <a:t>•  Calibrate with a measured response matrix, on the working surface: the sparse-grid measurement of every actuator's response (with the sensor's piston null carried) reads a single actuator on the flat at 0.994 with a 4 pm floor; measured on the working surface it gives the stepped reading 0.99 and 5 pm there and makes the linear one-frame reading usable (1.05, 23 pm).  The floors fall ten times; what remains is gain stability as the surface drifts (7% over 20 nm rms) and the one-frame exact readings' sign fold.</a:t>
             </a:r>
           </a:p>
           <a:p>
@@ -10061,7 +10675,7 @@
                 </a:solidFill>
                 <a:latin typeface="Arial"/>
               </a:rPr>
-              <a:t>•  Model the vector sensor before the metasurface is built: the exact two-image solution and its leakage terms (retardance offsets, splitter rotation) run on the engine's polarization machinery; the bench limits at Keck and SEAL were defocus and crosstalk between the two pupil images, both priceable here.</a:t>
+              <a:t>•  Sampling is settled, and a bias in the fit is fixed: camera pixels per actuator (the ray count) set the gain on a test actuator; sampling the single-site response pattern at the actuator center took that gain to 0.996 at 5 pixels per actuator.</a:t>
             </a:r>
           </a:p>
           <a:p>
@@ -10077,7 +10691,39 @@
                 </a:solidFill>
                 <a:latin typeface="Arial"/>
               </a:rPr>
-              <a:t>•  The interferometer, for balance: a PZT phase shift buys no model gain — its floors are geometric and color-independent — but on hardware an absolute phase scale and freedom from polarization systematics; the recommended form is a hybrid: polarization snapshot for the change measurements, a PZT on the reference flat as calibrator.  Its all-mirror (OAP) version is in build.</a:t>
+              <a:t>•  Color and photons are not levers: the chromatic null was the defocus; 10¹⁴ photons per measurement reach 1 pm.  The budget is systematic error: the 25 to 60 pm floors and the gain's stability.</a:t>
+            </a:r>
+          </a:p>
+          <a:p>
+            <a:pPr>
+              <a:spcAft>
+                <a:spcPts val="600"/>
+              </a:spcAft>
+            </a:pPr>
+            <a:r>
+              <a:rPr sz="1500" b="0">
+                <a:solidFill>
+                  <a:srgbClr val="282828"/>
+                </a:solidFill>
+                <a:latin typeface="Arial"/>
+              </a:rPr>
+              <a:t>•  In closed loop the stepped reading has no fixed error: it holds a 2 pm-per-cycle walk to 3 pm from 7.5×10¹² photons per cycle and returns to zero after a step; the linear reading costs the same light but leaves a fine-scale error under a slow ramp; the one-frame exact reading runs away.</a:t>
+            </a:r>
+          </a:p>
+          <a:p>
+            <a:pPr>
+              <a:spcAft>
+                <a:spcPts val="600"/>
+              </a:spcAft>
+            </a:pPr>
+            <a:r>
+              <a:rPr sz="1500" b="0">
+                <a:solidFill>
+                  <a:srgbClr val="282828"/>
+                </a:solidFill>
+                <a:latin typeface="Arial"/>
+              </a:rPr>
+              <a:t>•  The polarized dimple is the best reading on every line: two simultaneous frames, no fold, 3 pm held from 5.3×10¹² photons per cycle, and a calibration that stays within 2% out to 60 nm rms.</a:t>
             </a:r>
           </a:p>
         </p:txBody>
@@ -10090,7 +10736,7 @@
         </p:nvSpPr>
         <p:spPr>
           <a:xfrm>
-            <a:off x="411480" y="5998464"/>
+            <a:off x="411480" y="7517130"/>
             <a:ext cx="11368735" cy="274320"/>
           </a:xfrm>
           <a:prstGeom prst="rect">
@@ -10116,7 +10762,7 @@
                 </a:solidFill>
                 <a:latin typeface="Arial"/>
               </a:rPr>
-              <a:t>Segmented-mirror lessons carried forward: the sensor reads segment piston but not global piston, DM quantization appears as steps in the response, and piston is underestimated below 50 % Strehl (Keck) — all three enter the e5-class segmented gauges.</a:t>
+              <a:t>Script and records: templates/40_benches/zwfs_dm96 (README S7/S8; runs/rec193, ng385, ng385s3, m2048, rec193full).</a:t>
             </a:r>
           </a:p>
         </p:txBody>
@@ -10147,63 +10793,6 @@
         </p:nvSpPr>
         <p:spPr>
           <a:xfrm>
-            <a:off x="822960" y="2743200"/>
-            <a:ext cx="10545775" cy="1280160"/>
-          </a:xfrm>
-          <a:prstGeom prst="rect">
-            <a:avLst/>
-          </a:prstGeom>
-          <a:noFill/>
-        </p:spPr>
-        <p:txBody>
-          <a:bodyPr wrap="square">
-            <a:spAutoFit/>
-          </a:bodyPr>
-          <a:lstStyle/>
-          <a:p>
-            <a:pPr algn="ctr">
-              <a:spcAft>
-                <a:spcPts val="400"/>
-              </a:spcAft>
-            </a:pPr>
-            <a:r>
-              <a:rPr sz="4000" b="1">
-                <a:solidFill>
-                  <a:srgbClr val="1F4E79"/>
-                </a:solidFill>
-                <a:latin typeface="Arial"/>
-              </a:rPr>
-              <a:t>Backup</a:t>
-            </a:r>
-          </a:p>
-        </p:txBody>
-      </p:sp>
-    </p:spTree>
-  </p:cSld>
-  <p:clrMapOvr>
-    <a:masterClrMapping/>
-  </p:clrMapOvr>
-</p:sld>
-</file>
-
-<file path=ppt/slides/slide22.xml><?xml version="1.0" encoding="utf-8"?>
-<p:sld xmlns:a="http://schemas.openxmlformats.org/drawingml/2006/main" xmlns:p="http://schemas.openxmlformats.org/presentationml/2006/main" xmlns:r="http://schemas.openxmlformats.org/officeDocument/2006/relationships">
-  <p:cSld>
-    <p:spTree>
-      <p:nvGrpSpPr>
-        <p:cNvPr id="1" name=""/>
-        <p:cNvGrpSpPr/>
-        <p:nvPr/>
-      </p:nvGrpSpPr>
-      <p:grpSpPr/>
-      <p:sp>
-        <p:nvSpPr>
-          <p:cNvPr id="2" name="TextBox 1"/>
-          <p:cNvSpPr txBox="1"/>
-          <p:nvPr/>
-        </p:nvSpPr>
-        <p:spPr>
-          <a:xfrm>
             <a:off x="411480" y="201168"/>
             <a:ext cx="11368735" cy="914400"/>
           </a:xfrm>
@@ -10230,7 +10819,7 @@
                 </a:solidFill>
                 <a:latin typeface="Arial"/>
               </a:rPr>
-              <a:t>Before the correction: the first poke and color results</a:t>
+              <a:t>Conclusions: what to import next, in order</a:t>
             </a:r>
           </a:p>
           <a:p>
@@ -10246,7 +10835,7 @@
                 </a:solidFill>
                 <a:latin typeface="Arial"/>
               </a:rPr>
-              <a:t>Kept for the record; every number on this slide is from the out-of-focus model</a:t>
+              <a:t>The JPL budget form, DM calibration through the sensor's own images, the vector sensor priced before it is built, and the interferometer's lever</a:t>
             </a:r>
           </a:p>
         </p:txBody>
@@ -10295,6 +10884,322 @@
           </a:p>
         </p:txBody>
       </p:sp>
+      <p:sp>
+        <p:nvSpPr>
+          <p:cNvPr id="4" name="TextBox 3"/>
+          <p:cNvSpPr txBox="1"/>
+          <p:nvPr/>
+        </p:nvSpPr>
+        <p:spPr>
+          <a:xfrm>
+            <a:off x="411480" y="1298448"/>
+            <a:ext cx="11368735" cy="274320"/>
+          </a:xfrm>
+          <a:prstGeom prst="rect">
+            <a:avLst/>
+          </a:prstGeom>
+          <a:noFill/>
+        </p:spPr>
+        <p:txBody>
+          <a:bodyPr wrap="square">
+            <a:spAutoFit/>
+          </a:bodyPr>
+          <a:lstStyle/>
+          <a:p>
+            <a:pPr>
+              <a:spcAft>
+                <a:spcPts val="600"/>
+              </a:spcAft>
+            </a:pPr>
+            <a:r>
+              <a:rPr sz="1500" b="0">
+                <a:solidFill>
+                  <a:srgbClr val="282828"/>
+                </a:solidFill>
+                <a:latin typeface="Arial"/>
+              </a:rPr>
+              <a:t>•  The JPL budget form: a sensitivity factor per pixel from the measured fields — the quantity the working-surface effect on slide 10 is made of — predicts the photon-noise stage analytically, and four systematic terms (pupil calibration at ½, reference wave at 1, dimple depth, initial phase) become the rows of the error budget.</a:t>
+            </a:r>
+          </a:p>
+          <a:p>
+            <a:pPr>
+              <a:spcAft>
+                <a:spcPts val="600"/>
+              </a:spcAft>
+            </a:pPr>
+            <a:r>
+              <a:rPr sz="1500" b="0">
+                <a:solidFill>
+                  <a:srgbClr val="282828"/>
+                </a:solidFill>
+                <a:latin typeface="Arial"/>
+              </a:rPr>
+              <a:t>•  The response matrix for the interferometer too: its calibration still uses a single-site response pattern, with the stencil bias fixed here (slide 9); the sparse-grid measured matrix is the calibration its reflective build should carry.  Model-matched DM calibration (actuator positions and gains through the sensor's own images) remains the lever for a real DM's geometry.</a:t>
+            </a:r>
+          </a:p>
+          <a:p>
+            <a:pPr>
+              <a:spcAft>
+                <a:spcPts val="600"/>
+              </a:spcAft>
+            </a:pPr>
+            <a:r>
+              <a:rPr sz="1500" b="0">
+                <a:solidFill>
+                  <a:srgbClr val="282828"/>
+                </a:solidFill>
+                <a:latin typeface="Arial"/>
+              </a:rPr>
+              <a:t>•  Color as a joint fit, not a combination: an equal-weight combination inherits a bad channel; a joint fit through the exact reading would use 700 to 780 nm for range and 632.8 nm for the calibration of record.</a:t>
+            </a:r>
+          </a:p>
+          <a:p>
+            <a:pPr>
+              <a:spcAft>
+                <a:spcPts val="600"/>
+              </a:spcAft>
+            </a:pPr>
+            <a:r>
+              <a:rPr sz="1500" b="0">
+                <a:solidFill>
+                  <a:srgbClr val="282828"/>
+                </a:solidFill>
+                <a:latin typeface="Arial"/>
+              </a:rPr>
+              <a:t>•  Model the vector sensor before the metasurface is built: the exact two-image solution and its leakage terms (retardance offsets, splitter rotation) run on the engine's polarization machinery; the bench limits at Keck and SEAL were defocus and crosstalk between the two pupil images, both priceable here.</a:t>
+            </a:r>
+          </a:p>
+          <a:p>
+            <a:pPr>
+              <a:spcAft>
+                <a:spcPts val="600"/>
+              </a:spcAft>
+            </a:pPr>
+            <a:r>
+              <a:rPr sz="1500" b="0">
+                <a:solidFill>
+                  <a:srgbClr val="282828"/>
+                </a:solidFill>
+                <a:latin typeface="Arial"/>
+              </a:rPr>
+              <a:t>•  The interferometer, for balance: a PZT phase shift buys no model gain — its floors are geometric and color-independent — but on hardware an absolute phase scale and freedom from polarization systematics; the recommended form is a hybrid: polarization snapshot for the change measurements, a PZT on the reference flat as calibrator.  Its all-mirror (OAP) version is in build.</a:t>
+            </a:r>
+          </a:p>
+        </p:txBody>
+      </p:sp>
+      <p:sp>
+        <p:nvSpPr>
+          <p:cNvPr id="5" name="TextBox 4"/>
+          <p:cNvSpPr txBox="1"/>
+          <p:nvPr/>
+        </p:nvSpPr>
+        <p:spPr>
+          <a:xfrm>
+            <a:off x="411480" y="5998464"/>
+            <a:ext cx="11368735" cy="274320"/>
+          </a:xfrm>
+          <a:prstGeom prst="rect">
+            <a:avLst/>
+          </a:prstGeom>
+          <a:noFill/>
+        </p:spPr>
+        <p:txBody>
+          <a:bodyPr wrap="square">
+            <a:spAutoFit/>
+          </a:bodyPr>
+          <a:lstStyle/>
+          <a:p>
+            <a:pPr>
+              <a:spcAft>
+                <a:spcPts val="600"/>
+              </a:spcAft>
+            </a:pPr>
+            <a:r>
+              <a:rPr sz="1050" b="0">
+                <a:solidFill>
+                  <a:srgbClr val="6E6E6E"/>
+                </a:solidFill>
+                <a:latin typeface="Arial"/>
+              </a:rPr>
+              <a:t>Segmented-mirror lessons carried forward: the sensor reads segment piston but not global piston, DM quantization appears as steps in the response, and piston is underestimated below 50 % Strehl (Keck) — all three enter the e5-class segmented gauges.</a:t>
+            </a:r>
+          </a:p>
+        </p:txBody>
+      </p:sp>
+    </p:spTree>
+  </p:cSld>
+  <p:clrMapOvr>
+    <a:masterClrMapping/>
+  </p:clrMapOvr>
+</p:sld>
+</file>
+
+<file path=ppt/slides/slide22.xml><?xml version="1.0" encoding="utf-8"?>
+<p:sld xmlns:a="http://schemas.openxmlformats.org/drawingml/2006/main" xmlns:p="http://schemas.openxmlformats.org/presentationml/2006/main" xmlns:r="http://schemas.openxmlformats.org/officeDocument/2006/relationships">
+  <p:cSld>
+    <p:spTree>
+      <p:nvGrpSpPr>
+        <p:cNvPr id="1" name=""/>
+        <p:cNvGrpSpPr/>
+        <p:nvPr/>
+      </p:nvGrpSpPr>
+      <p:grpSpPr/>
+      <p:sp>
+        <p:nvSpPr>
+          <p:cNvPr id="2" name="TextBox 1"/>
+          <p:cNvSpPr txBox="1"/>
+          <p:nvPr/>
+        </p:nvSpPr>
+        <p:spPr>
+          <a:xfrm>
+            <a:off x="822960" y="2743200"/>
+            <a:ext cx="10545775" cy="1280160"/>
+          </a:xfrm>
+          <a:prstGeom prst="rect">
+            <a:avLst/>
+          </a:prstGeom>
+          <a:noFill/>
+        </p:spPr>
+        <p:txBody>
+          <a:bodyPr wrap="square">
+            <a:spAutoFit/>
+          </a:bodyPr>
+          <a:lstStyle/>
+          <a:p>
+            <a:pPr algn="ctr">
+              <a:spcAft>
+                <a:spcPts val="400"/>
+              </a:spcAft>
+            </a:pPr>
+            <a:r>
+              <a:rPr sz="4000" b="1">
+                <a:solidFill>
+                  <a:srgbClr val="1F4E79"/>
+                </a:solidFill>
+                <a:latin typeface="Arial"/>
+              </a:rPr>
+              <a:t>Backup</a:t>
+            </a:r>
+          </a:p>
+        </p:txBody>
+      </p:sp>
+    </p:spTree>
+  </p:cSld>
+  <p:clrMapOvr>
+    <a:masterClrMapping/>
+  </p:clrMapOvr>
+</p:sld>
+</file>
+
+<file path=ppt/slides/slide23.xml><?xml version="1.0" encoding="utf-8"?>
+<p:sld xmlns:a="http://schemas.openxmlformats.org/drawingml/2006/main" xmlns:p="http://schemas.openxmlformats.org/presentationml/2006/main" xmlns:r="http://schemas.openxmlformats.org/officeDocument/2006/relationships">
+  <p:cSld>
+    <p:spTree>
+      <p:nvGrpSpPr>
+        <p:cNvPr id="1" name=""/>
+        <p:cNvGrpSpPr/>
+        <p:nvPr/>
+      </p:nvGrpSpPr>
+      <p:grpSpPr/>
+      <p:sp>
+        <p:nvSpPr>
+          <p:cNvPr id="2" name="TextBox 1"/>
+          <p:cNvSpPr txBox="1"/>
+          <p:nvPr/>
+        </p:nvSpPr>
+        <p:spPr>
+          <a:xfrm>
+            <a:off x="411480" y="201168"/>
+            <a:ext cx="11368735" cy="914400"/>
+          </a:xfrm>
+          <a:prstGeom prst="rect">
+            <a:avLst/>
+          </a:prstGeom>
+          <a:noFill/>
+        </p:spPr>
+        <p:txBody>
+          <a:bodyPr wrap="square">
+            <a:spAutoFit/>
+          </a:bodyPr>
+          <a:lstStyle/>
+          <a:p>
+            <a:pPr>
+              <a:spcAft>
+                <a:spcPts val="400"/>
+              </a:spcAft>
+            </a:pPr>
+            <a:r>
+              <a:rPr sz="2400" b="1">
+                <a:solidFill>
+                  <a:srgbClr val="1F4E79"/>
+                </a:solidFill>
+                <a:latin typeface="Arial"/>
+              </a:rPr>
+              <a:t>Before the correction: the first poke and color results</a:t>
+            </a:r>
+          </a:p>
+          <a:p>
+            <a:pPr>
+              <a:spcAft>
+                <a:spcPts val="0"/>
+              </a:spcAft>
+            </a:pPr>
+            <a:r>
+              <a:rPr sz="1250" b="0">
+                <a:solidFill>
+                  <a:srgbClr val="6E6E6E"/>
+                </a:solidFill>
+                <a:latin typeface="Arial"/>
+              </a:rPr>
+              <a:t>Kept for the record; every number on this slide is from the out-of-focus model</a:t>
+            </a:r>
+          </a:p>
+        </p:txBody>
+      </p:sp>
+      <p:sp>
+        <p:nvSpPr>
+          <p:cNvPr id="3" name="Rectangle 2"/>
+          <p:cNvSpPr/>
+          <p:nvPr/>
+        </p:nvSpPr>
+        <p:spPr>
+          <a:xfrm>
+            <a:off x="411480" y="1133856"/>
+            <a:ext cx="11368735" cy="20320"/>
+          </a:xfrm>
+          <a:prstGeom prst="rect">
+            <a:avLst/>
+          </a:prstGeom>
+          <a:solidFill>
+            <a:srgbClr val="B8C6D4"/>
+          </a:solidFill>
+          <a:ln>
+            <a:noFill/>
+          </a:ln>
+          <a:effectLst/>
+        </p:spPr>
+        <p:style>
+          <a:lnRef idx="1">
+            <a:schemeClr val="accent1"/>
+          </a:lnRef>
+          <a:fillRef idx="3">
+            <a:schemeClr val="accent1"/>
+          </a:fillRef>
+          <a:effectRef idx="2">
+            <a:schemeClr val="accent1"/>
+          </a:effectRef>
+          <a:fontRef idx="minor">
+            <a:schemeClr val="lt1"/>
+          </a:fontRef>
+        </p:style>
+        <p:txBody>
+          <a:bodyPr rtlCol="0" anchor="ctr"/>
+          <a:lstStyle/>
+          <a:p>
+            <a:pPr algn="ctr"/>
+          </a:p>
+        </p:txBody>
+      </p:sp>
       <p:pic>
         <p:nvPicPr>
           <p:cNvPr id="4" name="Picture 3" descr="zwfs_poke_triptych.png"/>
@@ -10523,7 +11428,7 @@
 </p:sld>
 </file>
 
-<file path=ppt/slides/slide23.xml><?xml version="1.0" encoding="utf-8"?>
+<file path=ppt/slides/slide24.xml><?xml version="1.0" encoding="utf-8"?>
 <p:sld xmlns:a="http://schemas.openxmlformats.org/drawingml/2006/main" xmlns:p="http://schemas.openxmlformats.org/presentationml/2006/main" xmlns:r="http://schemas.openxmlformats.org/officeDocument/2006/relationships">
   <p:cSld>
     <p:spTree>
